--- a/docs/manual-reception.pptx
+++ b/docs/manual-reception.pptx
@@ -13,9 +13,10 @@
     <p:sldId id="261" r:id="rId7"/>
     <p:sldId id="262" r:id="rId8"/>
     <p:sldId id="263" r:id="rId9"/>
+    <p:sldId id="264" r:id="rId10"/>
   </p:sldIdLst>
   <p:notesMasterIdLst>
-    <p:notesMasterId r:id="rId10"/>
+    <p:notesMasterId r:id="rId11"/>
   </p:notesMasterIdLst>
   <p:sldSz cx="7562088" cy="10689336"/>
   <p:notesSz cx="10689336" cy="7562088"/>
@@ -1149,6 +1150,94 @@
             <a:fld id="{F7021451-1387-4CA6-816F-3879F97B5CBC}" type="slidenum">
               <a:rPr lang="en-US"/>
               <a:t>8</a:t>
+            </a:fld>
+            <a:endParaRPr lang="en-US"/>
+          </a:p>
+        </p:txBody>
+      </p:sp>
+    </p:spTree>
+    <p:extLst>
+      <p:ext uri="{BB962C8B-B14F-4D97-AF65-F5344CB8AC3E}">
+        <p14:creationId xmlns:p14="http://schemas.microsoft.com/office/powerpoint/2010/main" val="1024086991"/>
+      </p:ext>
+    </p:extLst>
+  </p:cSld>
+  <p:clrMapOvr>
+    <a:masterClrMapping/>
+  </p:clrMapOvr>
+</p:notes>
+</file>
+
+<file path=ppt/notesSlides/notesSlide9.xml><?xml version="1.0" encoding="utf-8"?>
+<p:notes xmlns:a="http://schemas.openxmlformats.org/drawingml/2006/main" xmlns:r="http://schemas.openxmlformats.org/officeDocument/2006/relationships" xmlns:p="http://schemas.openxmlformats.org/presentationml/2006/main">
+  <p:cSld>
+    <p:spTree>
+      <p:nvGrpSpPr>
+        <p:cNvPr id="1" name=""/>
+        <p:cNvGrpSpPr/>
+        <p:nvPr/>
+      </p:nvGrpSpPr>
+      <p:grpSpPr>
+        <a:xfrm>
+          <a:off x="0" y="0"/>
+          <a:ext cx="0" cy="0"/>
+          <a:chOff x="0" y="0"/>
+          <a:chExt cx="0" cy="0"/>
+        </a:xfrm>
+      </p:grpSpPr>
+      <p:sp>
+        <p:nvSpPr>
+          <p:cNvPr id="2" name="Slide Image Placeholder 1"/>
+          <p:cNvSpPr>
+            <a:spLocks noGrp="1" noRot="1" noChangeAspect="1"/>
+          </p:cNvSpPr>
+          <p:nvPr>
+            <p:ph type="sldImg"/>
+          </p:nvPr>
+        </p:nvSpPr>
+        <p:spPr/>
+      </p:sp>
+      <p:sp>
+        <p:nvSpPr>
+          <p:cNvPr id="3" name="Notes Placeholder 2"/>
+          <p:cNvSpPr>
+            <a:spLocks noGrp="1"/>
+          </p:cNvSpPr>
+          <p:nvPr>
+            <p:ph type="body" idx="1"/>
+          </p:nvPr>
+        </p:nvSpPr>
+        <p:spPr/>
+        <p:txBody>
+          <a:bodyPr/>
+          <a:lstStyle/>
+          <a:p>
+            <a:r>
+              <a:rPr lang="en-US" dirty="0"/>
+              <a:t/>
+            </a:r>
+            <a:endParaRPr lang="en-US" dirty="0"/>
+          </a:p>
+        </p:txBody>
+      </p:sp>
+      <p:sp>
+        <p:nvSpPr>
+          <p:cNvPr id="4" name="Slide Number Placeholder 3"/>
+          <p:cNvSpPr>
+            <a:spLocks noGrp="1"/>
+          </p:cNvSpPr>
+          <p:nvPr>
+            <p:ph type="sldNum" sz="quarter" idx="10"/>
+          </p:nvPr>
+        </p:nvSpPr>
+        <p:spPr/>
+        <p:txBody>
+          <a:bodyPr/>
+          <a:lstStyle/>
+          <a:p>
+            <a:fld id="{F7021451-1387-4CA6-816F-3879F97B5CBC}" type="slidenum">
+              <a:rPr lang="en-US"/>
+              <a:t>9</a:t>
             </a:fld>
             <a:endParaRPr lang="en-US"/>
           </a:p>
@@ -1651,7 +1740,7 @@
                 <a:ea typeface="Calibri" pitchFamily="34" charset="-122"/>
                 <a:cs typeface="Calibri" pitchFamily="34" charset="-120"/>
               </a:rPr>
-              <a:t>A4縦で印刷できます。スクリーンショットの枠は、実際の画面を撮って貼り替えてください。</a:t>
+              <a:t>A4縦で印刷できます。画面例はテスト環境のもので、実際の表示とは名称や件数が異なる場合があります。</a:t>
             </a:r>
             <a:endParaRPr lang="en-US" sz="950" dirty="0"/>
           </a:p>
@@ -2464,43 +2553,40 @@
           </a:p>
         </p:txBody>
       </p:sp>
-      <p:sp>
-        <p:nvSpPr>
-          <p:cNvPr id="20" name="Shape 18"/>
-          <p:cNvSpPr/>
-          <p:nvPr/>
-        </p:nvSpPr>
-        <p:spPr>
-          <a:xfrm>
-            <a:off x="566928" y="4744720"/>
-            <a:ext cx="6428232" cy="2606040"/>
-          </a:xfrm>
-          <a:prstGeom prst="roundRect">
-            <a:avLst>
-              <a:gd name="adj" fmla="val 1754"/>
-            </a:avLst>
-          </a:prstGeom>
-          <a:solidFill>
-            <a:srgbClr val="F7F7F7"/>
-          </a:solidFill>
-          <a:ln w="12700">
-            <a:solidFill>
-              <a:srgbClr val="D8D8D8"/>
-            </a:solidFill>
-            <a:prstDash val="dash"/>
-          </a:ln>
-        </p:spPr>
-      </p:sp>
-      <p:sp>
-        <p:nvSpPr>
-          <p:cNvPr id="21" name="Text 19"/>
-          <p:cNvSpPr txBox="1"/>
-          <p:nvPr/>
-        </p:nvSpPr>
-        <p:spPr>
-          <a:xfrm>
-            <a:off x="749808" y="5128768"/>
-            <a:ext cx="6062472" cy="274320"/>
+      <p:pic>
+        <p:nvPicPr>
+          <p:cNvPr id="20" name="Image 0" descr="C:\Users\sato\Desktop\enque\docs\images\p-login.png">    </p:cNvPr>
+          <p:cNvPicPr>
+            <a:picLocks noChangeAspect="1"/>
+          </p:cNvPicPr>
+          <p:nvPr/>
+        </p:nvPicPr>
+        <p:blipFill>
+          <a:blip r:embed="rId1"/>
+          <a:stretch>
+            <a:fillRect/>
+          </a:stretch>
+        </p:blipFill>
+        <p:spPr>
+          <a:xfrm>
+            <a:off x="1546727" y="4744720"/>
+            <a:ext cx="4468633" cy="3474720"/>
+          </a:xfrm>
+          <a:prstGeom prst="rect">
+            <a:avLst/>
+          </a:prstGeom>
+        </p:spPr>
+      </p:pic>
+      <p:sp>
+        <p:nvSpPr>
+          <p:cNvPr id="21" name="Text 18"/>
+          <p:cNvSpPr txBox="1"/>
+          <p:nvPr/>
+        </p:nvSpPr>
+        <p:spPr>
+          <a:xfrm>
+            <a:off x="566928" y="8274304"/>
+            <a:ext cx="6428232" cy="274320"/>
           </a:xfrm>
           <a:prstGeom prst="rect">
             <a:avLst/>
@@ -2516,7 +2602,7 @@
               <a:buNone/>
             </a:pPr>
             <a:r>
-              <a:rPr lang="en-US" sz="1100" b="1" dirty="0">
+              <a:rPr lang="en-US" sz="950" dirty="0">
                 <a:solidFill>
                   <a:srgbClr val="6B6B6B"/>
                 </a:solidFill>
@@ -2524,57 +2610,15 @@
                 <a:ea typeface="Calibri" pitchFamily="34" charset="-122"/>
                 <a:cs typeface="Calibri" pitchFamily="34" charset="-120"/>
               </a:rPr>
-              <a:t>［ スクリーンショット ］ ここに貼り付けてください</a:t>
-            </a:r>
-            <a:endParaRPr lang="en-US" sz="1100" dirty="0"/>
-          </a:p>
-        </p:txBody>
-      </p:sp>
-      <p:sp>
-        <p:nvSpPr>
-          <p:cNvPr id="22" name="Text 20"/>
-          <p:cNvSpPr txBox="1"/>
-          <p:nvPr/>
-        </p:nvSpPr>
-        <p:spPr>
-          <a:xfrm>
-            <a:off x="841248" y="5494528"/>
-            <a:ext cx="5879592" cy="731520"/>
-          </a:xfrm>
-          <a:prstGeom prst="rect">
-            <a:avLst/>
-          </a:prstGeom>
-          <a:noFill/>
-          <a:ln/>
-        </p:spPr>
-        <p:txBody>
-          <a:bodyPr wrap="square" lIns="0" tIns="0" rIns="0" bIns="0" rtlCol="0" anchor="t"/>
-          <a:lstStyle/>
-          <a:p>
-            <a:pPr algn="ctr" indent="0" marL="0">
-              <a:lnSpc>
-                <a:spcPct val="120000"/>
-              </a:lnSpc>
-              <a:buNone/>
-            </a:pPr>
-            <a:r>
-              <a:rPr lang="en-US" sz="1050" dirty="0">
-                <a:solidFill>
-                  <a:srgbClr val="222222"/>
-                </a:solidFill>
-                <a:latin typeface="Calibri" pitchFamily="34" charset="0"/>
-                <a:ea typeface="Calibri" pitchFamily="34" charset="-122"/>
-                <a:cs typeface="Calibri" pitchFamily="34" charset="-120"/>
-              </a:rPr>
               <a:t>管理画面のログイン画面（スマートフォンの画面）。ユーザー名・パスワードの入力欄が見えるもの。</a:t>
             </a:r>
-            <a:endParaRPr lang="en-US" sz="1050" dirty="0"/>
-          </a:p>
-        </p:txBody>
-      </p:sp>
-      <p:sp>
-        <p:nvSpPr>
-          <p:cNvPr id="23" name="Text 21"/>
+            <a:endParaRPr lang="en-US" sz="950" dirty="0"/>
+          </a:p>
+        </p:txBody>
+      </p:sp>
+      <p:sp>
+        <p:nvSpPr>
+          <p:cNvPr id="22" name="Text 19"/>
           <p:cNvSpPr txBox="1"/>
           <p:nvPr/>
         </p:nvSpPr>
@@ -3217,43 +3261,40 @@
           </a:p>
         </p:txBody>
       </p:sp>
-      <p:sp>
-        <p:nvSpPr>
-          <p:cNvPr id="16" name="Shape 14"/>
-          <p:cNvSpPr/>
-          <p:nvPr/>
-        </p:nvSpPr>
-        <p:spPr>
-          <a:xfrm>
-            <a:off x="566928" y="3550539"/>
-            <a:ext cx="6428232" cy="2606040"/>
-          </a:xfrm>
-          <a:prstGeom prst="roundRect">
-            <a:avLst>
-              <a:gd name="adj" fmla="val 1754"/>
-            </a:avLst>
-          </a:prstGeom>
-          <a:solidFill>
-            <a:srgbClr val="F7F7F7"/>
-          </a:solidFill>
-          <a:ln w="12700">
-            <a:solidFill>
-              <a:srgbClr val="D8D8D8"/>
-            </a:solidFill>
-            <a:prstDash val="dash"/>
-          </a:ln>
-        </p:spPr>
-      </p:sp>
-      <p:sp>
-        <p:nvSpPr>
-          <p:cNvPr id="17" name="Text 15"/>
-          <p:cNvSpPr txBox="1"/>
-          <p:nvPr/>
-        </p:nvSpPr>
-        <p:spPr>
-          <a:xfrm>
-            <a:off x="749808" y="3934587"/>
-            <a:ext cx="6062472" cy="274320"/>
+      <p:pic>
+        <p:nvPicPr>
+          <p:cNvPr id="16" name="Image 0" descr="C:\Users\sato\Desktop\enque\docs\images\p-visitor-done.png">    </p:cNvPr>
+          <p:cNvPicPr>
+            <a:picLocks noChangeAspect="1"/>
+          </p:cNvPicPr>
+          <p:nvPr/>
+        </p:nvPicPr>
+        <p:blipFill>
+          <a:blip r:embed="rId1"/>
+          <a:stretch>
+            <a:fillRect/>
+          </a:stretch>
+        </p:blipFill>
+        <p:spPr>
+          <a:xfrm>
+            <a:off x="2233665" y="3550539"/>
+            <a:ext cx="3094759" cy="3474720"/>
+          </a:xfrm>
+          <a:prstGeom prst="rect">
+            <a:avLst/>
+          </a:prstGeom>
+        </p:spPr>
+      </p:pic>
+      <p:sp>
+        <p:nvSpPr>
+          <p:cNvPr id="17" name="Text 14"/>
+          <p:cNvSpPr txBox="1"/>
+          <p:nvPr/>
+        </p:nvSpPr>
+        <p:spPr>
+          <a:xfrm>
+            <a:off x="566928" y="7080123"/>
+            <a:ext cx="6428232" cy="274320"/>
           </a:xfrm>
           <a:prstGeom prst="rect">
             <a:avLst/>
@@ -3269,7 +3310,7 @@
               <a:buNone/>
             </a:pPr>
             <a:r>
-              <a:rPr lang="en-US" sz="1100" b="1" dirty="0">
+              <a:rPr lang="en-US" sz="950" dirty="0">
                 <a:solidFill>
                   <a:srgbClr val="6B6B6B"/>
                 </a:solidFill>
@@ -3277,57 +3318,15 @@
                 <a:ea typeface="Calibri" pitchFamily="34" charset="-122"/>
                 <a:cs typeface="Calibri" pitchFamily="34" charset="-120"/>
               </a:rPr>
-              <a:t>［ スクリーンショット ］ ここに貼り付けてください</a:t>
-            </a:r>
-            <a:endParaRPr lang="en-US" sz="1100" dirty="0"/>
-          </a:p>
-        </p:txBody>
-      </p:sp>
-      <p:sp>
-        <p:nvSpPr>
-          <p:cNvPr id="18" name="Text 16"/>
-          <p:cNvSpPr txBox="1"/>
-          <p:nvPr/>
-        </p:nvSpPr>
-        <p:spPr>
-          <a:xfrm>
-            <a:off x="841248" y="4300347"/>
-            <a:ext cx="5879592" cy="731520"/>
-          </a:xfrm>
-          <a:prstGeom prst="rect">
-            <a:avLst/>
-          </a:prstGeom>
-          <a:noFill/>
-          <a:ln/>
-        </p:spPr>
-        <p:txBody>
-          <a:bodyPr wrap="square" lIns="0" tIns="0" rIns="0" bIns="0" rtlCol="0" anchor="t"/>
-          <a:lstStyle/>
-          <a:p>
-            <a:pPr algn="ctr" indent="0" marL="0">
-              <a:lnSpc>
-                <a:spcPct val="120000"/>
-              </a:lnSpc>
-              <a:buNone/>
-            </a:pPr>
-            <a:r>
-              <a:rPr lang="en-US" sz="1050" dirty="0">
-                <a:solidFill>
-                  <a:srgbClr val="222222"/>
-                </a:solidFill>
-                <a:latin typeface="Calibri" pitchFamily="34" charset="0"/>
-                <a:ea typeface="Calibri" pitchFamily="34" charset="-122"/>
-                <a:cs typeface="Calibri" pitchFamily="34" charset="-120"/>
-              </a:rPr>
               <a:t>来場者の「回答済み画面」。大きな交換コードとQRコードが写っているもの。</a:t>
             </a:r>
-            <a:endParaRPr lang="en-US" sz="1050" dirty="0"/>
-          </a:p>
-        </p:txBody>
-      </p:sp>
-      <p:sp>
-        <p:nvSpPr>
-          <p:cNvPr id="19" name="Text 17"/>
+            <a:endParaRPr lang="en-US" sz="950" dirty="0"/>
+          </a:p>
+        </p:txBody>
+      </p:sp>
+      <p:sp>
+        <p:nvSpPr>
+          <p:cNvPr id="18" name="Text 15"/>
           <p:cNvSpPr txBox="1"/>
           <p:nvPr/>
         </p:nvSpPr>
@@ -4587,115 +4586,7 @@
       </p:sp>
       <p:sp>
         <p:nvSpPr>
-          <p:cNvPr id="34" name="Shape 32"/>
-          <p:cNvSpPr/>
-          <p:nvPr/>
-        </p:nvSpPr>
-        <p:spPr>
-          <a:xfrm>
-            <a:off x="566928" y="7058978"/>
-            <a:ext cx="6428232" cy="2606040"/>
-          </a:xfrm>
-          <a:prstGeom prst="roundRect">
-            <a:avLst>
-              <a:gd name="adj" fmla="val 1754"/>
-            </a:avLst>
-          </a:prstGeom>
-          <a:solidFill>
-            <a:srgbClr val="F7F7F7"/>
-          </a:solidFill>
-          <a:ln w="12700">
-            <a:solidFill>
-              <a:srgbClr val="D8D8D8"/>
-            </a:solidFill>
-            <a:prstDash val="dash"/>
-          </a:ln>
-        </p:spPr>
-      </p:sp>
-      <p:sp>
-        <p:nvSpPr>
-          <p:cNvPr id="35" name="Text 33"/>
-          <p:cNvSpPr txBox="1"/>
-          <p:nvPr/>
-        </p:nvSpPr>
-        <p:spPr>
-          <a:xfrm>
-            <a:off x="749808" y="7443026"/>
-            <a:ext cx="6062472" cy="274320"/>
-          </a:xfrm>
-          <a:prstGeom prst="rect">
-            <a:avLst/>
-          </a:prstGeom>
-          <a:noFill/>
-          <a:ln/>
-        </p:spPr>
-        <p:txBody>
-          <a:bodyPr wrap="square" lIns="0" tIns="0" rIns="0" bIns="0" rtlCol="0" anchor="ctr"/>
-          <a:lstStyle/>
-          <a:p>
-            <a:pPr algn="ctr" indent="0" marL="0">
-              <a:buNone/>
-            </a:pPr>
-            <a:r>
-              <a:rPr lang="en-US" sz="1100" b="1" dirty="0">
-                <a:solidFill>
-                  <a:srgbClr val="6B6B6B"/>
-                </a:solidFill>
-                <a:latin typeface="Calibri" pitchFamily="34" charset="0"/>
-                <a:ea typeface="Calibri" pitchFamily="34" charset="-122"/>
-                <a:cs typeface="Calibri" pitchFamily="34" charset="-120"/>
-              </a:rPr>
-              <a:t>［ スクリーンショット ］ ここに貼り付けてください</a:t>
-            </a:r>
-            <a:endParaRPr lang="en-US" sz="1100" dirty="0"/>
-          </a:p>
-        </p:txBody>
-      </p:sp>
-      <p:sp>
-        <p:nvSpPr>
-          <p:cNvPr id="36" name="Text 34"/>
-          <p:cNvSpPr txBox="1"/>
-          <p:nvPr/>
-        </p:nvSpPr>
-        <p:spPr>
-          <a:xfrm>
-            <a:off x="841248" y="7808785"/>
-            <a:ext cx="5879592" cy="731520"/>
-          </a:xfrm>
-          <a:prstGeom prst="rect">
-            <a:avLst/>
-          </a:prstGeom>
-          <a:noFill/>
-          <a:ln/>
-        </p:spPr>
-        <p:txBody>
-          <a:bodyPr wrap="square" lIns="0" tIns="0" rIns="0" bIns="0" rtlCol="0" anchor="t"/>
-          <a:lstStyle/>
-          <a:p>
-            <a:pPr algn="ctr" indent="0" marL="0">
-              <a:lnSpc>
-                <a:spcPct val="120000"/>
-              </a:lnSpc>
-              <a:buNone/>
-            </a:pPr>
-            <a:r>
-              <a:rPr lang="en-US" sz="1050" dirty="0">
-                <a:solidFill>
-                  <a:srgbClr val="222222"/>
-                </a:solidFill>
-                <a:latin typeface="Calibri" pitchFamily="34" charset="0"/>
-                <a:ea typeface="Calibri" pitchFamily="34" charset="-122"/>
-                <a:cs typeface="Calibri" pitchFamily="34" charset="-120"/>
-              </a:rPr>
-              <a:t>照会画面の上部。「QRコードを読み取る」ボタンが見えるもの。</a:t>
-            </a:r>
-            <a:endParaRPr lang="en-US" sz="1050" dirty="0"/>
-          </a:p>
-        </p:txBody>
-      </p:sp>
-      <p:sp>
-        <p:nvSpPr>
-          <p:cNvPr id="37" name="Text 35"/>
+          <p:cNvPr id="34" name="Text 32"/>
           <p:cNvSpPr txBox="1"/>
           <p:nvPr/>
         </p:nvSpPr>
@@ -4836,355 +4727,46 @@
                 <a:ea typeface="Calibri" pitchFamily="34" charset="-122"/>
                 <a:cs typeface="Calibri" pitchFamily="34" charset="-120"/>
               </a:rPr>
-              <a:t>手順2：画面を確認して景品を選ぶ</a:t>
+              <a:t>手順1：QRコードを読み取る（つづき）</a:t>
             </a:r>
             <a:endParaRPr lang="en-US" sz="2200" dirty="0"/>
           </a:p>
         </p:txBody>
       </p:sp>
-      <p:sp>
-        <p:nvSpPr>
-          <p:cNvPr id="4" name="Text 2"/>
-          <p:cNvSpPr txBox="1"/>
-          <p:nvPr/>
-        </p:nvSpPr>
+      <p:pic>
+        <p:nvPicPr>
+          <p:cNvPr id="4" name="Image 0" descr="C:\Users\sato\Desktop\enque\docs\images\p-scan-button.png">    </p:cNvPr>
+          <p:cNvPicPr>
+            <a:picLocks noChangeAspect="1"/>
+          </p:cNvPicPr>
+          <p:nvPr/>
+        </p:nvPicPr>
+        <p:blipFill>
+          <a:blip r:embed="rId1"/>
+          <a:stretch>
+            <a:fillRect/>
+          </a:stretch>
+        </p:blipFill>
         <p:spPr>
           <a:xfrm>
             <a:off x="566928" y="1481328"/>
-            <a:ext cx="6428232" cy="257429"/>
-          </a:xfrm>
-          <a:prstGeom prst="rect">
-            <a:avLst/>
-          </a:prstGeom>
-          <a:noFill/>
-          <a:ln/>
-        </p:spPr>
-        <p:txBody>
-          <a:bodyPr wrap="square" lIns="0" tIns="0" rIns="0" bIns="0" rtlCol="0" anchor="t"/>
-          <a:lstStyle/>
-          <a:p>
-            <a:pPr indent="0" marL="0">
-              <a:lnSpc>
-                <a:spcPct val="125000"/>
-              </a:lnSpc>
-              <a:buNone/>
-            </a:pPr>
-            <a:r>
-              <a:rPr lang="en-US" sz="1100" dirty="0">
-                <a:solidFill>
-                  <a:srgbClr val="222222"/>
-                </a:solidFill>
-                <a:latin typeface="Calibri" pitchFamily="34" charset="0"/>
-                <a:ea typeface="Calibri" pitchFamily="34" charset="-122"/>
-                <a:cs typeface="Calibri" pitchFamily="34" charset="-120"/>
-              </a:rPr>
-              <a:t>読み取ると、交換コードと状態が表示されます。</a:t>
-            </a:r>
-            <a:endParaRPr lang="en-US" sz="1100" dirty="0"/>
-          </a:p>
-        </p:txBody>
-      </p:sp>
-      <p:sp>
-        <p:nvSpPr>
-          <p:cNvPr id="5" name="Text 3"/>
-          <p:cNvSpPr txBox="1"/>
-          <p:nvPr/>
-        </p:nvSpPr>
-        <p:spPr>
-          <a:xfrm>
-            <a:off x="566928" y="1885061"/>
-            <a:ext cx="6428232" cy="257810"/>
-          </a:xfrm>
-          <a:prstGeom prst="rect">
-            <a:avLst/>
-          </a:prstGeom>
-          <a:noFill/>
-          <a:ln/>
-        </p:spPr>
-        <p:txBody>
-          <a:bodyPr wrap="square" lIns="0" tIns="0" rIns="0" bIns="0" rtlCol="0" anchor="t"/>
-          <a:lstStyle/>
-          <a:p>
-            <a:pPr indent="0" marL="0">
-              <a:buNone/>
-            </a:pPr>
-            <a:r>
-              <a:rPr lang="en-US" sz="1400" b="1" dirty="0">
-                <a:solidFill>
-                  <a:srgbClr val="B85042"/>
-                </a:solidFill>
-                <a:latin typeface="Calibri" pitchFamily="34" charset="0"/>
-                <a:ea typeface="Calibri" pitchFamily="34" charset="-122"/>
-                <a:cs typeface="Calibri" pitchFamily="34" charset="-120"/>
-              </a:rPr>
-              <a:t>「未交換です」と出た場合</a:t>
-            </a:r>
-            <a:endParaRPr lang="en-US" sz="1400" dirty="0"/>
-          </a:p>
-        </p:txBody>
-      </p:sp>
-      <p:sp>
-        <p:nvSpPr>
-          <p:cNvPr id="6" name="Text 4"/>
-          <p:cNvSpPr txBox="1"/>
-          <p:nvPr/>
-        </p:nvSpPr>
-        <p:spPr>
-          <a:xfrm>
-            <a:off x="566928" y="2216023"/>
-            <a:ext cx="6428232" cy="257429"/>
-          </a:xfrm>
-          <a:prstGeom prst="rect">
-            <a:avLst/>
-          </a:prstGeom>
-          <a:noFill/>
-          <a:ln/>
-        </p:spPr>
-        <p:txBody>
-          <a:bodyPr wrap="square" lIns="0" tIns="0" rIns="0" bIns="0" rtlCol="0" anchor="t"/>
-          <a:lstStyle/>
-          <a:p>
-            <a:pPr indent="0" marL="0">
-              <a:lnSpc>
-                <a:spcPct val="125000"/>
-              </a:lnSpc>
-              <a:buNone/>
-            </a:pPr>
-            <a:r>
-              <a:rPr lang="en-US" sz="1100" dirty="0">
-                <a:solidFill>
-                  <a:srgbClr val="222222"/>
-                </a:solidFill>
-                <a:latin typeface="Calibri" pitchFamily="34" charset="0"/>
-                <a:ea typeface="Calibri" pitchFamily="34" charset="-122"/>
-                <a:cs typeface="Calibri" pitchFamily="34" charset="-120"/>
-              </a:rPr>
-              <a:t>そのままお渡しできます。</a:t>
-            </a:r>
-            <a:pPr indent="0" marL="0">
-              <a:lnSpc>
-                <a:spcPct val="125000"/>
-              </a:lnSpc>
-              <a:buNone/>
-            </a:pPr>
-            <a:r>
-              <a:rPr lang="en-US" sz="1100" b="1" dirty="0">
-                <a:solidFill>
-                  <a:srgbClr val="222222"/>
-                </a:solidFill>
-                <a:latin typeface="Calibri" pitchFamily="34" charset="0"/>
-                <a:ea typeface="Calibri" pitchFamily="34" charset="-122"/>
-                <a:cs typeface="Calibri" pitchFamily="34" charset="-120"/>
-              </a:rPr>
-              <a:t>渡す景品を選んで</a:t>
-            </a:r>
-            <a:pPr indent="0" marL="0">
-              <a:lnSpc>
-                <a:spcPct val="125000"/>
-              </a:lnSpc>
-              <a:buNone/>
-            </a:pPr>
-            <a:r>
-              <a:rPr lang="en-US" sz="1100" dirty="0">
-                <a:solidFill>
-                  <a:srgbClr val="222222"/>
-                </a:solidFill>
-                <a:latin typeface="Calibri" pitchFamily="34" charset="0"/>
-                <a:ea typeface="Calibri" pitchFamily="34" charset="-122"/>
-                <a:cs typeface="Calibri" pitchFamily="34" charset="-120"/>
-              </a:rPr>
-              <a:t>ください。選択肢には残りの数が出ています。</a:t>
-            </a:r>
-            <a:endParaRPr lang="en-US" sz="1100" dirty="0"/>
-          </a:p>
-        </p:txBody>
-      </p:sp>
-      <p:sp>
-        <p:nvSpPr>
-          <p:cNvPr id="7" name="Text 5"/>
-          <p:cNvSpPr txBox="1"/>
-          <p:nvPr/>
-        </p:nvSpPr>
-        <p:spPr>
-          <a:xfrm>
-            <a:off x="566928" y="2619756"/>
-            <a:ext cx="6428232" cy="257810"/>
-          </a:xfrm>
-          <a:prstGeom prst="rect">
-            <a:avLst/>
-          </a:prstGeom>
-          <a:noFill/>
-          <a:ln/>
-        </p:spPr>
-        <p:txBody>
-          <a:bodyPr wrap="square" lIns="0" tIns="0" rIns="0" bIns="0" rtlCol="0" anchor="t"/>
-          <a:lstStyle/>
-          <a:p>
-            <a:pPr indent="0" marL="0">
-              <a:buNone/>
-            </a:pPr>
-            <a:r>
-              <a:rPr lang="en-US" sz="1400" b="1" dirty="0">
-                <a:solidFill>
-                  <a:srgbClr val="B85042"/>
-                </a:solidFill>
-                <a:latin typeface="Calibri" pitchFamily="34" charset="0"/>
-                <a:ea typeface="Calibri" pitchFamily="34" charset="-122"/>
-                <a:cs typeface="Calibri" pitchFamily="34" charset="-120"/>
-              </a:rPr>
-              <a:t>「交換済み（日時）」と出た場合</a:t>
-            </a:r>
-            <a:endParaRPr lang="en-US" sz="1400" dirty="0"/>
-          </a:p>
-        </p:txBody>
-      </p:sp>
-      <p:sp>
-        <p:nvSpPr>
-          <p:cNvPr id="8" name="Text 6"/>
-          <p:cNvSpPr txBox="1"/>
-          <p:nvPr/>
-        </p:nvSpPr>
-        <p:spPr>
-          <a:xfrm>
-            <a:off x="566928" y="2950718"/>
-            <a:ext cx="6428232" cy="662559"/>
-          </a:xfrm>
-          <a:prstGeom prst="rect">
-            <a:avLst/>
-          </a:prstGeom>
-          <a:noFill/>
-          <a:ln/>
-        </p:spPr>
-        <p:txBody>
-          <a:bodyPr wrap="square" lIns="0" tIns="0" rIns="0" bIns="0" rtlCol="0" anchor="t"/>
-          <a:lstStyle/>
-          <a:p>
-            <a:pPr indent="0" marL="0">
-              <a:lnSpc>
-                <a:spcPct val="125000"/>
-              </a:lnSpc>
-              <a:buNone/>
-            </a:pPr>
-            <a:r>
-              <a:rPr lang="en-US" sz="1100" dirty="0">
-                <a:solidFill>
-                  <a:srgbClr val="222222"/>
-                </a:solidFill>
-                <a:latin typeface="Calibri" pitchFamily="34" charset="0"/>
-                <a:ea typeface="Calibri" pitchFamily="34" charset="-122"/>
-                <a:cs typeface="Calibri" pitchFamily="34" charset="-120"/>
-              </a:rPr>
-              <a:t>すでにお渡しした記録があります。</a:t>
-            </a:r>
-            <a:pPr indent="0" marL="0">
-              <a:lnSpc>
-                <a:spcPct val="125000"/>
-              </a:lnSpc>
-              <a:buNone/>
-            </a:pPr>
-            <a:r>
-              <a:rPr lang="en-US" sz="1100" b="1" dirty="0">
-                <a:solidFill>
-                  <a:srgbClr val="222222"/>
-                </a:solidFill>
-                <a:latin typeface="Calibri" pitchFamily="34" charset="0"/>
-                <a:ea typeface="Calibri" pitchFamily="34" charset="-122"/>
-                <a:cs typeface="Calibri" pitchFamily="34" charset="-120"/>
-              </a:rPr>
-              <a:t>来場者にはその旨を表示していません。</a:t>
-            </a:r>
-            <a:pPr indent="0" marL="0">
-              <a:lnSpc>
-                <a:spcPct val="125000"/>
-              </a:lnSpc>
-              <a:buNone/>
-            </a:pPr>
-            <a:r>
-              <a:rPr lang="en-US" sz="1100" dirty="0">
-                <a:solidFill>
-                  <a:srgbClr val="222222"/>
-                </a:solidFill>
-                <a:latin typeface="Calibri" pitchFamily="34" charset="0"/>
-                <a:ea typeface="Calibri" pitchFamily="34" charset="-122"/>
-                <a:cs typeface="Calibri" pitchFamily="34" charset="-120"/>
-              </a:rPr>
-              <a:t>「もう1回まわった」「まだもらっていない」などお申し出があれば、</a:t>
-            </a:r>
-            <a:pPr indent="0" marL="0">
-              <a:lnSpc>
-                <a:spcPct val="125000"/>
-              </a:lnSpc>
-              <a:buNone/>
-            </a:pPr>
-            <a:r>
-              <a:rPr lang="en-US" sz="1100" b="1" dirty="0">
-                <a:solidFill>
-                  <a:srgbClr val="222222"/>
-                </a:solidFill>
-                <a:latin typeface="Calibri" pitchFamily="34" charset="0"/>
-                <a:ea typeface="Calibri" pitchFamily="34" charset="-122"/>
-                <a:cs typeface="Calibri" pitchFamily="34" charset="-120"/>
-              </a:rPr>
-              <a:t>お渡しして構いません</a:t>
-            </a:r>
-            <a:pPr indent="0" marL="0">
-              <a:lnSpc>
-                <a:spcPct val="125000"/>
-              </a:lnSpc>
-              <a:buNone/>
-            </a:pPr>
-            <a:r>
-              <a:rPr lang="en-US" sz="1100" dirty="0">
-                <a:solidFill>
-                  <a:srgbClr val="222222"/>
-                </a:solidFill>
-                <a:latin typeface="Calibri" pitchFamily="34" charset="0"/>
-                <a:ea typeface="Calibri" pitchFamily="34" charset="-122"/>
-                <a:cs typeface="Calibri" pitchFamily="34" charset="-120"/>
-              </a:rPr>
-              <a:t>。判断に迷う場合は事務局にご確認ください。</a:t>
-            </a:r>
-            <a:endParaRPr lang="en-US" sz="1100" dirty="0"/>
-          </a:p>
-        </p:txBody>
-      </p:sp>
-      <p:sp>
-        <p:nvSpPr>
-          <p:cNvPr id="9" name="Shape 7"/>
-          <p:cNvSpPr/>
-          <p:nvPr/>
-        </p:nvSpPr>
-        <p:spPr>
-          <a:xfrm>
-            <a:off x="566928" y="3649853"/>
-            <a:ext cx="6428232" cy="431102"/>
-          </a:xfrm>
-          <a:prstGeom prst="roundRect">
-            <a:avLst>
-              <a:gd name="adj" fmla="val 12726"/>
-            </a:avLst>
-          </a:prstGeom>
-          <a:solidFill>
-            <a:srgbClr val="FAEAE7"/>
-          </a:solidFill>
-          <a:ln w="9525">
-            <a:solidFill>
-              <a:srgbClr val="B85042"/>
-            </a:solidFill>
-            <a:prstDash val="solid"/>
-          </a:ln>
-        </p:spPr>
-      </p:sp>
-      <p:sp>
-        <p:nvSpPr>
-          <p:cNvPr id="10" name="Text 8"/>
-          <p:cNvSpPr txBox="1"/>
-          <p:nvPr/>
-        </p:nvSpPr>
-        <p:spPr>
-          <a:xfrm>
-            <a:off x="658368" y="3741293"/>
-            <a:ext cx="237744" cy="237744"/>
+            <a:ext cx="6428232" cy="3465755"/>
+          </a:xfrm>
+          <a:prstGeom prst="rect">
+            <a:avLst/>
+          </a:prstGeom>
+        </p:spPr>
+      </p:pic>
+      <p:sp>
+        <p:nvSpPr>
+          <p:cNvPr id="5" name="Text 2"/>
+          <p:cNvSpPr txBox="1"/>
+          <p:nvPr/>
+        </p:nvSpPr>
+        <p:spPr>
+          <a:xfrm>
+            <a:off x="566928" y="5001947"/>
+            <a:ext cx="6428232" cy="274320"/>
           </a:xfrm>
           <a:prstGeom prst="rect">
             <a:avLst/>
@@ -5200,223 +4782,7 @@
               <a:buNone/>
             </a:pPr>
             <a:r>
-              <a:rPr lang="en-US" sz="1200" b="1" dirty="0">
-                <a:solidFill>
-                  <a:srgbClr val="B85042"/>
-                </a:solidFill>
-                <a:latin typeface="Calibri" pitchFamily="34" charset="0"/>
-                <a:ea typeface="Calibri" pitchFamily="34" charset="-122"/>
-                <a:cs typeface="Calibri" pitchFamily="34" charset="-120"/>
-              </a:rPr>
-              <a:t>i</a:t>
-            </a:r>
-            <a:endParaRPr lang="en-US" sz="1200" dirty="0"/>
-          </a:p>
-        </p:txBody>
-      </p:sp>
-      <p:sp>
-        <p:nvSpPr>
-          <p:cNvPr id="11" name="Text 9"/>
-          <p:cNvSpPr txBox="1"/>
-          <p:nvPr/>
-        </p:nvSpPr>
-        <p:spPr>
-          <a:xfrm>
-            <a:off x="950976" y="3759581"/>
-            <a:ext cx="5925312" cy="248221"/>
-          </a:xfrm>
-          <a:prstGeom prst="rect">
-            <a:avLst/>
-          </a:prstGeom>
-          <a:noFill/>
-          <a:ln/>
-        </p:spPr>
-        <p:txBody>
-          <a:bodyPr wrap="square" lIns="0" tIns="0" rIns="0" bIns="0" rtlCol="0" anchor="t"/>
-          <a:lstStyle/>
-          <a:p>
-            <a:pPr indent="0" marL="0">
-              <a:lnSpc>
-                <a:spcPct val="120000"/>
-              </a:lnSpc>
-              <a:buNone/>
-            </a:pPr>
-            <a:r>
-              <a:rPr lang="en-US" sz="1050" dirty="0">
-                <a:solidFill>
-                  <a:srgbClr val="222222"/>
-                </a:solidFill>
-                <a:latin typeface="Calibri" pitchFamily="34" charset="0"/>
-                <a:ea typeface="Calibri" pitchFamily="34" charset="-122"/>
-                <a:cs typeface="Calibri" pitchFamily="34" charset="-120"/>
-              </a:rPr>
-              <a:t>画面には、その方が回答したブースの数も出ます。目安としてご覧ください。</a:t>
-            </a:r>
-            <a:endParaRPr lang="en-US" sz="1050" dirty="0"/>
-          </a:p>
-        </p:txBody>
-      </p:sp>
-      <p:sp>
-        <p:nvSpPr>
-          <p:cNvPr id="12" name="Shape 10"/>
-          <p:cNvSpPr/>
-          <p:nvPr/>
-        </p:nvSpPr>
-        <p:spPr>
-          <a:xfrm>
-            <a:off x="566928" y="4154107"/>
-            <a:ext cx="6428232" cy="624459"/>
-          </a:xfrm>
-          <a:prstGeom prst="roundRect">
-            <a:avLst>
-              <a:gd name="adj" fmla="val 8786"/>
-            </a:avLst>
-          </a:prstGeom>
-          <a:solidFill>
-            <a:srgbClr val="FDF0E6"/>
-          </a:solidFill>
-          <a:ln w="9525">
-            <a:solidFill>
-              <a:srgbClr val="E08A3C"/>
-            </a:solidFill>
-            <a:prstDash val="solid"/>
-          </a:ln>
-        </p:spPr>
-      </p:sp>
-      <p:sp>
-        <p:nvSpPr>
-          <p:cNvPr id="13" name="Text 11"/>
-          <p:cNvSpPr txBox="1"/>
-          <p:nvPr/>
-        </p:nvSpPr>
-        <p:spPr>
-          <a:xfrm>
-            <a:off x="658368" y="4245547"/>
-            <a:ext cx="237744" cy="237744"/>
-          </a:xfrm>
-          <a:prstGeom prst="rect">
-            <a:avLst/>
-          </a:prstGeom>
-          <a:noFill/>
-          <a:ln/>
-        </p:spPr>
-        <p:txBody>
-          <a:bodyPr wrap="square" lIns="0" tIns="0" rIns="0" bIns="0" rtlCol="0" anchor="ctr"/>
-          <a:lstStyle/>
-          <a:p>
-            <a:pPr algn="ctr" indent="0" marL="0">
-              <a:buNone/>
-            </a:pPr>
-            <a:r>
-              <a:rPr lang="en-US" sz="1200" b="1" dirty="0">
-                <a:solidFill>
-                  <a:srgbClr val="C25A17"/>
-                </a:solidFill>
-                <a:latin typeface="Calibri" pitchFamily="34" charset="0"/>
-                <a:ea typeface="Calibri" pitchFamily="34" charset="-122"/>
-                <a:cs typeface="Calibri" pitchFamily="34" charset="-120"/>
-              </a:rPr>
-              <a:t>！</a:t>
-            </a:r>
-            <a:endParaRPr lang="en-US" sz="1200" dirty="0"/>
-          </a:p>
-        </p:txBody>
-      </p:sp>
-      <p:sp>
-        <p:nvSpPr>
-          <p:cNvPr id="14" name="Text 12"/>
-          <p:cNvSpPr txBox="1"/>
-          <p:nvPr/>
-        </p:nvSpPr>
-        <p:spPr>
-          <a:xfrm>
-            <a:off x="950976" y="4263835"/>
-            <a:ext cx="5925312" cy="441579"/>
-          </a:xfrm>
-          <a:prstGeom prst="rect">
-            <a:avLst/>
-          </a:prstGeom>
-          <a:noFill/>
-          <a:ln/>
-        </p:spPr>
-        <p:txBody>
-          <a:bodyPr wrap="square" lIns="0" tIns="0" rIns="0" bIns="0" rtlCol="0" anchor="t"/>
-          <a:lstStyle/>
-          <a:p>
-            <a:pPr indent="0" marL="0">
-              <a:lnSpc>
-                <a:spcPct val="120000"/>
-              </a:lnSpc>
-              <a:buNone/>
-            </a:pPr>
-            <a:r>
-              <a:rPr lang="en-US" sz="1050" dirty="0">
-                <a:solidFill>
-                  <a:srgbClr val="222222"/>
-                </a:solidFill>
-                <a:latin typeface="Calibri" pitchFamily="34" charset="0"/>
-                <a:ea typeface="Calibri" pitchFamily="34" charset="-122"/>
-                <a:cs typeface="Calibri" pitchFamily="34" charset="-120"/>
-              </a:rPr>
-              <a:t>在庫がなくなった景品も選べます。実際にお渡ししたものを記録することを優先してください（あとで用意した数を超えた分が分かるようになっています）。</a:t>
-            </a:r>
-            <a:endParaRPr lang="en-US" sz="1050" dirty="0"/>
-          </a:p>
-        </p:txBody>
-      </p:sp>
-      <p:sp>
-        <p:nvSpPr>
-          <p:cNvPr id="15" name="Shape 13"/>
-          <p:cNvSpPr/>
-          <p:nvPr/>
-        </p:nvSpPr>
-        <p:spPr>
-          <a:xfrm>
-            <a:off x="566928" y="4851718"/>
-            <a:ext cx="6428232" cy="2606040"/>
-          </a:xfrm>
-          <a:prstGeom prst="roundRect">
-            <a:avLst>
-              <a:gd name="adj" fmla="val 1754"/>
-            </a:avLst>
-          </a:prstGeom>
-          <a:solidFill>
-            <a:srgbClr val="F7F7F7"/>
-          </a:solidFill>
-          <a:ln w="12700">
-            <a:solidFill>
-              <a:srgbClr val="D8D8D8"/>
-            </a:solidFill>
-            <a:prstDash val="dash"/>
-          </a:ln>
-        </p:spPr>
-      </p:sp>
-      <p:sp>
-        <p:nvSpPr>
-          <p:cNvPr id="16" name="Text 14"/>
-          <p:cNvSpPr txBox="1"/>
-          <p:nvPr/>
-        </p:nvSpPr>
-        <p:spPr>
-          <a:xfrm>
-            <a:off x="749808" y="5235766"/>
-            <a:ext cx="6062472" cy="274320"/>
-          </a:xfrm>
-          <a:prstGeom prst="rect">
-            <a:avLst/>
-          </a:prstGeom>
-          <a:noFill/>
-          <a:ln/>
-        </p:spPr>
-        <p:txBody>
-          <a:bodyPr wrap="square" lIns="0" tIns="0" rIns="0" bIns="0" rtlCol="0" anchor="ctr"/>
-          <a:lstStyle/>
-          <a:p>
-            <a:pPr algn="ctr" indent="0" marL="0">
-              <a:buNone/>
-            </a:pPr>
-            <a:r>
-              <a:rPr lang="en-US" sz="1100" b="1" dirty="0">
+              <a:rPr lang="en-US" sz="950" dirty="0">
                 <a:solidFill>
                   <a:srgbClr val="6B6B6B"/>
                 </a:solidFill>
@@ -5424,57 +4790,15 @@
                 <a:ea typeface="Calibri" pitchFamily="34" charset="-122"/>
                 <a:cs typeface="Calibri" pitchFamily="34" charset="-120"/>
               </a:rPr>
-              <a:t>［ スクリーンショット ］ ここに貼り付けてください</a:t>
-            </a:r>
-            <a:endParaRPr lang="en-US" sz="1100" dirty="0"/>
-          </a:p>
-        </p:txBody>
-      </p:sp>
-      <p:sp>
-        <p:nvSpPr>
-          <p:cNvPr id="17" name="Text 15"/>
-          <p:cNvSpPr txBox="1"/>
-          <p:nvPr/>
-        </p:nvSpPr>
-        <p:spPr>
-          <a:xfrm>
-            <a:off x="841248" y="5601526"/>
-            <a:ext cx="5879592" cy="731520"/>
-          </a:xfrm>
-          <a:prstGeom prst="rect">
-            <a:avLst/>
-          </a:prstGeom>
-          <a:noFill/>
-          <a:ln/>
-        </p:spPr>
-        <p:txBody>
-          <a:bodyPr wrap="square" lIns="0" tIns="0" rIns="0" bIns="0" rtlCol="0" anchor="t"/>
-          <a:lstStyle/>
-          <a:p>
-            <a:pPr algn="ctr" indent="0" marL="0">
-              <a:lnSpc>
-                <a:spcPct val="120000"/>
-              </a:lnSpc>
-              <a:buNone/>
-            </a:pPr>
-            <a:r>
-              <a:rPr lang="en-US" sz="1050" dirty="0">
-                <a:solidFill>
-                  <a:srgbClr val="222222"/>
-                </a:solidFill>
-                <a:latin typeface="Calibri" pitchFamily="34" charset="0"/>
-                <a:ea typeface="Calibri" pitchFamily="34" charset="-122"/>
-                <a:cs typeface="Calibri" pitchFamily="34" charset="-120"/>
-              </a:rPr>
-              <a:t>照会結果の画面。「未交換です」の表示と、景品を選ぶプルダウン（残りの数が見えるもの）。</a:t>
-            </a:r>
-            <a:endParaRPr lang="en-US" sz="1050" dirty="0"/>
-          </a:p>
-        </p:txBody>
-      </p:sp>
-      <p:sp>
-        <p:nvSpPr>
-          <p:cNvPr id="18" name="Text 16"/>
+              <a:t>照会画面の上部。「QRコードを読み取る」ボタンが見えるもの。</a:t>
+            </a:r>
+            <a:endParaRPr lang="en-US" sz="950" dirty="0"/>
+          </a:p>
+        </p:txBody>
+      </p:sp>
+      <p:sp>
+        <p:nvSpPr>
+          <p:cNvPr id="6" name="Text 3"/>
           <p:cNvSpPr txBox="1"/>
           <p:nvPr/>
         </p:nvSpPr>
@@ -5615,7 +4939,7 @@
                 <a:ea typeface="Calibri" pitchFamily="34" charset="-122"/>
                 <a:cs typeface="Calibri" pitchFamily="34" charset="-120"/>
               </a:rPr>
-              <a:t>手順3：交換済みにする</a:t>
+              <a:t>手順2：画面を確認して景品を選ぶ</a:t>
             </a:r>
             <a:endParaRPr lang="en-US" sz="2200" dirty="0"/>
           </a:p>
@@ -5623,73 +4947,14 @@
       </p:sp>
       <p:sp>
         <p:nvSpPr>
-          <p:cNvPr id="4" name="Shape 2"/>
-          <p:cNvSpPr/>
-          <p:nvPr/>
-        </p:nvSpPr>
-        <p:spPr>
-          <a:xfrm>
-            <a:off x="566928" y="1499616"/>
-            <a:ext cx="274320" cy="274320"/>
-          </a:xfrm>
-          <a:prstGeom prst="ellipse">
-            <a:avLst/>
-          </a:prstGeom>
-          <a:solidFill>
-            <a:srgbClr val="B85042"/>
-          </a:solidFill>
-          <a:ln/>
-        </p:spPr>
-      </p:sp>
-      <p:sp>
-        <p:nvSpPr>
-          <p:cNvPr id="5" name="Text 3"/>
-          <p:cNvSpPr txBox="1"/>
-          <p:nvPr/>
-        </p:nvSpPr>
-        <p:spPr>
-          <a:xfrm>
-            <a:off x="566928" y="1499616"/>
-            <a:ext cx="274320" cy="274320"/>
-          </a:xfrm>
-          <a:prstGeom prst="rect">
-            <a:avLst/>
-          </a:prstGeom>
-          <a:noFill/>
-          <a:ln/>
-        </p:spPr>
-        <p:txBody>
-          <a:bodyPr wrap="square" lIns="0" tIns="0" rIns="0" bIns="0" rtlCol="0" anchor="ctr"/>
-          <a:lstStyle/>
-          <a:p>
-            <a:pPr algn="ctr" indent="0" marL="0">
-              <a:buNone/>
-            </a:pPr>
-            <a:r>
-              <a:rPr lang="en-US" sz="1100" b="1" dirty="0">
-                <a:solidFill>
-                  <a:srgbClr val="FFFFFF"/>
-                </a:solidFill>
-                <a:latin typeface="Calibri" pitchFamily="34" charset="0"/>
-                <a:ea typeface="Calibri" pitchFamily="34" charset="-122"/>
-                <a:cs typeface="Calibri" pitchFamily="34" charset="-120"/>
-              </a:rPr>
-              <a:t>1</a:t>
-            </a:r>
-            <a:endParaRPr lang="en-US" sz="1100" dirty="0"/>
-          </a:p>
-        </p:txBody>
-      </p:sp>
-      <p:sp>
-        <p:nvSpPr>
-          <p:cNvPr id="6" name="Text 4"/>
-          <p:cNvSpPr txBox="1"/>
-          <p:nvPr/>
-        </p:nvSpPr>
-        <p:spPr>
-          <a:xfrm>
-            <a:off x="969264" y="1481328"/>
-            <a:ext cx="6025896" cy="365760"/>
+          <p:cNvPr id="4" name="Text 2"/>
+          <p:cNvSpPr txBox="1"/>
+          <p:nvPr/>
+        </p:nvSpPr>
+        <p:spPr>
+          <a:xfrm>
+            <a:off x="566928" y="1481328"/>
+            <a:ext cx="6428232" cy="257429"/>
           </a:xfrm>
           <a:prstGeom prst="rect">
             <a:avLst/>
@@ -5708,16 +4973,80 @@
               <a:buNone/>
             </a:pPr>
             <a:r>
-              <a:rPr lang="en-US" sz="1150" b="1" dirty="0">
-                <a:solidFill>
-                  <a:srgbClr val="222222"/>
-                </a:solidFill>
-                <a:latin typeface="Calibri" pitchFamily="34" charset="0"/>
-                <a:ea typeface="Calibri" pitchFamily="34" charset="-122"/>
-                <a:cs typeface="Calibri" pitchFamily="34" charset="-120"/>
-              </a:rPr>
-              <a:t>渡す景品</a:t>
-            </a:r>
+              <a:rPr lang="en-US" sz="1100" dirty="0">
+                <a:solidFill>
+                  <a:srgbClr val="222222"/>
+                </a:solidFill>
+                <a:latin typeface="Calibri" pitchFamily="34" charset="0"/>
+                <a:ea typeface="Calibri" pitchFamily="34" charset="-122"/>
+                <a:cs typeface="Calibri" pitchFamily="34" charset="-120"/>
+              </a:rPr>
+              <a:t>読み取ると、交換コードと状態が表示されます。</a:t>
+            </a:r>
+            <a:endParaRPr lang="en-US" sz="1100" dirty="0"/>
+          </a:p>
+        </p:txBody>
+      </p:sp>
+      <p:sp>
+        <p:nvSpPr>
+          <p:cNvPr id="5" name="Text 3"/>
+          <p:cNvSpPr txBox="1"/>
+          <p:nvPr/>
+        </p:nvSpPr>
+        <p:spPr>
+          <a:xfrm>
+            <a:off x="566928" y="1885061"/>
+            <a:ext cx="6428232" cy="257810"/>
+          </a:xfrm>
+          <a:prstGeom prst="rect">
+            <a:avLst/>
+          </a:prstGeom>
+          <a:noFill/>
+          <a:ln/>
+        </p:spPr>
+        <p:txBody>
+          <a:bodyPr wrap="square" lIns="0" tIns="0" rIns="0" bIns="0" rtlCol="0" anchor="t"/>
+          <a:lstStyle/>
+          <a:p>
+            <a:pPr indent="0" marL="0">
+              <a:buNone/>
+            </a:pPr>
+            <a:r>
+              <a:rPr lang="en-US" sz="1400" b="1" dirty="0">
+                <a:solidFill>
+                  <a:srgbClr val="B85042"/>
+                </a:solidFill>
+                <a:latin typeface="Calibri" pitchFamily="34" charset="0"/>
+                <a:ea typeface="Calibri" pitchFamily="34" charset="-122"/>
+                <a:cs typeface="Calibri" pitchFamily="34" charset="-120"/>
+              </a:rPr>
+              <a:t>「未交換です」と出た場合</a:t>
+            </a:r>
+            <a:endParaRPr lang="en-US" sz="1400" dirty="0"/>
+          </a:p>
+        </p:txBody>
+      </p:sp>
+      <p:sp>
+        <p:nvSpPr>
+          <p:cNvPr id="6" name="Text 4"/>
+          <p:cNvSpPr txBox="1"/>
+          <p:nvPr/>
+        </p:nvSpPr>
+        <p:spPr>
+          <a:xfrm>
+            <a:off x="566928" y="2216023"/>
+            <a:ext cx="6428232" cy="257429"/>
+          </a:xfrm>
+          <a:prstGeom prst="rect">
+            <a:avLst/>
+          </a:prstGeom>
+          <a:noFill/>
+          <a:ln/>
+        </p:spPr>
+        <p:txBody>
+          <a:bodyPr wrap="square" lIns="0" tIns="0" rIns="0" bIns="0" rtlCol="0" anchor="t"/>
+          <a:lstStyle/>
+          <a:p>
             <a:pPr indent="0" marL="0">
               <a:lnSpc>
                 <a:spcPct val="125000"/>
@@ -5725,100 +5054,16 @@
               <a:buNone/>
             </a:pPr>
             <a:r>
-              <a:rPr lang="en-US" sz="1150" dirty="0">
-                <a:solidFill>
-                  <a:srgbClr val="222222"/>
-                </a:solidFill>
-                <a:latin typeface="Calibri" pitchFamily="34" charset="0"/>
-                <a:ea typeface="Calibri" pitchFamily="34" charset="-122"/>
-                <a:cs typeface="Calibri" pitchFamily="34" charset="-120"/>
-              </a:rPr>
-              <a:t>を選ぶ</a:t>
-            </a:r>
-            <a:endParaRPr lang="en-US" sz="1150" dirty="0"/>
-          </a:p>
-        </p:txBody>
-      </p:sp>
-      <p:sp>
-        <p:nvSpPr>
-          <p:cNvPr id="7" name="Shape 5"/>
-          <p:cNvSpPr/>
-          <p:nvPr/>
-        </p:nvSpPr>
-        <p:spPr>
-          <a:xfrm>
-            <a:off x="566928" y="1956816"/>
-            <a:ext cx="274320" cy="274320"/>
-          </a:xfrm>
-          <a:prstGeom prst="ellipse">
-            <a:avLst/>
-          </a:prstGeom>
-          <a:solidFill>
-            <a:srgbClr val="B85042"/>
-          </a:solidFill>
-          <a:ln/>
-        </p:spPr>
-      </p:sp>
-      <p:sp>
-        <p:nvSpPr>
-          <p:cNvPr id="8" name="Text 6"/>
-          <p:cNvSpPr txBox="1"/>
-          <p:nvPr/>
-        </p:nvSpPr>
-        <p:spPr>
-          <a:xfrm>
-            <a:off x="566928" y="1956816"/>
-            <a:ext cx="274320" cy="274320"/>
-          </a:xfrm>
-          <a:prstGeom prst="rect">
-            <a:avLst/>
-          </a:prstGeom>
-          <a:noFill/>
-          <a:ln/>
-        </p:spPr>
-        <p:txBody>
-          <a:bodyPr wrap="square" lIns="0" tIns="0" rIns="0" bIns="0" rtlCol="0" anchor="ctr"/>
-          <a:lstStyle/>
-          <a:p>
-            <a:pPr algn="ctr" indent="0" marL="0">
-              <a:buNone/>
-            </a:pPr>
-            <a:r>
-              <a:rPr lang="en-US" sz="1100" b="1" dirty="0">
-                <a:solidFill>
-                  <a:srgbClr val="FFFFFF"/>
-                </a:solidFill>
-                <a:latin typeface="Calibri" pitchFamily="34" charset="0"/>
-                <a:ea typeface="Calibri" pitchFamily="34" charset="-122"/>
-                <a:cs typeface="Calibri" pitchFamily="34" charset="-120"/>
-              </a:rPr>
-              <a:t>2</a:t>
-            </a:r>
-            <a:endParaRPr lang="en-US" sz="1100" dirty="0"/>
-          </a:p>
-        </p:txBody>
-      </p:sp>
-      <p:sp>
-        <p:nvSpPr>
-          <p:cNvPr id="9" name="Text 7"/>
-          <p:cNvSpPr txBox="1"/>
-          <p:nvPr/>
-        </p:nvSpPr>
-        <p:spPr>
-          <a:xfrm>
-            <a:off x="969264" y="1938528"/>
-            <a:ext cx="6025896" cy="365760"/>
-          </a:xfrm>
-          <a:prstGeom prst="rect">
-            <a:avLst/>
-          </a:prstGeom>
-          <a:noFill/>
-          <a:ln/>
-        </p:spPr>
-        <p:txBody>
-          <a:bodyPr wrap="square" lIns="0" tIns="0" rIns="0" bIns="0" rtlCol="0" anchor="t"/>
-          <a:lstStyle/>
-          <a:p>
+              <a:rPr lang="en-US" sz="1100" dirty="0">
+                <a:solidFill>
+                  <a:srgbClr val="222222"/>
+                </a:solidFill>
+                <a:latin typeface="Calibri" pitchFamily="34" charset="0"/>
+                <a:ea typeface="Calibri" pitchFamily="34" charset="-122"/>
+                <a:cs typeface="Calibri" pitchFamily="34" charset="-120"/>
+              </a:rPr>
+              <a:t>そのままお渡しできます。</a:t>
+            </a:r>
             <a:pPr indent="0" marL="0">
               <a:lnSpc>
                 <a:spcPct val="125000"/>
@@ -5826,100 +5071,16 @@
               <a:buNone/>
             </a:pPr>
             <a:r>
-              <a:rPr lang="en-US" sz="1150" dirty="0">
-                <a:solidFill>
-                  <a:srgbClr val="222222"/>
-                </a:solidFill>
-                <a:latin typeface="Calibri" pitchFamily="34" charset="0"/>
-                <a:ea typeface="Calibri" pitchFamily="34" charset="-122"/>
-                <a:cs typeface="Calibri" pitchFamily="34" charset="-120"/>
-              </a:rPr>
-              <a:t>必要ならメモ欄に記入する（例：在庫切れのため別の景品に変更）</a:t>
-            </a:r>
-            <a:endParaRPr lang="en-US" sz="1150" dirty="0"/>
-          </a:p>
-        </p:txBody>
-      </p:sp>
-      <p:sp>
-        <p:nvSpPr>
-          <p:cNvPr id="10" name="Shape 8"/>
-          <p:cNvSpPr/>
-          <p:nvPr/>
-        </p:nvSpPr>
-        <p:spPr>
-          <a:xfrm>
-            <a:off x="566928" y="2414016"/>
-            <a:ext cx="274320" cy="274320"/>
-          </a:xfrm>
-          <a:prstGeom prst="ellipse">
-            <a:avLst/>
-          </a:prstGeom>
-          <a:solidFill>
-            <a:srgbClr val="B85042"/>
-          </a:solidFill>
-          <a:ln/>
-        </p:spPr>
-      </p:sp>
-      <p:sp>
-        <p:nvSpPr>
-          <p:cNvPr id="11" name="Text 9"/>
-          <p:cNvSpPr txBox="1"/>
-          <p:nvPr/>
-        </p:nvSpPr>
-        <p:spPr>
-          <a:xfrm>
-            <a:off x="566928" y="2414016"/>
-            <a:ext cx="274320" cy="274320"/>
-          </a:xfrm>
-          <a:prstGeom prst="rect">
-            <a:avLst/>
-          </a:prstGeom>
-          <a:noFill/>
-          <a:ln/>
-        </p:spPr>
-        <p:txBody>
-          <a:bodyPr wrap="square" lIns="0" tIns="0" rIns="0" bIns="0" rtlCol="0" anchor="ctr"/>
-          <a:lstStyle/>
-          <a:p>
-            <a:pPr algn="ctr" indent="0" marL="0">
-              <a:buNone/>
-            </a:pPr>
-            <a:r>
               <a:rPr lang="en-US" sz="1100" b="1" dirty="0">
                 <a:solidFill>
-                  <a:srgbClr val="FFFFFF"/>
-                </a:solidFill>
-                <a:latin typeface="Calibri" pitchFamily="34" charset="0"/>
-                <a:ea typeface="Calibri" pitchFamily="34" charset="-122"/>
-                <a:cs typeface="Calibri" pitchFamily="34" charset="-120"/>
-              </a:rPr>
-              <a:t>3</a:t>
-            </a:r>
-            <a:endParaRPr lang="en-US" sz="1100" dirty="0"/>
-          </a:p>
-        </p:txBody>
-      </p:sp>
-      <p:sp>
-        <p:nvSpPr>
-          <p:cNvPr id="12" name="Text 10"/>
-          <p:cNvSpPr txBox="1"/>
-          <p:nvPr/>
-        </p:nvSpPr>
-        <p:spPr>
-          <a:xfrm>
-            <a:off x="969264" y="2395728"/>
-            <a:ext cx="6025896" cy="365760"/>
-          </a:xfrm>
-          <a:prstGeom prst="rect">
-            <a:avLst/>
-          </a:prstGeom>
-          <a:noFill/>
-          <a:ln/>
-        </p:spPr>
-        <p:txBody>
-          <a:bodyPr wrap="square" lIns="0" tIns="0" rIns="0" bIns="0" rtlCol="0" anchor="t"/>
-          <a:lstStyle/>
-          <a:p>
+                  <a:srgbClr val="222222"/>
+                </a:solidFill>
+                <a:latin typeface="Calibri" pitchFamily="34" charset="0"/>
+                <a:ea typeface="Calibri" pitchFamily="34" charset="-122"/>
+                <a:cs typeface="Calibri" pitchFamily="34" charset="-120"/>
+              </a:rPr>
+              <a:t>渡す景品を選んで</a:t>
+            </a:r>
             <a:pPr indent="0" marL="0">
               <a:lnSpc>
                 <a:spcPct val="125000"/>
@@ -5927,16 +5088,80 @@
               <a:buNone/>
             </a:pPr>
             <a:r>
-              <a:rPr lang="en-US" sz="1150" b="1" dirty="0">
-                <a:solidFill>
-                  <a:srgbClr val="222222"/>
-                </a:solidFill>
-                <a:latin typeface="Calibri" pitchFamily="34" charset="0"/>
-                <a:ea typeface="Calibri" pitchFamily="34" charset="-122"/>
-                <a:cs typeface="Calibri" pitchFamily="34" charset="-120"/>
-              </a:rPr>
-              <a:t>「交換済みにする」</a:t>
-            </a:r>
+              <a:rPr lang="en-US" sz="1100" dirty="0">
+                <a:solidFill>
+                  <a:srgbClr val="222222"/>
+                </a:solidFill>
+                <a:latin typeface="Calibri" pitchFamily="34" charset="0"/>
+                <a:ea typeface="Calibri" pitchFamily="34" charset="-122"/>
+                <a:cs typeface="Calibri" pitchFamily="34" charset="-120"/>
+              </a:rPr>
+              <a:t>ください。選択肢には残りの数が出ています。</a:t>
+            </a:r>
+            <a:endParaRPr lang="en-US" sz="1100" dirty="0"/>
+          </a:p>
+        </p:txBody>
+      </p:sp>
+      <p:sp>
+        <p:nvSpPr>
+          <p:cNvPr id="7" name="Text 5"/>
+          <p:cNvSpPr txBox="1"/>
+          <p:nvPr/>
+        </p:nvSpPr>
+        <p:spPr>
+          <a:xfrm>
+            <a:off x="566928" y="2619756"/>
+            <a:ext cx="6428232" cy="257810"/>
+          </a:xfrm>
+          <a:prstGeom prst="rect">
+            <a:avLst/>
+          </a:prstGeom>
+          <a:noFill/>
+          <a:ln/>
+        </p:spPr>
+        <p:txBody>
+          <a:bodyPr wrap="square" lIns="0" tIns="0" rIns="0" bIns="0" rtlCol="0" anchor="t"/>
+          <a:lstStyle/>
+          <a:p>
+            <a:pPr indent="0" marL="0">
+              <a:buNone/>
+            </a:pPr>
+            <a:r>
+              <a:rPr lang="en-US" sz="1400" b="1" dirty="0">
+                <a:solidFill>
+                  <a:srgbClr val="B85042"/>
+                </a:solidFill>
+                <a:latin typeface="Calibri" pitchFamily="34" charset="0"/>
+                <a:ea typeface="Calibri" pitchFamily="34" charset="-122"/>
+                <a:cs typeface="Calibri" pitchFamily="34" charset="-120"/>
+              </a:rPr>
+              <a:t>「交換済み（日時）」と出た場合</a:t>
+            </a:r>
+            <a:endParaRPr lang="en-US" sz="1400" dirty="0"/>
+          </a:p>
+        </p:txBody>
+      </p:sp>
+      <p:sp>
+        <p:nvSpPr>
+          <p:cNvPr id="8" name="Text 6"/>
+          <p:cNvSpPr txBox="1"/>
+          <p:nvPr/>
+        </p:nvSpPr>
+        <p:spPr>
+          <a:xfrm>
+            <a:off x="566928" y="2950718"/>
+            <a:ext cx="6428232" cy="662559"/>
+          </a:xfrm>
+          <a:prstGeom prst="rect">
+            <a:avLst/>
+          </a:prstGeom>
+          <a:noFill/>
+          <a:ln/>
+        </p:spPr>
+        <p:txBody>
+          <a:bodyPr wrap="square" lIns="0" tIns="0" rIns="0" bIns="0" rtlCol="0" anchor="t"/>
+          <a:lstStyle/>
+          <a:p>
             <a:pPr indent="0" marL="0">
               <a:lnSpc>
                 <a:spcPct val="125000"/>
@@ -5944,100 +5169,16 @@
               <a:buNone/>
             </a:pPr>
             <a:r>
-              <a:rPr lang="en-US" sz="1150" dirty="0">
-                <a:solidFill>
-                  <a:srgbClr val="222222"/>
-                </a:solidFill>
-                <a:latin typeface="Calibri" pitchFamily="34" charset="0"/>
-                <a:ea typeface="Calibri" pitchFamily="34" charset="-122"/>
-                <a:cs typeface="Calibri" pitchFamily="34" charset="-120"/>
-              </a:rPr>
-              <a:t>を押す</a:t>
-            </a:r>
-            <a:endParaRPr lang="en-US" sz="1150" dirty="0"/>
-          </a:p>
-        </p:txBody>
-      </p:sp>
-      <p:sp>
-        <p:nvSpPr>
-          <p:cNvPr id="13" name="Shape 11"/>
-          <p:cNvSpPr/>
-          <p:nvPr/>
-        </p:nvSpPr>
-        <p:spPr>
-          <a:xfrm>
-            <a:off x="566928" y="2871216"/>
-            <a:ext cx="274320" cy="274320"/>
-          </a:xfrm>
-          <a:prstGeom prst="ellipse">
-            <a:avLst/>
-          </a:prstGeom>
-          <a:solidFill>
-            <a:srgbClr val="B85042"/>
-          </a:solidFill>
-          <a:ln/>
-        </p:spPr>
-      </p:sp>
-      <p:sp>
-        <p:nvSpPr>
-          <p:cNvPr id="14" name="Text 12"/>
-          <p:cNvSpPr txBox="1"/>
-          <p:nvPr/>
-        </p:nvSpPr>
-        <p:spPr>
-          <a:xfrm>
-            <a:off x="566928" y="2871216"/>
-            <a:ext cx="274320" cy="274320"/>
-          </a:xfrm>
-          <a:prstGeom prst="rect">
-            <a:avLst/>
-          </a:prstGeom>
-          <a:noFill/>
-          <a:ln/>
-        </p:spPr>
-        <p:txBody>
-          <a:bodyPr wrap="square" lIns="0" tIns="0" rIns="0" bIns="0" rtlCol="0" anchor="ctr"/>
-          <a:lstStyle/>
-          <a:p>
-            <a:pPr algn="ctr" indent="0" marL="0">
-              <a:buNone/>
-            </a:pPr>
-            <a:r>
-              <a:rPr lang="en-US" sz="1100" b="1" dirty="0">
-                <a:solidFill>
-                  <a:srgbClr val="FFFFFF"/>
-                </a:solidFill>
-                <a:latin typeface="Calibri" pitchFamily="34" charset="0"/>
-                <a:ea typeface="Calibri" pitchFamily="34" charset="-122"/>
-                <a:cs typeface="Calibri" pitchFamily="34" charset="-120"/>
-              </a:rPr>
-              <a:t>4</a:t>
-            </a:r>
-            <a:endParaRPr lang="en-US" sz="1100" dirty="0"/>
-          </a:p>
-        </p:txBody>
-      </p:sp>
-      <p:sp>
-        <p:nvSpPr>
-          <p:cNvPr id="15" name="Text 13"/>
-          <p:cNvSpPr txBox="1"/>
-          <p:nvPr/>
-        </p:nvSpPr>
-        <p:spPr>
-          <a:xfrm>
-            <a:off x="969264" y="2852928"/>
-            <a:ext cx="6025896" cy="365760"/>
-          </a:xfrm>
-          <a:prstGeom prst="rect">
-            <a:avLst/>
-          </a:prstGeom>
-          <a:noFill/>
-          <a:ln/>
-        </p:spPr>
-        <p:txBody>
-          <a:bodyPr wrap="square" lIns="0" tIns="0" rIns="0" bIns="0" rtlCol="0" anchor="t"/>
-          <a:lstStyle/>
-          <a:p>
+              <a:rPr lang="en-US" sz="1100" dirty="0">
+                <a:solidFill>
+                  <a:srgbClr val="222222"/>
+                </a:solidFill>
+                <a:latin typeface="Calibri" pitchFamily="34" charset="0"/>
+                <a:ea typeface="Calibri" pitchFamily="34" charset="-122"/>
+                <a:cs typeface="Calibri" pitchFamily="34" charset="-120"/>
+              </a:rPr>
+              <a:t>すでにお渡しした記録があります。</a:t>
+            </a:r>
             <a:pPr indent="0" marL="0">
               <a:lnSpc>
                 <a:spcPct val="125000"/>
@@ -6045,100 +5186,16 @@
               <a:buNone/>
             </a:pPr>
             <a:r>
-              <a:rPr lang="en-US" sz="1150" dirty="0">
-                <a:solidFill>
-                  <a:srgbClr val="222222"/>
-                </a:solidFill>
-                <a:latin typeface="Calibri" pitchFamily="34" charset="0"/>
-                <a:ea typeface="Calibri" pitchFamily="34" charset="-122"/>
-                <a:cs typeface="Calibri" pitchFamily="34" charset="-120"/>
-              </a:rPr>
-              <a:t>確認のメッセージが出たら「OK」を押す</a:t>
-            </a:r>
-            <a:endParaRPr lang="en-US" sz="1150" dirty="0"/>
-          </a:p>
-        </p:txBody>
-      </p:sp>
-      <p:sp>
-        <p:nvSpPr>
-          <p:cNvPr id="16" name="Shape 14"/>
-          <p:cNvSpPr/>
-          <p:nvPr/>
-        </p:nvSpPr>
-        <p:spPr>
-          <a:xfrm>
-            <a:off x="566928" y="3328416"/>
-            <a:ext cx="274320" cy="274320"/>
-          </a:xfrm>
-          <a:prstGeom prst="ellipse">
-            <a:avLst/>
-          </a:prstGeom>
-          <a:solidFill>
-            <a:srgbClr val="B85042"/>
-          </a:solidFill>
-          <a:ln/>
-        </p:spPr>
-      </p:sp>
-      <p:sp>
-        <p:nvSpPr>
-          <p:cNvPr id="17" name="Text 15"/>
-          <p:cNvSpPr txBox="1"/>
-          <p:nvPr/>
-        </p:nvSpPr>
-        <p:spPr>
-          <a:xfrm>
-            <a:off x="566928" y="3328416"/>
-            <a:ext cx="274320" cy="274320"/>
-          </a:xfrm>
-          <a:prstGeom prst="rect">
-            <a:avLst/>
-          </a:prstGeom>
-          <a:noFill/>
-          <a:ln/>
-        </p:spPr>
-        <p:txBody>
-          <a:bodyPr wrap="square" lIns="0" tIns="0" rIns="0" bIns="0" rtlCol="0" anchor="ctr"/>
-          <a:lstStyle/>
-          <a:p>
-            <a:pPr algn="ctr" indent="0" marL="0">
-              <a:buNone/>
-            </a:pPr>
-            <a:r>
               <a:rPr lang="en-US" sz="1100" b="1" dirty="0">
                 <a:solidFill>
-                  <a:srgbClr val="FFFFFF"/>
-                </a:solidFill>
-                <a:latin typeface="Calibri" pitchFamily="34" charset="0"/>
-                <a:ea typeface="Calibri" pitchFamily="34" charset="-122"/>
-                <a:cs typeface="Calibri" pitchFamily="34" charset="-120"/>
-              </a:rPr>
-              <a:t>5</a:t>
-            </a:r>
-            <a:endParaRPr lang="en-US" sz="1100" dirty="0"/>
-          </a:p>
-        </p:txBody>
-      </p:sp>
-      <p:sp>
-        <p:nvSpPr>
-          <p:cNvPr id="18" name="Text 16"/>
-          <p:cNvSpPr txBox="1"/>
-          <p:nvPr/>
-        </p:nvSpPr>
-        <p:spPr>
-          <a:xfrm>
-            <a:off x="969264" y="3310128"/>
-            <a:ext cx="6025896" cy="365760"/>
-          </a:xfrm>
-          <a:prstGeom prst="rect">
-            <a:avLst/>
-          </a:prstGeom>
-          <a:noFill/>
-          <a:ln/>
-        </p:spPr>
-        <p:txBody>
-          <a:bodyPr wrap="square" lIns="0" tIns="0" rIns="0" bIns="0" rtlCol="0" anchor="t"/>
-          <a:lstStyle/>
-          <a:p>
+                  <a:srgbClr val="222222"/>
+                </a:solidFill>
+                <a:latin typeface="Calibri" pitchFamily="34" charset="0"/>
+                <a:ea typeface="Calibri" pitchFamily="34" charset="-122"/>
+                <a:cs typeface="Calibri" pitchFamily="34" charset="-120"/>
+              </a:rPr>
+              <a:t>来場者にはその旨を表示していません。</a:t>
+            </a:r>
             <a:pPr indent="0" marL="0">
               <a:lnSpc>
                 <a:spcPct val="125000"/>
@@ -6146,41 +5203,16 @@
               <a:buNone/>
             </a:pPr>
             <a:r>
-              <a:rPr lang="en-US" sz="1150" dirty="0">
-                <a:solidFill>
-                  <a:srgbClr val="222222"/>
-                </a:solidFill>
-                <a:latin typeface="Calibri" pitchFamily="34" charset="0"/>
-                <a:ea typeface="Calibri" pitchFamily="34" charset="-122"/>
-                <a:cs typeface="Calibri" pitchFamily="34" charset="-120"/>
-              </a:rPr>
-              <a:t>「交換済みとして記録しました（景品名） 残数 ◯個」と出れば完了</a:t>
-            </a:r>
-            <a:endParaRPr lang="en-US" sz="1150" dirty="0"/>
-          </a:p>
-        </p:txBody>
-      </p:sp>
-      <p:sp>
-        <p:nvSpPr>
-          <p:cNvPr id="19" name="Text 17"/>
-          <p:cNvSpPr txBox="1"/>
-          <p:nvPr/>
-        </p:nvSpPr>
-        <p:spPr>
-          <a:xfrm>
-            <a:off x="566928" y="3767328"/>
-            <a:ext cx="6428232" cy="459994"/>
-          </a:xfrm>
-          <a:prstGeom prst="rect">
-            <a:avLst/>
-          </a:prstGeom>
-          <a:noFill/>
-          <a:ln/>
-        </p:spPr>
-        <p:txBody>
-          <a:bodyPr wrap="square" lIns="0" tIns="0" rIns="0" bIns="0" rtlCol="0" anchor="t"/>
-          <a:lstStyle/>
-          <a:p>
+              <a:rPr lang="en-US" sz="1100" dirty="0">
+                <a:solidFill>
+                  <a:srgbClr val="222222"/>
+                </a:solidFill>
+                <a:latin typeface="Calibri" pitchFamily="34" charset="0"/>
+                <a:ea typeface="Calibri" pitchFamily="34" charset="-122"/>
+                <a:cs typeface="Calibri" pitchFamily="34" charset="-120"/>
+              </a:rPr>
+              <a:t>「もう1回まわった」「まだもらっていない」などお申し出があれば、</a:t>
+            </a:r>
             <a:pPr indent="0" marL="0">
               <a:lnSpc>
                 <a:spcPct val="125000"/>
@@ -6188,15 +5220,15 @@
               <a:buNone/>
             </a:pPr>
             <a:r>
-              <a:rPr lang="en-US" sz="1100" dirty="0">
-                <a:solidFill>
-                  <a:srgbClr val="222222"/>
-                </a:solidFill>
-                <a:latin typeface="Calibri" pitchFamily="34" charset="0"/>
-                <a:ea typeface="Calibri" pitchFamily="34" charset="-122"/>
-                <a:cs typeface="Calibri" pitchFamily="34" charset="-120"/>
-              </a:rPr>
-              <a:t>次の方を対応するときは、</a:t>
+              <a:rPr lang="en-US" sz="1100" b="1" dirty="0">
+                <a:solidFill>
+                  <a:srgbClr val="222222"/>
+                </a:solidFill>
+                <a:latin typeface="Calibri" pitchFamily="34" charset="0"/>
+                <a:ea typeface="Calibri" pitchFamily="34" charset="-122"/>
+                <a:cs typeface="Calibri" pitchFamily="34" charset="-120"/>
+              </a:rPr>
+              <a:t>お渡しして構いません</a:t>
             </a:r>
             <a:pPr indent="0" marL="0">
               <a:lnSpc>
@@ -6205,23 +5237,6 @@
               <a:buNone/>
             </a:pPr>
             <a:r>
-              <a:rPr lang="en-US" sz="1100" b="1" dirty="0">
-                <a:solidFill>
-                  <a:srgbClr val="222222"/>
-                </a:solidFill>
-                <a:latin typeface="Calibri" pitchFamily="34" charset="0"/>
-                <a:ea typeface="Calibri" pitchFamily="34" charset="-122"/>
-                <a:cs typeface="Calibri" pitchFamily="34" charset="-120"/>
-              </a:rPr>
-              <a:t>「次の来場者を照会する」</a:t>
-            </a:r>
-            <a:pPr indent="0" marL="0">
-              <a:lnSpc>
-                <a:spcPct val="125000"/>
-              </a:lnSpc>
-              <a:buNone/>
-            </a:pPr>
-            <a:r>
               <a:rPr lang="en-US" sz="1100" dirty="0">
                 <a:solidFill>
                   <a:srgbClr val="222222"/>
@@ -6230,7 +5245,7 @@
                 <a:ea typeface="Calibri" pitchFamily="34" charset="-122"/>
                 <a:cs typeface="Calibri" pitchFamily="34" charset="-120"/>
               </a:rPr>
-              <a:t>を押してから、またQRコードを読み取ってください。</a:t>
+              <a:t>。判断に迷う場合は事務局にご確認ください。</a:t>
             </a:r>
             <a:endParaRPr lang="en-US" sz="1100" dirty="0"/>
           </a:p>
@@ -6238,41 +5253,41 @@
       </p:sp>
       <p:sp>
         <p:nvSpPr>
-          <p:cNvPr id="20" name="Shape 18"/>
+          <p:cNvPr id="9" name="Shape 7"/>
           <p:cNvSpPr/>
           <p:nvPr/>
         </p:nvSpPr>
         <p:spPr>
           <a:xfrm>
-            <a:off x="566928" y="4263898"/>
-            <a:ext cx="6428232" cy="2606040"/>
+            <a:off x="566928" y="3649853"/>
+            <a:ext cx="6428232" cy="431102"/>
           </a:xfrm>
           <a:prstGeom prst="roundRect">
             <a:avLst>
-              <a:gd name="adj" fmla="val 1754"/>
+              <a:gd name="adj" fmla="val 12726"/>
             </a:avLst>
           </a:prstGeom>
           <a:solidFill>
-            <a:srgbClr val="F7F7F7"/>
+            <a:srgbClr val="FAEAE7"/>
           </a:solidFill>
-          <a:ln w="12700">
+          <a:ln w="9525">
             <a:solidFill>
-              <a:srgbClr val="D8D8D8"/>
+              <a:srgbClr val="B85042"/>
             </a:solidFill>
-            <a:prstDash val="dash"/>
+            <a:prstDash val="solid"/>
           </a:ln>
         </p:spPr>
       </p:sp>
       <p:sp>
         <p:nvSpPr>
-          <p:cNvPr id="21" name="Text 19"/>
-          <p:cNvSpPr txBox="1"/>
-          <p:nvPr/>
-        </p:nvSpPr>
-        <p:spPr>
-          <a:xfrm>
-            <a:off x="749808" y="4647946"/>
-            <a:ext cx="6062472" cy="274320"/>
+          <p:cNvPr id="10" name="Text 8"/>
+          <p:cNvSpPr txBox="1"/>
+          <p:nvPr/>
+        </p:nvSpPr>
+        <p:spPr>
+          <a:xfrm>
+            <a:off x="658368" y="3741293"/>
+            <a:ext cx="237744" cy="237744"/>
           </a:xfrm>
           <a:prstGeom prst="rect">
             <a:avLst/>
@@ -6288,30 +5303,30 @@
               <a:buNone/>
             </a:pPr>
             <a:r>
-              <a:rPr lang="en-US" sz="1100" b="1" dirty="0">
-                <a:solidFill>
-                  <a:srgbClr val="6B6B6B"/>
-                </a:solidFill>
-                <a:latin typeface="Calibri" pitchFamily="34" charset="0"/>
-                <a:ea typeface="Calibri" pitchFamily="34" charset="-122"/>
-                <a:cs typeface="Calibri" pitchFamily="34" charset="-120"/>
-              </a:rPr>
-              <a:t>［ スクリーンショット ］ ここに貼り付けてください</a:t>
-            </a:r>
-            <a:endParaRPr lang="en-US" sz="1100" dirty="0"/>
-          </a:p>
-        </p:txBody>
-      </p:sp>
-      <p:sp>
-        <p:nvSpPr>
-          <p:cNvPr id="22" name="Text 20"/>
-          <p:cNvSpPr txBox="1"/>
-          <p:nvPr/>
-        </p:nvSpPr>
-        <p:spPr>
-          <a:xfrm>
-            <a:off x="841248" y="5013706"/>
-            <a:ext cx="5879592" cy="731520"/>
+              <a:rPr lang="en-US" sz="1200" b="1" dirty="0">
+                <a:solidFill>
+                  <a:srgbClr val="B85042"/>
+                </a:solidFill>
+                <a:latin typeface="Calibri" pitchFamily="34" charset="0"/>
+                <a:ea typeface="Calibri" pitchFamily="34" charset="-122"/>
+                <a:cs typeface="Calibri" pitchFamily="34" charset="-120"/>
+              </a:rPr>
+              <a:t>i</a:t>
+            </a:r>
+            <a:endParaRPr lang="en-US" sz="1200" dirty="0"/>
+          </a:p>
+        </p:txBody>
+      </p:sp>
+      <p:sp>
+        <p:nvSpPr>
+          <p:cNvPr id="11" name="Text 9"/>
+          <p:cNvSpPr txBox="1"/>
+          <p:nvPr/>
+        </p:nvSpPr>
+        <p:spPr>
+          <a:xfrm>
+            <a:off x="950976" y="3759581"/>
+            <a:ext cx="5925312" cy="248221"/>
           </a:xfrm>
           <a:prstGeom prst="rect">
             <a:avLst/>
@@ -6323,7 +5338,7 @@
           <a:bodyPr wrap="square" lIns="0" tIns="0" rIns="0" bIns="0" rtlCol="0" anchor="t"/>
           <a:lstStyle/>
           <a:p>
-            <a:pPr algn="ctr" indent="0" marL="0">
+            <a:pPr indent="0" marL="0">
               <a:lnSpc>
                 <a:spcPct val="120000"/>
               </a:lnSpc>
@@ -6338,7 +5353,7 @@
                 <a:ea typeface="Calibri" pitchFamily="34" charset="-122"/>
                 <a:cs typeface="Calibri" pitchFamily="34" charset="-120"/>
               </a:rPr>
-              <a:t>「交換済みとして記録しました」のメッセージが出ている画面。</a:t>
+              <a:t>画面には、その方が回答したブースの数も出ます。目安としてご覧ください。</a:t>
             </a:r>
             <a:endParaRPr lang="en-US" sz="1050" dirty="0"/>
           </a:p>
@@ -6346,7 +5361,178 @@
       </p:sp>
       <p:sp>
         <p:nvSpPr>
-          <p:cNvPr id="23" name="Text 21"/>
+          <p:cNvPr id="12" name="Shape 10"/>
+          <p:cNvSpPr/>
+          <p:nvPr/>
+        </p:nvSpPr>
+        <p:spPr>
+          <a:xfrm>
+            <a:off x="566928" y="4154107"/>
+            <a:ext cx="6428232" cy="624459"/>
+          </a:xfrm>
+          <a:prstGeom prst="roundRect">
+            <a:avLst>
+              <a:gd name="adj" fmla="val 8786"/>
+            </a:avLst>
+          </a:prstGeom>
+          <a:solidFill>
+            <a:srgbClr val="FDF0E6"/>
+          </a:solidFill>
+          <a:ln w="9525">
+            <a:solidFill>
+              <a:srgbClr val="E08A3C"/>
+            </a:solidFill>
+            <a:prstDash val="solid"/>
+          </a:ln>
+        </p:spPr>
+      </p:sp>
+      <p:sp>
+        <p:nvSpPr>
+          <p:cNvPr id="13" name="Text 11"/>
+          <p:cNvSpPr txBox="1"/>
+          <p:nvPr/>
+        </p:nvSpPr>
+        <p:spPr>
+          <a:xfrm>
+            <a:off x="658368" y="4245547"/>
+            <a:ext cx="237744" cy="237744"/>
+          </a:xfrm>
+          <a:prstGeom prst="rect">
+            <a:avLst/>
+          </a:prstGeom>
+          <a:noFill/>
+          <a:ln/>
+        </p:spPr>
+        <p:txBody>
+          <a:bodyPr wrap="square" lIns="0" tIns="0" rIns="0" bIns="0" rtlCol="0" anchor="ctr"/>
+          <a:lstStyle/>
+          <a:p>
+            <a:pPr algn="ctr" indent="0" marL="0">
+              <a:buNone/>
+            </a:pPr>
+            <a:r>
+              <a:rPr lang="en-US" sz="1200" b="1" dirty="0">
+                <a:solidFill>
+                  <a:srgbClr val="C25A17"/>
+                </a:solidFill>
+                <a:latin typeface="Calibri" pitchFamily="34" charset="0"/>
+                <a:ea typeface="Calibri" pitchFamily="34" charset="-122"/>
+                <a:cs typeface="Calibri" pitchFamily="34" charset="-120"/>
+              </a:rPr>
+              <a:t>！</a:t>
+            </a:r>
+            <a:endParaRPr lang="en-US" sz="1200" dirty="0"/>
+          </a:p>
+        </p:txBody>
+      </p:sp>
+      <p:sp>
+        <p:nvSpPr>
+          <p:cNvPr id="14" name="Text 12"/>
+          <p:cNvSpPr txBox="1"/>
+          <p:nvPr/>
+        </p:nvSpPr>
+        <p:spPr>
+          <a:xfrm>
+            <a:off x="950976" y="4263835"/>
+            <a:ext cx="5925312" cy="441579"/>
+          </a:xfrm>
+          <a:prstGeom prst="rect">
+            <a:avLst/>
+          </a:prstGeom>
+          <a:noFill/>
+          <a:ln/>
+        </p:spPr>
+        <p:txBody>
+          <a:bodyPr wrap="square" lIns="0" tIns="0" rIns="0" bIns="0" rtlCol="0" anchor="t"/>
+          <a:lstStyle/>
+          <a:p>
+            <a:pPr indent="0" marL="0">
+              <a:lnSpc>
+                <a:spcPct val="120000"/>
+              </a:lnSpc>
+              <a:buNone/>
+            </a:pPr>
+            <a:r>
+              <a:rPr lang="en-US" sz="1050" dirty="0">
+                <a:solidFill>
+                  <a:srgbClr val="222222"/>
+                </a:solidFill>
+                <a:latin typeface="Calibri" pitchFamily="34" charset="0"/>
+                <a:ea typeface="Calibri" pitchFamily="34" charset="-122"/>
+                <a:cs typeface="Calibri" pitchFamily="34" charset="-120"/>
+              </a:rPr>
+              <a:t>在庫がなくなった景品も選べます。実際にお渡ししたものを記録することを優先してください（あとで用意した数を超えた分が分かるようになっています）。</a:t>
+            </a:r>
+            <a:endParaRPr lang="en-US" sz="1050" dirty="0"/>
+          </a:p>
+        </p:txBody>
+      </p:sp>
+      <p:pic>
+        <p:nvPicPr>
+          <p:cNvPr id="15" name="Image 0" descr="C:\Users\sato\Desktop\enque\docs\images\p-claim-open.png">    </p:cNvPr>
+          <p:cNvPicPr>
+            <a:picLocks noChangeAspect="1"/>
+          </p:cNvPicPr>
+          <p:nvPr/>
+        </p:nvPicPr>
+        <p:blipFill>
+          <a:blip r:embed="rId1"/>
+          <a:stretch>
+            <a:fillRect/>
+          </a:stretch>
+        </p:blipFill>
+        <p:spPr>
+          <a:xfrm>
+            <a:off x="2632342" y="4851718"/>
+            <a:ext cx="2297403" cy="3474720"/>
+          </a:xfrm>
+          <a:prstGeom prst="rect">
+            <a:avLst/>
+          </a:prstGeom>
+        </p:spPr>
+      </p:pic>
+      <p:sp>
+        <p:nvSpPr>
+          <p:cNvPr id="16" name="Text 13"/>
+          <p:cNvSpPr txBox="1"/>
+          <p:nvPr/>
+        </p:nvSpPr>
+        <p:spPr>
+          <a:xfrm>
+            <a:off x="566928" y="8381302"/>
+            <a:ext cx="6428232" cy="274320"/>
+          </a:xfrm>
+          <a:prstGeom prst="rect">
+            <a:avLst/>
+          </a:prstGeom>
+          <a:noFill/>
+          <a:ln/>
+        </p:spPr>
+        <p:txBody>
+          <a:bodyPr wrap="square" lIns="0" tIns="0" rIns="0" bIns="0" rtlCol="0" anchor="ctr"/>
+          <a:lstStyle/>
+          <a:p>
+            <a:pPr algn="ctr" indent="0" marL="0">
+              <a:buNone/>
+            </a:pPr>
+            <a:r>
+              <a:rPr lang="en-US" sz="950" dirty="0">
+                <a:solidFill>
+                  <a:srgbClr val="6B6B6B"/>
+                </a:solidFill>
+                <a:latin typeface="Calibri" pitchFamily="34" charset="0"/>
+                <a:ea typeface="Calibri" pitchFamily="34" charset="-122"/>
+                <a:cs typeface="Calibri" pitchFamily="34" charset="-120"/>
+              </a:rPr>
+              <a:t>照会結果の画面。「未交換です」の表示と、景品を選ぶプルダウン（残りの数が見えるもの）。</a:t>
+            </a:r>
+            <a:endParaRPr lang="en-US" sz="950" dirty="0"/>
+          </a:p>
+        </p:txBody>
+      </p:sp>
+      <p:sp>
+        <p:nvSpPr>
+          <p:cNvPr id="17" name="Text 14"/>
           <p:cNvSpPr txBox="1"/>
           <p:nvPr/>
         </p:nvSpPr>
@@ -6487,7 +5673,7 @@
                 <a:ea typeface="Calibri" pitchFamily="34" charset="-122"/>
                 <a:cs typeface="Calibri" pitchFamily="34" charset="-120"/>
               </a:rPr>
-              <a:t>残りの数を確認する</a:t>
+              <a:t>手順3：交換済みにする</a:t>
             </a:r>
             <a:endParaRPr lang="en-US" sz="2200" dirty="0"/>
           </a:p>
@@ -6495,14 +5681,73 @@
       </p:sp>
       <p:sp>
         <p:nvSpPr>
-          <p:cNvPr id="4" name="Text 2"/>
-          <p:cNvSpPr txBox="1"/>
-          <p:nvPr/>
-        </p:nvSpPr>
-        <p:spPr>
-          <a:xfrm>
-            <a:off x="566928" y="1481328"/>
-            <a:ext cx="6428232" cy="257429"/>
+          <p:cNvPr id="4" name="Shape 2"/>
+          <p:cNvSpPr/>
+          <p:nvPr/>
+        </p:nvSpPr>
+        <p:spPr>
+          <a:xfrm>
+            <a:off x="566928" y="1499616"/>
+            <a:ext cx="274320" cy="274320"/>
+          </a:xfrm>
+          <a:prstGeom prst="ellipse">
+            <a:avLst/>
+          </a:prstGeom>
+          <a:solidFill>
+            <a:srgbClr val="B85042"/>
+          </a:solidFill>
+          <a:ln/>
+        </p:spPr>
+      </p:sp>
+      <p:sp>
+        <p:nvSpPr>
+          <p:cNvPr id="5" name="Text 3"/>
+          <p:cNvSpPr txBox="1"/>
+          <p:nvPr/>
+        </p:nvSpPr>
+        <p:spPr>
+          <a:xfrm>
+            <a:off x="566928" y="1499616"/>
+            <a:ext cx="274320" cy="274320"/>
+          </a:xfrm>
+          <a:prstGeom prst="rect">
+            <a:avLst/>
+          </a:prstGeom>
+          <a:noFill/>
+          <a:ln/>
+        </p:spPr>
+        <p:txBody>
+          <a:bodyPr wrap="square" lIns="0" tIns="0" rIns="0" bIns="0" rtlCol="0" anchor="ctr"/>
+          <a:lstStyle/>
+          <a:p>
+            <a:pPr algn="ctr" indent="0" marL="0">
+              <a:buNone/>
+            </a:pPr>
+            <a:r>
+              <a:rPr lang="en-US" sz="1100" b="1" dirty="0">
+                <a:solidFill>
+                  <a:srgbClr val="FFFFFF"/>
+                </a:solidFill>
+                <a:latin typeface="Calibri" pitchFamily="34" charset="0"/>
+                <a:ea typeface="Calibri" pitchFamily="34" charset="-122"/>
+                <a:cs typeface="Calibri" pitchFamily="34" charset="-120"/>
+              </a:rPr>
+              <a:t>1</a:t>
+            </a:r>
+            <a:endParaRPr lang="en-US" sz="1100" dirty="0"/>
+          </a:p>
+        </p:txBody>
+      </p:sp>
+      <p:sp>
+        <p:nvSpPr>
+          <p:cNvPr id="6" name="Text 4"/>
+          <p:cNvSpPr txBox="1"/>
+          <p:nvPr/>
+        </p:nvSpPr>
+        <p:spPr>
+          <a:xfrm>
+            <a:off x="969264" y="1481328"/>
+            <a:ext cx="6025896" cy="365760"/>
           </a:xfrm>
           <a:prstGeom prst="rect">
             <a:avLst/>
@@ -6521,15 +5766,15 @@
               <a:buNone/>
             </a:pPr>
             <a:r>
-              <a:rPr lang="en-US" sz="1100" dirty="0">
-                <a:solidFill>
-                  <a:srgbClr val="222222"/>
-                </a:solidFill>
-                <a:latin typeface="Calibri" pitchFamily="34" charset="0"/>
-                <a:ea typeface="Calibri" pitchFamily="34" charset="-122"/>
-                <a:cs typeface="Calibri" pitchFamily="34" charset="-120"/>
-              </a:rPr>
-              <a:t>照会画面の下に、</a:t>
+              <a:rPr lang="en-US" sz="1150" b="1" dirty="0">
+                <a:solidFill>
+                  <a:srgbClr val="222222"/>
+                </a:solidFill>
+                <a:latin typeface="Calibri" pitchFamily="34" charset="0"/>
+                <a:ea typeface="Calibri" pitchFamily="34" charset="-122"/>
+                <a:cs typeface="Calibri" pitchFamily="34" charset="-120"/>
+              </a:rPr>
+              <a:t>渡す景品</a:t>
             </a:r>
             <a:pPr indent="0" marL="0">
               <a:lnSpc>
@@ -6538,16 +5783,100 @@
               <a:buNone/>
             </a:pPr>
             <a:r>
+              <a:rPr lang="en-US" sz="1150" dirty="0">
+                <a:solidFill>
+                  <a:srgbClr val="222222"/>
+                </a:solidFill>
+                <a:latin typeface="Calibri" pitchFamily="34" charset="0"/>
+                <a:ea typeface="Calibri" pitchFamily="34" charset="-122"/>
+                <a:cs typeface="Calibri" pitchFamily="34" charset="-120"/>
+              </a:rPr>
+              <a:t>を選ぶ</a:t>
+            </a:r>
+            <a:endParaRPr lang="en-US" sz="1150" dirty="0"/>
+          </a:p>
+        </p:txBody>
+      </p:sp>
+      <p:sp>
+        <p:nvSpPr>
+          <p:cNvPr id="7" name="Shape 5"/>
+          <p:cNvSpPr/>
+          <p:nvPr/>
+        </p:nvSpPr>
+        <p:spPr>
+          <a:xfrm>
+            <a:off x="566928" y="1956816"/>
+            <a:ext cx="274320" cy="274320"/>
+          </a:xfrm>
+          <a:prstGeom prst="ellipse">
+            <a:avLst/>
+          </a:prstGeom>
+          <a:solidFill>
+            <a:srgbClr val="B85042"/>
+          </a:solidFill>
+          <a:ln/>
+        </p:spPr>
+      </p:sp>
+      <p:sp>
+        <p:nvSpPr>
+          <p:cNvPr id="8" name="Text 6"/>
+          <p:cNvSpPr txBox="1"/>
+          <p:nvPr/>
+        </p:nvSpPr>
+        <p:spPr>
+          <a:xfrm>
+            <a:off x="566928" y="1956816"/>
+            <a:ext cx="274320" cy="274320"/>
+          </a:xfrm>
+          <a:prstGeom prst="rect">
+            <a:avLst/>
+          </a:prstGeom>
+          <a:noFill/>
+          <a:ln/>
+        </p:spPr>
+        <p:txBody>
+          <a:bodyPr wrap="square" lIns="0" tIns="0" rIns="0" bIns="0" rtlCol="0" anchor="ctr"/>
+          <a:lstStyle/>
+          <a:p>
+            <a:pPr algn="ctr" indent="0" marL="0">
+              <a:buNone/>
+            </a:pPr>
+            <a:r>
               <a:rPr lang="en-US" sz="1100" b="1" dirty="0">
                 <a:solidFill>
-                  <a:srgbClr val="222222"/>
-                </a:solidFill>
-                <a:latin typeface="Calibri" pitchFamily="34" charset="0"/>
-                <a:ea typeface="Calibri" pitchFamily="34" charset="-122"/>
-                <a:cs typeface="Calibri" pitchFamily="34" charset="-120"/>
-              </a:rPr>
-              <a:t>景品の残数</a:t>
-            </a:r>
+                  <a:srgbClr val="FFFFFF"/>
+                </a:solidFill>
+                <a:latin typeface="Calibri" pitchFamily="34" charset="0"/>
+                <a:ea typeface="Calibri" pitchFamily="34" charset="-122"/>
+                <a:cs typeface="Calibri" pitchFamily="34" charset="-120"/>
+              </a:rPr>
+              <a:t>2</a:t>
+            </a:r>
+            <a:endParaRPr lang="en-US" sz="1100" dirty="0"/>
+          </a:p>
+        </p:txBody>
+      </p:sp>
+      <p:sp>
+        <p:nvSpPr>
+          <p:cNvPr id="9" name="Text 7"/>
+          <p:cNvSpPr txBox="1"/>
+          <p:nvPr/>
+        </p:nvSpPr>
+        <p:spPr>
+          <a:xfrm>
+            <a:off x="969264" y="1938528"/>
+            <a:ext cx="6025896" cy="365760"/>
+          </a:xfrm>
+          <a:prstGeom prst="rect">
+            <a:avLst/>
+          </a:prstGeom>
+          <a:noFill/>
+          <a:ln/>
+        </p:spPr>
+        <p:txBody>
+          <a:bodyPr wrap="square" lIns="0" tIns="0" rIns="0" bIns="0" rtlCol="0" anchor="t"/>
+          <a:lstStyle/>
+          <a:p>
             <a:pPr indent="0" marL="0">
               <a:lnSpc>
                 <a:spcPct val="125000"/>
@@ -6555,15 +5884,74 @@
               <a:buNone/>
             </a:pPr>
             <a:r>
-              <a:rPr lang="en-US" sz="1100" dirty="0">
-                <a:solidFill>
-                  <a:srgbClr val="222222"/>
-                </a:solidFill>
-                <a:latin typeface="Calibri" pitchFamily="34" charset="0"/>
-                <a:ea typeface="Calibri" pitchFamily="34" charset="-122"/>
-                <a:cs typeface="Calibri" pitchFamily="34" charset="-120"/>
-              </a:rPr>
-              <a:t>の表があります。</a:t>
+              <a:rPr lang="en-US" sz="1150" dirty="0">
+                <a:solidFill>
+                  <a:srgbClr val="222222"/>
+                </a:solidFill>
+                <a:latin typeface="Calibri" pitchFamily="34" charset="0"/>
+                <a:ea typeface="Calibri" pitchFamily="34" charset="-122"/>
+                <a:cs typeface="Calibri" pitchFamily="34" charset="-120"/>
+              </a:rPr>
+              <a:t>必要ならメモ欄に記入する（例：在庫切れのため別の景品に変更）</a:t>
+            </a:r>
+            <a:endParaRPr lang="en-US" sz="1150" dirty="0"/>
+          </a:p>
+        </p:txBody>
+      </p:sp>
+      <p:sp>
+        <p:nvSpPr>
+          <p:cNvPr id="10" name="Shape 8"/>
+          <p:cNvSpPr/>
+          <p:nvPr/>
+        </p:nvSpPr>
+        <p:spPr>
+          <a:xfrm>
+            <a:off x="566928" y="2414016"/>
+            <a:ext cx="274320" cy="274320"/>
+          </a:xfrm>
+          <a:prstGeom prst="ellipse">
+            <a:avLst/>
+          </a:prstGeom>
+          <a:solidFill>
+            <a:srgbClr val="B85042"/>
+          </a:solidFill>
+          <a:ln/>
+        </p:spPr>
+      </p:sp>
+      <p:sp>
+        <p:nvSpPr>
+          <p:cNvPr id="11" name="Text 9"/>
+          <p:cNvSpPr txBox="1"/>
+          <p:nvPr/>
+        </p:nvSpPr>
+        <p:spPr>
+          <a:xfrm>
+            <a:off x="566928" y="2414016"/>
+            <a:ext cx="274320" cy="274320"/>
+          </a:xfrm>
+          <a:prstGeom prst="rect">
+            <a:avLst/>
+          </a:prstGeom>
+          <a:noFill/>
+          <a:ln/>
+        </p:spPr>
+        <p:txBody>
+          <a:bodyPr wrap="square" lIns="0" tIns="0" rIns="0" bIns="0" rtlCol="0" anchor="ctr"/>
+          <a:lstStyle/>
+          <a:p>
+            <a:pPr algn="ctr" indent="0" marL="0">
+              <a:buNone/>
+            </a:pPr>
+            <a:r>
+              <a:rPr lang="en-US" sz="1100" b="1" dirty="0">
+                <a:solidFill>
+                  <a:srgbClr val="FFFFFF"/>
+                </a:solidFill>
+                <a:latin typeface="Calibri" pitchFamily="34" charset="0"/>
+                <a:ea typeface="Calibri" pitchFamily="34" charset="-122"/>
+                <a:cs typeface="Calibri" pitchFamily="34" charset="-120"/>
+              </a:rPr>
+              <a:t>3</a:t>
             </a:r>
             <a:endParaRPr lang="en-US" sz="1100" dirty="0"/>
           </a:p>
@@ -6571,14 +5959,14 @@
       </p:sp>
       <p:sp>
         <p:nvSpPr>
-          <p:cNvPr id="5" name="Text 3"/>
-          <p:cNvSpPr txBox="1"/>
-          <p:nvPr/>
-        </p:nvSpPr>
-        <p:spPr>
-          <a:xfrm>
-            <a:off x="713232" y="1775333"/>
-            <a:ext cx="6281928" cy="257429"/>
+          <p:cNvPr id="12" name="Text 10"/>
+          <p:cNvSpPr txBox="1"/>
+          <p:nvPr/>
+        </p:nvSpPr>
+        <p:spPr>
+          <a:xfrm>
+            <a:off x="969264" y="2395728"/>
+            <a:ext cx="6025896" cy="365760"/>
           </a:xfrm>
           <a:prstGeom prst="rect">
             <a:avLst/>
@@ -6590,23 +5978,22 @@
           <a:bodyPr wrap="square" lIns="0" tIns="0" rIns="0" bIns="0" rtlCol="0" anchor="t"/>
           <a:lstStyle/>
           <a:p>
-            <a:pPr marL="342900" indent="-342900">
+            <a:pPr indent="0" marL="0">
               <a:lnSpc>
                 <a:spcPct val="125000"/>
               </a:lnSpc>
-              <a:buSzPct val="100000"/>
-              <a:buChar char="●"/>
-            </a:pPr>
-            <a:r>
-              <a:rPr lang="en-US" sz="1100" b="1" dirty="0">
-                <a:solidFill>
-                  <a:srgbClr val="222222"/>
-                </a:solidFill>
-                <a:latin typeface="Calibri" pitchFamily="34" charset="0"/>
-                <a:ea typeface="Calibri" pitchFamily="34" charset="-122"/>
-                <a:cs typeface="Calibri" pitchFamily="34" charset="-120"/>
-              </a:rPr>
-              <a:t>用意</a:t>
+              <a:buNone/>
+            </a:pPr>
+            <a:r>
+              <a:rPr lang="en-US" sz="1150" b="1" dirty="0">
+                <a:solidFill>
+                  <a:srgbClr val="222222"/>
+                </a:solidFill>
+                <a:latin typeface="Calibri" pitchFamily="34" charset="0"/>
+                <a:ea typeface="Calibri" pitchFamily="34" charset="-122"/>
+                <a:cs typeface="Calibri" pitchFamily="34" charset="-120"/>
+              </a:rPr>
+              <a:t>「交換済みにする」</a:t>
             </a:r>
             <a:pPr indent="0" marL="0">
               <a:lnSpc>
@@ -6615,15 +6002,74 @@
               <a:buNone/>
             </a:pPr>
             <a:r>
-              <a:rPr lang="en-US" sz="1100" dirty="0">
-                <a:solidFill>
-                  <a:srgbClr val="222222"/>
-                </a:solidFill>
-                <a:latin typeface="Calibri" pitchFamily="34" charset="0"/>
-                <a:ea typeface="Calibri" pitchFamily="34" charset="-122"/>
-                <a:cs typeface="Calibri" pitchFamily="34" charset="-120"/>
-              </a:rPr>
-              <a:t>：事務局が登録した数量</a:t>
+              <a:rPr lang="en-US" sz="1150" dirty="0">
+                <a:solidFill>
+                  <a:srgbClr val="222222"/>
+                </a:solidFill>
+                <a:latin typeface="Calibri" pitchFamily="34" charset="0"/>
+                <a:ea typeface="Calibri" pitchFamily="34" charset="-122"/>
+                <a:cs typeface="Calibri" pitchFamily="34" charset="-120"/>
+              </a:rPr>
+              <a:t>を押す</a:t>
+            </a:r>
+            <a:endParaRPr lang="en-US" sz="1150" dirty="0"/>
+          </a:p>
+        </p:txBody>
+      </p:sp>
+      <p:sp>
+        <p:nvSpPr>
+          <p:cNvPr id="13" name="Shape 11"/>
+          <p:cNvSpPr/>
+          <p:nvPr/>
+        </p:nvSpPr>
+        <p:spPr>
+          <a:xfrm>
+            <a:off x="566928" y="2871216"/>
+            <a:ext cx="274320" cy="274320"/>
+          </a:xfrm>
+          <a:prstGeom prst="ellipse">
+            <a:avLst/>
+          </a:prstGeom>
+          <a:solidFill>
+            <a:srgbClr val="B85042"/>
+          </a:solidFill>
+          <a:ln/>
+        </p:spPr>
+      </p:sp>
+      <p:sp>
+        <p:nvSpPr>
+          <p:cNvPr id="14" name="Text 12"/>
+          <p:cNvSpPr txBox="1"/>
+          <p:nvPr/>
+        </p:nvSpPr>
+        <p:spPr>
+          <a:xfrm>
+            <a:off x="566928" y="2871216"/>
+            <a:ext cx="274320" cy="274320"/>
+          </a:xfrm>
+          <a:prstGeom prst="rect">
+            <a:avLst/>
+          </a:prstGeom>
+          <a:noFill/>
+          <a:ln/>
+        </p:spPr>
+        <p:txBody>
+          <a:bodyPr wrap="square" lIns="0" tIns="0" rIns="0" bIns="0" rtlCol="0" anchor="ctr"/>
+          <a:lstStyle/>
+          <a:p>
+            <a:pPr algn="ctr" indent="0" marL="0">
+              <a:buNone/>
+            </a:pPr>
+            <a:r>
+              <a:rPr lang="en-US" sz="1100" b="1" dirty="0">
+                <a:solidFill>
+                  <a:srgbClr val="FFFFFF"/>
+                </a:solidFill>
+                <a:latin typeface="Calibri" pitchFamily="34" charset="0"/>
+                <a:ea typeface="Calibri" pitchFamily="34" charset="-122"/>
+                <a:cs typeface="Calibri" pitchFamily="34" charset="-120"/>
+              </a:rPr>
+              <a:t>4</a:t>
             </a:r>
             <a:endParaRPr lang="en-US" sz="1100" dirty="0"/>
           </a:p>
@@ -6631,14 +6077,14 @@
       </p:sp>
       <p:sp>
         <p:nvSpPr>
-          <p:cNvPr id="6" name="Text 4"/>
-          <p:cNvSpPr txBox="1"/>
-          <p:nvPr/>
-        </p:nvSpPr>
-        <p:spPr>
-          <a:xfrm>
-            <a:off x="713232" y="2051050"/>
-            <a:ext cx="6281928" cy="257429"/>
+          <p:cNvPr id="15" name="Text 13"/>
+          <p:cNvSpPr txBox="1"/>
+          <p:nvPr/>
+        </p:nvSpPr>
+        <p:spPr>
+          <a:xfrm>
+            <a:off x="969264" y="2852928"/>
+            <a:ext cx="6025896" cy="365760"/>
           </a:xfrm>
           <a:prstGeom prst="rect">
             <a:avLst/>
@@ -6650,24 +6096,107 @@
           <a:bodyPr wrap="square" lIns="0" tIns="0" rIns="0" bIns="0" rtlCol="0" anchor="t"/>
           <a:lstStyle/>
           <a:p>
-            <a:pPr marL="342900" indent="-342900">
+            <a:pPr indent="0" marL="0">
               <a:lnSpc>
                 <a:spcPct val="125000"/>
               </a:lnSpc>
-              <a:buSzPct val="100000"/>
-              <a:buChar char="●"/>
+              <a:buNone/>
+            </a:pPr>
+            <a:r>
+              <a:rPr lang="en-US" sz="1150" dirty="0">
+                <a:solidFill>
+                  <a:srgbClr val="222222"/>
+                </a:solidFill>
+                <a:latin typeface="Calibri" pitchFamily="34" charset="0"/>
+                <a:ea typeface="Calibri" pitchFamily="34" charset="-122"/>
+                <a:cs typeface="Calibri" pitchFamily="34" charset="-120"/>
+              </a:rPr>
+              <a:t>確認のメッセージが出たら「OK」を押す</a:t>
+            </a:r>
+            <a:endParaRPr lang="en-US" sz="1150" dirty="0"/>
+          </a:p>
+        </p:txBody>
+      </p:sp>
+      <p:sp>
+        <p:nvSpPr>
+          <p:cNvPr id="16" name="Shape 14"/>
+          <p:cNvSpPr/>
+          <p:nvPr/>
+        </p:nvSpPr>
+        <p:spPr>
+          <a:xfrm>
+            <a:off x="566928" y="3328416"/>
+            <a:ext cx="274320" cy="274320"/>
+          </a:xfrm>
+          <a:prstGeom prst="ellipse">
+            <a:avLst/>
+          </a:prstGeom>
+          <a:solidFill>
+            <a:srgbClr val="B85042"/>
+          </a:solidFill>
+          <a:ln/>
+        </p:spPr>
+      </p:sp>
+      <p:sp>
+        <p:nvSpPr>
+          <p:cNvPr id="17" name="Text 15"/>
+          <p:cNvSpPr txBox="1"/>
+          <p:nvPr/>
+        </p:nvSpPr>
+        <p:spPr>
+          <a:xfrm>
+            <a:off x="566928" y="3328416"/>
+            <a:ext cx="274320" cy="274320"/>
+          </a:xfrm>
+          <a:prstGeom prst="rect">
+            <a:avLst/>
+          </a:prstGeom>
+          <a:noFill/>
+          <a:ln/>
+        </p:spPr>
+        <p:txBody>
+          <a:bodyPr wrap="square" lIns="0" tIns="0" rIns="0" bIns="0" rtlCol="0" anchor="ctr"/>
+          <a:lstStyle/>
+          <a:p>
+            <a:pPr algn="ctr" indent="0" marL="0">
+              <a:buNone/>
             </a:pPr>
             <a:r>
               <a:rPr lang="en-US" sz="1100" b="1" dirty="0">
                 <a:solidFill>
-                  <a:srgbClr val="222222"/>
-                </a:solidFill>
-                <a:latin typeface="Calibri" pitchFamily="34" charset="0"/>
-                <a:ea typeface="Calibri" pitchFamily="34" charset="-122"/>
-                <a:cs typeface="Calibri" pitchFamily="34" charset="-120"/>
-              </a:rPr>
-              <a:t>交換済み</a:t>
-            </a:r>
+                  <a:srgbClr val="FFFFFF"/>
+                </a:solidFill>
+                <a:latin typeface="Calibri" pitchFamily="34" charset="0"/>
+                <a:ea typeface="Calibri" pitchFamily="34" charset="-122"/>
+                <a:cs typeface="Calibri" pitchFamily="34" charset="-120"/>
+              </a:rPr>
+              <a:t>5</a:t>
+            </a:r>
+            <a:endParaRPr lang="en-US" sz="1100" dirty="0"/>
+          </a:p>
+        </p:txBody>
+      </p:sp>
+      <p:sp>
+        <p:nvSpPr>
+          <p:cNvPr id="18" name="Text 16"/>
+          <p:cNvSpPr txBox="1"/>
+          <p:nvPr/>
+        </p:nvSpPr>
+        <p:spPr>
+          <a:xfrm>
+            <a:off x="969264" y="3310128"/>
+            <a:ext cx="6025896" cy="365760"/>
+          </a:xfrm>
+          <a:prstGeom prst="rect">
+            <a:avLst/>
+          </a:prstGeom>
+          <a:noFill/>
+          <a:ln/>
+        </p:spPr>
+        <p:txBody>
+          <a:bodyPr wrap="square" lIns="0" tIns="0" rIns="0" bIns="0" rtlCol="0" anchor="t"/>
+          <a:lstStyle/>
+          <a:p>
             <a:pPr indent="0" marL="0">
               <a:lnSpc>
                 <a:spcPct val="125000"/>
@@ -6675,30 +6204,30 @@
               <a:buNone/>
             </a:pPr>
             <a:r>
-              <a:rPr lang="en-US" sz="1100" dirty="0">
-                <a:solidFill>
-                  <a:srgbClr val="222222"/>
-                </a:solidFill>
-                <a:latin typeface="Calibri" pitchFamily="34" charset="0"/>
-                <a:ea typeface="Calibri" pitchFamily="34" charset="-122"/>
-                <a:cs typeface="Calibri" pitchFamily="34" charset="-120"/>
-              </a:rPr>
-              <a:t>：これまでにお渡しした数</a:t>
-            </a:r>
-            <a:endParaRPr lang="en-US" sz="1100" dirty="0"/>
-          </a:p>
-        </p:txBody>
-      </p:sp>
-      <p:sp>
-        <p:nvSpPr>
-          <p:cNvPr id="7" name="Text 5"/>
-          <p:cNvSpPr txBox="1"/>
-          <p:nvPr/>
-        </p:nvSpPr>
-        <p:spPr>
-          <a:xfrm>
-            <a:off x="713232" y="2326767"/>
-            <a:ext cx="6281928" cy="257429"/>
+              <a:rPr lang="en-US" sz="1150" dirty="0">
+                <a:solidFill>
+                  <a:srgbClr val="222222"/>
+                </a:solidFill>
+                <a:latin typeface="Calibri" pitchFamily="34" charset="0"/>
+                <a:ea typeface="Calibri" pitchFamily="34" charset="-122"/>
+                <a:cs typeface="Calibri" pitchFamily="34" charset="-120"/>
+              </a:rPr>
+              <a:t>「交換済みとして記録しました（景品名） 残数 ◯個」と出れば完了</a:t>
+            </a:r>
+            <a:endParaRPr lang="en-US" sz="1150" dirty="0"/>
+          </a:p>
+        </p:txBody>
+      </p:sp>
+      <p:sp>
+        <p:nvSpPr>
+          <p:cNvPr id="19" name="Text 17"/>
+          <p:cNvSpPr txBox="1"/>
+          <p:nvPr/>
+        </p:nvSpPr>
+        <p:spPr>
+          <a:xfrm>
+            <a:off x="566928" y="3767328"/>
+            <a:ext cx="6428232" cy="459994"/>
           </a:xfrm>
           <a:prstGeom prst="rect">
             <a:avLst/>
@@ -6710,23 +6239,22 @@
           <a:bodyPr wrap="square" lIns="0" tIns="0" rIns="0" bIns="0" rtlCol="0" anchor="t"/>
           <a:lstStyle/>
           <a:p>
-            <a:pPr marL="342900" indent="-342900">
+            <a:pPr indent="0" marL="0">
               <a:lnSpc>
                 <a:spcPct val="125000"/>
               </a:lnSpc>
-              <a:buSzPct val="100000"/>
-              <a:buChar char="●"/>
-            </a:pPr>
-            <a:r>
-              <a:rPr lang="en-US" sz="1100" b="1" dirty="0">
-                <a:solidFill>
-                  <a:srgbClr val="222222"/>
-                </a:solidFill>
-                <a:latin typeface="Calibri" pitchFamily="34" charset="0"/>
-                <a:ea typeface="Calibri" pitchFamily="34" charset="-122"/>
-                <a:cs typeface="Calibri" pitchFamily="34" charset="-120"/>
-              </a:rPr>
-              <a:t>残り</a:t>
+              <a:buNone/>
+            </a:pPr>
+            <a:r>
+              <a:rPr lang="en-US" sz="1100" dirty="0">
+                <a:solidFill>
+                  <a:srgbClr val="222222"/>
+                </a:solidFill>
+                <a:latin typeface="Calibri" pitchFamily="34" charset="0"/>
+                <a:ea typeface="Calibri" pitchFamily="34" charset="-122"/>
+                <a:cs typeface="Calibri" pitchFamily="34" charset="-120"/>
+              </a:rPr>
+              <a:t>次の方を対応するときは、</a:t>
             </a:r>
             <a:pPr indent="0" marL="0">
               <a:lnSpc>
@@ -6735,63 +6263,20 @@
               <a:buNone/>
             </a:pPr>
             <a:r>
-              <a:rPr lang="en-US" sz="1100" dirty="0">
-                <a:solidFill>
-                  <a:srgbClr val="222222"/>
-                </a:solidFill>
-                <a:latin typeface="Calibri" pitchFamily="34" charset="0"/>
-                <a:ea typeface="Calibri" pitchFamily="34" charset="-122"/>
-                <a:cs typeface="Calibri" pitchFamily="34" charset="-120"/>
-              </a:rPr>
-              <a:t>：残っている数（「—」は数量を管理していない景品）</a:t>
-            </a:r>
-            <a:endParaRPr lang="en-US" sz="1100" dirty="0"/>
-          </a:p>
-        </p:txBody>
-      </p:sp>
-      <p:sp>
-        <p:nvSpPr>
-          <p:cNvPr id="8" name="Text 6"/>
-          <p:cNvSpPr txBox="1"/>
-          <p:nvPr/>
-        </p:nvSpPr>
-        <p:spPr>
-          <a:xfrm>
-            <a:off x="713232" y="2602484"/>
-            <a:ext cx="6281928" cy="257429"/>
-          </a:xfrm>
-          <a:prstGeom prst="rect">
-            <a:avLst/>
-          </a:prstGeom>
-          <a:noFill/>
-          <a:ln/>
-        </p:spPr>
-        <p:txBody>
-          <a:bodyPr wrap="square" lIns="0" tIns="0" rIns="0" bIns="0" rtlCol="0" anchor="t"/>
-          <a:lstStyle/>
-          <a:p>
-            <a:pPr marL="342900" indent="-342900">
+              <a:rPr lang="en-US" sz="1100" b="1" dirty="0">
+                <a:solidFill>
+                  <a:srgbClr val="222222"/>
+                </a:solidFill>
+                <a:latin typeface="Calibri" pitchFamily="34" charset="0"/>
+                <a:ea typeface="Calibri" pitchFamily="34" charset="-122"/>
+                <a:cs typeface="Calibri" pitchFamily="34" charset="-120"/>
+              </a:rPr>
+              <a:t>「次の来場者を照会する」</a:t>
+            </a:r>
+            <a:pPr indent="0" marL="0">
               <a:lnSpc>
                 <a:spcPct val="125000"/>
               </a:lnSpc>
-              <a:buSzPct val="100000"/>
-              <a:buChar char="●"/>
-            </a:pPr>
-            <a:r>
-              <a:rPr lang="en-US" sz="1100" b="1" dirty="0">
-                <a:solidFill>
-                  <a:srgbClr val="222222"/>
-                </a:solidFill>
-                <a:latin typeface="Calibri" pitchFamily="34" charset="0"/>
-                <a:ea typeface="Calibri" pitchFamily="34" charset="-122"/>
-                <a:cs typeface="Calibri" pitchFamily="34" charset="-120"/>
-              </a:rPr>
-              <a:t>超過</a:t>
-            </a:r>
-            <a:pPr indent="0" marL="0">
-              <a:lnSpc>
-                <a:spcPct val="125000"/>
-              </a:lnSpc>
               <a:buNone/>
             </a:pPr>
             <a:r>
@@ -6803,49 +6288,46 @@
                 <a:ea typeface="Calibri" pitchFamily="34" charset="-122"/>
                 <a:cs typeface="Calibri" pitchFamily="34" charset="-120"/>
               </a:rPr>
-              <a:t>：用意した数を超えてお渡しした数</a:t>
+              <a:t>を押してから、またQRコードを読み取ってください。</a:t>
             </a:r>
             <a:endParaRPr lang="en-US" sz="1100" dirty="0"/>
           </a:p>
         </p:txBody>
       </p:sp>
-      <p:sp>
-        <p:nvSpPr>
-          <p:cNvPr id="9" name="Shape 7"/>
-          <p:cNvSpPr/>
-          <p:nvPr/>
-        </p:nvSpPr>
-        <p:spPr>
-          <a:xfrm>
-            <a:off x="566928" y="2878201"/>
-            <a:ext cx="6428232" cy="431102"/>
-          </a:xfrm>
-          <a:prstGeom prst="roundRect">
-            <a:avLst>
-              <a:gd name="adj" fmla="val 12726"/>
-            </a:avLst>
-          </a:prstGeom>
-          <a:solidFill>
-            <a:srgbClr val="FAEAE7"/>
-          </a:solidFill>
-          <a:ln w="9525">
-            <a:solidFill>
-              <a:srgbClr val="B85042"/>
-            </a:solidFill>
-            <a:prstDash val="solid"/>
-          </a:ln>
-        </p:spPr>
-      </p:sp>
-      <p:sp>
-        <p:nvSpPr>
-          <p:cNvPr id="10" name="Text 8"/>
-          <p:cNvSpPr txBox="1"/>
-          <p:nvPr/>
-        </p:nvSpPr>
-        <p:spPr>
-          <a:xfrm>
-            <a:off x="658368" y="2969641"/>
-            <a:ext cx="237744" cy="237744"/>
+      <p:pic>
+        <p:nvPicPr>
+          <p:cNvPr id="20" name="Image 0" descr="C:\Users\sato\Desktop\enque\docs\images\p-claim-saved.png">    </p:cNvPr>
+          <p:cNvPicPr>
+            <a:picLocks noChangeAspect="1"/>
+          </p:cNvPicPr>
+          <p:nvPr/>
+        </p:nvPicPr>
+        <p:blipFill>
+          <a:blip r:embed="rId1"/>
+          <a:stretch>
+            <a:fillRect/>
+          </a:stretch>
+        </p:blipFill>
+        <p:spPr>
+          <a:xfrm>
+            <a:off x="566928" y="4263898"/>
+            <a:ext cx="6428232" cy="2870972"/>
+          </a:xfrm>
+          <a:prstGeom prst="rect">
+            <a:avLst/>
+          </a:prstGeom>
+        </p:spPr>
+      </p:pic>
+      <p:sp>
+        <p:nvSpPr>
+          <p:cNvPr id="21" name="Text 18"/>
+          <p:cNvSpPr txBox="1"/>
+          <p:nvPr/>
+        </p:nvSpPr>
+        <p:spPr>
+          <a:xfrm>
+            <a:off x="566928" y="7189734"/>
+            <a:ext cx="6428232" cy="274320"/>
           </a:xfrm>
           <a:prstGeom prst="rect">
             <a:avLst/>
@@ -6861,115 +6343,7 @@
               <a:buNone/>
             </a:pPr>
             <a:r>
-              <a:rPr lang="en-US" sz="1200" b="1" dirty="0">
-                <a:solidFill>
-                  <a:srgbClr val="B85042"/>
-                </a:solidFill>
-                <a:latin typeface="Calibri" pitchFamily="34" charset="0"/>
-                <a:ea typeface="Calibri" pitchFamily="34" charset="-122"/>
-                <a:cs typeface="Calibri" pitchFamily="34" charset="-120"/>
-              </a:rPr>
-              <a:t>i</a:t>
-            </a:r>
-            <a:endParaRPr lang="en-US" sz="1200" dirty="0"/>
-          </a:p>
-        </p:txBody>
-      </p:sp>
-      <p:sp>
-        <p:nvSpPr>
-          <p:cNvPr id="11" name="Text 9"/>
-          <p:cNvSpPr txBox="1"/>
-          <p:nvPr/>
-        </p:nvSpPr>
-        <p:spPr>
-          <a:xfrm>
-            <a:off x="950976" y="2987929"/>
-            <a:ext cx="5925312" cy="248221"/>
-          </a:xfrm>
-          <a:prstGeom prst="rect">
-            <a:avLst/>
-          </a:prstGeom>
-          <a:noFill/>
-          <a:ln/>
-        </p:spPr>
-        <p:txBody>
-          <a:bodyPr wrap="square" lIns="0" tIns="0" rIns="0" bIns="0" rtlCol="0" anchor="t"/>
-          <a:lstStyle/>
-          <a:p>
-            <a:pPr indent="0" marL="0">
-              <a:lnSpc>
-                <a:spcPct val="120000"/>
-              </a:lnSpc>
-              <a:buNone/>
-            </a:pPr>
-            <a:r>
-              <a:rPr lang="en-US" sz="1050" dirty="0">
-                <a:solidFill>
-                  <a:srgbClr val="222222"/>
-                </a:solidFill>
-                <a:latin typeface="Calibri" pitchFamily="34" charset="0"/>
-                <a:ea typeface="Calibri" pitchFamily="34" charset="-122"/>
-                <a:cs typeface="Calibri" pitchFamily="34" charset="-120"/>
-              </a:rPr>
-              <a:t>残りが少なくなってきたら、早めに事務局へお知らせください。</a:t>
-            </a:r>
-            <a:endParaRPr lang="en-US" sz="1050" dirty="0"/>
-          </a:p>
-        </p:txBody>
-      </p:sp>
-      <p:sp>
-        <p:nvSpPr>
-          <p:cNvPr id="12" name="Shape 10"/>
-          <p:cNvSpPr/>
-          <p:nvPr/>
-        </p:nvSpPr>
-        <p:spPr>
-          <a:xfrm>
-            <a:off x="566928" y="3382455"/>
-            <a:ext cx="6428232" cy="2606040"/>
-          </a:xfrm>
-          <a:prstGeom prst="roundRect">
-            <a:avLst>
-              <a:gd name="adj" fmla="val 1754"/>
-            </a:avLst>
-          </a:prstGeom>
-          <a:solidFill>
-            <a:srgbClr val="F7F7F7"/>
-          </a:solidFill>
-          <a:ln w="12700">
-            <a:solidFill>
-              <a:srgbClr val="D8D8D8"/>
-            </a:solidFill>
-            <a:prstDash val="dash"/>
-          </a:ln>
-        </p:spPr>
-      </p:sp>
-      <p:sp>
-        <p:nvSpPr>
-          <p:cNvPr id="13" name="Text 11"/>
-          <p:cNvSpPr txBox="1"/>
-          <p:nvPr/>
-        </p:nvSpPr>
-        <p:spPr>
-          <a:xfrm>
-            <a:off x="749808" y="3766503"/>
-            <a:ext cx="6062472" cy="274320"/>
-          </a:xfrm>
-          <a:prstGeom prst="rect">
-            <a:avLst/>
-          </a:prstGeom>
-          <a:noFill/>
-          <a:ln/>
-        </p:spPr>
-        <p:txBody>
-          <a:bodyPr wrap="square" lIns="0" tIns="0" rIns="0" bIns="0" rtlCol="0" anchor="ctr"/>
-          <a:lstStyle/>
-          <a:p>
-            <a:pPr algn="ctr" indent="0" marL="0">
-              <a:buNone/>
-            </a:pPr>
-            <a:r>
-              <a:rPr lang="en-US" sz="1100" b="1" dirty="0">
+              <a:rPr lang="en-US" sz="950" dirty="0">
                 <a:solidFill>
                   <a:srgbClr val="6B6B6B"/>
                 </a:solidFill>
@@ -6977,57 +6351,15 @@
                 <a:ea typeface="Calibri" pitchFamily="34" charset="-122"/>
                 <a:cs typeface="Calibri" pitchFamily="34" charset="-120"/>
               </a:rPr>
-              <a:t>［ スクリーンショット ］ ここに貼り付けてください</a:t>
-            </a:r>
-            <a:endParaRPr lang="en-US" sz="1100" dirty="0"/>
-          </a:p>
-        </p:txBody>
-      </p:sp>
-      <p:sp>
-        <p:nvSpPr>
-          <p:cNvPr id="14" name="Text 12"/>
-          <p:cNvSpPr txBox="1"/>
-          <p:nvPr/>
-        </p:nvSpPr>
-        <p:spPr>
-          <a:xfrm>
-            <a:off x="841248" y="4132263"/>
-            <a:ext cx="5879592" cy="731520"/>
-          </a:xfrm>
-          <a:prstGeom prst="rect">
-            <a:avLst/>
-          </a:prstGeom>
-          <a:noFill/>
-          <a:ln/>
-        </p:spPr>
-        <p:txBody>
-          <a:bodyPr wrap="square" lIns="0" tIns="0" rIns="0" bIns="0" rtlCol="0" anchor="t"/>
-          <a:lstStyle/>
-          <a:p>
-            <a:pPr algn="ctr" indent="0" marL="0">
-              <a:lnSpc>
-                <a:spcPct val="120000"/>
-              </a:lnSpc>
-              <a:buNone/>
-            </a:pPr>
-            <a:r>
-              <a:rPr lang="en-US" sz="1050" dirty="0">
-                <a:solidFill>
-                  <a:srgbClr val="222222"/>
-                </a:solidFill>
-                <a:latin typeface="Calibri" pitchFamily="34" charset="0"/>
-                <a:ea typeface="Calibri" pitchFamily="34" charset="-122"/>
-                <a:cs typeface="Calibri" pitchFamily="34" charset="-120"/>
-              </a:rPr>
-              <a:t>照会画面の下部にある「景品の残数」の表。</a:t>
-            </a:r>
-            <a:endParaRPr lang="en-US" sz="1050" dirty="0"/>
-          </a:p>
-        </p:txBody>
-      </p:sp>
-      <p:sp>
-        <p:nvSpPr>
-          <p:cNvPr id="15" name="Text 13"/>
+              <a:t>「交換済みとして記録しました」のメッセージが出ている画面。</a:t>
+            </a:r>
+            <a:endParaRPr lang="en-US" sz="950" dirty="0"/>
+          </a:p>
+        </p:txBody>
+      </p:sp>
+      <p:sp>
+        <p:nvSpPr>
+          <p:cNvPr id="22" name="Text 19"/>
           <p:cNvSpPr txBox="1"/>
           <p:nvPr/>
         </p:nvSpPr>
@@ -7168,6 +6500,642 @@
                 <a:ea typeface="Calibri" pitchFamily="34" charset="-122"/>
                 <a:cs typeface="Calibri" pitchFamily="34" charset="-120"/>
               </a:rPr>
+              <a:t>残りの数を確認する</a:t>
+            </a:r>
+            <a:endParaRPr lang="en-US" sz="2200" dirty="0"/>
+          </a:p>
+        </p:txBody>
+      </p:sp>
+      <p:sp>
+        <p:nvSpPr>
+          <p:cNvPr id="4" name="Text 2"/>
+          <p:cNvSpPr txBox="1"/>
+          <p:nvPr/>
+        </p:nvSpPr>
+        <p:spPr>
+          <a:xfrm>
+            <a:off x="566928" y="1481328"/>
+            <a:ext cx="6428232" cy="257429"/>
+          </a:xfrm>
+          <a:prstGeom prst="rect">
+            <a:avLst/>
+          </a:prstGeom>
+          <a:noFill/>
+          <a:ln/>
+        </p:spPr>
+        <p:txBody>
+          <a:bodyPr wrap="square" lIns="0" tIns="0" rIns="0" bIns="0" rtlCol="0" anchor="t"/>
+          <a:lstStyle/>
+          <a:p>
+            <a:pPr indent="0" marL="0">
+              <a:lnSpc>
+                <a:spcPct val="125000"/>
+              </a:lnSpc>
+              <a:buNone/>
+            </a:pPr>
+            <a:r>
+              <a:rPr lang="en-US" sz="1100" dirty="0">
+                <a:solidFill>
+                  <a:srgbClr val="222222"/>
+                </a:solidFill>
+                <a:latin typeface="Calibri" pitchFamily="34" charset="0"/>
+                <a:ea typeface="Calibri" pitchFamily="34" charset="-122"/>
+                <a:cs typeface="Calibri" pitchFamily="34" charset="-120"/>
+              </a:rPr>
+              <a:t>照会画面の下に、</a:t>
+            </a:r>
+            <a:pPr indent="0" marL="0">
+              <a:lnSpc>
+                <a:spcPct val="125000"/>
+              </a:lnSpc>
+              <a:buNone/>
+            </a:pPr>
+            <a:r>
+              <a:rPr lang="en-US" sz="1100" b="1" dirty="0">
+                <a:solidFill>
+                  <a:srgbClr val="222222"/>
+                </a:solidFill>
+                <a:latin typeface="Calibri" pitchFamily="34" charset="0"/>
+                <a:ea typeface="Calibri" pitchFamily="34" charset="-122"/>
+                <a:cs typeface="Calibri" pitchFamily="34" charset="-120"/>
+              </a:rPr>
+              <a:t>景品の残数</a:t>
+            </a:r>
+            <a:pPr indent="0" marL="0">
+              <a:lnSpc>
+                <a:spcPct val="125000"/>
+              </a:lnSpc>
+              <a:buNone/>
+            </a:pPr>
+            <a:r>
+              <a:rPr lang="en-US" sz="1100" dirty="0">
+                <a:solidFill>
+                  <a:srgbClr val="222222"/>
+                </a:solidFill>
+                <a:latin typeface="Calibri" pitchFamily="34" charset="0"/>
+                <a:ea typeface="Calibri" pitchFamily="34" charset="-122"/>
+                <a:cs typeface="Calibri" pitchFamily="34" charset="-120"/>
+              </a:rPr>
+              <a:t>の表があります。</a:t>
+            </a:r>
+            <a:endParaRPr lang="en-US" sz="1100" dirty="0"/>
+          </a:p>
+        </p:txBody>
+      </p:sp>
+      <p:sp>
+        <p:nvSpPr>
+          <p:cNvPr id="5" name="Text 3"/>
+          <p:cNvSpPr txBox="1"/>
+          <p:nvPr/>
+        </p:nvSpPr>
+        <p:spPr>
+          <a:xfrm>
+            <a:off x="713232" y="1775333"/>
+            <a:ext cx="6281928" cy="257429"/>
+          </a:xfrm>
+          <a:prstGeom prst="rect">
+            <a:avLst/>
+          </a:prstGeom>
+          <a:noFill/>
+          <a:ln/>
+        </p:spPr>
+        <p:txBody>
+          <a:bodyPr wrap="square" lIns="0" tIns="0" rIns="0" bIns="0" rtlCol="0" anchor="t"/>
+          <a:lstStyle/>
+          <a:p>
+            <a:pPr marL="342900" indent="-342900">
+              <a:lnSpc>
+                <a:spcPct val="125000"/>
+              </a:lnSpc>
+              <a:buSzPct val="100000"/>
+              <a:buChar char="●"/>
+            </a:pPr>
+            <a:r>
+              <a:rPr lang="en-US" sz="1100" b="1" dirty="0">
+                <a:solidFill>
+                  <a:srgbClr val="222222"/>
+                </a:solidFill>
+                <a:latin typeface="Calibri" pitchFamily="34" charset="0"/>
+                <a:ea typeface="Calibri" pitchFamily="34" charset="-122"/>
+                <a:cs typeface="Calibri" pitchFamily="34" charset="-120"/>
+              </a:rPr>
+              <a:t>用意</a:t>
+            </a:r>
+            <a:pPr indent="0" marL="0">
+              <a:lnSpc>
+                <a:spcPct val="125000"/>
+              </a:lnSpc>
+              <a:buNone/>
+            </a:pPr>
+            <a:r>
+              <a:rPr lang="en-US" sz="1100" dirty="0">
+                <a:solidFill>
+                  <a:srgbClr val="222222"/>
+                </a:solidFill>
+                <a:latin typeface="Calibri" pitchFamily="34" charset="0"/>
+                <a:ea typeface="Calibri" pitchFamily="34" charset="-122"/>
+                <a:cs typeface="Calibri" pitchFamily="34" charset="-120"/>
+              </a:rPr>
+              <a:t>：事務局が登録した数量</a:t>
+            </a:r>
+            <a:endParaRPr lang="en-US" sz="1100" dirty="0"/>
+          </a:p>
+        </p:txBody>
+      </p:sp>
+      <p:sp>
+        <p:nvSpPr>
+          <p:cNvPr id="6" name="Text 4"/>
+          <p:cNvSpPr txBox="1"/>
+          <p:nvPr/>
+        </p:nvSpPr>
+        <p:spPr>
+          <a:xfrm>
+            <a:off x="713232" y="2051050"/>
+            <a:ext cx="6281928" cy="257429"/>
+          </a:xfrm>
+          <a:prstGeom prst="rect">
+            <a:avLst/>
+          </a:prstGeom>
+          <a:noFill/>
+          <a:ln/>
+        </p:spPr>
+        <p:txBody>
+          <a:bodyPr wrap="square" lIns="0" tIns="0" rIns="0" bIns="0" rtlCol="0" anchor="t"/>
+          <a:lstStyle/>
+          <a:p>
+            <a:pPr marL="342900" indent="-342900">
+              <a:lnSpc>
+                <a:spcPct val="125000"/>
+              </a:lnSpc>
+              <a:buSzPct val="100000"/>
+              <a:buChar char="●"/>
+            </a:pPr>
+            <a:r>
+              <a:rPr lang="en-US" sz="1100" b="1" dirty="0">
+                <a:solidFill>
+                  <a:srgbClr val="222222"/>
+                </a:solidFill>
+                <a:latin typeface="Calibri" pitchFamily="34" charset="0"/>
+                <a:ea typeface="Calibri" pitchFamily="34" charset="-122"/>
+                <a:cs typeface="Calibri" pitchFamily="34" charset="-120"/>
+              </a:rPr>
+              <a:t>交換済み</a:t>
+            </a:r>
+            <a:pPr indent="0" marL="0">
+              <a:lnSpc>
+                <a:spcPct val="125000"/>
+              </a:lnSpc>
+              <a:buNone/>
+            </a:pPr>
+            <a:r>
+              <a:rPr lang="en-US" sz="1100" dirty="0">
+                <a:solidFill>
+                  <a:srgbClr val="222222"/>
+                </a:solidFill>
+                <a:latin typeface="Calibri" pitchFamily="34" charset="0"/>
+                <a:ea typeface="Calibri" pitchFamily="34" charset="-122"/>
+                <a:cs typeface="Calibri" pitchFamily="34" charset="-120"/>
+              </a:rPr>
+              <a:t>：これまでにお渡しした数</a:t>
+            </a:r>
+            <a:endParaRPr lang="en-US" sz="1100" dirty="0"/>
+          </a:p>
+        </p:txBody>
+      </p:sp>
+      <p:sp>
+        <p:nvSpPr>
+          <p:cNvPr id="7" name="Text 5"/>
+          <p:cNvSpPr txBox="1"/>
+          <p:nvPr/>
+        </p:nvSpPr>
+        <p:spPr>
+          <a:xfrm>
+            <a:off x="713232" y="2326767"/>
+            <a:ext cx="6281928" cy="257429"/>
+          </a:xfrm>
+          <a:prstGeom prst="rect">
+            <a:avLst/>
+          </a:prstGeom>
+          <a:noFill/>
+          <a:ln/>
+        </p:spPr>
+        <p:txBody>
+          <a:bodyPr wrap="square" lIns="0" tIns="0" rIns="0" bIns="0" rtlCol="0" anchor="t"/>
+          <a:lstStyle/>
+          <a:p>
+            <a:pPr marL="342900" indent="-342900">
+              <a:lnSpc>
+                <a:spcPct val="125000"/>
+              </a:lnSpc>
+              <a:buSzPct val="100000"/>
+              <a:buChar char="●"/>
+            </a:pPr>
+            <a:r>
+              <a:rPr lang="en-US" sz="1100" b="1" dirty="0">
+                <a:solidFill>
+                  <a:srgbClr val="222222"/>
+                </a:solidFill>
+                <a:latin typeface="Calibri" pitchFamily="34" charset="0"/>
+                <a:ea typeface="Calibri" pitchFamily="34" charset="-122"/>
+                <a:cs typeface="Calibri" pitchFamily="34" charset="-120"/>
+              </a:rPr>
+              <a:t>残り</a:t>
+            </a:r>
+            <a:pPr indent="0" marL="0">
+              <a:lnSpc>
+                <a:spcPct val="125000"/>
+              </a:lnSpc>
+              <a:buNone/>
+            </a:pPr>
+            <a:r>
+              <a:rPr lang="en-US" sz="1100" dirty="0">
+                <a:solidFill>
+                  <a:srgbClr val="222222"/>
+                </a:solidFill>
+                <a:latin typeface="Calibri" pitchFamily="34" charset="0"/>
+                <a:ea typeface="Calibri" pitchFamily="34" charset="-122"/>
+                <a:cs typeface="Calibri" pitchFamily="34" charset="-120"/>
+              </a:rPr>
+              <a:t>：残っている数（「—」は数量を管理していない景品）</a:t>
+            </a:r>
+            <a:endParaRPr lang="en-US" sz="1100" dirty="0"/>
+          </a:p>
+        </p:txBody>
+      </p:sp>
+      <p:sp>
+        <p:nvSpPr>
+          <p:cNvPr id="8" name="Text 6"/>
+          <p:cNvSpPr txBox="1"/>
+          <p:nvPr/>
+        </p:nvSpPr>
+        <p:spPr>
+          <a:xfrm>
+            <a:off x="713232" y="2602484"/>
+            <a:ext cx="6281928" cy="257429"/>
+          </a:xfrm>
+          <a:prstGeom prst="rect">
+            <a:avLst/>
+          </a:prstGeom>
+          <a:noFill/>
+          <a:ln/>
+        </p:spPr>
+        <p:txBody>
+          <a:bodyPr wrap="square" lIns="0" tIns="0" rIns="0" bIns="0" rtlCol="0" anchor="t"/>
+          <a:lstStyle/>
+          <a:p>
+            <a:pPr marL="342900" indent="-342900">
+              <a:lnSpc>
+                <a:spcPct val="125000"/>
+              </a:lnSpc>
+              <a:buSzPct val="100000"/>
+              <a:buChar char="●"/>
+            </a:pPr>
+            <a:r>
+              <a:rPr lang="en-US" sz="1100" b="1" dirty="0">
+                <a:solidFill>
+                  <a:srgbClr val="222222"/>
+                </a:solidFill>
+                <a:latin typeface="Calibri" pitchFamily="34" charset="0"/>
+                <a:ea typeface="Calibri" pitchFamily="34" charset="-122"/>
+                <a:cs typeface="Calibri" pitchFamily="34" charset="-120"/>
+              </a:rPr>
+              <a:t>超過</a:t>
+            </a:r>
+            <a:pPr indent="0" marL="0">
+              <a:lnSpc>
+                <a:spcPct val="125000"/>
+              </a:lnSpc>
+              <a:buNone/>
+            </a:pPr>
+            <a:r>
+              <a:rPr lang="en-US" sz="1100" dirty="0">
+                <a:solidFill>
+                  <a:srgbClr val="222222"/>
+                </a:solidFill>
+                <a:latin typeface="Calibri" pitchFamily="34" charset="0"/>
+                <a:ea typeface="Calibri" pitchFamily="34" charset="-122"/>
+                <a:cs typeface="Calibri" pitchFamily="34" charset="-120"/>
+              </a:rPr>
+              <a:t>：用意した数を超えてお渡しした数</a:t>
+            </a:r>
+            <a:endParaRPr lang="en-US" sz="1100" dirty="0"/>
+          </a:p>
+        </p:txBody>
+      </p:sp>
+      <p:sp>
+        <p:nvSpPr>
+          <p:cNvPr id="9" name="Shape 7"/>
+          <p:cNvSpPr/>
+          <p:nvPr/>
+        </p:nvSpPr>
+        <p:spPr>
+          <a:xfrm>
+            <a:off x="566928" y="2878201"/>
+            <a:ext cx="6428232" cy="431102"/>
+          </a:xfrm>
+          <a:prstGeom prst="roundRect">
+            <a:avLst>
+              <a:gd name="adj" fmla="val 12726"/>
+            </a:avLst>
+          </a:prstGeom>
+          <a:solidFill>
+            <a:srgbClr val="FAEAE7"/>
+          </a:solidFill>
+          <a:ln w="9525">
+            <a:solidFill>
+              <a:srgbClr val="B85042"/>
+            </a:solidFill>
+            <a:prstDash val="solid"/>
+          </a:ln>
+        </p:spPr>
+      </p:sp>
+      <p:sp>
+        <p:nvSpPr>
+          <p:cNvPr id="10" name="Text 8"/>
+          <p:cNvSpPr txBox="1"/>
+          <p:nvPr/>
+        </p:nvSpPr>
+        <p:spPr>
+          <a:xfrm>
+            <a:off x="658368" y="2969641"/>
+            <a:ext cx="237744" cy="237744"/>
+          </a:xfrm>
+          <a:prstGeom prst="rect">
+            <a:avLst/>
+          </a:prstGeom>
+          <a:noFill/>
+          <a:ln/>
+        </p:spPr>
+        <p:txBody>
+          <a:bodyPr wrap="square" lIns="0" tIns="0" rIns="0" bIns="0" rtlCol="0" anchor="ctr"/>
+          <a:lstStyle/>
+          <a:p>
+            <a:pPr algn="ctr" indent="0" marL="0">
+              <a:buNone/>
+            </a:pPr>
+            <a:r>
+              <a:rPr lang="en-US" sz="1200" b="1" dirty="0">
+                <a:solidFill>
+                  <a:srgbClr val="B85042"/>
+                </a:solidFill>
+                <a:latin typeface="Calibri" pitchFamily="34" charset="0"/>
+                <a:ea typeface="Calibri" pitchFamily="34" charset="-122"/>
+                <a:cs typeface="Calibri" pitchFamily="34" charset="-120"/>
+              </a:rPr>
+              <a:t>i</a:t>
+            </a:r>
+            <a:endParaRPr lang="en-US" sz="1200" dirty="0"/>
+          </a:p>
+        </p:txBody>
+      </p:sp>
+      <p:sp>
+        <p:nvSpPr>
+          <p:cNvPr id="11" name="Text 9"/>
+          <p:cNvSpPr txBox="1"/>
+          <p:nvPr/>
+        </p:nvSpPr>
+        <p:spPr>
+          <a:xfrm>
+            <a:off x="950976" y="2987929"/>
+            <a:ext cx="5925312" cy="248221"/>
+          </a:xfrm>
+          <a:prstGeom prst="rect">
+            <a:avLst/>
+          </a:prstGeom>
+          <a:noFill/>
+          <a:ln/>
+        </p:spPr>
+        <p:txBody>
+          <a:bodyPr wrap="square" lIns="0" tIns="0" rIns="0" bIns="0" rtlCol="0" anchor="t"/>
+          <a:lstStyle/>
+          <a:p>
+            <a:pPr indent="0" marL="0">
+              <a:lnSpc>
+                <a:spcPct val="120000"/>
+              </a:lnSpc>
+              <a:buNone/>
+            </a:pPr>
+            <a:r>
+              <a:rPr lang="en-US" sz="1050" dirty="0">
+                <a:solidFill>
+                  <a:srgbClr val="222222"/>
+                </a:solidFill>
+                <a:latin typeface="Calibri" pitchFamily="34" charset="0"/>
+                <a:ea typeface="Calibri" pitchFamily="34" charset="-122"/>
+                <a:cs typeface="Calibri" pitchFamily="34" charset="-120"/>
+              </a:rPr>
+              <a:t>残りが少なくなってきたら、早めに事務局へお知らせください。</a:t>
+            </a:r>
+            <a:endParaRPr lang="en-US" sz="1050" dirty="0"/>
+          </a:p>
+        </p:txBody>
+      </p:sp>
+      <p:pic>
+        <p:nvPicPr>
+          <p:cNvPr id="12" name="Image 0" descr="C:\Users\sato\Desktop\enque\docs\images\p-stock.png">    </p:cNvPr>
+          <p:cNvPicPr>
+            <a:picLocks noChangeAspect="1"/>
+          </p:cNvPicPr>
+          <p:nvPr/>
+        </p:nvPicPr>
+        <p:blipFill>
+          <a:blip r:embed="rId1"/>
+          <a:stretch>
+            <a:fillRect/>
+          </a:stretch>
+        </p:blipFill>
+        <p:spPr>
+          <a:xfrm>
+            <a:off x="2018596" y="3382455"/>
+            <a:ext cx="3524896" cy="3474720"/>
+          </a:xfrm>
+          <a:prstGeom prst="rect">
+            <a:avLst/>
+          </a:prstGeom>
+        </p:spPr>
+      </p:pic>
+      <p:sp>
+        <p:nvSpPr>
+          <p:cNvPr id="13" name="Text 10"/>
+          <p:cNvSpPr txBox="1"/>
+          <p:nvPr/>
+        </p:nvSpPr>
+        <p:spPr>
+          <a:xfrm>
+            <a:off x="566928" y="6912039"/>
+            <a:ext cx="6428232" cy="274320"/>
+          </a:xfrm>
+          <a:prstGeom prst="rect">
+            <a:avLst/>
+          </a:prstGeom>
+          <a:noFill/>
+          <a:ln/>
+        </p:spPr>
+        <p:txBody>
+          <a:bodyPr wrap="square" lIns="0" tIns="0" rIns="0" bIns="0" rtlCol="0" anchor="ctr"/>
+          <a:lstStyle/>
+          <a:p>
+            <a:pPr algn="ctr" indent="0" marL="0">
+              <a:buNone/>
+            </a:pPr>
+            <a:r>
+              <a:rPr lang="en-US" sz="950" dirty="0">
+                <a:solidFill>
+                  <a:srgbClr val="6B6B6B"/>
+                </a:solidFill>
+                <a:latin typeface="Calibri" pitchFamily="34" charset="0"/>
+                <a:ea typeface="Calibri" pitchFamily="34" charset="-122"/>
+                <a:cs typeface="Calibri" pitchFamily="34" charset="-120"/>
+              </a:rPr>
+              <a:t>照会画面の下部にある「景品の残数」の表。</a:t>
+            </a:r>
+            <a:endParaRPr lang="en-US" sz="950" dirty="0"/>
+          </a:p>
+        </p:txBody>
+      </p:sp>
+      <p:sp>
+        <p:nvSpPr>
+          <p:cNvPr id="14" name="Text 11"/>
+          <p:cNvSpPr txBox="1"/>
+          <p:nvPr/>
+        </p:nvSpPr>
+        <p:spPr>
+          <a:xfrm>
+            <a:off x="566928" y="10186416"/>
+            <a:ext cx="6428232" cy="228600"/>
+          </a:xfrm>
+          <a:prstGeom prst="rect">
+            <a:avLst/>
+          </a:prstGeom>
+          <a:noFill/>
+          <a:ln/>
+        </p:spPr>
+        <p:txBody>
+          <a:bodyPr wrap="square" lIns="0" tIns="0" rIns="0" bIns="0" rtlCol="0" anchor="ctr"/>
+          <a:lstStyle/>
+          <a:p>
+            <a:pPr algn="r" indent="0" marL="0">
+              <a:buNone/>
+            </a:pPr>
+            <a:r>
+              <a:rPr lang="en-US" sz="900" dirty="0">
+                <a:solidFill>
+                  <a:srgbClr val="6B6B6B"/>
+                </a:solidFill>
+                <a:latin typeface="Calibri" pitchFamily="34" charset="0"/>
+                <a:ea typeface="Calibri" pitchFamily="34" charset="-122"/>
+                <a:cs typeface="Calibri" pitchFamily="34" charset="-120"/>
+              </a:rPr>
+              <a:t>総合受付向け　8</a:t>
+            </a:r>
+            <a:endParaRPr lang="en-US" sz="900" dirty="0"/>
+          </a:p>
+        </p:txBody>
+      </p:sp>
+    </p:spTree>
+  </p:cSld>
+  <p:clrMapOvr>
+    <a:masterClrMapping/>
+  </p:clrMapOvr>
+</p:sld>
+</file>
+
+<file path=ppt/slides/slide9.xml><?xml version="1.0" encoding="utf-8"?>
+<p:sld xmlns:a="http://schemas.openxmlformats.org/drawingml/2006/main" xmlns:r="http://schemas.openxmlformats.org/officeDocument/2006/relationships" xmlns:p="http://schemas.openxmlformats.org/presentationml/2006/main">
+  <p:cSld name="Slide 9">
+    <p:bg>
+      <p:bgPr>
+        <a:solidFill>
+          <a:srgbClr val="FFFFFF"/>
+        </a:solidFill>
+      </p:bgPr>
+    </p:bg>
+    <p:spTree>
+      <p:nvGrpSpPr>
+        <p:cNvPr id="1" name=""/>
+        <p:cNvGrpSpPr/>
+        <p:nvPr/>
+      </p:nvGrpSpPr>
+      <p:grpSpPr>
+        <a:xfrm>
+          <a:off x="0" y="0"/>
+          <a:ext cx="0" cy="0"/>
+          <a:chOff x="0" y="0"/>
+          <a:chExt cx="0" cy="0"/>
+        </a:xfrm>
+      </p:grpSpPr>
+      <p:sp>
+        <p:nvSpPr>
+          <p:cNvPr id="2" name="Text 0"/>
+          <p:cNvSpPr txBox="1"/>
+          <p:nvPr/>
+        </p:nvSpPr>
+        <p:spPr>
+          <a:xfrm>
+            <a:off x="566928" y="457200"/>
+            <a:ext cx="6428232" cy="237744"/>
+          </a:xfrm>
+          <a:prstGeom prst="rect">
+            <a:avLst/>
+          </a:prstGeom>
+          <a:noFill/>
+          <a:ln/>
+        </p:spPr>
+        <p:txBody>
+          <a:bodyPr wrap="square" lIns="0" tIns="0" rIns="0" bIns="0" rtlCol="0" anchor="ctr"/>
+          <a:lstStyle/>
+          <a:p>
+            <a:pPr indent="0" marL="0">
+              <a:buNone/>
+            </a:pPr>
+            <a:r>
+              <a:rPr lang="en-US" sz="1000" b="1" dirty="0">
+                <a:solidFill>
+                  <a:srgbClr val="B85042"/>
+                </a:solidFill>
+                <a:latin typeface="Calibri" pitchFamily="34" charset="0"/>
+                <a:ea typeface="Calibri" pitchFamily="34" charset="-122"/>
+                <a:cs typeface="Calibri" pitchFamily="34" charset="-120"/>
+              </a:rPr>
+              <a:t>総合受付マニュアル</a:t>
+            </a:r>
+            <a:endParaRPr lang="en-US" sz="1000" dirty="0"/>
+          </a:p>
+        </p:txBody>
+      </p:sp>
+      <p:sp>
+        <p:nvSpPr>
+          <p:cNvPr id="3" name="Text 1"/>
+          <p:cNvSpPr txBox="1"/>
+          <p:nvPr/>
+        </p:nvSpPr>
+        <p:spPr>
+          <a:xfrm>
+            <a:off x="566928" y="713232"/>
+            <a:ext cx="6428232" cy="640080"/>
+          </a:xfrm>
+          <a:prstGeom prst="rect">
+            <a:avLst/>
+          </a:prstGeom>
+          <a:noFill/>
+          <a:ln/>
+        </p:spPr>
+        <p:txBody>
+          <a:bodyPr wrap="square" lIns="0" tIns="0" rIns="0" bIns="0" rtlCol="0" anchor="t"/>
+          <a:lstStyle/>
+          <a:p>
+            <a:pPr indent="0" marL="0">
+              <a:buNone/>
+            </a:pPr>
+            <a:r>
+              <a:rPr lang="en-US" sz="2200" b="1" dirty="0">
+                <a:solidFill>
+                  <a:srgbClr val="222222"/>
+                </a:solidFill>
+                <a:latin typeface="Calibri" pitchFamily="34" charset="0"/>
+                <a:ea typeface="Calibri" pitchFamily="34" charset="-122"/>
+                <a:cs typeface="Calibri" pitchFamily="34" charset="-120"/>
+              </a:rPr>
               <a:t>困ったときは</a:t>
             </a:r>
             <a:endParaRPr lang="en-US" sz="2200" dirty="0"/>
@@ -7751,7 +7719,7 @@
                 <a:ea typeface="Calibri" pitchFamily="34" charset="-122"/>
                 <a:cs typeface="Calibri" pitchFamily="34" charset="-120"/>
               </a:rPr>
-              <a:t>総合受付向け　8</a:t>
+              <a:t>総合受付向け　9</a:t>
             </a:r>
             <a:endParaRPr lang="en-US" sz="900" dirty="0"/>
           </a:p>

--- a/docs/manual-reception.pptx
+++ b/docs/manual-reception.pptx
@@ -3277,8 +3277,8 @@
         </p:blipFill>
         <p:spPr>
           <a:xfrm>
-            <a:off x="2233665" y="3550539"/>
-            <a:ext cx="3094759" cy="3474720"/>
+            <a:off x="3123981" y="3550539"/>
+            <a:ext cx="1314127" cy="3474720"/>
           </a:xfrm>
           <a:prstGeom prst="rect">
             <a:avLst/>
@@ -7486,6 +7486,222 @@
                 <a:ea typeface="Calibri" pitchFamily="34" charset="-122"/>
                 <a:cs typeface="Calibri" pitchFamily="34" charset="-120"/>
               </a:rPr>
+              <a:t>メールアドレスを間違えたと言われた</a:t>
+            </a:r>
+            <a:endParaRPr lang="en-US" sz="1400" dirty="0"/>
+          </a:p>
+        </p:txBody>
+      </p:sp>
+      <p:sp>
+        <p:nvSpPr>
+          <p:cNvPr id="11" name="Text 9"/>
+          <p:cNvSpPr txBox="1"/>
+          <p:nvPr/>
+        </p:nvSpPr>
+        <p:spPr>
+          <a:xfrm>
+            <a:off x="566928" y="4733798"/>
+            <a:ext cx="6428232" cy="257429"/>
+          </a:xfrm>
+          <a:prstGeom prst="rect">
+            <a:avLst/>
+          </a:prstGeom>
+          <a:noFill/>
+          <a:ln/>
+        </p:spPr>
+        <p:txBody>
+          <a:bodyPr wrap="square" lIns="0" tIns="0" rIns="0" bIns="0" rtlCol="0" anchor="t"/>
+          <a:lstStyle/>
+          <a:p>
+            <a:pPr indent="0" marL="0">
+              <a:lnSpc>
+                <a:spcPct val="125000"/>
+              </a:lnSpc>
+              <a:buNone/>
+            </a:pPr>
+            <a:r>
+              <a:rPr lang="en-US" sz="1100" dirty="0">
+                <a:solidFill>
+                  <a:srgbClr val="222222"/>
+                </a:solidFill>
+                <a:latin typeface="Calibri" pitchFamily="34" charset="0"/>
+                <a:ea typeface="Calibri" pitchFamily="34" charset="-122"/>
+                <a:cs typeface="Calibri" pitchFamily="34" charset="-120"/>
+              </a:rPr>
+              <a:t>来場者ご自身で直せます。</a:t>
+            </a:r>
+            <a:pPr indent="0" marL="0">
+              <a:lnSpc>
+                <a:spcPct val="125000"/>
+              </a:lnSpc>
+              <a:buNone/>
+            </a:pPr>
+            <a:r>
+              <a:rPr lang="en-US" sz="1100" b="1" dirty="0">
+                <a:solidFill>
+                  <a:srgbClr val="222222"/>
+                </a:solidFill>
+                <a:latin typeface="Calibri" pitchFamily="34" charset="0"/>
+                <a:ea typeface="Calibri" pitchFamily="34" charset="-122"/>
+                <a:cs typeface="Calibri" pitchFamily="34" charset="-120"/>
+              </a:rPr>
+              <a:t>回答済み画面</a:t>
+            </a:r>
+            <a:pPr indent="0" marL="0">
+              <a:lnSpc>
+                <a:spcPct val="125000"/>
+              </a:lnSpc>
+              <a:buNone/>
+            </a:pPr>
+            <a:r>
+              <a:rPr lang="en-US" sz="1100" dirty="0">
+                <a:solidFill>
+                  <a:srgbClr val="222222"/>
+                </a:solidFill>
+                <a:latin typeface="Calibri" pitchFamily="34" charset="0"/>
+                <a:ea typeface="Calibri" pitchFamily="34" charset="-122"/>
+                <a:cs typeface="Calibri" pitchFamily="34" charset="-120"/>
+              </a:rPr>
+              <a:t>（交換コードが出ている画面）の下にある</a:t>
+            </a:r>
+            <a:endParaRPr lang="en-US" sz="1100" dirty="0"/>
+          </a:p>
+        </p:txBody>
+      </p:sp>
+      <p:sp>
+        <p:nvSpPr>
+          <p:cNvPr id="12" name="Text 10"/>
+          <p:cNvSpPr txBox="1"/>
+          <p:nvPr/>
+        </p:nvSpPr>
+        <p:spPr>
+          <a:xfrm>
+            <a:off x="566928" y="5027803"/>
+            <a:ext cx="6428232" cy="257429"/>
+          </a:xfrm>
+          <a:prstGeom prst="rect">
+            <a:avLst/>
+          </a:prstGeom>
+          <a:noFill/>
+          <a:ln/>
+        </p:spPr>
+        <p:txBody>
+          <a:bodyPr wrap="square" lIns="0" tIns="0" rIns="0" bIns="0" rtlCol="0" anchor="t"/>
+          <a:lstStyle/>
+          <a:p>
+            <a:pPr indent="0" marL="0">
+              <a:lnSpc>
+                <a:spcPct val="125000"/>
+              </a:lnSpc>
+              <a:buNone/>
+            </a:pPr>
+            <a:r>
+              <a:rPr lang="en-US" sz="1100" b="1" dirty="0">
+                <a:solidFill>
+                  <a:srgbClr val="222222"/>
+                </a:solidFill>
+                <a:latin typeface="Calibri" pitchFamily="34" charset="0"/>
+                <a:ea typeface="Calibri" pitchFamily="34" charset="-122"/>
+                <a:cs typeface="Calibri" pitchFamily="34" charset="-120"/>
+              </a:rPr>
+              <a:t>「登録したメールアドレスを変更する」</a:t>
+            </a:r>
+            <a:pPr indent="0" marL="0">
+              <a:lnSpc>
+                <a:spcPct val="125000"/>
+              </a:lnSpc>
+              <a:buNone/>
+            </a:pPr>
+            <a:r>
+              <a:rPr lang="en-US" sz="1100" dirty="0">
+                <a:solidFill>
+                  <a:srgbClr val="222222"/>
+                </a:solidFill>
+                <a:latin typeface="Calibri" pitchFamily="34" charset="0"/>
+                <a:ea typeface="Calibri" pitchFamily="34" charset="-122"/>
+                <a:cs typeface="Calibri" pitchFamily="34" charset="-120"/>
+              </a:rPr>
+              <a:t>を開いて、新しいアドレスを入れていただいてください。</a:t>
+            </a:r>
+            <a:endParaRPr lang="en-US" sz="1100" dirty="0"/>
+          </a:p>
+        </p:txBody>
+      </p:sp>
+      <p:sp>
+        <p:nvSpPr>
+          <p:cNvPr id="13" name="Text 11"/>
+          <p:cNvSpPr txBox="1"/>
+          <p:nvPr/>
+        </p:nvSpPr>
+        <p:spPr>
+          <a:xfrm>
+            <a:off x="566928" y="5321808"/>
+            <a:ext cx="6428232" cy="257429"/>
+          </a:xfrm>
+          <a:prstGeom prst="rect">
+            <a:avLst/>
+          </a:prstGeom>
+          <a:noFill/>
+          <a:ln/>
+        </p:spPr>
+        <p:txBody>
+          <a:bodyPr wrap="square" lIns="0" tIns="0" rIns="0" bIns="0" rtlCol="0" anchor="t"/>
+          <a:lstStyle/>
+          <a:p>
+            <a:pPr indent="0" marL="0">
+              <a:lnSpc>
+                <a:spcPct val="125000"/>
+              </a:lnSpc>
+              <a:buNone/>
+            </a:pPr>
+            <a:r>
+              <a:rPr lang="en-US" sz="1100" dirty="0">
+                <a:solidFill>
+                  <a:srgbClr val="222222"/>
+                </a:solidFill>
+                <a:latin typeface="Calibri" pitchFamily="34" charset="0"/>
+                <a:ea typeface="Calibri" pitchFamily="34" charset="-122"/>
+                <a:cs typeface="Calibri" pitchFamily="34" charset="-120"/>
+              </a:rPr>
+              <a:t>受付側でアドレスを見たり直したりすることはできません。</a:t>
+            </a:r>
+            <a:endParaRPr lang="en-US" sz="1100" dirty="0"/>
+          </a:p>
+        </p:txBody>
+      </p:sp>
+      <p:sp>
+        <p:nvSpPr>
+          <p:cNvPr id="14" name="Text 12"/>
+          <p:cNvSpPr txBox="1"/>
+          <p:nvPr/>
+        </p:nvSpPr>
+        <p:spPr>
+          <a:xfrm>
+            <a:off x="566928" y="5725541"/>
+            <a:ext cx="6428232" cy="257810"/>
+          </a:xfrm>
+          <a:prstGeom prst="rect">
+            <a:avLst/>
+          </a:prstGeom>
+          <a:noFill/>
+          <a:ln/>
+        </p:spPr>
+        <p:txBody>
+          <a:bodyPr wrap="square" lIns="0" tIns="0" rIns="0" bIns="0" rtlCol="0" anchor="t"/>
+          <a:lstStyle/>
+          <a:p>
+            <a:pPr indent="0" marL="0">
+              <a:buNone/>
+            </a:pPr>
+            <a:r>
+              <a:rPr lang="en-US" sz="1400" b="1" dirty="0">
+                <a:solidFill>
+                  <a:srgbClr val="B85042"/>
+                </a:solidFill>
+                <a:latin typeface="Calibri" pitchFamily="34" charset="0"/>
+                <a:ea typeface="Calibri" pitchFamily="34" charset="-122"/>
+                <a:cs typeface="Calibri" pitchFamily="34" charset="-120"/>
+              </a:rPr>
               <a:t>カメラが起動しない</a:t>
             </a:r>
             <a:endParaRPr lang="en-US" sz="1400" dirty="0"/>
@@ -7494,13 +7710,13 @@
       </p:sp>
       <p:sp>
         <p:nvSpPr>
-          <p:cNvPr id="11" name="Text 9"/>
-          <p:cNvSpPr txBox="1"/>
-          <p:nvPr/>
-        </p:nvSpPr>
-        <p:spPr>
-          <a:xfrm>
-            <a:off x="713232" y="4733798"/>
+          <p:cNvPr id="15" name="Text 13"/>
+          <p:cNvSpPr txBox="1"/>
+          <p:nvPr/>
+        </p:nvSpPr>
+        <p:spPr>
+          <a:xfrm>
+            <a:off x="713232" y="6056503"/>
             <a:ext cx="6281928" cy="459994"/>
           </a:xfrm>
           <a:prstGeom prst="rect">
@@ -7537,13 +7753,13 @@
       </p:sp>
       <p:sp>
         <p:nvSpPr>
-          <p:cNvPr id="12" name="Text 10"/>
-          <p:cNvSpPr txBox="1"/>
-          <p:nvPr/>
-        </p:nvSpPr>
-        <p:spPr>
-          <a:xfrm>
-            <a:off x="713232" y="5212080"/>
+          <p:cNvPr id="16" name="Text 14"/>
+          <p:cNvSpPr txBox="1"/>
+          <p:nvPr/>
+        </p:nvSpPr>
+        <p:spPr>
+          <a:xfrm>
+            <a:off x="713232" y="6534785"/>
             <a:ext cx="6281928" cy="459994"/>
           </a:xfrm>
           <a:prstGeom prst="rect">
@@ -7580,13 +7796,13 @@
       </p:sp>
       <p:sp>
         <p:nvSpPr>
-          <p:cNvPr id="13" name="Shape 11"/>
+          <p:cNvPr id="17" name="Shape 15"/>
           <p:cNvSpPr/>
           <p:nvPr/>
         </p:nvSpPr>
         <p:spPr>
           <a:xfrm>
-            <a:off x="566928" y="5690362"/>
+            <a:off x="566928" y="7013067"/>
             <a:ext cx="6428232" cy="624459"/>
           </a:xfrm>
           <a:prstGeom prst="roundRect">
@@ -7607,13 +7823,13 @@
       </p:sp>
       <p:sp>
         <p:nvSpPr>
-          <p:cNvPr id="14" name="Text 12"/>
-          <p:cNvSpPr txBox="1"/>
-          <p:nvPr/>
-        </p:nvSpPr>
-        <p:spPr>
-          <a:xfrm>
-            <a:off x="658368" y="5781802"/>
+          <p:cNvPr id="18" name="Text 16"/>
+          <p:cNvSpPr txBox="1"/>
+          <p:nvPr/>
+        </p:nvSpPr>
+        <p:spPr>
+          <a:xfrm>
+            <a:off x="658368" y="7104507"/>
             <a:ext cx="237744" cy="237744"/>
           </a:xfrm>
           <a:prstGeom prst="rect">
@@ -7646,13 +7862,13 @@
       </p:sp>
       <p:sp>
         <p:nvSpPr>
-          <p:cNvPr id="15" name="Text 13"/>
-          <p:cNvSpPr txBox="1"/>
-          <p:nvPr/>
-        </p:nvSpPr>
-        <p:spPr>
-          <a:xfrm>
-            <a:off x="950976" y="5800090"/>
+          <p:cNvPr id="19" name="Text 17"/>
+          <p:cNvSpPr txBox="1"/>
+          <p:nvPr/>
+        </p:nvSpPr>
+        <p:spPr>
+          <a:xfrm>
+            <a:off x="950976" y="7122795"/>
             <a:ext cx="5925312" cy="441579"/>
           </a:xfrm>
           <a:prstGeom prst="rect">
@@ -7688,7 +7904,7 @@
       </p:sp>
       <p:sp>
         <p:nvSpPr>
-          <p:cNvPr id="16" name="Text 14"/>
+          <p:cNvPr id="20" name="Text 18"/>
           <p:cNvSpPr txBox="1"/>
           <p:nvPr/>
         </p:nvSpPr>

--- a/docs/manual-reception.pptx
+++ b/docs/manual-reception.pptx
@@ -14,9 +14,10 @@
     <p:sldId id="262" r:id="rId8"/>
     <p:sldId id="263" r:id="rId9"/>
     <p:sldId id="264" r:id="rId10"/>
+    <p:sldId id="265" r:id="rId11"/>
   </p:sldIdLst>
   <p:notesMasterIdLst>
-    <p:notesMasterId r:id="rId11"/>
+    <p:notesMasterId r:id="rId12"/>
   </p:notesMasterIdLst>
   <p:sldSz cx="7562088" cy="10689336"/>
   <p:notesSz cx="10689336" cy="7562088"/>
@@ -534,6 +535,94 @@
             <a:fld id="{F7021451-1387-4CA6-816F-3879F97B5CBC}" type="slidenum">
               <a:rPr lang="en-US"/>
               <a:t>1</a:t>
+            </a:fld>
+            <a:endParaRPr lang="en-US"/>
+          </a:p>
+        </p:txBody>
+      </p:sp>
+    </p:spTree>
+    <p:extLst>
+      <p:ext uri="{BB962C8B-B14F-4D97-AF65-F5344CB8AC3E}">
+        <p14:creationId xmlns:p14="http://schemas.microsoft.com/office/powerpoint/2010/main" val="1024086991"/>
+      </p:ext>
+    </p:extLst>
+  </p:cSld>
+  <p:clrMapOvr>
+    <a:masterClrMapping/>
+  </p:clrMapOvr>
+</p:notes>
+</file>
+
+<file path=ppt/notesSlides/notesSlide10.xml><?xml version="1.0" encoding="utf-8"?>
+<p:notes xmlns:a="http://schemas.openxmlformats.org/drawingml/2006/main" xmlns:r="http://schemas.openxmlformats.org/officeDocument/2006/relationships" xmlns:p="http://schemas.openxmlformats.org/presentationml/2006/main">
+  <p:cSld>
+    <p:spTree>
+      <p:nvGrpSpPr>
+        <p:cNvPr id="1" name=""/>
+        <p:cNvGrpSpPr/>
+        <p:nvPr/>
+      </p:nvGrpSpPr>
+      <p:grpSpPr>
+        <a:xfrm>
+          <a:off x="0" y="0"/>
+          <a:ext cx="0" cy="0"/>
+          <a:chOff x="0" y="0"/>
+          <a:chExt cx="0" cy="0"/>
+        </a:xfrm>
+      </p:grpSpPr>
+      <p:sp>
+        <p:nvSpPr>
+          <p:cNvPr id="2" name="Slide Image Placeholder 1"/>
+          <p:cNvSpPr>
+            <a:spLocks noGrp="1" noRot="1" noChangeAspect="1"/>
+          </p:cNvSpPr>
+          <p:nvPr>
+            <p:ph type="sldImg"/>
+          </p:nvPr>
+        </p:nvSpPr>
+        <p:spPr/>
+      </p:sp>
+      <p:sp>
+        <p:nvSpPr>
+          <p:cNvPr id="3" name="Notes Placeholder 2"/>
+          <p:cNvSpPr>
+            <a:spLocks noGrp="1"/>
+          </p:cNvSpPr>
+          <p:nvPr>
+            <p:ph type="body" idx="1"/>
+          </p:nvPr>
+        </p:nvSpPr>
+        <p:spPr/>
+        <p:txBody>
+          <a:bodyPr/>
+          <a:lstStyle/>
+          <a:p>
+            <a:r>
+              <a:rPr lang="en-US" dirty="0"/>
+              <a:t/>
+            </a:r>
+            <a:endParaRPr lang="en-US" dirty="0"/>
+          </a:p>
+        </p:txBody>
+      </p:sp>
+      <p:sp>
+        <p:nvSpPr>
+          <p:cNvPr id="4" name="Slide Number Placeholder 3"/>
+          <p:cNvSpPr>
+            <a:spLocks noGrp="1"/>
+          </p:cNvSpPr>
+          <p:nvPr>
+            <p:ph type="sldNum" sz="quarter" idx="10"/>
+          </p:nvPr>
+        </p:nvSpPr>
+        <p:spPr/>
+        <p:txBody>
+          <a:bodyPr/>
+          <a:lstStyle/>
+          <a:p>
+            <a:fld id="{F7021451-1387-4CA6-816F-3879F97B5CBC}" type="slidenum">
+              <a:rPr lang="en-US"/>
+              <a:t>10</a:t>
             </a:fld>
             <a:endParaRPr lang="en-US"/>
           </a:p>
@@ -1754,6 +1843,1094 @@
 </p:sld>
 </file>
 
+<file path=ppt/slides/slide10.xml><?xml version="1.0" encoding="utf-8"?>
+<p:sld xmlns:a="http://schemas.openxmlformats.org/drawingml/2006/main" xmlns:r="http://schemas.openxmlformats.org/officeDocument/2006/relationships" xmlns:p="http://schemas.openxmlformats.org/presentationml/2006/main">
+  <p:cSld name="Slide 10">
+    <p:bg>
+      <p:bgPr>
+        <a:solidFill>
+          <a:srgbClr val="FFFFFF"/>
+        </a:solidFill>
+      </p:bgPr>
+    </p:bg>
+    <p:spTree>
+      <p:nvGrpSpPr>
+        <p:cNvPr id="1" name=""/>
+        <p:cNvGrpSpPr/>
+        <p:nvPr/>
+      </p:nvGrpSpPr>
+      <p:grpSpPr>
+        <a:xfrm>
+          <a:off x="0" y="0"/>
+          <a:ext cx="0" cy="0"/>
+          <a:chOff x="0" y="0"/>
+          <a:chExt cx="0" cy="0"/>
+        </a:xfrm>
+      </p:grpSpPr>
+      <p:sp>
+        <p:nvSpPr>
+          <p:cNvPr id="2" name="Text 0"/>
+          <p:cNvSpPr txBox="1"/>
+          <p:nvPr/>
+        </p:nvSpPr>
+        <p:spPr>
+          <a:xfrm>
+            <a:off x="566928" y="457200"/>
+            <a:ext cx="6428232" cy="237744"/>
+          </a:xfrm>
+          <a:prstGeom prst="rect">
+            <a:avLst/>
+          </a:prstGeom>
+          <a:noFill/>
+          <a:ln/>
+        </p:spPr>
+        <p:txBody>
+          <a:bodyPr wrap="square" lIns="0" tIns="0" rIns="0" bIns="0" rtlCol="0" anchor="ctr"/>
+          <a:lstStyle/>
+          <a:p>
+            <a:pPr indent="0" marL="0">
+              <a:buNone/>
+            </a:pPr>
+            <a:r>
+              <a:rPr lang="en-US" sz="1000" b="1" dirty="0">
+                <a:solidFill>
+                  <a:srgbClr val="B85042"/>
+                </a:solidFill>
+                <a:latin typeface="Calibri" pitchFamily="34" charset="0"/>
+                <a:ea typeface="Calibri" pitchFamily="34" charset="-122"/>
+                <a:cs typeface="Calibri" pitchFamily="34" charset="-120"/>
+              </a:rPr>
+              <a:t>総合受付マニュアル</a:t>
+            </a:r>
+            <a:endParaRPr lang="en-US" sz="1000" dirty="0"/>
+          </a:p>
+        </p:txBody>
+      </p:sp>
+      <p:sp>
+        <p:nvSpPr>
+          <p:cNvPr id="3" name="Text 1"/>
+          <p:cNvSpPr txBox="1"/>
+          <p:nvPr/>
+        </p:nvSpPr>
+        <p:spPr>
+          <a:xfrm>
+            <a:off x="566928" y="713232"/>
+            <a:ext cx="6428232" cy="640080"/>
+          </a:xfrm>
+          <a:prstGeom prst="rect">
+            <a:avLst/>
+          </a:prstGeom>
+          <a:noFill/>
+          <a:ln/>
+        </p:spPr>
+        <p:txBody>
+          <a:bodyPr wrap="square" lIns="0" tIns="0" rIns="0" bIns="0" rtlCol="0" anchor="t"/>
+          <a:lstStyle/>
+          <a:p>
+            <a:pPr indent="0" marL="0">
+              <a:buNone/>
+            </a:pPr>
+            <a:r>
+              <a:rPr lang="en-US" sz="2200" b="1" dirty="0">
+                <a:solidFill>
+                  <a:srgbClr val="222222"/>
+                </a:solidFill>
+                <a:latin typeface="Calibri" pitchFamily="34" charset="0"/>
+                <a:ea typeface="Calibri" pitchFamily="34" charset="-122"/>
+                <a:cs typeface="Calibri" pitchFamily="34" charset="-120"/>
+              </a:rPr>
+              <a:t>困ったときは</a:t>
+            </a:r>
+            <a:endParaRPr lang="en-US" sz="2200" dirty="0"/>
+          </a:p>
+        </p:txBody>
+      </p:sp>
+      <p:sp>
+        <p:nvSpPr>
+          <p:cNvPr id="4" name="Text 2"/>
+          <p:cNvSpPr txBox="1"/>
+          <p:nvPr/>
+        </p:nvSpPr>
+        <p:spPr>
+          <a:xfrm>
+            <a:off x="566928" y="1591056"/>
+            <a:ext cx="6428232" cy="257810"/>
+          </a:xfrm>
+          <a:prstGeom prst="rect">
+            <a:avLst/>
+          </a:prstGeom>
+          <a:noFill/>
+          <a:ln/>
+        </p:spPr>
+        <p:txBody>
+          <a:bodyPr wrap="square" lIns="0" tIns="0" rIns="0" bIns="0" rtlCol="0" anchor="t"/>
+          <a:lstStyle/>
+          <a:p>
+            <a:pPr indent="0" marL="0">
+              <a:buNone/>
+            </a:pPr>
+            <a:r>
+              <a:rPr lang="en-US" sz="1400" b="1" dirty="0">
+                <a:solidFill>
+                  <a:srgbClr val="B85042"/>
+                </a:solidFill>
+                <a:latin typeface="Calibri" pitchFamily="34" charset="0"/>
+                <a:ea typeface="Calibri" pitchFamily="34" charset="-122"/>
+                <a:cs typeface="Calibri" pitchFamily="34" charset="-120"/>
+              </a:rPr>
+              <a:t>QRコードが読み取れない</a:t>
+            </a:r>
+            <a:endParaRPr lang="en-US" sz="1400" dirty="0"/>
+          </a:p>
+        </p:txBody>
+      </p:sp>
+      <p:sp>
+        <p:nvSpPr>
+          <p:cNvPr id="5" name="Text 3"/>
+          <p:cNvSpPr txBox="1"/>
+          <p:nvPr/>
+        </p:nvSpPr>
+        <p:spPr>
+          <a:xfrm>
+            <a:off x="566928" y="1922018"/>
+            <a:ext cx="6428232" cy="459994"/>
+          </a:xfrm>
+          <a:prstGeom prst="rect">
+            <a:avLst/>
+          </a:prstGeom>
+          <a:noFill/>
+          <a:ln/>
+        </p:spPr>
+        <p:txBody>
+          <a:bodyPr wrap="square" lIns="0" tIns="0" rIns="0" bIns="0" rtlCol="0" anchor="t"/>
+          <a:lstStyle/>
+          <a:p>
+            <a:pPr indent="0" marL="0">
+              <a:lnSpc>
+                <a:spcPct val="125000"/>
+              </a:lnSpc>
+              <a:buNone/>
+            </a:pPr>
+            <a:r>
+              <a:rPr lang="en-US" sz="1100" dirty="0">
+                <a:solidFill>
+                  <a:srgbClr val="222222"/>
+                </a:solidFill>
+                <a:latin typeface="Calibri" pitchFamily="34" charset="0"/>
+                <a:ea typeface="Calibri" pitchFamily="34" charset="-122"/>
+                <a:cs typeface="Calibri" pitchFamily="34" charset="-120"/>
+              </a:rPr>
+              <a:t>来場者の画面に表示されている</a:t>
+            </a:r>
+            <a:pPr indent="0" marL="0">
+              <a:lnSpc>
+                <a:spcPct val="125000"/>
+              </a:lnSpc>
+              <a:buNone/>
+            </a:pPr>
+            <a:r>
+              <a:rPr lang="en-US" sz="1100" b="1" dirty="0">
+                <a:solidFill>
+                  <a:srgbClr val="222222"/>
+                </a:solidFill>
+                <a:latin typeface="Calibri" pitchFamily="34" charset="0"/>
+                <a:ea typeface="Calibri" pitchFamily="34" charset="-122"/>
+                <a:cs typeface="Calibri" pitchFamily="34" charset="-120"/>
+              </a:rPr>
+              <a:t>交換コード</a:t>
+            </a:r>
+            <a:pPr indent="0" marL="0">
+              <a:lnSpc>
+                <a:spcPct val="125000"/>
+              </a:lnSpc>
+              <a:buNone/>
+            </a:pPr>
+            <a:r>
+              <a:rPr lang="en-US" sz="1100" dirty="0">
+                <a:solidFill>
+                  <a:srgbClr val="222222"/>
+                </a:solidFill>
+                <a:latin typeface="Calibri" pitchFamily="34" charset="0"/>
+                <a:ea typeface="Calibri" pitchFamily="34" charset="-122"/>
+                <a:cs typeface="Calibri" pitchFamily="34" charset="-120"/>
+              </a:rPr>
+              <a:t>（例：ABCD-2345）を、照会画面の入力欄に手で入力して「照会する」を押してください。小文字やハイフンなしで入力しても大丈夫です。</a:t>
+            </a:r>
+            <a:endParaRPr lang="en-US" sz="1100" dirty="0"/>
+          </a:p>
+        </p:txBody>
+      </p:sp>
+      <p:sp>
+        <p:nvSpPr>
+          <p:cNvPr id="6" name="Text 4"/>
+          <p:cNvSpPr txBox="1"/>
+          <p:nvPr/>
+        </p:nvSpPr>
+        <p:spPr>
+          <a:xfrm>
+            <a:off x="566928" y="2528316"/>
+            <a:ext cx="6428232" cy="257810"/>
+          </a:xfrm>
+          <a:prstGeom prst="rect">
+            <a:avLst/>
+          </a:prstGeom>
+          <a:noFill/>
+          <a:ln/>
+        </p:spPr>
+        <p:txBody>
+          <a:bodyPr wrap="square" lIns="0" tIns="0" rIns="0" bIns="0" rtlCol="0" anchor="t"/>
+          <a:lstStyle/>
+          <a:p>
+            <a:pPr indent="0" marL="0">
+              <a:buNone/>
+            </a:pPr>
+            <a:r>
+              <a:rPr lang="en-US" sz="1400" b="1" dirty="0">
+                <a:solidFill>
+                  <a:srgbClr val="B85042"/>
+                </a:solidFill>
+                <a:latin typeface="Calibri" pitchFamily="34" charset="0"/>
+                <a:ea typeface="Calibri" pitchFamily="34" charset="-122"/>
+                <a:cs typeface="Calibri" pitchFamily="34" charset="-120"/>
+              </a:rPr>
+              <a:t>「該当する交換コードが見つかりません」と出る</a:t>
+            </a:r>
+            <a:endParaRPr lang="en-US" sz="1400" dirty="0"/>
+          </a:p>
+        </p:txBody>
+      </p:sp>
+      <p:sp>
+        <p:nvSpPr>
+          <p:cNvPr id="7" name="Text 5"/>
+          <p:cNvSpPr txBox="1"/>
+          <p:nvPr/>
+        </p:nvSpPr>
+        <p:spPr>
+          <a:xfrm>
+            <a:off x="566928" y="2859278"/>
+            <a:ext cx="6428232" cy="459994"/>
+          </a:xfrm>
+          <a:prstGeom prst="rect">
+            <a:avLst/>
+          </a:prstGeom>
+          <a:noFill/>
+          <a:ln/>
+        </p:spPr>
+        <p:txBody>
+          <a:bodyPr wrap="square" lIns="0" tIns="0" rIns="0" bIns="0" rtlCol="0" anchor="t"/>
+          <a:lstStyle/>
+          <a:p>
+            <a:pPr indent="0" marL="0">
+              <a:lnSpc>
+                <a:spcPct val="125000"/>
+              </a:lnSpc>
+              <a:buNone/>
+            </a:pPr>
+            <a:r>
+              <a:rPr lang="en-US" sz="1100" dirty="0">
+                <a:solidFill>
+                  <a:srgbClr val="222222"/>
+                </a:solidFill>
+                <a:latin typeface="Calibri" pitchFamily="34" charset="0"/>
+                <a:ea typeface="Calibri" pitchFamily="34" charset="-122"/>
+                <a:cs typeface="Calibri" pitchFamily="34" charset="-120"/>
+              </a:rPr>
+              <a:t>入力した文字をご確認ください。数字の0とアルファベットのO、1とIは</a:t>
+            </a:r>
+            <a:pPr indent="0" marL="0">
+              <a:lnSpc>
+                <a:spcPct val="125000"/>
+              </a:lnSpc>
+              <a:buNone/>
+            </a:pPr>
+            <a:r>
+              <a:rPr lang="en-US" sz="1100" b="1" dirty="0">
+                <a:solidFill>
+                  <a:srgbClr val="222222"/>
+                </a:solidFill>
+                <a:latin typeface="Calibri" pitchFamily="34" charset="0"/>
+                <a:ea typeface="Calibri" pitchFamily="34" charset="-122"/>
+                <a:cs typeface="Calibri" pitchFamily="34" charset="-120"/>
+              </a:rPr>
+              <a:t>使われていません</a:t>
+            </a:r>
+            <a:pPr indent="0" marL="0">
+              <a:lnSpc>
+                <a:spcPct val="125000"/>
+              </a:lnSpc>
+              <a:buNone/>
+            </a:pPr>
+            <a:r>
+              <a:rPr lang="en-US" sz="1100" dirty="0">
+                <a:solidFill>
+                  <a:srgbClr val="222222"/>
+                </a:solidFill>
+                <a:latin typeface="Calibri" pitchFamily="34" charset="0"/>
+                <a:ea typeface="Calibri" pitchFamily="34" charset="-122"/>
+                <a:cs typeface="Calibri" pitchFamily="34" charset="-120"/>
+              </a:rPr>
+              <a:t>。読み間違いの可能性があります。</a:t>
+            </a:r>
+            <a:endParaRPr lang="en-US" sz="1100" dirty="0"/>
+          </a:p>
+        </p:txBody>
+      </p:sp>
+      <p:sp>
+        <p:nvSpPr>
+          <p:cNvPr id="8" name="Text 6"/>
+          <p:cNvSpPr txBox="1"/>
+          <p:nvPr/>
+        </p:nvSpPr>
+        <p:spPr>
+          <a:xfrm>
+            <a:off x="566928" y="3465576"/>
+            <a:ext cx="6428232" cy="257810"/>
+          </a:xfrm>
+          <a:prstGeom prst="rect">
+            <a:avLst/>
+          </a:prstGeom>
+          <a:noFill/>
+          <a:ln/>
+        </p:spPr>
+        <p:txBody>
+          <a:bodyPr wrap="square" lIns="0" tIns="0" rIns="0" bIns="0" rtlCol="0" anchor="t"/>
+          <a:lstStyle/>
+          <a:p>
+            <a:pPr indent="0" marL="0">
+              <a:buNone/>
+            </a:pPr>
+            <a:r>
+              <a:rPr lang="en-US" sz="1400" b="1" dirty="0">
+                <a:solidFill>
+                  <a:srgbClr val="B85042"/>
+                </a:solidFill>
+                <a:latin typeface="Calibri" pitchFamily="34" charset="0"/>
+                <a:ea typeface="Calibri" pitchFamily="34" charset="-122"/>
+                <a:cs typeface="Calibri" pitchFamily="34" charset="-120"/>
+              </a:rPr>
+              <a:t>来場者の画面に交換コードが出ていない</a:t>
+            </a:r>
+            <a:endParaRPr lang="en-US" sz="1400" dirty="0"/>
+          </a:p>
+        </p:txBody>
+      </p:sp>
+      <p:sp>
+        <p:nvSpPr>
+          <p:cNvPr id="9" name="Text 7"/>
+          <p:cNvSpPr txBox="1"/>
+          <p:nvPr/>
+        </p:nvSpPr>
+        <p:spPr>
+          <a:xfrm>
+            <a:off x="566928" y="3796538"/>
+            <a:ext cx="6428232" cy="459994"/>
+          </a:xfrm>
+          <a:prstGeom prst="rect">
+            <a:avLst/>
+          </a:prstGeom>
+          <a:noFill/>
+          <a:ln/>
+        </p:spPr>
+        <p:txBody>
+          <a:bodyPr wrap="square" lIns="0" tIns="0" rIns="0" bIns="0" rtlCol="0" anchor="t"/>
+          <a:lstStyle/>
+          <a:p>
+            <a:pPr indent="0" marL="0">
+              <a:lnSpc>
+                <a:spcPct val="125000"/>
+              </a:lnSpc>
+              <a:buNone/>
+            </a:pPr>
+            <a:r>
+              <a:rPr lang="en-US" sz="1100" dirty="0">
+                <a:solidFill>
+                  <a:srgbClr val="222222"/>
+                </a:solidFill>
+                <a:latin typeface="Calibri" pitchFamily="34" charset="0"/>
+                <a:ea typeface="Calibri" pitchFamily="34" charset="-122"/>
+                <a:cs typeface="Calibri" pitchFamily="34" charset="-120"/>
+              </a:rPr>
+              <a:t>ブラウザを閉じてしまった場合は、受付に掲示している</a:t>
+            </a:r>
+            <a:pPr indent="0" marL="0">
+              <a:lnSpc>
+                <a:spcPct val="125000"/>
+              </a:lnSpc>
+              <a:buNone/>
+            </a:pPr>
+            <a:r>
+              <a:rPr lang="en-US" sz="1100" b="1" dirty="0">
+                <a:solidFill>
+                  <a:srgbClr val="222222"/>
+                </a:solidFill>
+                <a:latin typeface="Calibri" pitchFamily="34" charset="0"/>
+                <a:ea typeface="Calibri" pitchFamily="34" charset="-122"/>
+                <a:cs typeface="Calibri" pitchFamily="34" charset="-120"/>
+              </a:rPr>
+              <a:t>「交換コードを表示する」のQRコード</a:t>
+            </a:r>
+            <a:pPr indent="0" marL="0">
+              <a:lnSpc>
+                <a:spcPct val="125000"/>
+              </a:lnSpc>
+              <a:buNone/>
+            </a:pPr>
+            <a:r>
+              <a:rPr lang="en-US" sz="1100" dirty="0">
+                <a:solidFill>
+                  <a:srgbClr val="222222"/>
+                </a:solidFill>
+                <a:latin typeface="Calibri" pitchFamily="34" charset="0"/>
+                <a:ea typeface="Calibri" pitchFamily="34" charset="-122"/>
+                <a:cs typeface="Calibri" pitchFamily="34" charset="-120"/>
+              </a:rPr>
+              <a:t>を、ご本人のスマートフォンで読み取っていただいてください。その場で交換コードが表示されます。</a:t>
+            </a:r>
+            <a:endParaRPr lang="en-US" sz="1100" dirty="0"/>
+          </a:p>
+        </p:txBody>
+      </p:sp>
+      <p:sp>
+        <p:nvSpPr>
+          <p:cNvPr id="10" name="Text 8"/>
+          <p:cNvSpPr txBox="1"/>
+          <p:nvPr/>
+        </p:nvSpPr>
+        <p:spPr>
+          <a:xfrm>
+            <a:off x="566928" y="4293108"/>
+            <a:ext cx="6428232" cy="257429"/>
+          </a:xfrm>
+          <a:prstGeom prst="rect">
+            <a:avLst/>
+          </a:prstGeom>
+          <a:noFill/>
+          <a:ln/>
+        </p:spPr>
+        <p:txBody>
+          <a:bodyPr wrap="square" lIns="0" tIns="0" rIns="0" bIns="0" rtlCol="0" anchor="t"/>
+          <a:lstStyle/>
+          <a:p>
+            <a:pPr indent="0" marL="0">
+              <a:lnSpc>
+                <a:spcPct val="125000"/>
+              </a:lnSpc>
+              <a:buNone/>
+            </a:pPr>
+            <a:r>
+              <a:rPr lang="en-US" sz="1100" dirty="0">
+                <a:solidFill>
+                  <a:srgbClr val="222222"/>
+                </a:solidFill>
+                <a:latin typeface="Calibri" pitchFamily="34" charset="0"/>
+                <a:ea typeface="Calibri" pitchFamily="34" charset="-122"/>
+                <a:cs typeface="Calibri" pitchFamily="34" charset="-120"/>
+              </a:rPr>
+              <a:t>それでも出ない場合は、次のどちらかです。</a:t>
+            </a:r>
+            <a:endParaRPr lang="en-US" sz="1100" dirty="0"/>
+          </a:p>
+        </p:txBody>
+      </p:sp>
+      <p:sp>
+        <p:nvSpPr>
+          <p:cNvPr id="11" name="Text 9"/>
+          <p:cNvSpPr txBox="1"/>
+          <p:nvPr/>
+        </p:nvSpPr>
+        <p:spPr>
+          <a:xfrm>
+            <a:off x="713232" y="4587113"/>
+            <a:ext cx="6281928" cy="459994"/>
+          </a:xfrm>
+          <a:prstGeom prst="rect">
+            <a:avLst/>
+          </a:prstGeom>
+          <a:noFill/>
+          <a:ln/>
+        </p:spPr>
+        <p:txBody>
+          <a:bodyPr wrap="square" lIns="0" tIns="0" rIns="0" bIns="0" rtlCol="0" anchor="t"/>
+          <a:lstStyle/>
+          <a:p>
+            <a:pPr marL="342900" indent="-342900">
+              <a:lnSpc>
+                <a:spcPct val="125000"/>
+              </a:lnSpc>
+              <a:buSzPct val="100000"/>
+              <a:buChar char="●"/>
+            </a:pPr>
+            <a:r>
+              <a:rPr lang="en-US" sz="1100" dirty="0">
+                <a:solidFill>
+                  <a:srgbClr val="222222"/>
+                </a:solidFill>
+                <a:latin typeface="Calibri" pitchFamily="34" charset="0"/>
+                <a:ea typeface="Calibri" pitchFamily="34" charset="-122"/>
+                <a:cs typeface="Calibri" pitchFamily="34" charset="-120"/>
+              </a:rPr>
+              <a:t>まだどのブースのアンケートにも回答していない →「ブースのQRコードからアンケートに回答すると表示されます」とご案内ください</a:t>
+            </a:r>
+            <a:endParaRPr lang="en-US" sz="1100" dirty="0"/>
+          </a:p>
+        </p:txBody>
+      </p:sp>
+      <p:sp>
+        <p:nvSpPr>
+          <p:cNvPr id="12" name="Text 10"/>
+          <p:cNvSpPr txBox="1"/>
+          <p:nvPr/>
+        </p:nvSpPr>
+        <p:spPr>
+          <a:xfrm>
+            <a:off x="713232" y="5065395"/>
+            <a:ext cx="6281928" cy="459994"/>
+          </a:xfrm>
+          <a:prstGeom prst="rect">
+            <a:avLst/>
+          </a:prstGeom>
+          <a:noFill/>
+          <a:ln/>
+        </p:spPr>
+        <p:txBody>
+          <a:bodyPr wrap="square" lIns="0" tIns="0" rIns="0" bIns="0" rtlCol="0" anchor="t"/>
+          <a:lstStyle/>
+          <a:p>
+            <a:pPr marL="342900" indent="-342900">
+              <a:lnSpc>
+                <a:spcPct val="125000"/>
+              </a:lnSpc>
+              <a:buSzPct val="100000"/>
+              <a:buChar char="●"/>
+            </a:pPr>
+            <a:r>
+              <a:rPr lang="en-US" sz="1100" b="1" dirty="0">
+                <a:solidFill>
+                  <a:srgbClr val="222222"/>
+                </a:solidFill>
+                <a:latin typeface="Calibri" pitchFamily="34" charset="0"/>
+                <a:ea typeface="Calibri" pitchFamily="34" charset="-122"/>
+                <a:cs typeface="Calibri" pitchFamily="34" charset="-120"/>
+              </a:rPr>
+              <a:t>回答したときと別のスマートフォン・別のブラウザ</a:t>
+            </a:r>
+            <a:pPr indent="0" marL="0">
+              <a:lnSpc>
+                <a:spcPct val="125000"/>
+              </a:lnSpc>
+              <a:buNone/>
+            </a:pPr>
+            <a:r>
+              <a:rPr lang="en-US" sz="1100" dirty="0">
+                <a:solidFill>
+                  <a:srgbClr val="222222"/>
+                </a:solidFill>
+                <a:latin typeface="Calibri" pitchFamily="34" charset="0"/>
+                <a:ea typeface="Calibri" pitchFamily="34" charset="-122"/>
+                <a:cs typeface="Calibri" pitchFamily="34" charset="-120"/>
+              </a:rPr>
+              <a:t>で読み取っている → ご本人に心当たりを伺い、回答したブース数などを確認したうえで、お渡しするかはスタッフでご判断ください</a:t>
+            </a:r>
+            <a:endParaRPr lang="en-US" sz="1100" dirty="0"/>
+          </a:p>
+        </p:txBody>
+      </p:sp>
+      <p:sp>
+        <p:nvSpPr>
+          <p:cNvPr id="13" name="Text 11"/>
+          <p:cNvSpPr txBox="1"/>
+          <p:nvPr/>
+        </p:nvSpPr>
+        <p:spPr>
+          <a:xfrm>
+            <a:off x="566928" y="5653405"/>
+            <a:ext cx="6428232" cy="257810"/>
+          </a:xfrm>
+          <a:prstGeom prst="rect">
+            <a:avLst/>
+          </a:prstGeom>
+          <a:noFill/>
+          <a:ln/>
+        </p:spPr>
+        <p:txBody>
+          <a:bodyPr wrap="square" lIns="0" tIns="0" rIns="0" bIns="0" rtlCol="0" anchor="t"/>
+          <a:lstStyle/>
+          <a:p>
+            <a:pPr indent="0" marL="0">
+              <a:buNone/>
+            </a:pPr>
+            <a:r>
+              <a:rPr lang="en-US" sz="1400" b="1" dirty="0">
+                <a:solidFill>
+                  <a:srgbClr val="B85042"/>
+                </a:solidFill>
+                <a:latin typeface="Calibri" pitchFamily="34" charset="0"/>
+                <a:ea typeface="Calibri" pitchFamily="34" charset="-122"/>
+                <a:cs typeface="Calibri" pitchFamily="34" charset="-120"/>
+              </a:rPr>
+              <a:t>メールアドレスを間違えたと言われた</a:t>
+            </a:r>
+            <a:endParaRPr lang="en-US" sz="1400" dirty="0"/>
+          </a:p>
+        </p:txBody>
+      </p:sp>
+      <p:sp>
+        <p:nvSpPr>
+          <p:cNvPr id="14" name="Text 12"/>
+          <p:cNvSpPr txBox="1"/>
+          <p:nvPr/>
+        </p:nvSpPr>
+        <p:spPr>
+          <a:xfrm>
+            <a:off x="566928" y="5984367"/>
+            <a:ext cx="6428232" cy="257429"/>
+          </a:xfrm>
+          <a:prstGeom prst="rect">
+            <a:avLst/>
+          </a:prstGeom>
+          <a:noFill/>
+          <a:ln/>
+        </p:spPr>
+        <p:txBody>
+          <a:bodyPr wrap="square" lIns="0" tIns="0" rIns="0" bIns="0" rtlCol="0" anchor="t"/>
+          <a:lstStyle/>
+          <a:p>
+            <a:pPr indent="0" marL="0">
+              <a:lnSpc>
+                <a:spcPct val="125000"/>
+              </a:lnSpc>
+              <a:buNone/>
+            </a:pPr>
+            <a:r>
+              <a:rPr lang="en-US" sz="1100" dirty="0">
+                <a:solidFill>
+                  <a:srgbClr val="222222"/>
+                </a:solidFill>
+                <a:latin typeface="Calibri" pitchFamily="34" charset="0"/>
+                <a:ea typeface="Calibri" pitchFamily="34" charset="-122"/>
+                <a:cs typeface="Calibri" pitchFamily="34" charset="-120"/>
+              </a:rPr>
+              <a:t>来場者ご自身で直せます。</a:t>
+            </a:r>
+            <a:pPr indent="0" marL="0">
+              <a:lnSpc>
+                <a:spcPct val="125000"/>
+              </a:lnSpc>
+              <a:buNone/>
+            </a:pPr>
+            <a:r>
+              <a:rPr lang="en-US" sz="1100" b="1" dirty="0">
+                <a:solidFill>
+                  <a:srgbClr val="222222"/>
+                </a:solidFill>
+                <a:latin typeface="Calibri" pitchFamily="34" charset="0"/>
+                <a:ea typeface="Calibri" pitchFamily="34" charset="-122"/>
+                <a:cs typeface="Calibri" pitchFamily="34" charset="-120"/>
+              </a:rPr>
+              <a:t>回答済み画面</a:t>
+            </a:r>
+            <a:pPr indent="0" marL="0">
+              <a:lnSpc>
+                <a:spcPct val="125000"/>
+              </a:lnSpc>
+              <a:buNone/>
+            </a:pPr>
+            <a:r>
+              <a:rPr lang="en-US" sz="1100" dirty="0">
+                <a:solidFill>
+                  <a:srgbClr val="222222"/>
+                </a:solidFill>
+                <a:latin typeface="Calibri" pitchFamily="34" charset="0"/>
+                <a:ea typeface="Calibri" pitchFamily="34" charset="-122"/>
+                <a:cs typeface="Calibri" pitchFamily="34" charset="-120"/>
+              </a:rPr>
+              <a:t>（交換コードが出ている画面）の下にある</a:t>
+            </a:r>
+            <a:endParaRPr lang="en-US" sz="1100" dirty="0"/>
+          </a:p>
+        </p:txBody>
+      </p:sp>
+      <p:sp>
+        <p:nvSpPr>
+          <p:cNvPr id="15" name="Text 13"/>
+          <p:cNvSpPr txBox="1"/>
+          <p:nvPr/>
+        </p:nvSpPr>
+        <p:spPr>
+          <a:xfrm>
+            <a:off x="566928" y="6278372"/>
+            <a:ext cx="6428232" cy="257429"/>
+          </a:xfrm>
+          <a:prstGeom prst="rect">
+            <a:avLst/>
+          </a:prstGeom>
+          <a:noFill/>
+          <a:ln/>
+        </p:spPr>
+        <p:txBody>
+          <a:bodyPr wrap="square" lIns="0" tIns="0" rIns="0" bIns="0" rtlCol="0" anchor="t"/>
+          <a:lstStyle/>
+          <a:p>
+            <a:pPr indent="0" marL="0">
+              <a:lnSpc>
+                <a:spcPct val="125000"/>
+              </a:lnSpc>
+              <a:buNone/>
+            </a:pPr>
+            <a:r>
+              <a:rPr lang="en-US" sz="1100" b="1" dirty="0">
+                <a:solidFill>
+                  <a:srgbClr val="222222"/>
+                </a:solidFill>
+                <a:latin typeface="Calibri" pitchFamily="34" charset="0"/>
+                <a:ea typeface="Calibri" pitchFamily="34" charset="-122"/>
+                <a:cs typeface="Calibri" pitchFamily="34" charset="-120"/>
+              </a:rPr>
+              <a:t>「登録したメールアドレスを変更する」</a:t>
+            </a:r>
+            <a:pPr indent="0" marL="0">
+              <a:lnSpc>
+                <a:spcPct val="125000"/>
+              </a:lnSpc>
+              <a:buNone/>
+            </a:pPr>
+            <a:r>
+              <a:rPr lang="en-US" sz="1100" dirty="0">
+                <a:solidFill>
+                  <a:srgbClr val="222222"/>
+                </a:solidFill>
+                <a:latin typeface="Calibri" pitchFamily="34" charset="0"/>
+                <a:ea typeface="Calibri" pitchFamily="34" charset="-122"/>
+                <a:cs typeface="Calibri" pitchFamily="34" charset="-120"/>
+              </a:rPr>
+              <a:t>を開いて、新しいアドレスを入れていただいてください。</a:t>
+            </a:r>
+            <a:endParaRPr lang="en-US" sz="1100" dirty="0"/>
+          </a:p>
+        </p:txBody>
+      </p:sp>
+      <p:sp>
+        <p:nvSpPr>
+          <p:cNvPr id="16" name="Text 14"/>
+          <p:cNvSpPr txBox="1"/>
+          <p:nvPr/>
+        </p:nvSpPr>
+        <p:spPr>
+          <a:xfrm>
+            <a:off x="566928" y="6572377"/>
+            <a:ext cx="6428232" cy="257429"/>
+          </a:xfrm>
+          <a:prstGeom prst="rect">
+            <a:avLst/>
+          </a:prstGeom>
+          <a:noFill/>
+          <a:ln/>
+        </p:spPr>
+        <p:txBody>
+          <a:bodyPr wrap="square" lIns="0" tIns="0" rIns="0" bIns="0" rtlCol="0" anchor="t"/>
+          <a:lstStyle/>
+          <a:p>
+            <a:pPr indent="0" marL="0">
+              <a:lnSpc>
+                <a:spcPct val="125000"/>
+              </a:lnSpc>
+              <a:buNone/>
+            </a:pPr>
+            <a:r>
+              <a:rPr lang="en-US" sz="1100" dirty="0">
+                <a:solidFill>
+                  <a:srgbClr val="222222"/>
+                </a:solidFill>
+                <a:latin typeface="Calibri" pitchFamily="34" charset="0"/>
+                <a:ea typeface="Calibri" pitchFamily="34" charset="-122"/>
+                <a:cs typeface="Calibri" pitchFamily="34" charset="-120"/>
+              </a:rPr>
+              <a:t>受付側でアドレスを見たり直したりすることはできません。</a:t>
+            </a:r>
+            <a:endParaRPr lang="en-US" sz="1100" dirty="0"/>
+          </a:p>
+        </p:txBody>
+      </p:sp>
+      <p:sp>
+        <p:nvSpPr>
+          <p:cNvPr id="17" name="Text 15"/>
+          <p:cNvSpPr txBox="1"/>
+          <p:nvPr/>
+        </p:nvSpPr>
+        <p:spPr>
+          <a:xfrm>
+            <a:off x="566928" y="6976110"/>
+            <a:ext cx="6428232" cy="257810"/>
+          </a:xfrm>
+          <a:prstGeom prst="rect">
+            <a:avLst/>
+          </a:prstGeom>
+          <a:noFill/>
+          <a:ln/>
+        </p:spPr>
+        <p:txBody>
+          <a:bodyPr wrap="square" lIns="0" tIns="0" rIns="0" bIns="0" rtlCol="0" anchor="t"/>
+          <a:lstStyle/>
+          <a:p>
+            <a:pPr indent="0" marL="0">
+              <a:buNone/>
+            </a:pPr>
+            <a:r>
+              <a:rPr lang="en-US" sz="1400" b="1" dirty="0">
+                <a:solidFill>
+                  <a:srgbClr val="B85042"/>
+                </a:solidFill>
+                <a:latin typeface="Calibri" pitchFamily="34" charset="0"/>
+                <a:ea typeface="Calibri" pitchFamily="34" charset="-122"/>
+                <a:cs typeface="Calibri" pitchFamily="34" charset="-120"/>
+              </a:rPr>
+              <a:t>カメラが起動しない</a:t>
+            </a:r>
+            <a:endParaRPr lang="en-US" sz="1400" dirty="0"/>
+          </a:p>
+        </p:txBody>
+      </p:sp>
+      <p:sp>
+        <p:nvSpPr>
+          <p:cNvPr id="18" name="Text 16"/>
+          <p:cNvSpPr txBox="1"/>
+          <p:nvPr/>
+        </p:nvSpPr>
+        <p:spPr>
+          <a:xfrm>
+            <a:off x="713232" y="7307072"/>
+            <a:ext cx="6281928" cy="459994"/>
+          </a:xfrm>
+          <a:prstGeom prst="rect">
+            <a:avLst/>
+          </a:prstGeom>
+          <a:noFill/>
+          <a:ln/>
+        </p:spPr>
+        <p:txBody>
+          <a:bodyPr wrap="square" lIns="0" tIns="0" rIns="0" bIns="0" rtlCol="0" anchor="t"/>
+          <a:lstStyle/>
+          <a:p>
+            <a:pPr marL="342900" indent="-342900">
+              <a:lnSpc>
+                <a:spcPct val="125000"/>
+              </a:lnSpc>
+              <a:buSzPct val="100000"/>
+              <a:buChar char="●"/>
+            </a:pPr>
+            <a:r>
+              <a:rPr lang="en-US" sz="1100" dirty="0">
+                <a:solidFill>
+                  <a:srgbClr val="222222"/>
+                </a:solidFill>
+                <a:latin typeface="Calibri" pitchFamily="34" charset="0"/>
+                <a:ea typeface="Calibri" pitchFamily="34" charset="-122"/>
+                <a:cs typeface="Calibri" pitchFamily="34" charset="-120"/>
+              </a:rPr>
+              <a:t>カメラの使用を「許可」していない可能性があります。ブラウザの設定からこのサイトのカメラを許可してください</a:t>
+            </a:r>
+            <a:endParaRPr lang="en-US" sz="1100" dirty="0"/>
+          </a:p>
+        </p:txBody>
+      </p:sp>
+      <p:sp>
+        <p:nvSpPr>
+          <p:cNvPr id="19" name="Text 17"/>
+          <p:cNvSpPr txBox="1"/>
+          <p:nvPr/>
+        </p:nvSpPr>
+        <p:spPr>
+          <a:xfrm>
+            <a:off x="713232" y="7785354"/>
+            <a:ext cx="6281928" cy="459994"/>
+          </a:xfrm>
+          <a:prstGeom prst="rect">
+            <a:avLst/>
+          </a:prstGeom>
+          <a:noFill/>
+          <a:ln/>
+        </p:spPr>
+        <p:txBody>
+          <a:bodyPr wrap="square" lIns="0" tIns="0" rIns="0" bIns="0" rtlCol="0" anchor="t"/>
+          <a:lstStyle/>
+          <a:p>
+            <a:pPr marL="342900" indent="-342900">
+              <a:lnSpc>
+                <a:spcPct val="125000"/>
+              </a:lnSpc>
+              <a:buSzPct val="100000"/>
+              <a:buChar char="●"/>
+            </a:pPr>
+            <a:r>
+              <a:rPr lang="en-US" sz="1100" dirty="0">
+                <a:solidFill>
+                  <a:srgbClr val="222222"/>
+                </a:solidFill>
+                <a:latin typeface="Calibri" pitchFamily="34" charset="0"/>
+                <a:ea typeface="Calibri" pitchFamily="34" charset="-122"/>
+                <a:cs typeface="Calibri" pitchFamily="34" charset="-120"/>
+              </a:rPr>
+              <a:t>それでも動かない場合は、標準のカメラアプリで読み取る方法（方法B）か、コードの手入力をお使いください</a:t>
+            </a:r>
+            <a:endParaRPr lang="en-US" sz="1100" dirty="0"/>
+          </a:p>
+        </p:txBody>
+      </p:sp>
+      <p:sp>
+        <p:nvSpPr>
+          <p:cNvPr id="20" name="Shape 18"/>
+          <p:cNvSpPr/>
+          <p:nvPr/>
+        </p:nvSpPr>
+        <p:spPr>
+          <a:xfrm>
+            <a:off x="566928" y="8263636"/>
+            <a:ext cx="6428232" cy="624459"/>
+          </a:xfrm>
+          <a:prstGeom prst="roundRect">
+            <a:avLst>
+              <a:gd name="adj" fmla="val 8786"/>
+            </a:avLst>
+          </a:prstGeom>
+          <a:solidFill>
+            <a:srgbClr val="FDF0E6"/>
+          </a:solidFill>
+          <a:ln w="9525">
+            <a:solidFill>
+              <a:srgbClr val="E08A3C"/>
+            </a:solidFill>
+            <a:prstDash val="solid"/>
+          </a:ln>
+        </p:spPr>
+      </p:sp>
+      <p:sp>
+        <p:nvSpPr>
+          <p:cNvPr id="21" name="Text 19"/>
+          <p:cNvSpPr txBox="1"/>
+          <p:nvPr/>
+        </p:nvSpPr>
+        <p:spPr>
+          <a:xfrm>
+            <a:off x="658368" y="8355076"/>
+            <a:ext cx="237744" cy="237744"/>
+          </a:xfrm>
+          <a:prstGeom prst="rect">
+            <a:avLst/>
+          </a:prstGeom>
+          <a:noFill/>
+          <a:ln/>
+        </p:spPr>
+        <p:txBody>
+          <a:bodyPr wrap="square" lIns="0" tIns="0" rIns="0" bIns="0" rtlCol="0" anchor="ctr"/>
+          <a:lstStyle/>
+          <a:p>
+            <a:pPr algn="ctr" indent="0" marL="0">
+              <a:buNone/>
+            </a:pPr>
+            <a:r>
+              <a:rPr lang="en-US" sz="1200" b="1" dirty="0">
+                <a:solidFill>
+                  <a:srgbClr val="C25A17"/>
+                </a:solidFill>
+                <a:latin typeface="Calibri" pitchFamily="34" charset="0"/>
+                <a:ea typeface="Calibri" pitchFamily="34" charset="-122"/>
+                <a:cs typeface="Calibri" pitchFamily="34" charset="-120"/>
+              </a:rPr>
+              <a:t>！</a:t>
+            </a:r>
+            <a:endParaRPr lang="en-US" sz="1200" dirty="0"/>
+          </a:p>
+        </p:txBody>
+      </p:sp>
+      <p:sp>
+        <p:nvSpPr>
+          <p:cNvPr id="22" name="Text 20"/>
+          <p:cNvSpPr txBox="1"/>
+          <p:nvPr/>
+        </p:nvSpPr>
+        <p:spPr>
+          <a:xfrm>
+            <a:off x="950976" y="8373364"/>
+            <a:ext cx="5925312" cy="441579"/>
+          </a:xfrm>
+          <a:prstGeom prst="rect">
+            <a:avLst/>
+          </a:prstGeom>
+          <a:noFill/>
+          <a:ln/>
+        </p:spPr>
+        <p:txBody>
+          <a:bodyPr wrap="square" lIns="0" tIns="0" rIns="0" bIns="0" rtlCol="0" anchor="t"/>
+          <a:lstStyle/>
+          <a:p>
+            <a:pPr indent="0" marL="0">
+              <a:lnSpc>
+                <a:spcPct val="120000"/>
+              </a:lnSpc>
+              <a:buNone/>
+            </a:pPr>
+            <a:r>
+              <a:rPr lang="en-US" sz="1050" dirty="0">
+                <a:solidFill>
+                  <a:srgbClr val="222222"/>
+                </a:solidFill>
+                <a:latin typeface="Calibri" pitchFamily="34" charset="0"/>
+                <a:ea typeface="Calibri" pitchFamily="34" charset="-122"/>
+                <a:cs typeface="Calibri" pitchFamily="34" charset="-120"/>
+              </a:rPr>
+              <a:t>判断に迷ったときは、来場者をお待たせしないことを優先し、お渡ししたうえでメモ欄に状況を記録してください。</a:t>
+            </a:r>
+            <a:endParaRPr lang="en-US" sz="1050" dirty="0"/>
+          </a:p>
+        </p:txBody>
+      </p:sp>
+      <p:sp>
+        <p:nvSpPr>
+          <p:cNvPr id="23" name="Text 21"/>
+          <p:cNvSpPr txBox="1"/>
+          <p:nvPr/>
+        </p:nvSpPr>
+        <p:spPr>
+          <a:xfrm>
+            <a:off x="566928" y="10186416"/>
+            <a:ext cx="6428232" cy="228600"/>
+          </a:xfrm>
+          <a:prstGeom prst="rect">
+            <a:avLst/>
+          </a:prstGeom>
+          <a:noFill/>
+          <a:ln/>
+        </p:spPr>
+        <p:txBody>
+          <a:bodyPr wrap="square" lIns="0" tIns="0" rIns="0" bIns="0" rtlCol="0" anchor="ctr"/>
+          <a:lstStyle/>
+          <a:p>
+            <a:pPr algn="r" indent="0" marL="0">
+              <a:buNone/>
+            </a:pPr>
+            <a:r>
+              <a:rPr lang="en-US" sz="900" dirty="0">
+                <a:solidFill>
+                  <a:srgbClr val="6B6B6B"/>
+                </a:solidFill>
+                <a:latin typeface="Calibri" pitchFamily="34" charset="0"/>
+                <a:ea typeface="Calibri" pitchFamily="34" charset="-122"/>
+                <a:cs typeface="Calibri" pitchFamily="34" charset="-120"/>
+              </a:rPr>
+              <a:t>総合受付向け　10</a:t>
+            </a:r>
+            <a:endParaRPr lang="en-US" sz="900" dirty="0"/>
+          </a:p>
+        </p:txBody>
+      </p:sp>
+    </p:spTree>
+  </p:cSld>
+  <p:clrMapOvr>
+    <a:masterClrMapping/>
+  </p:clrMapOvr>
+</p:sld>
+</file>
+
 <file path=ppt/slides/slide2.xml><?xml version="1.0" encoding="utf-8"?>
 <p:sld xmlns:a="http://schemas.openxmlformats.org/drawingml/2006/main" xmlns:r="http://schemas.openxmlformats.org/officeDocument/2006/relationships" xmlns:p="http://schemas.openxmlformats.org/presentationml/2006/main">
   <p:cSld name="Slide 2">
@@ -2619,6 +3796,121 @@
       <p:sp>
         <p:nvSpPr>
           <p:cNvPr id="22" name="Text 19"/>
+          <p:cNvSpPr txBox="1"/>
+          <p:nvPr/>
+        </p:nvSpPr>
+        <p:spPr>
+          <a:xfrm>
+            <a:off x="566928" y="8713216"/>
+            <a:ext cx="6428232" cy="257810"/>
+          </a:xfrm>
+          <a:prstGeom prst="rect">
+            <a:avLst/>
+          </a:prstGeom>
+          <a:noFill/>
+          <a:ln/>
+        </p:spPr>
+        <p:txBody>
+          <a:bodyPr wrap="square" lIns="0" tIns="0" rIns="0" bIns="0" rtlCol="0" anchor="t"/>
+          <a:lstStyle/>
+          <a:p>
+            <a:pPr indent="0" marL="0">
+              <a:buNone/>
+            </a:pPr>
+            <a:r>
+              <a:rPr lang="en-US" sz="1400" b="1" dirty="0">
+                <a:solidFill>
+                  <a:srgbClr val="B85042"/>
+                </a:solidFill>
+                <a:latin typeface="Calibri" pitchFamily="34" charset="0"/>
+                <a:ea typeface="Calibri" pitchFamily="34" charset="-122"/>
+                <a:cs typeface="Calibri" pitchFamily="34" charset="-120"/>
+              </a:rPr>
+              <a:t>「交換コードを表示する」の掲示</a:t>
+            </a:r>
+            <a:endParaRPr lang="en-US" sz="1400" dirty="0"/>
+          </a:p>
+        </p:txBody>
+      </p:sp>
+      <p:sp>
+        <p:nvSpPr>
+          <p:cNvPr id="23" name="Text 20"/>
+          <p:cNvSpPr txBox="1"/>
+          <p:nvPr/>
+        </p:nvSpPr>
+        <p:spPr>
+          <a:xfrm>
+            <a:off x="566928" y="9044178"/>
+            <a:ext cx="6428232" cy="459994"/>
+          </a:xfrm>
+          <a:prstGeom prst="rect">
+            <a:avLst/>
+          </a:prstGeom>
+          <a:noFill/>
+          <a:ln/>
+        </p:spPr>
+        <p:txBody>
+          <a:bodyPr wrap="square" lIns="0" tIns="0" rIns="0" bIns="0" rtlCol="0" anchor="t"/>
+          <a:lstStyle/>
+          <a:p>
+            <a:pPr indent="0" marL="0">
+              <a:lnSpc>
+                <a:spcPct val="125000"/>
+              </a:lnSpc>
+              <a:buNone/>
+            </a:pPr>
+            <a:r>
+              <a:rPr lang="en-US" sz="1100" dirty="0">
+                <a:solidFill>
+                  <a:srgbClr val="222222"/>
+                </a:solidFill>
+                <a:latin typeface="Calibri" pitchFamily="34" charset="0"/>
+                <a:ea typeface="Calibri" pitchFamily="34" charset="-122"/>
+                <a:cs typeface="Calibri" pitchFamily="34" charset="-120"/>
+              </a:rPr>
+              <a:t>事務局から</a:t>
+            </a:r>
+            <a:pPr indent="0" marL="0">
+              <a:lnSpc>
+                <a:spcPct val="125000"/>
+              </a:lnSpc>
+              <a:buNone/>
+            </a:pPr>
+            <a:r>
+              <a:rPr lang="en-US" sz="1100" b="1" dirty="0">
+                <a:solidFill>
+                  <a:srgbClr val="222222"/>
+                </a:solidFill>
+                <a:latin typeface="Calibri" pitchFamily="34" charset="0"/>
+                <a:ea typeface="Calibri" pitchFamily="34" charset="-122"/>
+                <a:cs typeface="Calibri" pitchFamily="34" charset="-120"/>
+              </a:rPr>
+              <a:t>交換コードの呼び出し用のQRコード</a:t>
+            </a:r>
+            <a:pPr indent="0" marL="0">
+              <a:lnSpc>
+                <a:spcPct val="125000"/>
+              </a:lnSpc>
+              <a:buNone/>
+            </a:pPr>
+            <a:r>
+              <a:rPr lang="en-US" sz="1100" dirty="0">
+                <a:solidFill>
+                  <a:srgbClr val="222222"/>
+                </a:solidFill>
+                <a:latin typeface="Calibri" pitchFamily="34" charset="0"/>
+                <a:ea typeface="Calibri" pitchFamily="34" charset="-122"/>
+                <a:cs typeface="Calibri" pitchFamily="34" charset="-120"/>
+              </a:rPr>
+              <a:t>（A4の紙）が届きます。受付の見やすい場所に貼ってください。</a:t>
+            </a:r>
+            <a:endParaRPr lang="en-US" sz="1100" dirty="0"/>
+          </a:p>
+        </p:txBody>
+      </p:sp>
+      <p:sp>
+        <p:nvSpPr>
+          <p:cNvPr id="24" name="Text 21"/>
           <p:cNvSpPr txBox="1"/>
           <p:nvPr/>
         </p:nvSpPr>
@@ -2759,7 +4051,7 @@
                 <a:ea typeface="Calibri" pitchFamily="34" charset="-122"/>
                 <a:cs typeface="Calibri" pitchFamily="34" charset="-120"/>
               </a:rPr>
-              <a:t>交換の流れ（3ステップ）</a:t>
+              <a:t>当日までの準備（前日までに1回）（つづき）</a:t>
             </a:r>
             <a:endParaRPr lang="en-US" sz="2200" dirty="0"/>
           </a:p>
@@ -2767,23 +4059,79 @@
       </p:sp>
       <p:sp>
         <p:nvSpPr>
-          <p:cNvPr id="4" name="Shape 2"/>
-          <p:cNvSpPr/>
-          <p:nvPr/>
-        </p:nvSpPr>
-        <p:spPr>
-          <a:xfrm>
-            <a:off x="566928" y="1499616"/>
-            <a:ext cx="274320" cy="274320"/>
-          </a:xfrm>
-          <a:prstGeom prst="ellipse">
-            <a:avLst/>
-          </a:prstGeom>
-          <a:solidFill>
-            <a:srgbClr val="B85042"/>
-          </a:solidFill>
-          <a:ln/>
-        </p:spPr>
+          <p:cNvPr id="4" name="Text 2"/>
+          <p:cNvSpPr txBox="1"/>
+          <p:nvPr/>
+        </p:nvSpPr>
+        <p:spPr>
+          <a:xfrm>
+            <a:off x="566928" y="1481328"/>
+            <a:ext cx="6428232" cy="459994"/>
+          </a:xfrm>
+          <a:prstGeom prst="rect">
+            <a:avLst/>
+          </a:prstGeom>
+          <a:noFill/>
+          <a:ln/>
+        </p:spPr>
+        <p:txBody>
+          <a:bodyPr wrap="square" lIns="0" tIns="0" rIns="0" bIns="0" rtlCol="0" anchor="t"/>
+          <a:lstStyle/>
+          <a:p>
+            <a:pPr indent="0" marL="0">
+              <a:lnSpc>
+                <a:spcPct val="125000"/>
+              </a:lnSpc>
+              <a:buNone/>
+            </a:pPr>
+            <a:r>
+              <a:rPr lang="en-US" sz="1100" dirty="0">
+                <a:solidFill>
+                  <a:srgbClr val="222222"/>
+                </a:solidFill>
+                <a:latin typeface="Calibri" pitchFamily="34" charset="0"/>
+                <a:ea typeface="Calibri" pitchFamily="34" charset="-122"/>
+                <a:cs typeface="Calibri" pitchFamily="34" charset="-120"/>
+              </a:rPr>
+              <a:t>来場者が</a:t>
+            </a:r>
+            <a:pPr indent="0" marL="0">
+              <a:lnSpc>
+                <a:spcPct val="125000"/>
+              </a:lnSpc>
+              <a:buNone/>
+            </a:pPr>
+            <a:r>
+              <a:rPr lang="en-US" sz="1100" b="1" dirty="0">
+                <a:solidFill>
+                  <a:srgbClr val="222222"/>
+                </a:solidFill>
+                <a:latin typeface="Calibri" pitchFamily="34" charset="0"/>
+                <a:ea typeface="Calibri" pitchFamily="34" charset="-122"/>
+                <a:cs typeface="Calibri" pitchFamily="34" charset="-120"/>
+              </a:rPr>
+              <a:t>自分のスマートフォン</a:t>
+            </a:r>
+            <a:pPr indent="0" marL="0">
+              <a:lnSpc>
+                <a:spcPct val="125000"/>
+              </a:lnSpc>
+              <a:buNone/>
+            </a:pPr>
+            <a:r>
+              <a:rPr lang="en-US" sz="1100" dirty="0">
+                <a:solidFill>
+                  <a:srgbClr val="222222"/>
+                </a:solidFill>
+                <a:latin typeface="Calibri" pitchFamily="34" charset="0"/>
+                <a:ea typeface="Calibri" pitchFamily="34" charset="-122"/>
+                <a:cs typeface="Calibri" pitchFamily="34" charset="-120"/>
+              </a:rPr>
+              <a:t>でこのQRコードを読み取ると、その方の交換コードの画面が開きます。</a:t>
+            </a:r>
+            <a:endParaRPr lang="en-US" sz="1100" dirty="0"/>
+          </a:p>
+        </p:txBody>
       </p:sp>
       <p:sp>
         <p:nvSpPr>
@@ -2793,32 +4141,35 @@
         </p:nvSpPr>
         <p:spPr>
           <a:xfrm>
-            <a:off x="566928" y="1499616"/>
-            <a:ext cx="274320" cy="274320"/>
-          </a:xfrm>
-          <a:prstGeom prst="rect">
-            <a:avLst/>
-          </a:prstGeom>
-          <a:noFill/>
-          <a:ln/>
-        </p:spPr>
-        <p:txBody>
-          <a:bodyPr wrap="square" lIns="0" tIns="0" rIns="0" bIns="0" rtlCol="0" anchor="ctr"/>
-          <a:lstStyle/>
-          <a:p>
-            <a:pPr algn="ctr" indent="0" marL="0">
-              <a:buNone/>
-            </a:pPr>
-            <a:r>
-              <a:rPr lang="en-US" sz="1100" b="1" dirty="0">
-                <a:solidFill>
-                  <a:srgbClr val="FFFFFF"/>
-                </a:solidFill>
-                <a:latin typeface="Calibri" pitchFamily="34" charset="0"/>
-                <a:ea typeface="Calibri" pitchFamily="34" charset="-122"/>
-                <a:cs typeface="Calibri" pitchFamily="34" charset="-120"/>
-              </a:rPr>
-              <a:t>1</a:t>
+            <a:off x="566928" y="1977898"/>
+            <a:ext cx="6428232" cy="257429"/>
+          </a:xfrm>
+          <a:prstGeom prst="rect">
+            <a:avLst/>
+          </a:prstGeom>
+          <a:noFill/>
+          <a:ln/>
+        </p:spPr>
+        <p:txBody>
+          <a:bodyPr wrap="square" lIns="0" tIns="0" rIns="0" bIns="0" rtlCol="0" anchor="t"/>
+          <a:lstStyle/>
+          <a:p>
+            <a:pPr indent="0" marL="0">
+              <a:lnSpc>
+                <a:spcPct val="125000"/>
+              </a:lnSpc>
+              <a:buNone/>
+            </a:pPr>
+            <a:r>
+              <a:rPr lang="en-US" sz="1100" dirty="0">
+                <a:solidFill>
+                  <a:srgbClr val="222222"/>
+                </a:solidFill>
+                <a:latin typeface="Calibri" pitchFamily="34" charset="0"/>
+                <a:ea typeface="Calibri" pitchFamily="34" charset="-122"/>
+                <a:cs typeface="Calibri" pitchFamily="34" charset="-120"/>
+              </a:rPr>
+              <a:t>ブラウザを閉じてしまった方への案内に使います。</a:t>
             </a:r>
             <a:endParaRPr lang="en-US" sz="1100" dirty="0"/>
           </a:p>
@@ -2827,506 +4178,6 @@
       <p:sp>
         <p:nvSpPr>
           <p:cNvPr id="6" name="Text 4"/>
-          <p:cNvSpPr txBox="1"/>
-          <p:nvPr/>
-        </p:nvSpPr>
-        <p:spPr>
-          <a:xfrm>
-            <a:off x="969264" y="1481328"/>
-            <a:ext cx="6025896" cy="365760"/>
-          </a:xfrm>
-          <a:prstGeom prst="rect">
-            <a:avLst/>
-          </a:prstGeom>
-          <a:noFill/>
-          <a:ln/>
-        </p:spPr>
-        <p:txBody>
-          <a:bodyPr wrap="square" lIns="0" tIns="0" rIns="0" bIns="0" rtlCol="0" anchor="t"/>
-          <a:lstStyle/>
-          <a:p>
-            <a:pPr indent="0" marL="0">
-              <a:lnSpc>
-                <a:spcPct val="125000"/>
-              </a:lnSpc>
-              <a:buNone/>
-            </a:pPr>
-            <a:r>
-              <a:rPr lang="en-US" sz="1150" dirty="0">
-                <a:solidFill>
-                  <a:srgbClr val="222222"/>
-                </a:solidFill>
-                <a:latin typeface="Calibri" pitchFamily="34" charset="0"/>
-                <a:ea typeface="Calibri" pitchFamily="34" charset="-122"/>
-                <a:cs typeface="Calibri" pitchFamily="34" charset="-120"/>
-              </a:rPr>
-              <a:t>来場者のスマートフォンに表示された</a:t>
-            </a:r>
-            <a:pPr indent="0" marL="0">
-              <a:lnSpc>
-                <a:spcPct val="125000"/>
-              </a:lnSpc>
-              <a:buNone/>
-            </a:pPr>
-            <a:r>
-              <a:rPr lang="en-US" sz="1150" b="1" dirty="0">
-                <a:solidFill>
-                  <a:srgbClr val="222222"/>
-                </a:solidFill>
-                <a:latin typeface="Calibri" pitchFamily="34" charset="0"/>
-                <a:ea typeface="Calibri" pitchFamily="34" charset="-122"/>
-                <a:cs typeface="Calibri" pitchFamily="34" charset="-120"/>
-              </a:rPr>
-              <a:t>QRコード</a:t>
-            </a:r>
-            <a:pPr indent="0" marL="0">
-              <a:lnSpc>
-                <a:spcPct val="125000"/>
-              </a:lnSpc>
-              <a:buNone/>
-            </a:pPr>
-            <a:r>
-              <a:rPr lang="en-US" sz="1150" dirty="0">
-                <a:solidFill>
-                  <a:srgbClr val="222222"/>
-                </a:solidFill>
-                <a:latin typeface="Calibri" pitchFamily="34" charset="0"/>
-                <a:ea typeface="Calibri" pitchFamily="34" charset="-122"/>
-                <a:cs typeface="Calibri" pitchFamily="34" charset="-120"/>
-              </a:rPr>
-              <a:t>を読み取る</a:t>
-            </a:r>
-            <a:endParaRPr lang="en-US" sz="1150" dirty="0"/>
-          </a:p>
-        </p:txBody>
-      </p:sp>
-      <p:sp>
-        <p:nvSpPr>
-          <p:cNvPr id="7" name="Shape 5"/>
-          <p:cNvSpPr/>
-          <p:nvPr/>
-        </p:nvSpPr>
-        <p:spPr>
-          <a:xfrm>
-            <a:off x="566928" y="1956816"/>
-            <a:ext cx="274320" cy="274320"/>
-          </a:xfrm>
-          <a:prstGeom prst="ellipse">
-            <a:avLst/>
-          </a:prstGeom>
-          <a:solidFill>
-            <a:srgbClr val="B85042"/>
-          </a:solidFill>
-          <a:ln/>
-        </p:spPr>
-      </p:sp>
-      <p:sp>
-        <p:nvSpPr>
-          <p:cNvPr id="8" name="Text 6"/>
-          <p:cNvSpPr txBox="1"/>
-          <p:nvPr/>
-        </p:nvSpPr>
-        <p:spPr>
-          <a:xfrm>
-            <a:off x="566928" y="1956816"/>
-            <a:ext cx="274320" cy="274320"/>
-          </a:xfrm>
-          <a:prstGeom prst="rect">
-            <a:avLst/>
-          </a:prstGeom>
-          <a:noFill/>
-          <a:ln/>
-        </p:spPr>
-        <p:txBody>
-          <a:bodyPr wrap="square" lIns="0" tIns="0" rIns="0" bIns="0" rtlCol="0" anchor="ctr"/>
-          <a:lstStyle/>
-          <a:p>
-            <a:pPr algn="ctr" indent="0" marL="0">
-              <a:buNone/>
-            </a:pPr>
-            <a:r>
-              <a:rPr lang="en-US" sz="1100" b="1" dirty="0">
-                <a:solidFill>
-                  <a:srgbClr val="FFFFFF"/>
-                </a:solidFill>
-                <a:latin typeface="Calibri" pitchFamily="34" charset="0"/>
-                <a:ea typeface="Calibri" pitchFamily="34" charset="-122"/>
-                <a:cs typeface="Calibri" pitchFamily="34" charset="-120"/>
-              </a:rPr>
-              <a:t>2</a:t>
-            </a:r>
-            <a:endParaRPr lang="en-US" sz="1100" dirty="0"/>
-          </a:p>
-        </p:txBody>
-      </p:sp>
-      <p:sp>
-        <p:nvSpPr>
-          <p:cNvPr id="9" name="Text 7"/>
-          <p:cNvSpPr txBox="1"/>
-          <p:nvPr/>
-        </p:nvSpPr>
-        <p:spPr>
-          <a:xfrm>
-            <a:off x="969264" y="1938528"/>
-            <a:ext cx="6025896" cy="365760"/>
-          </a:xfrm>
-          <a:prstGeom prst="rect">
-            <a:avLst/>
-          </a:prstGeom>
-          <a:noFill/>
-          <a:ln/>
-        </p:spPr>
-        <p:txBody>
-          <a:bodyPr wrap="square" lIns="0" tIns="0" rIns="0" bIns="0" rtlCol="0" anchor="t"/>
-          <a:lstStyle/>
-          <a:p>
-            <a:pPr indent="0" marL="0">
-              <a:lnSpc>
-                <a:spcPct val="125000"/>
-              </a:lnSpc>
-              <a:buNone/>
-            </a:pPr>
-            <a:r>
-              <a:rPr lang="en-US" sz="1150" dirty="0">
-                <a:solidFill>
-                  <a:srgbClr val="222222"/>
-                </a:solidFill>
-                <a:latin typeface="Calibri" pitchFamily="34" charset="0"/>
-                <a:ea typeface="Calibri" pitchFamily="34" charset="-122"/>
-                <a:cs typeface="Calibri" pitchFamily="34" charset="-120"/>
-              </a:rPr>
-              <a:t>画面で</a:t>
-            </a:r>
-            <a:pPr indent="0" marL="0">
-              <a:lnSpc>
-                <a:spcPct val="125000"/>
-              </a:lnSpc>
-              <a:buNone/>
-            </a:pPr>
-            <a:r>
-              <a:rPr lang="en-US" sz="1150" b="1" dirty="0">
-                <a:solidFill>
-                  <a:srgbClr val="222222"/>
-                </a:solidFill>
-                <a:latin typeface="Calibri" pitchFamily="34" charset="0"/>
-                <a:ea typeface="Calibri" pitchFamily="34" charset="-122"/>
-                <a:cs typeface="Calibri" pitchFamily="34" charset="-120"/>
-              </a:rPr>
-              <a:t>未交換か交換済みか</a:t>
-            </a:r>
-            <a:pPr indent="0" marL="0">
-              <a:lnSpc>
-                <a:spcPct val="125000"/>
-              </a:lnSpc>
-              <a:buNone/>
-            </a:pPr>
-            <a:r>
-              <a:rPr lang="en-US" sz="1150" dirty="0">
-                <a:solidFill>
-                  <a:srgbClr val="222222"/>
-                </a:solidFill>
-                <a:latin typeface="Calibri" pitchFamily="34" charset="0"/>
-                <a:ea typeface="Calibri" pitchFamily="34" charset="-122"/>
-                <a:cs typeface="Calibri" pitchFamily="34" charset="-120"/>
-              </a:rPr>
-              <a:t>を確かめ、</a:t>
-            </a:r>
-            <a:pPr indent="0" marL="0">
-              <a:lnSpc>
-                <a:spcPct val="125000"/>
-              </a:lnSpc>
-              <a:buNone/>
-            </a:pPr>
-            <a:r>
-              <a:rPr lang="en-US" sz="1150" b="1" dirty="0">
-                <a:solidFill>
-                  <a:srgbClr val="222222"/>
-                </a:solidFill>
-                <a:latin typeface="Calibri" pitchFamily="34" charset="0"/>
-                <a:ea typeface="Calibri" pitchFamily="34" charset="-122"/>
-                <a:cs typeface="Calibri" pitchFamily="34" charset="-120"/>
-              </a:rPr>
-              <a:t>渡す景品を選ぶ</a:t>
-            </a:r>
-            <a:endParaRPr lang="en-US" sz="1150" dirty="0"/>
-          </a:p>
-        </p:txBody>
-      </p:sp>
-      <p:sp>
-        <p:nvSpPr>
-          <p:cNvPr id="10" name="Shape 8"/>
-          <p:cNvSpPr/>
-          <p:nvPr/>
-        </p:nvSpPr>
-        <p:spPr>
-          <a:xfrm>
-            <a:off x="566928" y="2414016"/>
-            <a:ext cx="274320" cy="274320"/>
-          </a:xfrm>
-          <a:prstGeom prst="ellipse">
-            <a:avLst/>
-          </a:prstGeom>
-          <a:solidFill>
-            <a:srgbClr val="B85042"/>
-          </a:solidFill>
-          <a:ln/>
-        </p:spPr>
-      </p:sp>
-      <p:sp>
-        <p:nvSpPr>
-          <p:cNvPr id="11" name="Text 9"/>
-          <p:cNvSpPr txBox="1"/>
-          <p:nvPr/>
-        </p:nvSpPr>
-        <p:spPr>
-          <a:xfrm>
-            <a:off x="566928" y="2414016"/>
-            <a:ext cx="274320" cy="274320"/>
-          </a:xfrm>
-          <a:prstGeom prst="rect">
-            <a:avLst/>
-          </a:prstGeom>
-          <a:noFill/>
-          <a:ln/>
-        </p:spPr>
-        <p:txBody>
-          <a:bodyPr wrap="square" lIns="0" tIns="0" rIns="0" bIns="0" rtlCol="0" anchor="ctr"/>
-          <a:lstStyle/>
-          <a:p>
-            <a:pPr algn="ctr" indent="0" marL="0">
-              <a:buNone/>
-            </a:pPr>
-            <a:r>
-              <a:rPr lang="en-US" sz="1100" b="1" dirty="0">
-                <a:solidFill>
-                  <a:srgbClr val="FFFFFF"/>
-                </a:solidFill>
-                <a:latin typeface="Calibri" pitchFamily="34" charset="0"/>
-                <a:ea typeface="Calibri" pitchFamily="34" charset="-122"/>
-                <a:cs typeface="Calibri" pitchFamily="34" charset="-120"/>
-              </a:rPr>
-              <a:t>3</a:t>
-            </a:r>
-            <a:endParaRPr lang="en-US" sz="1100" dirty="0"/>
-          </a:p>
-        </p:txBody>
-      </p:sp>
-      <p:sp>
-        <p:nvSpPr>
-          <p:cNvPr id="12" name="Text 10"/>
-          <p:cNvSpPr txBox="1"/>
-          <p:nvPr/>
-        </p:nvSpPr>
-        <p:spPr>
-          <a:xfrm>
-            <a:off x="969264" y="2395728"/>
-            <a:ext cx="6025896" cy="365760"/>
-          </a:xfrm>
-          <a:prstGeom prst="rect">
-            <a:avLst/>
-          </a:prstGeom>
-          <a:noFill/>
-          <a:ln/>
-        </p:spPr>
-        <p:txBody>
-          <a:bodyPr wrap="square" lIns="0" tIns="0" rIns="0" bIns="0" rtlCol="0" anchor="t"/>
-          <a:lstStyle/>
-          <a:p>
-            <a:pPr indent="0" marL="0">
-              <a:lnSpc>
-                <a:spcPct val="125000"/>
-              </a:lnSpc>
-              <a:buNone/>
-            </a:pPr>
-            <a:r>
-              <a:rPr lang="en-US" sz="1150" dirty="0">
-                <a:solidFill>
-                  <a:srgbClr val="222222"/>
-                </a:solidFill>
-                <a:latin typeface="Calibri" pitchFamily="34" charset="0"/>
-                <a:ea typeface="Calibri" pitchFamily="34" charset="-122"/>
-                <a:cs typeface="Calibri" pitchFamily="34" charset="-120"/>
-              </a:rPr>
-              <a:t>「交換済みにする」を押して記録する</a:t>
-            </a:r>
-            <a:endParaRPr lang="en-US" sz="1150" dirty="0"/>
-          </a:p>
-        </p:txBody>
-      </p:sp>
-      <p:sp>
-        <p:nvSpPr>
-          <p:cNvPr id="13" name="Shape 11"/>
-          <p:cNvSpPr/>
-          <p:nvPr/>
-        </p:nvSpPr>
-        <p:spPr>
-          <a:xfrm>
-            <a:off x="566928" y="2852928"/>
-            <a:ext cx="6428232" cy="624459"/>
-          </a:xfrm>
-          <a:prstGeom prst="roundRect">
-            <a:avLst>
-              <a:gd name="adj" fmla="val 8786"/>
-            </a:avLst>
-          </a:prstGeom>
-          <a:solidFill>
-            <a:srgbClr val="FAEAE7"/>
-          </a:solidFill>
-          <a:ln w="9525">
-            <a:solidFill>
-              <a:srgbClr val="B85042"/>
-            </a:solidFill>
-            <a:prstDash val="solid"/>
-          </a:ln>
-        </p:spPr>
-      </p:sp>
-      <p:sp>
-        <p:nvSpPr>
-          <p:cNvPr id="14" name="Text 12"/>
-          <p:cNvSpPr txBox="1"/>
-          <p:nvPr/>
-        </p:nvSpPr>
-        <p:spPr>
-          <a:xfrm>
-            <a:off x="658368" y="2944368"/>
-            <a:ext cx="237744" cy="237744"/>
-          </a:xfrm>
-          <a:prstGeom prst="rect">
-            <a:avLst/>
-          </a:prstGeom>
-          <a:noFill/>
-          <a:ln/>
-        </p:spPr>
-        <p:txBody>
-          <a:bodyPr wrap="square" lIns="0" tIns="0" rIns="0" bIns="0" rtlCol="0" anchor="ctr"/>
-          <a:lstStyle/>
-          <a:p>
-            <a:pPr algn="ctr" indent="0" marL="0">
-              <a:buNone/>
-            </a:pPr>
-            <a:r>
-              <a:rPr lang="en-US" sz="1200" b="1" dirty="0">
-                <a:solidFill>
-                  <a:srgbClr val="B85042"/>
-                </a:solidFill>
-                <a:latin typeface="Calibri" pitchFamily="34" charset="0"/>
-                <a:ea typeface="Calibri" pitchFamily="34" charset="-122"/>
-                <a:cs typeface="Calibri" pitchFamily="34" charset="-120"/>
-              </a:rPr>
-              <a:t>i</a:t>
-            </a:r>
-            <a:endParaRPr lang="en-US" sz="1200" dirty="0"/>
-          </a:p>
-        </p:txBody>
-      </p:sp>
-      <p:sp>
-        <p:nvSpPr>
-          <p:cNvPr id="15" name="Text 13"/>
-          <p:cNvSpPr txBox="1"/>
-          <p:nvPr/>
-        </p:nvSpPr>
-        <p:spPr>
-          <a:xfrm>
-            <a:off x="950976" y="2962656"/>
-            <a:ext cx="5925312" cy="441579"/>
-          </a:xfrm>
-          <a:prstGeom prst="rect">
-            <a:avLst/>
-          </a:prstGeom>
-          <a:noFill/>
-          <a:ln/>
-        </p:spPr>
-        <p:txBody>
-          <a:bodyPr wrap="square" lIns="0" tIns="0" rIns="0" bIns="0" rtlCol="0" anchor="t"/>
-          <a:lstStyle/>
-          <a:p>
-            <a:pPr indent="0" marL="0">
-              <a:lnSpc>
-                <a:spcPct val="120000"/>
-              </a:lnSpc>
-              <a:buNone/>
-            </a:pPr>
-            <a:r>
-              <a:rPr lang="en-US" sz="1050" dirty="0">
-                <a:solidFill>
-                  <a:srgbClr val="222222"/>
-                </a:solidFill>
-                <a:latin typeface="Calibri" pitchFamily="34" charset="0"/>
-                <a:ea typeface="Calibri" pitchFamily="34" charset="-122"/>
-                <a:cs typeface="Calibri" pitchFamily="34" charset="-120"/>
-              </a:rPr>
-              <a:t>来場者の画面には「交換コード」（例：ABCD-2345）とQRコードが表示されています。スクリーンショットを見せられた場合も同じように読み取れます。</a:t>
-            </a:r>
-            <a:endParaRPr lang="en-US" sz="1050" dirty="0"/>
-          </a:p>
-        </p:txBody>
-      </p:sp>
-      <p:pic>
-        <p:nvPicPr>
-          <p:cNvPr id="16" name="Image 0" descr="C:\Users\sato\Desktop\enque\docs\images\p-visitor-done.png">    </p:cNvPr>
-          <p:cNvPicPr>
-            <a:picLocks noChangeAspect="1"/>
-          </p:cNvPicPr>
-          <p:nvPr/>
-        </p:nvPicPr>
-        <p:blipFill>
-          <a:blip r:embed="rId1"/>
-          <a:stretch>
-            <a:fillRect/>
-          </a:stretch>
-        </p:blipFill>
-        <p:spPr>
-          <a:xfrm>
-            <a:off x="3123981" y="3550539"/>
-            <a:ext cx="1314127" cy="3474720"/>
-          </a:xfrm>
-          <a:prstGeom prst="rect">
-            <a:avLst/>
-          </a:prstGeom>
-        </p:spPr>
-      </p:pic>
-      <p:sp>
-        <p:nvSpPr>
-          <p:cNvPr id="17" name="Text 14"/>
-          <p:cNvSpPr txBox="1"/>
-          <p:nvPr/>
-        </p:nvSpPr>
-        <p:spPr>
-          <a:xfrm>
-            <a:off x="566928" y="7080123"/>
-            <a:ext cx="6428232" cy="274320"/>
-          </a:xfrm>
-          <a:prstGeom prst="rect">
-            <a:avLst/>
-          </a:prstGeom>
-          <a:noFill/>
-          <a:ln/>
-        </p:spPr>
-        <p:txBody>
-          <a:bodyPr wrap="square" lIns="0" tIns="0" rIns="0" bIns="0" rtlCol="0" anchor="ctr"/>
-          <a:lstStyle/>
-          <a:p>
-            <a:pPr algn="ctr" indent="0" marL="0">
-              <a:buNone/>
-            </a:pPr>
-            <a:r>
-              <a:rPr lang="en-US" sz="950" dirty="0">
-                <a:solidFill>
-                  <a:srgbClr val="6B6B6B"/>
-                </a:solidFill>
-                <a:latin typeface="Calibri" pitchFamily="34" charset="0"/>
-                <a:ea typeface="Calibri" pitchFamily="34" charset="-122"/>
-                <a:cs typeface="Calibri" pitchFamily="34" charset="-120"/>
-              </a:rPr>
-              <a:t>来場者の「回答済み画面」。大きな交換コードとQRコードが写っているもの。</a:t>
-            </a:r>
-            <a:endParaRPr lang="en-US" sz="950" dirty="0"/>
-          </a:p>
-        </p:txBody>
-      </p:sp>
-      <p:sp>
-        <p:nvSpPr>
-          <p:cNvPr id="18" name="Text 15"/>
           <p:cNvSpPr txBox="1"/>
           <p:nvPr/>
         </p:nvSpPr>
@@ -3467,7 +4318,7 @@
                 <a:ea typeface="Calibri" pitchFamily="34" charset="-122"/>
                 <a:cs typeface="Calibri" pitchFamily="34" charset="-120"/>
               </a:rPr>
-              <a:t>手順1：QRコードを読み取る</a:t>
+              <a:t>交換の流れ（3ステップ）</a:t>
             </a:r>
             <a:endParaRPr lang="en-US" sz="2200" dirty="0"/>
           </a:p>
@@ -3475,94 +4326,13 @@
       </p:sp>
       <p:sp>
         <p:nvSpPr>
-          <p:cNvPr id="4" name="Text 2"/>
-          <p:cNvSpPr txBox="1"/>
-          <p:nvPr/>
-        </p:nvSpPr>
-        <p:spPr>
-          <a:xfrm>
-            <a:off x="566928" y="1481328"/>
-            <a:ext cx="6428232" cy="257429"/>
-          </a:xfrm>
-          <a:prstGeom prst="rect">
-            <a:avLst/>
-          </a:prstGeom>
-          <a:noFill/>
-          <a:ln/>
-        </p:spPr>
-        <p:txBody>
-          <a:bodyPr wrap="square" lIns="0" tIns="0" rIns="0" bIns="0" rtlCol="0" anchor="t"/>
-          <a:lstStyle/>
-          <a:p>
-            <a:pPr indent="0" marL="0">
-              <a:lnSpc>
-                <a:spcPct val="125000"/>
-              </a:lnSpc>
-              <a:buNone/>
-            </a:pPr>
-            <a:r>
-              <a:rPr lang="en-US" sz="1100" dirty="0">
-                <a:solidFill>
-                  <a:srgbClr val="222222"/>
-                </a:solidFill>
-                <a:latin typeface="Calibri" pitchFamily="34" charset="0"/>
-                <a:ea typeface="Calibri" pitchFamily="34" charset="-122"/>
-                <a:cs typeface="Calibri" pitchFamily="34" charset="-120"/>
-              </a:rPr>
-              <a:t>読み取り方は2通りあります。どちらでも同じ画面が開きます。</a:t>
-            </a:r>
-            <a:endParaRPr lang="en-US" sz="1100" dirty="0"/>
-          </a:p>
-        </p:txBody>
-      </p:sp>
-      <p:sp>
-        <p:nvSpPr>
-          <p:cNvPr id="5" name="Text 3"/>
-          <p:cNvSpPr txBox="1"/>
-          <p:nvPr/>
-        </p:nvSpPr>
-        <p:spPr>
-          <a:xfrm>
-            <a:off x="566928" y="1885061"/>
-            <a:ext cx="6428232" cy="257810"/>
-          </a:xfrm>
-          <a:prstGeom prst="rect">
-            <a:avLst/>
-          </a:prstGeom>
-          <a:noFill/>
-          <a:ln/>
-        </p:spPr>
-        <p:txBody>
-          <a:bodyPr wrap="square" lIns="0" tIns="0" rIns="0" bIns="0" rtlCol="0" anchor="t"/>
-          <a:lstStyle/>
-          <a:p>
-            <a:pPr indent="0" marL="0">
-              <a:buNone/>
-            </a:pPr>
-            <a:r>
-              <a:rPr lang="en-US" sz="1400" b="1" dirty="0">
-                <a:solidFill>
-                  <a:srgbClr val="B85042"/>
-                </a:solidFill>
-                <a:latin typeface="Calibri" pitchFamily="34" charset="0"/>
-                <a:ea typeface="Calibri" pitchFamily="34" charset="-122"/>
-                <a:cs typeface="Calibri" pitchFamily="34" charset="-120"/>
-              </a:rPr>
-              <a:t>方法A：照会画面のボタンから読み取る（おすすめ）</a:t>
-            </a:r>
-            <a:endParaRPr lang="en-US" sz="1400" dirty="0"/>
-          </a:p>
-        </p:txBody>
-      </p:sp>
-      <p:sp>
-        <p:nvSpPr>
-          <p:cNvPr id="6" name="Shape 4"/>
+          <p:cNvPr id="4" name="Shape 2"/>
           <p:cNvSpPr/>
           <p:nvPr/>
         </p:nvSpPr>
         <p:spPr>
           <a:xfrm>
-            <a:off x="566928" y="2234311"/>
+            <a:off x="566928" y="1499616"/>
             <a:ext cx="274320" cy="274320"/>
           </a:xfrm>
           <a:prstGeom prst="ellipse">
@@ -3576,13 +4346,13 @@
       </p:sp>
       <p:sp>
         <p:nvSpPr>
-          <p:cNvPr id="7" name="Text 5"/>
-          <p:cNvSpPr txBox="1"/>
-          <p:nvPr/>
-        </p:nvSpPr>
-        <p:spPr>
-          <a:xfrm>
-            <a:off x="566928" y="2234311"/>
+          <p:cNvPr id="5" name="Text 3"/>
+          <p:cNvSpPr txBox="1"/>
+          <p:nvPr/>
+        </p:nvSpPr>
+        <p:spPr>
+          <a:xfrm>
+            <a:off x="566928" y="1499616"/>
             <a:ext cx="274320" cy="274320"/>
           </a:xfrm>
           <a:prstGeom prst="rect">
@@ -3615,13 +4385,13 @@
       </p:sp>
       <p:sp>
         <p:nvSpPr>
-          <p:cNvPr id="8" name="Text 6"/>
-          <p:cNvSpPr txBox="1"/>
-          <p:nvPr/>
-        </p:nvSpPr>
-        <p:spPr>
-          <a:xfrm>
-            <a:off x="969264" y="2216023"/>
+          <p:cNvPr id="6" name="Text 4"/>
+          <p:cNvSpPr txBox="1"/>
+          <p:nvPr/>
+        </p:nvSpPr>
+        <p:spPr>
+          <a:xfrm>
+            <a:off x="969264" y="1481328"/>
             <a:ext cx="6025896" cy="365760"/>
           </a:xfrm>
           <a:prstGeom prst="rect">
@@ -3649,7 +4419,7 @@
                 <a:ea typeface="Calibri" pitchFamily="34" charset="-122"/>
                 <a:cs typeface="Calibri" pitchFamily="34" charset="-120"/>
               </a:rPr>
-              <a:t>「景品交換の照会」の画面で、</a:t>
+              <a:t>来場者のスマートフォンに表示された</a:t>
             </a:r>
             <a:pPr indent="0" marL="0">
               <a:lnSpc>
@@ -3666,7 +4436,7 @@
                 <a:ea typeface="Calibri" pitchFamily="34" charset="-122"/>
                 <a:cs typeface="Calibri" pitchFamily="34" charset="-120"/>
               </a:rPr>
-              <a:t>「QRコードを読み取る」</a:t>
+              <a:t>QRコード</a:t>
             </a:r>
             <a:pPr indent="0" marL="0">
               <a:lnSpc>
@@ -3683,7 +4453,7 @@
                 <a:ea typeface="Calibri" pitchFamily="34" charset="-122"/>
                 <a:cs typeface="Calibri" pitchFamily="34" charset="-120"/>
               </a:rPr>
-              <a:t>を押す</a:t>
+              <a:t>を読み取る</a:t>
             </a:r>
             <a:endParaRPr lang="en-US" sz="1150" dirty="0"/>
           </a:p>
@@ -3691,13 +4461,13 @@
       </p:sp>
       <p:sp>
         <p:nvSpPr>
-          <p:cNvPr id="9" name="Shape 7"/>
+          <p:cNvPr id="7" name="Shape 5"/>
           <p:cNvSpPr/>
           <p:nvPr/>
         </p:nvSpPr>
         <p:spPr>
           <a:xfrm>
-            <a:off x="566928" y="2691511"/>
+            <a:off x="566928" y="1956816"/>
             <a:ext cx="274320" cy="274320"/>
           </a:xfrm>
           <a:prstGeom prst="ellipse">
@@ -3711,13 +4481,13 @@
       </p:sp>
       <p:sp>
         <p:nvSpPr>
-          <p:cNvPr id="10" name="Text 8"/>
-          <p:cNvSpPr txBox="1"/>
-          <p:nvPr/>
-        </p:nvSpPr>
-        <p:spPr>
-          <a:xfrm>
-            <a:off x="566928" y="2691511"/>
+          <p:cNvPr id="8" name="Text 6"/>
+          <p:cNvSpPr txBox="1"/>
+          <p:nvPr/>
+        </p:nvSpPr>
+        <p:spPr>
+          <a:xfrm>
+            <a:off x="566928" y="1956816"/>
             <a:ext cx="274320" cy="274320"/>
           </a:xfrm>
           <a:prstGeom prst="rect">
@@ -3750,13 +4520,13 @@
       </p:sp>
       <p:sp>
         <p:nvSpPr>
-          <p:cNvPr id="11" name="Text 9"/>
-          <p:cNvSpPr txBox="1"/>
-          <p:nvPr/>
-        </p:nvSpPr>
-        <p:spPr>
-          <a:xfrm>
-            <a:off x="969264" y="2673223"/>
+          <p:cNvPr id="9" name="Text 7"/>
+          <p:cNvSpPr txBox="1"/>
+          <p:nvPr/>
+        </p:nvSpPr>
+        <p:spPr>
+          <a:xfrm>
+            <a:off x="969264" y="1938528"/>
             <a:ext cx="6025896" cy="365760"/>
           </a:xfrm>
           <a:prstGeom prst="rect">
@@ -3784,7 +4554,7 @@
                 <a:ea typeface="Calibri" pitchFamily="34" charset="-122"/>
                 <a:cs typeface="Calibri" pitchFamily="34" charset="-120"/>
               </a:rPr>
-              <a:t>カメラの使用を聞かれたら</a:t>
+              <a:t>画面で</a:t>
             </a:r>
             <a:pPr indent="0" marL="0">
               <a:lnSpc>
@@ -3801,7 +4571,7 @@
                 <a:ea typeface="Calibri" pitchFamily="34" charset="-122"/>
                 <a:cs typeface="Calibri" pitchFamily="34" charset="-120"/>
               </a:rPr>
-              <a:t>「許可」</a:t>
+              <a:t>未交換か交換済みか</a:t>
             </a:r>
             <a:pPr indent="0" marL="0">
               <a:lnSpc>
@@ -3818,7 +4588,24 @@
                 <a:ea typeface="Calibri" pitchFamily="34" charset="-122"/>
                 <a:cs typeface="Calibri" pitchFamily="34" charset="-120"/>
               </a:rPr>
-              <a:t>を選ぶ（最初の1回だけ）</a:t>
+              <a:t>を確かめ、</a:t>
+            </a:r>
+            <a:pPr indent="0" marL="0">
+              <a:lnSpc>
+                <a:spcPct val="125000"/>
+              </a:lnSpc>
+              <a:buNone/>
+            </a:pPr>
+            <a:r>
+              <a:rPr lang="en-US" sz="1150" b="1" dirty="0">
+                <a:solidFill>
+                  <a:srgbClr val="222222"/>
+                </a:solidFill>
+                <a:latin typeface="Calibri" pitchFamily="34" charset="0"/>
+                <a:ea typeface="Calibri" pitchFamily="34" charset="-122"/>
+                <a:cs typeface="Calibri" pitchFamily="34" charset="-120"/>
+              </a:rPr>
+              <a:t>渡す景品を選ぶ</a:t>
             </a:r>
             <a:endParaRPr lang="en-US" sz="1150" dirty="0"/>
           </a:p>
@@ -3826,13 +4613,13 @@
       </p:sp>
       <p:sp>
         <p:nvSpPr>
-          <p:cNvPr id="12" name="Shape 10"/>
+          <p:cNvPr id="10" name="Shape 8"/>
           <p:cNvSpPr/>
           <p:nvPr/>
         </p:nvSpPr>
         <p:spPr>
           <a:xfrm>
-            <a:off x="566928" y="3148711"/>
+            <a:off x="566928" y="2414016"/>
             <a:ext cx="274320" cy="274320"/>
           </a:xfrm>
           <a:prstGeom prst="ellipse">
@@ -3846,13 +4633,13 @@
       </p:sp>
       <p:sp>
         <p:nvSpPr>
-          <p:cNvPr id="13" name="Text 11"/>
-          <p:cNvSpPr txBox="1"/>
-          <p:nvPr/>
-        </p:nvSpPr>
-        <p:spPr>
-          <a:xfrm>
-            <a:off x="566928" y="3148711"/>
+          <p:cNvPr id="11" name="Text 9"/>
+          <p:cNvSpPr txBox="1"/>
+          <p:nvPr/>
+        </p:nvSpPr>
+        <p:spPr>
+          <a:xfrm>
+            <a:off x="566928" y="2414016"/>
             <a:ext cx="274320" cy="274320"/>
           </a:xfrm>
           <a:prstGeom prst="rect">
@@ -3885,13 +4672,13 @@
       </p:sp>
       <p:sp>
         <p:nvSpPr>
-          <p:cNvPr id="14" name="Text 12"/>
-          <p:cNvSpPr txBox="1"/>
-          <p:nvPr/>
-        </p:nvSpPr>
-        <p:spPr>
-          <a:xfrm>
-            <a:off x="969264" y="3130423"/>
+          <p:cNvPr id="12" name="Text 10"/>
+          <p:cNvSpPr txBox="1"/>
+          <p:nvPr/>
+        </p:nvSpPr>
+        <p:spPr>
+          <a:xfrm>
+            <a:off x="969264" y="2395728"/>
             <a:ext cx="6025896" cy="365760"/>
           </a:xfrm>
           <a:prstGeom prst="rect">
@@ -3919,7 +4706,7 @@
                 <a:ea typeface="Calibri" pitchFamily="34" charset="-122"/>
                 <a:cs typeface="Calibri" pitchFamily="34" charset="-120"/>
               </a:rPr>
-              <a:t>画面の枠に、来場者のQRコードを入れる</a:t>
+              <a:t>「交換済みにする」を押して記録する</a:t>
             </a:r>
             <a:endParaRPr lang="en-US" sz="1150" dirty="0"/>
           </a:p>
@@ -3927,119 +4714,18 @@
       </p:sp>
       <p:sp>
         <p:nvSpPr>
-          <p:cNvPr id="15" name="Shape 13"/>
+          <p:cNvPr id="13" name="Shape 11"/>
           <p:cNvSpPr/>
           <p:nvPr/>
         </p:nvSpPr>
         <p:spPr>
           <a:xfrm>
-            <a:off x="566928" y="3605911"/>
-            <a:ext cx="274320" cy="274320"/>
-          </a:xfrm>
-          <a:prstGeom prst="ellipse">
-            <a:avLst/>
-          </a:prstGeom>
-          <a:solidFill>
-            <a:srgbClr val="B85042"/>
-          </a:solidFill>
-          <a:ln/>
-        </p:spPr>
-      </p:sp>
-      <p:sp>
-        <p:nvSpPr>
-          <p:cNvPr id="16" name="Text 14"/>
-          <p:cNvSpPr txBox="1"/>
-          <p:nvPr/>
-        </p:nvSpPr>
-        <p:spPr>
-          <a:xfrm>
-            <a:off x="566928" y="3605911"/>
-            <a:ext cx="274320" cy="274320"/>
-          </a:xfrm>
-          <a:prstGeom prst="rect">
-            <a:avLst/>
-          </a:prstGeom>
-          <a:noFill/>
-          <a:ln/>
-        </p:spPr>
-        <p:txBody>
-          <a:bodyPr wrap="square" lIns="0" tIns="0" rIns="0" bIns="0" rtlCol="0" anchor="ctr"/>
-          <a:lstStyle/>
-          <a:p>
-            <a:pPr algn="ctr" indent="0" marL="0">
-              <a:buNone/>
-            </a:pPr>
-            <a:r>
-              <a:rPr lang="en-US" sz="1100" b="1" dirty="0">
-                <a:solidFill>
-                  <a:srgbClr val="FFFFFF"/>
-                </a:solidFill>
-                <a:latin typeface="Calibri" pitchFamily="34" charset="0"/>
-                <a:ea typeface="Calibri" pitchFamily="34" charset="-122"/>
-                <a:cs typeface="Calibri" pitchFamily="34" charset="-120"/>
-              </a:rPr>
-              <a:t>4</a:t>
-            </a:r>
-            <a:endParaRPr lang="en-US" sz="1100" dirty="0"/>
-          </a:p>
-        </p:txBody>
-      </p:sp>
-      <p:sp>
-        <p:nvSpPr>
-          <p:cNvPr id="17" name="Text 15"/>
-          <p:cNvSpPr txBox="1"/>
-          <p:nvPr/>
-        </p:nvSpPr>
-        <p:spPr>
-          <a:xfrm>
-            <a:off x="969264" y="3587623"/>
-            <a:ext cx="6025896" cy="365760"/>
-          </a:xfrm>
-          <a:prstGeom prst="rect">
-            <a:avLst/>
-          </a:prstGeom>
-          <a:noFill/>
-          <a:ln/>
-        </p:spPr>
-        <p:txBody>
-          <a:bodyPr wrap="square" lIns="0" tIns="0" rIns="0" bIns="0" rtlCol="0" anchor="t"/>
-          <a:lstStyle/>
-          <a:p>
-            <a:pPr indent="0" marL="0">
-              <a:lnSpc>
-                <a:spcPct val="125000"/>
-              </a:lnSpc>
-              <a:buNone/>
-            </a:pPr>
-            <a:r>
-              <a:rPr lang="en-US" sz="1150" dirty="0">
-                <a:solidFill>
-                  <a:srgbClr val="222222"/>
-                </a:solidFill>
-                <a:latin typeface="Calibri" pitchFamily="34" charset="0"/>
-                <a:ea typeface="Calibri" pitchFamily="34" charset="-122"/>
-                <a:cs typeface="Calibri" pitchFamily="34" charset="-120"/>
-              </a:rPr>
-              <a:t>読み取れると、自動で照会結果に切り替わる</a:t>
-            </a:r>
-            <a:endParaRPr lang="en-US" sz="1150" dirty="0"/>
-          </a:p>
-        </p:txBody>
-      </p:sp>
-      <p:sp>
-        <p:nvSpPr>
-          <p:cNvPr id="18" name="Shape 16"/>
-          <p:cNvSpPr/>
-          <p:nvPr/>
-        </p:nvSpPr>
-        <p:spPr>
-          <a:xfrm>
-            <a:off x="566928" y="4044823"/>
-            <a:ext cx="6428232" cy="431102"/>
+            <a:off x="566928" y="2852928"/>
+            <a:ext cx="6428232" cy="624459"/>
           </a:xfrm>
           <a:prstGeom prst="roundRect">
             <a:avLst>
-              <a:gd name="adj" fmla="val 12726"/>
+              <a:gd name="adj" fmla="val 8786"/>
             </a:avLst>
           </a:prstGeom>
           <a:solidFill>
@@ -4055,13 +4741,13 @@
       </p:sp>
       <p:sp>
         <p:nvSpPr>
-          <p:cNvPr id="19" name="Text 17"/>
-          <p:cNvSpPr txBox="1"/>
-          <p:nvPr/>
-        </p:nvSpPr>
-        <p:spPr>
-          <a:xfrm>
-            <a:off x="658368" y="4136263"/>
+          <p:cNvPr id="14" name="Text 12"/>
+          <p:cNvSpPr txBox="1"/>
+          <p:nvPr/>
+        </p:nvSpPr>
+        <p:spPr>
+          <a:xfrm>
+            <a:off x="658368" y="2944368"/>
             <a:ext cx="237744" cy="237744"/>
           </a:xfrm>
           <a:prstGeom prst="rect">
@@ -4094,14 +4780,14 @@
       </p:sp>
       <p:sp>
         <p:nvSpPr>
-          <p:cNvPr id="20" name="Text 18"/>
-          <p:cNvSpPr txBox="1"/>
-          <p:nvPr/>
-        </p:nvSpPr>
-        <p:spPr>
-          <a:xfrm>
-            <a:off x="950976" y="4154551"/>
-            <a:ext cx="5925312" cy="248221"/>
+          <p:cNvPr id="15" name="Text 13"/>
+          <p:cNvSpPr txBox="1"/>
+          <p:nvPr/>
+        </p:nvSpPr>
+        <p:spPr>
+          <a:xfrm>
+            <a:off x="950976" y="2962656"/>
+            <a:ext cx="5925312" cy="441579"/>
           </a:xfrm>
           <a:prstGeom prst="rect">
             <a:avLst/>
@@ -4128,81 +4814,46 @@
                 <a:ea typeface="Calibri" pitchFamily="34" charset="-122"/>
                 <a:cs typeface="Calibri" pitchFamily="34" charset="-120"/>
               </a:rPr>
-              <a:t>続けて何人も対応するときは、この方法が速いです。アプリを切り替える必要がありません。</a:t>
+              <a:t>来場者の画面には「交換コード」（例：ABCD-2345）とQRコードが表示されています。スクリーンショットを見せられた場合も同じように読み取れます。</a:t>
             </a:r>
             <a:endParaRPr lang="en-US" sz="1050" dirty="0"/>
           </a:p>
         </p:txBody>
       </p:sp>
-      <p:sp>
-        <p:nvSpPr>
-          <p:cNvPr id="21" name="Text 19"/>
-          <p:cNvSpPr txBox="1"/>
-          <p:nvPr/>
-        </p:nvSpPr>
-        <p:spPr>
-          <a:xfrm>
-            <a:off x="566928" y="4658805"/>
-            <a:ext cx="6428232" cy="257810"/>
-          </a:xfrm>
-          <a:prstGeom prst="rect">
-            <a:avLst/>
-          </a:prstGeom>
-          <a:noFill/>
-          <a:ln/>
-        </p:spPr>
-        <p:txBody>
-          <a:bodyPr wrap="square" lIns="0" tIns="0" rIns="0" bIns="0" rtlCol="0" anchor="t"/>
-          <a:lstStyle/>
-          <a:p>
-            <a:pPr indent="0" marL="0">
-              <a:buNone/>
-            </a:pPr>
-            <a:r>
-              <a:rPr lang="en-US" sz="1400" b="1" dirty="0">
-                <a:solidFill>
-                  <a:srgbClr val="B85042"/>
-                </a:solidFill>
-                <a:latin typeface="Calibri" pitchFamily="34" charset="0"/>
-                <a:ea typeface="Calibri" pitchFamily="34" charset="-122"/>
-                <a:cs typeface="Calibri" pitchFamily="34" charset="-120"/>
-              </a:rPr>
-              <a:t>方法B：スマートフォンの標準カメラで読み取る</a:t>
-            </a:r>
-            <a:endParaRPr lang="en-US" sz="1400" dirty="0"/>
-          </a:p>
-        </p:txBody>
-      </p:sp>
-      <p:sp>
-        <p:nvSpPr>
-          <p:cNvPr id="22" name="Shape 20"/>
-          <p:cNvSpPr/>
-          <p:nvPr/>
-        </p:nvSpPr>
-        <p:spPr>
-          <a:xfrm>
-            <a:off x="566928" y="5008055"/>
-            <a:ext cx="274320" cy="274320"/>
-          </a:xfrm>
-          <a:prstGeom prst="ellipse">
-            <a:avLst/>
-          </a:prstGeom>
-          <a:solidFill>
-            <a:srgbClr val="B85042"/>
-          </a:solidFill>
-          <a:ln/>
-        </p:spPr>
-      </p:sp>
-      <p:sp>
-        <p:nvSpPr>
-          <p:cNvPr id="23" name="Text 21"/>
-          <p:cNvSpPr txBox="1"/>
-          <p:nvPr/>
-        </p:nvSpPr>
-        <p:spPr>
-          <a:xfrm>
-            <a:off x="566928" y="5008055"/>
-            <a:ext cx="274320" cy="274320"/>
+      <p:pic>
+        <p:nvPicPr>
+          <p:cNvPr id="16" name="Image 0" descr="C:\Users\sato\Desktop\enque\docs\images\p-visitor-done.png">    </p:cNvPr>
+          <p:cNvPicPr>
+            <a:picLocks noChangeAspect="1"/>
+          </p:cNvPicPr>
+          <p:nvPr/>
+        </p:nvPicPr>
+        <p:blipFill>
+          <a:blip r:embed="rId1"/>
+          <a:stretch>
+            <a:fillRect/>
+          </a:stretch>
+        </p:blipFill>
+        <p:spPr>
+          <a:xfrm>
+            <a:off x="3123981" y="3550539"/>
+            <a:ext cx="1314127" cy="3474720"/>
+          </a:xfrm>
+          <a:prstGeom prst="rect">
+            <a:avLst/>
+          </a:prstGeom>
+        </p:spPr>
+      </p:pic>
+      <p:sp>
+        <p:nvSpPr>
+          <p:cNvPr id="17" name="Text 14"/>
+          <p:cNvSpPr txBox="1"/>
+          <p:nvPr/>
+        </p:nvSpPr>
+        <p:spPr>
+          <a:xfrm>
+            <a:off x="566928" y="7080123"/>
+            <a:ext cx="6428232" cy="274320"/>
           </a:xfrm>
           <a:prstGeom prst="rect">
             <a:avLst/>
@@ -4218,375 +4869,23 @@
               <a:buNone/>
             </a:pPr>
             <a:r>
-              <a:rPr lang="en-US" sz="1100" b="1" dirty="0">
-                <a:solidFill>
-                  <a:srgbClr val="FFFFFF"/>
-                </a:solidFill>
-                <a:latin typeface="Calibri" pitchFamily="34" charset="0"/>
-                <a:ea typeface="Calibri" pitchFamily="34" charset="-122"/>
-                <a:cs typeface="Calibri" pitchFamily="34" charset="-120"/>
-              </a:rPr>
-              <a:t>1</a:t>
-            </a:r>
-            <a:endParaRPr lang="en-US" sz="1100" dirty="0"/>
-          </a:p>
-        </p:txBody>
-      </p:sp>
-      <p:sp>
-        <p:nvSpPr>
-          <p:cNvPr id="24" name="Text 22"/>
-          <p:cNvSpPr txBox="1"/>
-          <p:nvPr/>
-        </p:nvSpPr>
-        <p:spPr>
-          <a:xfrm>
-            <a:off x="969264" y="4989767"/>
-            <a:ext cx="6025896" cy="365760"/>
-          </a:xfrm>
-          <a:prstGeom prst="rect">
-            <a:avLst/>
-          </a:prstGeom>
-          <a:noFill/>
-          <a:ln/>
-        </p:spPr>
-        <p:txBody>
-          <a:bodyPr wrap="square" lIns="0" tIns="0" rIns="0" bIns="0" rtlCol="0" anchor="t"/>
-          <a:lstStyle/>
-          <a:p>
-            <a:pPr indent="0" marL="0">
-              <a:lnSpc>
-                <a:spcPct val="125000"/>
-              </a:lnSpc>
-              <a:buNone/>
-            </a:pPr>
-            <a:r>
-              <a:rPr lang="en-US" sz="1150" dirty="0">
-                <a:solidFill>
-                  <a:srgbClr val="222222"/>
-                </a:solidFill>
-                <a:latin typeface="Calibri" pitchFamily="34" charset="0"/>
-                <a:ea typeface="Calibri" pitchFamily="34" charset="-122"/>
-                <a:cs typeface="Calibri" pitchFamily="34" charset="-120"/>
-              </a:rPr>
-              <a:t>カメラアプリを開いて、来場者のQRコードに向ける</a:t>
-            </a:r>
-            <a:endParaRPr lang="en-US" sz="1150" dirty="0"/>
-          </a:p>
-        </p:txBody>
-      </p:sp>
-      <p:sp>
-        <p:nvSpPr>
-          <p:cNvPr id="25" name="Shape 23"/>
-          <p:cNvSpPr/>
-          <p:nvPr/>
-        </p:nvSpPr>
-        <p:spPr>
-          <a:xfrm>
-            <a:off x="566928" y="5465255"/>
-            <a:ext cx="274320" cy="274320"/>
-          </a:xfrm>
-          <a:prstGeom prst="ellipse">
-            <a:avLst/>
-          </a:prstGeom>
-          <a:solidFill>
-            <a:srgbClr val="B85042"/>
-          </a:solidFill>
-          <a:ln/>
-        </p:spPr>
-      </p:sp>
-      <p:sp>
-        <p:nvSpPr>
-          <p:cNvPr id="26" name="Text 24"/>
-          <p:cNvSpPr txBox="1"/>
-          <p:nvPr/>
-        </p:nvSpPr>
-        <p:spPr>
-          <a:xfrm>
-            <a:off x="566928" y="5465255"/>
-            <a:ext cx="274320" cy="274320"/>
-          </a:xfrm>
-          <a:prstGeom prst="rect">
-            <a:avLst/>
-          </a:prstGeom>
-          <a:noFill/>
-          <a:ln/>
-        </p:spPr>
-        <p:txBody>
-          <a:bodyPr wrap="square" lIns="0" tIns="0" rIns="0" bIns="0" rtlCol="0" anchor="ctr"/>
-          <a:lstStyle/>
-          <a:p>
-            <a:pPr algn="ctr" indent="0" marL="0">
-              <a:buNone/>
-            </a:pPr>
-            <a:r>
-              <a:rPr lang="en-US" sz="1100" b="1" dirty="0">
-                <a:solidFill>
-                  <a:srgbClr val="FFFFFF"/>
-                </a:solidFill>
-                <a:latin typeface="Calibri" pitchFamily="34" charset="0"/>
-                <a:ea typeface="Calibri" pitchFamily="34" charset="-122"/>
-                <a:cs typeface="Calibri" pitchFamily="34" charset="-120"/>
-              </a:rPr>
-              <a:t>2</a:t>
-            </a:r>
-            <a:endParaRPr lang="en-US" sz="1100" dirty="0"/>
-          </a:p>
-        </p:txBody>
-      </p:sp>
-      <p:sp>
-        <p:nvSpPr>
-          <p:cNvPr id="27" name="Text 25"/>
-          <p:cNvSpPr txBox="1"/>
-          <p:nvPr/>
-        </p:nvSpPr>
-        <p:spPr>
-          <a:xfrm>
-            <a:off x="969264" y="5446967"/>
-            <a:ext cx="6025896" cy="365760"/>
-          </a:xfrm>
-          <a:prstGeom prst="rect">
-            <a:avLst/>
-          </a:prstGeom>
-          <a:noFill/>
-          <a:ln/>
-        </p:spPr>
-        <p:txBody>
-          <a:bodyPr wrap="square" lIns="0" tIns="0" rIns="0" bIns="0" rtlCol="0" anchor="t"/>
-          <a:lstStyle/>
-          <a:p>
-            <a:pPr indent="0" marL="0">
-              <a:lnSpc>
-                <a:spcPct val="125000"/>
-              </a:lnSpc>
-              <a:buNone/>
-            </a:pPr>
-            <a:r>
-              <a:rPr lang="en-US" sz="1150" dirty="0">
-                <a:solidFill>
-                  <a:srgbClr val="222222"/>
-                </a:solidFill>
-                <a:latin typeface="Calibri" pitchFamily="34" charset="0"/>
-                <a:ea typeface="Calibri" pitchFamily="34" charset="-122"/>
-                <a:cs typeface="Calibri" pitchFamily="34" charset="-120"/>
-              </a:rPr>
-              <a:t>画面に出たリンクを押す</a:t>
-            </a:r>
-            <a:endParaRPr lang="en-US" sz="1150" dirty="0"/>
-          </a:p>
-        </p:txBody>
-      </p:sp>
-      <p:sp>
-        <p:nvSpPr>
-          <p:cNvPr id="28" name="Shape 26"/>
-          <p:cNvSpPr/>
-          <p:nvPr/>
-        </p:nvSpPr>
-        <p:spPr>
-          <a:xfrm>
-            <a:off x="566928" y="5922455"/>
-            <a:ext cx="274320" cy="274320"/>
-          </a:xfrm>
-          <a:prstGeom prst="ellipse">
-            <a:avLst/>
-          </a:prstGeom>
-          <a:solidFill>
-            <a:srgbClr val="B85042"/>
-          </a:solidFill>
-          <a:ln/>
-        </p:spPr>
-      </p:sp>
-      <p:sp>
-        <p:nvSpPr>
-          <p:cNvPr id="29" name="Text 27"/>
-          <p:cNvSpPr txBox="1"/>
-          <p:nvPr/>
-        </p:nvSpPr>
-        <p:spPr>
-          <a:xfrm>
-            <a:off x="566928" y="5922455"/>
-            <a:ext cx="274320" cy="274320"/>
-          </a:xfrm>
-          <a:prstGeom prst="rect">
-            <a:avLst/>
-          </a:prstGeom>
-          <a:noFill/>
-          <a:ln/>
-        </p:spPr>
-        <p:txBody>
-          <a:bodyPr wrap="square" lIns="0" tIns="0" rIns="0" bIns="0" rtlCol="0" anchor="ctr"/>
-          <a:lstStyle/>
-          <a:p>
-            <a:pPr algn="ctr" indent="0" marL="0">
-              <a:buNone/>
-            </a:pPr>
-            <a:r>
-              <a:rPr lang="en-US" sz="1100" b="1" dirty="0">
-                <a:solidFill>
-                  <a:srgbClr val="FFFFFF"/>
-                </a:solidFill>
-                <a:latin typeface="Calibri" pitchFamily="34" charset="0"/>
-                <a:ea typeface="Calibri" pitchFamily="34" charset="-122"/>
-                <a:cs typeface="Calibri" pitchFamily="34" charset="-120"/>
-              </a:rPr>
-              <a:t>3</a:t>
-            </a:r>
-            <a:endParaRPr lang="en-US" sz="1100" dirty="0"/>
-          </a:p>
-        </p:txBody>
-      </p:sp>
-      <p:sp>
-        <p:nvSpPr>
-          <p:cNvPr id="30" name="Text 28"/>
-          <p:cNvSpPr txBox="1"/>
-          <p:nvPr/>
-        </p:nvSpPr>
-        <p:spPr>
-          <a:xfrm>
-            <a:off x="969264" y="5904167"/>
-            <a:ext cx="6025896" cy="365760"/>
-          </a:xfrm>
-          <a:prstGeom prst="rect">
-            <a:avLst/>
-          </a:prstGeom>
-          <a:noFill/>
-          <a:ln/>
-        </p:spPr>
-        <p:txBody>
-          <a:bodyPr wrap="square" lIns="0" tIns="0" rIns="0" bIns="0" rtlCol="0" anchor="t"/>
-          <a:lstStyle/>
-          <a:p>
-            <a:pPr indent="0" marL="0">
-              <a:lnSpc>
-                <a:spcPct val="125000"/>
-              </a:lnSpc>
-              <a:buNone/>
-            </a:pPr>
-            <a:r>
-              <a:rPr lang="en-US" sz="1150" dirty="0">
-                <a:solidFill>
-                  <a:srgbClr val="222222"/>
-                </a:solidFill>
-                <a:latin typeface="Calibri" pitchFamily="34" charset="0"/>
-                <a:ea typeface="Calibri" pitchFamily="34" charset="-122"/>
-                <a:cs typeface="Calibri" pitchFamily="34" charset="-120"/>
-              </a:rPr>
-              <a:t>照会結果の画面が開く</a:t>
-            </a:r>
-            <a:endParaRPr lang="en-US" sz="1150" dirty="0"/>
-          </a:p>
-        </p:txBody>
-      </p:sp>
-      <p:sp>
-        <p:nvSpPr>
-          <p:cNvPr id="31" name="Shape 29"/>
-          <p:cNvSpPr/>
-          <p:nvPr/>
-        </p:nvSpPr>
-        <p:spPr>
-          <a:xfrm>
-            <a:off x="566928" y="6361367"/>
-            <a:ext cx="6428232" cy="624459"/>
-          </a:xfrm>
-          <a:prstGeom prst="roundRect">
-            <a:avLst>
-              <a:gd name="adj" fmla="val 8786"/>
-            </a:avLst>
-          </a:prstGeom>
-          <a:solidFill>
-            <a:srgbClr val="FDF0E6"/>
-          </a:solidFill>
-          <a:ln w="9525">
-            <a:solidFill>
-              <a:srgbClr val="E08A3C"/>
-            </a:solidFill>
-            <a:prstDash val="solid"/>
-          </a:ln>
-        </p:spPr>
-      </p:sp>
-      <p:sp>
-        <p:nvSpPr>
-          <p:cNvPr id="32" name="Text 30"/>
-          <p:cNvSpPr txBox="1"/>
-          <p:nvPr/>
-        </p:nvSpPr>
-        <p:spPr>
-          <a:xfrm>
-            <a:off x="658368" y="6452807"/>
-            <a:ext cx="237744" cy="237744"/>
-          </a:xfrm>
-          <a:prstGeom prst="rect">
-            <a:avLst/>
-          </a:prstGeom>
-          <a:noFill/>
-          <a:ln/>
-        </p:spPr>
-        <p:txBody>
-          <a:bodyPr wrap="square" lIns="0" tIns="0" rIns="0" bIns="0" rtlCol="0" anchor="ctr"/>
-          <a:lstStyle/>
-          <a:p>
-            <a:pPr algn="ctr" indent="0" marL="0">
-              <a:buNone/>
-            </a:pPr>
-            <a:r>
-              <a:rPr lang="en-US" sz="1200" b="1" dirty="0">
-                <a:solidFill>
-                  <a:srgbClr val="C25A17"/>
-                </a:solidFill>
-                <a:latin typeface="Calibri" pitchFamily="34" charset="0"/>
-                <a:ea typeface="Calibri" pitchFamily="34" charset="-122"/>
-                <a:cs typeface="Calibri" pitchFamily="34" charset="-120"/>
-              </a:rPr>
-              <a:t>！</a:t>
-            </a:r>
-            <a:endParaRPr lang="en-US" sz="1200" dirty="0"/>
-          </a:p>
-        </p:txBody>
-      </p:sp>
-      <p:sp>
-        <p:nvSpPr>
-          <p:cNvPr id="33" name="Text 31"/>
-          <p:cNvSpPr txBox="1"/>
-          <p:nvPr/>
-        </p:nvSpPr>
-        <p:spPr>
-          <a:xfrm>
-            <a:off x="950976" y="6471095"/>
-            <a:ext cx="5925312" cy="441579"/>
-          </a:xfrm>
-          <a:prstGeom prst="rect">
-            <a:avLst/>
-          </a:prstGeom>
-          <a:noFill/>
-          <a:ln/>
-        </p:spPr>
-        <p:txBody>
-          <a:bodyPr wrap="square" lIns="0" tIns="0" rIns="0" bIns="0" rtlCol="0" anchor="t"/>
-          <a:lstStyle/>
-          <a:p>
-            <a:pPr indent="0" marL="0">
-              <a:lnSpc>
-                <a:spcPct val="120000"/>
-              </a:lnSpc>
-              <a:buNone/>
-            </a:pPr>
-            <a:r>
-              <a:rPr lang="en-US" sz="1050" dirty="0">
-                <a:solidFill>
-                  <a:srgbClr val="222222"/>
-                </a:solidFill>
-                <a:latin typeface="Calibri" pitchFamily="34" charset="0"/>
-                <a:ea typeface="Calibri" pitchFamily="34" charset="-122"/>
-                <a:cs typeface="Calibri" pitchFamily="34" charset="-120"/>
-              </a:rPr>
-              <a:t>「ログインが必要です」と表示されたときは、そのスマートフォンがログアウトしています。画面のリンクからログインし直してください。</a:t>
-            </a:r>
-            <a:endParaRPr lang="en-US" sz="1050" dirty="0"/>
-          </a:p>
-        </p:txBody>
-      </p:sp>
-      <p:sp>
-        <p:nvSpPr>
-          <p:cNvPr id="34" name="Text 32"/>
+              <a:rPr lang="en-US" sz="950" dirty="0">
+                <a:solidFill>
+                  <a:srgbClr val="6B6B6B"/>
+                </a:solidFill>
+                <a:latin typeface="Calibri" pitchFamily="34" charset="0"/>
+                <a:ea typeface="Calibri" pitchFamily="34" charset="-122"/>
+                <a:cs typeface="Calibri" pitchFamily="34" charset="-120"/>
+              </a:rPr>
+              <a:t>来場者の「回答済み画面」。大きな交換コードとQRコードが写っているもの。</a:t>
+            </a:r>
+            <a:endParaRPr lang="en-US" sz="950" dirty="0"/>
+          </a:p>
+        </p:txBody>
+      </p:sp>
+      <p:sp>
+        <p:nvSpPr>
+          <p:cNvPr id="18" name="Text 15"/>
           <p:cNvSpPr txBox="1"/>
           <p:nvPr/>
         </p:nvSpPr>
@@ -4727,46 +5026,123 @@
                 <a:ea typeface="Calibri" pitchFamily="34" charset="-122"/>
                 <a:cs typeface="Calibri" pitchFamily="34" charset="-120"/>
               </a:rPr>
-              <a:t>手順1：QRコードを読み取る（つづき）</a:t>
+              <a:t>手順1：QRコードを読み取る</a:t>
             </a:r>
             <a:endParaRPr lang="en-US" sz="2200" dirty="0"/>
           </a:p>
         </p:txBody>
       </p:sp>
-      <p:pic>
-        <p:nvPicPr>
-          <p:cNvPr id="4" name="Image 0" descr="C:\Users\sato\Desktop\enque\docs\images\p-scan-button.png">    </p:cNvPr>
-          <p:cNvPicPr>
-            <a:picLocks noChangeAspect="1"/>
-          </p:cNvPicPr>
-          <p:nvPr/>
-        </p:nvPicPr>
-        <p:blipFill>
-          <a:blip r:embed="rId1"/>
-          <a:stretch>
-            <a:fillRect/>
-          </a:stretch>
-        </p:blipFill>
+      <p:sp>
+        <p:nvSpPr>
+          <p:cNvPr id="4" name="Text 2"/>
+          <p:cNvSpPr txBox="1"/>
+          <p:nvPr/>
+        </p:nvSpPr>
         <p:spPr>
           <a:xfrm>
             <a:off x="566928" y="1481328"/>
-            <a:ext cx="6428232" cy="3465755"/>
-          </a:xfrm>
-          <a:prstGeom prst="rect">
-            <a:avLst/>
-          </a:prstGeom>
-        </p:spPr>
-      </p:pic>
-      <p:sp>
-        <p:nvSpPr>
-          <p:cNvPr id="5" name="Text 2"/>
-          <p:cNvSpPr txBox="1"/>
-          <p:nvPr/>
-        </p:nvSpPr>
-        <p:spPr>
-          <a:xfrm>
-            <a:off x="566928" y="5001947"/>
-            <a:ext cx="6428232" cy="274320"/>
+            <a:ext cx="6428232" cy="257429"/>
+          </a:xfrm>
+          <a:prstGeom prst="rect">
+            <a:avLst/>
+          </a:prstGeom>
+          <a:noFill/>
+          <a:ln/>
+        </p:spPr>
+        <p:txBody>
+          <a:bodyPr wrap="square" lIns="0" tIns="0" rIns="0" bIns="0" rtlCol="0" anchor="t"/>
+          <a:lstStyle/>
+          <a:p>
+            <a:pPr indent="0" marL="0">
+              <a:lnSpc>
+                <a:spcPct val="125000"/>
+              </a:lnSpc>
+              <a:buNone/>
+            </a:pPr>
+            <a:r>
+              <a:rPr lang="en-US" sz="1100" dirty="0">
+                <a:solidFill>
+                  <a:srgbClr val="222222"/>
+                </a:solidFill>
+                <a:latin typeface="Calibri" pitchFamily="34" charset="0"/>
+                <a:ea typeface="Calibri" pitchFamily="34" charset="-122"/>
+                <a:cs typeface="Calibri" pitchFamily="34" charset="-120"/>
+              </a:rPr>
+              <a:t>読み取り方は2通りあります。どちらでも同じ画面が開きます。</a:t>
+            </a:r>
+            <a:endParaRPr lang="en-US" sz="1100" dirty="0"/>
+          </a:p>
+        </p:txBody>
+      </p:sp>
+      <p:sp>
+        <p:nvSpPr>
+          <p:cNvPr id="5" name="Text 3"/>
+          <p:cNvSpPr txBox="1"/>
+          <p:nvPr/>
+        </p:nvSpPr>
+        <p:spPr>
+          <a:xfrm>
+            <a:off x="566928" y="1885061"/>
+            <a:ext cx="6428232" cy="257810"/>
+          </a:xfrm>
+          <a:prstGeom prst="rect">
+            <a:avLst/>
+          </a:prstGeom>
+          <a:noFill/>
+          <a:ln/>
+        </p:spPr>
+        <p:txBody>
+          <a:bodyPr wrap="square" lIns="0" tIns="0" rIns="0" bIns="0" rtlCol="0" anchor="t"/>
+          <a:lstStyle/>
+          <a:p>
+            <a:pPr indent="0" marL="0">
+              <a:buNone/>
+            </a:pPr>
+            <a:r>
+              <a:rPr lang="en-US" sz="1400" b="1" dirty="0">
+                <a:solidFill>
+                  <a:srgbClr val="B85042"/>
+                </a:solidFill>
+                <a:latin typeface="Calibri" pitchFamily="34" charset="0"/>
+                <a:ea typeface="Calibri" pitchFamily="34" charset="-122"/>
+                <a:cs typeface="Calibri" pitchFamily="34" charset="-120"/>
+              </a:rPr>
+              <a:t>方法A：照会画面のボタンから読み取る（おすすめ）</a:t>
+            </a:r>
+            <a:endParaRPr lang="en-US" sz="1400" dirty="0"/>
+          </a:p>
+        </p:txBody>
+      </p:sp>
+      <p:sp>
+        <p:nvSpPr>
+          <p:cNvPr id="6" name="Shape 4"/>
+          <p:cNvSpPr/>
+          <p:nvPr/>
+        </p:nvSpPr>
+        <p:spPr>
+          <a:xfrm>
+            <a:off x="566928" y="2234311"/>
+            <a:ext cx="274320" cy="274320"/>
+          </a:xfrm>
+          <a:prstGeom prst="ellipse">
+            <a:avLst/>
+          </a:prstGeom>
+          <a:solidFill>
+            <a:srgbClr val="B85042"/>
+          </a:solidFill>
+          <a:ln/>
+        </p:spPr>
+      </p:sp>
+      <p:sp>
+        <p:nvSpPr>
+          <p:cNvPr id="7" name="Text 5"/>
+          <p:cNvSpPr txBox="1"/>
+          <p:nvPr/>
+        </p:nvSpPr>
+        <p:spPr>
+          <a:xfrm>
+            <a:off x="566928" y="2234311"/>
+            <a:ext cx="274320" cy="274320"/>
           </a:xfrm>
           <a:prstGeom prst="rect">
             <a:avLst/>
@@ -4782,23 +5158,994 @@
               <a:buNone/>
             </a:pPr>
             <a:r>
-              <a:rPr lang="en-US" sz="950" dirty="0">
-                <a:solidFill>
-                  <a:srgbClr val="6B6B6B"/>
-                </a:solidFill>
-                <a:latin typeface="Calibri" pitchFamily="34" charset="0"/>
-                <a:ea typeface="Calibri" pitchFamily="34" charset="-122"/>
-                <a:cs typeface="Calibri" pitchFamily="34" charset="-120"/>
-              </a:rPr>
-              <a:t>照会画面の上部。「QRコードを読み取る」ボタンが見えるもの。</a:t>
-            </a:r>
-            <a:endParaRPr lang="en-US" sz="950" dirty="0"/>
-          </a:p>
-        </p:txBody>
-      </p:sp>
-      <p:sp>
-        <p:nvSpPr>
-          <p:cNvPr id="6" name="Text 3"/>
+              <a:rPr lang="en-US" sz="1100" b="1" dirty="0">
+                <a:solidFill>
+                  <a:srgbClr val="FFFFFF"/>
+                </a:solidFill>
+                <a:latin typeface="Calibri" pitchFamily="34" charset="0"/>
+                <a:ea typeface="Calibri" pitchFamily="34" charset="-122"/>
+                <a:cs typeface="Calibri" pitchFamily="34" charset="-120"/>
+              </a:rPr>
+              <a:t>1</a:t>
+            </a:r>
+            <a:endParaRPr lang="en-US" sz="1100" dirty="0"/>
+          </a:p>
+        </p:txBody>
+      </p:sp>
+      <p:sp>
+        <p:nvSpPr>
+          <p:cNvPr id="8" name="Text 6"/>
+          <p:cNvSpPr txBox="1"/>
+          <p:nvPr/>
+        </p:nvSpPr>
+        <p:spPr>
+          <a:xfrm>
+            <a:off x="969264" y="2216023"/>
+            <a:ext cx="6025896" cy="365760"/>
+          </a:xfrm>
+          <a:prstGeom prst="rect">
+            <a:avLst/>
+          </a:prstGeom>
+          <a:noFill/>
+          <a:ln/>
+        </p:spPr>
+        <p:txBody>
+          <a:bodyPr wrap="square" lIns="0" tIns="0" rIns="0" bIns="0" rtlCol="0" anchor="t"/>
+          <a:lstStyle/>
+          <a:p>
+            <a:pPr indent="0" marL="0">
+              <a:lnSpc>
+                <a:spcPct val="125000"/>
+              </a:lnSpc>
+              <a:buNone/>
+            </a:pPr>
+            <a:r>
+              <a:rPr lang="en-US" sz="1150" dirty="0">
+                <a:solidFill>
+                  <a:srgbClr val="222222"/>
+                </a:solidFill>
+                <a:latin typeface="Calibri" pitchFamily="34" charset="0"/>
+                <a:ea typeface="Calibri" pitchFamily="34" charset="-122"/>
+                <a:cs typeface="Calibri" pitchFamily="34" charset="-120"/>
+              </a:rPr>
+              <a:t>「景品交換の照会」の画面で、</a:t>
+            </a:r>
+            <a:pPr indent="0" marL="0">
+              <a:lnSpc>
+                <a:spcPct val="125000"/>
+              </a:lnSpc>
+              <a:buNone/>
+            </a:pPr>
+            <a:r>
+              <a:rPr lang="en-US" sz="1150" b="1" dirty="0">
+                <a:solidFill>
+                  <a:srgbClr val="222222"/>
+                </a:solidFill>
+                <a:latin typeface="Calibri" pitchFamily="34" charset="0"/>
+                <a:ea typeface="Calibri" pitchFamily="34" charset="-122"/>
+                <a:cs typeface="Calibri" pitchFamily="34" charset="-120"/>
+              </a:rPr>
+              <a:t>「QRコードを読み取る」</a:t>
+            </a:r>
+            <a:pPr indent="0" marL="0">
+              <a:lnSpc>
+                <a:spcPct val="125000"/>
+              </a:lnSpc>
+              <a:buNone/>
+            </a:pPr>
+            <a:r>
+              <a:rPr lang="en-US" sz="1150" dirty="0">
+                <a:solidFill>
+                  <a:srgbClr val="222222"/>
+                </a:solidFill>
+                <a:latin typeface="Calibri" pitchFamily="34" charset="0"/>
+                <a:ea typeface="Calibri" pitchFamily="34" charset="-122"/>
+                <a:cs typeface="Calibri" pitchFamily="34" charset="-120"/>
+              </a:rPr>
+              <a:t>を押す</a:t>
+            </a:r>
+            <a:endParaRPr lang="en-US" sz="1150" dirty="0"/>
+          </a:p>
+        </p:txBody>
+      </p:sp>
+      <p:sp>
+        <p:nvSpPr>
+          <p:cNvPr id="9" name="Shape 7"/>
+          <p:cNvSpPr/>
+          <p:nvPr/>
+        </p:nvSpPr>
+        <p:spPr>
+          <a:xfrm>
+            <a:off x="566928" y="2691511"/>
+            <a:ext cx="274320" cy="274320"/>
+          </a:xfrm>
+          <a:prstGeom prst="ellipse">
+            <a:avLst/>
+          </a:prstGeom>
+          <a:solidFill>
+            <a:srgbClr val="B85042"/>
+          </a:solidFill>
+          <a:ln/>
+        </p:spPr>
+      </p:sp>
+      <p:sp>
+        <p:nvSpPr>
+          <p:cNvPr id="10" name="Text 8"/>
+          <p:cNvSpPr txBox="1"/>
+          <p:nvPr/>
+        </p:nvSpPr>
+        <p:spPr>
+          <a:xfrm>
+            <a:off x="566928" y="2691511"/>
+            <a:ext cx="274320" cy="274320"/>
+          </a:xfrm>
+          <a:prstGeom prst="rect">
+            <a:avLst/>
+          </a:prstGeom>
+          <a:noFill/>
+          <a:ln/>
+        </p:spPr>
+        <p:txBody>
+          <a:bodyPr wrap="square" lIns="0" tIns="0" rIns="0" bIns="0" rtlCol="0" anchor="ctr"/>
+          <a:lstStyle/>
+          <a:p>
+            <a:pPr algn="ctr" indent="0" marL="0">
+              <a:buNone/>
+            </a:pPr>
+            <a:r>
+              <a:rPr lang="en-US" sz="1100" b="1" dirty="0">
+                <a:solidFill>
+                  <a:srgbClr val="FFFFFF"/>
+                </a:solidFill>
+                <a:latin typeface="Calibri" pitchFamily="34" charset="0"/>
+                <a:ea typeface="Calibri" pitchFamily="34" charset="-122"/>
+                <a:cs typeface="Calibri" pitchFamily="34" charset="-120"/>
+              </a:rPr>
+              <a:t>2</a:t>
+            </a:r>
+            <a:endParaRPr lang="en-US" sz="1100" dirty="0"/>
+          </a:p>
+        </p:txBody>
+      </p:sp>
+      <p:sp>
+        <p:nvSpPr>
+          <p:cNvPr id="11" name="Text 9"/>
+          <p:cNvSpPr txBox="1"/>
+          <p:nvPr/>
+        </p:nvSpPr>
+        <p:spPr>
+          <a:xfrm>
+            <a:off x="969264" y="2673223"/>
+            <a:ext cx="6025896" cy="365760"/>
+          </a:xfrm>
+          <a:prstGeom prst="rect">
+            <a:avLst/>
+          </a:prstGeom>
+          <a:noFill/>
+          <a:ln/>
+        </p:spPr>
+        <p:txBody>
+          <a:bodyPr wrap="square" lIns="0" tIns="0" rIns="0" bIns="0" rtlCol="0" anchor="t"/>
+          <a:lstStyle/>
+          <a:p>
+            <a:pPr indent="0" marL="0">
+              <a:lnSpc>
+                <a:spcPct val="125000"/>
+              </a:lnSpc>
+              <a:buNone/>
+            </a:pPr>
+            <a:r>
+              <a:rPr lang="en-US" sz="1150" dirty="0">
+                <a:solidFill>
+                  <a:srgbClr val="222222"/>
+                </a:solidFill>
+                <a:latin typeface="Calibri" pitchFamily="34" charset="0"/>
+                <a:ea typeface="Calibri" pitchFamily="34" charset="-122"/>
+                <a:cs typeface="Calibri" pitchFamily="34" charset="-120"/>
+              </a:rPr>
+              <a:t>カメラの使用を聞かれたら</a:t>
+            </a:r>
+            <a:pPr indent="0" marL="0">
+              <a:lnSpc>
+                <a:spcPct val="125000"/>
+              </a:lnSpc>
+              <a:buNone/>
+            </a:pPr>
+            <a:r>
+              <a:rPr lang="en-US" sz="1150" b="1" dirty="0">
+                <a:solidFill>
+                  <a:srgbClr val="222222"/>
+                </a:solidFill>
+                <a:latin typeface="Calibri" pitchFamily="34" charset="0"/>
+                <a:ea typeface="Calibri" pitchFamily="34" charset="-122"/>
+                <a:cs typeface="Calibri" pitchFamily="34" charset="-120"/>
+              </a:rPr>
+              <a:t>「許可」</a:t>
+            </a:r>
+            <a:pPr indent="0" marL="0">
+              <a:lnSpc>
+                <a:spcPct val="125000"/>
+              </a:lnSpc>
+              <a:buNone/>
+            </a:pPr>
+            <a:r>
+              <a:rPr lang="en-US" sz="1150" dirty="0">
+                <a:solidFill>
+                  <a:srgbClr val="222222"/>
+                </a:solidFill>
+                <a:latin typeface="Calibri" pitchFamily="34" charset="0"/>
+                <a:ea typeface="Calibri" pitchFamily="34" charset="-122"/>
+                <a:cs typeface="Calibri" pitchFamily="34" charset="-120"/>
+              </a:rPr>
+              <a:t>を選ぶ（最初の1回だけ）</a:t>
+            </a:r>
+            <a:endParaRPr lang="en-US" sz="1150" dirty="0"/>
+          </a:p>
+        </p:txBody>
+      </p:sp>
+      <p:sp>
+        <p:nvSpPr>
+          <p:cNvPr id="12" name="Shape 10"/>
+          <p:cNvSpPr/>
+          <p:nvPr/>
+        </p:nvSpPr>
+        <p:spPr>
+          <a:xfrm>
+            <a:off x="566928" y="3148711"/>
+            <a:ext cx="274320" cy="274320"/>
+          </a:xfrm>
+          <a:prstGeom prst="ellipse">
+            <a:avLst/>
+          </a:prstGeom>
+          <a:solidFill>
+            <a:srgbClr val="B85042"/>
+          </a:solidFill>
+          <a:ln/>
+        </p:spPr>
+      </p:sp>
+      <p:sp>
+        <p:nvSpPr>
+          <p:cNvPr id="13" name="Text 11"/>
+          <p:cNvSpPr txBox="1"/>
+          <p:nvPr/>
+        </p:nvSpPr>
+        <p:spPr>
+          <a:xfrm>
+            <a:off x="566928" y="3148711"/>
+            <a:ext cx="274320" cy="274320"/>
+          </a:xfrm>
+          <a:prstGeom prst="rect">
+            <a:avLst/>
+          </a:prstGeom>
+          <a:noFill/>
+          <a:ln/>
+        </p:spPr>
+        <p:txBody>
+          <a:bodyPr wrap="square" lIns="0" tIns="0" rIns="0" bIns="0" rtlCol="0" anchor="ctr"/>
+          <a:lstStyle/>
+          <a:p>
+            <a:pPr algn="ctr" indent="0" marL="0">
+              <a:buNone/>
+            </a:pPr>
+            <a:r>
+              <a:rPr lang="en-US" sz="1100" b="1" dirty="0">
+                <a:solidFill>
+                  <a:srgbClr val="FFFFFF"/>
+                </a:solidFill>
+                <a:latin typeface="Calibri" pitchFamily="34" charset="0"/>
+                <a:ea typeface="Calibri" pitchFamily="34" charset="-122"/>
+                <a:cs typeface="Calibri" pitchFamily="34" charset="-120"/>
+              </a:rPr>
+              <a:t>3</a:t>
+            </a:r>
+            <a:endParaRPr lang="en-US" sz="1100" dirty="0"/>
+          </a:p>
+        </p:txBody>
+      </p:sp>
+      <p:sp>
+        <p:nvSpPr>
+          <p:cNvPr id="14" name="Text 12"/>
+          <p:cNvSpPr txBox="1"/>
+          <p:nvPr/>
+        </p:nvSpPr>
+        <p:spPr>
+          <a:xfrm>
+            <a:off x="969264" y="3130423"/>
+            <a:ext cx="6025896" cy="365760"/>
+          </a:xfrm>
+          <a:prstGeom prst="rect">
+            <a:avLst/>
+          </a:prstGeom>
+          <a:noFill/>
+          <a:ln/>
+        </p:spPr>
+        <p:txBody>
+          <a:bodyPr wrap="square" lIns="0" tIns="0" rIns="0" bIns="0" rtlCol="0" anchor="t"/>
+          <a:lstStyle/>
+          <a:p>
+            <a:pPr indent="0" marL="0">
+              <a:lnSpc>
+                <a:spcPct val="125000"/>
+              </a:lnSpc>
+              <a:buNone/>
+            </a:pPr>
+            <a:r>
+              <a:rPr lang="en-US" sz="1150" dirty="0">
+                <a:solidFill>
+                  <a:srgbClr val="222222"/>
+                </a:solidFill>
+                <a:latin typeface="Calibri" pitchFamily="34" charset="0"/>
+                <a:ea typeface="Calibri" pitchFamily="34" charset="-122"/>
+                <a:cs typeface="Calibri" pitchFamily="34" charset="-120"/>
+              </a:rPr>
+              <a:t>画面の枠に、来場者のQRコードを入れる</a:t>
+            </a:r>
+            <a:endParaRPr lang="en-US" sz="1150" dirty="0"/>
+          </a:p>
+        </p:txBody>
+      </p:sp>
+      <p:sp>
+        <p:nvSpPr>
+          <p:cNvPr id="15" name="Shape 13"/>
+          <p:cNvSpPr/>
+          <p:nvPr/>
+        </p:nvSpPr>
+        <p:spPr>
+          <a:xfrm>
+            <a:off x="566928" y="3605911"/>
+            <a:ext cx="274320" cy="274320"/>
+          </a:xfrm>
+          <a:prstGeom prst="ellipse">
+            <a:avLst/>
+          </a:prstGeom>
+          <a:solidFill>
+            <a:srgbClr val="B85042"/>
+          </a:solidFill>
+          <a:ln/>
+        </p:spPr>
+      </p:sp>
+      <p:sp>
+        <p:nvSpPr>
+          <p:cNvPr id="16" name="Text 14"/>
+          <p:cNvSpPr txBox="1"/>
+          <p:nvPr/>
+        </p:nvSpPr>
+        <p:spPr>
+          <a:xfrm>
+            <a:off x="566928" y="3605911"/>
+            <a:ext cx="274320" cy="274320"/>
+          </a:xfrm>
+          <a:prstGeom prst="rect">
+            <a:avLst/>
+          </a:prstGeom>
+          <a:noFill/>
+          <a:ln/>
+        </p:spPr>
+        <p:txBody>
+          <a:bodyPr wrap="square" lIns="0" tIns="0" rIns="0" bIns="0" rtlCol="0" anchor="ctr"/>
+          <a:lstStyle/>
+          <a:p>
+            <a:pPr algn="ctr" indent="0" marL="0">
+              <a:buNone/>
+            </a:pPr>
+            <a:r>
+              <a:rPr lang="en-US" sz="1100" b="1" dirty="0">
+                <a:solidFill>
+                  <a:srgbClr val="FFFFFF"/>
+                </a:solidFill>
+                <a:latin typeface="Calibri" pitchFamily="34" charset="0"/>
+                <a:ea typeface="Calibri" pitchFamily="34" charset="-122"/>
+                <a:cs typeface="Calibri" pitchFamily="34" charset="-120"/>
+              </a:rPr>
+              <a:t>4</a:t>
+            </a:r>
+            <a:endParaRPr lang="en-US" sz="1100" dirty="0"/>
+          </a:p>
+        </p:txBody>
+      </p:sp>
+      <p:sp>
+        <p:nvSpPr>
+          <p:cNvPr id="17" name="Text 15"/>
+          <p:cNvSpPr txBox="1"/>
+          <p:nvPr/>
+        </p:nvSpPr>
+        <p:spPr>
+          <a:xfrm>
+            <a:off x="969264" y="3587623"/>
+            <a:ext cx="6025896" cy="365760"/>
+          </a:xfrm>
+          <a:prstGeom prst="rect">
+            <a:avLst/>
+          </a:prstGeom>
+          <a:noFill/>
+          <a:ln/>
+        </p:spPr>
+        <p:txBody>
+          <a:bodyPr wrap="square" lIns="0" tIns="0" rIns="0" bIns="0" rtlCol="0" anchor="t"/>
+          <a:lstStyle/>
+          <a:p>
+            <a:pPr indent="0" marL="0">
+              <a:lnSpc>
+                <a:spcPct val="125000"/>
+              </a:lnSpc>
+              <a:buNone/>
+            </a:pPr>
+            <a:r>
+              <a:rPr lang="en-US" sz="1150" dirty="0">
+                <a:solidFill>
+                  <a:srgbClr val="222222"/>
+                </a:solidFill>
+                <a:latin typeface="Calibri" pitchFamily="34" charset="0"/>
+                <a:ea typeface="Calibri" pitchFamily="34" charset="-122"/>
+                <a:cs typeface="Calibri" pitchFamily="34" charset="-120"/>
+              </a:rPr>
+              <a:t>読み取れると、自動で照会結果に切り替わる</a:t>
+            </a:r>
+            <a:endParaRPr lang="en-US" sz="1150" dirty="0"/>
+          </a:p>
+        </p:txBody>
+      </p:sp>
+      <p:sp>
+        <p:nvSpPr>
+          <p:cNvPr id="18" name="Shape 16"/>
+          <p:cNvSpPr/>
+          <p:nvPr/>
+        </p:nvSpPr>
+        <p:spPr>
+          <a:xfrm>
+            <a:off x="566928" y="4044823"/>
+            <a:ext cx="6428232" cy="431102"/>
+          </a:xfrm>
+          <a:prstGeom prst="roundRect">
+            <a:avLst>
+              <a:gd name="adj" fmla="val 12726"/>
+            </a:avLst>
+          </a:prstGeom>
+          <a:solidFill>
+            <a:srgbClr val="FAEAE7"/>
+          </a:solidFill>
+          <a:ln w="9525">
+            <a:solidFill>
+              <a:srgbClr val="B85042"/>
+            </a:solidFill>
+            <a:prstDash val="solid"/>
+          </a:ln>
+        </p:spPr>
+      </p:sp>
+      <p:sp>
+        <p:nvSpPr>
+          <p:cNvPr id="19" name="Text 17"/>
+          <p:cNvSpPr txBox="1"/>
+          <p:nvPr/>
+        </p:nvSpPr>
+        <p:spPr>
+          <a:xfrm>
+            <a:off x="658368" y="4136263"/>
+            <a:ext cx="237744" cy="237744"/>
+          </a:xfrm>
+          <a:prstGeom prst="rect">
+            <a:avLst/>
+          </a:prstGeom>
+          <a:noFill/>
+          <a:ln/>
+        </p:spPr>
+        <p:txBody>
+          <a:bodyPr wrap="square" lIns="0" tIns="0" rIns="0" bIns="0" rtlCol="0" anchor="ctr"/>
+          <a:lstStyle/>
+          <a:p>
+            <a:pPr algn="ctr" indent="0" marL="0">
+              <a:buNone/>
+            </a:pPr>
+            <a:r>
+              <a:rPr lang="en-US" sz="1200" b="1" dirty="0">
+                <a:solidFill>
+                  <a:srgbClr val="B85042"/>
+                </a:solidFill>
+                <a:latin typeface="Calibri" pitchFamily="34" charset="0"/>
+                <a:ea typeface="Calibri" pitchFamily="34" charset="-122"/>
+                <a:cs typeface="Calibri" pitchFamily="34" charset="-120"/>
+              </a:rPr>
+              <a:t>i</a:t>
+            </a:r>
+            <a:endParaRPr lang="en-US" sz="1200" dirty="0"/>
+          </a:p>
+        </p:txBody>
+      </p:sp>
+      <p:sp>
+        <p:nvSpPr>
+          <p:cNvPr id="20" name="Text 18"/>
+          <p:cNvSpPr txBox="1"/>
+          <p:nvPr/>
+        </p:nvSpPr>
+        <p:spPr>
+          <a:xfrm>
+            <a:off x="950976" y="4154551"/>
+            <a:ext cx="5925312" cy="248221"/>
+          </a:xfrm>
+          <a:prstGeom prst="rect">
+            <a:avLst/>
+          </a:prstGeom>
+          <a:noFill/>
+          <a:ln/>
+        </p:spPr>
+        <p:txBody>
+          <a:bodyPr wrap="square" lIns="0" tIns="0" rIns="0" bIns="0" rtlCol="0" anchor="t"/>
+          <a:lstStyle/>
+          <a:p>
+            <a:pPr indent="0" marL="0">
+              <a:lnSpc>
+                <a:spcPct val="120000"/>
+              </a:lnSpc>
+              <a:buNone/>
+            </a:pPr>
+            <a:r>
+              <a:rPr lang="en-US" sz="1050" dirty="0">
+                <a:solidFill>
+                  <a:srgbClr val="222222"/>
+                </a:solidFill>
+                <a:latin typeface="Calibri" pitchFamily="34" charset="0"/>
+                <a:ea typeface="Calibri" pitchFamily="34" charset="-122"/>
+                <a:cs typeface="Calibri" pitchFamily="34" charset="-120"/>
+              </a:rPr>
+              <a:t>続けて何人も対応するときは、この方法が速いです。アプリを切り替える必要がありません。</a:t>
+            </a:r>
+            <a:endParaRPr lang="en-US" sz="1050" dirty="0"/>
+          </a:p>
+        </p:txBody>
+      </p:sp>
+      <p:sp>
+        <p:nvSpPr>
+          <p:cNvPr id="21" name="Text 19"/>
+          <p:cNvSpPr txBox="1"/>
+          <p:nvPr/>
+        </p:nvSpPr>
+        <p:spPr>
+          <a:xfrm>
+            <a:off x="566928" y="4658805"/>
+            <a:ext cx="6428232" cy="257810"/>
+          </a:xfrm>
+          <a:prstGeom prst="rect">
+            <a:avLst/>
+          </a:prstGeom>
+          <a:noFill/>
+          <a:ln/>
+        </p:spPr>
+        <p:txBody>
+          <a:bodyPr wrap="square" lIns="0" tIns="0" rIns="0" bIns="0" rtlCol="0" anchor="t"/>
+          <a:lstStyle/>
+          <a:p>
+            <a:pPr indent="0" marL="0">
+              <a:buNone/>
+            </a:pPr>
+            <a:r>
+              <a:rPr lang="en-US" sz="1400" b="1" dirty="0">
+                <a:solidFill>
+                  <a:srgbClr val="B85042"/>
+                </a:solidFill>
+                <a:latin typeface="Calibri" pitchFamily="34" charset="0"/>
+                <a:ea typeface="Calibri" pitchFamily="34" charset="-122"/>
+                <a:cs typeface="Calibri" pitchFamily="34" charset="-120"/>
+              </a:rPr>
+              <a:t>方法B：スマートフォンの標準カメラで読み取る</a:t>
+            </a:r>
+            <a:endParaRPr lang="en-US" sz="1400" dirty="0"/>
+          </a:p>
+        </p:txBody>
+      </p:sp>
+      <p:sp>
+        <p:nvSpPr>
+          <p:cNvPr id="22" name="Shape 20"/>
+          <p:cNvSpPr/>
+          <p:nvPr/>
+        </p:nvSpPr>
+        <p:spPr>
+          <a:xfrm>
+            <a:off x="566928" y="5008055"/>
+            <a:ext cx="274320" cy="274320"/>
+          </a:xfrm>
+          <a:prstGeom prst="ellipse">
+            <a:avLst/>
+          </a:prstGeom>
+          <a:solidFill>
+            <a:srgbClr val="B85042"/>
+          </a:solidFill>
+          <a:ln/>
+        </p:spPr>
+      </p:sp>
+      <p:sp>
+        <p:nvSpPr>
+          <p:cNvPr id="23" name="Text 21"/>
+          <p:cNvSpPr txBox="1"/>
+          <p:nvPr/>
+        </p:nvSpPr>
+        <p:spPr>
+          <a:xfrm>
+            <a:off x="566928" y="5008055"/>
+            <a:ext cx="274320" cy="274320"/>
+          </a:xfrm>
+          <a:prstGeom prst="rect">
+            <a:avLst/>
+          </a:prstGeom>
+          <a:noFill/>
+          <a:ln/>
+        </p:spPr>
+        <p:txBody>
+          <a:bodyPr wrap="square" lIns="0" tIns="0" rIns="0" bIns="0" rtlCol="0" anchor="ctr"/>
+          <a:lstStyle/>
+          <a:p>
+            <a:pPr algn="ctr" indent="0" marL="0">
+              <a:buNone/>
+            </a:pPr>
+            <a:r>
+              <a:rPr lang="en-US" sz="1100" b="1" dirty="0">
+                <a:solidFill>
+                  <a:srgbClr val="FFFFFF"/>
+                </a:solidFill>
+                <a:latin typeface="Calibri" pitchFamily="34" charset="0"/>
+                <a:ea typeface="Calibri" pitchFamily="34" charset="-122"/>
+                <a:cs typeface="Calibri" pitchFamily="34" charset="-120"/>
+              </a:rPr>
+              <a:t>1</a:t>
+            </a:r>
+            <a:endParaRPr lang="en-US" sz="1100" dirty="0"/>
+          </a:p>
+        </p:txBody>
+      </p:sp>
+      <p:sp>
+        <p:nvSpPr>
+          <p:cNvPr id="24" name="Text 22"/>
+          <p:cNvSpPr txBox="1"/>
+          <p:nvPr/>
+        </p:nvSpPr>
+        <p:spPr>
+          <a:xfrm>
+            <a:off x="969264" y="4989767"/>
+            <a:ext cx="6025896" cy="365760"/>
+          </a:xfrm>
+          <a:prstGeom prst="rect">
+            <a:avLst/>
+          </a:prstGeom>
+          <a:noFill/>
+          <a:ln/>
+        </p:spPr>
+        <p:txBody>
+          <a:bodyPr wrap="square" lIns="0" tIns="0" rIns="0" bIns="0" rtlCol="0" anchor="t"/>
+          <a:lstStyle/>
+          <a:p>
+            <a:pPr indent="0" marL="0">
+              <a:lnSpc>
+                <a:spcPct val="125000"/>
+              </a:lnSpc>
+              <a:buNone/>
+            </a:pPr>
+            <a:r>
+              <a:rPr lang="en-US" sz="1150" dirty="0">
+                <a:solidFill>
+                  <a:srgbClr val="222222"/>
+                </a:solidFill>
+                <a:latin typeface="Calibri" pitchFamily="34" charset="0"/>
+                <a:ea typeface="Calibri" pitchFamily="34" charset="-122"/>
+                <a:cs typeface="Calibri" pitchFamily="34" charset="-120"/>
+              </a:rPr>
+              <a:t>カメラアプリを開いて、来場者のQRコードに向ける</a:t>
+            </a:r>
+            <a:endParaRPr lang="en-US" sz="1150" dirty="0"/>
+          </a:p>
+        </p:txBody>
+      </p:sp>
+      <p:sp>
+        <p:nvSpPr>
+          <p:cNvPr id="25" name="Shape 23"/>
+          <p:cNvSpPr/>
+          <p:nvPr/>
+        </p:nvSpPr>
+        <p:spPr>
+          <a:xfrm>
+            <a:off x="566928" y="5465255"/>
+            <a:ext cx="274320" cy="274320"/>
+          </a:xfrm>
+          <a:prstGeom prst="ellipse">
+            <a:avLst/>
+          </a:prstGeom>
+          <a:solidFill>
+            <a:srgbClr val="B85042"/>
+          </a:solidFill>
+          <a:ln/>
+        </p:spPr>
+      </p:sp>
+      <p:sp>
+        <p:nvSpPr>
+          <p:cNvPr id="26" name="Text 24"/>
+          <p:cNvSpPr txBox="1"/>
+          <p:nvPr/>
+        </p:nvSpPr>
+        <p:spPr>
+          <a:xfrm>
+            <a:off x="566928" y="5465255"/>
+            <a:ext cx="274320" cy="274320"/>
+          </a:xfrm>
+          <a:prstGeom prst="rect">
+            <a:avLst/>
+          </a:prstGeom>
+          <a:noFill/>
+          <a:ln/>
+        </p:spPr>
+        <p:txBody>
+          <a:bodyPr wrap="square" lIns="0" tIns="0" rIns="0" bIns="0" rtlCol="0" anchor="ctr"/>
+          <a:lstStyle/>
+          <a:p>
+            <a:pPr algn="ctr" indent="0" marL="0">
+              <a:buNone/>
+            </a:pPr>
+            <a:r>
+              <a:rPr lang="en-US" sz="1100" b="1" dirty="0">
+                <a:solidFill>
+                  <a:srgbClr val="FFFFFF"/>
+                </a:solidFill>
+                <a:latin typeface="Calibri" pitchFamily="34" charset="0"/>
+                <a:ea typeface="Calibri" pitchFamily="34" charset="-122"/>
+                <a:cs typeface="Calibri" pitchFamily="34" charset="-120"/>
+              </a:rPr>
+              <a:t>2</a:t>
+            </a:r>
+            <a:endParaRPr lang="en-US" sz="1100" dirty="0"/>
+          </a:p>
+        </p:txBody>
+      </p:sp>
+      <p:sp>
+        <p:nvSpPr>
+          <p:cNvPr id="27" name="Text 25"/>
+          <p:cNvSpPr txBox="1"/>
+          <p:nvPr/>
+        </p:nvSpPr>
+        <p:spPr>
+          <a:xfrm>
+            <a:off x="969264" y="5446967"/>
+            <a:ext cx="6025896" cy="365760"/>
+          </a:xfrm>
+          <a:prstGeom prst="rect">
+            <a:avLst/>
+          </a:prstGeom>
+          <a:noFill/>
+          <a:ln/>
+        </p:spPr>
+        <p:txBody>
+          <a:bodyPr wrap="square" lIns="0" tIns="0" rIns="0" bIns="0" rtlCol="0" anchor="t"/>
+          <a:lstStyle/>
+          <a:p>
+            <a:pPr indent="0" marL="0">
+              <a:lnSpc>
+                <a:spcPct val="125000"/>
+              </a:lnSpc>
+              <a:buNone/>
+            </a:pPr>
+            <a:r>
+              <a:rPr lang="en-US" sz="1150" dirty="0">
+                <a:solidFill>
+                  <a:srgbClr val="222222"/>
+                </a:solidFill>
+                <a:latin typeface="Calibri" pitchFamily="34" charset="0"/>
+                <a:ea typeface="Calibri" pitchFamily="34" charset="-122"/>
+                <a:cs typeface="Calibri" pitchFamily="34" charset="-120"/>
+              </a:rPr>
+              <a:t>画面に出たリンクを押す</a:t>
+            </a:r>
+            <a:endParaRPr lang="en-US" sz="1150" dirty="0"/>
+          </a:p>
+        </p:txBody>
+      </p:sp>
+      <p:sp>
+        <p:nvSpPr>
+          <p:cNvPr id="28" name="Shape 26"/>
+          <p:cNvSpPr/>
+          <p:nvPr/>
+        </p:nvSpPr>
+        <p:spPr>
+          <a:xfrm>
+            <a:off x="566928" y="5922455"/>
+            <a:ext cx="274320" cy="274320"/>
+          </a:xfrm>
+          <a:prstGeom prst="ellipse">
+            <a:avLst/>
+          </a:prstGeom>
+          <a:solidFill>
+            <a:srgbClr val="B85042"/>
+          </a:solidFill>
+          <a:ln/>
+        </p:spPr>
+      </p:sp>
+      <p:sp>
+        <p:nvSpPr>
+          <p:cNvPr id="29" name="Text 27"/>
+          <p:cNvSpPr txBox="1"/>
+          <p:nvPr/>
+        </p:nvSpPr>
+        <p:spPr>
+          <a:xfrm>
+            <a:off x="566928" y="5922455"/>
+            <a:ext cx="274320" cy="274320"/>
+          </a:xfrm>
+          <a:prstGeom prst="rect">
+            <a:avLst/>
+          </a:prstGeom>
+          <a:noFill/>
+          <a:ln/>
+        </p:spPr>
+        <p:txBody>
+          <a:bodyPr wrap="square" lIns="0" tIns="0" rIns="0" bIns="0" rtlCol="0" anchor="ctr"/>
+          <a:lstStyle/>
+          <a:p>
+            <a:pPr algn="ctr" indent="0" marL="0">
+              <a:buNone/>
+            </a:pPr>
+            <a:r>
+              <a:rPr lang="en-US" sz="1100" b="1" dirty="0">
+                <a:solidFill>
+                  <a:srgbClr val="FFFFFF"/>
+                </a:solidFill>
+                <a:latin typeface="Calibri" pitchFamily="34" charset="0"/>
+                <a:ea typeface="Calibri" pitchFamily="34" charset="-122"/>
+                <a:cs typeface="Calibri" pitchFamily="34" charset="-120"/>
+              </a:rPr>
+              <a:t>3</a:t>
+            </a:r>
+            <a:endParaRPr lang="en-US" sz="1100" dirty="0"/>
+          </a:p>
+        </p:txBody>
+      </p:sp>
+      <p:sp>
+        <p:nvSpPr>
+          <p:cNvPr id="30" name="Text 28"/>
+          <p:cNvSpPr txBox="1"/>
+          <p:nvPr/>
+        </p:nvSpPr>
+        <p:spPr>
+          <a:xfrm>
+            <a:off x="969264" y="5904167"/>
+            <a:ext cx="6025896" cy="365760"/>
+          </a:xfrm>
+          <a:prstGeom prst="rect">
+            <a:avLst/>
+          </a:prstGeom>
+          <a:noFill/>
+          <a:ln/>
+        </p:spPr>
+        <p:txBody>
+          <a:bodyPr wrap="square" lIns="0" tIns="0" rIns="0" bIns="0" rtlCol="0" anchor="t"/>
+          <a:lstStyle/>
+          <a:p>
+            <a:pPr indent="0" marL="0">
+              <a:lnSpc>
+                <a:spcPct val="125000"/>
+              </a:lnSpc>
+              <a:buNone/>
+            </a:pPr>
+            <a:r>
+              <a:rPr lang="en-US" sz="1150" dirty="0">
+                <a:solidFill>
+                  <a:srgbClr val="222222"/>
+                </a:solidFill>
+                <a:latin typeface="Calibri" pitchFamily="34" charset="0"/>
+                <a:ea typeface="Calibri" pitchFamily="34" charset="-122"/>
+                <a:cs typeface="Calibri" pitchFamily="34" charset="-120"/>
+              </a:rPr>
+              <a:t>照会結果の画面が開く</a:t>
+            </a:r>
+            <a:endParaRPr lang="en-US" sz="1150" dirty="0"/>
+          </a:p>
+        </p:txBody>
+      </p:sp>
+      <p:sp>
+        <p:nvSpPr>
+          <p:cNvPr id="31" name="Shape 29"/>
+          <p:cNvSpPr/>
+          <p:nvPr/>
+        </p:nvSpPr>
+        <p:spPr>
+          <a:xfrm>
+            <a:off x="566928" y="6361367"/>
+            <a:ext cx="6428232" cy="624459"/>
+          </a:xfrm>
+          <a:prstGeom prst="roundRect">
+            <a:avLst>
+              <a:gd name="adj" fmla="val 8786"/>
+            </a:avLst>
+          </a:prstGeom>
+          <a:solidFill>
+            <a:srgbClr val="FDF0E6"/>
+          </a:solidFill>
+          <a:ln w="9525">
+            <a:solidFill>
+              <a:srgbClr val="E08A3C"/>
+            </a:solidFill>
+            <a:prstDash val="solid"/>
+          </a:ln>
+        </p:spPr>
+      </p:sp>
+      <p:sp>
+        <p:nvSpPr>
+          <p:cNvPr id="32" name="Text 30"/>
+          <p:cNvSpPr txBox="1"/>
+          <p:nvPr/>
+        </p:nvSpPr>
+        <p:spPr>
+          <a:xfrm>
+            <a:off x="658368" y="6452807"/>
+            <a:ext cx="237744" cy="237744"/>
+          </a:xfrm>
+          <a:prstGeom prst="rect">
+            <a:avLst/>
+          </a:prstGeom>
+          <a:noFill/>
+          <a:ln/>
+        </p:spPr>
+        <p:txBody>
+          <a:bodyPr wrap="square" lIns="0" tIns="0" rIns="0" bIns="0" rtlCol="0" anchor="ctr"/>
+          <a:lstStyle/>
+          <a:p>
+            <a:pPr algn="ctr" indent="0" marL="0">
+              <a:buNone/>
+            </a:pPr>
+            <a:r>
+              <a:rPr lang="en-US" sz="1200" b="1" dirty="0">
+                <a:solidFill>
+                  <a:srgbClr val="C25A17"/>
+                </a:solidFill>
+                <a:latin typeface="Calibri" pitchFamily="34" charset="0"/>
+                <a:ea typeface="Calibri" pitchFamily="34" charset="-122"/>
+                <a:cs typeface="Calibri" pitchFamily="34" charset="-120"/>
+              </a:rPr>
+              <a:t>！</a:t>
+            </a:r>
+            <a:endParaRPr lang="en-US" sz="1200" dirty="0"/>
+          </a:p>
+        </p:txBody>
+      </p:sp>
+      <p:sp>
+        <p:nvSpPr>
+          <p:cNvPr id="33" name="Text 31"/>
+          <p:cNvSpPr txBox="1"/>
+          <p:nvPr/>
+        </p:nvSpPr>
+        <p:spPr>
+          <a:xfrm>
+            <a:off x="950976" y="6471095"/>
+            <a:ext cx="5925312" cy="441579"/>
+          </a:xfrm>
+          <a:prstGeom prst="rect">
+            <a:avLst/>
+          </a:prstGeom>
+          <a:noFill/>
+          <a:ln/>
+        </p:spPr>
+        <p:txBody>
+          <a:bodyPr wrap="square" lIns="0" tIns="0" rIns="0" bIns="0" rtlCol="0" anchor="t"/>
+          <a:lstStyle/>
+          <a:p>
+            <a:pPr indent="0" marL="0">
+              <a:lnSpc>
+                <a:spcPct val="120000"/>
+              </a:lnSpc>
+              <a:buNone/>
+            </a:pPr>
+            <a:r>
+              <a:rPr lang="en-US" sz="1050" dirty="0">
+                <a:solidFill>
+                  <a:srgbClr val="222222"/>
+                </a:solidFill>
+                <a:latin typeface="Calibri" pitchFamily="34" charset="0"/>
+                <a:ea typeface="Calibri" pitchFamily="34" charset="-122"/>
+                <a:cs typeface="Calibri" pitchFamily="34" charset="-120"/>
+              </a:rPr>
+              <a:t>「ログインが必要です」と表示されたときは、そのスマートフォンがログアウトしています。画面のリンクからログインし直してください。</a:t>
+            </a:r>
+            <a:endParaRPr lang="en-US" sz="1050" dirty="0"/>
+          </a:p>
+        </p:txBody>
+      </p:sp>
+      <p:sp>
+        <p:nvSpPr>
+          <p:cNvPr id="34" name="Text 32"/>
           <p:cNvSpPr txBox="1"/>
           <p:nvPr/>
         </p:nvSpPr>
@@ -4939,537 +6286,15 @@
                 <a:ea typeface="Calibri" pitchFamily="34" charset="-122"/>
                 <a:cs typeface="Calibri" pitchFamily="34" charset="-120"/>
               </a:rPr>
-              <a:t>手順2：画面を確認して景品を選ぶ</a:t>
+              <a:t>手順1：QRコードを読み取る（つづき）</a:t>
             </a:r>
             <a:endParaRPr lang="en-US" sz="2200" dirty="0"/>
-          </a:p>
-        </p:txBody>
-      </p:sp>
-      <p:sp>
-        <p:nvSpPr>
-          <p:cNvPr id="4" name="Text 2"/>
-          <p:cNvSpPr txBox="1"/>
-          <p:nvPr/>
-        </p:nvSpPr>
-        <p:spPr>
-          <a:xfrm>
-            <a:off x="566928" y="1481328"/>
-            <a:ext cx="6428232" cy="257429"/>
-          </a:xfrm>
-          <a:prstGeom prst="rect">
-            <a:avLst/>
-          </a:prstGeom>
-          <a:noFill/>
-          <a:ln/>
-        </p:spPr>
-        <p:txBody>
-          <a:bodyPr wrap="square" lIns="0" tIns="0" rIns="0" bIns="0" rtlCol="0" anchor="t"/>
-          <a:lstStyle/>
-          <a:p>
-            <a:pPr indent="0" marL="0">
-              <a:lnSpc>
-                <a:spcPct val="125000"/>
-              </a:lnSpc>
-              <a:buNone/>
-            </a:pPr>
-            <a:r>
-              <a:rPr lang="en-US" sz="1100" dirty="0">
-                <a:solidFill>
-                  <a:srgbClr val="222222"/>
-                </a:solidFill>
-                <a:latin typeface="Calibri" pitchFamily="34" charset="0"/>
-                <a:ea typeface="Calibri" pitchFamily="34" charset="-122"/>
-                <a:cs typeface="Calibri" pitchFamily="34" charset="-120"/>
-              </a:rPr>
-              <a:t>読み取ると、交換コードと状態が表示されます。</a:t>
-            </a:r>
-            <a:endParaRPr lang="en-US" sz="1100" dirty="0"/>
-          </a:p>
-        </p:txBody>
-      </p:sp>
-      <p:sp>
-        <p:nvSpPr>
-          <p:cNvPr id="5" name="Text 3"/>
-          <p:cNvSpPr txBox="1"/>
-          <p:nvPr/>
-        </p:nvSpPr>
-        <p:spPr>
-          <a:xfrm>
-            <a:off x="566928" y="1885061"/>
-            <a:ext cx="6428232" cy="257810"/>
-          </a:xfrm>
-          <a:prstGeom prst="rect">
-            <a:avLst/>
-          </a:prstGeom>
-          <a:noFill/>
-          <a:ln/>
-        </p:spPr>
-        <p:txBody>
-          <a:bodyPr wrap="square" lIns="0" tIns="0" rIns="0" bIns="0" rtlCol="0" anchor="t"/>
-          <a:lstStyle/>
-          <a:p>
-            <a:pPr indent="0" marL="0">
-              <a:buNone/>
-            </a:pPr>
-            <a:r>
-              <a:rPr lang="en-US" sz="1400" b="1" dirty="0">
-                <a:solidFill>
-                  <a:srgbClr val="B85042"/>
-                </a:solidFill>
-                <a:latin typeface="Calibri" pitchFamily="34" charset="0"/>
-                <a:ea typeface="Calibri" pitchFamily="34" charset="-122"/>
-                <a:cs typeface="Calibri" pitchFamily="34" charset="-120"/>
-              </a:rPr>
-              <a:t>「未交換です」と出た場合</a:t>
-            </a:r>
-            <a:endParaRPr lang="en-US" sz="1400" dirty="0"/>
-          </a:p>
-        </p:txBody>
-      </p:sp>
-      <p:sp>
-        <p:nvSpPr>
-          <p:cNvPr id="6" name="Text 4"/>
-          <p:cNvSpPr txBox="1"/>
-          <p:nvPr/>
-        </p:nvSpPr>
-        <p:spPr>
-          <a:xfrm>
-            <a:off x="566928" y="2216023"/>
-            <a:ext cx="6428232" cy="257429"/>
-          </a:xfrm>
-          <a:prstGeom prst="rect">
-            <a:avLst/>
-          </a:prstGeom>
-          <a:noFill/>
-          <a:ln/>
-        </p:spPr>
-        <p:txBody>
-          <a:bodyPr wrap="square" lIns="0" tIns="0" rIns="0" bIns="0" rtlCol="0" anchor="t"/>
-          <a:lstStyle/>
-          <a:p>
-            <a:pPr indent="0" marL="0">
-              <a:lnSpc>
-                <a:spcPct val="125000"/>
-              </a:lnSpc>
-              <a:buNone/>
-            </a:pPr>
-            <a:r>
-              <a:rPr lang="en-US" sz="1100" dirty="0">
-                <a:solidFill>
-                  <a:srgbClr val="222222"/>
-                </a:solidFill>
-                <a:latin typeface="Calibri" pitchFamily="34" charset="0"/>
-                <a:ea typeface="Calibri" pitchFamily="34" charset="-122"/>
-                <a:cs typeface="Calibri" pitchFamily="34" charset="-120"/>
-              </a:rPr>
-              <a:t>そのままお渡しできます。</a:t>
-            </a:r>
-            <a:pPr indent="0" marL="0">
-              <a:lnSpc>
-                <a:spcPct val="125000"/>
-              </a:lnSpc>
-              <a:buNone/>
-            </a:pPr>
-            <a:r>
-              <a:rPr lang="en-US" sz="1100" b="1" dirty="0">
-                <a:solidFill>
-                  <a:srgbClr val="222222"/>
-                </a:solidFill>
-                <a:latin typeface="Calibri" pitchFamily="34" charset="0"/>
-                <a:ea typeface="Calibri" pitchFamily="34" charset="-122"/>
-                <a:cs typeface="Calibri" pitchFamily="34" charset="-120"/>
-              </a:rPr>
-              <a:t>渡す景品を選んで</a:t>
-            </a:r>
-            <a:pPr indent="0" marL="0">
-              <a:lnSpc>
-                <a:spcPct val="125000"/>
-              </a:lnSpc>
-              <a:buNone/>
-            </a:pPr>
-            <a:r>
-              <a:rPr lang="en-US" sz="1100" dirty="0">
-                <a:solidFill>
-                  <a:srgbClr val="222222"/>
-                </a:solidFill>
-                <a:latin typeface="Calibri" pitchFamily="34" charset="0"/>
-                <a:ea typeface="Calibri" pitchFamily="34" charset="-122"/>
-                <a:cs typeface="Calibri" pitchFamily="34" charset="-120"/>
-              </a:rPr>
-              <a:t>ください。選択肢には残りの数が出ています。</a:t>
-            </a:r>
-            <a:endParaRPr lang="en-US" sz="1100" dirty="0"/>
-          </a:p>
-        </p:txBody>
-      </p:sp>
-      <p:sp>
-        <p:nvSpPr>
-          <p:cNvPr id="7" name="Text 5"/>
-          <p:cNvSpPr txBox="1"/>
-          <p:nvPr/>
-        </p:nvSpPr>
-        <p:spPr>
-          <a:xfrm>
-            <a:off x="566928" y="2619756"/>
-            <a:ext cx="6428232" cy="257810"/>
-          </a:xfrm>
-          <a:prstGeom prst="rect">
-            <a:avLst/>
-          </a:prstGeom>
-          <a:noFill/>
-          <a:ln/>
-        </p:spPr>
-        <p:txBody>
-          <a:bodyPr wrap="square" lIns="0" tIns="0" rIns="0" bIns="0" rtlCol="0" anchor="t"/>
-          <a:lstStyle/>
-          <a:p>
-            <a:pPr indent="0" marL="0">
-              <a:buNone/>
-            </a:pPr>
-            <a:r>
-              <a:rPr lang="en-US" sz="1400" b="1" dirty="0">
-                <a:solidFill>
-                  <a:srgbClr val="B85042"/>
-                </a:solidFill>
-                <a:latin typeface="Calibri" pitchFamily="34" charset="0"/>
-                <a:ea typeface="Calibri" pitchFamily="34" charset="-122"/>
-                <a:cs typeface="Calibri" pitchFamily="34" charset="-120"/>
-              </a:rPr>
-              <a:t>「交換済み（日時）」と出た場合</a:t>
-            </a:r>
-            <a:endParaRPr lang="en-US" sz="1400" dirty="0"/>
-          </a:p>
-        </p:txBody>
-      </p:sp>
-      <p:sp>
-        <p:nvSpPr>
-          <p:cNvPr id="8" name="Text 6"/>
-          <p:cNvSpPr txBox="1"/>
-          <p:nvPr/>
-        </p:nvSpPr>
-        <p:spPr>
-          <a:xfrm>
-            <a:off x="566928" y="2950718"/>
-            <a:ext cx="6428232" cy="662559"/>
-          </a:xfrm>
-          <a:prstGeom prst="rect">
-            <a:avLst/>
-          </a:prstGeom>
-          <a:noFill/>
-          <a:ln/>
-        </p:spPr>
-        <p:txBody>
-          <a:bodyPr wrap="square" lIns="0" tIns="0" rIns="0" bIns="0" rtlCol="0" anchor="t"/>
-          <a:lstStyle/>
-          <a:p>
-            <a:pPr indent="0" marL="0">
-              <a:lnSpc>
-                <a:spcPct val="125000"/>
-              </a:lnSpc>
-              <a:buNone/>
-            </a:pPr>
-            <a:r>
-              <a:rPr lang="en-US" sz="1100" dirty="0">
-                <a:solidFill>
-                  <a:srgbClr val="222222"/>
-                </a:solidFill>
-                <a:latin typeface="Calibri" pitchFamily="34" charset="0"/>
-                <a:ea typeface="Calibri" pitchFamily="34" charset="-122"/>
-                <a:cs typeface="Calibri" pitchFamily="34" charset="-120"/>
-              </a:rPr>
-              <a:t>すでにお渡しした記録があります。</a:t>
-            </a:r>
-            <a:pPr indent="0" marL="0">
-              <a:lnSpc>
-                <a:spcPct val="125000"/>
-              </a:lnSpc>
-              <a:buNone/>
-            </a:pPr>
-            <a:r>
-              <a:rPr lang="en-US" sz="1100" b="1" dirty="0">
-                <a:solidFill>
-                  <a:srgbClr val="222222"/>
-                </a:solidFill>
-                <a:latin typeface="Calibri" pitchFamily="34" charset="0"/>
-                <a:ea typeface="Calibri" pitchFamily="34" charset="-122"/>
-                <a:cs typeface="Calibri" pitchFamily="34" charset="-120"/>
-              </a:rPr>
-              <a:t>来場者にはその旨を表示していません。</a:t>
-            </a:r>
-            <a:pPr indent="0" marL="0">
-              <a:lnSpc>
-                <a:spcPct val="125000"/>
-              </a:lnSpc>
-              <a:buNone/>
-            </a:pPr>
-            <a:r>
-              <a:rPr lang="en-US" sz="1100" dirty="0">
-                <a:solidFill>
-                  <a:srgbClr val="222222"/>
-                </a:solidFill>
-                <a:latin typeface="Calibri" pitchFamily="34" charset="0"/>
-                <a:ea typeface="Calibri" pitchFamily="34" charset="-122"/>
-                <a:cs typeface="Calibri" pitchFamily="34" charset="-120"/>
-              </a:rPr>
-              <a:t>「もう1回まわった」「まだもらっていない」などお申し出があれば、</a:t>
-            </a:r>
-            <a:pPr indent="0" marL="0">
-              <a:lnSpc>
-                <a:spcPct val="125000"/>
-              </a:lnSpc>
-              <a:buNone/>
-            </a:pPr>
-            <a:r>
-              <a:rPr lang="en-US" sz="1100" b="1" dirty="0">
-                <a:solidFill>
-                  <a:srgbClr val="222222"/>
-                </a:solidFill>
-                <a:latin typeface="Calibri" pitchFamily="34" charset="0"/>
-                <a:ea typeface="Calibri" pitchFamily="34" charset="-122"/>
-                <a:cs typeface="Calibri" pitchFamily="34" charset="-120"/>
-              </a:rPr>
-              <a:t>お渡しして構いません</a:t>
-            </a:r>
-            <a:pPr indent="0" marL="0">
-              <a:lnSpc>
-                <a:spcPct val="125000"/>
-              </a:lnSpc>
-              <a:buNone/>
-            </a:pPr>
-            <a:r>
-              <a:rPr lang="en-US" sz="1100" dirty="0">
-                <a:solidFill>
-                  <a:srgbClr val="222222"/>
-                </a:solidFill>
-                <a:latin typeface="Calibri" pitchFamily="34" charset="0"/>
-                <a:ea typeface="Calibri" pitchFamily="34" charset="-122"/>
-                <a:cs typeface="Calibri" pitchFamily="34" charset="-120"/>
-              </a:rPr>
-              <a:t>。判断に迷う場合は事務局にご確認ください。</a:t>
-            </a:r>
-            <a:endParaRPr lang="en-US" sz="1100" dirty="0"/>
-          </a:p>
-        </p:txBody>
-      </p:sp>
-      <p:sp>
-        <p:nvSpPr>
-          <p:cNvPr id="9" name="Shape 7"/>
-          <p:cNvSpPr/>
-          <p:nvPr/>
-        </p:nvSpPr>
-        <p:spPr>
-          <a:xfrm>
-            <a:off x="566928" y="3649853"/>
-            <a:ext cx="6428232" cy="431102"/>
-          </a:xfrm>
-          <a:prstGeom prst="roundRect">
-            <a:avLst>
-              <a:gd name="adj" fmla="val 12726"/>
-            </a:avLst>
-          </a:prstGeom>
-          <a:solidFill>
-            <a:srgbClr val="FAEAE7"/>
-          </a:solidFill>
-          <a:ln w="9525">
-            <a:solidFill>
-              <a:srgbClr val="B85042"/>
-            </a:solidFill>
-            <a:prstDash val="solid"/>
-          </a:ln>
-        </p:spPr>
-      </p:sp>
-      <p:sp>
-        <p:nvSpPr>
-          <p:cNvPr id="10" name="Text 8"/>
-          <p:cNvSpPr txBox="1"/>
-          <p:nvPr/>
-        </p:nvSpPr>
-        <p:spPr>
-          <a:xfrm>
-            <a:off x="658368" y="3741293"/>
-            <a:ext cx="237744" cy="237744"/>
-          </a:xfrm>
-          <a:prstGeom prst="rect">
-            <a:avLst/>
-          </a:prstGeom>
-          <a:noFill/>
-          <a:ln/>
-        </p:spPr>
-        <p:txBody>
-          <a:bodyPr wrap="square" lIns="0" tIns="0" rIns="0" bIns="0" rtlCol="0" anchor="ctr"/>
-          <a:lstStyle/>
-          <a:p>
-            <a:pPr algn="ctr" indent="0" marL="0">
-              <a:buNone/>
-            </a:pPr>
-            <a:r>
-              <a:rPr lang="en-US" sz="1200" b="1" dirty="0">
-                <a:solidFill>
-                  <a:srgbClr val="B85042"/>
-                </a:solidFill>
-                <a:latin typeface="Calibri" pitchFamily="34" charset="0"/>
-                <a:ea typeface="Calibri" pitchFamily="34" charset="-122"/>
-                <a:cs typeface="Calibri" pitchFamily="34" charset="-120"/>
-              </a:rPr>
-              <a:t>i</a:t>
-            </a:r>
-            <a:endParaRPr lang="en-US" sz="1200" dirty="0"/>
-          </a:p>
-        </p:txBody>
-      </p:sp>
-      <p:sp>
-        <p:nvSpPr>
-          <p:cNvPr id="11" name="Text 9"/>
-          <p:cNvSpPr txBox="1"/>
-          <p:nvPr/>
-        </p:nvSpPr>
-        <p:spPr>
-          <a:xfrm>
-            <a:off x="950976" y="3759581"/>
-            <a:ext cx="5925312" cy="248221"/>
-          </a:xfrm>
-          <a:prstGeom prst="rect">
-            <a:avLst/>
-          </a:prstGeom>
-          <a:noFill/>
-          <a:ln/>
-        </p:spPr>
-        <p:txBody>
-          <a:bodyPr wrap="square" lIns="0" tIns="0" rIns="0" bIns="0" rtlCol="0" anchor="t"/>
-          <a:lstStyle/>
-          <a:p>
-            <a:pPr indent="0" marL="0">
-              <a:lnSpc>
-                <a:spcPct val="120000"/>
-              </a:lnSpc>
-              <a:buNone/>
-            </a:pPr>
-            <a:r>
-              <a:rPr lang="en-US" sz="1050" dirty="0">
-                <a:solidFill>
-                  <a:srgbClr val="222222"/>
-                </a:solidFill>
-                <a:latin typeface="Calibri" pitchFamily="34" charset="0"/>
-                <a:ea typeface="Calibri" pitchFamily="34" charset="-122"/>
-                <a:cs typeface="Calibri" pitchFamily="34" charset="-120"/>
-              </a:rPr>
-              <a:t>画面には、その方が回答したブースの数も出ます。目安としてご覧ください。</a:t>
-            </a:r>
-            <a:endParaRPr lang="en-US" sz="1050" dirty="0"/>
-          </a:p>
-        </p:txBody>
-      </p:sp>
-      <p:sp>
-        <p:nvSpPr>
-          <p:cNvPr id="12" name="Shape 10"/>
-          <p:cNvSpPr/>
-          <p:nvPr/>
-        </p:nvSpPr>
-        <p:spPr>
-          <a:xfrm>
-            <a:off x="566928" y="4154107"/>
-            <a:ext cx="6428232" cy="624459"/>
-          </a:xfrm>
-          <a:prstGeom prst="roundRect">
-            <a:avLst>
-              <a:gd name="adj" fmla="val 8786"/>
-            </a:avLst>
-          </a:prstGeom>
-          <a:solidFill>
-            <a:srgbClr val="FDF0E6"/>
-          </a:solidFill>
-          <a:ln w="9525">
-            <a:solidFill>
-              <a:srgbClr val="E08A3C"/>
-            </a:solidFill>
-            <a:prstDash val="solid"/>
-          </a:ln>
-        </p:spPr>
-      </p:sp>
-      <p:sp>
-        <p:nvSpPr>
-          <p:cNvPr id="13" name="Text 11"/>
-          <p:cNvSpPr txBox="1"/>
-          <p:nvPr/>
-        </p:nvSpPr>
-        <p:spPr>
-          <a:xfrm>
-            <a:off x="658368" y="4245547"/>
-            <a:ext cx="237744" cy="237744"/>
-          </a:xfrm>
-          <a:prstGeom prst="rect">
-            <a:avLst/>
-          </a:prstGeom>
-          <a:noFill/>
-          <a:ln/>
-        </p:spPr>
-        <p:txBody>
-          <a:bodyPr wrap="square" lIns="0" tIns="0" rIns="0" bIns="0" rtlCol="0" anchor="ctr"/>
-          <a:lstStyle/>
-          <a:p>
-            <a:pPr algn="ctr" indent="0" marL="0">
-              <a:buNone/>
-            </a:pPr>
-            <a:r>
-              <a:rPr lang="en-US" sz="1200" b="1" dirty="0">
-                <a:solidFill>
-                  <a:srgbClr val="C25A17"/>
-                </a:solidFill>
-                <a:latin typeface="Calibri" pitchFamily="34" charset="0"/>
-                <a:ea typeface="Calibri" pitchFamily="34" charset="-122"/>
-                <a:cs typeface="Calibri" pitchFamily="34" charset="-120"/>
-              </a:rPr>
-              <a:t>！</a:t>
-            </a:r>
-            <a:endParaRPr lang="en-US" sz="1200" dirty="0"/>
-          </a:p>
-        </p:txBody>
-      </p:sp>
-      <p:sp>
-        <p:nvSpPr>
-          <p:cNvPr id="14" name="Text 12"/>
-          <p:cNvSpPr txBox="1"/>
-          <p:nvPr/>
-        </p:nvSpPr>
-        <p:spPr>
-          <a:xfrm>
-            <a:off x="950976" y="4263835"/>
-            <a:ext cx="5925312" cy="441579"/>
-          </a:xfrm>
-          <a:prstGeom prst="rect">
-            <a:avLst/>
-          </a:prstGeom>
-          <a:noFill/>
-          <a:ln/>
-        </p:spPr>
-        <p:txBody>
-          <a:bodyPr wrap="square" lIns="0" tIns="0" rIns="0" bIns="0" rtlCol="0" anchor="t"/>
-          <a:lstStyle/>
-          <a:p>
-            <a:pPr indent="0" marL="0">
-              <a:lnSpc>
-                <a:spcPct val="120000"/>
-              </a:lnSpc>
-              <a:buNone/>
-            </a:pPr>
-            <a:r>
-              <a:rPr lang="en-US" sz="1050" dirty="0">
-                <a:solidFill>
-                  <a:srgbClr val="222222"/>
-                </a:solidFill>
-                <a:latin typeface="Calibri" pitchFamily="34" charset="0"/>
-                <a:ea typeface="Calibri" pitchFamily="34" charset="-122"/>
-                <a:cs typeface="Calibri" pitchFamily="34" charset="-120"/>
-              </a:rPr>
-              <a:t>在庫がなくなった景品も選べます。実際にお渡ししたものを記録することを優先してください（あとで用意した数を超えた分が分かるようになっています）。</a:t>
-            </a:r>
-            <a:endParaRPr lang="en-US" sz="1050" dirty="0"/>
           </a:p>
         </p:txBody>
       </p:sp>
       <p:pic>
         <p:nvPicPr>
-          <p:cNvPr id="15" name="Image 0" descr="C:\Users\sato\Desktop\enque\docs\images\p-claim-open.png">    </p:cNvPr>
+          <p:cNvPr id="4" name="Image 0" descr="C:\Users\sato\Desktop\enque\docs\images\p-scan-button.png">    </p:cNvPr>
           <p:cNvPicPr>
             <a:picLocks noChangeAspect="1"/>
           </p:cNvPicPr>
@@ -5483,8 +6308,8 @@
         </p:blipFill>
         <p:spPr>
           <a:xfrm>
-            <a:off x="2632342" y="4851718"/>
-            <a:ext cx="2297403" cy="3474720"/>
+            <a:off x="566928" y="1481328"/>
+            <a:ext cx="6428232" cy="3465755"/>
           </a:xfrm>
           <a:prstGeom prst="rect">
             <a:avLst/>
@@ -5493,13 +6318,13 @@
       </p:pic>
       <p:sp>
         <p:nvSpPr>
-          <p:cNvPr id="16" name="Text 13"/>
-          <p:cNvSpPr txBox="1"/>
-          <p:nvPr/>
-        </p:nvSpPr>
-        <p:spPr>
-          <a:xfrm>
-            <a:off x="566928" y="8381302"/>
+          <p:cNvPr id="5" name="Text 2"/>
+          <p:cNvSpPr txBox="1"/>
+          <p:nvPr/>
+        </p:nvSpPr>
+        <p:spPr>
+          <a:xfrm>
+            <a:off x="566928" y="5001947"/>
             <a:ext cx="6428232" cy="274320"/>
           </a:xfrm>
           <a:prstGeom prst="rect">
@@ -5524,7 +6349,7 @@
                 <a:ea typeface="Calibri" pitchFamily="34" charset="-122"/>
                 <a:cs typeface="Calibri" pitchFamily="34" charset="-120"/>
               </a:rPr>
-              <a:t>照会結果の画面。「未交換です」の表示と、景品を選ぶプルダウン（残りの数が見えるもの）。</a:t>
+              <a:t>照会画面の上部。「QRコードを読み取る」ボタンが見えるもの。</a:t>
             </a:r>
             <a:endParaRPr lang="en-US" sz="950" dirty="0"/>
           </a:p>
@@ -5532,7 +6357,7 @@
       </p:sp>
       <p:sp>
         <p:nvSpPr>
-          <p:cNvPr id="17" name="Text 14"/>
+          <p:cNvPr id="6" name="Text 3"/>
           <p:cNvSpPr txBox="1"/>
           <p:nvPr/>
         </p:nvSpPr>
@@ -5673,7 +6498,7 @@
                 <a:ea typeface="Calibri" pitchFamily="34" charset="-122"/>
                 <a:cs typeface="Calibri" pitchFamily="34" charset="-120"/>
               </a:rPr>
-              <a:t>手順3：交換済みにする</a:t>
+              <a:t>手順2：画面を確認して景品を選ぶ</a:t>
             </a:r>
             <a:endParaRPr lang="en-US" sz="2200" dirty="0"/>
           </a:p>
@@ -5681,34 +6506,347 @@
       </p:sp>
       <p:sp>
         <p:nvSpPr>
-          <p:cNvPr id="4" name="Shape 2"/>
+          <p:cNvPr id="4" name="Text 2"/>
+          <p:cNvSpPr txBox="1"/>
+          <p:nvPr/>
+        </p:nvSpPr>
+        <p:spPr>
+          <a:xfrm>
+            <a:off x="566928" y="1481328"/>
+            <a:ext cx="6428232" cy="257429"/>
+          </a:xfrm>
+          <a:prstGeom prst="rect">
+            <a:avLst/>
+          </a:prstGeom>
+          <a:noFill/>
+          <a:ln/>
+        </p:spPr>
+        <p:txBody>
+          <a:bodyPr wrap="square" lIns="0" tIns="0" rIns="0" bIns="0" rtlCol="0" anchor="t"/>
+          <a:lstStyle/>
+          <a:p>
+            <a:pPr indent="0" marL="0">
+              <a:lnSpc>
+                <a:spcPct val="125000"/>
+              </a:lnSpc>
+              <a:buNone/>
+            </a:pPr>
+            <a:r>
+              <a:rPr lang="en-US" sz="1100" dirty="0">
+                <a:solidFill>
+                  <a:srgbClr val="222222"/>
+                </a:solidFill>
+                <a:latin typeface="Calibri" pitchFamily="34" charset="0"/>
+                <a:ea typeface="Calibri" pitchFamily="34" charset="-122"/>
+                <a:cs typeface="Calibri" pitchFamily="34" charset="-120"/>
+              </a:rPr>
+              <a:t>読み取ると、交換コードと状態が表示されます。</a:t>
+            </a:r>
+            <a:endParaRPr lang="en-US" sz="1100" dirty="0"/>
+          </a:p>
+        </p:txBody>
+      </p:sp>
+      <p:sp>
+        <p:nvSpPr>
+          <p:cNvPr id="5" name="Text 3"/>
+          <p:cNvSpPr txBox="1"/>
+          <p:nvPr/>
+        </p:nvSpPr>
+        <p:spPr>
+          <a:xfrm>
+            <a:off x="566928" y="1885061"/>
+            <a:ext cx="6428232" cy="257810"/>
+          </a:xfrm>
+          <a:prstGeom prst="rect">
+            <a:avLst/>
+          </a:prstGeom>
+          <a:noFill/>
+          <a:ln/>
+        </p:spPr>
+        <p:txBody>
+          <a:bodyPr wrap="square" lIns="0" tIns="0" rIns="0" bIns="0" rtlCol="0" anchor="t"/>
+          <a:lstStyle/>
+          <a:p>
+            <a:pPr indent="0" marL="0">
+              <a:buNone/>
+            </a:pPr>
+            <a:r>
+              <a:rPr lang="en-US" sz="1400" b="1" dirty="0">
+                <a:solidFill>
+                  <a:srgbClr val="B85042"/>
+                </a:solidFill>
+                <a:latin typeface="Calibri" pitchFamily="34" charset="0"/>
+                <a:ea typeface="Calibri" pitchFamily="34" charset="-122"/>
+                <a:cs typeface="Calibri" pitchFamily="34" charset="-120"/>
+              </a:rPr>
+              <a:t>「未交換です」と出た場合</a:t>
+            </a:r>
+            <a:endParaRPr lang="en-US" sz="1400" dirty="0"/>
+          </a:p>
+        </p:txBody>
+      </p:sp>
+      <p:sp>
+        <p:nvSpPr>
+          <p:cNvPr id="6" name="Text 4"/>
+          <p:cNvSpPr txBox="1"/>
+          <p:nvPr/>
+        </p:nvSpPr>
+        <p:spPr>
+          <a:xfrm>
+            <a:off x="566928" y="2216023"/>
+            <a:ext cx="6428232" cy="257429"/>
+          </a:xfrm>
+          <a:prstGeom prst="rect">
+            <a:avLst/>
+          </a:prstGeom>
+          <a:noFill/>
+          <a:ln/>
+        </p:spPr>
+        <p:txBody>
+          <a:bodyPr wrap="square" lIns="0" tIns="0" rIns="0" bIns="0" rtlCol="0" anchor="t"/>
+          <a:lstStyle/>
+          <a:p>
+            <a:pPr indent="0" marL="0">
+              <a:lnSpc>
+                <a:spcPct val="125000"/>
+              </a:lnSpc>
+              <a:buNone/>
+            </a:pPr>
+            <a:r>
+              <a:rPr lang="en-US" sz="1100" dirty="0">
+                <a:solidFill>
+                  <a:srgbClr val="222222"/>
+                </a:solidFill>
+                <a:latin typeface="Calibri" pitchFamily="34" charset="0"/>
+                <a:ea typeface="Calibri" pitchFamily="34" charset="-122"/>
+                <a:cs typeface="Calibri" pitchFamily="34" charset="-120"/>
+              </a:rPr>
+              <a:t>そのままお渡しできます。</a:t>
+            </a:r>
+            <a:pPr indent="0" marL="0">
+              <a:lnSpc>
+                <a:spcPct val="125000"/>
+              </a:lnSpc>
+              <a:buNone/>
+            </a:pPr>
+            <a:r>
+              <a:rPr lang="en-US" sz="1100" b="1" dirty="0">
+                <a:solidFill>
+                  <a:srgbClr val="222222"/>
+                </a:solidFill>
+                <a:latin typeface="Calibri" pitchFamily="34" charset="0"/>
+                <a:ea typeface="Calibri" pitchFamily="34" charset="-122"/>
+                <a:cs typeface="Calibri" pitchFamily="34" charset="-120"/>
+              </a:rPr>
+              <a:t>渡す景品を選んで</a:t>
+            </a:r>
+            <a:pPr indent="0" marL="0">
+              <a:lnSpc>
+                <a:spcPct val="125000"/>
+              </a:lnSpc>
+              <a:buNone/>
+            </a:pPr>
+            <a:r>
+              <a:rPr lang="en-US" sz="1100" dirty="0">
+                <a:solidFill>
+                  <a:srgbClr val="222222"/>
+                </a:solidFill>
+                <a:latin typeface="Calibri" pitchFamily="34" charset="0"/>
+                <a:ea typeface="Calibri" pitchFamily="34" charset="-122"/>
+                <a:cs typeface="Calibri" pitchFamily="34" charset="-120"/>
+              </a:rPr>
+              <a:t>ください。選択肢には残りの数が出ています。</a:t>
+            </a:r>
+            <a:endParaRPr lang="en-US" sz="1100" dirty="0"/>
+          </a:p>
+        </p:txBody>
+      </p:sp>
+      <p:sp>
+        <p:nvSpPr>
+          <p:cNvPr id="7" name="Text 5"/>
+          <p:cNvSpPr txBox="1"/>
+          <p:nvPr/>
+        </p:nvSpPr>
+        <p:spPr>
+          <a:xfrm>
+            <a:off x="566928" y="2619756"/>
+            <a:ext cx="6428232" cy="257810"/>
+          </a:xfrm>
+          <a:prstGeom prst="rect">
+            <a:avLst/>
+          </a:prstGeom>
+          <a:noFill/>
+          <a:ln/>
+        </p:spPr>
+        <p:txBody>
+          <a:bodyPr wrap="square" lIns="0" tIns="0" rIns="0" bIns="0" rtlCol="0" anchor="t"/>
+          <a:lstStyle/>
+          <a:p>
+            <a:pPr indent="0" marL="0">
+              <a:buNone/>
+            </a:pPr>
+            <a:r>
+              <a:rPr lang="en-US" sz="1400" b="1" dirty="0">
+                <a:solidFill>
+                  <a:srgbClr val="B85042"/>
+                </a:solidFill>
+                <a:latin typeface="Calibri" pitchFamily="34" charset="0"/>
+                <a:ea typeface="Calibri" pitchFamily="34" charset="-122"/>
+                <a:cs typeface="Calibri" pitchFamily="34" charset="-120"/>
+              </a:rPr>
+              <a:t>「交換済み（日時）」と出た場合</a:t>
+            </a:r>
+            <a:endParaRPr lang="en-US" sz="1400" dirty="0"/>
+          </a:p>
+        </p:txBody>
+      </p:sp>
+      <p:sp>
+        <p:nvSpPr>
+          <p:cNvPr id="8" name="Text 6"/>
+          <p:cNvSpPr txBox="1"/>
+          <p:nvPr/>
+        </p:nvSpPr>
+        <p:spPr>
+          <a:xfrm>
+            <a:off x="566928" y="2950718"/>
+            <a:ext cx="6428232" cy="662559"/>
+          </a:xfrm>
+          <a:prstGeom prst="rect">
+            <a:avLst/>
+          </a:prstGeom>
+          <a:noFill/>
+          <a:ln/>
+        </p:spPr>
+        <p:txBody>
+          <a:bodyPr wrap="square" lIns="0" tIns="0" rIns="0" bIns="0" rtlCol="0" anchor="t"/>
+          <a:lstStyle/>
+          <a:p>
+            <a:pPr indent="0" marL="0">
+              <a:lnSpc>
+                <a:spcPct val="125000"/>
+              </a:lnSpc>
+              <a:buNone/>
+            </a:pPr>
+            <a:r>
+              <a:rPr lang="en-US" sz="1100" dirty="0">
+                <a:solidFill>
+                  <a:srgbClr val="222222"/>
+                </a:solidFill>
+                <a:latin typeface="Calibri" pitchFamily="34" charset="0"/>
+                <a:ea typeface="Calibri" pitchFamily="34" charset="-122"/>
+                <a:cs typeface="Calibri" pitchFamily="34" charset="-120"/>
+              </a:rPr>
+              <a:t>すでにお渡しした記録があります。</a:t>
+            </a:r>
+            <a:pPr indent="0" marL="0">
+              <a:lnSpc>
+                <a:spcPct val="125000"/>
+              </a:lnSpc>
+              <a:buNone/>
+            </a:pPr>
+            <a:r>
+              <a:rPr lang="en-US" sz="1100" b="1" dirty="0">
+                <a:solidFill>
+                  <a:srgbClr val="222222"/>
+                </a:solidFill>
+                <a:latin typeface="Calibri" pitchFamily="34" charset="0"/>
+                <a:ea typeface="Calibri" pitchFamily="34" charset="-122"/>
+                <a:cs typeface="Calibri" pitchFamily="34" charset="-120"/>
+              </a:rPr>
+              <a:t>来場者にはその旨を表示していません。</a:t>
+            </a:r>
+            <a:pPr indent="0" marL="0">
+              <a:lnSpc>
+                <a:spcPct val="125000"/>
+              </a:lnSpc>
+              <a:buNone/>
+            </a:pPr>
+            <a:r>
+              <a:rPr lang="en-US" sz="1100" dirty="0">
+                <a:solidFill>
+                  <a:srgbClr val="222222"/>
+                </a:solidFill>
+                <a:latin typeface="Calibri" pitchFamily="34" charset="0"/>
+                <a:ea typeface="Calibri" pitchFamily="34" charset="-122"/>
+                <a:cs typeface="Calibri" pitchFamily="34" charset="-120"/>
+              </a:rPr>
+              <a:t>「もう1回まわった」「まだもらっていない」などお申し出があれば、</a:t>
+            </a:r>
+            <a:pPr indent="0" marL="0">
+              <a:lnSpc>
+                <a:spcPct val="125000"/>
+              </a:lnSpc>
+              <a:buNone/>
+            </a:pPr>
+            <a:r>
+              <a:rPr lang="en-US" sz="1100" b="1" dirty="0">
+                <a:solidFill>
+                  <a:srgbClr val="222222"/>
+                </a:solidFill>
+                <a:latin typeface="Calibri" pitchFamily="34" charset="0"/>
+                <a:ea typeface="Calibri" pitchFamily="34" charset="-122"/>
+                <a:cs typeface="Calibri" pitchFamily="34" charset="-120"/>
+              </a:rPr>
+              <a:t>お渡しして構いません</a:t>
+            </a:r>
+            <a:pPr indent="0" marL="0">
+              <a:lnSpc>
+                <a:spcPct val="125000"/>
+              </a:lnSpc>
+              <a:buNone/>
+            </a:pPr>
+            <a:r>
+              <a:rPr lang="en-US" sz="1100" dirty="0">
+                <a:solidFill>
+                  <a:srgbClr val="222222"/>
+                </a:solidFill>
+                <a:latin typeface="Calibri" pitchFamily="34" charset="0"/>
+                <a:ea typeface="Calibri" pitchFamily="34" charset="-122"/>
+                <a:cs typeface="Calibri" pitchFamily="34" charset="-120"/>
+              </a:rPr>
+              <a:t>。判断に迷う場合は事務局にご確認ください。</a:t>
+            </a:r>
+            <a:endParaRPr lang="en-US" sz="1100" dirty="0"/>
+          </a:p>
+        </p:txBody>
+      </p:sp>
+      <p:sp>
+        <p:nvSpPr>
+          <p:cNvPr id="9" name="Shape 7"/>
           <p:cNvSpPr/>
           <p:nvPr/>
         </p:nvSpPr>
         <p:spPr>
           <a:xfrm>
-            <a:off x="566928" y="1499616"/>
-            <a:ext cx="274320" cy="274320"/>
-          </a:xfrm>
-          <a:prstGeom prst="ellipse">
-            <a:avLst/>
+            <a:off x="566928" y="3649853"/>
+            <a:ext cx="6428232" cy="431102"/>
+          </a:xfrm>
+          <a:prstGeom prst="roundRect">
+            <a:avLst>
+              <a:gd name="adj" fmla="val 12726"/>
+            </a:avLst>
           </a:prstGeom>
           <a:solidFill>
-            <a:srgbClr val="B85042"/>
+            <a:srgbClr val="FAEAE7"/>
           </a:solidFill>
-          <a:ln/>
-        </p:spPr>
-      </p:sp>
-      <p:sp>
-        <p:nvSpPr>
-          <p:cNvPr id="5" name="Text 3"/>
-          <p:cNvSpPr txBox="1"/>
-          <p:nvPr/>
-        </p:nvSpPr>
-        <p:spPr>
-          <a:xfrm>
-            <a:off x="566928" y="1499616"/>
-            <a:ext cx="274320" cy="274320"/>
+          <a:ln w="9525">
+            <a:solidFill>
+              <a:srgbClr val="B85042"/>
+            </a:solidFill>
+            <a:prstDash val="solid"/>
+          </a:ln>
+        </p:spPr>
+      </p:sp>
+      <p:sp>
+        <p:nvSpPr>
+          <p:cNvPr id="10" name="Text 8"/>
+          <p:cNvSpPr txBox="1"/>
+          <p:nvPr/>
+        </p:nvSpPr>
+        <p:spPr>
+          <a:xfrm>
+            <a:off x="658368" y="3741293"/>
+            <a:ext cx="237744" cy="237744"/>
           </a:xfrm>
           <a:prstGeom prst="rect">
             <a:avLst/>
@@ -5724,30 +6862,30 @@
               <a:buNone/>
             </a:pPr>
             <a:r>
-              <a:rPr lang="en-US" sz="1100" b="1" dirty="0">
-                <a:solidFill>
-                  <a:srgbClr val="FFFFFF"/>
-                </a:solidFill>
-                <a:latin typeface="Calibri" pitchFamily="34" charset="0"/>
-                <a:ea typeface="Calibri" pitchFamily="34" charset="-122"/>
-                <a:cs typeface="Calibri" pitchFamily="34" charset="-120"/>
-              </a:rPr>
-              <a:t>1</a:t>
-            </a:r>
-            <a:endParaRPr lang="en-US" sz="1100" dirty="0"/>
-          </a:p>
-        </p:txBody>
-      </p:sp>
-      <p:sp>
-        <p:nvSpPr>
-          <p:cNvPr id="6" name="Text 4"/>
-          <p:cNvSpPr txBox="1"/>
-          <p:nvPr/>
-        </p:nvSpPr>
-        <p:spPr>
-          <a:xfrm>
-            <a:off x="969264" y="1481328"/>
-            <a:ext cx="6025896" cy="365760"/>
+              <a:rPr lang="en-US" sz="1200" b="1" dirty="0">
+                <a:solidFill>
+                  <a:srgbClr val="B85042"/>
+                </a:solidFill>
+                <a:latin typeface="Calibri" pitchFamily="34" charset="0"/>
+                <a:ea typeface="Calibri" pitchFamily="34" charset="-122"/>
+                <a:cs typeface="Calibri" pitchFamily="34" charset="-120"/>
+              </a:rPr>
+              <a:t>i</a:t>
+            </a:r>
+            <a:endParaRPr lang="en-US" sz="1200" dirty="0"/>
+          </a:p>
+        </p:txBody>
+      </p:sp>
+      <p:sp>
+        <p:nvSpPr>
+          <p:cNvPr id="11" name="Text 9"/>
+          <p:cNvSpPr txBox="1"/>
+          <p:nvPr/>
+        </p:nvSpPr>
+        <p:spPr>
+          <a:xfrm>
+            <a:off x="950976" y="3759581"/>
+            <a:ext cx="5925312" cy="248221"/>
           </a:xfrm>
           <a:prstGeom prst="rect">
             <a:avLst/>
@@ -5761,72 +6899,62 @@
           <a:p>
             <a:pPr indent="0" marL="0">
               <a:lnSpc>
-                <a:spcPct val="125000"/>
-              </a:lnSpc>
-              <a:buNone/>
-            </a:pPr>
-            <a:r>
-              <a:rPr lang="en-US" sz="1150" b="1" dirty="0">
-                <a:solidFill>
-                  <a:srgbClr val="222222"/>
-                </a:solidFill>
-                <a:latin typeface="Calibri" pitchFamily="34" charset="0"/>
-                <a:ea typeface="Calibri" pitchFamily="34" charset="-122"/>
-                <a:cs typeface="Calibri" pitchFamily="34" charset="-120"/>
-              </a:rPr>
-              <a:t>渡す景品</a:t>
-            </a:r>
-            <a:pPr indent="0" marL="0">
-              <a:lnSpc>
-                <a:spcPct val="125000"/>
-              </a:lnSpc>
-              <a:buNone/>
-            </a:pPr>
-            <a:r>
-              <a:rPr lang="en-US" sz="1150" dirty="0">
-                <a:solidFill>
-                  <a:srgbClr val="222222"/>
-                </a:solidFill>
-                <a:latin typeface="Calibri" pitchFamily="34" charset="0"/>
-                <a:ea typeface="Calibri" pitchFamily="34" charset="-122"/>
-                <a:cs typeface="Calibri" pitchFamily="34" charset="-120"/>
-              </a:rPr>
-              <a:t>を選ぶ</a:t>
-            </a:r>
-            <a:endParaRPr lang="en-US" sz="1150" dirty="0"/>
-          </a:p>
-        </p:txBody>
-      </p:sp>
-      <p:sp>
-        <p:nvSpPr>
-          <p:cNvPr id="7" name="Shape 5"/>
+                <a:spcPct val="120000"/>
+              </a:lnSpc>
+              <a:buNone/>
+            </a:pPr>
+            <a:r>
+              <a:rPr lang="en-US" sz="1050" dirty="0">
+                <a:solidFill>
+                  <a:srgbClr val="222222"/>
+                </a:solidFill>
+                <a:latin typeface="Calibri" pitchFamily="34" charset="0"/>
+                <a:ea typeface="Calibri" pitchFamily="34" charset="-122"/>
+                <a:cs typeface="Calibri" pitchFamily="34" charset="-120"/>
+              </a:rPr>
+              <a:t>画面には、その方が回答したブースの数も出ます。目安としてご覧ください。</a:t>
+            </a:r>
+            <a:endParaRPr lang="en-US" sz="1050" dirty="0"/>
+          </a:p>
+        </p:txBody>
+      </p:sp>
+      <p:sp>
+        <p:nvSpPr>
+          <p:cNvPr id="12" name="Shape 10"/>
           <p:cNvSpPr/>
           <p:nvPr/>
         </p:nvSpPr>
         <p:spPr>
           <a:xfrm>
-            <a:off x="566928" y="1956816"/>
-            <a:ext cx="274320" cy="274320"/>
-          </a:xfrm>
-          <a:prstGeom prst="ellipse">
-            <a:avLst/>
+            <a:off x="566928" y="4154107"/>
+            <a:ext cx="6428232" cy="624459"/>
+          </a:xfrm>
+          <a:prstGeom prst="roundRect">
+            <a:avLst>
+              <a:gd name="adj" fmla="val 8786"/>
+            </a:avLst>
           </a:prstGeom>
           <a:solidFill>
-            <a:srgbClr val="B85042"/>
+            <a:srgbClr val="FDF0E6"/>
           </a:solidFill>
-          <a:ln/>
-        </p:spPr>
-      </p:sp>
-      <p:sp>
-        <p:nvSpPr>
-          <p:cNvPr id="8" name="Text 6"/>
-          <p:cNvSpPr txBox="1"/>
-          <p:nvPr/>
-        </p:nvSpPr>
-        <p:spPr>
-          <a:xfrm>
-            <a:off x="566928" y="1956816"/>
-            <a:ext cx="274320" cy="274320"/>
+          <a:ln w="9525">
+            <a:solidFill>
+              <a:srgbClr val="E08A3C"/>
+            </a:solidFill>
+            <a:prstDash val="solid"/>
+          </a:ln>
+        </p:spPr>
+      </p:sp>
+      <p:sp>
+        <p:nvSpPr>
+          <p:cNvPr id="13" name="Text 11"/>
+          <p:cNvSpPr txBox="1"/>
+          <p:nvPr/>
+        </p:nvSpPr>
+        <p:spPr>
+          <a:xfrm>
+            <a:off x="658368" y="4245547"/>
+            <a:ext cx="237744" cy="237744"/>
           </a:xfrm>
           <a:prstGeom prst="rect">
             <a:avLst/>
@@ -5842,30 +6970,30 @@
               <a:buNone/>
             </a:pPr>
             <a:r>
-              <a:rPr lang="en-US" sz="1100" b="1" dirty="0">
-                <a:solidFill>
-                  <a:srgbClr val="FFFFFF"/>
-                </a:solidFill>
-                <a:latin typeface="Calibri" pitchFamily="34" charset="0"/>
-                <a:ea typeface="Calibri" pitchFamily="34" charset="-122"/>
-                <a:cs typeface="Calibri" pitchFamily="34" charset="-120"/>
-              </a:rPr>
-              <a:t>2</a:t>
-            </a:r>
-            <a:endParaRPr lang="en-US" sz="1100" dirty="0"/>
-          </a:p>
-        </p:txBody>
-      </p:sp>
-      <p:sp>
-        <p:nvSpPr>
-          <p:cNvPr id="9" name="Text 7"/>
-          <p:cNvSpPr txBox="1"/>
-          <p:nvPr/>
-        </p:nvSpPr>
-        <p:spPr>
-          <a:xfrm>
-            <a:off x="969264" y="1938528"/>
-            <a:ext cx="6025896" cy="365760"/>
+              <a:rPr lang="en-US" sz="1200" b="1" dirty="0">
+                <a:solidFill>
+                  <a:srgbClr val="C25A17"/>
+                </a:solidFill>
+                <a:latin typeface="Calibri" pitchFamily="34" charset="0"/>
+                <a:ea typeface="Calibri" pitchFamily="34" charset="-122"/>
+                <a:cs typeface="Calibri" pitchFamily="34" charset="-120"/>
+              </a:rPr>
+              <a:t>！</a:t>
+            </a:r>
+            <a:endParaRPr lang="en-US" sz="1200" dirty="0"/>
+          </a:p>
+        </p:txBody>
+      </p:sp>
+      <p:sp>
+        <p:nvSpPr>
+          <p:cNvPr id="14" name="Text 12"/>
+          <p:cNvSpPr txBox="1"/>
+          <p:nvPr/>
+        </p:nvSpPr>
+        <p:spPr>
+          <a:xfrm>
+            <a:off x="950976" y="4263835"/>
+            <a:ext cx="5925312" cy="441579"/>
           </a:xfrm>
           <a:prstGeom prst="rect">
             <a:avLst/>
@@ -5879,424 +7007,28 @@
           <a:p>
             <a:pPr indent="0" marL="0">
               <a:lnSpc>
-                <a:spcPct val="125000"/>
-              </a:lnSpc>
-              <a:buNone/>
-            </a:pPr>
-            <a:r>
-              <a:rPr lang="en-US" sz="1150" dirty="0">
-                <a:solidFill>
-                  <a:srgbClr val="222222"/>
-                </a:solidFill>
-                <a:latin typeface="Calibri" pitchFamily="34" charset="0"/>
-                <a:ea typeface="Calibri" pitchFamily="34" charset="-122"/>
-                <a:cs typeface="Calibri" pitchFamily="34" charset="-120"/>
-              </a:rPr>
-              <a:t>必要ならメモ欄に記入する（例：在庫切れのため別の景品に変更）</a:t>
-            </a:r>
-            <a:endParaRPr lang="en-US" sz="1150" dirty="0"/>
-          </a:p>
-        </p:txBody>
-      </p:sp>
-      <p:sp>
-        <p:nvSpPr>
-          <p:cNvPr id="10" name="Shape 8"/>
-          <p:cNvSpPr/>
-          <p:nvPr/>
-        </p:nvSpPr>
-        <p:spPr>
-          <a:xfrm>
-            <a:off x="566928" y="2414016"/>
-            <a:ext cx="274320" cy="274320"/>
-          </a:xfrm>
-          <a:prstGeom prst="ellipse">
-            <a:avLst/>
-          </a:prstGeom>
-          <a:solidFill>
-            <a:srgbClr val="B85042"/>
-          </a:solidFill>
-          <a:ln/>
-        </p:spPr>
-      </p:sp>
-      <p:sp>
-        <p:nvSpPr>
-          <p:cNvPr id="11" name="Text 9"/>
-          <p:cNvSpPr txBox="1"/>
-          <p:nvPr/>
-        </p:nvSpPr>
-        <p:spPr>
-          <a:xfrm>
-            <a:off x="566928" y="2414016"/>
-            <a:ext cx="274320" cy="274320"/>
-          </a:xfrm>
-          <a:prstGeom prst="rect">
-            <a:avLst/>
-          </a:prstGeom>
-          <a:noFill/>
-          <a:ln/>
-        </p:spPr>
-        <p:txBody>
-          <a:bodyPr wrap="square" lIns="0" tIns="0" rIns="0" bIns="0" rtlCol="0" anchor="ctr"/>
-          <a:lstStyle/>
-          <a:p>
-            <a:pPr algn="ctr" indent="0" marL="0">
-              <a:buNone/>
-            </a:pPr>
-            <a:r>
-              <a:rPr lang="en-US" sz="1100" b="1" dirty="0">
-                <a:solidFill>
-                  <a:srgbClr val="FFFFFF"/>
-                </a:solidFill>
-                <a:latin typeface="Calibri" pitchFamily="34" charset="0"/>
-                <a:ea typeface="Calibri" pitchFamily="34" charset="-122"/>
-                <a:cs typeface="Calibri" pitchFamily="34" charset="-120"/>
-              </a:rPr>
-              <a:t>3</a:t>
-            </a:r>
-            <a:endParaRPr lang="en-US" sz="1100" dirty="0"/>
-          </a:p>
-        </p:txBody>
-      </p:sp>
-      <p:sp>
-        <p:nvSpPr>
-          <p:cNvPr id="12" name="Text 10"/>
-          <p:cNvSpPr txBox="1"/>
-          <p:nvPr/>
-        </p:nvSpPr>
-        <p:spPr>
-          <a:xfrm>
-            <a:off x="969264" y="2395728"/>
-            <a:ext cx="6025896" cy="365760"/>
-          </a:xfrm>
-          <a:prstGeom prst="rect">
-            <a:avLst/>
-          </a:prstGeom>
-          <a:noFill/>
-          <a:ln/>
-        </p:spPr>
-        <p:txBody>
-          <a:bodyPr wrap="square" lIns="0" tIns="0" rIns="0" bIns="0" rtlCol="0" anchor="t"/>
-          <a:lstStyle/>
-          <a:p>
-            <a:pPr indent="0" marL="0">
-              <a:lnSpc>
-                <a:spcPct val="125000"/>
-              </a:lnSpc>
-              <a:buNone/>
-            </a:pPr>
-            <a:r>
-              <a:rPr lang="en-US" sz="1150" b="1" dirty="0">
-                <a:solidFill>
-                  <a:srgbClr val="222222"/>
-                </a:solidFill>
-                <a:latin typeface="Calibri" pitchFamily="34" charset="0"/>
-                <a:ea typeface="Calibri" pitchFamily="34" charset="-122"/>
-                <a:cs typeface="Calibri" pitchFamily="34" charset="-120"/>
-              </a:rPr>
-              <a:t>「交換済みにする」</a:t>
-            </a:r>
-            <a:pPr indent="0" marL="0">
-              <a:lnSpc>
-                <a:spcPct val="125000"/>
-              </a:lnSpc>
-              <a:buNone/>
-            </a:pPr>
-            <a:r>
-              <a:rPr lang="en-US" sz="1150" dirty="0">
-                <a:solidFill>
-                  <a:srgbClr val="222222"/>
-                </a:solidFill>
-                <a:latin typeface="Calibri" pitchFamily="34" charset="0"/>
-                <a:ea typeface="Calibri" pitchFamily="34" charset="-122"/>
-                <a:cs typeface="Calibri" pitchFamily="34" charset="-120"/>
-              </a:rPr>
-              <a:t>を押す</a:t>
-            </a:r>
-            <a:endParaRPr lang="en-US" sz="1150" dirty="0"/>
-          </a:p>
-        </p:txBody>
-      </p:sp>
-      <p:sp>
-        <p:nvSpPr>
-          <p:cNvPr id="13" name="Shape 11"/>
-          <p:cNvSpPr/>
-          <p:nvPr/>
-        </p:nvSpPr>
-        <p:spPr>
-          <a:xfrm>
-            <a:off x="566928" y="2871216"/>
-            <a:ext cx="274320" cy="274320"/>
-          </a:xfrm>
-          <a:prstGeom prst="ellipse">
-            <a:avLst/>
-          </a:prstGeom>
-          <a:solidFill>
-            <a:srgbClr val="B85042"/>
-          </a:solidFill>
-          <a:ln/>
-        </p:spPr>
-      </p:sp>
-      <p:sp>
-        <p:nvSpPr>
-          <p:cNvPr id="14" name="Text 12"/>
-          <p:cNvSpPr txBox="1"/>
-          <p:nvPr/>
-        </p:nvSpPr>
-        <p:spPr>
-          <a:xfrm>
-            <a:off x="566928" y="2871216"/>
-            <a:ext cx="274320" cy="274320"/>
-          </a:xfrm>
-          <a:prstGeom prst="rect">
-            <a:avLst/>
-          </a:prstGeom>
-          <a:noFill/>
-          <a:ln/>
-        </p:spPr>
-        <p:txBody>
-          <a:bodyPr wrap="square" lIns="0" tIns="0" rIns="0" bIns="0" rtlCol="0" anchor="ctr"/>
-          <a:lstStyle/>
-          <a:p>
-            <a:pPr algn="ctr" indent="0" marL="0">
-              <a:buNone/>
-            </a:pPr>
-            <a:r>
-              <a:rPr lang="en-US" sz="1100" b="1" dirty="0">
-                <a:solidFill>
-                  <a:srgbClr val="FFFFFF"/>
-                </a:solidFill>
-                <a:latin typeface="Calibri" pitchFamily="34" charset="0"/>
-                <a:ea typeface="Calibri" pitchFamily="34" charset="-122"/>
-                <a:cs typeface="Calibri" pitchFamily="34" charset="-120"/>
-              </a:rPr>
-              <a:t>4</a:t>
-            </a:r>
-            <a:endParaRPr lang="en-US" sz="1100" dirty="0"/>
-          </a:p>
-        </p:txBody>
-      </p:sp>
-      <p:sp>
-        <p:nvSpPr>
-          <p:cNvPr id="15" name="Text 13"/>
-          <p:cNvSpPr txBox="1"/>
-          <p:nvPr/>
-        </p:nvSpPr>
-        <p:spPr>
-          <a:xfrm>
-            <a:off x="969264" y="2852928"/>
-            <a:ext cx="6025896" cy="365760"/>
-          </a:xfrm>
-          <a:prstGeom prst="rect">
-            <a:avLst/>
-          </a:prstGeom>
-          <a:noFill/>
-          <a:ln/>
-        </p:spPr>
-        <p:txBody>
-          <a:bodyPr wrap="square" lIns="0" tIns="0" rIns="0" bIns="0" rtlCol="0" anchor="t"/>
-          <a:lstStyle/>
-          <a:p>
-            <a:pPr indent="0" marL="0">
-              <a:lnSpc>
-                <a:spcPct val="125000"/>
-              </a:lnSpc>
-              <a:buNone/>
-            </a:pPr>
-            <a:r>
-              <a:rPr lang="en-US" sz="1150" dirty="0">
-                <a:solidFill>
-                  <a:srgbClr val="222222"/>
-                </a:solidFill>
-                <a:latin typeface="Calibri" pitchFamily="34" charset="0"/>
-                <a:ea typeface="Calibri" pitchFamily="34" charset="-122"/>
-                <a:cs typeface="Calibri" pitchFamily="34" charset="-120"/>
-              </a:rPr>
-              <a:t>確認のメッセージが出たら「OK」を押す</a:t>
-            </a:r>
-            <a:endParaRPr lang="en-US" sz="1150" dirty="0"/>
-          </a:p>
-        </p:txBody>
-      </p:sp>
-      <p:sp>
-        <p:nvSpPr>
-          <p:cNvPr id="16" name="Shape 14"/>
-          <p:cNvSpPr/>
-          <p:nvPr/>
-        </p:nvSpPr>
-        <p:spPr>
-          <a:xfrm>
-            <a:off x="566928" y="3328416"/>
-            <a:ext cx="274320" cy="274320"/>
-          </a:xfrm>
-          <a:prstGeom prst="ellipse">
-            <a:avLst/>
-          </a:prstGeom>
-          <a:solidFill>
-            <a:srgbClr val="B85042"/>
-          </a:solidFill>
-          <a:ln/>
-        </p:spPr>
-      </p:sp>
-      <p:sp>
-        <p:nvSpPr>
-          <p:cNvPr id="17" name="Text 15"/>
-          <p:cNvSpPr txBox="1"/>
-          <p:nvPr/>
-        </p:nvSpPr>
-        <p:spPr>
-          <a:xfrm>
-            <a:off x="566928" y="3328416"/>
-            <a:ext cx="274320" cy="274320"/>
-          </a:xfrm>
-          <a:prstGeom prst="rect">
-            <a:avLst/>
-          </a:prstGeom>
-          <a:noFill/>
-          <a:ln/>
-        </p:spPr>
-        <p:txBody>
-          <a:bodyPr wrap="square" lIns="0" tIns="0" rIns="0" bIns="0" rtlCol="0" anchor="ctr"/>
-          <a:lstStyle/>
-          <a:p>
-            <a:pPr algn="ctr" indent="0" marL="0">
-              <a:buNone/>
-            </a:pPr>
-            <a:r>
-              <a:rPr lang="en-US" sz="1100" b="1" dirty="0">
-                <a:solidFill>
-                  <a:srgbClr val="FFFFFF"/>
-                </a:solidFill>
-                <a:latin typeface="Calibri" pitchFamily="34" charset="0"/>
-                <a:ea typeface="Calibri" pitchFamily="34" charset="-122"/>
-                <a:cs typeface="Calibri" pitchFamily="34" charset="-120"/>
-              </a:rPr>
-              <a:t>5</a:t>
-            </a:r>
-            <a:endParaRPr lang="en-US" sz="1100" dirty="0"/>
-          </a:p>
-        </p:txBody>
-      </p:sp>
-      <p:sp>
-        <p:nvSpPr>
-          <p:cNvPr id="18" name="Text 16"/>
-          <p:cNvSpPr txBox="1"/>
-          <p:nvPr/>
-        </p:nvSpPr>
-        <p:spPr>
-          <a:xfrm>
-            <a:off x="969264" y="3310128"/>
-            <a:ext cx="6025896" cy="365760"/>
-          </a:xfrm>
-          <a:prstGeom prst="rect">
-            <a:avLst/>
-          </a:prstGeom>
-          <a:noFill/>
-          <a:ln/>
-        </p:spPr>
-        <p:txBody>
-          <a:bodyPr wrap="square" lIns="0" tIns="0" rIns="0" bIns="0" rtlCol="0" anchor="t"/>
-          <a:lstStyle/>
-          <a:p>
-            <a:pPr indent="0" marL="0">
-              <a:lnSpc>
-                <a:spcPct val="125000"/>
-              </a:lnSpc>
-              <a:buNone/>
-            </a:pPr>
-            <a:r>
-              <a:rPr lang="en-US" sz="1150" dirty="0">
-                <a:solidFill>
-                  <a:srgbClr val="222222"/>
-                </a:solidFill>
-                <a:latin typeface="Calibri" pitchFamily="34" charset="0"/>
-                <a:ea typeface="Calibri" pitchFamily="34" charset="-122"/>
-                <a:cs typeface="Calibri" pitchFamily="34" charset="-120"/>
-              </a:rPr>
-              <a:t>「交換済みとして記録しました（景品名） 残数 ◯個」と出れば完了</a:t>
-            </a:r>
-            <a:endParaRPr lang="en-US" sz="1150" dirty="0"/>
-          </a:p>
-        </p:txBody>
-      </p:sp>
-      <p:sp>
-        <p:nvSpPr>
-          <p:cNvPr id="19" name="Text 17"/>
-          <p:cNvSpPr txBox="1"/>
-          <p:nvPr/>
-        </p:nvSpPr>
-        <p:spPr>
-          <a:xfrm>
-            <a:off x="566928" y="3767328"/>
-            <a:ext cx="6428232" cy="459994"/>
-          </a:xfrm>
-          <a:prstGeom prst="rect">
-            <a:avLst/>
-          </a:prstGeom>
-          <a:noFill/>
-          <a:ln/>
-        </p:spPr>
-        <p:txBody>
-          <a:bodyPr wrap="square" lIns="0" tIns="0" rIns="0" bIns="0" rtlCol="0" anchor="t"/>
-          <a:lstStyle/>
-          <a:p>
-            <a:pPr indent="0" marL="0">
-              <a:lnSpc>
-                <a:spcPct val="125000"/>
-              </a:lnSpc>
-              <a:buNone/>
-            </a:pPr>
-            <a:r>
-              <a:rPr lang="en-US" sz="1100" dirty="0">
-                <a:solidFill>
-                  <a:srgbClr val="222222"/>
-                </a:solidFill>
-                <a:latin typeface="Calibri" pitchFamily="34" charset="0"/>
-                <a:ea typeface="Calibri" pitchFamily="34" charset="-122"/>
-                <a:cs typeface="Calibri" pitchFamily="34" charset="-120"/>
-              </a:rPr>
-              <a:t>次の方を対応するときは、</a:t>
-            </a:r>
-            <a:pPr indent="0" marL="0">
-              <a:lnSpc>
-                <a:spcPct val="125000"/>
-              </a:lnSpc>
-              <a:buNone/>
-            </a:pPr>
-            <a:r>
-              <a:rPr lang="en-US" sz="1100" b="1" dirty="0">
-                <a:solidFill>
-                  <a:srgbClr val="222222"/>
-                </a:solidFill>
-                <a:latin typeface="Calibri" pitchFamily="34" charset="0"/>
-                <a:ea typeface="Calibri" pitchFamily="34" charset="-122"/>
-                <a:cs typeface="Calibri" pitchFamily="34" charset="-120"/>
-              </a:rPr>
-              <a:t>「次の来場者を照会する」</a:t>
-            </a:r>
-            <a:pPr indent="0" marL="0">
-              <a:lnSpc>
-                <a:spcPct val="125000"/>
-              </a:lnSpc>
-              <a:buNone/>
-            </a:pPr>
-            <a:r>
-              <a:rPr lang="en-US" sz="1100" dirty="0">
-                <a:solidFill>
-                  <a:srgbClr val="222222"/>
-                </a:solidFill>
-                <a:latin typeface="Calibri" pitchFamily="34" charset="0"/>
-                <a:ea typeface="Calibri" pitchFamily="34" charset="-122"/>
-                <a:cs typeface="Calibri" pitchFamily="34" charset="-120"/>
-              </a:rPr>
-              <a:t>を押してから、またQRコードを読み取ってください。</a:t>
-            </a:r>
-            <a:endParaRPr lang="en-US" sz="1100" dirty="0"/>
+                <a:spcPct val="120000"/>
+              </a:lnSpc>
+              <a:buNone/>
+            </a:pPr>
+            <a:r>
+              <a:rPr lang="en-US" sz="1050" dirty="0">
+                <a:solidFill>
+                  <a:srgbClr val="222222"/>
+                </a:solidFill>
+                <a:latin typeface="Calibri" pitchFamily="34" charset="0"/>
+                <a:ea typeface="Calibri" pitchFamily="34" charset="-122"/>
+                <a:cs typeface="Calibri" pitchFamily="34" charset="-120"/>
+              </a:rPr>
+              <a:t>在庫がなくなった景品も選べます。実際にお渡ししたものを記録することを優先してください（あとで用意した数を超えた分が分かるようになっています）。</a:t>
+            </a:r>
+            <a:endParaRPr lang="en-US" sz="1050" dirty="0"/>
           </a:p>
         </p:txBody>
       </p:sp>
       <p:pic>
         <p:nvPicPr>
-          <p:cNvPr id="20" name="Image 0" descr="C:\Users\sato\Desktop\enque\docs\images\p-claim-saved.png">    </p:cNvPr>
+          <p:cNvPr id="15" name="Image 0" descr="C:\Users\sato\Desktop\enque\docs\images\p-claim-open.png">    </p:cNvPr>
           <p:cNvPicPr>
             <a:picLocks noChangeAspect="1"/>
           </p:cNvPicPr>
@@ -6310,8 +7042,8 @@
         </p:blipFill>
         <p:spPr>
           <a:xfrm>
-            <a:off x="566928" y="4263898"/>
-            <a:ext cx="6428232" cy="2870972"/>
+            <a:off x="2632342" y="4851718"/>
+            <a:ext cx="2297403" cy="3474720"/>
           </a:xfrm>
           <a:prstGeom prst="rect">
             <a:avLst/>
@@ -6320,13 +7052,13 @@
       </p:pic>
       <p:sp>
         <p:nvSpPr>
-          <p:cNvPr id="21" name="Text 18"/>
-          <p:cNvSpPr txBox="1"/>
-          <p:nvPr/>
-        </p:nvSpPr>
-        <p:spPr>
-          <a:xfrm>
-            <a:off x="566928" y="7189734"/>
+          <p:cNvPr id="16" name="Text 13"/>
+          <p:cNvSpPr txBox="1"/>
+          <p:nvPr/>
+        </p:nvSpPr>
+        <p:spPr>
+          <a:xfrm>
+            <a:off x="566928" y="8381302"/>
             <a:ext cx="6428232" cy="274320"/>
           </a:xfrm>
           <a:prstGeom prst="rect">
@@ -6351,7 +7083,7 @@
                 <a:ea typeface="Calibri" pitchFamily="34" charset="-122"/>
                 <a:cs typeface="Calibri" pitchFamily="34" charset="-120"/>
               </a:rPr>
-              <a:t>「交換済みとして記録しました」のメッセージが出ている画面。</a:t>
+              <a:t>照会結果の画面。「未交換です」の表示と、景品を選ぶプルダウン（残りの数が見えるもの）。</a:t>
             </a:r>
             <a:endParaRPr lang="en-US" sz="950" dirty="0"/>
           </a:p>
@@ -6359,7 +7091,7 @@
       </p:sp>
       <p:sp>
         <p:nvSpPr>
-          <p:cNvPr id="22" name="Text 19"/>
+          <p:cNvPr id="17" name="Text 14"/>
           <p:cNvSpPr txBox="1"/>
           <p:nvPr/>
         </p:nvSpPr>
@@ -6500,7 +7232,7 @@
                 <a:ea typeface="Calibri" pitchFamily="34" charset="-122"/>
                 <a:cs typeface="Calibri" pitchFamily="34" charset="-120"/>
               </a:rPr>
-              <a:t>残りの数を確認する</a:t>
+              <a:t>手順3：交換済みにする</a:t>
             </a:r>
             <a:endParaRPr lang="en-US" sz="2200" dirty="0"/>
           </a:p>
@@ -6508,14 +7240,73 @@
       </p:sp>
       <p:sp>
         <p:nvSpPr>
-          <p:cNvPr id="4" name="Text 2"/>
-          <p:cNvSpPr txBox="1"/>
-          <p:nvPr/>
-        </p:nvSpPr>
-        <p:spPr>
-          <a:xfrm>
-            <a:off x="566928" y="1481328"/>
-            <a:ext cx="6428232" cy="257429"/>
+          <p:cNvPr id="4" name="Shape 2"/>
+          <p:cNvSpPr/>
+          <p:nvPr/>
+        </p:nvSpPr>
+        <p:spPr>
+          <a:xfrm>
+            <a:off x="566928" y="1499616"/>
+            <a:ext cx="274320" cy="274320"/>
+          </a:xfrm>
+          <a:prstGeom prst="ellipse">
+            <a:avLst/>
+          </a:prstGeom>
+          <a:solidFill>
+            <a:srgbClr val="B85042"/>
+          </a:solidFill>
+          <a:ln/>
+        </p:spPr>
+      </p:sp>
+      <p:sp>
+        <p:nvSpPr>
+          <p:cNvPr id="5" name="Text 3"/>
+          <p:cNvSpPr txBox="1"/>
+          <p:nvPr/>
+        </p:nvSpPr>
+        <p:spPr>
+          <a:xfrm>
+            <a:off x="566928" y="1499616"/>
+            <a:ext cx="274320" cy="274320"/>
+          </a:xfrm>
+          <a:prstGeom prst="rect">
+            <a:avLst/>
+          </a:prstGeom>
+          <a:noFill/>
+          <a:ln/>
+        </p:spPr>
+        <p:txBody>
+          <a:bodyPr wrap="square" lIns="0" tIns="0" rIns="0" bIns="0" rtlCol="0" anchor="ctr"/>
+          <a:lstStyle/>
+          <a:p>
+            <a:pPr algn="ctr" indent="0" marL="0">
+              <a:buNone/>
+            </a:pPr>
+            <a:r>
+              <a:rPr lang="en-US" sz="1100" b="1" dirty="0">
+                <a:solidFill>
+                  <a:srgbClr val="FFFFFF"/>
+                </a:solidFill>
+                <a:latin typeface="Calibri" pitchFamily="34" charset="0"/>
+                <a:ea typeface="Calibri" pitchFamily="34" charset="-122"/>
+                <a:cs typeface="Calibri" pitchFamily="34" charset="-120"/>
+              </a:rPr>
+              <a:t>1</a:t>
+            </a:r>
+            <a:endParaRPr lang="en-US" sz="1100" dirty="0"/>
+          </a:p>
+        </p:txBody>
+      </p:sp>
+      <p:sp>
+        <p:nvSpPr>
+          <p:cNvPr id="6" name="Text 4"/>
+          <p:cNvSpPr txBox="1"/>
+          <p:nvPr/>
+        </p:nvSpPr>
+        <p:spPr>
+          <a:xfrm>
+            <a:off x="969264" y="1481328"/>
+            <a:ext cx="6025896" cy="365760"/>
           </a:xfrm>
           <a:prstGeom prst="rect">
             <a:avLst/>
@@ -6534,6 +7325,486 @@
               <a:buNone/>
             </a:pPr>
             <a:r>
+              <a:rPr lang="en-US" sz="1150" b="1" dirty="0">
+                <a:solidFill>
+                  <a:srgbClr val="222222"/>
+                </a:solidFill>
+                <a:latin typeface="Calibri" pitchFamily="34" charset="0"/>
+                <a:ea typeface="Calibri" pitchFamily="34" charset="-122"/>
+                <a:cs typeface="Calibri" pitchFamily="34" charset="-120"/>
+              </a:rPr>
+              <a:t>渡す景品</a:t>
+            </a:r>
+            <a:pPr indent="0" marL="0">
+              <a:lnSpc>
+                <a:spcPct val="125000"/>
+              </a:lnSpc>
+              <a:buNone/>
+            </a:pPr>
+            <a:r>
+              <a:rPr lang="en-US" sz="1150" dirty="0">
+                <a:solidFill>
+                  <a:srgbClr val="222222"/>
+                </a:solidFill>
+                <a:latin typeface="Calibri" pitchFamily="34" charset="0"/>
+                <a:ea typeface="Calibri" pitchFamily="34" charset="-122"/>
+                <a:cs typeface="Calibri" pitchFamily="34" charset="-120"/>
+              </a:rPr>
+              <a:t>を選ぶ</a:t>
+            </a:r>
+            <a:endParaRPr lang="en-US" sz="1150" dirty="0"/>
+          </a:p>
+        </p:txBody>
+      </p:sp>
+      <p:sp>
+        <p:nvSpPr>
+          <p:cNvPr id="7" name="Shape 5"/>
+          <p:cNvSpPr/>
+          <p:nvPr/>
+        </p:nvSpPr>
+        <p:spPr>
+          <a:xfrm>
+            <a:off x="566928" y="1956816"/>
+            <a:ext cx="274320" cy="274320"/>
+          </a:xfrm>
+          <a:prstGeom prst="ellipse">
+            <a:avLst/>
+          </a:prstGeom>
+          <a:solidFill>
+            <a:srgbClr val="B85042"/>
+          </a:solidFill>
+          <a:ln/>
+        </p:spPr>
+      </p:sp>
+      <p:sp>
+        <p:nvSpPr>
+          <p:cNvPr id="8" name="Text 6"/>
+          <p:cNvSpPr txBox="1"/>
+          <p:nvPr/>
+        </p:nvSpPr>
+        <p:spPr>
+          <a:xfrm>
+            <a:off x="566928" y="1956816"/>
+            <a:ext cx="274320" cy="274320"/>
+          </a:xfrm>
+          <a:prstGeom prst="rect">
+            <a:avLst/>
+          </a:prstGeom>
+          <a:noFill/>
+          <a:ln/>
+        </p:spPr>
+        <p:txBody>
+          <a:bodyPr wrap="square" lIns="0" tIns="0" rIns="0" bIns="0" rtlCol="0" anchor="ctr"/>
+          <a:lstStyle/>
+          <a:p>
+            <a:pPr algn="ctr" indent="0" marL="0">
+              <a:buNone/>
+            </a:pPr>
+            <a:r>
+              <a:rPr lang="en-US" sz="1100" b="1" dirty="0">
+                <a:solidFill>
+                  <a:srgbClr val="FFFFFF"/>
+                </a:solidFill>
+                <a:latin typeface="Calibri" pitchFamily="34" charset="0"/>
+                <a:ea typeface="Calibri" pitchFamily="34" charset="-122"/>
+                <a:cs typeface="Calibri" pitchFamily="34" charset="-120"/>
+              </a:rPr>
+              <a:t>2</a:t>
+            </a:r>
+            <a:endParaRPr lang="en-US" sz="1100" dirty="0"/>
+          </a:p>
+        </p:txBody>
+      </p:sp>
+      <p:sp>
+        <p:nvSpPr>
+          <p:cNvPr id="9" name="Text 7"/>
+          <p:cNvSpPr txBox="1"/>
+          <p:nvPr/>
+        </p:nvSpPr>
+        <p:spPr>
+          <a:xfrm>
+            <a:off x="969264" y="1938528"/>
+            <a:ext cx="6025896" cy="365760"/>
+          </a:xfrm>
+          <a:prstGeom prst="rect">
+            <a:avLst/>
+          </a:prstGeom>
+          <a:noFill/>
+          <a:ln/>
+        </p:spPr>
+        <p:txBody>
+          <a:bodyPr wrap="square" lIns="0" tIns="0" rIns="0" bIns="0" rtlCol="0" anchor="t"/>
+          <a:lstStyle/>
+          <a:p>
+            <a:pPr indent="0" marL="0">
+              <a:lnSpc>
+                <a:spcPct val="125000"/>
+              </a:lnSpc>
+              <a:buNone/>
+            </a:pPr>
+            <a:r>
+              <a:rPr lang="en-US" sz="1150" dirty="0">
+                <a:solidFill>
+                  <a:srgbClr val="222222"/>
+                </a:solidFill>
+                <a:latin typeface="Calibri" pitchFamily="34" charset="0"/>
+                <a:ea typeface="Calibri" pitchFamily="34" charset="-122"/>
+                <a:cs typeface="Calibri" pitchFamily="34" charset="-120"/>
+              </a:rPr>
+              <a:t>必要ならメモ欄に記入する（例：在庫切れのため別の景品に変更）</a:t>
+            </a:r>
+            <a:endParaRPr lang="en-US" sz="1150" dirty="0"/>
+          </a:p>
+        </p:txBody>
+      </p:sp>
+      <p:sp>
+        <p:nvSpPr>
+          <p:cNvPr id="10" name="Shape 8"/>
+          <p:cNvSpPr/>
+          <p:nvPr/>
+        </p:nvSpPr>
+        <p:spPr>
+          <a:xfrm>
+            <a:off x="566928" y="2414016"/>
+            <a:ext cx="274320" cy="274320"/>
+          </a:xfrm>
+          <a:prstGeom prst="ellipse">
+            <a:avLst/>
+          </a:prstGeom>
+          <a:solidFill>
+            <a:srgbClr val="B85042"/>
+          </a:solidFill>
+          <a:ln/>
+        </p:spPr>
+      </p:sp>
+      <p:sp>
+        <p:nvSpPr>
+          <p:cNvPr id="11" name="Text 9"/>
+          <p:cNvSpPr txBox="1"/>
+          <p:nvPr/>
+        </p:nvSpPr>
+        <p:spPr>
+          <a:xfrm>
+            <a:off x="566928" y="2414016"/>
+            <a:ext cx="274320" cy="274320"/>
+          </a:xfrm>
+          <a:prstGeom prst="rect">
+            <a:avLst/>
+          </a:prstGeom>
+          <a:noFill/>
+          <a:ln/>
+        </p:spPr>
+        <p:txBody>
+          <a:bodyPr wrap="square" lIns="0" tIns="0" rIns="0" bIns="0" rtlCol="0" anchor="ctr"/>
+          <a:lstStyle/>
+          <a:p>
+            <a:pPr algn="ctr" indent="0" marL="0">
+              <a:buNone/>
+            </a:pPr>
+            <a:r>
+              <a:rPr lang="en-US" sz="1100" b="1" dirty="0">
+                <a:solidFill>
+                  <a:srgbClr val="FFFFFF"/>
+                </a:solidFill>
+                <a:latin typeface="Calibri" pitchFamily="34" charset="0"/>
+                <a:ea typeface="Calibri" pitchFamily="34" charset="-122"/>
+                <a:cs typeface="Calibri" pitchFamily="34" charset="-120"/>
+              </a:rPr>
+              <a:t>3</a:t>
+            </a:r>
+            <a:endParaRPr lang="en-US" sz="1100" dirty="0"/>
+          </a:p>
+        </p:txBody>
+      </p:sp>
+      <p:sp>
+        <p:nvSpPr>
+          <p:cNvPr id="12" name="Text 10"/>
+          <p:cNvSpPr txBox="1"/>
+          <p:nvPr/>
+        </p:nvSpPr>
+        <p:spPr>
+          <a:xfrm>
+            <a:off x="969264" y="2395728"/>
+            <a:ext cx="6025896" cy="365760"/>
+          </a:xfrm>
+          <a:prstGeom prst="rect">
+            <a:avLst/>
+          </a:prstGeom>
+          <a:noFill/>
+          <a:ln/>
+        </p:spPr>
+        <p:txBody>
+          <a:bodyPr wrap="square" lIns="0" tIns="0" rIns="0" bIns="0" rtlCol="0" anchor="t"/>
+          <a:lstStyle/>
+          <a:p>
+            <a:pPr indent="0" marL="0">
+              <a:lnSpc>
+                <a:spcPct val="125000"/>
+              </a:lnSpc>
+              <a:buNone/>
+            </a:pPr>
+            <a:r>
+              <a:rPr lang="en-US" sz="1150" b="1" dirty="0">
+                <a:solidFill>
+                  <a:srgbClr val="222222"/>
+                </a:solidFill>
+                <a:latin typeface="Calibri" pitchFamily="34" charset="0"/>
+                <a:ea typeface="Calibri" pitchFamily="34" charset="-122"/>
+                <a:cs typeface="Calibri" pitchFamily="34" charset="-120"/>
+              </a:rPr>
+              <a:t>「交換済みにする」</a:t>
+            </a:r>
+            <a:pPr indent="0" marL="0">
+              <a:lnSpc>
+                <a:spcPct val="125000"/>
+              </a:lnSpc>
+              <a:buNone/>
+            </a:pPr>
+            <a:r>
+              <a:rPr lang="en-US" sz="1150" dirty="0">
+                <a:solidFill>
+                  <a:srgbClr val="222222"/>
+                </a:solidFill>
+                <a:latin typeface="Calibri" pitchFamily="34" charset="0"/>
+                <a:ea typeface="Calibri" pitchFamily="34" charset="-122"/>
+                <a:cs typeface="Calibri" pitchFamily="34" charset="-120"/>
+              </a:rPr>
+              <a:t>を押す</a:t>
+            </a:r>
+            <a:endParaRPr lang="en-US" sz="1150" dirty="0"/>
+          </a:p>
+        </p:txBody>
+      </p:sp>
+      <p:sp>
+        <p:nvSpPr>
+          <p:cNvPr id="13" name="Shape 11"/>
+          <p:cNvSpPr/>
+          <p:nvPr/>
+        </p:nvSpPr>
+        <p:spPr>
+          <a:xfrm>
+            <a:off x="566928" y="2871216"/>
+            <a:ext cx="274320" cy="274320"/>
+          </a:xfrm>
+          <a:prstGeom prst="ellipse">
+            <a:avLst/>
+          </a:prstGeom>
+          <a:solidFill>
+            <a:srgbClr val="B85042"/>
+          </a:solidFill>
+          <a:ln/>
+        </p:spPr>
+      </p:sp>
+      <p:sp>
+        <p:nvSpPr>
+          <p:cNvPr id="14" name="Text 12"/>
+          <p:cNvSpPr txBox="1"/>
+          <p:nvPr/>
+        </p:nvSpPr>
+        <p:spPr>
+          <a:xfrm>
+            <a:off x="566928" y="2871216"/>
+            <a:ext cx="274320" cy="274320"/>
+          </a:xfrm>
+          <a:prstGeom prst="rect">
+            <a:avLst/>
+          </a:prstGeom>
+          <a:noFill/>
+          <a:ln/>
+        </p:spPr>
+        <p:txBody>
+          <a:bodyPr wrap="square" lIns="0" tIns="0" rIns="0" bIns="0" rtlCol="0" anchor="ctr"/>
+          <a:lstStyle/>
+          <a:p>
+            <a:pPr algn="ctr" indent="0" marL="0">
+              <a:buNone/>
+            </a:pPr>
+            <a:r>
+              <a:rPr lang="en-US" sz="1100" b="1" dirty="0">
+                <a:solidFill>
+                  <a:srgbClr val="FFFFFF"/>
+                </a:solidFill>
+                <a:latin typeface="Calibri" pitchFamily="34" charset="0"/>
+                <a:ea typeface="Calibri" pitchFamily="34" charset="-122"/>
+                <a:cs typeface="Calibri" pitchFamily="34" charset="-120"/>
+              </a:rPr>
+              <a:t>4</a:t>
+            </a:r>
+            <a:endParaRPr lang="en-US" sz="1100" dirty="0"/>
+          </a:p>
+        </p:txBody>
+      </p:sp>
+      <p:sp>
+        <p:nvSpPr>
+          <p:cNvPr id="15" name="Text 13"/>
+          <p:cNvSpPr txBox="1"/>
+          <p:nvPr/>
+        </p:nvSpPr>
+        <p:spPr>
+          <a:xfrm>
+            <a:off x="969264" y="2852928"/>
+            <a:ext cx="6025896" cy="365760"/>
+          </a:xfrm>
+          <a:prstGeom prst="rect">
+            <a:avLst/>
+          </a:prstGeom>
+          <a:noFill/>
+          <a:ln/>
+        </p:spPr>
+        <p:txBody>
+          <a:bodyPr wrap="square" lIns="0" tIns="0" rIns="0" bIns="0" rtlCol="0" anchor="t"/>
+          <a:lstStyle/>
+          <a:p>
+            <a:pPr indent="0" marL="0">
+              <a:lnSpc>
+                <a:spcPct val="125000"/>
+              </a:lnSpc>
+              <a:buNone/>
+            </a:pPr>
+            <a:r>
+              <a:rPr lang="en-US" sz="1150" dirty="0">
+                <a:solidFill>
+                  <a:srgbClr val="222222"/>
+                </a:solidFill>
+                <a:latin typeface="Calibri" pitchFamily="34" charset="0"/>
+                <a:ea typeface="Calibri" pitchFamily="34" charset="-122"/>
+                <a:cs typeface="Calibri" pitchFamily="34" charset="-120"/>
+              </a:rPr>
+              <a:t>確認のメッセージが出たら「OK」を押す</a:t>
+            </a:r>
+            <a:endParaRPr lang="en-US" sz="1150" dirty="0"/>
+          </a:p>
+        </p:txBody>
+      </p:sp>
+      <p:sp>
+        <p:nvSpPr>
+          <p:cNvPr id="16" name="Shape 14"/>
+          <p:cNvSpPr/>
+          <p:nvPr/>
+        </p:nvSpPr>
+        <p:spPr>
+          <a:xfrm>
+            <a:off x="566928" y="3328416"/>
+            <a:ext cx="274320" cy="274320"/>
+          </a:xfrm>
+          <a:prstGeom prst="ellipse">
+            <a:avLst/>
+          </a:prstGeom>
+          <a:solidFill>
+            <a:srgbClr val="B85042"/>
+          </a:solidFill>
+          <a:ln/>
+        </p:spPr>
+      </p:sp>
+      <p:sp>
+        <p:nvSpPr>
+          <p:cNvPr id="17" name="Text 15"/>
+          <p:cNvSpPr txBox="1"/>
+          <p:nvPr/>
+        </p:nvSpPr>
+        <p:spPr>
+          <a:xfrm>
+            <a:off x="566928" y="3328416"/>
+            <a:ext cx="274320" cy="274320"/>
+          </a:xfrm>
+          <a:prstGeom prst="rect">
+            <a:avLst/>
+          </a:prstGeom>
+          <a:noFill/>
+          <a:ln/>
+        </p:spPr>
+        <p:txBody>
+          <a:bodyPr wrap="square" lIns="0" tIns="0" rIns="0" bIns="0" rtlCol="0" anchor="ctr"/>
+          <a:lstStyle/>
+          <a:p>
+            <a:pPr algn="ctr" indent="0" marL="0">
+              <a:buNone/>
+            </a:pPr>
+            <a:r>
+              <a:rPr lang="en-US" sz="1100" b="1" dirty="0">
+                <a:solidFill>
+                  <a:srgbClr val="FFFFFF"/>
+                </a:solidFill>
+                <a:latin typeface="Calibri" pitchFamily="34" charset="0"/>
+                <a:ea typeface="Calibri" pitchFamily="34" charset="-122"/>
+                <a:cs typeface="Calibri" pitchFamily="34" charset="-120"/>
+              </a:rPr>
+              <a:t>5</a:t>
+            </a:r>
+            <a:endParaRPr lang="en-US" sz="1100" dirty="0"/>
+          </a:p>
+        </p:txBody>
+      </p:sp>
+      <p:sp>
+        <p:nvSpPr>
+          <p:cNvPr id="18" name="Text 16"/>
+          <p:cNvSpPr txBox="1"/>
+          <p:nvPr/>
+        </p:nvSpPr>
+        <p:spPr>
+          <a:xfrm>
+            <a:off x="969264" y="3310128"/>
+            <a:ext cx="6025896" cy="365760"/>
+          </a:xfrm>
+          <a:prstGeom prst="rect">
+            <a:avLst/>
+          </a:prstGeom>
+          <a:noFill/>
+          <a:ln/>
+        </p:spPr>
+        <p:txBody>
+          <a:bodyPr wrap="square" lIns="0" tIns="0" rIns="0" bIns="0" rtlCol="0" anchor="t"/>
+          <a:lstStyle/>
+          <a:p>
+            <a:pPr indent="0" marL="0">
+              <a:lnSpc>
+                <a:spcPct val="125000"/>
+              </a:lnSpc>
+              <a:buNone/>
+            </a:pPr>
+            <a:r>
+              <a:rPr lang="en-US" sz="1150" dirty="0">
+                <a:solidFill>
+                  <a:srgbClr val="222222"/>
+                </a:solidFill>
+                <a:latin typeface="Calibri" pitchFamily="34" charset="0"/>
+                <a:ea typeface="Calibri" pitchFamily="34" charset="-122"/>
+                <a:cs typeface="Calibri" pitchFamily="34" charset="-120"/>
+              </a:rPr>
+              <a:t>「交換済みとして記録しました（景品名） 残数 ◯個」と出れば完了</a:t>
+            </a:r>
+            <a:endParaRPr lang="en-US" sz="1150" dirty="0"/>
+          </a:p>
+        </p:txBody>
+      </p:sp>
+      <p:sp>
+        <p:nvSpPr>
+          <p:cNvPr id="19" name="Text 17"/>
+          <p:cNvSpPr txBox="1"/>
+          <p:nvPr/>
+        </p:nvSpPr>
+        <p:spPr>
+          <a:xfrm>
+            <a:off x="566928" y="3767328"/>
+            <a:ext cx="6428232" cy="459994"/>
+          </a:xfrm>
+          <a:prstGeom prst="rect">
+            <a:avLst/>
+          </a:prstGeom>
+          <a:noFill/>
+          <a:ln/>
+        </p:spPr>
+        <p:txBody>
+          <a:bodyPr wrap="square" lIns="0" tIns="0" rIns="0" bIns="0" rtlCol="0" anchor="t"/>
+          <a:lstStyle/>
+          <a:p>
+            <a:pPr indent="0" marL="0">
+              <a:lnSpc>
+                <a:spcPct val="125000"/>
+              </a:lnSpc>
+              <a:buNone/>
+            </a:pPr>
+            <a:r>
               <a:rPr lang="en-US" sz="1100" dirty="0">
                 <a:solidFill>
                   <a:srgbClr val="222222"/>
@@ -6542,7 +7813,7 @@
                 <a:ea typeface="Calibri" pitchFamily="34" charset="-122"/>
                 <a:cs typeface="Calibri" pitchFamily="34" charset="-120"/>
               </a:rPr>
-              <a:t>照会画面の下に、</a:t>
+              <a:t>次の方を対応するときは、</a:t>
             </a:r>
             <a:pPr indent="0" marL="0">
               <a:lnSpc>
@@ -6559,7 +7830,7 @@
                 <a:ea typeface="Calibri" pitchFamily="34" charset="-122"/>
                 <a:cs typeface="Calibri" pitchFamily="34" charset="-120"/>
               </a:rPr>
-              <a:t>景品の残数</a:t>
+              <a:t>「次の来場者を照会する」</a:t>
             </a:r>
             <a:pPr indent="0" marL="0">
               <a:lnSpc>
@@ -6576,363 +7847,15 @@
                 <a:ea typeface="Calibri" pitchFamily="34" charset="-122"/>
                 <a:cs typeface="Calibri" pitchFamily="34" charset="-120"/>
               </a:rPr>
-              <a:t>の表があります。</a:t>
+              <a:t>を押してから、またQRコードを読み取ってください。</a:t>
             </a:r>
             <a:endParaRPr lang="en-US" sz="1100" dirty="0"/>
-          </a:p>
-        </p:txBody>
-      </p:sp>
-      <p:sp>
-        <p:nvSpPr>
-          <p:cNvPr id="5" name="Text 3"/>
-          <p:cNvSpPr txBox="1"/>
-          <p:nvPr/>
-        </p:nvSpPr>
-        <p:spPr>
-          <a:xfrm>
-            <a:off x="713232" y="1775333"/>
-            <a:ext cx="6281928" cy="257429"/>
-          </a:xfrm>
-          <a:prstGeom prst="rect">
-            <a:avLst/>
-          </a:prstGeom>
-          <a:noFill/>
-          <a:ln/>
-        </p:spPr>
-        <p:txBody>
-          <a:bodyPr wrap="square" lIns="0" tIns="0" rIns="0" bIns="0" rtlCol="0" anchor="t"/>
-          <a:lstStyle/>
-          <a:p>
-            <a:pPr marL="342900" indent="-342900">
-              <a:lnSpc>
-                <a:spcPct val="125000"/>
-              </a:lnSpc>
-              <a:buSzPct val="100000"/>
-              <a:buChar char="●"/>
-            </a:pPr>
-            <a:r>
-              <a:rPr lang="en-US" sz="1100" b="1" dirty="0">
-                <a:solidFill>
-                  <a:srgbClr val="222222"/>
-                </a:solidFill>
-                <a:latin typeface="Calibri" pitchFamily="34" charset="0"/>
-                <a:ea typeface="Calibri" pitchFamily="34" charset="-122"/>
-                <a:cs typeface="Calibri" pitchFamily="34" charset="-120"/>
-              </a:rPr>
-              <a:t>用意</a:t>
-            </a:r>
-            <a:pPr indent="0" marL="0">
-              <a:lnSpc>
-                <a:spcPct val="125000"/>
-              </a:lnSpc>
-              <a:buNone/>
-            </a:pPr>
-            <a:r>
-              <a:rPr lang="en-US" sz="1100" dirty="0">
-                <a:solidFill>
-                  <a:srgbClr val="222222"/>
-                </a:solidFill>
-                <a:latin typeface="Calibri" pitchFamily="34" charset="0"/>
-                <a:ea typeface="Calibri" pitchFamily="34" charset="-122"/>
-                <a:cs typeface="Calibri" pitchFamily="34" charset="-120"/>
-              </a:rPr>
-              <a:t>：事務局が登録した数量</a:t>
-            </a:r>
-            <a:endParaRPr lang="en-US" sz="1100" dirty="0"/>
-          </a:p>
-        </p:txBody>
-      </p:sp>
-      <p:sp>
-        <p:nvSpPr>
-          <p:cNvPr id="6" name="Text 4"/>
-          <p:cNvSpPr txBox="1"/>
-          <p:nvPr/>
-        </p:nvSpPr>
-        <p:spPr>
-          <a:xfrm>
-            <a:off x="713232" y="2051050"/>
-            <a:ext cx="6281928" cy="257429"/>
-          </a:xfrm>
-          <a:prstGeom prst="rect">
-            <a:avLst/>
-          </a:prstGeom>
-          <a:noFill/>
-          <a:ln/>
-        </p:spPr>
-        <p:txBody>
-          <a:bodyPr wrap="square" lIns="0" tIns="0" rIns="0" bIns="0" rtlCol="0" anchor="t"/>
-          <a:lstStyle/>
-          <a:p>
-            <a:pPr marL="342900" indent="-342900">
-              <a:lnSpc>
-                <a:spcPct val="125000"/>
-              </a:lnSpc>
-              <a:buSzPct val="100000"/>
-              <a:buChar char="●"/>
-            </a:pPr>
-            <a:r>
-              <a:rPr lang="en-US" sz="1100" b="1" dirty="0">
-                <a:solidFill>
-                  <a:srgbClr val="222222"/>
-                </a:solidFill>
-                <a:latin typeface="Calibri" pitchFamily="34" charset="0"/>
-                <a:ea typeface="Calibri" pitchFamily="34" charset="-122"/>
-                <a:cs typeface="Calibri" pitchFamily="34" charset="-120"/>
-              </a:rPr>
-              <a:t>交換済み</a:t>
-            </a:r>
-            <a:pPr indent="0" marL="0">
-              <a:lnSpc>
-                <a:spcPct val="125000"/>
-              </a:lnSpc>
-              <a:buNone/>
-            </a:pPr>
-            <a:r>
-              <a:rPr lang="en-US" sz="1100" dirty="0">
-                <a:solidFill>
-                  <a:srgbClr val="222222"/>
-                </a:solidFill>
-                <a:latin typeface="Calibri" pitchFamily="34" charset="0"/>
-                <a:ea typeface="Calibri" pitchFamily="34" charset="-122"/>
-                <a:cs typeface="Calibri" pitchFamily="34" charset="-120"/>
-              </a:rPr>
-              <a:t>：これまでにお渡しした数</a:t>
-            </a:r>
-            <a:endParaRPr lang="en-US" sz="1100" dirty="0"/>
-          </a:p>
-        </p:txBody>
-      </p:sp>
-      <p:sp>
-        <p:nvSpPr>
-          <p:cNvPr id="7" name="Text 5"/>
-          <p:cNvSpPr txBox="1"/>
-          <p:nvPr/>
-        </p:nvSpPr>
-        <p:spPr>
-          <a:xfrm>
-            <a:off x="713232" y="2326767"/>
-            <a:ext cx="6281928" cy="257429"/>
-          </a:xfrm>
-          <a:prstGeom prst="rect">
-            <a:avLst/>
-          </a:prstGeom>
-          <a:noFill/>
-          <a:ln/>
-        </p:spPr>
-        <p:txBody>
-          <a:bodyPr wrap="square" lIns="0" tIns="0" rIns="0" bIns="0" rtlCol="0" anchor="t"/>
-          <a:lstStyle/>
-          <a:p>
-            <a:pPr marL="342900" indent="-342900">
-              <a:lnSpc>
-                <a:spcPct val="125000"/>
-              </a:lnSpc>
-              <a:buSzPct val="100000"/>
-              <a:buChar char="●"/>
-            </a:pPr>
-            <a:r>
-              <a:rPr lang="en-US" sz="1100" b="1" dirty="0">
-                <a:solidFill>
-                  <a:srgbClr val="222222"/>
-                </a:solidFill>
-                <a:latin typeface="Calibri" pitchFamily="34" charset="0"/>
-                <a:ea typeface="Calibri" pitchFamily="34" charset="-122"/>
-                <a:cs typeface="Calibri" pitchFamily="34" charset="-120"/>
-              </a:rPr>
-              <a:t>残り</a:t>
-            </a:r>
-            <a:pPr indent="0" marL="0">
-              <a:lnSpc>
-                <a:spcPct val="125000"/>
-              </a:lnSpc>
-              <a:buNone/>
-            </a:pPr>
-            <a:r>
-              <a:rPr lang="en-US" sz="1100" dirty="0">
-                <a:solidFill>
-                  <a:srgbClr val="222222"/>
-                </a:solidFill>
-                <a:latin typeface="Calibri" pitchFamily="34" charset="0"/>
-                <a:ea typeface="Calibri" pitchFamily="34" charset="-122"/>
-                <a:cs typeface="Calibri" pitchFamily="34" charset="-120"/>
-              </a:rPr>
-              <a:t>：残っている数（「—」は数量を管理していない景品）</a:t>
-            </a:r>
-            <a:endParaRPr lang="en-US" sz="1100" dirty="0"/>
-          </a:p>
-        </p:txBody>
-      </p:sp>
-      <p:sp>
-        <p:nvSpPr>
-          <p:cNvPr id="8" name="Text 6"/>
-          <p:cNvSpPr txBox="1"/>
-          <p:nvPr/>
-        </p:nvSpPr>
-        <p:spPr>
-          <a:xfrm>
-            <a:off x="713232" y="2602484"/>
-            <a:ext cx="6281928" cy="257429"/>
-          </a:xfrm>
-          <a:prstGeom prst="rect">
-            <a:avLst/>
-          </a:prstGeom>
-          <a:noFill/>
-          <a:ln/>
-        </p:spPr>
-        <p:txBody>
-          <a:bodyPr wrap="square" lIns="0" tIns="0" rIns="0" bIns="0" rtlCol="0" anchor="t"/>
-          <a:lstStyle/>
-          <a:p>
-            <a:pPr marL="342900" indent="-342900">
-              <a:lnSpc>
-                <a:spcPct val="125000"/>
-              </a:lnSpc>
-              <a:buSzPct val="100000"/>
-              <a:buChar char="●"/>
-            </a:pPr>
-            <a:r>
-              <a:rPr lang="en-US" sz="1100" b="1" dirty="0">
-                <a:solidFill>
-                  <a:srgbClr val="222222"/>
-                </a:solidFill>
-                <a:latin typeface="Calibri" pitchFamily="34" charset="0"/>
-                <a:ea typeface="Calibri" pitchFamily="34" charset="-122"/>
-                <a:cs typeface="Calibri" pitchFamily="34" charset="-120"/>
-              </a:rPr>
-              <a:t>超過</a:t>
-            </a:r>
-            <a:pPr indent="0" marL="0">
-              <a:lnSpc>
-                <a:spcPct val="125000"/>
-              </a:lnSpc>
-              <a:buNone/>
-            </a:pPr>
-            <a:r>
-              <a:rPr lang="en-US" sz="1100" dirty="0">
-                <a:solidFill>
-                  <a:srgbClr val="222222"/>
-                </a:solidFill>
-                <a:latin typeface="Calibri" pitchFamily="34" charset="0"/>
-                <a:ea typeface="Calibri" pitchFamily="34" charset="-122"/>
-                <a:cs typeface="Calibri" pitchFamily="34" charset="-120"/>
-              </a:rPr>
-              <a:t>：用意した数を超えてお渡しした数</a:t>
-            </a:r>
-            <a:endParaRPr lang="en-US" sz="1100" dirty="0"/>
-          </a:p>
-        </p:txBody>
-      </p:sp>
-      <p:sp>
-        <p:nvSpPr>
-          <p:cNvPr id="9" name="Shape 7"/>
-          <p:cNvSpPr/>
-          <p:nvPr/>
-        </p:nvSpPr>
-        <p:spPr>
-          <a:xfrm>
-            <a:off x="566928" y="2878201"/>
-            <a:ext cx="6428232" cy="431102"/>
-          </a:xfrm>
-          <a:prstGeom prst="roundRect">
-            <a:avLst>
-              <a:gd name="adj" fmla="val 12726"/>
-            </a:avLst>
-          </a:prstGeom>
-          <a:solidFill>
-            <a:srgbClr val="FAEAE7"/>
-          </a:solidFill>
-          <a:ln w="9525">
-            <a:solidFill>
-              <a:srgbClr val="B85042"/>
-            </a:solidFill>
-            <a:prstDash val="solid"/>
-          </a:ln>
-        </p:spPr>
-      </p:sp>
-      <p:sp>
-        <p:nvSpPr>
-          <p:cNvPr id="10" name="Text 8"/>
-          <p:cNvSpPr txBox="1"/>
-          <p:nvPr/>
-        </p:nvSpPr>
-        <p:spPr>
-          <a:xfrm>
-            <a:off x="658368" y="2969641"/>
-            <a:ext cx="237744" cy="237744"/>
-          </a:xfrm>
-          <a:prstGeom prst="rect">
-            <a:avLst/>
-          </a:prstGeom>
-          <a:noFill/>
-          <a:ln/>
-        </p:spPr>
-        <p:txBody>
-          <a:bodyPr wrap="square" lIns="0" tIns="0" rIns="0" bIns="0" rtlCol="0" anchor="ctr"/>
-          <a:lstStyle/>
-          <a:p>
-            <a:pPr algn="ctr" indent="0" marL="0">
-              <a:buNone/>
-            </a:pPr>
-            <a:r>
-              <a:rPr lang="en-US" sz="1200" b="1" dirty="0">
-                <a:solidFill>
-                  <a:srgbClr val="B85042"/>
-                </a:solidFill>
-                <a:latin typeface="Calibri" pitchFamily="34" charset="0"/>
-                <a:ea typeface="Calibri" pitchFamily="34" charset="-122"/>
-                <a:cs typeface="Calibri" pitchFamily="34" charset="-120"/>
-              </a:rPr>
-              <a:t>i</a:t>
-            </a:r>
-            <a:endParaRPr lang="en-US" sz="1200" dirty="0"/>
-          </a:p>
-        </p:txBody>
-      </p:sp>
-      <p:sp>
-        <p:nvSpPr>
-          <p:cNvPr id="11" name="Text 9"/>
-          <p:cNvSpPr txBox="1"/>
-          <p:nvPr/>
-        </p:nvSpPr>
-        <p:spPr>
-          <a:xfrm>
-            <a:off x="950976" y="2987929"/>
-            <a:ext cx="5925312" cy="248221"/>
-          </a:xfrm>
-          <a:prstGeom prst="rect">
-            <a:avLst/>
-          </a:prstGeom>
-          <a:noFill/>
-          <a:ln/>
-        </p:spPr>
-        <p:txBody>
-          <a:bodyPr wrap="square" lIns="0" tIns="0" rIns="0" bIns="0" rtlCol="0" anchor="t"/>
-          <a:lstStyle/>
-          <a:p>
-            <a:pPr indent="0" marL="0">
-              <a:lnSpc>
-                <a:spcPct val="120000"/>
-              </a:lnSpc>
-              <a:buNone/>
-            </a:pPr>
-            <a:r>
-              <a:rPr lang="en-US" sz="1050" dirty="0">
-                <a:solidFill>
-                  <a:srgbClr val="222222"/>
-                </a:solidFill>
-                <a:latin typeface="Calibri" pitchFamily="34" charset="0"/>
-                <a:ea typeface="Calibri" pitchFamily="34" charset="-122"/>
-                <a:cs typeface="Calibri" pitchFamily="34" charset="-120"/>
-              </a:rPr>
-              <a:t>残りが少なくなってきたら、早めに事務局へお知らせください。</a:t>
-            </a:r>
-            <a:endParaRPr lang="en-US" sz="1050" dirty="0"/>
           </a:p>
         </p:txBody>
       </p:sp>
       <p:pic>
         <p:nvPicPr>
-          <p:cNvPr id="12" name="Image 0" descr="C:\Users\sato\Desktop\enque\docs\images\p-stock.png">    </p:cNvPr>
+          <p:cNvPr id="20" name="Image 0" descr="C:\Users\sato\Desktop\enque\docs\images\p-claim-saved.png">    </p:cNvPr>
           <p:cNvPicPr>
             <a:picLocks noChangeAspect="1"/>
           </p:cNvPicPr>
@@ -6946,8 +7869,8 @@
         </p:blipFill>
         <p:spPr>
           <a:xfrm>
-            <a:off x="2018596" y="3382455"/>
-            <a:ext cx="3524896" cy="3474720"/>
+            <a:off x="566928" y="4263898"/>
+            <a:ext cx="6428232" cy="2870972"/>
           </a:xfrm>
           <a:prstGeom prst="rect">
             <a:avLst/>
@@ -6956,13 +7879,13 @@
       </p:pic>
       <p:sp>
         <p:nvSpPr>
-          <p:cNvPr id="13" name="Text 10"/>
-          <p:cNvSpPr txBox="1"/>
-          <p:nvPr/>
-        </p:nvSpPr>
-        <p:spPr>
-          <a:xfrm>
-            <a:off x="566928" y="6912039"/>
+          <p:cNvPr id="21" name="Text 18"/>
+          <p:cNvSpPr txBox="1"/>
+          <p:nvPr/>
+        </p:nvSpPr>
+        <p:spPr>
+          <a:xfrm>
+            <a:off x="566928" y="7189734"/>
             <a:ext cx="6428232" cy="274320"/>
           </a:xfrm>
           <a:prstGeom prst="rect">
@@ -6987,7 +7910,7 @@
                 <a:ea typeface="Calibri" pitchFamily="34" charset="-122"/>
                 <a:cs typeface="Calibri" pitchFamily="34" charset="-120"/>
               </a:rPr>
-              <a:t>照会画面の下部にある「景品の残数」の表。</a:t>
+              <a:t>「交換済みとして記録しました」のメッセージが出ている画面。</a:t>
             </a:r>
             <a:endParaRPr lang="en-US" sz="950" dirty="0"/>
           </a:p>
@@ -6995,7 +7918,7 @@
       </p:sp>
       <p:sp>
         <p:nvSpPr>
-          <p:cNvPr id="14" name="Text 11"/>
+          <p:cNvPr id="22" name="Text 19"/>
           <p:cNvSpPr txBox="1"/>
           <p:nvPr/>
         </p:nvSpPr>
@@ -7136,7 +8059,7 @@
                 <a:ea typeface="Calibri" pitchFamily="34" charset="-122"/>
                 <a:cs typeface="Calibri" pitchFamily="34" charset="-120"/>
               </a:rPr>
-              <a:t>困ったときは</a:t>
+              <a:t>残りの数を確認する</a:t>
             </a:r>
             <a:endParaRPr lang="en-US" sz="2200" dirty="0"/>
           </a:p>
@@ -7150,8 +8073,8 @@
         </p:nvSpPr>
         <p:spPr>
           <a:xfrm>
-            <a:off x="566928" y="1591056"/>
-            <a:ext cx="6428232" cy="257810"/>
+            <a:off x="566928" y="1481328"/>
+            <a:ext cx="6428232" cy="257429"/>
           </a:xfrm>
           <a:prstGeom prst="rect">
             <a:avLst/>
@@ -7164,20 +8087,57 @@
           <a:lstStyle/>
           <a:p>
             <a:pPr indent="0" marL="0">
-              <a:buNone/>
-            </a:pPr>
-            <a:r>
-              <a:rPr lang="en-US" sz="1400" b="1" dirty="0">
-                <a:solidFill>
-                  <a:srgbClr val="B85042"/>
-                </a:solidFill>
-                <a:latin typeface="Calibri" pitchFamily="34" charset="0"/>
-                <a:ea typeface="Calibri" pitchFamily="34" charset="-122"/>
-                <a:cs typeface="Calibri" pitchFamily="34" charset="-120"/>
-              </a:rPr>
-              <a:t>QRコードが読み取れない</a:t>
-            </a:r>
-            <a:endParaRPr lang="en-US" sz="1400" dirty="0"/>
+              <a:lnSpc>
+                <a:spcPct val="125000"/>
+              </a:lnSpc>
+              <a:buNone/>
+            </a:pPr>
+            <a:r>
+              <a:rPr lang="en-US" sz="1100" dirty="0">
+                <a:solidFill>
+                  <a:srgbClr val="222222"/>
+                </a:solidFill>
+                <a:latin typeface="Calibri" pitchFamily="34" charset="0"/>
+                <a:ea typeface="Calibri" pitchFamily="34" charset="-122"/>
+                <a:cs typeface="Calibri" pitchFamily="34" charset="-120"/>
+              </a:rPr>
+              <a:t>照会画面の下に、</a:t>
+            </a:r>
+            <a:pPr indent="0" marL="0">
+              <a:lnSpc>
+                <a:spcPct val="125000"/>
+              </a:lnSpc>
+              <a:buNone/>
+            </a:pPr>
+            <a:r>
+              <a:rPr lang="en-US" sz="1100" b="1" dirty="0">
+                <a:solidFill>
+                  <a:srgbClr val="222222"/>
+                </a:solidFill>
+                <a:latin typeface="Calibri" pitchFamily="34" charset="0"/>
+                <a:ea typeface="Calibri" pitchFamily="34" charset="-122"/>
+                <a:cs typeface="Calibri" pitchFamily="34" charset="-120"/>
+              </a:rPr>
+              <a:t>景品の残数</a:t>
+            </a:r>
+            <a:pPr indent="0" marL="0">
+              <a:lnSpc>
+                <a:spcPct val="125000"/>
+              </a:lnSpc>
+              <a:buNone/>
+            </a:pPr>
+            <a:r>
+              <a:rPr lang="en-US" sz="1100" dirty="0">
+                <a:solidFill>
+                  <a:srgbClr val="222222"/>
+                </a:solidFill>
+                <a:latin typeface="Calibri" pitchFamily="34" charset="0"/>
+                <a:ea typeface="Calibri" pitchFamily="34" charset="-122"/>
+                <a:cs typeface="Calibri" pitchFamily="34" charset="-120"/>
+              </a:rPr>
+              <a:t>の表があります。</a:t>
+            </a:r>
+            <a:endParaRPr lang="en-US" sz="1100" dirty="0"/>
           </a:p>
         </p:txBody>
       </p:sp>
@@ -7189,535 +8149,8 @@
         </p:nvSpPr>
         <p:spPr>
           <a:xfrm>
-            <a:off x="566928" y="1922018"/>
-            <a:ext cx="6428232" cy="459994"/>
-          </a:xfrm>
-          <a:prstGeom prst="rect">
-            <a:avLst/>
-          </a:prstGeom>
-          <a:noFill/>
-          <a:ln/>
-        </p:spPr>
-        <p:txBody>
-          <a:bodyPr wrap="square" lIns="0" tIns="0" rIns="0" bIns="0" rtlCol="0" anchor="t"/>
-          <a:lstStyle/>
-          <a:p>
-            <a:pPr indent="0" marL="0">
-              <a:lnSpc>
-                <a:spcPct val="125000"/>
-              </a:lnSpc>
-              <a:buNone/>
-            </a:pPr>
-            <a:r>
-              <a:rPr lang="en-US" sz="1100" dirty="0">
-                <a:solidFill>
-                  <a:srgbClr val="222222"/>
-                </a:solidFill>
-                <a:latin typeface="Calibri" pitchFamily="34" charset="0"/>
-                <a:ea typeface="Calibri" pitchFamily="34" charset="-122"/>
-                <a:cs typeface="Calibri" pitchFamily="34" charset="-120"/>
-              </a:rPr>
-              <a:t>来場者の画面に表示されている</a:t>
-            </a:r>
-            <a:pPr indent="0" marL="0">
-              <a:lnSpc>
-                <a:spcPct val="125000"/>
-              </a:lnSpc>
-              <a:buNone/>
-            </a:pPr>
-            <a:r>
-              <a:rPr lang="en-US" sz="1100" b="1" dirty="0">
-                <a:solidFill>
-                  <a:srgbClr val="222222"/>
-                </a:solidFill>
-                <a:latin typeface="Calibri" pitchFamily="34" charset="0"/>
-                <a:ea typeface="Calibri" pitchFamily="34" charset="-122"/>
-                <a:cs typeface="Calibri" pitchFamily="34" charset="-120"/>
-              </a:rPr>
-              <a:t>交換コード</a:t>
-            </a:r>
-            <a:pPr indent="0" marL="0">
-              <a:lnSpc>
-                <a:spcPct val="125000"/>
-              </a:lnSpc>
-              <a:buNone/>
-            </a:pPr>
-            <a:r>
-              <a:rPr lang="en-US" sz="1100" dirty="0">
-                <a:solidFill>
-                  <a:srgbClr val="222222"/>
-                </a:solidFill>
-                <a:latin typeface="Calibri" pitchFamily="34" charset="0"/>
-                <a:ea typeface="Calibri" pitchFamily="34" charset="-122"/>
-                <a:cs typeface="Calibri" pitchFamily="34" charset="-120"/>
-              </a:rPr>
-              <a:t>（例：ABCD-2345）を、照会画面の入力欄に手で入力して「照会する」を押してください。小文字やハイフンなしで入力しても大丈夫です。</a:t>
-            </a:r>
-            <a:endParaRPr lang="en-US" sz="1100" dirty="0"/>
-          </a:p>
-        </p:txBody>
-      </p:sp>
-      <p:sp>
-        <p:nvSpPr>
-          <p:cNvPr id="6" name="Text 4"/>
-          <p:cNvSpPr txBox="1"/>
-          <p:nvPr/>
-        </p:nvSpPr>
-        <p:spPr>
-          <a:xfrm>
-            <a:off x="566928" y="2528316"/>
-            <a:ext cx="6428232" cy="257810"/>
-          </a:xfrm>
-          <a:prstGeom prst="rect">
-            <a:avLst/>
-          </a:prstGeom>
-          <a:noFill/>
-          <a:ln/>
-        </p:spPr>
-        <p:txBody>
-          <a:bodyPr wrap="square" lIns="0" tIns="0" rIns="0" bIns="0" rtlCol="0" anchor="t"/>
-          <a:lstStyle/>
-          <a:p>
-            <a:pPr indent="0" marL="0">
-              <a:buNone/>
-            </a:pPr>
-            <a:r>
-              <a:rPr lang="en-US" sz="1400" b="1" dirty="0">
-                <a:solidFill>
-                  <a:srgbClr val="B85042"/>
-                </a:solidFill>
-                <a:latin typeface="Calibri" pitchFamily="34" charset="0"/>
-                <a:ea typeface="Calibri" pitchFamily="34" charset="-122"/>
-                <a:cs typeface="Calibri" pitchFamily="34" charset="-120"/>
-              </a:rPr>
-              <a:t>「該当する交換コードが見つかりません」と出る</a:t>
-            </a:r>
-            <a:endParaRPr lang="en-US" sz="1400" dirty="0"/>
-          </a:p>
-        </p:txBody>
-      </p:sp>
-      <p:sp>
-        <p:nvSpPr>
-          <p:cNvPr id="7" name="Text 5"/>
-          <p:cNvSpPr txBox="1"/>
-          <p:nvPr/>
-        </p:nvSpPr>
-        <p:spPr>
-          <a:xfrm>
-            <a:off x="566928" y="2859278"/>
-            <a:ext cx="6428232" cy="459994"/>
-          </a:xfrm>
-          <a:prstGeom prst="rect">
-            <a:avLst/>
-          </a:prstGeom>
-          <a:noFill/>
-          <a:ln/>
-        </p:spPr>
-        <p:txBody>
-          <a:bodyPr wrap="square" lIns="0" tIns="0" rIns="0" bIns="0" rtlCol="0" anchor="t"/>
-          <a:lstStyle/>
-          <a:p>
-            <a:pPr indent="0" marL="0">
-              <a:lnSpc>
-                <a:spcPct val="125000"/>
-              </a:lnSpc>
-              <a:buNone/>
-            </a:pPr>
-            <a:r>
-              <a:rPr lang="en-US" sz="1100" dirty="0">
-                <a:solidFill>
-                  <a:srgbClr val="222222"/>
-                </a:solidFill>
-                <a:latin typeface="Calibri" pitchFamily="34" charset="0"/>
-                <a:ea typeface="Calibri" pitchFamily="34" charset="-122"/>
-                <a:cs typeface="Calibri" pitchFamily="34" charset="-120"/>
-              </a:rPr>
-              <a:t>入力した文字をご確認ください。数字の0とアルファベットのO、1とIは</a:t>
-            </a:r>
-            <a:pPr indent="0" marL="0">
-              <a:lnSpc>
-                <a:spcPct val="125000"/>
-              </a:lnSpc>
-              <a:buNone/>
-            </a:pPr>
-            <a:r>
-              <a:rPr lang="en-US" sz="1100" b="1" dirty="0">
-                <a:solidFill>
-                  <a:srgbClr val="222222"/>
-                </a:solidFill>
-                <a:latin typeface="Calibri" pitchFamily="34" charset="0"/>
-                <a:ea typeface="Calibri" pitchFamily="34" charset="-122"/>
-                <a:cs typeface="Calibri" pitchFamily="34" charset="-120"/>
-              </a:rPr>
-              <a:t>使われていません</a:t>
-            </a:r>
-            <a:pPr indent="0" marL="0">
-              <a:lnSpc>
-                <a:spcPct val="125000"/>
-              </a:lnSpc>
-              <a:buNone/>
-            </a:pPr>
-            <a:r>
-              <a:rPr lang="en-US" sz="1100" dirty="0">
-                <a:solidFill>
-                  <a:srgbClr val="222222"/>
-                </a:solidFill>
-                <a:latin typeface="Calibri" pitchFamily="34" charset="0"/>
-                <a:ea typeface="Calibri" pitchFamily="34" charset="-122"/>
-                <a:cs typeface="Calibri" pitchFamily="34" charset="-120"/>
-              </a:rPr>
-              <a:t>。読み間違いの可能性があります。</a:t>
-            </a:r>
-            <a:endParaRPr lang="en-US" sz="1100" dirty="0"/>
-          </a:p>
-        </p:txBody>
-      </p:sp>
-      <p:sp>
-        <p:nvSpPr>
-          <p:cNvPr id="8" name="Text 6"/>
-          <p:cNvSpPr txBox="1"/>
-          <p:nvPr/>
-        </p:nvSpPr>
-        <p:spPr>
-          <a:xfrm>
-            <a:off x="566928" y="3465576"/>
-            <a:ext cx="6428232" cy="257810"/>
-          </a:xfrm>
-          <a:prstGeom prst="rect">
-            <a:avLst/>
-          </a:prstGeom>
-          <a:noFill/>
-          <a:ln/>
-        </p:spPr>
-        <p:txBody>
-          <a:bodyPr wrap="square" lIns="0" tIns="0" rIns="0" bIns="0" rtlCol="0" anchor="t"/>
-          <a:lstStyle/>
-          <a:p>
-            <a:pPr indent="0" marL="0">
-              <a:buNone/>
-            </a:pPr>
-            <a:r>
-              <a:rPr lang="en-US" sz="1400" b="1" dirty="0">
-                <a:solidFill>
-                  <a:srgbClr val="B85042"/>
-                </a:solidFill>
-                <a:latin typeface="Calibri" pitchFamily="34" charset="0"/>
-                <a:ea typeface="Calibri" pitchFamily="34" charset="-122"/>
-                <a:cs typeface="Calibri" pitchFamily="34" charset="-120"/>
-              </a:rPr>
-              <a:t>来場者の画面に交換コードが出ていない</a:t>
-            </a:r>
-            <a:endParaRPr lang="en-US" sz="1400" dirty="0"/>
-          </a:p>
-        </p:txBody>
-      </p:sp>
-      <p:sp>
-        <p:nvSpPr>
-          <p:cNvPr id="9" name="Text 7"/>
-          <p:cNvSpPr txBox="1"/>
-          <p:nvPr/>
-        </p:nvSpPr>
-        <p:spPr>
-          <a:xfrm>
-            <a:off x="566928" y="3796538"/>
-            <a:ext cx="6428232" cy="459994"/>
-          </a:xfrm>
-          <a:prstGeom prst="rect">
-            <a:avLst/>
-          </a:prstGeom>
-          <a:noFill/>
-          <a:ln/>
-        </p:spPr>
-        <p:txBody>
-          <a:bodyPr wrap="square" lIns="0" tIns="0" rIns="0" bIns="0" rtlCol="0" anchor="t"/>
-          <a:lstStyle/>
-          <a:p>
-            <a:pPr indent="0" marL="0">
-              <a:lnSpc>
-                <a:spcPct val="125000"/>
-              </a:lnSpc>
-              <a:buNone/>
-            </a:pPr>
-            <a:r>
-              <a:rPr lang="en-US" sz="1100" dirty="0">
-                <a:solidFill>
-                  <a:srgbClr val="222222"/>
-                </a:solidFill>
-                <a:latin typeface="Calibri" pitchFamily="34" charset="0"/>
-                <a:ea typeface="Calibri" pitchFamily="34" charset="-122"/>
-                <a:cs typeface="Calibri" pitchFamily="34" charset="-120"/>
-              </a:rPr>
-              <a:t>まだどのブースのアンケートにも回答していない可能性があります。「ブースのQRコードからアンケートに回答すると表示されます」とご案内ください。</a:t>
-            </a:r>
-            <a:endParaRPr lang="en-US" sz="1100" dirty="0"/>
-          </a:p>
-        </p:txBody>
-      </p:sp>
-      <p:sp>
-        <p:nvSpPr>
-          <p:cNvPr id="10" name="Text 8"/>
-          <p:cNvSpPr txBox="1"/>
-          <p:nvPr/>
-        </p:nvSpPr>
-        <p:spPr>
-          <a:xfrm>
-            <a:off x="566928" y="4402836"/>
-            <a:ext cx="6428232" cy="257810"/>
-          </a:xfrm>
-          <a:prstGeom prst="rect">
-            <a:avLst/>
-          </a:prstGeom>
-          <a:noFill/>
-          <a:ln/>
-        </p:spPr>
-        <p:txBody>
-          <a:bodyPr wrap="square" lIns="0" tIns="0" rIns="0" bIns="0" rtlCol="0" anchor="t"/>
-          <a:lstStyle/>
-          <a:p>
-            <a:pPr indent="0" marL="0">
-              <a:buNone/>
-            </a:pPr>
-            <a:r>
-              <a:rPr lang="en-US" sz="1400" b="1" dirty="0">
-                <a:solidFill>
-                  <a:srgbClr val="B85042"/>
-                </a:solidFill>
-                <a:latin typeface="Calibri" pitchFamily="34" charset="0"/>
-                <a:ea typeface="Calibri" pitchFamily="34" charset="-122"/>
-                <a:cs typeface="Calibri" pitchFamily="34" charset="-120"/>
-              </a:rPr>
-              <a:t>メールアドレスを間違えたと言われた</a:t>
-            </a:r>
-            <a:endParaRPr lang="en-US" sz="1400" dirty="0"/>
-          </a:p>
-        </p:txBody>
-      </p:sp>
-      <p:sp>
-        <p:nvSpPr>
-          <p:cNvPr id="11" name="Text 9"/>
-          <p:cNvSpPr txBox="1"/>
-          <p:nvPr/>
-        </p:nvSpPr>
-        <p:spPr>
-          <a:xfrm>
-            <a:off x="566928" y="4733798"/>
-            <a:ext cx="6428232" cy="257429"/>
-          </a:xfrm>
-          <a:prstGeom prst="rect">
-            <a:avLst/>
-          </a:prstGeom>
-          <a:noFill/>
-          <a:ln/>
-        </p:spPr>
-        <p:txBody>
-          <a:bodyPr wrap="square" lIns="0" tIns="0" rIns="0" bIns="0" rtlCol="0" anchor="t"/>
-          <a:lstStyle/>
-          <a:p>
-            <a:pPr indent="0" marL="0">
-              <a:lnSpc>
-                <a:spcPct val="125000"/>
-              </a:lnSpc>
-              <a:buNone/>
-            </a:pPr>
-            <a:r>
-              <a:rPr lang="en-US" sz="1100" dirty="0">
-                <a:solidFill>
-                  <a:srgbClr val="222222"/>
-                </a:solidFill>
-                <a:latin typeface="Calibri" pitchFamily="34" charset="0"/>
-                <a:ea typeface="Calibri" pitchFamily="34" charset="-122"/>
-                <a:cs typeface="Calibri" pitchFamily="34" charset="-120"/>
-              </a:rPr>
-              <a:t>来場者ご自身で直せます。</a:t>
-            </a:r>
-            <a:pPr indent="0" marL="0">
-              <a:lnSpc>
-                <a:spcPct val="125000"/>
-              </a:lnSpc>
-              <a:buNone/>
-            </a:pPr>
-            <a:r>
-              <a:rPr lang="en-US" sz="1100" b="1" dirty="0">
-                <a:solidFill>
-                  <a:srgbClr val="222222"/>
-                </a:solidFill>
-                <a:latin typeface="Calibri" pitchFamily="34" charset="0"/>
-                <a:ea typeface="Calibri" pitchFamily="34" charset="-122"/>
-                <a:cs typeface="Calibri" pitchFamily="34" charset="-120"/>
-              </a:rPr>
-              <a:t>回答済み画面</a:t>
-            </a:r>
-            <a:pPr indent="0" marL="0">
-              <a:lnSpc>
-                <a:spcPct val="125000"/>
-              </a:lnSpc>
-              <a:buNone/>
-            </a:pPr>
-            <a:r>
-              <a:rPr lang="en-US" sz="1100" dirty="0">
-                <a:solidFill>
-                  <a:srgbClr val="222222"/>
-                </a:solidFill>
-                <a:latin typeface="Calibri" pitchFamily="34" charset="0"/>
-                <a:ea typeface="Calibri" pitchFamily="34" charset="-122"/>
-                <a:cs typeface="Calibri" pitchFamily="34" charset="-120"/>
-              </a:rPr>
-              <a:t>（交換コードが出ている画面）の下にある</a:t>
-            </a:r>
-            <a:endParaRPr lang="en-US" sz="1100" dirty="0"/>
-          </a:p>
-        </p:txBody>
-      </p:sp>
-      <p:sp>
-        <p:nvSpPr>
-          <p:cNvPr id="12" name="Text 10"/>
-          <p:cNvSpPr txBox="1"/>
-          <p:nvPr/>
-        </p:nvSpPr>
-        <p:spPr>
-          <a:xfrm>
-            <a:off x="566928" y="5027803"/>
-            <a:ext cx="6428232" cy="257429"/>
-          </a:xfrm>
-          <a:prstGeom prst="rect">
-            <a:avLst/>
-          </a:prstGeom>
-          <a:noFill/>
-          <a:ln/>
-        </p:spPr>
-        <p:txBody>
-          <a:bodyPr wrap="square" lIns="0" tIns="0" rIns="0" bIns="0" rtlCol="0" anchor="t"/>
-          <a:lstStyle/>
-          <a:p>
-            <a:pPr indent="0" marL="0">
-              <a:lnSpc>
-                <a:spcPct val="125000"/>
-              </a:lnSpc>
-              <a:buNone/>
-            </a:pPr>
-            <a:r>
-              <a:rPr lang="en-US" sz="1100" b="1" dirty="0">
-                <a:solidFill>
-                  <a:srgbClr val="222222"/>
-                </a:solidFill>
-                <a:latin typeface="Calibri" pitchFamily="34" charset="0"/>
-                <a:ea typeface="Calibri" pitchFamily="34" charset="-122"/>
-                <a:cs typeface="Calibri" pitchFamily="34" charset="-120"/>
-              </a:rPr>
-              <a:t>「登録したメールアドレスを変更する」</a:t>
-            </a:r>
-            <a:pPr indent="0" marL="0">
-              <a:lnSpc>
-                <a:spcPct val="125000"/>
-              </a:lnSpc>
-              <a:buNone/>
-            </a:pPr>
-            <a:r>
-              <a:rPr lang="en-US" sz="1100" dirty="0">
-                <a:solidFill>
-                  <a:srgbClr val="222222"/>
-                </a:solidFill>
-                <a:latin typeface="Calibri" pitchFamily="34" charset="0"/>
-                <a:ea typeface="Calibri" pitchFamily="34" charset="-122"/>
-                <a:cs typeface="Calibri" pitchFamily="34" charset="-120"/>
-              </a:rPr>
-              <a:t>を開いて、新しいアドレスを入れていただいてください。</a:t>
-            </a:r>
-            <a:endParaRPr lang="en-US" sz="1100" dirty="0"/>
-          </a:p>
-        </p:txBody>
-      </p:sp>
-      <p:sp>
-        <p:nvSpPr>
-          <p:cNvPr id="13" name="Text 11"/>
-          <p:cNvSpPr txBox="1"/>
-          <p:nvPr/>
-        </p:nvSpPr>
-        <p:spPr>
-          <a:xfrm>
-            <a:off x="566928" y="5321808"/>
-            <a:ext cx="6428232" cy="257429"/>
-          </a:xfrm>
-          <a:prstGeom prst="rect">
-            <a:avLst/>
-          </a:prstGeom>
-          <a:noFill/>
-          <a:ln/>
-        </p:spPr>
-        <p:txBody>
-          <a:bodyPr wrap="square" lIns="0" tIns="0" rIns="0" bIns="0" rtlCol="0" anchor="t"/>
-          <a:lstStyle/>
-          <a:p>
-            <a:pPr indent="0" marL="0">
-              <a:lnSpc>
-                <a:spcPct val="125000"/>
-              </a:lnSpc>
-              <a:buNone/>
-            </a:pPr>
-            <a:r>
-              <a:rPr lang="en-US" sz="1100" dirty="0">
-                <a:solidFill>
-                  <a:srgbClr val="222222"/>
-                </a:solidFill>
-                <a:latin typeface="Calibri" pitchFamily="34" charset="0"/>
-                <a:ea typeface="Calibri" pitchFamily="34" charset="-122"/>
-                <a:cs typeface="Calibri" pitchFamily="34" charset="-120"/>
-              </a:rPr>
-              <a:t>受付側でアドレスを見たり直したりすることはできません。</a:t>
-            </a:r>
-            <a:endParaRPr lang="en-US" sz="1100" dirty="0"/>
-          </a:p>
-        </p:txBody>
-      </p:sp>
-      <p:sp>
-        <p:nvSpPr>
-          <p:cNvPr id="14" name="Text 12"/>
-          <p:cNvSpPr txBox="1"/>
-          <p:nvPr/>
-        </p:nvSpPr>
-        <p:spPr>
-          <a:xfrm>
-            <a:off x="566928" y="5725541"/>
-            <a:ext cx="6428232" cy="257810"/>
-          </a:xfrm>
-          <a:prstGeom prst="rect">
-            <a:avLst/>
-          </a:prstGeom>
-          <a:noFill/>
-          <a:ln/>
-        </p:spPr>
-        <p:txBody>
-          <a:bodyPr wrap="square" lIns="0" tIns="0" rIns="0" bIns="0" rtlCol="0" anchor="t"/>
-          <a:lstStyle/>
-          <a:p>
-            <a:pPr indent="0" marL="0">
-              <a:buNone/>
-            </a:pPr>
-            <a:r>
-              <a:rPr lang="en-US" sz="1400" b="1" dirty="0">
-                <a:solidFill>
-                  <a:srgbClr val="B85042"/>
-                </a:solidFill>
-                <a:latin typeface="Calibri" pitchFamily="34" charset="0"/>
-                <a:ea typeface="Calibri" pitchFamily="34" charset="-122"/>
-                <a:cs typeface="Calibri" pitchFamily="34" charset="-120"/>
-              </a:rPr>
-              <a:t>カメラが起動しない</a:t>
-            </a:r>
-            <a:endParaRPr lang="en-US" sz="1400" dirty="0"/>
-          </a:p>
-        </p:txBody>
-      </p:sp>
-      <p:sp>
-        <p:nvSpPr>
-          <p:cNvPr id="15" name="Text 13"/>
-          <p:cNvSpPr txBox="1"/>
-          <p:nvPr/>
-        </p:nvSpPr>
-        <p:spPr>
-          <a:xfrm>
-            <a:off x="713232" y="6056503"/>
-            <a:ext cx="6281928" cy="459994"/>
+            <a:off x="713232" y="1775333"/>
+            <a:ext cx="6281928" cy="257429"/>
           </a:xfrm>
           <a:prstGeom prst="rect">
             <a:avLst/>
@@ -7737,6 +8170,23 @@
               <a:buChar char="●"/>
             </a:pPr>
             <a:r>
+              <a:rPr lang="en-US" sz="1100" b="1" dirty="0">
+                <a:solidFill>
+                  <a:srgbClr val="222222"/>
+                </a:solidFill>
+                <a:latin typeface="Calibri" pitchFamily="34" charset="0"/>
+                <a:ea typeface="Calibri" pitchFamily="34" charset="-122"/>
+                <a:cs typeface="Calibri" pitchFamily="34" charset="-120"/>
+              </a:rPr>
+              <a:t>用意</a:t>
+            </a:r>
+            <a:pPr indent="0" marL="0">
+              <a:lnSpc>
+                <a:spcPct val="125000"/>
+              </a:lnSpc>
+              <a:buNone/>
+            </a:pPr>
+            <a:r>
               <a:rPr lang="en-US" sz="1100" dirty="0">
                 <a:solidFill>
                   <a:srgbClr val="222222"/>
@@ -7745,7 +8195,7 @@
                 <a:ea typeface="Calibri" pitchFamily="34" charset="-122"/>
                 <a:cs typeface="Calibri" pitchFamily="34" charset="-120"/>
               </a:rPr>
-              <a:t>カメラの使用を「許可」していない可能性があります。ブラウザの設定からこのサイトのカメラを許可してください</a:t>
+              <a:t>：事務局が登録した数量</a:t>
             </a:r>
             <a:endParaRPr lang="en-US" sz="1100" dirty="0"/>
           </a:p>
@@ -7753,14 +8203,14 @@
       </p:sp>
       <p:sp>
         <p:nvSpPr>
-          <p:cNvPr id="16" name="Text 14"/>
-          <p:cNvSpPr txBox="1"/>
-          <p:nvPr/>
-        </p:nvSpPr>
-        <p:spPr>
-          <a:xfrm>
-            <a:off x="713232" y="6534785"/>
-            <a:ext cx="6281928" cy="459994"/>
+          <p:cNvPr id="6" name="Text 4"/>
+          <p:cNvSpPr txBox="1"/>
+          <p:nvPr/>
+        </p:nvSpPr>
+        <p:spPr>
+          <a:xfrm>
+            <a:off x="713232" y="2051050"/>
+            <a:ext cx="6281928" cy="257429"/>
           </a:xfrm>
           <a:prstGeom prst="rect">
             <a:avLst/>
@@ -7780,6 +8230,23 @@
               <a:buChar char="●"/>
             </a:pPr>
             <a:r>
+              <a:rPr lang="en-US" sz="1100" b="1" dirty="0">
+                <a:solidFill>
+                  <a:srgbClr val="222222"/>
+                </a:solidFill>
+                <a:latin typeface="Calibri" pitchFamily="34" charset="0"/>
+                <a:ea typeface="Calibri" pitchFamily="34" charset="-122"/>
+                <a:cs typeface="Calibri" pitchFamily="34" charset="-120"/>
+              </a:rPr>
+              <a:t>交換済み</a:t>
+            </a:r>
+            <a:pPr indent="0" marL="0">
+              <a:lnSpc>
+                <a:spcPct val="125000"/>
+              </a:lnSpc>
+              <a:buNone/>
+            </a:pPr>
+            <a:r>
               <a:rPr lang="en-US" sz="1100" dirty="0">
                 <a:solidFill>
                   <a:srgbClr val="222222"/>
@@ -7788,7 +8255,7 @@
                 <a:ea typeface="Calibri" pitchFamily="34" charset="-122"/>
                 <a:cs typeface="Calibri" pitchFamily="34" charset="-120"/>
               </a:rPr>
-              <a:t>それでも動かない場合は、標準のカメラアプリで読み取る方法（方法B）か、コードの手入力をお使いください</a:t>
+              <a:t>：これまでにお渡しした数</a:t>
             </a:r>
             <a:endParaRPr lang="en-US" sz="1100" dirty="0"/>
           </a:p>
@@ -7796,26 +8263,146 @@
       </p:sp>
       <p:sp>
         <p:nvSpPr>
-          <p:cNvPr id="17" name="Shape 15"/>
+          <p:cNvPr id="7" name="Text 5"/>
+          <p:cNvSpPr txBox="1"/>
+          <p:nvPr/>
+        </p:nvSpPr>
+        <p:spPr>
+          <a:xfrm>
+            <a:off x="713232" y="2326767"/>
+            <a:ext cx="6281928" cy="257429"/>
+          </a:xfrm>
+          <a:prstGeom prst="rect">
+            <a:avLst/>
+          </a:prstGeom>
+          <a:noFill/>
+          <a:ln/>
+        </p:spPr>
+        <p:txBody>
+          <a:bodyPr wrap="square" lIns="0" tIns="0" rIns="0" bIns="0" rtlCol="0" anchor="t"/>
+          <a:lstStyle/>
+          <a:p>
+            <a:pPr marL="342900" indent="-342900">
+              <a:lnSpc>
+                <a:spcPct val="125000"/>
+              </a:lnSpc>
+              <a:buSzPct val="100000"/>
+              <a:buChar char="●"/>
+            </a:pPr>
+            <a:r>
+              <a:rPr lang="en-US" sz="1100" b="1" dirty="0">
+                <a:solidFill>
+                  <a:srgbClr val="222222"/>
+                </a:solidFill>
+                <a:latin typeface="Calibri" pitchFamily="34" charset="0"/>
+                <a:ea typeface="Calibri" pitchFamily="34" charset="-122"/>
+                <a:cs typeface="Calibri" pitchFamily="34" charset="-120"/>
+              </a:rPr>
+              <a:t>残り</a:t>
+            </a:r>
+            <a:pPr indent="0" marL="0">
+              <a:lnSpc>
+                <a:spcPct val="125000"/>
+              </a:lnSpc>
+              <a:buNone/>
+            </a:pPr>
+            <a:r>
+              <a:rPr lang="en-US" sz="1100" dirty="0">
+                <a:solidFill>
+                  <a:srgbClr val="222222"/>
+                </a:solidFill>
+                <a:latin typeface="Calibri" pitchFamily="34" charset="0"/>
+                <a:ea typeface="Calibri" pitchFamily="34" charset="-122"/>
+                <a:cs typeface="Calibri" pitchFamily="34" charset="-120"/>
+              </a:rPr>
+              <a:t>：残っている数（「—」は数量を管理していない景品）</a:t>
+            </a:r>
+            <a:endParaRPr lang="en-US" sz="1100" dirty="0"/>
+          </a:p>
+        </p:txBody>
+      </p:sp>
+      <p:sp>
+        <p:nvSpPr>
+          <p:cNvPr id="8" name="Text 6"/>
+          <p:cNvSpPr txBox="1"/>
+          <p:nvPr/>
+        </p:nvSpPr>
+        <p:spPr>
+          <a:xfrm>
+            <a:off x="713232" y="2602484"/>
+            <a:ext cx="6281928" cy="257429"/>
+          </a:xfrm>
+          <a:prstGeom prst="rect">
+            <a:avLst/>
+          </a:prstGeom>
+          <a:noFill/>
+          <a:ln/>
+        </p:spPr>
+        <p:txBody>
+          <a:bodyPr wrap="square" lIns="0" tIns="0" rIns="0" bIns="0" rtlCol="0" anchor="t"/>
+          <a:lstStyle/>
+          <a:p>
+            <a:pPr marL="342900" indent="-342900">
+              <a:lnSpc>
+                <a:spcPct val="125000"/>
+              </a:lnSpc>
+              <a:buSzPct val="100000"/>
+              <a:buChar char="●"/>
+            </a:pPr>
+            <a:r>
+              <a:rPr lang="en-US" sz="1100" b="1" dirty="0">
+                <a:solidFill>
+                  <a:srgbClr val="222222"/>
+                </a:solidFill>
+                <a:latin typeface="Calibri" pitchFamily="34" charset="0"/>
+                <a:ea typeface="Calibri" pitchFamily="34" charset="-122"/>
+                <a:cs typeface="Calibri" pitchFamily="34" charset="-120"/>
+              </a:rPr>
+              <a:t>超過</a:t>
+            </a:r>
+            <a:pPr indent="0" marL="0">
+              <a:lnSpc>
+                <a:spcPct val="125000"/>
+              </a:lnSpc>
+              <a:buNone/>
+            </a:pPr>
+            <a:r>
+              <a:rPr lang="en-US" sz="1100" dirty="0">
+                <a:solidFill>
+                  <a:srgbClr val="222222"/>
+                </a:solidFill>
+                <a:latin typeface="Calibri" pitchFamily="34" charset="0"/>
+                <a:ea typeface="Calibri" pitchFamily="34" charset="-122"/>
+                <a:cs typeface="Calibri" pitchFamily="34" charset="-120"/>
+              </a:rPr>
+              <a:t>：用意した数を超えてお渡しした数</a:t>
+            </a:r>
+            <a:endParaRPr lang="en-US" sz="1100" dirty="0"/>
+          </a:p>
+        </p:txBody>
+      </p:sp>
+      <p:sp>
+        <p:nvSpPr>
+          <p:cNvPr id="9" name="Shape 7"/>
           <p:cNvSpPr/>
           <p:nvPr/>
         </p:nvSpPr>
         <p:spPr>
           <a:xfrm>
-            <a:off x="566928" y="7013067"/>
-            <a:ext cx="6428232" cy="624459"/>
+            <a:off x="566928" y="2878201"/>
+            <a:ext cx="6428232" cy="431102"/>
           </a:xfrm>
           <a:prstGeom prst="roundRect">
             <a:avLst>
-              <a:gd name="adj" fmla="val 8786"/>
+              <a:gd name="adj" fmla="val 12726"/>
             </a:avLst>
           </a:prstGeom>
           <a:solidFill>
-            <a:srgbClr val="FDF0E6"/>
+            <a:srgbClr val="FAEAE7"/>
           </a:solidFill>
           <a:ln w="9525">
             <a:solidFill>
-              <a:srgbClr val="E08A3C"/>
+              <a:srgbClr val="B85042"/>
             </a:solidFill>
             <a:prstDash val="solid"/>
           </a:ln>
@@ -7823,13 +8410,13 @@
       </p:sp>
       <p:sp>
         <p:nvSpPr>
-          <p:cNvPr id="18" name="Text 16"/>
-          <p:cNvSpPr txBox="1"/>
-          <p:nvPr/>
-        </p:nvSpPr>
-        <p:spPr>
-          <a:xfrm>
-            <a:off x="658368" y="7104507"/>
+          <p:cNvPr id="10" name="Text 8"/>
+          <p:cNvSpPr txBox="1"/>
+          <p:nvPr/>
+        </p:nvSpPr>
+        <p:spPr>
+          <a:xfrm>
+            <a:off x="658368" y="2969641"/>
             <a:ext cx="237744" cy="237744"/>
           </a:xfrm>
           <a:prstGeom prst="rect">
@@ -7848,13 +8435,13 @@
             <a:r>
               <a:rPr lang="en-US" sz="1200" b="1" dirty="0">
                 <a:solidFill>
-                  <a:srgbClr val="C25A17"/>
-                </a:solidFill>
-                <a:latin typeface="Calibri" pitchFamily="34" charset="0"/>
-                <a:ea typeface="Calibri" pitchFamily="34" charset="-122"/>
-                <a:cs typeface="Calibri" pitchFamily="34" charset="-120"/>
-              </a:rPr>
-              <a:t>！</a:t>
+                  <a:srgbClr val="B85042"/>
+                </a:solidFill>
+                <a:latin typeface="Calibri" pitchFamily="34" charset="0"/>
+                <a:ea typeface="Calibri" pitchFamily="34" charset="-122"/>
+                <a:cs typeface="Calibri" pitchFamily="34" charset="-120"/>
+              </a:rPr>
+              <a:t>i</a:t>
             </a:r>
             <a:endParaRPr lang="en-US" sz="1200" dirty="0"/>
           </a:p>
@@ -7862,14 +8449,14 @@
       </p:sp>
       <p:sp>
         <p:nvSpPr>
-          <p:cNvPr id="19" name="Text 17"/>
-          <p:cNvSpPr txBox="1"/>
-          <p:nvPr/>
-        </p:nvSpPr>
-        <p:spPr>
-          <a:xfrm>
-            <a:off x="950976" y="7122795"/>
-            <a:ext cx="5925312" cy="441579"/>
+          <p:cNvPr id="11" name="Text 9"/>
+          <p:cNvSpPr txBox="1"/>
+          <p:nvPr/>
+        </p:nvSpPr>
+        <p:spPr>
+          <a:xfrm>
+            <a:off x="950976" y="2987929"/>
+            <a:ext cx="5925312" cy="248221"/>
           </a:xfrm>
           <a:prstGeom prst="rect">
             <a:avLst/>
@@ -7896,15 +8483,78 @@
                 <a:ea typeface="Calibri" pitchFamily="34" charset="-122"/>
                 <a:cs typeface="Calibri" pitchFamily="34" charset="-120"/>
               </a:rPr>
-              <a:t>判断に迷ったときは、来場者をお待たせしないことを優先し、お渡ししたうえでメモ欄に状況を記録してください。</a:t>
+              <a:t>残りが少なくなってきたら、早めに事務局へお知らせください。</a:t>
             </a:r>
             <a:endParaRPr lang="en-US" sz="1050" dirty="0"/>
           </a:p>
         </p:txBody>
       </p:sp>
-      <p:sp>
-        <p:nvSpPr>
-          <p:cNvPr id="20" name="Text 18"/>
+      <p:pic>
+        <p:nvPicPr>
+          <p:cNvPr id="12" name="Image 0" descr="C:\Users\sato\Desktop\enque\docs\images\p-stock.png">    </p:cNvPr>
+          <p:cNvPicPr>
+            <a:picLocks noChangeAspect="1"/>
+          </p:cNvPicPr>
+          <p:nvPr/>
+        </p:nvPicPr>
+        <p:blipFill>
+          <a:blip r:embed="rId1"/>
+          <a:stretch>
+            <a:fillRect/>
+          </a:stretch>
+        </p:blipFill>
+        <p:spPr>
+          <a:xfrm>
+            <a:off x="2018596" y="3382455"/>
+            <a:ext cx="3524896" cy="3474720"/>
+          </a:xfrm>
+          <a:prstGeom prst="rect">
+            <a:avLst/>
+          </a:prstGeom>
+        </p:spPr>
+      </p:pic>
+      <p:sp>
+        <p:nvSpPr>
+          <p:cNvPr id="13" name="Text 10"/>
+          <p:cNvSpPr txBox="1"/>
+          <p:nvPr/>
+        </p:nvSpPr>
+        <p:spPr>
+          <a:xfrm>
+            <a:off x="566928" y="6912039"/>
+            <a:ext cx="6428232" cy="274320"/>
+          </a:xfrm>
+          <a:prstGeom prst="rect">
+            <a:avLst/>
+          </a:prstGeom>
+          <a:noFill/>
+          <a:ln/>
+        </p:spPr>
+        <p:txBody>
+          <a:bodyPr wrap="square" lIns="0" tIns="0" rIns="0" bIns="0" rtlCol="0" anchor="ctr"/>
+          <a:lstStyle/>
+          <a:p>
+            <a:pPr algn="ctr" indent="0" marL="0">
+              <a:buNone/>
+            </a:pPr>
+            <a:r>
+              <a:rPr lang="en-US" sz="950" dirty="0">
+                <a:solidFill>
+                  <a:srgbClr val="6B6B6B"/>
+                </a:solidFill>
+                <a:latin typeface="Calibri" pitchFamily="34" charset="0"/>
+                <a:ea typeface="Calibri" pitchFamily="34" charset="-122"/>
+                <a:cs typeface="Calibri" pitchFamily="34" charset="-120"/>
+              </a:rPr>
+              <a:t>照会画面の下部にある「景品の残数」の表。</a:t>
+            </a:r>
+            <a:endParaRPr lang="en-US" sz="950" dirty="0"/>
+          </a:p>
+        </p:txBody>
+      </p:sp>
+      <p:sp>
+        <p:nvSpPr>
+          <p:cNvPr id="14" name="Text 11"/>
           <p:cNvSpPr txBox="1"/>
           <p:nvPr/>
         </p:nvSpPr>

--- a/docs/manual-reception.pptx
+++ b/docs/manual-reception.pptx
@@ -4836,8 +4836,8 @@
         </p:blipFill>
         <p:spPr>
           <a:xfrm>
-            <a:off x="3123981" y="3550539"/>
-            <a:ext cx="1314127" cy="3474720"/>
+            <a:off x="3266610" y="3550539"/>
+            <a:ext cx="1028869" cy="3474720"/>
           </a:xfrm>
           <a:prstGeom prst="rect">
             <a:avLst/>

--- a/docs/manual-reception.pptx
+++ b/docs/manual-reception.pptx
@@ -15,9 +15,10 @@
     <p:sldId id="263" r:id="rId9"/>
     <p:sldId id="264" r:id="rId10"/>
     <p:sldId id="265" r:id="rId11"/>
+    <p:sldId id="266" r:id="rId12"/>
   </p:sldIdLst>
   <p:notesMasterIdLst>
-    <p:notesMasterId r:id="rId12"/>
+    <p:notesMasterId r:id="rId13"/>
   </p:notesMasterIdLst>
   <p:sldSz cx="7562088" cy="10689336"/>
   <p:notesSz cx="10689336" cy="7562088"/>
@@ -623,6 +624,94 @@
             <a:fld id="{F7021451-1387-4CA6-816F-3879F97B5CBC}" type="slidenum">
               <a:rPr lang="en-US"/>
               <a:t>10</a:t>
+            </a:fld>
+            <a:endParaRPr lang="en-US"/>
+          </a:p>
+        </p:txBody>
+      </p:sp>
+    </p:spTree>
+    <p:extLst>
+      <p:ext uri="{BB962C8B-B14F-4D97-AF65-F5344CB8AC3E}">
+        <p14:creationId xmlns:p14="http://schemas.microsoft.com/office/powerpoint/2010/main" val="1024086991"/>
+      </p:ext>
+    </p:extLst>
+  </p:cSld>
+  <p:clrMapOvr>
+    <a:masterClrMapping/>
+  </p:clrMapOvr>
+</p:notes>
+</file>
+
+<file path=ppt/notesSlides/notesSlide11.xml><?xml version="1.0" encoding="utf-8"?>
+<p:notes xmlns:a="http://schemas.openxmlformats.org/drawingml/2006/main" xmlns:r="http://schemas.openxmlformats.org/officeDocument/2006/relationships" xmlns:p="http://schemas.openxmlformats.org/presentationml/2006/main">
+  <p:cSld>
+    <p:spTree>
+      <p:nvGrpSpPr>
+        <p:cNvPr id="1" name=""/>
+        <p:cNvGrpSpPr/>
+        <p:nvPr/>
+      </p:nvGrpSpPr>
+      <p:grpSpPr>
+        <a:xfrm>
+          <a:off x="0" y="0"/>
+          <a:ext cx="0" cy="0"/>
+          <a:chOff x="0" y="0"/>
+          <a:chExt cx="0" cy="0"/>
+        </a:xfrm>
+      </p:grpSpPr>
+      <p:sp>
+        <p:nvSpPr>
+          <p:cNvPr id="2" name="Slide Image Placeholder 1"/>
+          <p:cNvSpPr>
+            <a:spLocks noGrp="1" noRot="1" noChangeAspect="1"/>
+          </p:cNvSpPr>
+          <p:nvPr>
+            <p:ph type="sldImg"/>
+          </p:nvPr>
+        </p:nvSpPr>
+        <p:spPr/>
+      </p:sp>
+      <p:sp>
+        <p:nvSpPr>
+          <p:cNvPr id="3" name="Notes Placeholder 2"/>
+          <p:cNvSpPr>
+            <a:spLocks noGrp="1"/>
+          </p:cNvSpPr>
+          <p:nvPr>
+            <p:ph type="body" idx="1"/>
+          </p:nvPr>
+        </p:nvSpPr>
+        <p:spPr/>
+        <p:txBody>
+          <a:bodyPr/>
+          <a:lstStyle/>
+          <a:p>
+            <a:r>
+              <a:rPr lang="en-US" dirty="0"/>
+              <a:t/>
+            </a:r>
+            <a:endParaRPr lang="en-US" dirty="0"/>
+          </a:p>
+        </p:txBody>
+      </p:sp>
+      <p:sp>
+        <p:nvSpPr>
+          <p:cNvPr id="4" name="Slide Number Placeholder 3"/>
+          <p:cNvSpPr>
+            <a:spLocks noGrp="1"/>
+          </p:cNvSpPr>
+          <p:nvPr>
+            <p:ph type="sldNum" sz="quarter" idx="10"/>
+          </p:nvPr>
+        </p:nvSpPr>
+        <p:spPr/>
+        <p:txBody>
+          <a:bodyPr/>
+          <a:lstStyle/>
+          <a:p>
+            <a:fld id="{F7021451-1387-4CA6-816F-3879F97B5CBC}" type="slidenum">
+              <a:rPr lang="en-US"/>
+              <a:t>11</a:t>
             </a:fld>
             <a:endParaRPr lang="en-US"/>
           </a:p>
@@ -1939,6 +2028,642 @@
                 <a:ea typeface="Calibri" pitchFamily="34" charset="-122"/>
                 <a:cs typeface="Calibri" pitchFamily="34" charset="-120"/>
               </a:rPr>
+              <a:t>残りの数を確認する</a:t>
+            </a:r>
+            <a:endParaRPr lang="en-US" sz="2200" dirty="0"/>
+          </a:p>
+        </p:txBody>
+      </p:sp>
+      <p:sp>
+        <p:nvSpPr>
+          <p:cNvPr id="4" name="Text 2"/>
+          <p:cNvSpPr txBox="1"/>
+          <p:nvPr/>
+        </p:nvSpPr>
+        <p:spPr>
+          <a:xfrm>
+            <a:off x="566928" y="1481328"/>
+            <a:ext cx="6428232" cy="257429"/>
+          </a:xfrm>
+          <a:prstGeom prst="rect">
+            <a:avLst/>
+          </a:prstGeom>
+          <a:noFill/>
+          <a:ln/>
+        </p:spPr>
+        <p:txBody>
+          <a:bodyPr wrap="square" lIns="0" tIns="0" rIns="0" bIns="0" rtlCol="0" anchor="t"/>
+          <a:lstStyle/>
+          <a:p>
+            <a:pPr indent="0" marL="0">
+              <a:lnSpc>
+                <a:spcPct val="125000"/>
+              </a:lnSpc>
+              <a:buNone/>
+            </a:pPr>
+            <a:r>
+              <a:rPr lang="en-US" sz="1100" dirty="0">
+                <a:solidFill>
+                  <a:srgbClr val="222222"/>
+                </a:solidFill>
+                <a:latin typeface="Calibri" pitchFamily="34" charset="0"/>
+                <a:ea typeface="Calibri" pitchFamily="34" charset="-122"/>
+                <a:cs typeface="Calibri" pitchFamily="34" charset="-120"/>
+              </a:rPr>
+              <a:t>照会画面の下に、</a:t>
+            </a:r>
+            <a:pPr indent="0" marL="0">
+              <a:lnSpc>
+                <a:spcPct val="125000"/>
+              </a:lnSpc>
+              <a:buNone/>
+            </a:pPr>
+            <a:r>
+              <a:rPr lang="en-US" sz="1100" b="1" dirty="0">
+                <a:solidFill>
+                  <a:srgbClr val="222222"/>
+                </a:solidFill>
+                <a:latin typeface="Calibri" pitchFamily="34" charset="0"/>
+                <a:ea typeface="Calibri" pitchFamily="34" charset="-122"/>
+                <a:cs typeface="Calibri" pitchFamily="34" charset="-120"/>
+              </a:rPr>
+              <a:t>景品の残数</a:t>
+            </a:r>
+            <a:pPr indent="0" marL="0">
+              <a:lnSpc>
+                <a:spcPct val="125000"/>
+              </a:lnSpc>
+              <a:buNone/>
+            </a:pPr>
+            <a:r>
+              <a:rPr lang="en-US" sz="1100" dirty="0">
+                <a:solidFill>
+                  <a:srgbClr val="222222"/>
+                </a:solidFill>
+                <a:latin typeface="Calibri" pitchFamily="34" charset="0"/>
+                <a:ea typeface="Calibri" pitchFamily="34" charset="-122"/>
+                <a:cs typeface="Calibri" pitchFamily="34" charset="-120"/>
+              </a:rPr>
+              <a:t>の表があります。</a:t>
+            </a:r>
+            <a:endParaRPr lang="en-US" sz="1100" dirty="0"/>
+          </a:p>
+        </p:txBody>
+      </p:sp>
+      <p:sp>
+        <p:nvSpPr>
+          <p:cNvPr id="5" name="Text 3"/>
+          <p:cNvSpPr txBox="1"/>
+          <p:nvPr/>
+        </p:nvSpPr>
+        <p:spPr>
+          <a:xfrm>
+            <a:off x="713232" y="1775333"/>
+            <a:ext cx="6281928" cy="257429"/>
+          </a:xfrm>
+          <a:prstGeom prst="rect">
+            <a:avLst/>
+          </a:prstGeom>
+          <a:noFill/>
+          <a:ln/>
+        </p:spPr>
+        <p:txBody>
+          <a:bodyPr wrap="square" lIns="0" tIns="0" rIns="0" bIns="0" rtlCol="0" anchor="t"/>
+          <a:lstStyle/>
+          <a:p>
+            <a:pPr marL="342900" indent="-342900">
+              <a:lnSpc>
+                <a:spcPct val="125000"/>
+              </a:lnSpc>
+              <a:buSzPct val="100000"/>
+              <a:buChar char="●"/>
+            </a:pPr>
+            <a:r>
+              <a:rPr lang="en-US" sz="1100" b="1" dirty="0">
+                <a:solidFill>
+                  <a:srgbClr val="222222"/>
+                </a:solidFill>
+                <a:latin typeface="Calibri" pitchFamily="34" charset="0"/>
+                <a:ea typeface="Calibri" pitchFamily="34" charset="-122"/>
+                <a:cs typeface="Calibri" pitchFamily="34" charset="-120"/>
+              </a:rPr>
+              <a:t>用意</a:t>
+            </a:r>
+            <a:pPr indent="0" marL="0">
+              <a:lnSpc>
+                <a:spcPct val="125000"/>
+              </a:lnSpc>
+              <a:buNone/>
+            </a:pPr>
+            <a:r>
+              <a:rPr lang="en-US" sz="1100" dirty="0">
+                <a:solidFill>
+                  <a:srgbClr val="222222"/>
+                </a:solidFill>
+                <a:latin typeface="Calibri" pitchFamily="34" charset="0"/>
+                <a:ea typeface="Calibri" pitchFamily="34" charset="-122"/>
+                <a:cs typeface="Calibri" pitchFamily="34" charset="-120"/>
+              </a:rPr>
+              <a:t>：事務局が登録した数量</a:t>
+            </a:r>
+            <a:endParaRPr lang="en-US" sz="1100" dirty="0"/>
+          </a:p>
+        </p:txBody>
+      </p:sp>
+      <p:sp>
+        <p:nvSpPr>
+          <p:cNvPr id="6" name="Text 4"/>
+          <p:cNvSpPr txBox="1"/>
+          <p:nvPr/>
+        </p:nvSpPr>
+        <p:spPr>
+          <a:xfrm>
+            <a:off x="713232" y="2051050"/>
+            <a:ext cx="6281928" cy="257429"/>
+          </a:xfrm>
+          <a:prstGeom prst="rect">
+            <a:avLst/>
+          </a:prstGeom>
+          <a:noFill/>
+          <a:ln/>
+        </p:spPr>
+        <p:txBody>
+          <a:bodyPr wrap="square" lIns="0" tIns="0" rIns="0" bIns="0" rtlCol="0" anchor="t"/>
+          <a:lstStyle/>
+          <a:p>
+            <a:pPr marL="342900" indent="-342900">
+              <a:lnSpc>
+                <a:spcPct val="125000"/>
+              </a:lnSpc>
+              <a:buSzPct val="100000"/>
+              <a:buChar char="●"/>
+            </a:pPr>
+            <a:r>
+              <a:rPr lang="en-US" sz="1100" b="1" dirty="0">
+                <a:solidFill>
+                  <a:srgbClr val="222222"/>
+                </a:solidFill>
+                <a:latin typeface="Calibri" pitchFamily="34" charset="0"/>
+                <a:ea typeface="Calibri" pitchFamily="34" charset="-122"/>
+                <a:cs typeface="Calibri" pitchFamily="34" charset="-120"/>
+              </a:rPr>
+              <a:t>交換済み</a:t>
+            </a:r>
+            <a:pPr indent="0" marL="0">
+              <a:lnSpc>
+                <a:spcPct val="125000"/>
+              </a:lnSpc>
+              <a:buNone/>
+            </a:pPr>
+            <a:r>
+              <a:rPr lang="en-US" sz="1100" dirty="0">
+                <a:solidFill>
+                  <a:srgbClr val="222222"/>
+                </a:solidFill>
+                <a:latin typeface="Calibri" pitchFamily="34" charset="0"/>
+                <a:ea typeface="Calibri" pitchFamily="34" charset="-122"/>
+                <a:cs typeface="Calibri" pitchFamily="34" charset="-120"/>
+              </a:rPr>
+              <a:t>：これまでにお渡しした数</a:t>
+            </a:r>
+            <a:endParaRPr lang="en-US" sz="1100" dirty="0"/>
+          </a:p>
+        </p:txBody>
+      </p:sp>
+      <p:sp>
+        <p:nvSpPr>
+          <p:cNvPr id="7" name="Text 5"/>
+          <p:cNvSpPr txBox="1"/>
+          <p:nvPr/>
+        </p:nvSpPr>
+        <p:spPr>
+          <a:xfrm>
+            <a:off x="713232" y="2326767"/>
+            <a:ext cx="6281928" cy="257429"/>
+          </a:xfrm>
+          <a:prstGeom prst="rect">
+            <a:avLst/>
+          </a:prstGeom>
+          <a:noFill/>
+          <a:ln/>
+        </p:spPr>
+        <p:txBody>
+          <a:bodyPr wrap="square" lIns="0" tIns="0" rIns="0" bIns="0" rtlCol="0" anchor="t"/>
+          <a:lstStyle/>
+          <a:p>
+            <a:pPr marL="342900" indent="-342900">
+              <a:lnSpc>
+                <a:spcPct val="125000"/>
+              </a:lnSpc>
+              <a:buSzPct val="100000"/>
+              <a:buChar char="●"/>
+            </a:pPr>
+            <a:r>
+              <a:rPr lang="en-US" sz="1100" b="1" dirty="0">
+                <a:solidFill>
+                  <a:srgbClr val="222222"/>
+                </a:solidFill>
+                <a:latin typeface="Calibri" pitchFamily="34" charset="0"/>
+                <a:ea typeface="Calibri" pitchFamily="34" charset="-122"/>
+                <a:cs typeface="Calibri" pitchFamily="34" charset="-120"/>
+              </a:rPr>
+              <a:t>残り</a:t>
+            </a:r>
+            <a:pPr indent="0" marL="0">
+              <a:lnSpc>
+                <a:spcPct val="125000"/>
+              </a:lnSpc>
+              <a:buNone/>
+            </a:pPr>
+            <a:r>
+              <a:rPr lang="en-US" sz="1100" dirty="0">
+                <a:solidFill>
+                  <a:srgbClr val="222222"/>
+                </a:solidFill>
+                <a:latin typeface="Calibri" pitchFamily="34" charset="0"/>
+                <a:ea typeface="Calibri" pitchFamily="34" charset="-122"/>
+                <a:cs typeface="Calibri" pitchFamily="34" charset="-120"/>
+              </a:rPr>
+              <a:t>：残っている数（「—」は数量を管理していない景品）</a:t>
+            </a:r>
+            <a:endParaRPr lang="en-US" sz="1100" dirty="0"/>
+          </a:p>
+        </p:txBody>
+      </p:sp>
+      <p:sp>
+        <p:nvSpPr>
+          <p:cNvPr id="8" name="Text 6"/>
+          <p:cNvSpPr txBox="1"/>
+          <p:nvPr/>
+        </p:nvSpPr>
+        <p:spPr>
+          <a:xfrm>
+            <a:off x="713232" y="2602484"/>
+            <a:ext cx="6281928" cy="257429"/>
+          </a:xfrm>
+          <a:prstGeom prst="rect">
+            <a:avLst/>
+          </a:prstGeom>
+          <a:noFill/>
+          <a:ln/>
+        </p:spPr>
+        <p:txBody>
+          <a:bodyPr wrap="square" lIns="0" tIns="0" rIns="0" bIns="0" rtlCol="0" anchor="t"/>
+          <a:lstStyle/>
+          <a:p>
+            <a:pPr marL="342900" indent="-342900">
+              <a:lnSpc>
+                <a:spcPct val="125000"/>
+              </a:lnSpc>
+              <a:buSzPct val="100000"/>
+              <a:buChar char="●"/>
+            </a:pPr>
+            <a:r>
+              <a:rPr lang="en-US" sz="1100" b="1" dirty="0">
+                <a:solidFill>
+                  <a:srgbClr val="222222"/>
+                </a:solidFill>
+                <a:latin typeface="Calibri" pitchFamily="34" charset="0"/>
+                <a:ea typeface="Calibri" pitchFamily="34" charset="-122"/>
+                <a:cs typeface="Calibri" pitchFamily="34" charset="-120"/>
+              </a:rPr>
+              <a:t>超過</a:t>
+            </a:r>
+            <a:pPr indent="0" marL="0">
+              <a:lnSpc>
+                <a:spcPct val="125000"/>
+              </a:lnSpc>
+              <a:buNone/>
+            </a:pPr>
+            <a:r>
+              <a:rPr lang="en-US" sz="1100" dirty="0">
+                <a:solidFill>
+                  <a:srgbClr val="222222"/>
+                </a:solidFill>
+                <a:latin typeface="Calibri" pitchFamily="34" charset="0"/>
+                <a:ea typeface="Calibri" pitchFamily="34" charset="-122"/>
+                <a:cs typeface="Calibri" pitchFamily="34" charset="-120"/>
+              </a:rPr>
+              <a:t>：用意した数を超えてお渡しした数</a:t>
+            </a:r>
+            <a:endParaRPr lang="en-US" sz="1100" dirty="0"/>
+          </a:p>
+        </p:txBody>
+      </p:sp>
+      <p:sp>
+        <p:nvSpPr>
+          <p:cNvPr id="9" name="Shape 7"/>
+          <p:cNvSpPr/>
+          <p:nvPr/>
+        </p:nvSpPr>
+        <p:spPr>
+          <a:xfrm>
+            <a:off x="566928" y="2878201"/>
+            <a:ext cx="6428232" cy="431102"/>
+          </a:xfrm>
+          <a:prstGeom prst="roundRect">
+            <a:avLst>
+              <a:gd name="adj" fmla="val 12726"/>
+            </a:avLst>
+          </a:prstGeom>
+          <a:solidFill>
+            <a:srgbClr val="FAEAE7"/>
+          </a:solidFill>
+          <a:ln w="9525">
+            <a:solidFill>
+              <a:srgbClr val="B85042"/>
+            </a:solidFill>
+            <a:prstDash val="solid"/>
+          </a:ln>
+        </p:spPr>
+      </p:sp>
+      <p:sp>
+        <p:nvSpPr>
+          <p:cNvPr id="10" name="Text 8"/>
+          <p:cNvSpPr txBox="1"/>
+          <p:nvPr/>
+        </p:nvSpPr>
+        <p:spPr>
+          <a:xfrm>
+            <a:off x="658368" y="2969641"/>
+            <a:ext cx="237744" cy="237744"/>
+          </a:xfrm>
+          <a:prstGeom prst="rect">
+            <a:avLst/>
+          </a:prstGeom>
+          <a:noFill/>
+          <a:ln/>
+        </p:spPr>
+        <p:txBody>
+          <a:bodyPr wrap="square" lIns="0" tIns="0" rIns="0" bIns="0" rtlCol="0" anchor="ctr"/>
+          <a:lstStyle/>
+          <a:p>
+            <a:pPr algn="ctr" indent="0" marL="0">
+              <a:buNone/>
+            </a:pPr>
+            <a:r>
+              <a:rPr lang="en-US" sz="1200" b="1" dirty="0">
+                <a:solidFill>
+                  <a:srgbClr val="B85042"/>
+                </a:solidFill>
+                <a:latin typeface="Calibri" pitchFamily="34" charset="0"/>
+                <a:ea typeface="Calibri" pitchFamily="34" charset="-122"/>
+                <a:cs typeface="Calibri" pitchFamily="34" charset="-120"/>
+              </a:rPr>
+              <a:t>i</a:t>
+            </a:r>
+            <a:endParaRPr lang="en-US" sz="1200" dirty="0"/>
+          </a:p>
+        </p:txBody>
+      </p:sp>
+      <p:sp>
+        <p:nvSpPr>
+          <p:cNvPr id="11" name="Text 9"/>
+          <p:cNvSpPr txBox="1"/>
+          <p:nvPr/>
+        </p:nvSpPr>
+        <p:spPr>
+          <a:xfrm>
+            <a:off x="950976" y="2987929"/>
+            <a:ext cx="5925312" cy="248221"/>
+          </a:xfrm>
+          <a:prstGeom prst="rect">
+            <a:avLst/>
+          </a:prstGeom>
+          <a:noFill/>
+          <a:ln/>
+        </p:spPr>
+        <p:txBody>
+          <a:bodyPr wrap="square" lIns="0" tIns="0" rIns="0" bIns="0" rtlCol="0" anchor="t"/>
+          <a:lstStyle/>
+          <a:p>
+            <a:pPr indent="0" marL="0">
+              <a:lnSpc>
+                <a:spcPct val="120000"/>
+              </a:lnSpc>
+              <a:buNone/>
+            </a:pPr>
+            <a:r>
+              <a:rPr lang="en-US" sz="1050" dirty="0">
+                <a:solidFill>
+                  <a:srgbClr val="222222"/>
+                </a:solidFill>
+                <a:latin typeface="Calibri" pitchFamily="34" charset="0"/>
+                <a:ea typeface="Calibri" pitchFamily="34" charset="-122"/>
+                <a:cs typeface="Calibri" pitchFamily="34" charset="-120"/>
+              </a:rPr>
+              <a:t>残りが少なくなってきたら、早めに事務局へお知らせください。</a:t>
+            </a:r>
+            <a:endParaRPr lang="en-US" sz="1050" dirty="0"/>
+          </a:p>
+        </p:txBody>
+      </p:sp>
+      <p:pic>
+        <p:nvPicPr>
+          <p:cNvPr id="12" name="Image 0" descr="C:\Users\sato\Desktop\enque\docs\images\p-stock.png">    </p:cNvPr>
+          <p:cNvPicPr>
+            <a:picLocks noChangeAspect="1"/>
+          </p:cNvPicPr>
+          <p:nvPr/>
+        </p:nvPicPr>
+        <p:blipFill>
+          <a:blip r:embed="rId1"/>
+          <a:stretch>
+            <a:fillRect/>
+          </a:stretch>
+        </p:blipFill>
+        <p:spPr>
+          <a:xfrm>
+            <a:off x="2018596" y="3382455"/>
+            <a:ext cx="3524896" cy="3474720"/>
+          </a:xfrm>
+          <a:prstGeom prst="rect">
+            <a:avLst/>
+          </a:prstGeom>
+        </p:spPr>
+      </p:pic>
+      <p:sp>
+        <p:nvSpPr>
+          <p:cNvPr id="13" name="Text 10"/>
+          <p:cNvSpPr txBox="1"/>
+          <p:nvPr/>
+        </p:nvSpPr>
+        <p:spPr>
+          <a:xfrm>
+            <a:off x="566928" y="6912039"/>
+            <a:ext cx="6428232" cy="274320"/>
+          </a:xfrm>
+          <a:prstGeom prst="rect">
+            <a:avLst/>
+          </a:prstGeom>
+          <a:noFill/>
+          <a:ln/>
+        </p:spPr>
+        <p:txBody>
+          <a:bodyPr wrap="square" lIns="0" tIns="0" rIns="0" bIns="0" rtlCol="0" anchor="ctr"/>
+          <a:lstStyle/>
+          <a:p>
+            <a:pPr algn="ctr" indent="0" marL="0">
+              <a:buNone/>
+            </a:pPr>
+            <a:r>
+              <a:rPr lang="en-US" sz="950" dirty="0">
+                <a:solidFill>
+                  <a:srgbClr val="6B6B6B"/>
+                </a:solidFill>
+                <a:latin typeface="Calibri" pitchFamily="34" charset="0"/>
+                <a:ea typeface="Calibri" pitchFamily="34" charset="-122"/>
+                <a:cs typeface="Calibri" pitchFamily="34" charset="-120"/>
+              </a:rPr>
+              <a:t>照会画面の下部にある「景品の残数」の表。</a:t>
+            </a:r>
+            <a:endParaRPr lang="en-US" sz="950" dirty="0"/>
+          </a:p>
+        </p:txBody>
+      </p:sp>
+      <p:sp>
+        <p:nvSpPr>
+          <p:cNvPr id="14" name="Text 11"/>
+          <p:cNvSpPr txBox="1"/>
+          <p:nvPr/>
+        </p:nvSpPr>
+        <p:spPr>
+          <a:xfrm>
+            <a:off x="566928" y="10186416"/>
+            <a:ext cx="6428232" cy="228600"/>
+          </a:xfrm>
+          <a:prstGeom prst="rect">
+            <a:avLst/>
+          </a:prstGeom>
+          <a:noFill/>
+          <a:ln/>
+        </p:spPr>
+        <p:txBody>
+          <a:bodyPr wrap="square" lIns="0" tIns="0" rIns="0" bIns="0" rtlCol="0" anchor="ctr"/>
+          <a:lstStyle/>
+          <a:p>
+            <a:pPr algn="r" indent="0" marL="0">
+              <a:buNone/>
+            </a:pPr>
+            <a:r>
+              <a:rPr lang="en-US" sz="900" dirty="0">
+                <a:solidFill>
+                  <a:srgbClr val="6B6B6B"/>
+                </a:solidFill>
+                <a:latin typeface="Calibri" pitchFamily="34" charset="0"/>
+                <a:ea typeface="Calibri" pitchFamily="34" charset="-122"/>
+                <a:cs typeface="Calibri" pitchFamily="34" charset="-120"/>
+              </a:rPr>
+              <a:t>総合受付向け　10</a:t>
+            </a:r>
+            <a:endParaRPr lang="en-US" sz="900" dirty="0"/>
+          </a:p>
+        </p:txBody>
+      </p:sp>
+    </p:spTree>
+  </p:cSld>
+  <p:clrMapOvr>
+    <a:masterClrMapping/>
+  </p:clrMapOvr>
+</p:sld>
+</file>
+
+<file path=ppt/slides/slide11.xml><?xml version="1.0" encoding="utf-8"?>
+<p:sld xmlns:a="http://schemas.openxmlformats.org/drawingml/2006/main" xmlns:r="http://schemas.openxmlformats.org/officeDocument/2006/relationships" xmlns:p="http://schemas.openxmlformats.org/presentationml/2006/main">
+  <p:cSld name="Slide 11">
+    <p:bg>
+      <p:bgPr>
+        <a:solidFill>
+          <a:srgbClr val="FFFFFF"/>
+        </a:solidFill>
+      </p:bgPr>
+    </p:bg>
+    <p:spTree>
+      <p:nvGrpSpPr>
+        <p:cNvPr id="1" name=""/>
+        <p:cNvGrpSpPr/>
+        <p:nvPr/>
+      </p:nvGrpSpPr>
+      <p:grpSpPr>
+        <a:xfrm>
+          <a:off x="0" y="0"/>
+          <a:ext cx="0" cy="0"/>
+          <a:chOff x="0" y="0"/>
+          <a:chExt cx="0" cy="0"/>
+        </a:xfrm>
+      </p:grpSpPr>
+      <p:sp>
+        <p:nvSpPr>
+          <p:cNvPr id="2" name="Text 0"/>
+          <p:cNvSpPr txBox="1"/>
+          <p:nvPr/>
+        </p:nvSpPr>
+        <p:spPr>
+          <a:xfrm>
+            <a:off x="566928" y="457200"/>
+            <a:ext cx="6428232" cy="237744"/>
+          </a:xfrm>
+          <a:prstGeom prst="rect">
+            <a:avLst/>
+          </a:prstGeom>
+          <a:noFill/>
+          <a:ln/>
+        </p:spPr>
+        <p:txBody>
+          <a:bodyPr wrap="square" lIns="0" tIns="0" rIns="0" bIns="0" rtlCol="0" anchor="ctr"/>
+          <a:lstStyle/>
+          <a:p>
+            <a:pPr indent="0" marL="0">
+              <a:buNone/>
+            </a:pPr>
+            <a:r>
+              <a:rPr lang="en-US" sz="1000" b="1" dirty="0">
+                <a:solidFill>
+                  <a:srgbClr val="B85042"/>
+                </a:solidFill>
+                <a:latin typeface="Calibri" pitchFamily="34" charset="0"/>
+                <a:ea typeface="Calibri" pitchFamily="34" charset="-122"/>
+                <a:cs typeface="Calibri" pitchFamily="34" charset="-120"/>
+              </a:rPr>
+              <a:t>総合受付マニュアル</a:t>
+            </a:r>
+            <a:endParaRPr lang="en-US" sz="1000" dirty="0"/>
+          </a:p>
+        </p:txBody>
+      </p:sp>
+      <p:sp>
+        <p:nvSpPr>
+          <p:cNvPr id="3" name="Text 1"/>
+          <p:cNvSpPr txBox="1"/>
+          <p:nvPr/>
+        </p:nvSpPr>
+        <p:spPr>
+          <a:xfrm>
+            <a:off x="566928" y="713232"/>
+            <a:ext cx="6428232" cy="640080"/>
+          </a:xfrm>
+          <a:prstGeom prst="rect">
+            <a:avLst/>
+          </a:prstGeom>
+          <a:noFill/>
+          <a:ln/>
+        </p:spPr>
+        <p:txBody>
+          <a:bodyPr wrap="square" lIns="0" tIns="0" rIns="0" bIns="0" rtlCol="0" anchor="t"/>
+          <a:lstStyle/>
+          <a:p>
+            <a:pPr indent="0" marL="0">
+              <a:buNone/>
+            </a:pPr>
+            <a:r>
+              <a:rPr lang="en-US" sz="2200" b="1" dirty="0">
+                <a:solidFill>
+                  <a:srgbClr val="222222"/>
+                </a:solidFill>
+                <a:latin typeface="Calibri" pitchFamily="34" charset="0"/>
+                <a:ea typeface="Calibri" pitchFamily="34" charset="-122"/>
+                <a:cs typeface="Calibri" pitchFamily="34" charset="-120"/>
+              </a:rPr>
               <a:t>困ったときは</a:t>
             </a:r>
             <a:endParaRPr lang="en-US" sz="2200" dirty="0"/>
@@ -2917,7 +3642,7 @@
                 <a:ea typeface="Calibri" pitchFamily="34" charset="-122"/>
                 <a:cs typeface="Calibri" pitchFamily="34" charset="-120"/>
               </a:rPr>
-              <a:t>総合受付向け　10</a:t>
+              <a:t>総合受付向け　11</a:t>
             </a:r>
             <a:endParaRPr lang="en-US" sz="900" dirty="0"/>
           </a:p>
@@ -4318,7 +5043,7 @@
                 <a:ea typeface="Calibri" pitchFamily="34" charset="-122"/>
                 <a:cs typeface="Calibri" pitchFamily="34" charset="-120"/>
               </a:rPr>
-              <a:t>交換の流れ（3ステップ）</a:t>
+              <a:t>交換の流れ</a:t>
             </a:r>
             <a:endParaRPr lang="en-US" sz="2200" dirty="0"/>
           </a:p>
@@ -4326,13 +5051,52 @@
       </p:sp>
       <p:sp>
         <p:nvSpPr>
-          <p:cNvPr id="4" name="Shape 2"/>
+          <p:cNvPr id="4" name="Text 2"/>
+          <p:cNvSpPr txBox="1"/>
+          <p:nvPr/>
+        </p:nvSpPr>
+        <p:spPr>
+          <a:xfrm>
+            <a:off x="566928" y="1591056"/>
+            <a:ext cx="6428232" cy="257810"/>
+          </a:xfrm>
+          <a:prstGeom prst="rect">
+            <a:avLst/>
+          </a:prstGeom>
+          <a:noFill/>
+          <a:ln/>
+        </p:spPr>
+        <p:txBody>
+          <a:bodyPr wrap="square" lIns="0" tIns="0" rIns="0" bIns="0" rtlCol="0" anchor="t"/>
+          <a:lstStyle/>
+          <a:p>
+            <a:pPr indent="0" marL="0">
+              <a:buNone/>
+            </a:pPr>
+            <a:r>
+              <a:rPr lang="en-US" sz="1400" b="1" dirty="0">
+                <a:solidFill>
+                  <a:srgbClr val="B85042"/>
+                </a:solidFill>
+                <a:latin typeface="Calibri" pitchFamily="34" charset="0"/>
+                <a:ea typeface="Calibri" pitchFamily="34" charset="-122"/>
+                <a:cs typeface="Calibri" pitchFamily="34" charset="-120"/>
+              </a:rPr>
+              <a:t>パソコン＋バーコードリーダーの場合（読み取るだけ）</a:t>
+            </a:r>
+            <a:endParaRPr lang="en-US" sz="1400" dirty="0"/>
+          </a:p>
+        </p:txBody>
+      </p:sp>
+      <p:sp>
+        <p:nvSpPr>
+          <p:cNvPr id="5" name="Shape 3"/>
           <p:cNvSpPr/>
           <p:nvPr/>
         </p:nvSpPr>
         <p:spPr>
           <a:xfrm>
-            <a:off x="566928" y="1499616"/>
+            <a:off x="566928" y="1940306"/>
             <a:ext cx="274320" cy="274320"/>
           </a:xfrm>
           <a:prstGeom prst="ellipse">
@@ -4346,13 +5110,13 @@
       </p:sp>
       <p:sp>
         <p:nvSpPr>
-          <p:cNvPr id="5" name="Text 3"/>
-          <p:cNvSpPr txBox="1"/>
-          <p:nvPr/>
-        </p:nvSpPr>
-        <p:spPr>
-          <a:xfrm>
-            <a:off x="566928" y="1499616"/>
+          <p:cNvPr id="6" name="Text 4"/>
+          <p:cNvSpPr txBox="1"/>
+          <p:nvPr/>
+        </p:nvSpPr>
+        <p:spPr>
+          <a:xfrm>
+            <a:off x="566928" y="1940306"/>
             <a:ext cx="274320" cy="274320"/>
           </a:xfrm>
           <a:prstGeom prst="rect">
@@ -4385,14 +5149,14 @@
       </p:sp>
       <p:sp>
         <p:nvSpPr>
-          <p:cNvPr id="6" name="Text 4"/>
-          <p:cNvSpPr txBox="1"/>
-          <p:nvPr/>
-        </p:nvSpPr>
-        <p:spPr>
-          <a:xfrm>
-            <a:off x="969264" y="1481328"/>
-            <a:ext cx="6025896" cy="365760"/>
+          <p:cNvPr id="7" name="Text 5"/>
+          <p:cNvSpPr txBox="1"/>
+          <p:nvPr/>
+        </p:nvSpPr>
+        <p:spPr>
+          <a:xfrm>
+            <a:off x="969264" y="1922018"/>
+            <a:ext cx="6025896" cy="478409"/>
           </a:xfrm>
           <a:prstGeom prst="rect">
             <a:avLst/>
@@ -4419,7 +5183,7 @@
                 <a:ea typeface="Calibri" pitchFamily="34" charset="-122"/>
                 <a:cs typeface="Calibri" pitchFamily="34" charset="-120"/>
               </a:rPr>
-              <a:t>来場者のスマートフォンに表示された</a:t>
+              <a:t>「景品交換の照会」の画面を開いたままにする（</a:t>
             </a:r>
             <a:pPr indent="0" marL="0">
               <a:lnSpc>
@@ -4436,7 +5200,7 @@
                 <a:ea typeface="Calibri" pitchFamily="34" charset="-122"/>
                 <a:cs typeface="Calibri" pitchFamily="34" charset="-120"/>
               </a:rPr>
-              <a:t>QRコード</a:t>
+              <a:t>読み取り欄にカーソルが入った状態</a:t>
             </a:r>
             <a:pPr indent="0" marL="0">
               <a:lnSpc>
@@ -4453,7 +5217,7 @@
                 <a:ea typeface="Calibri" pitchFamily="34" charset="-122"/>
                 <a:cs typeface="Calibri" pitchFamily="34" charset="-120"/>
               </a:rPr>
-              <a:t>を読み取る</a:t>
+              <a:t>になります）</a:t>
             </a:r>
             <a:endParaRPr lang="en-US" sz="1150" dirty="0"/>
           </a:p>
@@ -4461,13 +5225,13 @@
       </p:sp>
       <p:sp>
         <p:nvSpPr>
-          <p:cNvPr id="7" name="Shape 5"/>
+          <p:cNvPr id="8" name="Shape 6"/>
           <p:cNvSpPr/>
           <p:nvPr/>
         </p:nvSpPr>
         <p:spPr>
           <a:xfrm>
-            <a:off x="566928" y="1956816"/>
+            <a:off x="566928" y="2473579"/>
             <a:ext cx="274320" cy="274320"/>
           </a:xfrm>
           <a:prstGeom prst="ellipse">
@@ -4481,13 +5245,13 @@
       </p:sp>
       <p:sp>
         <p:nvSpPr>
-          <p:cNvPr id="8" name="Text 6"/>
-          <p:cNvSpPr txBox="1"/>
-          <p:nvPr/>
-        </p:nvSpPr>
-        <p:spPr>
-          <a:xfrm>
-            <a:off x="566928" y="1956816"/>
+          <p:cNvPr id="9" name="Text 7"/>
+          <p:cNvSpPr txBox="1"/>
+          <p:nvPr/>
+        </p:nvSpPr>
+        <p:spPr>
+          <a:xfrm>
+            <a:off x="566928" y="2473579"/>
             <a:ext cx="274320" cy="274320"/>
           </a:xfrm>
           <a:prstGeom prst="rect">
@@ -4520,14 +5284,14 @@
       </p:sp>
       <p:sp>
         <p:nvSpPr>
-          <p:cNvPr id="9" name="Text 7"/>
-          <p:cNvSpPr txBox="1"/>
-          <p:nvPr/>
-        </p:nvSpPr>
-        <p:spPr>
-          <a:xfrm>
-            <a:off x="969264" y="1938528"/>
-            <a:ext cx="6025896" cy="365760"/>
+          <p:cNvPr id="10" name="Text 8"/>
+          <p:cNvSpPr txBox="1"/>
+          <p:nvPr/>
+        </p:nvSpPr>
+        <p:spPr>
+          <a:xfrm>
+            <a:off x="969264" y="2455291"/>
+            <a:ext cx="6025896" cy="478409"/>
           </a:xfrm>
           <a:prstGeom prst="rect">
             <a:avLst/>
@@ -4554,7 +5318,7 @@
                 <a:ea typeface="Calibri" pitchFamily="34" charset="-122"/>
                 <a:cs typeface="Calibri" pitchFamily="34" charset="-120"/>
               </a:rPr>
-              <a:t>画面で</a:t>
+              <a:t>渡す景品を選んでおく（</a:t>
             </a:r>
             <a:pPr indent="0" marL="0">
               <a:lnSpc>
@@ -4571,7 +5335,7 @@
                 <a:ea typeface="Calibri" pitchFamily="34" charset="-122"/>
                 <a:cs typeface="Calibri" pitchFamily="34" charset="-120"/>
               </a:rPr>
-              <a:t>未交換か交換済みか</a:t>
+              <a:t>景品が1種類なら最初から選ばれています</a:t>
             </a:r>
             <a:pPr indent="0" marL="0">
               <a:lnSpc>
@@ -4588,24 +5352,7 @@
                 <a:ea typeface="Calibri" pitchFamily="34" charset="-122"/>
                 <a:cs typeface="Calibri" pitchFamily="34" charset="-120"/>
               </a:rPr>
-              <a:t>を確かめ、</a:t>
-            </a:r>
-            <a:pPr indent="0" marL="0">
-              <a:lnSpc>
-                <a:spcPct val="125000"/>
-              </a:lnSpc>
-              <a:buNone/>
-            </a:pPr>
-            <a:r>
-              <a:rPr lang="en-US" sz="1150" b="1" dirty="0">
-                <a:solidFill>
-                  <a:srgbClr val="222222"/>
-                </a:solidFill>
-                <a:latin typeface="Calibri" pitchFamily="34" charset="0"/>
-                <a:ea typeface="Calibri" pitchFamily="34" charset="-122"/>
-                <a:cs typeface="Calibri" pitchFamily="34" charset="-120"/>
-              </a:rPr>
-              <a:t>渡す景品を選ぶ</a:t>
+              <a:t>。選んだ内容はその端末が覚えます）</a:t>
             </a:r>
             <a:endParaRPr lang="en-US" sz="1150" dirty="0"/>
           </a:p>
@@ -4613,13 +5360,13 @@
       </p:sp>
       <p:sp>
         <p:nvSpPr>
-          <p:cNvPr id="10" name="Shape 8"/>
+          <p:cNvPr id="11" name="Shape 9"/>
           <p:cNvSpPr/>
           <p:nvPr/>
         </p:nvSpPr>
         <p:spPr>
           <a:xfrm>
-            <a:off x="566928" y="2414016"/>
+            <a:off x="566928" y="3006852"/>
             <a:ext cx="274320" cy="274320"/>
           </a:xfrm>
           <a:prstGeom prst="ellipse">
@@ -4633,13 +5380,13 @@
       </p:sp>
       <p:sp>
         <p:nvSpPr>
-          <p:cNvPr id="11" name="Text 9"/>
-          <p:cNvSpPr txBox="1"/>
-          <p:nvPr/>
-        </p:nvSpPr>
-        <p:spPr>
-          <a:xfrm>
-            <a:off x="566928" y="2414016"/>
+          <p:cNvPr id="12" name="Text 10"/>
+          <p:cNvSpPr txBox="1"/>
+          <p:nvPr/>
+        </p:nvSpPr>
+        <p:spPr>
+          <a:xfrm>
+            <a:off x="566928" y="3006852"/>
             <a:ext cx="274320" cy="274320"/>
           </a:xfrm>
           <a:prstGeom prst="rect">
@@ -4672,14 +5419,14 @@
       </p:sp>
       <p:sp>
         <p:nvSpPr>
-          <p:cNvPr id="12" name="Text 10"/>
-          <p:cNvSpPr txBox="1"/>
-          <p:nvPr/>
-        </p:nvSpPr>
-        <p:spPr>
-          <a:xfrm>
-            <a:off x="969264" y="2395728"/>
-            <a:ext cx="6025896" cy="365760"/>
+          <p:cNvPr id="13" name="Text 11"/>
+          <p:cNvSpPr txBox="1"/>
+          <p:nvPr/>
+        </p:nvSpPr>
+        <p:spPr>
+          <a:xfrm>
+            <a:off x="969264" y="2988564"/>
+            <a:ext cx="6025896" cy="478409"/>
           </a:xfrm>
           <a:prstGeom prst="rect">
             <a:avLst/>
@@ -4706,7 +5453,41 @@
                 <a:ea typeface="Calibri" pitchFamily="34" charset="-122"/>
                 <a:cs typeface="Calibri" pitchFamily="34" charset="-120"/>
               </a:rPr>
-              <a:t>「交換済みにする」を押して記録する</a:t>
+              <a:t>来場者のQRコードを</a:t>
+            </a:r>
+            <a:pPr indent="0" marL="0">
+              <a:lnSpc>
+                <a:spcPct val="125000"/>
+              </a:lnSpc>
+              <a:buNone/>
+            </a:pPr>
+            <a:r>
+              <a:rPr lang="en-US" sz="1150" b="1" dirty="0">
+                <a:solidFill>
+                  <a:srgbClr val="222222"/>
+                </a:solidFill>
+                <a:latin typeface="Calibri" pitchFamily="34" charset="0"/>
+                <a:ea typeface="Calibri" pitchFamily="34" charset="-122"/>
+                <a:cs typeface="Calibri" pitchFamily="34" charset="-120"/>
+              </a:rPr>
+              <a:t>読み取るだけ</a:t>
+            </a:r>
+            <a:pPr indent="0" marL="0">
+              <a:lnSpc>
+                <a:spcPct val="125000"/>
+              </a:lnSpc>
+              <a:buNone/>
+            </a:pPr>
+            <a:r>
+              <a:rPr lang="en-US" sz="1150" dirty="0">
+                <a:solidFill>
+                  <a:srgbClr val="222222"/>
+                </a:solidFill>
+                <a:latin typeface="Calibri" pitchFamily="34" charset="0"/>
+                <a:ea typeface="Calibri" pitchFamily="34" charset="-122"/>
+                <a:cs typeface="Calibri" pitchFamily="34" charset="-120"/>
+              </a:rPr>
+              <a:t>。そのまま交換済みとして記録され、画面に結果が出ます</a:t>
             </a:r>
             <a:endParaRPr lang="en-US" sz="1150" dirty="0"/>
           </a:p>
@@ -4714,13 +5495,235 @@
       </p:sp>
       <p:sp>
         <p:nvSpPr>
-          <p:cNvPr id="13" name="Shape 11"/>
+          <p:cNvPr id="14" name="Text 12"/>
+          <p:cNvSpPr txBox="1"/>
+          <p:nvPr/>
+        </p:nvSpPr>
+        <p:spPr>
+          <a:xfrm>
+            <a:off x="566928" y="3521837"/>
+            <a:ext cx="6428232" cy="257429"/>
+          </a:xfrm>
+          <a:prstGeom prst="rect">
+            <a:avLst/>
+          </a:prstGeom>
+          <a:noFill/>
+          <a:ln/>
+        </p:spPr>
+        <p:txBody>
+          <a:bodyPr wrap="square" lIns="0" tIns="0" rIns="0" bIns="0" rtlCol="0" anchor="t"/>
+          <a:lstStyle/>
+          <a:p>
+            <a:pPr indent="0" marL="0">
+              <a:lnSpc>
+                <a:spcPct val="125000"/>
+              </a:lnSpc>
+              <a:buNone/>
+            </a:pPr>
+            <a:r>
+              <a:rPr lang="en-US" sz="1100" dirty="0">
+                <a:solidFill>
+                  <a:srgbClr val="222222"/>
+                </a:solidFill>
+                <a:latin typeface="Calibri" pitchFamily="34" charset="0"/>
+                <a:ea typeface="Calibri" pitchFamily="34" charset="-122"/>
+                <a:cs typeface="Calibri" pitchFamily="34" charset="-120"/>
+              </a:rPr>
+              <a:t>読み取ると、次のどれかが大きく表示されます。</a:t>
+            </a:r>
+            <a:endParaRPr lang="en-US" sz="1100" dirty="0"/>
+          </a:p>
+        </p:txBody>
+      </p:sp>
+      <p:sp>
+        <p:nvSpPr>
+          <p:cNvPr id="15" name="Text 13"/>
+          <p:cNvSpPr txBox="1"/>
+          <p:nvPr/>
+        </p:nvSpPr>
+        <p:spPr>
+          <a:xfrm>
+            <a:off x="713232" y="3815842"/>
+            <a:ext cx="6281928" cy="257429"/>
+          </a:xfrm>
+          <a:prstGeom prst="rect">
+            <a:avLst/>
+          </a:prstGeom>
+          <a:noFill/>
+          <a:ln/>
+        </p:spPr>
+        <p:txBody>
+          <a:bodyPr wrap="square" lIns="0" tIns="0" rIns="0" bIns="0" rtlCol="0" anchor="t"/>
+          <a:lstStyle/>
+          <a:p>
+            <a:pPr marL="342900" indent="-342900">
+              <a:lnSpc>
+                <a:spcPct val="125000"/>
+              </a:lnSpc>
+              <a:buSzPct val="100000"/>
+              <a:buChar char="●"/>
+            </a:pPr>
+            <a:r>
+              <a:rPr lang="en-US" sz="1100" b="1" dirty="0">
+                <a:solidFill>
+                  <a:srgbClr val="222222"/>
+                </a:solidFill>
+                <a:latin typeface="Calibri" pitchFamily="34" charset="0"/>
+                <a:ea typeface="Calibri" pitchFamily="34" charset="-122"/>
+                <a:cs typeface="Calibri" pitchFamily="34" charset="-120"/>
+              </a:rPr>
+              <a:t>交換済みにしました</a:t>
+            </a:r>
+            <a:pPr indent="0" marL="0">
+              <a:lnSpc>
+                <a:spcPct val="125000"/>
+              </a:lnSpc>
+              <a:buNone/>
+            </a:pPr>
+            <a:r>
+              <a:rPr lang="en-US" sz="1100" dirty="0">
+                <a:solidFill>
+                  <a:srgbClr val="222222"/>
+                </a:solidFill>
+                <a:latin typeface="Calibri" pitchFamily="34" charset="0"/>
+                <a:ea typeface="Calibri" pitchFamily="34" charset="-122"/>
+                <a:cs typeface="Calibri" pitchFamily="34" charset="-120"/>
+              </a:rPr>
+              <a:t>（景品名と残数）→ そのまま次の方を読み取れます</a:t>
+            </a:r>
+            <a:endParaRPr lang="en-US" sz="1100" dirty="0"/>
+          </a:p>
+        </p:txBody>
+      </p:sp>
+      <p:sp>
+        <p:nvSpPr>
+          <p:cNvPr id="16" name="Text 14"/>
+          <p:cNvSpPr txBox="1"/>
+          <p:nvPr/>
+        </p:nvSpPr>
+        <p:spPr>
+          <a:xfrm>
+            <a:off x="713232" y="4091559"/>
+            <a:ext cx="6281928" cy="257429"/>
+          </a:xfrm>
+          <a:prstGeom prst="rect">
+            <a:avLst/>
+          </a:prstGeom>
+          <a:noFill/>
+          <a:ln/>
+        </p:spPr>
+        <p:txBody>
+          <a:bodyPr wrap="square" lIns="0" tIns="0" rIns="0" bIns="0" rtlCol="0" anchor="t"/>
+          <a:lstStyle/>
+          <a:p>
+            <a:pPr marL="342900" indent="-342900">
+              <a:lnSpc>
+                <a:spcPct val="125000"/>
+              </a:lnSpc>
+              <a:buSzPct val="100000"/>
+              <a:buChar char="●"/>
+            </a:pPr>
+            <a:r>
+              <a:rPr lang="en-US" sz="1100" b="1" dirty="0">
+                <a:solidFill>
+                  <a:srgbClr val="222222"/>
+                </a:solidFill>
+                <a:latin typeface="Calibri" pitchFamily="34" charset="0"/>
+                <a:ea typeface="Calibri" pitchFamily="34" charset="-122"/>
+                <a:cs typeface="Calibri" pitchFamily="34" charset="-120"/>
+              </a:rPr>
+              <a:t>すでに交換済みです</a:t>
+            </a:r>
+            <a:pPr indent="0" marL="0">
+              <a:lnSpc>
+                <a:spcPct val="125000"/>
+              </a:lnSpc>
+              <a:buNone/>
+            </a:pPr>
+            <a:r>
+              <a:rPr lang="en-US" sz="1100" dirty="0">
+                <a:solidFill>
+                  <a:srgbClr val="222222"/>
+                </a:solidFill>
+                <a:latin typeface="Calibri" pitchFamily="34" charset="0"/>
+                <a:ea typeface="Calibri" pitchFamily="34" charset="-122"/>
+                <a:cs typeface="Calibri" pitchFamily="34" charset="-120"/>
+              </a:rPr>
+              <a:t>（日時）→ 記録は変わりません。お渡しするかはスタッフでご判断ください</a:t>
+            </a:r>
+            <a:endParaRPr lang="en-US" sz="1100" dirty="0"/>
+          </a:p>
+        </p:txBody>
+      </p:sp>
+      <p:sp>
+        <p:nvSpPr>
+          <p:cNvPr id="17" name="Text 15"/>
+          <p:cNvSpPr txBox="1"/>
+          <p:nvPr/>
+        </p:nvSpPr>
+        <p:spPr>
+          <a:xfrm>
+            <a:off x="713232" y="4367276"/>
+            <a:ext cx="6281928" cy="257429"/>
+          </a:xfrm>
+          <a:prstGeom prst="rect">
+            <a:avLst/>
+          </a:prstGeom>
+          <a:noFill/>
+          <a:ln/>
+        </p:spPr>
+        <p:txBody>
+          <a:bodyPr wrap="square" lIns="0" tIns="0" rIns="0" bIns="0" rtlCol="0" anchor="t"/>
+          <a:lstStyle/>
+          <a:p>
+            <a:pPr marL="342900" indent="-342900">
+              <a:lnSpc>
+                <a:spcPct val="125000"/>
+              </a:lnSpc>
+              <a:buSzPct val="100000"/>
+              <a:buChar char="●"/>
+            </a:pPr>
+            <a:r>
+              <a:rPr lang="en-US" sz="1100" b="1" dirty="0">
+                <a:solidFill>
+                  <a:srgbClr val="222222"/>
+                </a:solidFill>
+                <a:latin typeface="Calibri" pitchFamily="34" charset="0"/>
+                <a:ea typeface="Calibri" pitchFamily="34" charset="-122"/>
+                <a:cs typeface="Calibri" pitchFamily="34" charset="-120"/>
+              </a:rPr>
+              <a:t>交換コードが見つかりません</a:t>
+            </a:r>
+            <a:pPr indent="0" marL="0">
+              <a:lnSpc>
+                <a:spcPct val="125000"/>
+              </a:lnSpc>
+              <a:buNone/>
+            </a:pPr>
+            <a:r>
+              <a:rPr lang="en-US" sz="1100" dirty="0">
+                <a:solidFill>
+                  <a:srgbClr val="222222"/>
+                </a:solidFill>
+                <a:latin typeface="Calibri" pitchFamily="34" charset="0"/>
+                <a:ea typeface="Calibri" pitchFamily="34" charset="-122"/>
+                <a:cs typeface="Calibri" pitchFamily="34" charset="-120"/>
+              </a:rPr>
+              <a:t> → もう一度読み取ってください</a:t>
+            </a:r>
+            <a:endParaRPr lang="en-US" sz="1100" dirty="0"/>
+          </a:p>
+        </p:txBody>
+      </p:sp>
+      <p:sp>
+        <p:nvSpPr>
+          <p:cNvPr id="18" name="Shape 16"/>
           <p:cNvSpPr/>
           <p:nvPr/>
         </p:nvSpPr>
         <p:spPr>
           <a:xfrm>
-            <a:off x="566928" y="2852928"/>
+            <a:off x="566928" y="4642993"/>
             <a:ext cx="6428232" cy="624459"/>
           </a:xfrm>
           <a:prstGeom prst="roundRect">
@@ -4741,13 +5744,13 @@
       </p:sp>
       <p:sp>
         <p:nvSpPr>
-          <p:cNvPr id="14" name="Text 12"/>
-          <p:cNvSpPr txBox="1"/>
-          <p:nvPr/>
-        </p:nvSpPr>
-        <p:spPr>
-          <a:xfrm>
-            <a:off x="658368" y="2944368"/>
+          <p:cNvPr id="19" name="Text 17"/>
+          <p:cNvSpPr txBox="1"/>
+          <p:nvPr/>
+        </p:nvSpPr>
+        <p:spPr>
+          <a:xfrm>
+            <a:off x="658368" y="4734433"/>
             <a:ext cx="237744" cy="237744"/>
           </a:xfrm>
           <a:prstGeom prst="rect">
@@ -4780,13 +5783,13 @@
       </p:sp>
       <p:sp>
         <p:nvSpPr>
-          <p:cNvPr id="15" name="Text 13"/>
-          <p:cNvSpPr txBox="1"/>
-          <p:nvPr/>
-        </p:nvSpPr>
-        <p:spPr>
-          <a:xfrm>
-            <a:off x="950976" y="2962656"/>
+          <p:cNvPr id="20" name="Text 18"/>
+          <p:cNvSpPr txBox="1"/>
+          <p:nvPr/>
+        </p:nvSpPr>
+        <p:spPr>
+          <a:xfrm>
+            <a:off x="950976" y="4752721"/>
             <a:ext cx="5925312" cy="441579"/>
           </a:xfrm>
           <a:prstGeom prst="rect">
@@ -4814,78 +5817,726 @@
                 <a:ea typeface="Calibri" pitchFamily="34" charset="-122"/>
                 <a:cs typeface="Calibri" pitchFamily="34" charset="-120"/>
               </a:rPr>
+              <a:t>読み取り間違いに気づいたら、画面に出る</a:t>
+            </a:r>
+            <a:pPr indent="0" marL="0">
+              <a:lnSpc>
+                <a:spcPct val="120000"/>
+              </a:lnSpc>
+              <a:buNone/>
+            </a:pPr>
+            <a:r>
+              <a:rPr lang="en-US" sz="1050" b="1" dirty="0">
+                <a:solidFill>
+                  <a:srgbClr val="222222"/>
+                </a:solidFill>
+                <a:latin typeface="Calibri" pitchFamily="34" charset="0"/>
+                <a:ea typeface="Calibri" pitchFamily="34" charset="-122"/>
+                <a:cs typeface="Calibri" pitchFamily="34" charset="-120"/>
+              </a:rPr>
+              <a:t>「直前の記録を取り消す」</a:t>
+            </a:r>
+            <a:pPr indent="0" marL="0">
+              <a:lnSpc>
+                <a:spcPct val="120000"/>
+              </a:lnSpc>
+              <a:buNone/>
+            </a:pPr>
+            <a:r>
+              <a:rPr lang="en-US" sz="1050" dirty="0">
+                <a:solidFill>
+                  <a:srgbClr val="222222"/>
+                </a:solidFill>
+                <a:latin typeface="Calibri" pitchFamily="34" charset="0"/>
+                <a:ea typeface="Calibri" pitchFamily="34" charset="-122"/>
+                <a:cs typeface="Calibri" pitchFamily="34" charset="-120"/>
+              </a:rPr>
+              <a:t>で戻せます。戻したあとは、もう一度読み取れば交換できます。</a:t>
+            </a:r>
+            <a:endParaRPr lang="en-US" sz="1050" dirty="0"/>
+          </a:p>
+        </p:txBody>
+      </p:sp>
+      <p:sp>
+        <p:nvSpPr>
+          <p:cNvPr id="21" name="Shape 19"/>
+          <p:cNvSpPr/>
+          <p:nvPr/>
+        </p:nvSpPr>
+        <p:spPr>
+          <a:xfrm>
+            <a:off x="566928" y="5340604"/>
+            <a:ext cx="6428232" cy="624459"/>
+          </a:xfrm>
+          <a:prstGeom prst="roundRect">
+            <a:avLst>
+              <a:gd name="adj" fmla="val 8786"/>
+            </a:avLst>
+          </a:prstGeom>
+          <a:solidFill>
+            <a:srgbClr val="FDF0E6"/>
+          </a:solidFill>
+          <a:ln w="9525">
+            <a:solidFill>
+              <a:srgbClr val="E08A3C"/>
+            </a:solidFill>
+            <a:prstDash val="solid"/>
+          </a:ln>
+        </p:spPr>
+      </p:sp>
+      <p:sp>
+        <p:nvSpPr>
+          <p:cNvPr id="22" name="Text 20"/>
+          <p:cNvSpPr txBox="1"/>
+          <p:nvPr/>
+        </p:nvSpPr>
+        <p:spPr>
+          <a:xfrm>
+            <a:off x="658368" y="5432044"/>
+            <a:ext cx="237744" cy="237744"/>
+          </a:xfrm>
+          <a:prstGeom prst="rect">
+            <a:avLst/>
+          </a:prstGeom>
+          <a:noFill/>
+          <a:ln/>
+        </p:spPr>
+        <p:txBody>
+          <a:bodyPr wrap="square" lIns="0" tIns="0" rIns="0" bIns="0" rtlCol="0" anchor="ctr"/>
+          <a:lstStyle/>
+          <a:p>
+            <a:pPr algn="ctr" indent="0" marL="0">
+              <a:buNone/>
+            </a:pPr>
+            <a:r>
+              <a:rPr lang="en-US" sz="1200" b="1" dirty="0">
+                <a:solidFill>
+                  <a:srgbClr val="C25A17"/>
+                </a:solidFill>
+                <a:latin typeface="Calibri" pitchFamily="34" charset="0"/>
+                <a:ea typeface="Calibri" pitchFamily="34" charset="-122"/>
+                <a:cs typeface="Calibri" pitchFamily="34" charset="-120"/>
+              </a:rPr>
+              <a:t>！</a:t>
+            </a:r>
+            <a:endParaRPr lang="en-US" sz="1200" dirty="0"/>
+          </a:p>
+        </p:txBody>
+      </p:sp>
+      <p:sp>
+        <p:nvSpPr>
+          <p:cNvPr id="23" name="Text 21"/>
+          <p:cNvSpPr txBox="1"/>
+          <p:nvPr/>
+        </p:nvSpPr>
+        <p:spPr>
+          <a:xfrm>
+            <a:off x="950976" y="5450332"/>
+            <a:ext cx="5925312" cy="441579"/>
+          </a:xfrm>
+          <a:prstGeom prst="rect">
+            <a:avLst/>
+          </a:prstGeom>
+          <a:noFill/>
+          <a:ln/>
+        </p:spPr>
+        <p:txBody>
+          <a:bodyPr wrap="square" lIns="0" tIns="0" rIns="0" bIns="0" rtlCol="0" anchor="t"/>
+          <a:lstStyle/>
+          <a:p>
+            <a:pPr indent="0" marL="0">
+              <a:lnSpc>
+                <a:spcPct val="120000"/>
+              </a:lnSpc>
+              <a:buNone/>
+            </a:pPr>
+            <a:r>
+              <a:rPr lang="en-US" sz="1050" dirty="0">
+                <a:solidFill>
+                  <a:srgbClr val="222222"/>
+                </a:solidFill>
+                <a:latin typeface="Calibri" pitchFamily="34" charset="0"/>
+                <a:ea typeface="Calibri" pitchFamily="34" charset="-122"/>
+                <a:cs typeface="Calibri" pitchFamily="34" charset="-120"/>
+              </a:rPr>
+              <a:t>記録せずに確認だけしたいときは、</a:t>
+            </a:r>
+            <a:pPr indent="0" marL="0">
+              <a:lnSpc>
+                <a:spcPct val="120000"/>
+              </a:lnSpc>
+              <a:buNone/>
+            </a:pPr>
+            <a:r>
+              <a:rPr lang="en-US" sz="1050" b="1" dirty="0">
+                <a:solidFill>
+                  <a:srgbClr val="222222"/>
+                </a:solidFill>
+                <a:latin typeface="Calibri" pitchFamily="34" charset="0"/>
+                <a:ea typeface="Calibri" pitchFamily="34" charset="-122"/>
+                <a:cs typeface="Calibri" pitchFamily="34" charset="-120"/>
+              </a:rPr>
+              <a:t>「読み取ったらそのまま交換済みにする」のチェックを外して</a:t>
+            </a:r>
+            <a:pPr indent="0" marL="0">
+              <a:lnSpc>
+                <a:spcPct val="120000"/>
+              </a:lnSpc>
+              <a:buNone/>
+            </a:pPr>
+            <a:r>
+              <a:rPr lang="en-US" sz="1050" dirty="0">
+                <a:solidFill>
+                  <a:srgbClr val="222222"/>
+                </a:solidFill>
+                <a:latin typeface="Calibri" pitchFamily="34" charset="0"/>
+                <a:ea typeface="Calibri" pitchFamily="34" charset="-122"/>
+                <a:cs typeface="Calibri" pitchFamily="34" charset="-120"/>
+              </a:rPr>
+              <a:t>ください。外すと、これまでどおり内容を見てからボタンで記録します。</a:t>
+            </a:r>
+            <a:endParaRPr lang="en-US" sz="1050" dirty="0"/>
+          </a:p>
+        </p:txBody>
+      </p:sp>
+      <p:sp>
+        <p:nvSpPr>
+          <p:cNvPr id="24" name="Text 22"/>
+          <p:cNvSpPr txBox="1"/>
+          <p:nvPr/>
+        </p:nvSpPr>
+        <p:spPr>
+          <a:xfrm>
+            <a:off x="566928" y="6147943"/>
+            <a:ext cx="6428232" cy="257810"/>
+          </a:xfrm>
+          <a:prstGeom prst="rect">
+            <a:avLst/>
+          </a:prstGeom>
+          <a:noFill/>
+          <a:ln/>
+        </p:spPr>
+        <p:txBody>
+          <a:bodyPr wrap="square" lIns="0" tIns="0" rIns="0" bIns="0" rtlCol="0" anchor="t"/>
+          <a:lstStyle/>
+          <a:p>
+            <a:pPr indent="0" marL="0">
+              <a:buNone/>
+            </a:pPr>
+            <a:r>
+              <a:rPr lang="en-US" sz="1400" b="1" dirty="0">
+                <a:solidFill>
+                  <a:srgbClr val="B85042"/>
+                </a:solidFill>
+                <a:latin typeface="Calibri" pitchFamily="34" charset="0"/>
+                <a:ea typeface="Calibri" pitchFamily="34" charset="-122"/>
+                <a:cs typeface="Calibri" pitchFamily="34" charset="-120"/>
+              </a:rPr>
+              <a:t>スマートフォンの場合（3ステップ）</a:t>
+            </a:r>
+            <a:endParaRPr lang="en-US" sz="1400" dirty="0"/>
+          </a:p>
+        </p:txBody>
+      </p:sp>
+      <p:sp>
+        <p:nvSpPr>
+          <p:cNvPr id="25" name="Shape 23"/>
+          <p:cNvSpPr/>
+          <p:nvPr/>
+        </p:nvSpPr>
+        <p:spPr>
+          <a:xfrm>
+            <a:off x="566928" y="6497193"/>
+            <a:ext cx="274320" cy="274320"/>
+          </a:xfrm>
+          <a:prstGeom prst="ellipse">
+            <a:avLst/>
+          </a:prstGeom>
+          <a:solidFill>
+            <a:srgbClr val="B85042"/>
+          </a:solidFill>
+          <a:ln/>
+        </p:spPr>
+      </p:sp>
+      <p:sp>
+        <p:nvSpPr>
+          <p:cNvPr id="26" name="Text 24"/>
+          <p:cNvSpPr txBox="1"/>
+          <p:nvPr/>
+        </p:nvSpPr>
+        <p:spPr>
+          <a:xfrm>
+            <a:off x="566928" y="6497193"/>
+            <a:ext cx="274320" cy="274320"/>
+          </a:xfrm>
+          <a:prstGeom prst="rect">
+            <a:avLst/>
+          </a:prstGeom>
+          <a:noFill/>
+          <a:ln/>
+        </p:spPr>
+        <p:txBody>
+          <a:bodyPr wrap="square" lIns="0" tIns="0" rIns="0" bIns="0" rtlCol="0" anchor="ctr"/>
+          <a:lstStyle/>
+          <a:p>
+            <a:pPr algn="ctr" indent="0" marL="0">
+              <a:buNone/>
+            </a:pPr>
+            <a:r>
+              <a:rPr lang="en-US" sz="1100" b="1" dirty="0">
+                <a:solidFill>
+                  <a:srgbClr val="FFFFFF"/>
+                </a:solidFill>
+                <a:latin typeface="Calibri" pitchFamily="34" charset="0"/>
+                <a:ea typeface="Calibri" pitchFamily="34" charset="-122"/>
+                <a:cs typeface="Calibri" pitchFamily="34" charset="-120"/>
+              </a:rPr>
+              <a:t>1</a:t>
+            </a:r>
+            <a:endParaRPr lang="en-US" sz="1100" dirty="0"/>
+          </a:p>
+        </p:txBody>
+      </p:sp>
+      <p:sp>
+        <p:nvSpPr>
+          <p:cNvPr id="27" name="Text 25"/>
+          <p:cNvSpPr txBox="1"/>
+          <p:nvPr/>
+        </p:nvSpPr>
+        <p:spPr>
+          <a:xfrm>
+            <a:off x="969264" y="6478905"/>
+            <a:ext cx="6025896" cy="365760"/>
+          </a:xfrm>
+          <a:prstGeom prst="rect">
+            <a:avLst/>
+          </a:prstGeom>
+          <a:noFill/>
+          <a:ln/>
+        </p:spPr>
+        <p:txBody>
+          <a:bodyPr wrap="square" lIns="0" tIns="0" rIns="0" bIns="0" rtlCol="0" anchor="t"/>
+          <a:lstStyle/>
+          <a:p>
+            <a:pPr indent="0" marL="0">
+              <a:lnSpc>
+                <a:spcPct val="125000"/>
+              </a:lnSpc>
+              <a:buNone/>
+            </a:pPr>
+            <a:r>
+              <a:rPr lang="en-US" sz="1150" dirty="0">
+                <a:solidFill>
+                  <a:srgbClr val="222222"/>
+                </a:solidFill>
+                <a:latin typeface="Calibri" pitchFamily="34" charset="0"/>
+                <a:ea typeface="Calibri" pitchFamily="34" charset="-122"/>
+                <a:cs typeface="Calibri" pitchFamily="34" charset="-120"/>
+              </a:rPr>
+              <a:t>来場者のスマートフォンに表示された</a:t>
+            </a:r>
+            <a:pPr indent="0" marL="0">
+              <a:lnSpc>
+                <a:spcPct val="125000"/>
+              </a:lnSpc>
+              <a:buNone/>
+            </a:pPr>
+            <a:r>
+              <a:rPr lang="en-US" sz="1150" b="1" dirty="0">
+                <a:solidFill>
+                  <a:srgbClr val="222222"/>
+                </a:solidFill>
+                <a:latin typeface="Calibri" pitchFamily="34" charset="0"/>
+                <a:ea typeface="Calibri" pitchFamily="34" charset="-122"/>
+                <a:cs typeface="Calibri" pitchFamily="34" charset="-120"/>
+              </a:rPr>
+              <a:t>QRコード</a:t>
+            </a:r>
+            <a:pPr indent="0" marL="0">
+              <a:lnSpc>
+                <a:spcPct val="125000"/>
+              </a:lnSpc>
+              <a:buNone/>
+            </a:pPr>
+            <a:r>
+              <a:rPr lang="en-US" sz="1150" dirty="0">
+                <a:solidFill>
+                  <a:srgbClr val="222222"/>
+                </a:solidFill>
+                <a:latin typeface="Calibri" pitchFamily="34" charset="0"/>
+                <a:ea typeface="Calibri" pitchFamily="34" charset="-122"/>
+                <a:cs typeface="Calibri" pitchFamily="34" charset="-120"/>
+              </a:rPr>
+              <a:t>を読み取る</a:t>
+            </a:r>
+            <a:endParaRPr lang="en-US" sz="1150" dirty="0"/>
+          </a:p>
+        </p:txBody>
+      </p:sp>
+      <p:sp>
+        <p:nvSpPr>
+          <p:cNvPr id="28" name="Shape 26"/>
+          <p:cNvSpPr/>
+          <p:nvPr/>
+        </p:nvSpPr>
+        <p:spPr>
+          <a:xfrm>
+            <a:off x="566928" y="6954393"/>
+            <a:ext cx="274320" cy="274320"/>
+          </a:xfrm>
+          <a:prstGeom prst="ellipse">
+            <a:avLst/>
+          </a:prstGeom>
+          <a:solidFill>
+            <a:srgbClr val="B85042"/>
+          </a:solidFill>
+          <a:ln/>
+        </p:spPr>
+      </p:sp>
+      <p:sp>
+        <p:nvSpPr>
+          <p:cNvPr id="29" name="Text 27"/>
+          <p:cNvSpPr txBox="1"/>
+          <p:nvPr/>
+        </p:nvSpPr>
+        <p:spPr>
+          <a:xfrm>
+            <a:off x="566928" y="6954393"/>
+            <a:ext cx="274320" cy="274320"/>
+          </a:xfrm>
+          <a:prstGeom prst="rect">
+            <a:avLst/>
+          </a:prstGeom>
+          <a:noFill/>
+          <a:ln/>
+        </p:spPr>
+        <p:txBody>
+          <a:bodyPr wrap="square" lIns="0" tIns="0" rIns="0" bIns="0" rtlCol="0" anchor="ctr"/>
+          <a:lstStyle/>
+          <a:p>
+            <a:pPr algn="ctr" indent="0" marL="0">
+              <a:buNone/>
+            </a:pPr>
+            <a:r>
+              <a:rPr lang="en-US" sz="1100" b="1" dirty="0">
+                <a:solidFill>
+                  <a:srgbClr val="FFFFFF"/>
+                </a:solidFill>
+                <a:latin typeface="Calibri" pitchFamily="34" charset="0"/>
+                <a:ea typeface="Calibri" pitchFamily="34" charset="-122"/>
+                <a:cs typeface="Calibri" pitchFamily="34" charset="-120"/>
+              </a:rPr>
+              <a:t>2</a:t>
+            </a:r>
+            <a:endParaRPr lang="en-US" sz="1100" dirty="0"/>
+          </a:p>
+        </p:txBody>
+      </p:sp>
+      <p:sp>
+        <p:nvSpPr>
+          <p:cNvPr id="30" name="Text 28"/>
+          <p:cNvSpPr txBox="1"/>
+          <p:nvPr/>
+        </p:nvSpPr>
+        <p:spPr>
+          <a:xfrm>
+            <a:off x="969264" y="6936105"/>
+            <a:ext cx="6025896" cy="365760"/>
+          </a:xfrm>
+          <a:prstGeom prst="rect">
+            <a:avLst/>
+          </a:prstGeom>
+          <a:noFill/>
+          <a:ln/>
+        </p:spPr>
+        <p:txBody>
+          <a:bodyPr wrap="square" lIns="0" tIns="0" rIns="0" bIns="0" rtlCol="0" anchor="t"/>
+          <a:lstStyle/>
+          <a:p>
+            <a:pPr indent="0" marL="0">
+              <a:lnSpc>
+                <a:spcPct val="125000"/>
+              </a:lnSpc>
+              <a:buNone/>
+            </a:pPr>
+            <a:r>
+              <a:rPr lang="en-US" sz="1150" dirty="0">
+                <a:solidFill>
+                  <a:srgbClr val="222222"/>
+                </a:solidFill>
+                <a:latin typeface="Calibri" pitchFamily="34" charset="0"/>
+                <a:ea typeface="Calibri" pitchFamily="34" charset="-122"/>
+                <a:cs typeface="Calibri" pitchFamily="34" charset="-120"/>
+              </a:rPr>
+              <a:t>画面で</a:t>
+            </a:r>
+            <a:pPr indent="0" marL="0">
+              <a:lnSpc>
+                <a:spcPct val="125000"/>
+              </a:lnSpc>
+              <a:buNone/>
+            </a:pPr>
+            <a:r>
+              <a:rPr lang="en-US" sz="1150" b="1" dirty="0">
+                <a:solidFill>
+                  <a:srgbClr val="222222"/>
+                </a:solidFill>
+                <a:latin typeface="Calibri" pitchFamily="34" charset="0"/>
+                <a:ea typeface="Calibri" pitchFamily="34" charset="-122"/>
+                <a:cs typeface="Calibri" pitchFamily="34" charset="-120"/>
+              </a:rPr>
+              <a:t>未交換か交換済みか</a:t>
+            </a:r>
+            <a:pPr indent="0" marL="0">
+              <a:lnSpc>
+                <a:spcPct val="125000"/>
+              </a:lnSpc>
+              <a:buNone/>
+            </a:pPr>
+            <a:r>
+              <a:rPr lang="en-US" sz="1150" dirty="0">
+                <a:solidFill>
+                  <a:srgbClr val="222222"/>
+                </a:solidFill>
+                <a:latin typeface="Calibri" pitchFamily="34" charset="0"/>
+                <a:ea typeface="Calibri" pitchFamily="34" charset="-122"/>
+                <a:cs typeface="Calibri" pitchFamily="34" charset="-120"/>
+              </a:rPr>
+              <a:t>を確かめ、</a:t>
+            </a:r>
+            <a:pPr indent="0" marL="0">
+              <a:lnSpc>
+                <a:spcPct val="125000"/>
+              </a:lnSpc>
+              <a:buNone/>
+            </a:pPr>
+            <a:r>
+              <a:rPr lang="en-US" sz="1150" b="1" dirty="0">
+                <a:solidFill>
+                  <a:srgbClr val="222222"/>
+                </a:solidFill>
+                <a:latin typeface="Calibri" pitchFamily="34" charset="0"/>
+                <a:ea typeface="Calibri" pitchFamily="34" charset="-122"/>
+                <a:cs typeface="Calibri" pitchFamily="34" charset="-120"/>
+              </a:rPr>
+              <a:t>渡す景品を選ぶ</a:t>
+            </a:r>
+            <a:endParaRPr lang="en-US" sz="1150" dirty="0"/>
+          </a:p>
+        </p:txBody>
+      </p:sp>
+      <p:sp>
+        <p:nvSpPr>
+          <p:cNvPr id="31" name="Shape 29"/>
+          <p:cNvSpPr/>
+          <p:nvPr/>
+        </p:nvSpPr>
+        <p:spPr>
+          <a:xfrm>
+            <a:off x="566928" y="7411593"/>
+            <a:ext cx="274320" cy="274320"/>
+          </a:xfrm>
+          <a:prstGeom prst="ellipse">
+            <a:avLst/>
+          </a:prstGeom>
+          <a:solidFill>
+            <a:srgbClr val="B85042"/>
+          </a:solidFill>
+          <a:ln/>
+        </p:spPr>
+      </p:sp>
+      <p:sp>
+        <p:nvSpPr>
+          <p:cNvPr id="32" name="Text 30"/>
+          <p:cNvSpPr txBox="1"/>
+          <p:nvPr/>
+        </p:nvSpPr>
+        <p:spPr>
+          <a:xfrm>
+            <a:off x="566928" y="7411593"/>
+            <a:ext cx="274320" cy="274320"/>
+          </a:xfrm>
+          <a:prstGeom prst="rect">
+            <a:avLst/>
+          </a:prstGeom>
+          <a:noFill/>
+          <a:ln/>
+        </p:spPr>
+        <p:txBody>
+          <a:bodyPr wrap="square" lIns="0" tIns="0" rIns="0" bIns="0" rtlCol="0" anchor="ctr"/>
+          <a:lstStyle/>
+          <a:p>
+            <a:pPr algn="ctr" indent="0" marL="0">
+              <a:buNone/>
+            </a:pPr>
+            <a:r>
+              <a:rPr lang="en-US" sz="1100" b="1" dirty="0">
+                <a:solidFill>
+                  <a:srgbClr val="FFFFFF"/>
+                </a:solidFill>
+                <a:latin typeface="Calibri" pitchFamily="34" charset="0"/>
+                <a:ea typeface="Calibri" pitchFamily="34" charset="-122"/>
+                <a:cs typeface="Calibri" pitchFamily="34" charset="-120"/>
+              </a:rPr>
+              <a:t>3</a:t>
+            </a:r>
+            <a:endParaRPr lang="en-US" sz="1100" dirty="0"/>
+          </a:p>
+        </p:txBody>
+      </p:sp>
+      <p:sp>
+        <p:nvSpPr>
+          <p:cNvPr id="33" name="Text 31"/>
+          <p:cNvSpPr txBox="1"/>
+          <p:nvPr/>
+        </p:nvSpPr>
+        <p:spPr>
+          <a:xfrm>
+            <a:off x="969264" y="7393305"/>
+            <a:ext cx="6025896" cy="365760"/>
+          </a:xfrm>
+          <a:prstGeom prst="rect">
+            <a:avLst/>
+          </a:prstGeom>
+          <a:noFill/>
+          <a:ln/>
+        </p:spPr>
+        <p:txBody>
+          <a:bodyPr wrap="square" lIns="0" tIns="0" rIns="0" bIns="0" rtlCol="0" anchor="t"/>
+          <a:lstStyle/>
+          <a:p>
+            <a:pPr indent="0" marL="0">
+              <a:lnSpc>
+                <a:spcPct val="125000"/>
+              </a:lnSpc>
+              <a:buNone/>
+            </a:pPr>
+            <a:r>
+              <a:rPr lang="en-US" sz="1150" dirty="0">
+                <a:solidFill>
+                  <a:srgbClr val="222222"/>
+                </a:solidFill>
+                <a:latin typeface="Calibri" pitchFamily="34" charset="0"/>
+                <a:ea typeface="Calibri" pitchFamily="34" charset="-122"/>
+                <a:cs typeface="Calibri" pitchFamily="34" charset="-120"/>
+              </a:rPr>
+              <a:t>「交換済みにする」を押して記録する</a:t>
+            </a:r>
+            <a:endParaRPr lang="en-US" sz="1150" dirty="0"/>
+          </a:p>
+        </p:txBody>
+      </p:sp>
+      <p:sp>
+        <p:nvSpPr>
+          <p:cNvPr id="34" name="Shape 32"/>
+          <p:cNvSpPr/>
+          <p:nvPr/>
+        </p:nvSpPr>
+        <p:spPr>
+          <a:xfrm>
+            <a:off x="566928" y="7850505"/>
+            <a:ext cx="6428232" cy="624459"/>
+          </a:xfrm>
+          <a:prstGeom prst="roundRect">
+            <a:avLst>
+              <a:gd name="adj" fmla="val 8786"/>
+            </a:avLst>
+          </a:prstGeom>
+          <a:solidFill>
+            <a:srgbClr val="FAEAE7"/>
+          </a:solidFill>
+          <a:ln w="9525">
+            <a:solidFill>
+              <a:srgbClr val="B85042"/>
+            </a:solidFill>
+            <a:prstDash val="solid"/>
+          </a:ln>
+        </p:spPr>
+      </p:sp>
+      <p:sp>
+        <p:nvSpPr>
+          <p:cNvPr id="35" name="Text 33"/>
+          <p:cNvSpPr txBox="1"/>
+          <p:nvPr/>
+        </p:nvSpPr>
+        <p:spPr>
+          <a:xfrm>
+            <a:off x="658368" y="7941945"/>
+            <a:ext cx="237744" cy="237744"/>
+          </a:xfrm>
+          <a:prstGeom prst="rect">
+            <a:avLst/>
+          </a:prstGeom>
+          <a:noFill/>
+          <a:ln/>
+        </p:spPr>
+        <p:txBody>
+          <a:bodyPr wrap="square" lIns="0" tIns="0" rIns="0" bIns="0" rtlCol="0" anchor="ctr"/>
+          <a:lstStyle/>
+          <a:p>
+            <a:pPr algn="ctr" indent="0" marL="0">
+              <a:buNone/>
+            </a:pPr>
+            <a:r>
+              <a:rPr lang="en-US" sz="1200" b="1" dirty="0">
+                <a:solidFill>
+                  <a:srgbClr val="B85042"/>
+                </a:solidFill>
+                <a:latin typeface="Calibri" pitchFamily="34" charset="0"/>
+                <a:ea typeface="Calibri" pitchFamily="34" charset="-122"/>
+                <a:cs typeface="Calibri" pitchFamily="34" charset="-120"/>
+              </a:rPr>
+              <a:t>i</a:t>
+            </a:r>
+            <a:endParaRPr lang="en-US" sz="1200" dirty="0"/>
+          </a:p>
+        </p:txBody>
+      </p:sp>
+      <p:sp>
+        <p:nvSpPr>
+          <p:cNvPr id="36" name="Text 34"/>
+          <p:cNvSpPr txBox="1"/>
+          <p:nvPr/>
+        </p:nvSpPr>
+        <p:spPr>
+          <a:xfrm>
+            <a:off x="950976" y="7960233"/>
+            <a:ext cx="5925312" cy="441579"/>
+          </a:xfrm>
+          <a:prstGeom prst="rect">
+            <a:avLst/>
+          </a:prstGeom>
+          <a:noFill/>
+          <a:ln/>
+        </p:spPr>
+        <p:txBody>
+          <a:bodyPr wrap="square" lIns="0" tIns="0" rIns="0" bIns="0" rtlCol="0" anchor="t"/>
+          <a:lstStyle/>
+          <a:p>
+            <a:pPr indent="0" marL="0">
+              <a:lnSpc>
+                <a:spcPct val="120000"/>
+              </a:lnSpc>
+              <a:buNone/>
+            </a:pPr>
+            <a:r>
+              <a:rPr lang="en-US" sz="1050" dirty="0">
+                <a:solidFill>
+                  <a:srgbClr val="222222"/>
+                </a:solidFill>
+                <a:latin typeface="Calibri" pitchFamily="34" charset="0"/>
+                <a:ea typeface="Calibri" pitchFamily="34" charset="-122"/>
+                <a:cs typeface="Calibri" pitchFamily="34" charset="-120"/>
+              </a:rPr>
               <a:t>来場者の画面には「交換コード」（例：ABCD-2345）とQRコードが表示されています。スクリーンショットを見せられた場合も同じように読み取れます。</a:t>
             </a:r>
             <a:endParaRPr lang="en-US" sz="1050" dirty="0"/>
           </a:p>
         </p:txBody>
       </p:sp>
-      <p:pic>
-        <p:nvPicPr>
-          <p:cNvPr id="16" name="Image 0" descr="C:\Users\sato\Desktop\enque\docs\images\p-visitor-done.png">    </p:cNvPr>
-          <p:cNvPicPr>
-            <a:picLocks noChangeAspect="1"/>
-          </p:cNvPicPr>
-          <p:nvPr/>
-        </p:nvPicPr>
-        <p:blipFill>
-          <a:blip r:embed="rId1"/>
-          <a:stretch>
-            <a:fillRect/>
-          </a:stretch>
-        </p:blipFill>
-        <p:spPr>
-          <a:xfrm>
-            <a:off x="3266610" y="3550539"/>
-            <a:ext cx="1028869" cy="3474720"/>
-          </a:xfrm>
-          <a:prstGeom prst="rect">
-            <a:avLst/>
-          </a:prstGeom>
-        </p:spPr>
-      </p:pic>
-      <p:sp>
-        <p:nvSpPr>
-          <p:cNvPr id="17" name="Text 14"/>
-          <p:cNvSpPr txBox="1"/>
-          <p:nvPr/>
-        </p:nvSpPr>
-        <p:spPr>
-          <a:xfrm>
-            <a:off x="566928" y="7080123"/>
-            <a:ext cx="6428232" cy="274320"/>
-          </a:xfrm>
-          <a:prstGeom prst="rect">
-            <a:avLst/>
-          </a:prstGeom>
-          <a:noFill/>
-          <a:ln/>
-        </p:spPr>
-        <p:txBody>
-          <a:bodyPr wrap="square" lIns="0" tIns="0" rIns="0" bIns="0" rtlCol="0" anchor="ctr"/>
-          <a:lstStyle/>
-          <a:p>
-            <a:pPr algn="ctr" indent="0" marL="0">
-              <a:buNone/>
-            </a:pPr>
-            <a:r>
-              <a:rPr lang="en-US" sz="950" dirty="0">
-                <a:solidFill>
-                  <a:srgbClr val="6B6B6B"/>
-                </a:solidFill>
-                <a:latin typeface="Calibri" pitchFamily="34" charset="0"/>
-                <a:ea typeface="Calibri" pitchFamily="34" charset="-122"/>
-                <a:cs typeface="Calibri" pitchFamily="34" charset="-120"/>
-              </a:rPr>
-              <a:t>来場者の「回答済み画面」。大きな交換コードとQRコードが写っているもの。</a:t>
-            </a:r>
-            <a:endParaRPr lang="en-US" sz="950" dirty="0"/>
-          </a:p>
-        </p:txBody>
-      </p:sp>
-      <p:sp>
-        <p:nvSpPr>
-          <p:cNvPr id="18" name="Text 15"/>
+      <p:sp>
+        <p:nvSpPr>
+          <p:cNvPr id="37" name="Text 35"/>
           <p:cNvSpPr txBox="1"/>
           <p:nvPr/>
         </p:nvSpPr>
@@ -5026,123 +6677,46 @@
                 <a:ea typeface="Calibri" pitchFamily="34" charset="-122"/>
                 <a:cs typeface="Calibri" pitchFamily="34" charset="-120"/>
               </a:rPr>
-              <a:t>手順1：QRコードを読み取る</a:t>
+              <a:t>交換の流れ（つづき）</a:t>
             </a:r>
             <a:endParaRPr lang="en-US" sz="2200" dirty="0"/>
           </a:p>
         </p:txBody>
       </p:sp>
-      <p:sp>
-        <p:nvSpPr>
-          <p:cNvPr id="4" name="Text 2"/>
-          <p:cNvSpPr txBox="1"/>
-          <p:nvPr/>
-        </p:nvSpPr>
-        <p:spPr>
-          <a:xfrm>
-            <a:off x="566928" y="1481328"/>
-            <a:ext cx="6428232" cy="257429"/>
-          </a:xfrm>
-          <a:prstGeom prst="rect">
-            <a:avLst/>
-          </a:prstGeom>
-          <a:noFill/>
-          <a:ln/>
-        </p:spPr>
-        <p:txBody>
-          <a:bodyPr wrap="square" lIns="0" tIns="0" rIns="0" bIns="0" rtlCol="0" anchor="t"/>
-          <a:lstStyle/>
-          <a:p>
-            <a:pPr indent="0" marL="0">
-              <a:lnSpc>
-                <a:spcPct val="125000"/>
-              </a:lnSpc>
-              <a:buNone/>
-            </a:pPr>
-            <a:r>
-              <a:rPr lang="en-US" sz="1100" dirty="0">
-                <a:solidFill>
-                  <a:srgbClr val="222222"/>
-                </a:solidFill>
-                <a:latin typeface="Calibri" pitchFamily="34" charset="0"/>
-                <a:ea typeface="Calibri" pitchFamily="34" charset="-122"/>
-                <a:cs typeface="Calibri" pitchFamily="34" charset="-120"/>
-              </a:rPr>
-              <a:t>読み取り方は2通りあります。どちらでも同じ画面が開きます。</a:t>
-            </a:r>
-            <a:endParaRPr lang="en-US" sz="1100" dirty="0"/>
-          </a:p>
-        </p:txBody>
-      </p:sp>
-      <p:sp>
-        <p:nvSpPr>
-          <p:cNvPr id="5" name="Text 3"/>
-          <p:cNvSpPr txBox="1"/>
-          <p:nvPr/>
-        </p:nvSpPr>
-        <p:spPr>
-          <a:xfrm>
-            <a:off x="566928" y="1885061"/>
-            <a:ext cx="6428232" cy="257810"/>
-          </a:xfrm>
-          <a:prstGeom prst="rect">
-            <a:avLst/>
-          </a:prstGeom>
-          <a:noFill/>
-          <a:ln/>
-        </p:spPr>
-        <p:txBody>
-          <a:bodyPr wrap="square" lIns="0" tIns="0" rIns="0" bIns="0" rtlCol="0" anchor="t"/>
-          <a:lstStyle/>
-          <a:p>
-            <a:pPr indent="0" marL="0">
-              <a:buNone/>
-            </a:pPr>
-            <a:r>
-              <a:rPr lang="en-US" sz="1400" b="1" dirty="0">
-                <a:solidFill>
-                  <a:srgbClr val="B85042"/>
-                </a:solidFill>
-                <a:latin typeface="Calibri" pitchFamily="34" charset="0"/>
-                <a:ea typeface="Calibri" pitchFamily="34" charset="-122"/>
-                <a:cs typeface="Calibri" pitchFamily="34" charset="-120"/>
-              </a:rPr>
-              <a:t>方法A：照会画面のボタンから読み取る（おすすめ）</a:t>
-            </a:r>
-            <a:endParaRPr lang="en-US" sz="1400" dirty="0"/>
-          </a:p>
-        </p:txBody>
-      </p:sp>
-      <p:sp>
-        <p:nvSpPr>
-          <p:cNvPr id="6" name="Shape 4"/>
-          <p:cNvSpPr/>
-          <p:nvPr/>
-        </p:nvSpPr>
-        <p:spPr>
-          <a:xfrm>
-            <a:off x="566928" y="2234311"/>
-            <a:ext cx="274320" cy="274320"/>
-          </a:xfrm>
-          <a:prstGeom prst="ellipse">
-            <a:avLst/>
-          </a:prstGeom>
-          <a:solidFill>
-            <a:srgbClr val="B85042"/>
-          </a:solidFill>
-          <a:ln/>
-        </p:spPr>
-      </p:sp>
-      <p:sp>
-        <p:nvSpPr>
-          <p:cNvPr id="7" name="Text 5"/>
-          <p:cNvSpPr txBox="1"/>
-          <p:nvPr/>
-        </p:nvSpPr>
-        <p:spPr>
-          <a:xfrm>
-            <a:off x="566928" y="2234311"/>
-            <a:ext cx="274320" cy="274320"/>
+      <p:pic>
+        <p:nvPicPr>
+          <p:cNvPr id="4" name="Image 0" descr="C:\Users\sato\Desktop\enque\docs\images\p-scan-desk.png">    </p:cNvPr>
+          <p:cNvPicPr>
+            <a:picLocks noChangeAspect="1"/>
+          </p:cNvPicPr>
+          <p:nvPr/>
+        </p:nvPicPr>
+        <p:blipFill>
+          <a:blip r:embed="rId1"/>
+          <a:stretch>
+            <a:fillRect/>
+          </a:stretch>
+        </p:blipFill>
+        <p:spPr>
+          <a:xfrm>
+            <a:off x="1545525" y="1481328"/>
+            <a:ext cx="4471038" cy="3474720"/>
+          </a:xfrm>
+          <a:prstGeom prst="rect">
+            <a:avLst/>
+          </a:prstGeom>
+        </p:spPr>
+      </p:pic>
+      <p:sp>
+        <p:nvSpPr>
+          <p:cNvPr id="5" name="Text 2"/>
+          <p:cNvSpPr txBox="1"/>
+          <p:nvPr/>
+        </p:nvSpPr>
+        <p:spPr>
+          <a:xfrm>
+            <a:off x="566928" y="5010912"/>
+            <a:ext cx="6428232" cy="274320"/>
           </a:xfrm>
           <a:prstGeom prst="rect">
             <a:avLst/>
@@ -5158,126 +6732,54 @@
               <a:buNone/>
             </a:pPr>
             <a:r>
-              <a:rPr lang="en-US" sz="1100" b="1" dirty="0">
-                <a:solidFill>
-                  <a:srgbClr val="FFFFFF"/>
-                </a:solidFill>
-                <a:latin typeface="Calibri" pitchFamily="34" charset="0"/>
-                <a:ea typeface="Calibri" pitchFamily="34" charset="-122"/>
-                <a:cs typeface="Calibri" pitchFamily="34" charset="-120"/>
-              </a:rPr>
-              <a:t>1</a:t>
-            </a:r>
-            <a:endParaRPr lang="en-US" sz="1100" dirty="0"/>
-          </a:p>
-        </p:txBody>
-      </p:sp>
-      <p:sp>
-        <p:nvSpPr>
-          <p:cNvPr id="8" name="Text 6"/>
-          <p:cNvSpPr txBox="1"/>
-          <p:nvPr/>
-        </p:nvSpPr>
-        <p:spPr>
-          <a:xfrm>
-            <a:off x="969264" y="2216023"/>
-            <a:ext cx="6025896" cy="365760"/>
-          </a:xfrm>
-          <a:prstGeom prst="rect">
-            <a:avLst/>
-          </a:prstGeom>
-          <a:noFill/>
-          <a:ln/>
-        </p:spPr>
-        <p:txBody>
-          <a:bodyPr wrap="square" lIns="0" tIns="0" rIns="0" bIns="0" rtlCol="0" anchor="t"/>
-          <a:lstStyle/>
-          <a:p>
-            <a:pPr indent="0" marL="0">
-              <a:lnSpc>
-                <a:spcPct val="125000"/>
-              </a:lnSpc>
-              <a:buNone/>
-            </a:pPr>
-            <a:r>
-              <a:rPr lang="en-US" sz="1150" dirty="0">
-                <a:solidFill>
-                  <a:srgbClr val="222222"/>
-                </a:solidFill>
-                <a:latin typeface="Calibri" pitchFamily="34" charset="0"/>
-                <a:ea typeface="Calibri" pitchFamily="34" charset="-122"/>
-                <a:cs typeface="Calibri" pitchFamily="34" charset="-120"/>
-              </a:rPr>
-              <a:t>「景品交換の照会」の画面で、</a:t>
-            </a:r>
-            <a:pPr indent="0" marL="0">
-              <a:lnSpc>
-                <a:spcPct val="125000"/>
-              </a:lnSpc>
-              <a:buNone/>
-            </a:pPr>
-            <a:r>
-              <a:rPr lang="en-US" sz="1150" b="1" dirty="0">
-                <a:solidFill>
-                  <a:srgbClr val="222222"/>
-                </a:solidFill>
-                <a:latin typeface="Calibri" pitchFamily="34" charset="0"/>
-                <a:ea typeface="Calibri" pitchFamily="34" charset="-122"/>
-                <a:cs typeface="Calibri" pitchFamily="34" charset="-120"/>
-              </a:rPr>
-              <a:t>「QRコードを読み取る」</a:t>
-            </a:r>
-            <a:pPr indent="0" marL="0">
-              <a:lnSpc>
-                <a:spcPct val="125000"/>
-              </a:lnSpc>
-              <a:buNone/>
-            </a:pPr>
-            <a:r>
-              <a:rPr lang="en-US" sz="1150" dirty="0">
-                <a:solidFill>
-                  <a:srgbClr val="222222"/>
-                </a:solidFill>
-                <a:latin typeface="Calibri" pitchFamily="34" charset="0"/>
-                <a:ea typeface="Calibri" pitchFamily="34" charset="-122"/>
-                <a:cs typeface="Calibri" pitchFamily="34" charset="-120"/>
-              </a:rPr>
-              <a:t>を押す</a:t>
-            </a:r>
-            <a:endParaRPr lang="en-US" sz="1150" dirty="0"/>
-          </a:p>
-        </p:txBody>
-      </p:sp>
-      <p:sp>
-        <p:nvSpPr>
-          <p:cNvPr id="9" name="Shape 7"/>
-          <p:cNvSpPr/>
-          <p:nvPr/>
-        </p:nvSpPr>
-        <p:spPr>
-          <a:xfrm>
-            <a:off x="566928" y="2691511"/>
-            <a:ext cx="274320" cy="274320"/>
-          </a:xfrm>
-          <a:prstGeom prst="ellipse">
-            <a:avLst/>
-          </a:prstGeom>
-          <a:solidFill>
-            <a:srgbClr val="B85042"/>
-          </a:solidFill>
-          <a:ln/>
-        </p:spPr>
-      </p:sp>
-      <p:sp>
-        <p:nvSpPr>
-          <p:cNvPr id="10" name="Text 8"/>
-          <p:cNvSpPr txBox="1"/>
-          <p:nvPr/>
-        </p:nvSpPr>
-        <p:spPr>
-          <a:xfrm>
-            <a:off x="566928" y="2691511"/>
-            <a:ext cx="274320" cy="274320"/>
+              <a:rPr lang="en-US" sz="950" dirty="0">
+                <a:solidFill>
+                  <a:srgbClr val="6B6B6B"/>
+                </a:solidFill>
+                <a:latin typeface="Calibri" pitchFamily="34" charset="0"/>
+                <a:ea typeface="Calibri" pitchFamily="34" charset="-122"/>
+                <a:cs typeface="Calibri" pitchFamily="34" charset="-120"/>
+              </a:rPr>
+              <a:t>受付の「景品交換の照会」画面。読み取り欄と「渡す景品」が見えるもの。</a:t>
+            </a:r>
+            <a:endParaRPr lang="en-US" sz="950" dirty="0"/>
+          </a:p>
+        </p:txBody>
+      </p:sp>
+      <p:pic>
+        <p:nvPicPr>
+          <p:cNvPr id="6" name="Image 1" descr="C:\Users\sato\Desktop\enque\docs\images\p-visitor-done.png">    </p:cNvPr>
+          <p:cNvPicPr>
+            <a:picLocks noChangeAspect="1"/>
+          </p:cNvPicPr>
+          <p:nvPr/>
+        </p:nvPicPr>
+        <p:blipFill>
+          <a:blip r:embed="rId2"/>
+          <a:stretch>
+            <a:fillRect/>
+          </a:stretch>
+        </p:blipFill>
+        <p:spPr>
+          <a:xfrm>
+            <a:off x="3266610" y="5340096"/>
+            <a:ext cx="1028869" cy="3474720"/>
+          </a:xfrm>
+          <a:prstGeom prst="rect">
+            <a:avLst/>
+          </a:prstGeom>
+        </p:spPr>
+      </p:pic>
+      <p:sp>
+        <p:nvSpPr>
+          <p:cNvPr id="7" name="Text 3"/>
+          <p:cNvSpPr txBox="1"/>
+          <p:nvPr/>
+        </p:nvSpPr>
+        <p:spPr>
+          <a:xfrm>
+            <a:off x="566928" y="8869680"/>
+            <a:ext cx="6428232" cy="274320"/>
           </a:xfrm>
           <a:prstGeom prst="rect">
             <a:avLst/>
@@ -5293,859 +6795,23 @@
               <a:buNone/>
             </a:pPr>
             <a:r>
-              <a:rPr lang="en-US" sz="1100" b="1" dirty="0">
-                <a:solidFill>
-                  <a:srgbClr val="FFFFFF"/>
-                </a:solidFill>
-                <a:latin typeface="Calibri" pitchFamily="34" charset="0"/>
-                <a:ea typeface="Calibri" pitchFamily="34" charset="-122"/>
-                <a:cs typeface="Calibri" pitchFamily="34" charset="-120"/>
-              </a:rPr>
-              <a:t>2</a:t>
-            </a:r>
-            <a:endParaRPr lang="en-US" sz="1100" dirty="0"/>
-          </a:p>
-        </p:txBody>
-      </p:sp>
-      <p:sp>
-        <p:nvSpPr>
-          <p:cNvPr id="11" name="Text 9"/>
-          <p:cNvSpPr txBox="1"/>
-          <p:nvPr/>
-        </p:nvSpPr>
-        <p:spPr>
-          <a:xfrm>
-            <a:off x="969264" y="2673223"/>
-            <a:ext cx="6025896" cy="365760"/>
-          </a:xfrm>
-          <a:prstGeom prst="rect">
-            <a:avLst/>
-          </a:prstGeom>
-          <a:noFill/>
-          <a:ln/>
-        </p:spPr>
-        <p:txBody>
-          <a:bodyPr wrap="square" lIns="0" tIns="0" rIns="0" bIns="0" rtlCol="0" anchor="t"/>
-          <a:lstStyle/>
-          <a:p>
-            <a:pPr indent="0" marL="0">
-              <a:lnSpc>
-                <a:spcPct val="125000"/>
-              </a:lnSpc>
-              <a:buNone/>
-            </a:pPr>
-            <a:r>
-              <a:rPr lang="en-US" sz="1150" dirty="0">
-                <a:solidFill>
-                  <a:srgbClr val="222222"/>
-                </a:solidFill>
-                <a:latin typeface="Calibri" pitchFamily="34" charset="0"/>
-                <a:ea typeface="Calibri" pitchFamily="34" charset="-122"/>
-                <a:cs typeface="Calibri" pitchFamily="34" charset="-120"/>
-              </a:rPr>
-              <a:t>カメラの使用を聞かれたら</a:t>
-            </a:r>
-            <a:pPr indent="0" marL="0">
-              <a:lnSpc>
-                <a:spcPct val="125000"/>
-              </a:lnSpc>
-              <a:buNone/>
-            </a:pPr>
-            <a:r>
-              <a:rPr lang="en-US" sz="1150" b="1" dirty="0">
-                <a:solidFill>
-                  <a:srgbClr val="222222"/>
-                </a:solidFill>
-                <a:latin typeface="Calibri" pitchFamily="34" charset="0"/>
-                <a:ea typeface="Calibri" pitchFamily="34" charset="-122"/>
-                <a:cs typeface="Calibri" pitchFamily="34" charset="-120"/>
-              </a:rPr>
-              <a:t>「許可」</a:t>
-            </a:r>
-            <a:pPr indent="0" marL="0">
-              <a:lnSpc>
-                <a:spcPct val="125000"/>
-              </a:lnSpc>
-              <a:buNone/>
-            </a:pPr>
-            <a:r>
-              <a:rPr lang="en-US" sz="1150" dirty="0">
-                <a:solidFill>
-                  <a:srgbClr val="222222"/>
-                </a:solidFill>
-                <a:latin typeface="Calibri" pitchFamily="34" charset="0"/>
-                <a:ea typeface="Calibri" pitchFamily="34" charset="-122"/>
-                <a:cs typeface="Calibri" pitchFamily="34" charset="-120"/>
-              </a:rPr>
-              <a:t>を選ぶ（最初の1回だけ）</a:t>
-            </a:r>
-            <a:endParaRPr lang="en-US" sz="1150" dirty="0"/>
-          </a:p>
-        </p:txBody>
-      </p:sp>
-      <p:sp>
-        <p:nvSpPr>
-          <p:cNvPr id="12" name="Shape 10"/>
-          <p:cNvSpPr/>
-          <p:nvPr/>
-        </p:nvSpPr>
-        <p:spPr>
-          <a:xfrm>
-            <a:off x="566928" y="3148711"/>
-            <a:ext cx="274320" cy="274320"/>
-          </a:xfrm>
-          <a:prstGeom prst="ellipse">
-            <a:avLst/>
-          </a:prstGeom>
-          <a:solidFill>
-            <a:srgbClr val="B85042"/>
-          </a:solidFill>
-          <a:ln/>
-        </p:spPr>
-      </p:sp>
-      <p:sp>
-        <p:nvSpPr>
-          <p:cNvPr id="13" name="Text 11"/>
-          <p:cNvSpPr txBox="1"/>
-          <p:nvPr/>
-        </p:nvSpPr>
-        <p:spPr>
-          <a:xfrm>
-            <a:off x="566928" y="3148711"/>
-            <a:ext cx="274320" cy="274320"/>
-          </a:xfrm>
-          <a:prstGeom prst="rect">
-            <a:avLst/>
-          </a:prstGeom>
-          <a:noFill/>
-          <a:ln/>
-        </p:spPr>
-        <p:txBody>
-          <a:bodyPr wrap="square" lIns="0" tIns="0" rIns="0" bIns="0" rtlCol="0" anchor="ctr"/>
-          <a:lstStyle/>
-          <a:p>
-            <a:pPr algn="ctr" indent="0" marL="0">
-              <a:buNone/>
-            </a:pPr>
-            <a:r>
-              <a:rPr lang="en-US" sz="1100" b="1" dirty="0">
-                <a:solidFill>
-                  <a:srgbClr val="FFFFFF"/>
-                </a:solidFill>
-                <a:latin typeface="Calibri" pitchFamily="34" charset="0"/>
-                <a:ea typeface="Calibri" pitchFamily="34" charset="-122"/>
-                <a:cs typeface="Calibri" pitchFamily="34" charset="-120"/>
-              </a:rPr>
-              <a:t>3</a:t>
-            </a:r>
-            <a:endParaRPr lang="en-US" sz="1100" dirty="0"/>
-          </a:p>
-        </p:txBody>
-      </p:sp>
-      <p:sp>
-        <p:nvSpPr>
-          <p:cNvPr id="14" name="Text 12"/>
-          <p:cNvSpPr txBox="1"/>
-          <p:nvPr/>
-        </p:nvSpPr>
-        <p:spPr>
-          <a:xfrm>
-            <a:off x="969264" y="3130423"/>
-            <a:ext cx="6025896" cy="365760"/>
-          </a:xfrm>
-          <a:prstGeom prst="rect">
-            <a:avLst/>
-          </a:prstGeom>
-          <a:noFill/>
-          <a:ln/>
-        </p:spPr>
-        <p:txBody>
-          <a:bodyPr wrap="square" lIns="0" tIns="0" rIns="0" bIns="0" rtlCol="0" anchor="t"/>
-          <a:lstStyle/>
-          <a:p>
-            <a:pPr indent="0" marL="0">
-              <a:lnSpc>
-                <a:spcPct val="125000"/>
-              </a:lnSpc>
-              <a:buNone/>
-            </a:pPr>
-            <a:r>
-              <a:rPr lang="en-US" sz="1150" dirty="0">
-                <a:solidFill>
-                  <a:srgbClr val="222222"/>
-                </a:solidFill>
-                <a:latin typeface="Calibri" pitchFamily="34" charset="0"/>
-                <a:ea typeface="Calibri" pitchFamily="34" charset="-122"/>
-                <a:cs typeface="Calibri" pitchFamily="34" charset="-120"/>
-              </a:rPr>
-              <a:t>画面の枠に、来場者のQRコードを入れる</a:t>
-            </a:r>
-            <a:endParaRPr lang="en-US" sz="1150" dirty="0"/>
-          </a:p>
-        </p:txBody>
-      </p:sp>
-      <p:sp>
-        <p:nvSpPr>
-          <p:cNvPr id="15" name="Shape 13"/>
-          <p:cNvSpPr/>
-          <p:nvPr/>
-        </p:nvSpPr>
-        <p:spPr>
-          <a:xfrm>
-            <a:off x="566928" y="3605911"/>
-            <a:ext cx="274320" cy="274320"/>
-          </a:xfrm>
-          <a:prstGeom prst="ellipse">
-            <a:avLst/>
-          </a:prstGeom>
-          <a:solidFill>
-            <a:srgbClr val="B85042"/>
-          </a:solidFill>
-          <a:ln/>
-        </p:spPr>
-      </p:sp>
-      <p:sp>
-        <p:nvSpPr>
-          <p:cNvPr id="16" name="Text 14"/>
-          <p:cNvSpPr txBox="1"/>
-          <p:nvPr/>
-        </p:nvSpPr>
-        <p:spPr>
-          <a:xfrm>
-            <a:off x="566928" y="3605911"/>
-            <a:ext cx="274320" cy="274320"/>
-          </a:xfrm>
-          <a:prstGeom prst="rect">
-            <a:avLst/>
-          </a:prstGeom>
-          <a:noFill/>
-          <a:ln/>
-        </p:spPr>
-        <p:txBody>
-          <a:bodyPr wrap="square" lIns="0" tIns="0" rIns="0" bIns="0" rtlCol="0" anchor="ctr"/>
-          <a:lstStyle/>
-          <a:p>
-            <a:pPr algn="ctr" indent="0" marL="0">
-              <a:buNone/>
-            </a:pPr>
-            <a:r>
-              <a:rPr lang="en-US" sz="1100" b="1" dirty="0">
-                <a:solidFill>
-                  <a:srgbClr val="FFFFFF"/>
-                </a:solidFill>
-                <a:latin typeface="Calibri" pitchFamily="34" charset="0"/>
-                <a:ea typeface="Calibri" pitchFamily="34" charset="-122"/>
-                <a:cs typeface="Calibri" pitchFamily="34" charset="-120"/>
-              </a:rPr>
-              <a:t>4</a:t>
-            </a:r>
-            <a:endParaRPr lang="en-US" sz="1100" dirty="0"/>
-          </a:p>
-        </p:txBody>
-      </p:sp>
-      <p:sp>
-        <p:nvSpPr>
-          <p:cNvPr id="17" name="Text 15"/>
-          <p:cNvSpPr txBox="1"/>
-          <p:nvPr/>
-        </p:nvSpPr>
-        <p:spPr>
-          <a:xfrm>
-            <a:off x="969264" y="3587623"/>
-            <a:ext cx="6025896" cy="365760"/>
-          </a:xfrm>
-          <a:prstGeom prst="rect">
-            <a:avLst/>
-          </a:prstGeom>
-          <a:noFill/>
-          <a:ln/>
-        </p:spPr>
-        <p:txBody>
-          <a:bodyPr wrap="square" lIns="0" tIns="0" rIns="0" bIns="0" rtlCol="0" anchor="t"/>
-          <a:lstStyle/>
-          <a:p>
-            <a:pPr indent="0" marL="0">
-              <a:lnSpc>
-                <a:spcPct val="125000"/>
-              </a:lnSpc>
-              <a:buNone/>
-            </a:pPr>
-            <a:r>
-              <a:rPr lang="en-US" sz="1150" dirty="0">
-                <a:solidFill>
-                  <a:srgbClr val="222222"/>
-                </a:solidFill>
-                <a:latin typeface="Calibri" pitchFamily="34" charset="0"/>
-                <a:ea typeface="Calibri" pitchFamily="34" charset="-122"/>
-                <a:cs typeface="Calibri" pitchFamily="34" charset="-120"/>
-              </a:rPr>
-              <a:t>読み取れると、自動で照会結果に切り替わる</a:t>
-            </a:r>
-            <a:endParaRPr lang="en-US" sz="1150" dirty="0"/>
-          </a:p>
-        </p:txBody>
-      </p:sp>
-      <p:sp>
-        <p:nvSpPr>
-          <p:cNvPr id="18" name="Shape 16"/>
-          <p:cNvSpPr/>
-          <p:nvPr/>
-        </p:nvSpPr>
-        <p:spPr>
-          <a:xfrm>
-            <a:off x="566928" y="4044823"/>
-            <a:ext cx="6428232" cy="431102"/>
-          </a:xfrm>
-          <a:prstGeom prst="roundRect">
-            <a:avLst>
-              <a:gd name="adj" fmla="val 12726"/>
-            </a:avLst>
-          </a:prstGeom>
-          <a:solidFill>
-            <a:srgbClr val="FAEAE7"/>
-          </a:solidFill>
-          <a:ln w="9525">
-            <a:solidFill>
-              <a:srgbClr val="B85042"/>
-            </a:solidFill>
-            <a:prstDash val="solid"/>
-          </a:ln>
-        </p:spPr>
-      </p:sp>
-      <p:sp>
-        <p:nvSpPr>
-          <p:cNvPr id="19" name="Text 17"/>
-          <p:cNvSpPr txBox="1"/>
-          <p:nvPr/>
-        </p:nvSpPr>
-        <p:spPr>
-          <a:xfrm>
-            <a:off x="658368" y="4136263"/>
-            <a:ext cx="237744" cy="237744"/>
-          </a:xfrm>
-          <a:prstGeom prst="rect">
-            <a:avLst/>
-          </a:prstGeom>
-          <a:noFill/>
-          <a:ln/>
-        </p:spPr>
-        <p:txBody>
-          <a:bodyPr wrap="square" lIns="0" tIns="0" rIns="0" bIns="0" rtlCol="0" anchor="ctr"/>
-          <a:lstStyle/>
-          <a:p>
-            <a:pPr algn="ctr" indent="0" marL="0">
-              <a:buNone/>
-            </a:pPr>
-            <a:r>
-              <a:rPr lang="en-US" sz="1200" b="1" dirty="0">
-                <a:solidFill>
-                  <a:srgbClr val="B85042"/>
-                </a:solidFill>
-                <a:latin typeface="Calibri" pitchFamily="34" charset="0"/>
-                <a:ea typeface="Calibri" pitchFamily="34" charset="-122"/>
-                <a:cs typeface="Calibri" pitchFamily="34" charset="-120"/>
-              </a:rPr>
-              <a:t>i</a:t>
-            </a:r>
-            <a:endParaRPr lang="en-US" sz="1200" dirty="0"/>
-          </a:p>
-        </p:txBody>
-      </p:sp>
-      <p:sp>
-        <p:nvSpPr>
-          <p:cNvPr id="20" name="Text 18"/>
-          <p:cNvSpPr txBox="1"/>
-          <p:nvPr/>
-        </p:nvSpPr>
-        <p:spPr>
-          <a:xfrm>
-            <a:off x="950976" y="4154551"/>
-            <a:ext cx="5925312" cy="248221"/>
-          </a:xfrm>
-          <a:prstGeom prst="rect">
-            <a:avLst/>
-          </a:prstGeom>
-          <a:noFill/>
-          <a:ln/>
-        </p:spPr>
-        <p:txBody>
-          <a:bodyPr wrap="square" lIns="0" tIns="0" rIns="0" bIns="0" rtlCol="0" anchor="t"/>
-          <a:lstStyle/>
-          <a:p>
-            <a:pPr indent="0" marL="0">
-              <a:lnSpc>
-                <a:spcPct val="120000"/>
-              </a:lnSpc>
-              <a:buNone/>
-            </a:pPr>
-            <a:r>
-              <a:rPr lang="en-US" sz="1050" dirty="0">
-                <a:solidFill>
-                  <a:srgbClr val="222222"/>
-                </a:solidFill>
-                <a:latin typeface="Calibri" pitchFamily="34" charset="0"/>
-                <a:ea typeface="Calibri" pitchFamily="34" charset="-122"/>
-                <a:cs typeface="Calibri" pitchFamily="34" charset="-120"/>
-              </a:rPr>
-              <a:t>続けて何人も対応するときは、この方法が速いです。アプリを切り替える必要がありません。</a:t>
-            </a:r>
-            <a:endParaRPr lang="en-US" sz="1050" dirty="0"/>
-          </a:p>
-        </p:txBody>
-      </p:sp>
-      <p:sp>
-        <p:nvSpPr>
-          <p:cNvPr id="21" name="Text 19"/>
-          <p:cNvSpPr txBox="1"/>
-          <p:nvPr/>
-        </p:nvSpPr>
-        <p:spPr>
-          <a:xfrm>
-            <a:off x="566928" y="4658805"/>
-            <a:ext cx="6428232" cy="257810"/>
-          </a:xfrm>
-          <a:prstGeom prst="rect">
-            <a:avLst/>
-          </a:prstGeom>
-          <a:noFill/>
-          <a:ln/>
-        </p:spPr>
-        <p:txBody>
-          <a:bodyPr wrap="square" lIns="0" tIns="0" rIns="0" bIns="0" rtlCol="0" anchor="t"/>
-          <a:lstStyle/>
-          <a:p>
-            <a:pPr indent="0" marL="0">
-              <a:buNone/>
-            </a:pPr>
-            <a:r>
-              <a:rPr lang="en-US" sz="1400" b="1" dirty="0">
-                <a:solidFill>
-                  <a:srgbClr val="B85042"/>
-                </a:solidFill>
-                <a:latin typeface="Calibri" pitchFamily="34" charset="0"/>
-                <a:ea typeface="Calibri" pitchFamily="34" charset="-122"/>
-                <a:cs typeface="Calibri" pitchFamily="34" charset="-120"/>
-              </a:rPr>
-              <a:t>方法B：スマートフォンの標準カメラで読み取る</a:t>
-            </a:r>
-            <a:endParaRPr lang="en-US" sz="1400" dirty="0"/>
-          </a:p>
-        </p:txBody>
-      </p:sp>
-      <p:sp>
-        <p:nvSpPr>
-          <p:cNvPr id="22" name="Shape 20"/>
-          <p:cNvSpPr/>
-          <p:nvPr/>
-        </p:nvSpPr>
-        <p:spPr>
-          <a:xfrm>
-            <a:off x="566928" y="5008055"/>
-            <a:ext cx="274320" cy="274320"/>
-          </a:xfrm>
-          <a:prstGeom prst="ellipse">
-            <a:avLst/>
-          </a:prstGeom>
-          <a:solidFill>
-            <a:srgbClr val="B85042"/>
-          </a:solidFill>
-          <a:ln/>
-        </p:spPr>
-      </p:sp>
-      <p:sp>
-        <p:nvSpPr>
-          <p:cNvPr id="23" name="Text 21"/>
-          <p:cNvSpPr txBox="1"/>
-          <p:nvPr/>
-        </p:nvSpPr>
-        <p:spPr>
-          <a:xfrm>
-            <a:off x="566928" y="5008055"/>
-            <a:ext cx="274320" cy="274320"/>
-          </a:xfrm>
-          <a:prstGeom prst="rect">
-            <a:avLst/>
-          </a:prstGeom>
-          <a:noFill/>
-          <a:ln/>
-        </p:spPr>
-        <p:txBody>
-          <a:bodyPr wrap="square" lIns="0" tIns="0" rIns="0" bIns="0" rtlCol="0" anchor="ctr"/>
-          <a:lstStyle/>
-          <a:p>
-            <a:pPr algn="ctr" indent="0" marL="0">
-              <a:buNone/>
-            </a:pPr>
-            <a:r>
-              <a:rPr lang="en-US" sz="1100" b="1" dirty="0">
-                <a:solidFill>
-                  <a:srgbClr val="FFFFFF"/>
-                </a:solidFill>
-                <a:latin typeface="Calibri" pitchFamily="34" charset="0"/>
-                <a:ea typeface="Calibri" pitchFamily="34" charset="-122"/>
-                <a:cs typeface="Calibri" pitchFamily="34" charset="-120"/>
-              </a:rPr>
-              <a:t>1</a:t>
-            </a:r>
-            <a:endParaRPr lang="en-US" sz="1100" dirty="0"/>
-          </a:p>
-        </p:txBody>
-      </p:sp>
-      <p:sp>
-        <p:nvSpPr>
-          <p:cNvPr id="24" name="Text 22"/>
-          <p:cNvSpPr txBox="1"/>
-          <p:nvPr/>
-        </p:nvSpPr>
-        <p:spPr>
-          <a:xfrm>
-            <a:off x="969264" y="4989767"/>
-            <a:ext cx="6025896" cy="365760"/>
-          </a:xfrm>
-          <a:prstGeom prst="rect">
-            <a:avLst/>
-          </a:prstGeom>
-          <a:noFill/>
-          <a:ln/>
-        </p:spPr>
-        <p:txBody>
-          <a:bodyPr wrap="square" lIns="0" tIns="0" rIns="0" bIns="0" rtlCol="0" anchor="t"/>
-          <a:lstStyle/>
-          <a:p>
-            <a:pPr indent="0" marL="0">
-              <a:lnSpc>
-                <a:spcPct val="125000"/>
-              </a:lnSpc>
-              <a:buNone/>
-            </a:pPr>
-            <a:r>
-              <a:rPr lang="en-US" sz="1150" dirty="0">
-                <a:solidFill>
-                  <a:srgbClr val="222222"/>
-                </a:solidFill>
-                <a:latin typeface="Calibri" pitchFamily="34" charset="0"/>
-                <a:ea typeface="Calibri" pitchFamily="34" charset="-122"/>
-                <a:cs typeface="Calibri" pitchFamily="34" charset="-120"/>
-              </a:rPr>
-              <a:t>カメラアプリを開いて、来場者のQRコードに向ける</a:t>
-            </a:r>
-            <a:endParaRPr lang="en-US" sz="1150" dirty="0"/>
-          </a:p>
-        </p:txBody>
-      </p:sp>
-      <p:sp>
-        <p:nvSpPr>
-          <p:cNvPr id="25" name="Shape 23"/>
-          <p:cNvSpPr/>
-          <p:nvPr/>
-        </p:nvSpPr>
-        <p:spPr>
-          <a:xfrm>
-            <a:off x="566928" y="5465255"/>
-            <a:ext cx="274320" cy="274320"/>
-          </a:xfrm>
-          <a:prstGeom prst="ellipse">
-            <a:avLst/>
-          </a:prstGeom>
-          <a:solidFill>
-            <a:srgbClr val="B85042"/>
-          </a:solidFill>
-          <a:ln/>
-        </p:spPr>
-      </p:sp>
-      <p:sp>
-        <p:nvSpPr>
-          <p:cNvPr id="26" name="Text 24"/>
-          <p:cNvSpPr txBox="1"/>
-          <p:nvPr/>
-        </p:nvSpPr>
-        <p:spPr>
-          <a:xfrm>
-            <a:off x="566928" y="5465255"/>
-            <a:ext cx="274320" cy="274320"/>
-          </a:xfrm>
-          <a:prstGeom prst="rect">
-            <a:avLst/>
-          </a:prstGeom>
-          <a:noFill/>
-          <a:ln/>
-        </p:spPr>
-        <p:txBody>
-          <a:bodyPr wrap="square" lIns="0" tIns="0" rIns="0" bIns="0" rtlCol="0" anchor="ctr"/>
-          <a:lstStyle/>
-          <a:p>
-            <a:pPr algn="ctr" indent="0" marL="0">
-              <a:buNone/>
-            </a:pPr>
-            <a:r>
-              <a:rPr lang="en-US" sz="1100" b="1" dirty="0">
-                <a:solidFill>
-                  <a:srgbClr val="FFFFFF"/>
-                </a:solidFill>
-                <a:latin typeface="Calibri" pitchFamily="34" charset="0"/>
-                <a:ea typeface="Calibri" pitchFamily="34" charset="-122"/>
-                <a:cs typeface="Calibri" pitchFamily="34" charset="-120"/>
-              </a:rPr>
-              <a:t>2</a:t>
-            </a:r>
-            <a:endParaRPr lang="en-US" sz="1100" dirty="0"/>
-          </a:p>
-        </p:txBody>
-      </p:sp>
-      <p:sp>
-        <p:nvSpPr>
-          <p:cNvPr id="27" name="Text 25"/>
-          <p:cNvSpPr txBox="1"/>
-          <p:nvPr/>
-        </p:nvSpPr>
-        <p:spPr>
-          <a:xfrm>
-            <a:off x="969264" y="5446967"/>
-            <a:ext cx="6025896" cy="365760"/>
-          </a:xfrm>
-          <a:prstGeom prst="rect">
-            <a:avLst/>
-          </a:prstGeom>
-          <a:noFill/>
-          <a:ln/>
-        </p:spPr>
-        <p:txBody>
-          <a:bodyPr wrap="square" lIns="0" tIns="0" rIns="0" bIns="0" rtlCol="0" anchor="t"/>
-          <a:lstStyle/>
-          <a:p>
-            <a:pPr indent="0" marL="0">
-              <a:lnSpc>
-                <a:spcPct val="125000"/>
-              </a:lnSpc>
-              <a:buNone/>
-            </a:pPr>
-            <a:r>
-              <a:rPr lang="en-US" sz="1150" dirty="0">
-                <a:solidFill>
-                  <a:srgbClr val="222222"/>
-                </a:solidFill>
-                <a:latin typeface="Calibri" pitchFamily="34" charset="0"/>
-                <a:ea typeface="Calibri" pitchFamily="34" charset="-122"/>
-                <a:cs typeface="Calibri" pitchFamily="34" charset="-120"/>
-              </a:rPr>
-              <a:t>画面に出たリンクを押す</a:t>
-            </a:r>
-            <a:endParaRPr lang="en-US" sz="1150" dirty="0"/>
-          </a:p>
-        </p:txBody>
-      </p:sp>
-      <p:sp>
-        <p:nvSpPr>
-          <p:cNvPr id="28" name="Shape 26"/>
-          <p:cNvSpPr/>
-          <p:nvPr/>
-        </p:nvSpPr>
-        <p:spPr>
-          <a:xfrm>
-            <a:off x="566928" y="5922455"/>
-            <a:ext cx="274320" cy="274320"/>
-          </a:xfrm>
-          <a:prstGeom prst="ellipse">
-            <a:avLst/>
-          </a:prstGeom>
-          <a:solidFill>
-            <a:srgbClr val="B85042"/>
-          </a:solidFill>
-          <a:ln/>
-        </p:spPr>
-      </p:sp>
-      <p:sp>
-        <p:nvSpPr>
-          <p:cNvPr id="29" name="Text 27"/>
-          <p:cNvSpPr txBox="1"/>
-          <p:nvPr/>
-        </p:nvSpPr>
-        <p:spPr>
-          <a:xfrm>
-            <a:off x="566928" y="5922455"/>
-            <a:ext cx="274320" cy="274320"/>
-          </a:xfrm>
-          <a:prstGeom prst="rect">
-            <a:avLst/>
-          </a:prstGeom>
-          <a:noFill/>
-          <a:ln/>
-        </p:spPr>
-        <p:txBody>
-          <a:bodyPr wrap="square" lIns="0" tIns="0" rIns="0" bIns="0" rtlCol="0" anchor="ctr"/>
-          <a:lstStyle/>
-          <a:p>
-            <a:pPr algn="ctr" indent="0" marL="0">
-              <a:buNone/>
-            </a:pPr>
-            <a:r>
-              <a:rPr lang="en-US" sz="1100" b="1" dirty="0">
-                <a:solidFill>
-                  <a:srgbClr val="FFFFFF"/>
-                </a:solidFill>
-                <a:latin typeface="Calibri" pitchFamily="34" charset="0"/>
-                <a:ea typeface="Calibri" pitchFamily="34" charset="-122"/>
-                <a:cs typeface="Calibri" pitchFamily="34" charset="-120"/>
-              </a:rPr>
-              <a:t>3</a:t>
-            </a:r>
-            <a:endParaRPr lang="en-US" sz="1100" dirty="0"/>
-          </a:p>
-        </p:txBody>
-      </p:sp>
-      <p:sp>
-        <p:nvSpPr>
-          <p:cNvPr id="30" name="Text 28"/>
-          <p:cNvSpPr txBox="1"/>
-          <p:nvPr/>
-        </p:nvSpPr>
-        <p:spPr>
-          <a:xfrm>
-            <a:off x="969264" y="5904167"/>
-            <a:ext cx="6025896" cy="365760"/>
-          </a:xfrm>
-          <a:prstGeom prst="rect">
-            <a:avLst/>
-          </a:prstGeom>
-          <a:noFill/>
-          <a:ln/>
-        </p:spPr>
-        <p:txBody>
-          <a:bodyPr wrap="square" lIns="0" tIns="0" rIns="0" bIns="0" rtlCol="0" anchor="t"/>
-          <a:lstStyle/>
-          <a:p>
-            <a:pPr indent="0" marL="0">
-              <a:lnSpc>
-                <a:spcPct val="125000"/>
-              </a:lnSpc>
-              <a:buNone/>
-            </a:pPr>
-            <a:r>
-              <a:rPr lang="en-US" sz="1150" dirty="0">
-                <a:solidFill>
-                  <a:srgbClr val="222222"/>
-                </a:solidFill>
-                <a:latin typeface="Calibri" pitchFamily="34" charset="0"/>
-                <a:ea typeface="Calibri" pitchFamily="34" charset="-122"/>
-                <a:cs typeface="Calibri" pitchFamily="34" charset="-120"/>
-              </a:rPr>
-              <a:t>照会結果の画面が開く</a:t>
-            </a:r>
-            <a:endParaRPr lang="en-US" sz="1150" dirty="0"/>
-          </a:p>
-        </p:txBody>
-      </p:sp>
-      <p:sp>
-        <p:nvSpPr>
-          <p:cNvPr id="31" name="Shape 29"/>
-          <p:cNvSpPr/>
-          <p:nvPr/>
-        </p:nvSpPr>
-        <p:spPr>
-          <a:xfrm>
-            <a:off x="566928" y="6361367"/>
-            <a:ext cx="6428232" cy="624459"/>
-          </a:xfrm>
-          <a:prstGeom prst="roundRect">
-            <a:avLst>
-              <a:gd name="adj" fmla="val 8786"/>
-            </a:avLst>
-          </a:prstGeom>
-          <a:solidFill>
-            <a:srgbClr val="FDF0E6"/>
-          </a:solidFill>
-          <a:ln w="9525">
-            <a:solidFill>
-              <a:srgbClr val="E08A3C"/>
-            </a:solidFill>
-            <a:prstDash val="solid"/>
-          </a:ln>
-        </p:spPr>
-      </p:sp>
-      <p:sp>
-        <p:nvSpPr>
-          <p:cNvPr id="32" name="Text 30"/>
-          <p:cNvSpPr txBox="1"/>
-          <p:nvPr/>
-        </p:nvSpPr>
-        <p:spPr>
-          <a:xfrm>
-            <a:off x="658368" y="6452807"/>
-            <a:ext cx="237744" cy="237744"/>
-          </a:xfrm>
-          <a:prstGeom prst="rect">
-            <a:avLst/>
-          </a:prstGeom>
-          <a:noFill/>
-          <a:ln/>
-        </p:spPr>
-        <p:txBody>
-          <a:bodyPr wrap="square" lIns="0" tIns="0" rIns="0" bIns="0" rtlCol="0" anchor="ctr"/>
-          <a:lstStyle/>
-          <a:p>
-            <a:pPr algn="ctr" indent="0" marL="0">
-              <a:buNone/>
-            </a:pPr>
-            <a:r>
-              <a:rPr lang="en-US" sz="1200" b="1" dirty="0">
-                <a:solidFill>
-                  <a:srgbClr val="C25A17"/>
-                </a:solidFill>
-                <a:latin typeface="Calibri" pitchFamily="34" charset="0"/>
-                <a:ea typeface="Calibri" pitchFamily="34" charset="-122"/>
-                <a:cs typeface="Calibri" pitchFamily="34" charset="-120"/>
-              </a:rPr>
-              <a:t>！</a:t>
-            </a:r>
-            <a:endParaRPr lang="en-US" sz="1200" dirty="0"/>
-          </a:p>
-        </p:txBody>
-      </p:sp>
-      <p:sp>
-        <p:nvSpPr>
-          <p:cNvPr id="33" name="Text 31"/>
-          <p:cNvSpPr txBox="1"/>
-          <p:nvPr/>
-        </p:nvSpPr>
-        <p:spPr>
-          <a:xfrm>
-            <a:off x="950976" y="6471095"/>
-            <a:ext cx="5925312" cy="441579"/>
-          </a:xfrm>
-          <a:prstGeom prst="rect">
-            <a:avLst/>
-          </a:prstGeom>
-          <a:noFill/>
-          <a:ln/>
-        </p:spPr>
-        <p:txBody>
-          <a:bodyPr wrap="square" lIns="0" tIns="0" rIns="0" bIns="0" rtlCol="0" anchor="t"/>
-          <a:lstStyle/>
-          <a:p>
-            <a:pPr indent="0" marL="0">
-              <a:lnSpc>
-                <a:spcPct val="120000"/>
-              </a:lnSpc>
-              <a:buNone/>
-            </a:pPr>
-            <a:r>
-              <a:rPr lang="en-US" sz="1050" dirty="0">
-                <a:solidFill>
-                  <a:srgbClr val="222222"/>
-                </a:solidFill>
-                <a:latin typeface="Calibri" pitchFamily="34" charset="0"/>
-                <a:ea typeface="Calibri" pitchFamily="34" charset="-122"/>
-                <a:cs typeface="Calibri" pitchFamily="34" charset="-120"/>
-              </a:rPr>
-              <a:t>「ログインが必要です」と表示されたときは、そのスマートフォンがログアウトしています。画面のリンクからログインし直してください。</a:t>
-            </a:r>
-            <a:endParaRPr lang="en-US" sz="1050" dirty="0"/>
-          </a:p>
-        </p:txBody>
-      </p:sp>
-      <p:sp>
-        <p:nvSpPr>
-          <p:cNvPr id="34" name="Text 32"/>
+              <a:rPr lang="en-US" sz="950" dirty="0">
+                <a:solidFill>
+                  <a:srgbClr val="6B6B6B"/>
+                </a:solidFill>
+                <a:latin typeface="Calibri" pitchFamily="34" charset="0"/>
+                <a:ea typeface="Calibri" pitchFamily="34" charset="-122"/>
+                <a:cs typeface="Calibri" pitchFamily="34" charset="-120"/>
+              </a:rPr>
+              <a:t>来場者の「回答済み画面」。大きな交換コードとQRコードが写っているもの。</a:t>
+            </a:r>
+            <a:endParaRPr lang="en-US" sz="950" dirty="0"/>
+          </a:p>
+        </p:txBody>
+      </p:sp>
+      <p:sp>
+        <p:nvSpPr>
+          <p:cNvPr id="8" name="Text 4"/>
           <p:cNvSpPr txBox="1"/>
           <p:nvPr/>
         </p:nvSpPr>
@@ -6286,46 +6952,123 @@
                 <a:ea typeface="Calibri" pitchFamily="34" charset="-122"/>
                 <a:cs typeface="Calibri" pitchFamily="34" charset="-120"/>
               </a:rPr>
-              <a:t>手順1：QRコードを読み取る（つづき）</a:t>
+              <a:t>手順1：QRコードを読み取る</a:t>
             </a:r>
             <a:endParaRPr lang="en-US" sz="2200" dirty="0"/>
           </a:p>
         </p:txBody>
       </p:sp>
-      <p:pic>
-        <p:nvPicPr>
-          <p:cNvPr id="4" name="Image 0" descr="C:\Users\sato\Desktop\enque\docs\images\p-scan-button.png">    </p:cNvPr>
-          <p:cNvPicPr>
-            <a:picLocks noChangeAspect="1"/>
-          </p:cNvPicPr>
-          <p:nvPr/>
-        </p:nvPicPr>
-        <p:blipFill>
-          <a:blip r:embed="rId1"/>
-          <a:stretch>
-            <a:fillRect/>
-          </a:stretch>
-        </p:blipFill>
+      <p:sp>
+        <p:nvSpPr>
+          <p:cNvPr id="4" name="Text 2"/>
+          <p:cNvSpPr txBox="1"/>
+          <p:nvPr/>
+        </p:nvSpPr>
         <p:spPr>
           <a:xfrm>
             <a:off x="566928" y="1481328"/>
-            <a:ext cx="6428232" cy="3465755"/>
-          </a:xfrm>
-          <a:prstGeom prst="rect">
-            <a:avLst/>
-          </a:prstGeom>
-        </p:spPr>
-      </p:pic>
-      <p:sp>
-        <p:nvSpPr>
-          <p:cNvPr id="5" name="Text 2"/>
-          <p:cNvSpPr txBox="1"/>
-          <p:nvPr/>
-        </p:nvSpPr>
-        <p:spPr>
-          <a:xfrm>
-            <a:off x="566928" y="5001947"/>
-            <a:ext cx="6428232" cy="274320"/>
+            <a:ext cx="6428232" cy="257429"/>
+          </a:xfrm>
+          <a:prstGeom prst="rect">
+            <a:avLst/>
+          </a:prstGeom>
+          <a:noFill/>
+          <a:ln/>
+        </p:spPr>
+        <p:txBody>
+          <a:bodyPr wrap="square" lIns="0" tIns="0" rIns="0" bIns="0" rtlCol="0" anchor="t"/>
+          <a:lstStyle/>
+          <a:p>
+            <a:pPr indent="0" marL="0">
+              <a:lnSpc>
+                <a:spcPct val="125000"/>
+              </a:lnSpc>
+              <a:buNone/>
+            </a:pPr>
+            <a:r>
+              <a:rPr lang="en-US" sz="1100" dirty="0">
+                <a:solidFill>
+                  <a:srgbClr val="222222"/>
+                </a:solidFill>
+                <a:latin typeface="Calibri" pitchFamily="34" charset="0"/>
+                <a:ea typeface="Calibri" pitchFamily="34" charset="-122"/>
+                <a:cs typeface="Calibri" pitchFamily="34" charset="-120"/>
+              </a:rPr>
+              <a:t>読み取り方は2通りあります。どちらでも同じ画面が開きます。</a:t>
+            </a:r>
+            <a:endParaRPr lang="en-US" sz="1100" dirty="0"/>
+          </a:p>
+        </p:txBody>
+      </p:sp>
+      <p:sp>
+        <p:nvSpPr>
+          <p:cNvPr id="5" name="Text 3"/>
+          <p:cNvSpPr txBox="1"/>
+          <p:nvPr/>
+        </p:nvSpPr>
+        <p:spPr>
+          <a:xfrm>
+            <a:off x="566928" y="1885061"/>
+            <a:ext cx="6428232" cy="257810"/>
+          </a:xfrm>
+          <a:prstGeom prst="rect">
+            <a:avLst/>
+          </a:prstGeom>
+          <a:noFill/>
+          <a:ln/>
+        </p:spPr>
+        <p:txBody>
+          <a:bodyPr wrap="square" lIns="0" tIns="0" rIns="0" bIns="0" rtlCol="0" anchor="t"/>
+          <a:lstStyle/>
+          <a:p>
+            <a:pPr indent="0" marL="0">
+              <a:buNone/>
+            </a:pPr>
+            <a:r>
+              <a:rPr lang="en-US" sz="1400" b="1" dirty="0">
+                <a:solidFill>
+                  <a:srgbClr val="B85042"/>
+                </a:solidFill>
+                <a:latin typeface="Calibri" pitchFamily="34" charset="0"/>
+                <a:ea typeface="Calibri" pitchFamily="34" charset="-122"/>
+                <a:cs typeface="Calibri" pitchFamily="34" charset="-120"/>
+              </a:rPr>
+              <a:t>方法A：照会画面のボタンから読み取る（おすすめ）</a:t>
+            </a:r>
+            <a:endParaRPr lang="en-US" sz="1400" dirty="0"/>
+          </a:p>
+        </p:txBody>
+      </p:sp>
+      <p:sp>
+        <p:nvSpPr>
+          <p:cNvPr id="6" name="Shape 4"/>
+          <p:cNvSpPr/>
+          <p:nvPr/>
+        </p:nvSpPr>
+        <p:spPr>
+          <a:xfrm>
+            <a:off x="566928" y="2234311"/>
+            <a:ext cx="274320" cy="274320"/>
+          </a:xfrm>
+          <a:prstGeom prst="ellipse">
+            <a:avLst/>
+          </a:prstGeom>
+          <a:solidFill>
+            <a:srgbClr val="B85042"/>
+          </a:solidFill>
+          <a:ln/>
+        </p:spPr>
+      </p:sp>
+      <p:sp>
+        <p:nvSpPr>
+          <p:cNvPr id="7" name="Text 5"/>
+          <p:cNvSpPr txBox="1"/>
+          <p:nvPr/>
+        </p:nvSpPr>
+        <p:spPr>
+          <a:xfrm>
+            <a:off x="566928" y="2234311"/>
+            <a:ext cx="274320" cy="274320"/>
           </a:xfrm>
           <a:prstGeom prst="rect">
             <a:avLst/>
@@ -6341,23 +7084,994 @@
               <a:buNone/>
             </a:pPr>
             <a:r>
-              <a:rPr lang="en-US" sz="950" dirty="0">
-                <a:solidFill>
-                  <a:srgbClr val="6B6B6B"/>
-                </a:solidFill>
-                <a:latin typeface="Calibri" pitchFamily="34" charset="0"/>
-                <a:ea typeface="Calibri" pitchFamily="34" charset="-122"/>
-                <a:cs typeface="Calibri" pitchFamily="34" charset="-120"/>
-              </a:rPr>
-              <a:t>照会画面の上部。「QRコードを読み取る」ボタンが見えるもの。</a:t>
-            </a:r>
-            <a:endParaRPr lang="en-US" sz="950" dirty="0"/>
-          </a:p>
-        </p:txBody>
-      </p:sp>
-      <p:sp>
-        <p:nvSpPr>
-          <p:cNvPr id="6" name="Text 3"/>
+              <a:rPr lang="en-US" sz="1100" b="1" dirty="0">
+                <a:solidFill>
+                  <a:srgbClr val="FFFFFF"/>
+                </a:solidFill>
+                <a:latin typeface="Calibri" pitchFamily="34" charset="0"/>
+                <a:ea typeface="Calibri" pitchFamily="34" charset="-122"/>
+                <a:cs typeface="Calibri" pitchFamily="34" charset="-120"/>
+              </a:rPr>
+              <a:t>1</a:t>
+            </a:r>
+            <a:endParaRPr lang="en-US" sz="1100" dirty="0"/>
+          </a:p>
+        </p:txBody>
+      </p:sp>
+      <p:sp>
+        <p:nvSpPr>
+          <p:cNvPr id="8" name="Text 6"/>
+          <p:cNvSpPr txBox="1"/>
+          <p:nvPr/>
+        </p:nvSpPr>
+        <p:spPr>
+          <a:xfrm>
+            <a:off x="969264" y="2216023"/>
+            <a:ext cx="6025896" cy="365760"/>
+          </a:xfrm>
+          <a:prstGeom prst="rect">
+            <a:avLst/>
+          </a:prstGeom>
+          <a:noFill/>
+          <a:ln/>
+        </p:spPr>
+        <p:txBody>
+          <a:bodyPr wrap="square" lIns="0" tIns="0" rIns="0" bIns="0" rtlCol="0" anchor="t"/>
+          <a:lstStyle/>
+          <a:p>
+            <a:pPr indent="0" marL="0">
+              <a:lnSpc>
+                <a:spcPct val="125000"/>
+              </a:lnSpc>
+              <a:buNone/>
+            </a:pPr>
+            <a:r>
+              <a:rPr lang="en-US" sz="1150" dirty="0">
+                <a:solidFill>
+                  <a:srgbClr val="222222"/>
+                </a:solidFill>
+                <a:latin typeface="Calibri" pitchFamily="34" charset="0"/>
+                <a:ea typeface="Calibri" pitchFamily="34" charset="-122"/>
+                <a:cs typeface="Calibri" pitchFamily="34" charset="-120"/>
+              </a:rPr>
+              <a:t>「景品交換の照会」の画面で、</a:t>
+            </a:r>
+            <a:pPr indent="0" marL="0">
+              <a:lnSpc>
+                <a:spcPct val="125000"/>
+              </a:lnSpc>
+              <a:buNone/>
+            </a:pPr>
+            <a:r>
+              <a:rPr lang="en-US" sz="1150" b="1" dirty="0">
+                <a:solidFill>
+                  <a:srgbClr val="222222"/>
+                </a:solidFill>
+                <a:latin typeface="Calibri" pitchFamily="34" charset="0"/>
+                <a:ea typeface="Calibri" pitchFamily="34" charset="-122"/>
+                <a:cs typeface="Calibri" pitchFamily="34" charset="-120"/>
+              </a:rPr>
+              <a:t>「QRコードを読み取る」</a:t>
+            </a:r>
+            <a:pPr indent="0" marL="0">
+              <a:lnSpc>
+                <a:spcPct val="125000"/>
+              </a:lnSpc>
+              <a:buNone/>
+            </a:pPr>
+            <a:r>
+              <a:rPr lang="en-US" sz="1150" dirty="0">
+                <a:solidFill>
+                  <a:srgbClr val="222222"/>
+                </a:solidFill>
+                <a:latin typeface="Calibri" pitchFamily="34" charset="0"/>
+                <a:ea typeface="Calibri" pitchFamily="34" charset="-122"/>
+                <a:cs typeface="Calibri" pitchFamily="34" charset="-120"/>
+              </a:rPr>
+              <a:t>を押す</a:t>
+            </a:r>
+            <a:endParaRPr lang="en-US" sz="1150" dirty="0"/>
+          </a:p>
+        </p:txBody>
+      </p:sp>
+      <p:sp>
+        <p:nvSpPr>
+          <p:cNvPr id="9" name="Shape 7"/>
+          <p:cNvSpPr/>
+          <p:nvPr/>
+        </p:nvSpPr>
+        <p:spPr>
+          <a:xfrm>
+            <a:off x="566928" y="2691511"/>
+            <a:ext cx="274320" cy="274320"/>
+          </a:xfrm>
+          <a:prstGeom prst="ellipse">
+            <a:avLst/>
+          </a:prstGeom>
+          <a:solidFill>
+            <a:srgbClr val="B85042"/>
+          </a:solidFill>
+          <a:ln/>
+        </p:spPr>
+      </p:sp>
+      <p:sp>
+        <p:nvSpPr>
+          <p:cNvPr id="10" name="Text 8"/>
+          <p:cNvSpPr txBox="1"/>
+          <p:nvPr/>
+        </p:nvSpPr>
+        <p:spPr>
+          <a:xfrm>
+            <a:off x="566928" y="2691511"/>
+            <a:ext cx="274320" cy="274320"/>
+          </a:xfrm>
+          <a:prstGeom prst="rect">
+            <a:avLst/>
+          </a:prstGeom>
+          <a:noFill/>
+          <a:ln/>
+        </p:spPr>
+        <p:txBody>
+          <a:bodyPr wrap="square" lIns="0" tIns="0" rIns="0" bIns="0" rtlCol="0" anchor="ctr"/>
+          <a:lstStyle/>
+          <a:p>
+            <a:pPr algn="ctr" indent="0" marL="0">
+              <a:buNone/>
+            </a:pPr>
+            <a:r>
+              <a:rPr lang="en-US" sz="1100" b="1" dirty="0">
+                <a:solidFill>
+                  <a:srgbClr val="FFFFFF"/>
+                </a:solidFill>
+                <a:latin typeface="Calibri" pitchFamily="34" charset="0"/>
+                <a:ea typeface="Calibri" pitchFamily="34" charset="-122"/>
+                <a:cs typeface="Calibri" pitchFamily="34" charset="-120"/>
+              </a:rPr>
+              <a:t>2</a:t>
+            </a:r>
+            <a:endParaRPr lang="en-US" sz="1100" dirty="0"/>
+          </a:p>
+        </p:txBody>
+      </p:sp>
+      <p:sp>
+        <p:nvSpPr>
+          <p:cNvPr id="11" name="Text 9"/>
+          <p:cNvSpPr txBox="1"/>
+          <p:nvPr/>
+        </p:nvSpPr>
+        <p:spPr>
+          <a:xfrm>
+            <a:off x="969264" y="2673223"/>
+            <a:ext cx="6025896" cy="365760"/>
+          </a:xfrm>
+          <a:prstGeom prst="rect">
+            <a:avLst/>
+          </a:prstGeom>
+          <a:noFill/>
+          <a:ln/>
+        </p:spPr>
+        <p:txBody>
+          <a:bodyPr wrap="square" lIns="0" tIns="0" rIns="0" bIns="0" rtlCol="0" anchor="t"/>
+          <a:lstStyle/>
+          <a:p>
+            <a:pPr indent="0" marL="0">
+              <a:lnSpc>
+                <a:spcPct val="125000"/>
+              </a:lnSpc>
+              <a:buNone/>
+            </a:pPr>
+            <a:r>
+              <a:rPr lang="en-US" sz="1150" dirty="0">
+                <a:solidFill>
+                  <a:srgbClr val="222222"/>
+                </a:solidFill>
+                <a:latin typeface="Calibri" pitchFamily="34" charset="0"/>
+                <a:ea typeface="Calibri" pitchFamily="34" charset="-122"/>
+                <a:cs typeface="Calibri" pitchFamily="34" charset="-120"/>
+              </a:rPr>
+              <a:t>カメラの使用を聞かれたら</a:t>
+            </a:r>
+            <a:pPr indent="0" marL="0">
+              <a:lnSpc>
+                <a:spcPct val="125000"/>
+              </a:lnSpc>
+              <a:buNone/>
+            </a:pPr>
+            <a:r>
+              <a:rPr lang="en-US" sz="1150" b="1" dirty="0">
+                <a:solidFill>
+                  <a:srgbClr val="222222"/>
+                </a:solidFill>
+                <a:latin typeface="Calibri" pitchFamily="34" charset="0"/>
+                <a:ea typeface="Calibri" pitchFamily="34" charset="-122"/>
+                <a:cs typeface="Calibri" pitchFamily="34" charset="-120"/>
+              </a:rPr>
+              <a:t>「許可」</a:t>
+            </a:r>
+            <a:pPr indent="0" marL="0">
+              <a:lnSpc>
+                <a:spcPct val="125000"/>
+              </a:lnSpc>
+              <a:buNone/>
+            </a:pPr>
+            <a:r>
+              <a:rPr lang="en-US" sz="1150" dirty="0">
+                <a:solidFill>
+                  <a:srgbClr val="222222"/>
+                </a:solidFill>
+                <a:latin typeface="Calibri" pitchFamily="34" charset="0"/>
+                <a:ea typeface="Calibri" pitchFamily="34" charset="-122"/>
+                <a:cs typeface="Calibri" pitchFamily="34" charset="-120"/>
+              </a:rPr>
+              <a:t>を選ぶ（最初の1回だけ）</a:t>
+            </a:r>
+            <a:endParaRPr lang="en-US" sz="1150" dirty="0"/>
+          </a:p>
+        </p:txBody>
+      </p:sp>
+      <p:sp>
+        <p:nvSpPr>
+          <p:cNvPr id="12" name="Shape 10"/>
+          <p:cNvSpPr/>
+          <p:nvPr/>
+        </p:nvSpPr>
+        <p:spPr>
+          <a:xfrm>
+            <a:off x="566928" y="3148711"/>
+            <a:ext cx="274320" cy="274320"/>
+          </a:xfrm>
+          <a:prstGeom prst="ellipse">
+            <a:avLst/>
+          </a:prstGeom>
+          <a:solidFill>
+            <a:srgbClr val="B85042"/>
+          </a:solidFill>
+          <a:ln/>
+        </p:spPr>
+      </p:sp>
+      <p:sp>
+        <p:nvSpPr>
+          <p:cNvPr id="13" name="Text 11"/>
+          <p:cNvSpPr txBox="1"/>
+          <p:nvPr/>
+        </p:nvSpPr>
+        <p:spPr>
+          <a:xfrm>
+            <a:off x="566928" y="3148711"/>
+            <a:ext cx="274320" cy="274320"/>
+          </a:xfrm>
+          <a:prstGeom prst="rect">
+            <a:avLst/>
+          </a:prstGeom>
+          <a:noFill/>
+          <a:ln/>
+        </p:spPr>
+        <p:txBody>
+          <a:bodyPr wrap="square" lIns="0" tIns="0" rIns="0" bIns="0" rtlCol="0" anchor="ctr"/>
+          <a:lstStyle/>
+          <a:p>
+            <a:pPr algn="ctr" indent="0" marL="0">
+              <a:buNone/>
+            </a:pPr>
+            <a:r>
+              <a:rPr lang="en-US" sz="1100" b="1" dirty="0">
+                <a:solidFill>
+                  <a:srgbClr val="FFFFFF"/>
+                </a:solidFill>
+                <a:latin typeface="Calibri" pitchFamily="34" charset="0"/>
+                <a:ea typeface="Calibri" pitchFamily="34" charset="-122"/>
+                <a:cs typeface="Calibri" pitchFamily="34" charset="-120"/>
+              </a:rPr>
+              <a:t>3</a:t>
+            </a:r>
+            <a:endParaRPr lang="en-US" sz="1100" dirty="0"/>
+          </a:p>
+        </p:txBody>
+      </p:sp>
+      <p:sp>
+        <p:nvSpPr>
+          <p:cNvPr id="14" name="Text 12"/>
+          <p:cNvSpPr txBox="1"/>
+          <p:nvPr/>
+        </p:nvSpPr>
+        <p:spPr>
+          <a:xfrm>
+            <a:off x="969264" y="3130423"/>
+            <a:ext cx="6025896" cy="365760"/>
+          </a:xfrm>
+          <a:prstGeom prst="rect">
+            <a:avLst/>
+          </a:prstGeom>
+          <a:noFill/>
+          <a:ln/>
+        </p:spPr>
+        <p:txBody>
+          <a:bodyPr wrap="square" lIns="0" tIns="0" rIns="0" bIns="0" rtlCol="0" anchor="t"/>
+          <a:lstStyle/>
+          <a:p>
+            <a:pPr indent="0" marL="0">
+              <a:lnSpc>
+                <a:spcPct val="125000"/>
+              </a:lnSpc>
+              <a:buNone/>
+            </a:pPr>
+            <a:r>
+              <a:rPr lang="en-US" sz="1150" dirty="0">
+                <a:solidFill>
+                  <a:srgbClr val="222222"/>
+                </a:solidFill>
+                <a:latin typeface="Calibri" pitchFamily="34" charset="0"/>
+                <a:ea typeface="Calibri" pitchFamily="34" charset="-122"/>
+                <a:cs typeface="Calibri" pitchFamily="34" charset="-120"/>
+              </a:rPr>
+              <a:t>画面の枠に、来場者のQRコードを入れる</a:t>
+            </a:r>
+            <a:endParaRPr lang="en-US" sz="1150" dirty="0"/>
+          </a:p>
+        </p:txBody>
+      </p:sp>
+      <p:sp>
+        <p:nvSpPr>
+          <p:cNvPr id="15" name="Shape 13"/>
+          <p:cNvSpPr/>
+          <p:nvPr/>
+        </p:nvSpPr>
+        <p:spPr>
+          <a:xfrm>
+            <a:off x="566928" y="3605911"/>
+            <a:ext cx="274320" cy="274320"/>
+          </a:xfrm>
+          <a:prstGeom prst="ellipse">
+            <a:avLst/>
+          </a:prstGeom>
+          <a:solidFill>
+            <a:srgbClr val="B85042"/>
+          </a:solidFill>
+          <a:ln/>
+        </p:spPr>
+      </p:sp>
+      <p:sp>
+        <p:nvSpPr>
+          <p:cNvPr id="16" name="Text 14"/>
+          <p:cNvSpPr txBox="1"/>
+          <p:nvPr/>
+        </p:nvSpPr>
+        <p:spPr>
+          <a:xfrm>
+            <a:off x="566928" y="3605911"/>
+            <a:ext cx="274320" cy="274320"/>
+          </a:xfrm>
+          <a:prstGeom prst="rect">
+            <a:avLst/>
+          </a:prstGeom>
+          <a:noFill/>
+          <a:ln/>
+        </p:spPr>
+        <p:txBody>
+          <a:bodyPr wrap="square" lIns="0" tIns="0" rIns="0" bIns="0" rtlCol="0" anchor="ctr"/>
+          <a:lstStyle/>
+          <a:p>
+            <a:pPr algn="ctr" indent="0" marL="0">
+              <a:buNone/>
+            </a:pPr>
+            <a:r>
+              <a:rPr lang="en-US" sz="1100" b="1" dirty="0">
+                <a:solidFill>
+                  <a:srgbClr val="FFFFFF"/>
+                </a:solidFill>
+                <a:latin typeface="Calibri" pitchFamily="34" charset="0"/>
+                <a:ea typeface="Calibri" pitchFamily="34" charset="-122"/>
+                <a:cs typeface="Calibri" pitchFamily="34" charset="-120"/>
+              </a:rPr>
+              <a:t>4</a:t>
+            </a:r>
+            <a:endParaRPr lang="en-US" sz="1100" dirty="0"/>
+          </a:p>
+        </p:txBody>
+      </p:sp>
+      <p:sp>
+        <p:nvSpPr>
+          <p:cNvPr id="17" name="Text 15"/>
+          <p:cNvSpPr txBox="1"/>
+          <p:nvPr/>
+        </p:nvSpPr>
+        <p:spPr>
+          <a:xfrm>
+            <a:off x="969264" y="3587623"/>
+            <a:ext cx="6025896" cy="365760"/>
+          </a:xfrm>
+          <a:prstGeom prst="rect">
+            <a:avLst/>
+          </a:prstGeom>
+          <a:noFill/>
+          <a:ln/>
+        </p:spPr>
+        <p:txBody>
+          <a:bodyPr wrap="square" lIns="0" tIns="0" rIns="0" bIns="0" rtlCol="0" anchor="t"/>
+          <a:lstStyle/>
+          <a:p>
+            <a:pPr indent="0" marL="0">
+              <a:lnSpc>
+                <a:spcPct val="125000"/>
+              </a:lnSpc>
+              <a:buNone/>
+            </a:pPr>
+            <a:r>
+              <a:rPr lang="en-US" sz="1150" dirty="0">
+                <a:solidFill>
+                  <a:srgbClr val="222222"/>
+                </a:solidFill>
+                <a:latin typeface="Calibri" pitchFamily="34" charset="0"/>
+                <a:ea typeface="Calibri" pitchFamily="34" charset="-122"/>
+                <a:cs typeface="Calibri" pitchFamily="34" charset="-120"/>
+              </a:rPr>
+              <a:t>読み取れると、自動で照会結果に切り替わる</a:t>
+            </a:r>
+            <a:endParaRPr lang="en-US" sz="1150" dirty="0"/>
+          </a:p>
+        </p:txBody>
+      </p:sp>
+      <p:sp>
+        <p:nvSpPr>
+          <p:cNvPr id="18" name="Shape 16"/>
+          <p:cNvSpPr/>
+          <p:nvPr/>
+        </p:nvSpPr>
+        <p:spPr>
+          <a:xfrm>
+            <a:off x="566928" y="4044823"/>
+            <a:ext cx="6428232" cy="431102"/>
+          </a:xfrm>
+          <a:prstGeom prst="roundRect">
+            <a:avLst>
+              <a:gd name="adj" fmla="val 12726"/>
+            </a:avLst>
+          </a:prstGeom>
+          <a:solidFill>
+            <a:srgbClr val="FAEAE7"/>
+          </a:solidFill>
+          <a:ln w="9525">
+            <a:solidFill>
+              <a:srgbClr val="B85042"/>
+            </a:solidFill>
+            <a:prstDash val="solid"/>
+          </a:ln>
+        </p:spPr>
+      </p:sp>
+      <p:sp>
+        <p:nvSpPr>
+          <p:cNvPr id="19" name="Text 17"/>
+          <p:cNvSpPr txBox="1"/>
+          <p:nvPr/>
+        </p:nvSpPr>
+        <p:spPr>
+          <a:xfrm>
+            <a:off x="658368" y="4136263"/>
+            <a:ext cx="237744" cy="237744"/>
+          </a:xfrm>
+          <a:prstGeom prst="rect">
+            <a:avLst/>
+          </a:prstGeom>
+          <a:noFill/>
+          <a:ln/>
+        </p:spPr>
+        <p:txBody>
+          <a:bodyPr wrap="square" lIns="0" tIns="0" rIns="0" bIns="0" rtlCol="0" anchor="ctr"/>
+          <a:lstStyle/>
+          <a:p>
+            <a:pPr algn="ctr" indent="0" marL="0">
+              <a:buNone/>
+            </a:pPr>
+            <a:r>
+              <a:rPr lang="en-US" sz="1200" b="1" dirty="0">
+                <a:solidFill>
+                  <a:srgbClr val="B85042"/>
+                </a:solidFill>
+                <a:latin typeface="Calibri" pitchFamily="34" charset="0"/>
+                <a:ea typeface="Calibri" pitchFamily="34" charset="-122"/>
+                <a:cs typeface="Calibri" pitchFamily="34" charset="-120"/>
+              </a:rPr>
+              <a:t>i</a:t>
+            </a:r>
+            <a:endParaRPr lang="en-US" sz="1200" dirty="0"/>
+          </a:p>
+        </p:txBody>
+      </p:sp>
+      <p:sp>
+        <p:nvSpPr>
+          <p:cNvPr id="20" name="Text 18"/>
+          <p:cNvSpPr txBox="1"/>
+          <p:nvPr/>
+        </p:nvSpPr>
+        <p:spPr>
+          <a:xfrm>
+            <a:off x="950976" y="4154551"/>
+            <a:ext cx="5925312" cy="248221"/>
+          </a:xfrm>
+          <a:prstGeom prst="rect">
+            <a:avLst/>
+          </a:prstGeom>
+          <a:noFill/>
+          <a:ln/>
+        </p:spPr>
+        <p:txBody>
+          <a:bodyPr wrap="square" lIns="0" tIns="0" rIns="0" bIns="0" rtlCol="0" anchor="t"/>
+          <a:lstStyle/>
+          <a:p>
+            <a:pPr indent="0" marL="0">
+              <a:lnSpc>
+                <a:spcPct val="120000"/>
+              </a:lnSpc>
+              <a:buNone/>
+            </a:pPr>
+            <a:r>
+              <a:rPr lang="en-US" sz="1050" dirty="0">
+                <a:solidFill>
+                  <a:srgbClr val="222222"/>
+                </a:solidFill>
+                <a:latin typeface="Calibri" pitchFamily="34" charset="0"/>
+                <a:ea typeface="Calibri" pitchFamily="34" charset="-122"/>
+                <a:cs typeface="Calibri" pitchFamily="34" charset="-120"/>
+              </a:rPr>
+              <a:t>続けて何人も対応するときは、この方法が速いです。アプリを切り替える必要がありません。</a:t>
+            </a:r>
+            <a:endParaRPr lang="en-US" sz="1050" dirty="0"/>
+          </a:p>
+        </p:txBody>
+      </p:sp>
+      <p:sp>
+        <p:nvSpPr>
+          <p:cNvPr id="21" name="Text 19"/>
+          <p:cNvSpPr txBox="1"/>
+          <p:nvPr/>
+        </p:nvSpPr>
+        <p:spPr>
+          <a:xfrm>
+            <a:off x="566928" y="4658805"/>
+            <a:ext cx="6428232" cy="257810"/>
+          </a:xfrm>
+          <a:prstGeom prst="rect">
+            <a:avLst/>
+          </a:prstGeom>
+          <a:noFill/>
+          <a:ln/>
+        </p:spPr>
+        <p:txBody>
+          <a:bodyPr wrap="square" lIns="0" tIns="0" rIns="0" bIns="0" rtlCol="0" anchor="t"/>
+          <a:lstStyle/>
+          <a:p>
+            <a:pPr indent="0" marL="0">
+              <a:buNone/>
+            </a:pPr>
+            <a:r>
+              <a:rPr lang="en-US" sz="1400" b="1" dirty="0">
+                <a:solidFill>
+                  <a:srgbClr val="B85042"/>
+                </a:solidFill>
+                <a:latin typeface="Calibri" pitchFamily="34" charset="0"/>
+                <a:ea typeface="Calibri" pitchFamily="34" charset="-122"/>
+                <a:cs typeface="Calibri" pitchFamily="34" charset="-120"/>
+              </a:rPr>
+              <a:t>方法B：スマートフォンの標準カメラで読み取る</a:t>
+            </a:r>
+            <a:endParaRPr lang="en-US" sz="1400" dirty="0"/>
+          </a:p>
+        </p:txBody>
+      </p:sp>
+      <p:sp>
+        <p:nvSpPr>
+          <p:cNvPr id="22" name="Shape 20"/>
+          <p:cNvSpPr/>
+          <p:nvPr/>
+        </p:nvSpPr>
+        <p:spPr>
+          <a:xfrm>
+            <a:off x="566928" y="5008055"/>
+            <a:ext cx="274320" cy="274320"/>
+          </a:xfrm>
+          <a:prstGeom prst="ellipse">
+            <a:avLst/>
+          </a:prstGeom>
+          <a:solidFill>
+            <a:srgbClr val="B85042"/>
+          </a:solidFill>
+          <a:ln/>
+        </p:spPr>
+      </p:sp>
+      <p:sp>
+        <p:nvSpPr>
+          <p:cNvPr id="23" name="Text 21"/>
+          <p:cNvSpPr txBox="1"/>
+          <p:nvPr/>
+        </p:nvSpPr>
+        <p:spPr>
+          <a:xfrm>
+            <a:off x="566928" y="5008055"/>
+            <a:ext cx="274320" cy="274320"/>
+          </a:xfrm>
+          <a:prstGeom prst="rect">
+            <a:avLst/>
+          </a:prstGeom>
+          <a:noFill/>
+          <a:ln/>
+        </p:spPr>
+        <p:txBody>
+          <a:bodyPr wrap="square" lIns="0" tIns="0" rIns="0" bIns="0" rtlCol="0" anchor="ctr"/>
+          <a:lstStyle/>
+          <a:p>
+            <a:pPr algn="ctr" indent="0" marL="0">
+              <a:buNone/>
+            </a:pPr>
+            <a:r>
+              <a:rPr lang="en-US" sz="1100" b="1" dirty="0">
+                <a:solidFill>
+                  <a:srgbClr val="FFFFFF"/>
+                </a:solidFill>
+                <a:latin typeface="Calibri" pitchFamily="34" charset="0"/>
+                <a:ea typeface="Calibri" pitchFamily="34" charset="-122"/>
+                <a:cs typeface="Calibri" pitchFamily="34" charset="-120"/>
+              </a:rPr>
+              <a:t>1</a:t>
+            </a:r>
+            <a:endParaRPr lang="en-US" sz="1100" dirty="0"/>
+          </a:p>
+        </p:txBody>
+      </p:sp>
+      <p:sp>
+        <p:nvSpPr>
+          <p:cNvPr id="24" name="Text 22"/>
+          <p:cNvSpPr txBox="1"/>
+          <p:nvPr/>
+        </p:nvSpPr>
+        <p:spPr>
+          <a:xfrm>
+            <a:off x="969264" y="4989767"/>
+            <a:ext cx="6025896" cy="365760"/>
+          </a:xfrm>
+          <a:prstGeom prst="rect">
+            <a:avLst/>
+          </a:prstGeom>
+          <a:noFill/>
+          <a:ln/>
+        </p:spPr>
+        <p:txBody>
+          <a:bodyPr wrap="square" lIns="0" tIns="0" rIns="0" bIns="0" rtlCol="0" anchor="t"/>
+          <a:lstStyle/>
+          <a:p>
+            <a:pPr indent="0" marL="0">
+              <a:lnSpc>
+                <a:spcPct val="125000"/>
+              </a:lnSpc>
+              <a:buNone/>
+            </a:pPr>
+            <a:r>
+              <a:rPr lang="en-US" sz="1150" dirty="0">
+                <a:solidFill>
+                  <a:srgbClr val="222222"/>
+                </a:solidFill>
+                <a:latin typeface="Calibri" pitchFamily="34" charset="0"/>
+                <a:ea typeface="Calibri" pitchFamily="34" charset="-122"/>
+                <a:cs typeface="Calibri" pitchFamily="34" charset="-120"/>
+              </a:rPr>
+              <a:t>カメラアプリを開いて、来場者のQRコードに向ける</a:t>
+            </a:r>
+            <a:endParaRPr lang="en-US" sz="1150" dirty="0"/>
+          </a:p>
+        </p:txBody>
+      </p:sp>
+      <p:sp>
+        <p:nvSpPr>
+          <p:cNvPr id="25" name="Shape 23"/>
+          <p:cNvSpPr/>
+          <p:nvPr/>
+        </p:nvSpPr>
+        <p:spPr>
+          <a:xfrm>
+            <a:off x="566928" y="5465255"/>
+            <a:ext cx="274320" cy="274320"/>
+          </a:xfrm>
+          <a:prstGeom prst="ellipse">
+            <a:avLst/>
+          </a:prstGeom>
+          <a:solidFill>
+            <a:srgbClr val="B85042"/>
+          </a:solidFill>
+          <a:ln/>
+        </p:spPr>
+      </p:sp>
+      <p:sp>
+        <p:nvSpPr>
+          <p:cNvPr id="26" name="Text 24"/>
+          <p:cNvSpPr txBox="1"/>
+          <p:nvPr/>
+        </p:nvSpPr>
+        <p:spPr>
+          <a:xfrm>
+            <a:off x="566928" y="5465255"/>
+            <a:ext cx="274320" cy="274320"/>
+          </a:xfrm>
+          <a:prstGeom prst="rect">
+            <a:avLst/>
+          </a:prstGeom>
+          <a:noFill/>
+          <a:ln/>
+        </p:spPr>
+        <p:txBody>
+          <a:bodyPr wrap="square" lIns="0" tIns="0" rIns="0" bIns="0" rtlCol="0" anchor="ctr"/>
+          <a:lstStyle/>
+          <a:p>
+            <a:pPr algn="ctr" indent="0" marL="0">
+              <a:buNone/>
+            </a:pPr>
+            <a:r>
+              <a:rPr lang="en-US" sz="1100" b="1" dirty="0">
+                <a:solidFill>
+                  <a:srgbClr val="FFFFFF"/>
+                </a:solidFill>
+                <a:latin typeface="Calibri" pitchFamily="34" charset="0"/>
+                <a:ea typeface="Calibri" pitchFamily="34" charset="-122"/>
+                <a:cs typeface="Calibri" pitchFamily="34" charset="-120"/>
+              </a:rPr>
+              <a:t>2</a:t>
+            </a:r>
+            <a:endParaRPr lang="en-US" sz="1100" dirty="0"/>
+          </a:p>
+        </p:txBody>
+      </p:sp>
+      <p:sp>
+        <p:nvSpPr>
+          <p:cNvPr id="27" name="Text 25"/>
+          <p:cNvSpPr txBox="1"/>
+          <p:nvPr/>
+        </p:nvSpPr>
+        <p:spPr>
+          <a:xfrm>
+            <a:off x="969264" y="5446967"/>
+            <a:ext cx="6025896" cy="365760"/>
+          </a:xfrm>
+          <a:prstGeom prst="rect">
+            <a:avLst/>
+          </a:prstGeom>
+          <a:noFill/>
+          <a:ln/>
+        </p:spPr>
+        <p:txBody>
+          <a:bodyPr wrap="square" lIns="0" tIns="0" rIns="0" bIns="0" rtlCol="0" anchor="t"/>
+          <a:lstStyle/>
+          <a:p>
+            <a:pPr indent="0" marL="0">
+              <a:lnSpc>
+                <a:spcPct val="125000"/>
+              </a:lnSpc>
+              <a:buNone/>
+            </a:pPr>
+            <a:r>
+              <a:rPr lang="en-US" sz="1150" dirty="0">
+                <a:solidFill>
+                  <a:srgbClr val="222222"/>
+                </a:solidFill>
+                <a:latin typeface="Calibri" pitchFamily="34" charset="0"/>
+                <a:ea typeface="Calibri" pitchFamily="34" charset="-122"/>
+                <a:cs typeface="Calibri" pitchFamily="34" charset="-120"/>
+              </a:rPr>
+              <a:t>画面に出たリンクを押す</a:t>
+            </a:r>
+            <a:endParaRPr lang="en-US" sz="1150" dirty="0"/>
+          </a:p>
+        </p:txBody>
+      </p:sp>
+      <p:sp>
+        <p:nvSpPr>
+          <p:cNvPr id="28" name="Shape 26"/>
+          <p:cNvSpPr/>
+          <p:nvPr/>
+        </p:nvSpPr>
+        <p:spPr>
+          <a:xfrm>
+            <a:off x="566928" y="5922455"/>
+            <a:ext cx="274320" cy="274320"/>
+          </a:xfrm>
+          <a:prstGeom prst="ellipse">
+            <a:avLst/>
+          </a:prstGeom>
+          <a:solidFill>
+            <a:srgbClr val="B85042"/>
+          </a:solidFill>
+          <a:ln/>
+        </p:spPr>
+      </p:sp>
+      <p:sp>
+        <p:nvSpPr>
+          <p:cNvPr id="29" name="Text 27"/>
+          <p:cNvSpPr txBox="1"/>
+          <p:nvPr/>
+        </p:nvSpPr>
+        <p:spPr>
+          <a:xfrm>
+            <a:off x="566928" y="5922455"/>
+            <a:ext cx="274320" cy="274320"/>
+          </a:xfrm>
+          <a:prstGeom prst="rect">
+            <a:avLst/>
+          </a:prstGeom>
+          <a:noFill/>
+          <a:ln/>
+        </p:spPr>
+        <p:txBody>
+          <a:bodyPr wrap="square" lIns="0" tIns="0" rIns="0" bIns="0" rtlCol="0" anchor="ctr"/>
+          <a:lstStyle/>
+          <a:p>
+            <a:pPr algn="ctr" indent="0" marL="0">
+              <a:buNone/>
+            </a:pPr>
+            <a:r>
+              <a:rPr lang="en-US" sz="1100" b="1" dirty="0">
+                <a:solidFill>
+                  <a:srgbClr val="FFFFFF"/>
+                </a:solidFill>
+                <a:latin typeface="Calibri" pitchFamily="34" charset="0"/>
+                <a:ea typeface="Calibri" pitchFamily="34" charset="-122"/>
+                <a:cs typeface="Calibri" pitchFamily="34" charset="-120"/>
+              </a:rPr>
+              <a:t>3</a:t>
+            </a:r>
+            <a:endParaRPr lang="en-US" sz="1100" dirty="0"/>
+          </a:p>
+        </p:txBody>
+      </p:sp>
+      <p:sp>
+        <p:nvSpPr>
+          <p:cNvPr id="30" name="Text 28"/>
+          <p:cNvSpPr txBox="1"/>
+          <p:nvPr/>
+        </p:nvSpPr>
+        <p:spPr>
+          <a:xfrm>
+            <a:off x="969264" y="5904167"/>
+            <a:ext cx="6025896" cy="365760"/>
+          </a:xfrm>
+          <a:prstGeom prst="rect">
+            <a:avLst/>
+          </a:prstGeom>
+          <a:noFill/>
+          <a:ln/>
+        </p:spPr>
+        <p:txBody>
+          <a:bodyPr wrap="square" lIns="0" tIns="0" rIns="0" bIns="0" rtlCol="0" anchor="t"/>
+          <a:lstStyle/>
+          <a:p>
+            <a:pPr indent="0" marL="0">
+              <a:lnSpc>
+                <a:spcPct val="125000"/>
+              </a:lnSpc>
+              <a:buNone/>
+            </a:pPr>
+            <a:r>
+              <a:rPr lang="en-US" sz="1150" dirty="0">
+                <a:solidFill>
+                  <a:srgbClr val="222222"/>
+                </a:solidFill>
+                <a:latin typeface="Calibri" pitchFamily="34" charset="0"/>
+                <a:ea typeface="Calibri" pitchFamily="34" charset="-122"/>
+                <a:cs typeface="Calibri" pitchFamily="34" charset="-120"/>
+              </a:rPr>
+              <a:t>照会結果の画面が開く</a:t>
+            </a:r>
+            <a:endParaRPr lang="en-US" sz="1150" dirty="0"/>
+          </a:p>
+        </p:txBody>
+      </p:sp>
+      <p:sp>
+        <p:nvSpPr>
+          <p:cNvPr id="31" name="Shape 29"/>
+          <p:cNvSpPr/>
+          <p:nvPr/>
+        </p:nvSpPr>
+        <p:spPr>
+          <a:xfrm>
+            <a:off x="566928" y="6361367"/>
+            <a:ext cx="6428232" cy="624459"/>
+          </a:xfrm>
+          <a:prstGeom prst="roundRect">
+            <a:avLst>
+              <a:gd name="adj" fmla="val 8786"/>
+            </a:avLst>
+          </a:prstGeom>
+          <a:solidFill>
+            <a:srgbClr val="FDF0E6"/>
+          </a:solidFill>
+          <a:ln w="9525">
+            <a:solidFill>
+              <a:srgbClr val="E08A3C"/>
+            </a:solidFill>
+            <a:prstDash val="solid"/>
+          </a:ln>
+        </p:spPr>
+      </p:sp>
+      <p:sp>
+        <p:nvSpPr>
+          <p:cNvPr id="32" name="Text 30"/>
+          <p:cNvSpPr txBox="1"/>
+          <p:nvPr/>
+        </p:nvSpPr>
+        <p:spPr>
+          <a:xfrm>
+            <a:off x="658368" y="6452807"/>
+            <a:ext cx="237744" cy="237744"/>
+          </a:xfrm>
+          <a:prstGeom prst="rect">
+            <a:avLst/>
+          </a:prstGeom>
+          <a:noFill/>
+          <a:ln/>
+        </p:spPr>
+        <p:txBody>
+          <a:bodyPr wrap="square" lIns="0" tIns="0" rIns="0" bIns="0" rtlCol="0" anchor="ctr"/>
+          <a:lstStyle/>
+          <a:p>
+            <a:pPr algn="ctr" indent="0" marL="0">
+              <a:buNone/>
+            </a:pPr>
+            <a:r>
+              <a:rPr lang="en-US" sz="1200" b="1" dirty="0">
+                <a:solidFill>
+                  <a:srgbClr val="C25A17"/>
+                </a:solidFill>
+                <a:latin typeface="Calibri" pitchFamily="34" charset="0"/>
+                <a:ea typeface="Calibri" pitchFamily="34" charset="-122"/>
+                <a:cs typeface="Calibri" pitchFamily="34" charset="-120"/>
+              </a:rPr>
+              <a:t>！</a:t>
+            </a:r>
+            <a:endParaRPr lang="en-US" sz="1200" dirty="0"/>
+          </a:p>
+        </p:txBody>
+      </p:sp>
+      <p:sp>
+        <p:nvSpPr>
+          <p:cNvPr id="33" name="Text 31"/>
+          <p:cNvSpPr txBox="1"/>
+          <p:nvPr/>
+        </p:nvSpPr>
+        <p:spPr>
+          <a:xfrm>
+            <a:off x="950976" y="6471095"/>
+            <a:ext cx="5925312" cy="441579"/>
+          </a:xfrm>
+          <a:prstGeom prst="rect">
+            <a:avLst/>
+          </a:prstGeom>
+          <a:noFill/>
+          <a:ln/>
+        </p:spPr>
+        <p:txBody>
+          <a:bodyPr wrap="square" lIns="0" tIns="0" rIns="0" bIns="0" rtlCol="0" anchor="t"/>
+          <a:lstStyle/>
+          <a:p>
+            <a:pPr indent="0" marL="0">
+              <a:lnSpc>
+                <a:spcPct val="120000"/>
+              </a:lnSpc>
+              <a:buNone/>
+            </a:pPr>
+            <a:r>
+              <a:rPr lang="en-US" sz="1050" dirty="0">
+                <a:solidFill>
+                  <a:srgbClr val="222222"/>
+                </a:solidFill>
+                <a:latin typeface="Calibri" pitchFamily="34" charset="0"/>
+                <a:ea typeface="Calibri" pitchFamily="34" charset="-122"/>
+                <a:cs typeface="Calibri" pitchFamily="34" charset="-120"/>
+              </a:rPr>
+              <a:t>「ログインが必要です」と表示されたときは、そのスマートフォンがログアウトしています。画面のリンクからログインし直してください。</a:t>
+            </a:r>
+            <a:endParaRPr lang="en-US" sz="1050" dirty="0"/>
+          </a:p>
+        </p:txBody>
+      </p:sp>
+      <p:sp>
+        <p:nvSpPr>
+          <p:cNvPr id="34" name="Text 32"/>
           <p:cNvSpPr txBox="1"/>
           <p:nvPr/>
         </p:nvSpPr>
@@ -6498,537 +8212,15 @@
                 <a:ea typeface="Calibri" pitchFamily="34" charset="-122"/>
                 <a:cs typeface="Calibri" pitchFamily="34" charset="-120"/>
               </a:rPr>
-              <a:t>手順2：画面を確認して景品を選ぶ</a:t>
+              <a:t>手順1：QRコードを読み取る（つづき）</a:t>
             </a:r>
             <a:endParaRPr lang="en-US" sz="2200" dirty="0"/>
-          </a:p>
-        </p:txBody>
-      </p:sp>
-      <p:sp>
-        <p:nvSpPr>
-          <p:cNvPr id="4" name="Text 2"/>
-          <p:cNvSpPr txBox="1"/>
-          <p:nvPr/>
-        </p:nvSpPr>
-        <p:spPr>
-          <a:xfrm>
-            <a:off x="566928" y="1481328"/>
-            <a:ext cx="6428232" cy="257429"/>
-          </a:xfrm>
-          <a:prstGeom prst="rect">
-            <a:avLst/>
-          </a:prstGeom>
-          <a:noFill/>
-          <a:ln/>
-        </p:spPr>
-        <p:txBody>
-          <a:bodyPr wrap="square" lIns="0" tIns="0" rIns="0" bIns="0" rtlCol="0" anchor="t"/>
-          <a:lstStyle/>
-          <a:p>
-            <a:pPr indent="0" marL="0">
-              <a:lnSpc>
-                <a:spcPct val="125000"/>
-              </a:lnSpc>
-              <a:buNone/>
-            </a:pPr>
-            <a:r>
-              <a:rPr lang="en-US" sz="1100" dirty="0">
-                <a:solidFill>
-                  <a:srgbClr val="222222"/>
-                </a:solidFill>
-                <a:latin typeface="Calibri" pitchFamily="34" charset="0"/>
-                <a:ea typeface="Calibri" pitchFamily="34" charset="-122"/>
-                <a:cs typeface="Calibri" pitchFamily="34" charset="-120"/>
-              </a:rPr>
-              <a:t>読み取ると、交換コードと状態が表示されます。</a:t>
-            </a:r>
-            <a:endParaRPr lang="en-US" sz="1100" dirty="0"/>
-          </a:p>
-        </p:txBody>
-      </p:sp>
-      <p:sp>
-        <p:nvSpPr>
-          <p:cNvPr id="5" name="Text 3"/>
-          <p:cNvSpPr txBox="1"/>
-          <p:nvPr/>
-        </p:nvSpPr>
-        <p:spPr>
-          <a:xfrm>
-            <a:off x="566928" y="1885061"/>
-            <a:ext cx="6428232" cy="257810"/>
-          </a:xfrm>
-          <a:prstGeom prst="rect">
-            <a:avLst/>
-          </a:prstGeom>
-          <a:noFill/>
-          <a:ln/>
-        </p:spPr>
-        <p:txBody>
-          <a:bodyPr wrap="square" lIns="0" tIns="0" rIns="0" bIns="0" rtlCol="0" anchor="t"/>
-          <a:lstStyle/>
-          <a:p>
-            <a:pPr indent="0" marL="0">
-              <a:buNone/>
-            </a:pPr>
-            <a:r>
-              <a:rPr lang="en-US" sz="1400" b="1" dirty="0">
-                <a:solidFill>
-                  <a:srgbClr val="B85042"/>
-                </a:solidFill>
-                <a:latin typeface="Calibri" pitchFamily="34" charset="0"/>
-                <a:ea typeface="Calibri" pitchFamily="34" charset="-122"/>
-                <a:cs typeface="Calibri" pitchFamily="34" charset="-120"/>
-              </a:rPr>
-              <a:t>「未交換です」と出た場合</a:t>
-            </a:r>
-            <a:endParaRPr lang="en-US" sz="1400" dirty="0"/>
-          </a:p>
-        </p:txBody>
-      </p:sp>
-      <p:sp>
-        <p:nvSpPr>
-          <p:cNvPr id="6" name="Text 4"/>
-          <p:cNvSpPr txBox="1"/>
-          <p:nvPr/>
-        </p:nvSpPr>
-        <p:spPr>
-          <a:xfrm>
-            <a:off x="566928" y="2216023"/>
-            <a:ext cx="6428232" cy="257429"/>
-          </a:xfrm>
-          <a:prstGeom prst="rect">
-            <a:avLst/>
-          </a:prstGeom>
-          <a:noFill/>
-          <a:ln/>
-        </p:spPr>
-        <p:txBody>
-          <a:bodyPr wrap="square" lIns="0" tIns="0" rIns="0" bIns="0" rtlCol="0" anchor="t"/>
-          <a:lstStyle/>
-          <a:p>
-            <a:pPr indent="0" marL="0">
-              <a:lnSpc>
-                <a:spcPct val="125000"/>
-              </a:lnSpc>
-              <a:buNone/>
-            </a:pPr>
-            <a:r>
-              <a:rPr lang="en-US" sz="1100" dirty="0">
-                <a:solidFill>
-                  <a:srgbClr val="222222"/>
-                </a:solidFill>
-                <a:latin typeface="Calibri" pitchFamily="34" charset="0"/>
-                <a:ea typeface="Calibri" pitchFamily="34" charset="-122"/>
-                <a:cs typeface="Calibri" pitchFamily="34" charset="-120"/>
-              </a:rPr>
-              <a:t>そのままお渡しできます。</a:t>
-            </a:r>
-            <a:pPr indent="0" marL="0">
-              <a:lnSpc>
-                <a:spcPct val="125000"/>
-              </a:lnSpc>
-              <a:buNone/>
-            </a:pPr>
-            <a:r>
-              <a:rPr lang="en-US" sz="1100" b="1" dirty="0">
-                <a:solidFill>
-                  <a:srgbClr val="222222"/>
-                </a:solidFill>
-                <a:latin typeface="Calibri" pitchFamily="34" charset="0"/>
-                <a:ea typeface="Calibri" pitchFamily="34" charset="-122"/>
-                <a:cs typeface="Calibri" pitchFamily="34" charset="-120"/>
-              </a:rPr>
-              <a:t>渡す景品を選んで</a:t>
-            </a:r>
-            <a:pPr indent="0" marL="0">
-              <a:lnSpc>
-                <a:spcPct val="125000"/>
-              </a:lnSpc>
-              <a:buNone/>
-            </a:pPr>
-            <a:r>
-              <a:rPr lang="en-US" sz="1100" dirty="0">
-                <a:solidFill>
-                  <a:srgbClr val="222222"/>
-                </a:solidFill>
-                <a:latin typeface="Calibri" pitchFamily="34" charset="0"/>
-                <a:ea typeface="Calibri" pitchFamily="34" charset="-122"/>
-                <a:cs typeface="Calibri" pitchFamily="34" charset="-120"/>
-              </a:rPr>
-              <a:t>ください。選択肢には残りの数が出ています。</a:t>
-            </a:r>
-            <a:endParaRPr lang="en-US" sz="1100" dirty="0"/>
-          </a:p>
-        </p:txBody>
-      </p:sp>
-      <p:sp>
-        <p:nvSpPr>
-          <p:cNvPr id="7" name="Text 5"/>
-          <p:cNvSpPr txBox="1"/>
-          <p:nvPr/>
-        </p:nvSpPr>
-        <p:spPr>
-          <a:xfrm>
-            <a:off x="566928" y="2619756"/>
-            <a:ext cx="6428232" cy="257810"/>
-          </a:xfrm>
-          <a:prstGeom prst="rect">
-            <a:avLst/>
-          </a:prstGeom>
-          <a:noFill/>
-          <a:ln/>
-        </p:spPr>
-        <p:txBody>
-          <a:bodyPr wrap="square" lIns="0" tIns="0" rIns="0" bIns="0" rtlCol="0" anchor="t"/>
-          <a:lstStyle/>
-          <a:p>
-            <a:pPr indent="0" marL="0">
-              <a:buNone/>
-            </a:pPr>
-            <a:r>
-              <a:rPr lang="en-US" sz="1400" b="1" dirty="0">
-                <a:solidFill>
-                  <a:srgbClr val="B85042"/>
-                </a:solidFill>
-                <a:latin typeface="Calibri" pitchFamily="34" charset="0"/>
-                <a:ea typeface="Calibri" pitchFamily="34" charset="-122"/>
-                <a:cs typeface="Calibri" pitchFamily="34" charset="-120"/>
-              </a:rPr>
-              <a:t>「交換済み（日時）」と出た場合</a:t>
-            </a:r>
-            <a:endParaRPr lang="en-US" sz="1400" dirty="0"/>
-          </a:p>
-        </p:txBody>
-      </p:sp>
-      <p:sp>
-        <p:nvSpPr>
-          <p:cNvPr id="8" name="Text 6"/>
-          <p:cNvSpPr txBox="1"/>
-          <p:nvPr/>
-        </p:nvSpPr>
-        <p:spPr>
-          <a:xfrm>
-            <a:off x="566928" y="2950718"/>
-            <a:ext cx="6428232" cy="662559"/>
-          </a:xfrm>
-          <a:prstGeom prst="rect">
-            <a:avLst/>
-          </a:prstGeom>
-          <a:noFill/>
-          <a:ln/>
-        </p:spPr>
-        <p:txBody>
-          <a:bodyPr wrap="square" lIns="0" tIns="0" rIns="0" bIns="0" rtlCol="0" anchor="t"/>
-          <a:lstStyle/>
-          <a:p>
-            <a:pPr indent="0" marL="0">
-              <a:lnSpc>
-                <a:spcPct val="125000"/>
-              </a:lnSpc>
-              <a:buNone/>
-            </a:pPr>
-            <a:r>
-              <a:rPr lang="en-US" sz="1100" dirty="0">
-                <a:solidFill>
-                  <a:srgbClr val="222222"/>
-                </a:solidFill>
-                <a:latin typeface="Calibri" pitchFamily="34" charset="0"/>
-                <a:ea typeface="Calibri" pitchFamily="34" charset="-122"/>
-                <a:cs typeface="Calibri" pitchFamily="34" charset="-120"/>
-              </a:rPr>
-              <a:t>すでにお渡しした記録があります。</a:t>
-            </a:r>
-            <a:pPr indent="0" marL="0">
-              <a:lnSpc>
-                <a:spcPct val="125000"/>
-              </a:lnSpc>
-              <a:buNone/>
-            </a:pPr>
-            <a:r>
-              <a:rPr lang="en-US" sz="1100" b="1" dirty="0">
-                <a:solidFill>
-                  <a:srgbClr val="222222"/>
-                </a:solidFill>
-                <a:latin typeface="Calibri" pitchFamily="34" charset="0"/>
-                <a:ea typeface="Calibri" pitchFamily="34" charset="-122"/>
-                <a:cs typeface="Calibri" pitchFamily="34" charset="-120"/>
-              </a:rPr>
-              <a:t>来場者にはその旨を表示していません。</a:t>
-            </a:r>
-            <a:pPr indent="0" marL="0">
-              <a:lnSpc>
-                <a:spcPct val="125000"/>
-              </a:lnSpc>
-              <a:buNone/>
-            </a:pPr>
-            <a:r>
-              <a:rPr lang="en-US" sz="1100" dirty="0">
-                <a:solidFill>
-                  <a:srgbClr val="222222"/>
-                </a:solidFill>
-                <a:latin typeface="Calibri" pitchFamily="34" charset="0"/>
-                <a:ea typeface="Calibri" pitchFamily="34" charset="-122"/>
-                <a:cs typeface="Calibri" pitchFamily="34" charset="-120"/>
-              </a:rPr>
-              <a:t>「もう1回まわった」「まだもらっていない」などお申し出があれば、</a:t>
-            </a:r>
-            <a:pPr indent="0" marL="0">
-              <a:lnSpc>
-                <a:spcPct val="125000"/>
-              </a:lnSpc>
-              <a:buNone/>
-            </a:pPr>
-            <a:r>
-              <a:rPr lang="en-US" sz="1100" b="1" dirty="0">
-                <a:solidFill>
-                  <a:srgbClr val="222222"/>
-                </a:solidFill>
-                <a:latin typeface="Calibri" pitchFamily="34" charset="0"/>
-                <a:ea typeface="Calibri" pitchFamily="34" charset="-122"/>
-                <a:cs typeface="Calibri" pitchFamily="34" charset="-120"/>
-              </a:rPr>
-              <a:t>お渡しして構いません</a:t>
-            </a:r>
-            <a:pPr indent="0" marL="0">
-              <a:lnSpc>
-                <a:spcPct val="125000"/>
-              </a:lnSpc>
-              <a:buNone/>
-            </a:pPr>
-            <a:r>
-              <a:rPr lang="en-US" sz="1100" dirty="0">
-                <a:solidFill>
-                  <a:srgbClr val="222222"/>
-                </a:solidFill>
-                <a:latin typeface="Calibri" pitchFamily="34" charset="0"/>
-                <a:ea typeface="Calibri" pitchFamily="34" charset="-122"/>
-                <a:cs typeface="Calibri" pitchFamily="34" charset="-120"/>
-              </a:rPr>
-              <a:t>。判断に迷う場合は事務局にご確認ください。</a:t>
-            </a:r>
-            <a:endParaRPr lang="en-US" sz="1100" dirty="0"/>
-          </a:p>
-        </p:txBody>
-      </p:sp>
-      <p:sp>
-        <p:nvSpPr>
-          <p:cNvPr id="9" name="Shape 7"/>
-          <p:cNvSpPr/>
-          <p:nvPr/>
-        </p:nvSpPr>
-        <p:spPr>
-          <a:xfrm>
-            <a:off x="566928" y="3649853"/>
-            <a:ext cx="6428232" cy="431102"/>
-          </a:xfrm>
-          <a:prstGeom prst="roundRect">
-            <a:avLst>
-              <a:gd name="adj" fmla="val 12726"/>
-            </a:avLst>
-          </a:prstGeom>
-          <a:solidFill>
-            <a:srgbClr val="FAEAE7"/>
-          </a:solidFill>
-          <a:ln w="9525">
-            <a:solidFill>
-              <a:srgbClr val="B85042"/>
-            </a:solidFill>
-            <a:prstDash val="solid"/>
-          </a:ln>
-        </p:spPr>
-      </p:sp>
-      <p:sp>
-        <p:nvSpPr>
-          <p:cNvPr id="10" name="Text 8"/>
-          <p:cNvSpPr txBox="1"/>
-          <p:nvPr/>
-        </p:nvSpPr>
-        <p:spPr>
-          <a:xfrm>
-            <a:off x="658368" y="3741293"/>
-            <a:ext cx="237744" cy="237744"/>
-          </a:xfrm>
-          <a:prstGeom prst="rect">
-            <a:avLst/>
-          </a:prstGeom>
-          <a:noFill/>
-          <a:ln/>
-        </p:spPr>
-        <p:txBody>
-          <a:bodyPr wrap="square" lIns="0" tIns="0" rIns="0" bIns="0" rtlCol="0" anchor="ctr"/>
-          <a:lstStyle/>
-          <a:p>
-            <a:pPr algn="ctr" indent="0" marL="0">
-              <a:buNone/>
-            </a:pPr>
-            <a:r>
-              <a:rPr lang="en-US" sz="1200" b="1" dirty="0">
-                <a:solidFill>
-                  <a:srgbClr val="B85042"/>
-                </a:solidFill>
-                <a:latin typeface="Calibri" pitchFamily="34" charset="0"/>
-                <a:ea typeface="Calibri" pitchFamily="34" charset="-122"/>
-                <a:cs typeface="Calibri" pitchFamily="34" charset="-120"/>
-              </a:rPr>
-              <a:t>i</a:t>
-            </a:r>
-            <a:endParaRPr lang="en-US" sz="1200" dirty="0"/>
-          </a:p>
-        </p:txBody>
-      </p:sp>
-      <p:sp>
-        <p:nvSpPr>
-          <p:cNvPr id="11" name="Text 9"/>
-          <p:cNvSpPr txBox="1"/>
-          <p:nvPr/>
-        </p:nvSpPr>
-        <p:spPr>
-          <a:xfrm>
-            <a:off x="950976" y="3759581"/>
-            <a:ext cx="5925312" cy="248221"/>
-          </a:xfrm>
-          <a:prstGeom prst="rect">
-            <a:avLst/>
-          </a:prstGeom>
-          <a:noFill/>
-          <a:ln/>
-        </p:spPr>
-        <p:txBody>
-          <a:bodyPr wrap="square" lIns="0" tIns="0" rIns="0" bIns="0" rtlCol="0" anchor="t"/>
-          <a:lstStyle/>
-          <a:p>
-            <a:pPr indent="0" marL="0">
-              <a:lnSpc>
-                <a:spcPct val="120000"/>
-              </a:lnSpc>
-              <a:buNone/>
-            </a:pPr>
-            <a:r>
-              <a:rPr lang="en-US" sz="1050" dirty="0">
-                <a:solidFill>
-                  <a:srgbClr val="222222"/>
-                </a:solidFill>
-                <a:latin typeface="Calibri" pitchFamily="34" charset="0"/>
-                <a:ea typeface="Calibri" pitchFamily="34" charset="-122"/>
-                <a:cs typeface="Calibri" pitchFamily="34" charset="-120"/>
-              </a:rPr>
-              <a:t>画面には、その方が回答したブースの数も出ます。目安としてご覧ください。</a:t>
-            </a:r>
-            <a:endParaRPr lang="en-US" sz="1050" dirty="0"/>
-          </a:p>
-        </p:txBody>
-      </p:sp>
-      <p:sp>
-        <p:nvSpPr>
-          <p:cNvPr id="12" name="Shape 10"/>
-          <p:cNvSpPr/>
-          <p:nvPr/>
-        </p:nvSpPr>
-        <p:spPr>
-          <a:xfrm>
-            <a:off x="566928" y="4154107"/>
-            <a:ext cx="6428232" cy="624459"/>
-          </a:xfrm>
-          <a:prstGeom prst="roundRect">
-            <a:avLst>
-              <a:gd name="adj" fmla="val 8786"/>
-            </a:avLst>
-          </a:prstGeom>
-          <a:solidFill>
-            <a:srgbClr val="FDF0E6"/>
-          </a:solidFill>
-          <a:ln w="9525">
-            <a:solidFill>
-              <a:srgbClr val="E08A3C"/>
-            </a:solidFill>
-            <a:prstDash val="solid"/>
-          </a:ln>
-        </p:spPr>
-      </p:sp>
-      <p:sp>
-        <p:nvSpPr>
-          <p:cNvPr id="13" name="Text 11"/>
-          <p:cNvSpPr txBox="1"/>
-          <p:nvPr/>
-        </p:nvSpPr>
-        <p:spPr>
-          <a:xfrm>
-            <a:off x="658368" y="4245547"/>
-            <a:ext cx="237744" cy="237744"/>
-          </a:xfrm>
-          <a:prstGeom prst="rect">
-            <a:avLst/>
-          </a:prstGeom>
-          <a:noFill/>
-          <a:ln/>
-        </p:spPr>
-        <p:txBody>
-          <a:bodyPr wrap="square" lIns="0" tIns="0" rIns="0" bIns="0" rtlCol="0" anchor="ctr"/>
-          <a:lstStyle/>
-          <a:p>
-            <a:pPr algn="ctr" indent="0" marL="0">
-              <a:buNone/>
-            </a:pPr>
-            <a:r>
-              <a:rPr lang="en-US" sz="1200" b="1" dirty="0">
-                <a:solidFill>
-                  <a:srgbClr val="C25A17"/>
-                </a:solidFill>
-                <a:latin typeface="Calibri" pitchFamily="34" charset="0"/>
-                <a:ea typeface="Calibri" pitchFamily="34" charset="-122"/>
-                <a:cs typeface="Calibri" pitchFamily="34" charset="-120"/>
-              </a:rPr>
-              <a:t>！</a:t>
-            </a:r>
-            <a:endParaRPr lang="en-US" sz="1200" dirty="0"/>
-          </a:p>
-        </p:txBody>
-      </p:sp>
-      <p:sp>
-        <p:nvSpPr>
-          <p:cNvPr id="14" name="Text 12"/>
-          <p:cNvSpPr txBox="1"/>
-          <p:nvPr/>
-        </p:nvSpPr>
-        <p:spPr>
-          <a:xfrm>
-            <a:off x="950976" y="4263835"/>
-            <a:ext cx="5925312" cy="441579"/>
-          </a:xfrm>
-          <a:prstGeom prst="rect">
-            <a:avLst/>
-          </a:prstGeom>
-          <a:noFill/>
-          <a:ln/>
-        </p:spPr>
-        <p:txBody>
-          <a:bodyPr wrap="square" lIns="0" tIns="0" rIns="0" bIns="0" rtlCol="0" anchor="t"/>
-          <a:lstStyle/>
-          <a:p>
-            <a:pPr indent="0" marL="0">
-              <a:lnSpc>
-                <a:spcPct val="120000"/>
-              </a:lnSpc>
-              <a:buNone/>
-            </a:pPr>
-            <a:r>
-              <a:rPr lang="en-US" sz="1050" dirty="0">
-                <a:solidFill>
-                  <a:srgbClr val="222222"/>
-                </a:solidFill>
-                <a:latin typeface="Calibri" pitchFamily="34" charset="0"/>
-                <a:ea typeface="Calibri" pitchFamily="34" charset="-122"/>
-                <a:cs typeface="Calibri" pitchFamily="34" charset="-120"/>
-              </a:rPr>
-              <a:t>在庫がなくなった景品も選べます。実際にお渡ししたものを記録することを優先してください（あとで用意した数を超えた分が分かるようになっています）。</a:t>
-            </a:r>
-            <a:endParaRPr lang="en-US" sz="1050" dirty="0"/>
           </a:p>
         </p:txBody>
       </p:sp>
       <p:pic>
         <p:nvPicPr>
-          <p:cNvPr id="15" name="Image 0" descr="C:\Users\sato\Desktop\enque\docs\images\p-claim-open.png">    </p:cNvPr>
+          <p:cNvPr id="4" name="Image 0" descr="C:\Users\sato\Desktop\enque\docs\images\p-scan-button.png">    </p:cNvPr>
           <p:cNvPicPr>
             <a:picLocks noChangeAspect="1"/>
           </p:cNvPicPr>
@@ -7042,8 +8234,8 @@
         </p:blipFill>
         <p:spPr>
           <a:xfrm>
-            <a:off x="2632342" y="4851718"/>
-            <a:ext cx="2297403" cy="3474720"/>
+            <a:off x="566928" y="1481328"/>
+            <a:ext cx="6428232" cy="3465755"/>
           </a:xfrm>
           <a:prstGeom prst="rect">
             <a:avLst/>
@@ -7052,13 +8244,13 @@
       </p:pic>
       <p:sp>
         <p:nvSpPr>
-          <p:cNvPr id="16" name="Text 13"/>
-          <p:cNvSpPr txBox="1"/>
-          <p:nvPr/>
-        </p:nvSpPr>
-        <p:spPr>
-          <a:xfrm>
-            <a:off x="566928" y="8381302"/>
+          <p:cNvPr id="5" name="Text 2"/>
+          <p:cNvSpPr txBox="1"/>
+          <p:nvPr/>
+        </p:nvSpPr>
+        <p:spPr>
+          <a:xfrm>
+            <a:off x="566928" y="5001947"/>
             <a:ext cx="6428232" cy="274320"/>
           </a:xfrm>
           <a:prstGeom prst="rect">
@@ -7083,7 +8275,7 @@
                 <a:ea typeface="Calibri" pitchFamily="34" charset="-122"/>
                 <a:cs typeface="Calibri" pitchFamily="34" charset="-120"/>
               </a:rPr>
-              <a:t>照会結果の画面。「未交換です」の表示と、景品を選ぶプルダウン（残りの数が見えるもの）。</a:t>
+              <a:t>照会画面の上部。「QRコードを読み取る」ボタンが見えるもの。</a:t>
             </a:r>
             <a:endParaRPr lang="en-US" sz="950" dirty="0"/>
           </a:p>
@@ -7091,7 +8283,7 @@
       </p:sp>
       <p:sp>
         <p:nvSpPr>
-          <p:cNvPr id="17" name="Text 14"/>
+          <p:cNvPr id="6" name="Text 3"/>
           <p:cNvSpPr txBox="1"/>
           <p:nvPr/>
         </p:nvSpPr>
@@ -7232,7 +8424,7 @@
                 <a:ea typeface="Calibri" pitchFamily="34" charset="-122"/>
                 <a:cs typeface="Calibri" pitchFamily="34" charset="-120"/>
               </a:rPr>
-              <a:t>手順3：交換済みにする</a:t>
+              <a:t>手順2：画面を確認して景品を選ぶ</a:t>
             </a:r>
             <a:endParaRPr lang="en-US" sz="2200" dirty="0"/>
           </a:p>
@@ -7240,34 +8432,347 @@
       </p:sp>
       <p:sp>
         <p:nvSpPr>
-          <p:cNvPr id="4" name="Shape 2"/>
+          <p:cNvPr id="4" name="Text 2"/>
+          <p:cNvSpPr txBox="1"/>
+          <p:nvPr/>
+        </p:nvSpPr>
+        <p:spPr>
+          <a:xfrm>
+            <a:off x="566928" y="1481328"/>
+            <a:ext cx="6428232" cy="257429"/>
+          </a:xfrm>
+          <a:prstGeom prst="rect">
+            <a:avLst/>
+          </a:prstGeom>
+          <a:noFill/>
+          <a:ln/>
+        </p:spPr>
+        <p:txBody>
+          <a:bodyPr wrap="square" lIns="0" tIns="0" rIns="0" bIns="0" rtlCol="0" anchor="t"/>
+          <a:lstStyle/>
+          <a:p>
+            <a:pPr indent="0" marL="0">
+              <a:lnSpc>
+                <a:spcPct val="125000"/>
+              </a:lnSpc>
+              <a:buNone/>
+            </a:pPr>
+            <a:r>
+              <a:rPr lang="en-US" sz="1100" dirty="0">
+                <a:solidFill>
+                  <a:srgbClr val="222222"/>
+                </a:solidFill>
+                <a:latin typeface="Calibri" pitchFamily="34" charset="0"/>
+                <a:ea typeface="Calibri" pitchFamily="34" charset="-122"/>
+                <a:cs typeface="Calibri" pitchFamily="34" charset="-120"/>
+              </a:rPr>
+              <a:t>読み取ると、交換コードと状態が表示されます。</a:t>
+            </a:r>
+            <a:endParaRPr lang="en-US" sz="1100" dirty="0"/>
+          </a:p>
+        </p:txBody>
+      </p:sp>
+      <p:sp>
+        <p:nvSpPr>
+          <p:cNvPr id="5" name="Text 3"/>
+          <p:cNvSpPr txBox="1"/>
+          <p:nvPr/>
+        </p:nvSpPr>
+        <p:spPr>
+          <a:xfrm>
+            <a:off x="566928" y="1885061"/>
+            <a:ext cx="6428232" cy="257810"/>
+          </a:xfrm>
+          <a:prstGeom prst="rect">
+            <a:avLst/>
+          </a:prstGeom>
+          <a:noFill/>
+          <a:ln/>
+        </p:spPr>
+        <p:txBody>
+          <a:bodyPr wrap="square" lIns="0" tIns="0" rIns="0" bIns="0" rtlCol="0" anchor="t"/>
+          <a:lstStyle/>
+          <a:p>
+            <a:pPr indent="0" marL="0">
+              <a:buNone/>
+            </a:pPr>
+            <a:r>
+              <a:rPr lang="en-US" sz="1400" b="1" dirty="0">
+                <a:solidFill>
+                  <a:srgbClr val="B85042"/>
+                </a:solidFill>
+                <a:latin typeface="Calibri" pitchFamily="34" charset="0"/>
+                <a:ea typeface="Calibri" pitchFamily="34" charset="-122"/>
+                <a:cs typeface="Calibri" pitchFamily="34" charset="-120"/>
+              </a:rPr>
+              <a:t>「未交換です」と出た場合</a:t>
+            </a:r>
+            <a:endParaRPr lang="en-US" sz="1400" dirty="0"/>
+          </a:p>
+        </p:txBody>
+      </p:sp>
+      <p:sp>
+        <p:nvSpPr>
+          <p:cNvPr id="6" name="Text 4"/>
+          <p:cNvSpPr txBox="1"/>
+          <p:nvPr/>
+        </p:nvSpPr>
+        <p:spPr>
+          <a:xfrm>
+            <a:off x="566928" y="2216023"/>
+            <a:ext cx="6428232" cy="257429"/>
+          </a:xfrm>
+          <a:prstGeom prst="rect">
+            <a:avLst/>
+          </a:prstGeom>
+          <a:noFill/>
+          <a:ln/>
+        </p:spPr>
+        <p:txBody>
+          <a:bodyPr wrap="square" lIns="0" tIns="0" rIns="0" bIns="0" rtlCol="0" anchor="t"/>
+          <a:lstStyle/>
+          <a:p>
+            <a:pPr indent="0" marL="0">
+              <a:lnSpc>
+                <a:spcPct val="125000"/>
+              </a:lnSpc>
+              <a:buNone/>
+            </a:pPr>
+            <a:r>
+              <a:rPr lang="en-US" sz="1100" dirty="0">
+                <a:solidFill>
+                  <a:srgbClr val="222222"/>
+                </a:solidFill>
+                <a:latin typeface="Calibri" pitchFamily="34" charset="0"/>
+                <a:ea typeface="Calibri" pitchFamily="34" charset="-122"/>
+                <a:cs typeface="Calibri" pitchFamily="34" charset="-120"/>
+              </a:rPr>
+              <a:t>そのままお渡しできます。</a:t>
+            </a:r>
+            <a:pPr indent="0" marL="0">
+              <a:lnSpc>
+                <a:spcPct val="125000"/>
+              </a:lnSpc>
+              <a:buNone/>
+            </a:pPr>
+            <a:r>
+              <a:rPr lang="en-US" sz="1100" b="1" dirty="0">
+                <a:solidFill>
+                  <a:srgbClr val="222222"/>
+                </a:solidFill>
+                <a:latin typeface="Calibri" pitchFamily="34" charset="0"/>
+                <a:ea typeface="Calibri" pitchFamily="34" charset="-122"/>
+                <a:cs typeface="Calibri" pitchFamily="34" charset="-120"/>
+              </a:rPr>
+              <a:t>渡す景品を選んで</a:t>
+            </a:r>
+            <a:pPr indent="0" marL="0">
+              <a:lnSpc>
+                <a:spcPct val="125000"/>
+              </a:lnSpc>
+              <a:buNone/>
+            </a:pPr>
+            <a:r>
+              <a:rPr lang="en-US" sz="1100" dirty="0">
+                <a:solidFill>
+                  <a:srgbClr val="222222"/>
+                </a:solidFill>
+                <a:latin typeface="Calibri" pitchFamily="34" charset="0"/>
+                <a:ea typeface="Calibri" pitchFamily="34" charset="-122"/>
+                <a:cs typeface="Calibri" pitchFamily="34" charset="-120"/>
+              </a:rPr>
+              <a:t>ください。選択肢には残りの数が出ています。</a:t>
+            </a:r>
+            <a:endParaRPr lang="en-US" sz="1100" dirty="0"/>
+          </a:p>
+        </p:txBody>
+      </p:sp>
+      <p:sp>
+        <p:nvSpPr>
+          <p:cNvPr id="7" name="Text 5"/>
+          <p:cNvSpPr txBox="1"/>
+          <p:nvPr/>
+        </p:nvSpPr>
+        <p:spPr>
+          <a:xfrm>
+            <a:off x="566928" y="2619756"/>
+            <a:ext cx="6428232" cy="257810"/>
+          </a:xfrm>
+          <a:prstGeom prst="rect">
+            <a:avLst/>
+          </a:prstGeom>
+          <a:noFill/>
+          <a:ln/>
+        </p:spPr>
+        <p:txBody>
+          <a:bodyPr wrap="square" lIns="0" tIns="0" rIns="0" bIns="0" rtlCol="0" anchor="t"/>
+          <a:lstStyle/>
+          <a:p>
+            <a:pPr indent="0" marL="0">
+              <a:buNone/>
+            </a:pPr>
+            <a:r>
+              <a:rPr lang="en-US" sz="1400" b="1" dirty="0">
+                <a:solidFill>
+                  <a:srgbClr val="B85042"/>
+                </a:solidFill>
+                <a:latin typeface="Calibri" pitchFamily="34" charset="0"/>
+                <a:ea typeface="Calibri" pitchFamily="34" charset="-122"/>
+                <a:cs typeface="Calibri" pitchFamily="34" charset="-120"/>
+              </a:rPr>
+              <a:t>「交換済み（日時）」と出た場合</a:t>
+            </a:r>
+            <a:endParaRPr lang="en-US" sz="1400" dirty="0"/>
+          </a:p>
+        </p:txBody>
+      </p:sp>
+      <p:sp>
+        <p:nvSpPr>
+          <p:cNvPr id="8" name="Text 6"/>
+          <p:cNvSpPr txBox="1"/>
+          <p:nvPr/>
+        </p:nvSpPr>
+        <p:spPr>
+          <a:xfrm>
+            <a:off x="566928" y="2950718"/>
+            <a:ext cx="6428232" cy="662559"/>
+          </a:xfrm>
+          <a:prstGeom prst="rect">
+            <a:avLst/>
+          </a:prstGeom>
+          <a:noFill/>
+          <a:ln/>
+        </p:spPr>
+        <p:txBody>
+          <a:bodyPr wrap="square" lIns="0" tIns="0" rIns="0" bIns="0" rtlCol="0" anchor="t"/>
+          <a:lstStyle/>
+          <a:p>
+            <a:pPr indent="0" marL="0">
+              <a:lnSpc>
+                <a:spcPct val="125000"/>
+              </a:lnSpc>
+              <a:buNone/>
+            </a:pPr>
+            <a:r>
+              <a:rPr lang="en-US" sz="1100" dirty="0">
+                <a:solidFill>
+                  <a:srgbClr val="222222"/>
+                </a:solidFill>
+                <a:latin typeface="Calibri" pitchFamily="34" charset="0"/>
+                <a:ea typeface="Calibri" pitchFamily="34" charset="-122"/>
+                <a:cs typeface="Calibri" pitchFamily="34" charset="-120"/>
+              </a:rPr>
+              <a:t>すでにお渡しした記録があります。</a:t>
+            </a:r>
+            <a:pPr indent="0" marL="0">
+              <a:lnSpc>
+                <a:spcPct val="125000"/>
+              </a:lnSpc>
+              <a:buNone/>
+            </a:pPr>
+            <a:r>
+              <a:rPr lang="en-US" sz="1100" b="1" dirty="0">
+                <a:solidFill>
+                  <a:srgbClr val="222222"/>
+                </a:solidFill>
+                <a:latin typeface="Calibri" pitchFamily="34" charset="0"/>
+                <a:ea typeface="Calibri" pitchFamily="34" charset="-122"/>
+                <a:cs typeface="Calibri" pitchFamily="34" charset="-120"/>
+              </a:rPr>
+              <a:t>来場者にはその旨を表示していません。</a:t>
+            </a:r>
+            <a:pPr indent="0" marL="0">
+              <a:lnSpc>
+                <a:spcPct val="125000"/>
+              </a:lnSpc>
+              <a:buNone/>
+            </a:pPr>
+            <a:r>
+              <a:rPr lang="en-US" sz="1100" dirty="0">
+                <a:solidFill>
+                  <a:srgbClr val="222222"/>
+                </a:solidFill>
+                <a:latin typeface="Calibri" pitchFamily="34" charset="0"/>
+                <a:ea typeface="Calibri" pitchFamily="34" charset="-122"/>
+                <a:cs typeface="Calibri" pitchFamily="34" charset="-120"/>
+              </a:rPr>
+              <a:t>「もう1回まわった」「まだもらっていない」などお申し出があれば、</a:t>
+            </a:r>
+            <a:pPr indent="0" marL="0">
+              <a:lnSpc>
+                <a:spcPct val="125000"/>
+              </a:lnSpc>
+              <a:buNone/>
+            </a:pPr>
+            <a:r>
+              <a:rPr lang="en-US" sz="1100" b="1" dirty="0">
+                <a:solidFill>
+                  <a:srgbClr val="222222"/>
+                </a:solidFill>
+                <a:latin typeface="Calibri" pitchFamily="34" charset="0"/>
+                <a:ea typeface="Calibri" pitchFamily="34" charset="-122"/>
+                <a:cs typeface="Calibri" pitchFamily="34" charset="-120"/>
+              </a:rPr>
+              <a:t>お渡しして構いません</a:t>
+            </a:r>
+            <a:pPr indent="0" marL="0">
+              <a:lnSpc>
+                <a:spcPct val="125000"/>
+              </a:lnSpc>
+              <a:buNone/>
+            </a:pPr>
+            <a:r>
+              <a:rPr lang="en-US" sz="1100" dirty="0">
+                <a:solidFill>
+                  <a:srgbClr val="222222"/>
+                </a:solidFill>
+                <a:latin typeface="Calibri" pitchFamily="34" charset="0"/>
+                <a:ea typeface="Calibri" pitchFamily="34" charset="-122"/>
+                <a:cs typeface="Calibri" pitchFamily="34" charset="-120"/>
+              </a:rPr>
+              <a:t>。判断に迷う場合は事務局にご確認ください。</a:t>
+            </a:r>
+            <a:endParaRPr lang="en-US" sz="1100" dirty="0"/>
+          </a:p>
+        </p:txBody>
+      </p:sp>
+      <p:sp>
+        <p:nvSpPr>
+          <p:cNvPr id="9" name="Shape 7"/>
           <p:cNvSpPr/>
           <p:nvPr/>
         </p:nvSpPr>
         <p:spPr>
           <a:xfrm>
-            <a:off x="566928" y="1499616"/>
-            <a:ext cx="274320" cy="274320"/>
-          </a:xfrm>
-          <a:prstGeom prst="ellipse">
-            <a:avLst/>
+            <a:off x="566928" y="3649853"/>
+            <a:ext cx="6428232" cy="431102"/>
+          </a:xfrm>
+          <a:prstGeom prst="roundRect">
+            <a:avLst>
+              <a:gd name="adj" fmla="val 12726"/>
+            </a:avLst>
           </a:prstGeom>
           <a:solidFill>
-            <a:srgbClr val="B85042"/>
+            <a:srgbClr val="FAEAE7"/>
           </a:solidFill>
-          <a:ln/>
-        </p:spPr>
-      </p:sp>
-      <p:sp>
-        <p:nvSpPr>
-          <p:cNvPr id="5" name="Text 3"/>
-          <p:cNvSpPr txBox="1"/>
-          <p:nvPr/>
-        </p:nvSpPr>
-        <p:spPr>
-          <a:xfrm>
-            <a:off x="566928" y="1499616"/>
-            <a:ext cx="274320" cy="274320"/>
+          <a:ln w="9525">
+            <a:solidFill>
+              <a:srgbClr val="B85042"/>
+            </a:solidFill>
+            <a:prstDash val="solid"/>
+          </a:ln>
+        </p:spPr>
+      </p:sp>
+      <p:sp>
+        <p:nvSpPr>
+          <p:cNvPr id="10" name="Text 8"/>
+          <p:cNvSpPr txBox="1"/>
+          <p:nvPr/>
+        </p:nvSpPr>
+        <p:spPr>
+          <a:xfrm>
+            <a:off x="658368" y="3741293"/>
+            <a:ext cx="237744" cy="237744"/>
           </a:xfrm>
           <a:prstGeom prst="rect">
             <a:avLst/>
@@ -7283,30 +8788,30 @@
               <a:buNone/>
             </a:pPr>
             <a:r>
-              <a:rPr lang="en-US" sz="1100" b="1" dirty="0">
-                <a:solidFill>
-                  <a:srgbClr val="FFFFFF"/>
-                </a:solidFill>
-                <a:latin typeface="Calibri" pitchFamily="34" charset="0"/>
-                <a:ea typeface="Calibri" pitchFamily="34" charset="-122"/>
-                <a:cs typeface="Calibri" pitchFamily="34" charset="-120"/>
-              </a:rPr>
-              <a:t>1</a:t>
-            </a:r>
-            <a:endParaRPr lang="en-US" sz="1100" dirty="0"/>
-          </a:p>
-        </p:txBody>
-      </p:sp>
-      <p:sp>
-        <p:nvSpPr>
-          <p:cNvPr id="6" name="Text 4"/>
-          <p:cNvSpPr txBox="1"/>
-          <p:nvPr/>
-        </p:nvSpPr>
-        <p:spPr>
-          <a:xfrm>
-            <a:off x="969264" y="1481328"/>
-            <a:ext cx="6025896" cy="365760"/>
+              <a:rPr lang="en-US" sz="1200" b="1" dirty="0">
+                <a:solidFill>
+                  <a:srgbClr val="B85042"/>
+                </a:solidFill>
+                <a:latin typeface="Calibri" pitchFamily="34" charset="0"/>
+                <a:ea typeface="Calibri" pitchFamily="34" charset="-122"/>
+                <a:cs typeface="Calibri" pitchFamily="34" charset="-120"/>
+              </a:rPr>
+              <a:t>i</a:t>
+            </a:r>
+            <a:endParaRPr lang="en-US" sz="1200" dirty="0"/>
+          </a:p>
+        </p:txBody>
+      </p:sp>
+      <p:sp>
+        <p:nvSpPr>
+          <p:cNvPr id="11" name="Text 9"/>
+          <p:cNvSpPr txBox="1"/>
+          <p:nvPr/>
+        </p:nvSpPr>
+        <p:spPr>
+          <a:xfrm>
+            <a:off x="950976" y="3759581"/>
+            <a:ext cx="5925312" cy="248221"/>
           </a:xfrm>
           <a:prstGeom prst="rect">
             <a:avLst/>
@@ -7320,72 +8825,62 @@
           <a:p>
             <a:pPr indent="0" marL="0">
               <a:lnSpc>
-                <a:spcPct val="125000"/>
-              </a:lnSpc>
-              <a:buNone/>
-            </a:pPr>
-            <a:r>
-              <a:rPr lang="en-US" sz="1150" b="1" dirty="0">
-                <a:solidFill>
-                  <a:srgbClr val="222222"/>
-                </a:solidFill>
-                <a:latin typeface="Calibri" pitchFamily="34" charset="0"/>
-                <a:ea typeface="Calibri" pitchFamily="34" charset="-122"/>
-                <a:cs typeface="Calibri" pitchFamily="34" charset="-120"/>
-              </a:rPr>
-              <a:t>渡す景品</a:t>
-            </a:r>
-            <a:pPr indent="0" marL="0">
-              <a:lnSpc>
-                <a:spcPct val="125000"/>
-              </a:lnSpc>
-              <a:buNone/>
-            </a:pPr>
-            <a:r>
-              <a:rPr lang="en-US" sz="1150" dirty="0">
-                <a:solidFill>
-                  <a:srgbClr val="222222"/>
-                </a:solidFill>
-                <a:latin typeface="Calibri" pitchFamily="34" charset="0"/>
-                <a:ea typeface="Calibri" pitchFamily="34" charset="-122"/>
-                <a:cs typeface="Calibri" pitchFamily="34" charset="-120"/>
-              </a:rPr>
-              <a:t>を選ぶ</a:t>
-            </a:r>
-            <a:endParaRPr lang="en-US" sz="1150" dirty="0"/>
-          </a:p>
-        </p:txBody>
-      </p:sp>
-      <p:sp>
-        <p:nvSpPr>
-          <p:cNvPr id="7" name="Shape 5"/>
+                <a:spcPct val="120000"/>
+              </a:lnSpc>
+              <a:buNone/>
+            </a:pPr>
+            <a:r>
+              <a:rPr lang="en-US" sz="1050" dirty="0">
+                <a:solidFill>
+                  <a:srgbClr val="222222"/>
+                </a:solidFill>
+                <a:latin typeface="Calibri" pitchFamily="34" charset="0"/>
+                <a:ea typeface="Calibri" pitchFamily="34" charset="-122"/>
+                <a:cs typeface="Calibri" pitchFamily="34" charset="-120"/>
+              </a:rPr>
+              <a:t>画面には、その方が回答したブースの数も出ます。目安としてご覧ください。</a:t>
+            </a:r>
+            <a:endParaRPr lang="en-US" sz="1050" dirty="0"/>
+          </a:p>
+        </p:txBody>
+      </p:sp>
+      <p:sp>
+        <p:nvSpPr>
+          <p:cNvPr id="12" name="Shape 10"/>
           <p:cNvSpPr/>
           <p:nvPr/>
         </p:nvSpPr>
         <p:spPr>
           <a:xfrm>
-            <a:off x="566928" y="1956816"/>
-            <a:ext cx="274320" cy="274320"/>
-          </a:xfrm>
-          <a:prstGeom prst="ellipse">
-            <a:avLst/>
+            <a:off x="566928" y="4154107"/>
+            <a:ext cx="6428232" cy="624459"/>
+          </a:xfrm>
+          <a:prstGeom prst="roundRect">
+            <a:avLst>
+              <a:gd name="adj" fmla="val 8786"/>
+            </a:avLst>
           </a:prstGeom>
           <a:solidFill>
-            <a:srgbClr val="B85042"/>
+            <a:srgbClr val="FDF0E6"/>
           </a:solidFill>
-          <a:ln/>
-        </p:spPr>
-      </p:sp>
-      <p:sp>
-        <p:nvSpPr>
-          <p:cNvPr id="8" name="Text 6"/>
-          <p:cNvSpPr txBox="1"/>
-          <p:nvPr/>
-        </p:nvSpPr>
-        <p:spPr>
-          <a:xfrm>
-            <a:off x="566928" y="1956816"/>
-            <a:ext cx="274320" cy="274320"/>
+          <a:ln w="9525">
+            <a:solidFill>
+              <a:srgbClr val="E08A3C"/>
+            </a:solidFill>
+            <a:prstDash val="solid"/>
+          </a:ln>
+        </p:spPr>
+      </p:sp>
+      <p:sp>
+        <p:nvSpPr>
+          <p:cNvPr id="13" name="Text 11"/>
+          <p:cNvSpPr txBox="1"/>
+          <p:nvPr/>
+        </p:nvSpPr>
+        <p:spPr>
+          <a:xfrm>
+            <a:off x="658368" y="4245547"/>
+            <a:ext cx="237744" cy="237744"/>
           </a:xfrm>
           <a:prstGeom prst="rect">
             <a:avLst/>
@@ -7401,30 +8896,30 @@
               <a:buNone/>
             </a:pPr>
             <a:r>
-              <a:rPr lang="en-US" sz="1100" b="1" dirty="0">
-                <a:solidFill>
-                  <a:srgbClr val="FFFFFF"/>
-                </a:solidFill>
-                <a:latin typeface="Calibri" pitchFamily="34" charset="0"/>
-                <a:ea typeface="Calibri" pitchFamily="34" charset="-122"/>
-                <a:cs typeface="Calibri" pitchFamily="34" charset="-120"/>
-              </a:rPr>
-              <a:t>2</a:t>
-            </a:r>
-            <a:endParaRPr lang="en-US" sz="1100" dirty="0"/>
-          </a:p>
-        </p:txBody>
-      </p:sp>
-      <p:sp>
-        <p:nvSpPr>
-          <p:cNvPr id="9" name="Text 7"/>
-          <p:cNvSpPr txBox="1"/>
-          <p:nvPr/>
-        </p:nvSpPr>
-        <p:spPr>
-          <a:xfrm>
-            <a:off x="969264" y="1938528"/>
-            <a:ext cx="6025896" cy="365760"/>
+              <a:rPr lang="en-US" sz="1200" b="1" dirty="0">
+                <a:solidFill>
+                  <a:srgbClr val="C25A17"/>
+                </a:solidFill>
+                <a:latin typeface="Calibri" pitchFamily="34" charset="0"/>
+                <a:ea typeface="Calibri" pitchFamily="34" charset="-122"/>
+                <a:cs typeface="Calibri" pitchFamily="34" charset="-120"/>
+              </a:rPr>
+              <a:t>！</a:t>
+            </a:r>
+            <a:endParaRPr lang="en-US" sz="1200" dirty="0"/>
+          </a:p>
+        </p:txBody>
+      </p:sp>
+      <p:sp>
+        <p:nvSpPr>
+          <p:cNvPr id="14" name="Text 12"/>
+          <p:cNvSpPr txBox="1"/>
+          <p:nvPr/>
+        </p:nvSpPr>
+        <p:spPr>
+          <a:xfrm>
+            <a:off x="950976" y="4263835"/>
+            <a:ext cx="5925312" cy="441579"/>
           </a:xfrm>
           <a:prstGeom prst="rect">
             <a:avLst/>
@@ -7438,424 +8933,28 @@
           <a:p>
             <a:pPr indent="0" marL="0">
               <a:lnSpc>
-                <a:spcPct val="125000"/>
-              </a:lnSpc>
-              <a:buNone/>
-            </a:pPr>
-            <a:r>
-              <a:rPr lang="en-US" sz="1150" dirty="0">
-                <a:solidFill>
-                  <a:srgbClr val="222222"/>
-                </a:solidFill>
-                <a:latin typeface="Calibri" pitchFamily="34" charset="0"/>
-                <a:ea typeface="Calibri" pitchFamily="34" charset="-122"/>
-                <a:cs typeface="Calibri" pitchFamily="34" charset="-120"/>
-              </a:rPr>
-              <a:t>必要ならメモ欄に記入する（例：在庫切れのため別の景品に変更）</a:t>
-            </a:r>
-            <a:endParaRPr lang="en-US" sz="1150" dirty="0"/>
-          </a:p>
-        </p:txBody>
-      </p:sp>
-      <p:sp>
-        <p:nvSpPr>
-          <p:cNvPr id="10" name="Shape 8"/>
-          <p:cNvSpPr/>
-          <p:nvPr/>
-        </p:nvSpPr>
-        <p:spPr>
-          <a:xfrm>
-            <a:off x="566928" y="2414016"/>
-            <a:ext cx="274320" cy="274320"/>
-          </a:xfrm>
-          <a:prstGeom prst="ellipse">
-            <a:avLst/>
-          </a:prstGeom>
-          <a:solidFill>
-            <a:srgbClr val="B85042"/>
-          </a:solidFill>
-          <a:ln/>
-        </p:spPr>
-      </p:sp>
-      <p:sp>
-        <p:nvSpPr>
-          <p:cNvPr id="11" name="Text 9"/>
-          <p:cNvSpPr txBox="1"/>
-          <p:nvPr/>
-        </p:nvSpPr>
-        <p:spPr>
-          <a:xfrm>
-            <a:off x="566928" y="2414016"/>
-            <a:ext cx="274320" cy="274320"/>
-          </a:xfrm>
-          <a:prstGeom prst="rect">
-            <a:avLst/>
-          </a:prstGeom>
-          <a:noFill/>
-          <a:ln/>
-        </p:spPr>
-        <p:txBody>
-          <a:bodyPr wrap="square" lIns="0" tIns="0" rIns="0" bIns="0" rtlCol="0" anchor="ctr"/>
-          <a:lstStyle/>
-          <a:p>
-            <a:pPr algn="ctr" indent="0" marL="0">
-              <a:buNone/>
-            </a:pPr>
-            <a:r>
-              <a:rPr lang="en-US" sz="1100" b="1" dirty="0">
-                <a:solidFill>
-                  <a:srgbClr val="FFFFFF"/>
-                </a:solidFill>
-                <a:latin typeface="Calibri" pitchFamily="34" charset="0"/>
-                <a:ea typeface="Calibri" pitchFamily="34" charset="-122"/>
-                <a:cs typeface="Calibri" pitchFamily="34" charset="-120"/>
-              </a:rPr>
-              <a:t>3</a:t>
-            </a:r>
-            <a:endParaRPr lang="en-US" sz="1100" dirty="0"/>
-          </a:p>
-        </p:txBody>
-      </p:sp>
-      <p:sp>
-        <p:nvSpPr>
-          <p:cNvPr id="12" name="Text 10"/>
-          <p:cNvSpPr txBox="1"/>
-          <p:nvPr/>
-        </p:nvSpPr>
-        <p:spPr>
-          <a:xfrm>
-            <a:off x="969264" y="2395728"/>
-            <a:ext cx="6025896" cy="365760"/>
-          </a:xfrm>
-          <a:prstGeom prst="rect">
-            <a:avLst/>
-          </a:prstGeom>
-          <a:noFill/>
-          <a:ln/>
-        </p:spPr>
-        <p:txBody>
-          <a:bodyPr wrap="square" lIns="0" tIns="0" rIns="0" bIns="0" rtlCol="0" anchor="t"/>
-          <a:lstStyle/>
-          <a:p>
-            <a:pPr indent="0" marL="0">
-              <a:lnSpc>
-                <a:spcPct val="125000"/>
-              </a:lnSpc>
-              <a:buNone/>
-            </a:pPr>
-            <a:r>
-              <a:rPr lang="en-US" sz="1150" b="1" dirty="0">
-                <a:solidFill>
-                  <a:srgbClr val="222222"/>
-                </a:solidFill>
-                <a:latin typeface="Calibri" pitchFamily="34" charset="0"/>
-                <a:ea typeface="Calibri" pitchFamily="34" charset="-122"/>
-                <a:cs typeface="Calibri" pitchFamily="34" charset="-120"/>
-              </a:rPr>
-              <a:t>「交換済みにする」</a:t>
-            </a:r>
-            <a:pPr indent="0" marL="0">
-              <a:lnSpc>
-                <a:spcPct val="125000"/>
-              </a:lnSpc>
-              <a:buNone/>
-            </a:pPr>
-            <a:r>
-              <a:rPr lang="en-US" sz="1150" dirty="0">
-                <a:solidFill>
-                  <a:srgbClr val="222222"/>
-                </a:solidFill>
-                <a:latin typeface="Calibri" pitchFamily="34" charset="0"/>
-                <a:ea typeface="Calibri" pitchFamily="34" charset="-122"/>
-                <a:cs typeface="Calibri" pitchFamily="34" charset="-120"/>
-              </a:rPr>
-              <a:t>を押す</a:t>
-            </a:r>
-            <a:endParaRPr lang="en-US" sz="1150" dirty="0"/>
-          </a:p>
-        </p:txBody>
-      </p:sp>
-      <p:sp>
-        <p:nvSpPr>
-          <p:cNvPr id="13" name="Shape 11"/>
-          <p:cNvSpPr/>
-          <p:nvPr/>
-        </p:nvSpPr>
-        <p:spPr>
-          <a:xfrm>
-            <a:off x="566928" y="2871216"/>
-            <a:ext cx="274320" cy="274320"/>
-          </a:xfrm>
-          <a:prstGeom prst="ellipse">
-            <a:avLst/>
-          </a:prstGeom>
-          <a:solidFill>
-            <a:srgbClr val="B85042"/>
-          </a:solidFill>
-          <a:ln/>
-        </p:spPr>
-      </p:sp>
-      <p:sp>
-        <p:nvSpPr>
-          <p:cNvPr id="14" name="Text 12"/>
-          <p:cNvSpPr txBox="1"/>
-          <p:nvPr/>
-        </p:nvSpPr>
-        <p:spPr>
-          <a:xfrm>
-            <a:off x="566928" y="2871216"/>
-            <a:ext cx="274320" cy="274320"/>
-          </a:xfrm>
-          <a:prstGeom prst="rect">
-            <a:avLst/>
-          </a:prstGeom>
-          <a:noFill/>
-          <a:ln/>
-        </p:spPr>
-        <p:txBody>
-          <a:bodyPr wrap="square" lIns="0" tIns="0" rIns="0" bIns="0" rtlCol="0" anchor="ctr"/>
-          <a:lstStyle/>
-          <a:p>
-            <a:pPr algn="ctr" indent="0" marL="0">
-              <a:buNone/>
-            </a:pPr>
-            <a:r>
-              <a:rPr lang="en-US" sz="1100" b="1" dirty="0">
-                <a:solidFill>
-                  <a:srgbClr val="FFFFFF"/>
-                </a:solidFill>
-                <a:latin typeface="Calibri" pitchFamily="34" charset="0"/>
-                <a:ea typeface="Calibri" pitchFamily="34" charset="-122"/>
-                <a:cs typeface="Calibri" pitchFamily="34" charset="-120"/>
-              </a:rPr>
-              <a:t>4</a:t>
-            </a:r>
-            <a:endParaRPr lang="en-US" sz="1100" dirty="0"/>
-          </a:p>
-        </p:txBody>
-      </p:sp>
-      <p:sp>
-        <p:nvSpPr>
-          <p:cNvPr id="15" name="Text 13"/>
-          <p:cNvSpPr txBox="1"/>
-          <p:nvPr/>
-        </p:nvSpPr>
-        <p:spPr>
-          <a:xfrm>
-            <a:off x="969264" y="2852928"/>
-            <a:ext cx="6025896" cy="365760"/>
-          </a:xfrm>
-          <a:prstGeom prst="rect">
-            <a:avLst/>
-          </a:prstGeom>
-          <a:noFill/>
-          <a:ln/>
-        </p:spPr>
-        <p:txBody>
-          <a:bodyPr wrap="square" lIns="0" tIns="0" rIns="0" bIns="0" rtlCol="0" anchor="t"/>
-          <a:lstStyle/>
-          <a:p>
-            <a:pPr indent="0" marL="0">
-              <a:lnSpc>
-                <a:spcPct val="125000"/>
-              </a:lnSpc>
-              <a:buNone/>
-            </a:pPr>
-            <a:r>
-              <a:rPr lang="en-US" sz="1150" dirty="0">
-                <a:solidFill>
-                  <a:srgbClr val="222222"/>
-                </a:solidFill>
-                <a:latin typeface="Calibri" pitchFamily="34" charset="0"/>
-                <a:ea typeface="Calibri" pitchFamily="34" charset="-122"/>
-                <a:cs typeface="Calibri" pitchFamily="34" charset="-120"/>
-              </a:rPr>
-              <a:t>確認のメッセージが出たら「OK」を押す</a:t>
-            </a:r>
-            <a:endParaRPr lang="en-US" sz="1150" dirty="0"/>
-          </a:p>
-        </p:txBody>
-      </p:sp>
-      <p:sp>
-        <p:nvSpPr>
-          <p:cNvPr id="16" name="Shape 14"/>
-          <p:cNvSpPr/>
-          <p:nvPr/>
-        </p:nvSpPr>
-        <p:spPr>
-          <a:xfrm>
-            <a:off x="566928" y="3328416"/>
-            <a:ext cx="274320" cy="274320"/>
-          </a:xfrm>
-          <a:prstGeom prst="ellipse">
-            <a:avLst/>
-          </a:prstGeom>
-          <a:solidFill>
-            <a:srgbClr val="B85042"/>
-          </a:solidFill>
-          <a:ln/>
-        </p:spPr>
-      </p:sp>
-      <p:sp>
-        <p:nvSpPr>
-          <p:cNvPr id="17" name="Text 15"/>
-          <p:cNvSpPr txBox="1"/>
-          <p:nvPr/>
-        </p:nvSpPr>
-        <p:spPr>
-          <a:xfrm>
-            <a:off x="566928" y="3328416"/>
-            <a:ext cx="274320" cy="274320"/>
-          </a:xfrm>
-          <a:prstGeom prst="rect">
-            <a:avLst/>
-          </a:prstGeom>
-          <a:noFill/>
-          <a:ln/>
-        </p:spPr>
-        <p:txBody>
-          <a:bodyPr wrap="square" lIns="0" tIns="0" rIns="0" bIns="0" rtlCol="0" anchor="ctr"/>
-          <a:lstStyle/>
-          <a:p>
-            <a:pPr algn="ctr" indent="0" marL="0">
-              <a:buNone/>
-            </a:pPr>
-            <a:r>
-              <a:rPr lang="en-US" sz="1100" b="1" dirty="0">
-                <a:solidFill>
-                  <a:srgbClr val="FFFFFF"/>
-                </a:solidFill>
-                <a:latin typeface="Calibri" pitchFamily="34" charset="0"/>
-                <a:ea typeface="Calibri" pitchFamily="34" charset="-122"/>
-                <a:cs typeface="Calibri" pitchFamily="34" charset="-120"/>
-              </a:rPr>
-              <a:t>5</a:t>
-            </a:r>
-            <a:endParaRPr lang="en-US" sz="1100" dirty="0"/>
-          </a:p>
-        </p:txBody>
-      </p:sp>
-      <p:sp>
-        <p:nvSpPr>
-          <p:cNvPr id="18" name="Text 16"/>
-          <p:cNvSpPr txBox="1"/>
-          <p:nvPr/>
-        </p:nvSpPr>
-        <p:spPr>
-          <a:xfrm>
-            <a:off x="969264" y="3310128"/>
-            <a:ext cx="6025896" cy="365760"/>
-          </a:xfrm>
-          <a:prstGeom prst="rect">
-            <a:avLst/>
-          </a:prstGeom>
-          <a:noFill/>
-          <a:ln/>
-        </p:spPr>
-        <p:txBody>
-          <a:bodyPr wrap="square" lIns="0" tIns="0" rIns="0" bIns="0" rtlCol="0" anchor="t"/>
-          <a:lstStyle/>
-          <a:p>
-            <a:pPr indent="0" marL="0">
-              <a:lnSpc>
-                <a:spcPct val="125000"/>
-              </a:lnSpc>
-              <a:buNone/>
-            </a:pPr>
-            <a:r>
-              <a:rPr lang="en-US" sz="1150" dirty="0">
-                <a:solidFill>
-                  <a:srgbClr val="222222"/>
-                </a:solidFill>
-                <a:latin typeface="Calibri" pitchFamily="34" charset="0"/>
-                <a:ea typeface="Calibri" pitchFamily="34" charset="-122"/>
-                <a:cs typeface="Calibri" pitchFamily="34" charset="-120"/>
-              </a:rPr>
-              <a:t>「交換済みとして記録しました（景品名） 残数 ◯個」と出れば完了</a:t>
-            </a:r>
-            <a:endParaRPr lang="en-US" sz="1150" dirty="0"/>
-          </a:p>
-        </p:txBody>
-      </p:sp>
-      <p:sp>
-        <p:nvSpPr>
-          <p:cNvPr id="19" name="Text 17"/>
-          <p:cNvSpPr txBox="1"/>
-          <p:nvPr/>
-        </p:nvSpPr>
-        <p:spPr>
-          <a:xfrm>
-            <a:off x="566928" y="3767328"/>
-            <a:ext cx="6428232" cy="459994"/>
-          </a:xfrm>
-          <a:prstGeom prst="rect">
-            <a:avLst/>
-          </a:prstGeom>
-          <a:noFill/>
-          <a:ln/>
-        </p:spPr>
-        <p:txBody>
-          <a:bodyPr wrap="square" lIns="0" tIns="0" rIns="0" bIns="0" rtlCol="0" anchor="t"/>
-          <a:lstStyle/>
-          <a:p>
-            <a:pPr indent="0" marL="0">
-              <a:lnSpc>
-                <a:spcPct val="125000"/>
-              </a:lnSpc>
-              <a:buNone/>
-            </a:pPr>
-            <a:r>
-              <a:rPr lang="en-US" sz="1100" dirty="0">
-                <a:solidFill>
-                  <a:srgbClr val="222222"/>
-                </a:solidFill>
-                <a:latin typeface="Calibri" pitchFamily="34" charset="0"/>
-                <a:ea typeface="Calibri" pitchFamily="34" charset="-122"/>
-                <a:cs typeface="Calibri" pitchFamily="34" charset="-120"/>
-              </a:rPr>
-              <a:t>次の方を対応するときは、</a:t>
-            </a:r>
-            <a:pPr indent="0" marL="0">
-              <a:lnSpc>
-                <a:spcPct val="125000"/>
-              </a:lnSpc>
-              <a:buNone/>
-            </a:pPr>
-            <a:r>
-              <a:rPr lang="en-US" sz="1100" b="1" dirty="0">
-                <a:solidFill>
-                  <a:srgbClr val="222222"/>
-                </a:solidFill>
-                <a:latin typeface="Calibri" pitchFamily="34" charset="0"/>
-                <a:ea typeface="Calibri" pitchFamily="34" charset="-122"/>
-                <a:cs typeface="Calibri" pitchFamily="34" charset="-120"/>
-              </a:rPr>
-              <a:t>「次の来場者を照会する」</a:t>
-            </a:r>
-            <a:pPr indent="0" marL="0">
-              <a:lnSpc>
-                <a:spcPct val="125000"/>
-              </a:lnSpc>
-              <a:buNone/>
-            </a:pPr>
-            <a:r>
-              <a:rPr lang="en-US" sz="1100" dirty="0">
-                <a:solidFill>
-                  <a:srgbClr val="222222"/>
-                </a:solidFill>
-                <a:latin typeface="Calibri" pitchFamily="34" charset="0"/>
-                <a:ea typeface="Calibri" pitchFamily="34" charset="-122"/>
-                <a:cs typeface="Calibri" pitchFamily="34" charset="-120"/>
-              </a:rPr>
-              <a:t>を押してから、またQRコードを読み取ってください。</a:t>
-            </a:r>
-            <a:endParaRPr lang="en-US" sz="1100" dirty="0"/>
+                <a:spcPct val="120000"/>
+              </a:lnSpc>
+              <a:buNone/>
+            </a:pPr>
+            <a:r>
+              <a:rPr lang="en-US" sz="1050" dirty="0">
+                <a:solidFill>
+                  <a:srgbClr val="222222"/>
+                </a:solidFill>
+                <a:latin typeface="Calibri" pitchFamily="34" charset="0"/>
+                <a:ea typeface="Calibri" pitchFamily="34" charset="-122"/>
+                <a:cs typeface="Calibri" pitchFamily="34" charset="-120"/>
+              </a:rPr>
+              <a:t>在庫がなくなった景品も選べます。実際にお渡ししたものを記録することを優先してください（あとで用意した数を超えた分が分かるようになっています）。</a:t>
+            </a:r>
+            <a:endParaRPr lang="en-US" sz="1050" dirty="0"/>
           </a:p>
         </p:txBody>
       </p:sp>
       <p:pic>
         <p:nvPicPr>
-          <p:cNvPr id="20" name="Image 0" descr="C:\Users\sato\Desktop\enque\docs\images\p-claim-saved.png">    </p:cNvPr>
+          <p:cNvPr id="15" name="Image 0" descr="C:\Users\sato\Desktop\enque\docs\images\p-claim-open.png">    </p:cNvPr>
           <p:cNvPicPr>
             <a:picLocks noChangeAspect="1"/>
           </p:cNvPicPr>
@@ -7869,8 +8968,8 @@
         </p:blipFill>
         <p:spPr>
           <a:xfrm>
-            <a:off x="566928" y="4263898"/>
-            <a:ext cx="6428232" cy="2870972"/>
+            <a:off x="2632342" y="4851718"/>
+            <a:ext cx="2297403" cy="3474720"/>
           </a:xfrm>
           <a:prstGeom prst="rect">
             <a:avLst/>
@@ -7879,13 +8978,13 @@
       </p:pic>
       <p:sp>
         <p:nvSpPr>
-          <p:cNvPr id="21" name="Text 18"/>
-          <p:cNvSpPr txBox="1"/>
-          <p:nvPr/>
-        </p:nvSpPr>
-        <p:spPr>
-          <a:xfrm>
-            <a:off x="566928" y="7189734"/>
+          <p:cNvPr id="16" name="Text 13"/>
+          <p:cNvSpPr txBox="1"/>
+          <p:nvPr/>
+        </p:nvSpPr>
+        <p:spPr>
+          <a:xfrm>
+            <a:off x="566928" y="8381302"/>
             <a:ext cx="6428232" cy="274320"/>
           </a:xfrm>
           <a:prstGeom prst="rect">
@@ -7910,7 +9009,7 @@
                 <a:ea typeface="Calibri" pitchFamily="34" charset="-122"/>
                 <a:cs typeface="Calibri" pitchFamily="34" charset="-120"/>
               </a:rPr>
-              <a:t>「交換済みとして記録しました」のメッセージが出ている画面。</a:t>
+              <a:t>照会結果の画面。「未交換です」の表示と、景品を選ぶプルダウン（残りの数が見えるもの）。</a:t>
             </a:r>
             <a:endParaRPr lang="en-US" sz="950" dirty="0"/>
           </a:p>
@@ -7918,7 +9017,7 @@
       </p:sp>
       <p:sp>
         <p:nvSpPr>
-          <p:cNvPr id="22" name="Text 19"/>
+          <p:cNvPr id="17" name="Text 14"/>
           <p:cNvSpPr txBox="1"/>
           <p:nvPr/>
         </p:nvSpPr>
@@ -8059,7 +9158,7 @@
                 <a:ea typeface="Calibri" pitchFamily="34" charset="-122"/>
                 <a:cs typeface="Calibri" pitchFamily="34" charset="-120"/>
               </a:rPr>
-              <a:t>残りの数を確認する</a:t>
+              <a:t>手順3：交換済みにする</a:t>
             </a:r>
             <a:endParaRPr lang="en-US" sz="2200" dirty="0"/>
           </a:p>
@@ -8067,14 +9166,73 @@
       </p:sp>
       <p:sp>
         <p:nvSpPr>
-          <p:cNvPr id="4" name="Text 2"/>
-          <p:cNvSpPr txBox="1"/>
-          <p:nvPr/>
-        </p:nvSpPr>
-        <p:spPr>
-          <a:xfrm>
-            <a:off x="566928" y="1481328"/>
-            <a:ext cx="6428232" cy="257429"/>
+          <p:cNvPr id="4" name="Shape 2"/>
+          <p:cNvSpPr/>
+          <p:nvPr/>
+        </p:nvSpPr>
+        <p:spPr>
+          <a:xfrm>
+            <a:off x="566928" y="1499616"/>
+            <a:ext cx="274320" cy="274320"/>
+          </a:xfrm>
+          <a:prstGeom prst="ellipse">
+            <a:avLst/>
+          </a:prstGeom>
+          <a:solidFill>
+            <a:srgbClr val="B85042"/>
+          </a:solidFill>
+          <a:ln/>
+        </p:spPr>
+      </p:sp>
+      <p:sp>
+        <p:nvSpPr>
+          <p:cNvPr id="5" name="Text 3"/>
+          <p:cNvSpPr txBox="1"/>
+          <p:nvPr/>
+        </p:nvSpPr>
+        <p:spPr>
+          <a:xfrm>
+            <a:off x="566928" y="1499616"/>
+            <a:ext cx="274320" cy="274320"/>
+          </a:xfrm>
+          <a:prstGeom prst="rect">
+            <a:avLst/>
+          </a:prstGeom>
+          <a:noFill/>
+          <a:ln/>
+        </p:spPr>
+        <p:txBody>
+          <a:bodyPr wrap="square" lIns="0" tIns="0" rIns="0" bIns="0" rtlCol="0" anchor="ctr"/>
+          <a:lstStyle/>
+          <a:p>
+            <a:pPr algn="ctr" indent="0" marL="0">
+              <a:buNone/>
+            </a:pPr>
+            <a:r>
+              <a:rPr lang="en-US" sz="1100" b="1" dirty="0">
+                <a:solidFill>
+                  <a:srgbClr val="FFFFFF"/>
+                </a:solidFill>
+                <a:latin typeface="Calibri" pitchFamily="34" charset="0"/>
+                <a:ea typeface="Calibri" pitchFamily="34" charset="-122"/>
+                <a:cs typeface="Calibri" pitchFamily="34" charset="-120"/>
+              </a:rPr>
+              <a:t>1</a:t>
+            </a:r>
+            <a:endParaRPr lang="en-US" sz="1100" dirty="0"/>
+          </a:p>
+        </p:txBody>
+      </p:sp>
+      <p:sp>
+        <p:nvSpPr>
+          <p:cNvPr id="6" name="Text 4"/>
+          <p:cNvSpPr txBox="1"/>
+          <p:nvPr/>
+        </p:nvSpPr>
+        <p:spPr>
+          <a:xfrm>
+            <a:off x="969264" y="1481328"/>
+            <a:ext cx="6025896" cy="365760"/>
           </a:xfrm>
           <a:prstGeom prst="rect">
             <a:avLst/>
@@ -8093,6 +9251,486 @@
               <a:buNone/>
             </a:pPr>
             <a:r>
+              <a:rPr lang="en-US" sz="1150" b="1" dirty="0">
+                <a:solidFill>
+                  <a:srgbClr val="222222"/>
+                </a:solidFill>
+                <a:latin typeface="Calibri" pitchFamily="34" charset="0"/>
+                <a:ea typeface="Calibri" pitchFamily="34" charset="-122"/>
+                <a:cs typeface="Calibri" pitchFamily="34" charset="-120"/>
+              </a:rPr>
+              <a:t>渡す景品</a:t>
+            </a:r>
+            <a:pPr indent="0" marL="0">
+              <a:lnSpc>
+                <a:spcPct val="125000"/>
+              </a:lnSpc>
+              <a:buNone/>
+            </a:pPr>
+            <a:r>
+              <a:rPr lang="en-US" sz="1150" dirty="0">
+                <a:solidFill>
+                  <a:srgbClr val="222222"/>
+                </a:solidFill>
+                <a:latin typeface="Calibri" pitchFamily="34" charset="0"/>
+                <a:ea typeface="Calibri" pitchFamily="34" charset="-122"/>
+                <a:cs typeface="Calibri" pitchFamily="34" charset="-120"/>
+              </a:rPr>
+              <a:t>を選ぶ</a:t>
+            </a:r>
+            <a:endParaRPr lang="en-US" sz="1150" dirty="0"/>
+          </a:p>
+        </p:txBody>
+      </p:sp>
+      <p:sp>
+        <p:nvSpPr>
+          <p:cNvPr id="7" name="Shape 5"/>
+          <p:cNvSpPr/>
+          <p:nvPr/>
+        </p:nvSpPr>
+        <p:spPr>
+          <a:xfrm>
+            <a:off x="566928" y="1956816"/>
+            <a:ext cx="274320" cy="274320"/>
+          </a:xfrm>
+          <a:prstGeom prst="ellipse">
+            <a:avLst/>
+          </a:prstGeom>
+          <a:solidFill>
+            <a:srgbClr val="B85042"/>
+          </a:solidFill>
+          <a:ln/>
+        </p:spPr>
+      </p:sp>
+      <p:sp>
+        <p:nvSpPr>
+          <p:cNvPr id="8" name="Text 6"/>
+          <p:cNvSpPr txBox="1"/>
+          <p:nvPr/>
+        </p:nvSpPr>
+        <p:spPr>
+          <a:xfrm>
+            <a:off x="566928" y="1956816"/>
+            <a:ext cx="274320" cy="274320"/>
+          </a:xfrm>
+          <a:prstGeom prst="rect">
+            <a:avLst/>
+          </a:prstGeom>
+          <a:noFill/>
+          <a:ln/>
+        </p:spPr>
+        <p:txBody>
+          <a:bodyPr wrap="square" lIns="0" tIns="0" rIns="0" bIns="0" rtlCol="0" anchor="ctr"/>
+          <a:lstStyle/>
+          <a:p>
+            <a:pPr algn="ctr" indent="0" marL="0">
+              <a:buNone/>
+            </a:pPr>
+            <a:r>
+              <a:rPr lang="en-US" sz="1100" b="1" dirty="0">
+                <a:solidFill>
+                  <a:srgbClr val="FFFFFF"/>
+                </a:solidFill>
+                <a:latin typeface="Calibri" pitchFamily="34" charset="0"/>
+                <a:ea typeface="Calibri" pitchFamily="34" charset="-122"/>
+                <a:cs typeface="Calibri" pitchFamily="34" charset="-120"/>
+              </a:rPr>
+              <a:t>2</a:t>
+            </a:r>
+            <a:endParaRPr lang="en-US" sz="1100" dirty="0"/>
+          </a:p>
+        </p:txBody>
+      </p:sp>
+      <p:sp>
+        <p:nvSpPr>
+          <p:cNvPr id="9" name="Text 7"/>
+          <p:cNvSpPr txBox="1"/>
+          <p:nvPr/>
+        </p:nvSpPr>
+        <p:spPr>
+          <a:xfrm>
+            <a:off x="969264" y="1938528"/>
+            <a:ext cx="6025896" cy="365760"/>
+          </a:xfrm>
+          <a:prstGeom prst="rect">
+            <a:avLst/>
+          </a:prstGeom>
+          <a:noFill/>
+          <a:ln/>
+        </p:spPr>
+        <p:txBody>
+          <a:bodyPr wrap="square" lIns="0" tIns="0" rIns="0" bIns="0" rtlCol="0" anchor="t"/>
+          <a:lstStyle/>
+          <a:p>
+            <a:pPr indent="0" marL="0">
+              <a:lnSpc>
+                <a:spcPct val="125000"/>
+              </a:lnSpc>
+              <a:buNone/>
+            </a:pPr>
+            <a:r>
+              <a:rPr lang="en-US" sz="1150" dirty="0">
+                <a:solidFill>
+                  <a:srgbClr val="222222"/>
+                </a:solidFill>
+                <a:latin typeface="Calibri" pitchFamily="34" charset="0"/>
+                <a:ea typeface="Calibri" pitchFamily="34" charset="-122"/>
+                <a:cs typeface="Calibri" pitchFamily="34" charset="-120"/>
+              </a:rPr>
+              <a:t>必要ならメモ欄に記入する（例：在庫切れのため別の景品に変更）</a:t>
+            </a:r>
+            <a:endParaRPr lang="en-US" sz="1150" dirty="0"/>
+          </a:p>
+        </p:txBody>
+      </p:sp>
+      <p:sp>
+        <p:nvSpPr>
+          <p:cNvPr id="10" name="Shape 8"/>
+          <p:cNvSpPr/>
+          <p:nvPr/>
+        </p:nvSpPr>
+        <p:spPr>
+          <a:xfrm>
+            <a:off x="566928" y="2414016"/>
+            <a:ext cx="274320" cy="274320"/>
+          </a:xfrm>
+          <a:prstGeom prst="ellipse">
+            <a:avLst/>
+          </a:prstGeom>
+          <a:solidFill>
+            <a:srgbClr val="B85042"/>
+          </a:solidFill>
+          <a:ln/>
+        </p:spPr>
+      </p:sp>
+      <p:sp>
+        <p:nvSpPr>
+          <p:cNvPr id="11" name="Text 9"/>
+          <p:cNvSpPr txBox="1"/>
+          <p:nvPr/>
+        </p:nvSpPr>
+        <p:spPr>
+          <a:xfrm>
+            <a:off x="566928" y="2414016"/>
+            <a:ext cx="274320" cy="274320"/>
+          </a:xfrm>
+          <a:prstGeom prst="rect">
+            <a:avLst/>
+          </a:prstGeom>
+          <a:noFill/>
+          <a:ln/>
+        </p:spPr>
+        <p:txBody>
+          <a:bodyPr wrap="square" lIns="0" tIns="0" rIns="0" bIns="0" rtlCol="0" anchor="ctr"/>
+          <a:lstStyle/>
+          <a:p>
+            <a:pPr algn="ctr" indent="0" marL="0">
+              <a:buNone/>
+            </a:pPr>
+            <a:r>
+              <a:rPr lang="en-US" sz="1100" b="1" dirty="0">
+                <a:solidFill>
+                  <a:srgbClr val="FFFFFF"/>
+                </a:solidFill>
+                <a:latin typeface="Calibri" pitchFamily="34" charset="0"/>
+                <a:ea typeface="Calibri" pitchFamily="34" charset="-122"/>
+                <a:cs typeface="Calibri" pitchFamily="34" charset="-120"/>
+              </a:rPr>
+              <a:t>3</a:t>
+            </a:r>
+            <a:endParaRPr lang="en-US" sz="1100" dirty="0"/>
+          </a:p>
+        </p:txBody>
+      </p:sp>
+      <p:sp>
+        <p:nvSpPr>
+          <p:cNvPr id="12" name="Text 10"/>
+          <p:cNvSpPr txBox="1"/>
+          <p:nvPr/>
+        </p:nvSpPr>
+        <p:spPr>
+          <a:xfrm>
+            <a:off x="969264" y="2395728"/>
+            <a:ext cx="6025896" cy="365760"/>
+          </a:xfrm>
+          <a:prstGeom prst="rect">
+            <a:avLst/>
+          </a:prstGeom>
+          <a:noFill/>
+          <a:ln/>
+        </p:spPr>
+        <p:txBody>
+          <a:bodyPr wrap="square" lIns="0" tIns="0" rIns="0" bIns="0" rtlCol="0" anchor="t"/>
+          <a:lstStyle/>
+          <a:p>
+            <a:pPr indent="0" marL="0">
+              <a:lnSpc>
+                <a:spcPct val="125000"/>
+              </a:lnSpc>
+              <a:buNone/>
+            </a:pPr>
+            <a:r>
+              <a:rPr lang="en-US" sz="1150" b="1" dirty="0">
+                <a:solidFill>
+                  <a:srgbClr val="222222"/>
+                </a:solidFill>
+                <a:latin typeface="Calibri" pitchFamily="34" charset="0"/>
+                <a:ea typeface="Calibri" pitchFamily="34" charset="-122"/>
+                <a:cs typeface="Calibri" pitchFamily="34" charset="-120"/>
+              </a:rPr>
+              <a:t>「交換済みにする」</a:t>
+            </a:r>
+            <a:pPr indent="0" marL="0">
+              <a:lnSpc>
+                <a:spcPct val="125000"/>
+              </a:lnSpc>
+              <a:buNone/>
+            </a:pPr>
+            <a:r>
+              <a:rPr lang="en-US" sz="1150" dirty="0">
+                <a:solidFill>
+                  <a:srgbClr val="222222"/>
+                </a:solidFill>
+                <a:latin typeface="Calibri" pitchFamily="34" charset="0"/>
+                <a:ea typeface="Calibri" pitchFamily="34" charset="-122"/>
+                <a:cs typeface="Calibri" pitchFamily="34" charset="-120"/>
+              </a:rPr>
+              <a:t>を押す</a:t>
+            </a:r>
+            <a:endParaRPr lang="en-US" sz="1150" dirty="0"/>
+          </a:p>
+        </p:txBody>
+      </p:sp>
+      <p:sp>
+        <p:nvSpPr>
+          <p:cNvPr id="13" name="Shape 11"/>
+          <p:cNvSpPr/>
+          <p:nvPr/>
+        </p:nvSpPr>
+        <p:spPr>
+          <a:xfrm>
+            <a:off x="566928" y="2871216"/>
+            <a:ext cx="274320" cy="274320"/>
+          </a:xfrm>
+          <a:prstGeom prst="ellipse">
+            <a:avLst/>
+          </a:prstGeom>
+          <a:solidFill>
+            <a:srgbClr val="B85042"/>
+          </a:solidFill>
+          <a:ln/>
+        </p:spPr>
+      </p:sp>
+      <p:sp>
+        <p:nvSpPr>
+          <p:cNvPr id="14" name="Text 12"/>
+          <p:cNvSpPr txBox="1"/>
+          <p:nvPr/>
+        </p:nvSpPr>
+        <p:spPr>
+          <a:xfrm>
+            <a:off x="566928" y="2871216"/>
+            <a:ext cx="274320" cy="274320"/>
+          </a:xfrm>
+          <a:prstGeom prst="rect">
+            <a:avLst/>
+          </a:prstGeom>
+          <a:noFill/>
+          <a:ln/>
+        </p:spPr>
+        <p:txBody>
+          <a:bodyPr wrap="square" lIns="0" tIns="0" rIns="0" bIns="0" rtlCol="0" anchor="ctr"/>
+          <a:lstStyle/>
+          <a:p>
+            <a:pPr algn="ctr" indent="0" marL="0">
+              <a:buNone/>
+            </a:pPr>
+            <a:r>
+              <a:rPr lang="en-US" sz="1100" b="1" dirty="0">
+                <a:solidFill>
+                  <a:srgbClr val="FFFFFF"/>
+                </a:solidFill>
+                <a:latin typeface="Calibri" pitchFamily="34" charset="0"/>
+                <a:ea typeface="Calibri" pitchFamily="34" charset="-122"/>
+                <a:cs typeface="Calibri" pitchFamily="34" charset="-120"/>
+              </a:rPr>
+              <a:t>4</a:t>
+            </a:r>
+            <a:endParaRPr lang="en-US" sz="1100" dirty="0"/>
+          </a:p>
+        </p:txBody>
+      </p:sp>
+      <p:sp>
+        <p:nvSpPr>
+          <p:cNvPr id="15" name="Text 13"/>
+          <p:cNvSpPr txBox="1"/>
+          <p:nvPr/>
+        </p:nvSpPr>
+        <p:spPr>
+          <a:xfrm>
+            <a:off x="969264" y="2852928"/>
+            <a:ext cx="6025896" cy="365760"/>
+          </a:xfrm>
+          <a:prstGeom prst="rect">
+            <a:avLst/>
+          </a:prstGeom>
+          <a:noFill/>
+          <a:ln/>
+        </p:spPr>
+        <p:txBody>
+          <a:bodyPr wrap="square" lIns="0" tIns="0" rIns="0" bIns="0" rtlCol="0" anchor="t"/>
+          <a:lstStyle/>
+          <a:p>
+            <a:pPr indent="0" marL="0">
+              <a:lnSpc>
+                <a:spcPct val="125000"/>
+              </a:lnSpc>
+              <a:buNone/>
+            </a:pPr>
+            <a:r>
+              <a:rPr lang="en-US" sz="1150" dirty="0">
+                <a:solidFill>
+                  <a:srgbClr val="222222"/>
+                </a:solidFill>
+                <a:latin typeface="Calibri" pitchFamily="34" charset="0"/>
+                <a:ea typeface="Calibri" pitchFamily="34" charset="-122"/>
+                <a:cs typeface="Calibri" pitchFamily="34" charset="-120"/>
+              </a:rPr>
+              <a:t>確認のメッセージが出たら「OK」を押す</a:t>
+            </a:r>
+            <a:endParaRPr lang="en-US" sz="1150" dirty="0"/>
+          </a:p>
+        </p:txBody>
+      </p:sp>
+      <p:sp>
+        <p:nvSpPr>
+          <p:cNvPr id="16" name="Shape 14"/>
+          <p:cNvSpPr/>
+          <p:nvPr/>
+        </p:nvSpPr>
+        <p:spPr>
+          <a:xfrm>
+            <a:off x="566928" y="3328416"/>
+            <a:ext cx="274320" cy="274320"/>
+          </a:xfrm>
+          <a:prstGeom prst="ellipse">
+            <a:avLst/>
+          </a:prstGeom>
+          <a:solidFill>
+            <a:srgbClr val="B85042"/>
+          </a:solidFill>
+          <a:ln/>
+        </p:spPr>
+      </p:sp>
+      <p:sp>
+        <p:nvSpPr>
+          <p:cNvPr id="17" name="Text 15"/>
+          <p:cNvSpPr txBox="1"/>
+          <p:nvPr/>
+        </p:nvSpPr>
+        <p:spPr>
+          <a:xfrm>
+            <a:off x="566928" y="3328416"/>
+            <a:ext cx="274320" cy="274320"/>
+          </a:xfrm>
+          <a:prstGeom prst="rect">
+            <a:avLst/>
+          </a:prstGeom>
+          <a:noFill/>
+          <a:ln/>
+        </p:spPr>
+        <p:txBody>
+          <a:bodyPr wrap="square" lIns="0" tIns="0" rIns="0" bIns="0" rtlCol="0" anchor="ctr"/>
+          <a:lstStyle/>
+          <a:p>
+            <a:pPr algn="ctr" indent="0" marL="0">
+              <a:buNone/>
+            </a:pPr>
+            <a:r>
+              <a:rPr lang="en-US" sz="1100" b="1" dirty="0">
+                <a:solidFill>
+                  <a:srgbClr val="FFFFFF"/>
+                </a:solidFill>
+                <a:latin typeface="Calibri" pitchFamily="34" charset="0"/>
+                <a:ea typeface="Calibri" pitchFamily="34" charset="-122"/>
+                <a:cs typeface="Calibri" pitchFamily="34" charset="-120"/>
+              </a:rPr>
+              <a:t>5</a:t>
+            </a:r>
+            <a:endParaRPr lang="en-US" sz="1100" dirty="0"/>
+          </a:p>
+        </p:txBody>
+      </p:sp>
+      <p:sp>
+        <p:nvSpPr>
+          <p:cNvPr id="18" name="Text 16"/>
+          <p:cNvSpPr txBox="1"/>
+          <p:nvPr/>
+        </p:nvSpPr>
+        <p:spPr>
+          <a:xfrm>
+            <a:off x="969264" y="3310128"/>
+            <a:ext cx="6025896" cy="365760"/>
+          </a:xfrm>
+          <a:prstGeom prst="rect">
+            <a:avLst/>
+          </a:prstGeom>
+          <a:noFill/>
+          <a:ln/>
+        </p:spPr>
+        <p:txBody>
+          <a:bodyPr wrap="square" lIns="0" tIns="0" rIns="0" bIns="0" rtlCol="0" anchor="t"/>
+          <a:lstStyle/>
+          <a:p>
+            <a:pPr indent="0" marL="0">
+              <a:lnSpc>
+                <a:spcPct val="125000"/>
+              </a:lnSpc>
+              <a:buNone/>
+            </a:pPr>
+            <a:r>
+              <a:rPr lang="en-US" sz="1150" dirty="0">
+                <a:solidFill>
+                  <a:srgbClr val="222222"/>
+                </a:solidFill>
+                <a:latin typeface="Calibri" pitchFamily="34" charset="0"/>
+                <a:ea typeface="Calibri" pitchFamily="34" charset="-122"/>
+                <a:cs typeface="Calibri" pitchFamily="34" charset="-120"/>
+              </a:rPr>
+              <a:t>「交換済みとして記録しました（景品名） 残数 ◯個」と出れば完了</a:t>
+            </a:r>
+            <a:endParaRPr lang="en-US" sz="1150" dirty="0"/>
+          </a:p>
+        </p:txBody>
+      </p:sp>
+      <p:sp>
+        <p:nvSpPr>
+          <p:cNvPr id="19" name="Text 17"/>
+          <p:cNvSpPr txBox="1"/>
+          <p:nvPr/>
+        </p:nvSpPr>
+        <p:spPr>
+          <a:xfrm>
+            <a:off x="566928" y="3767328"/>
+            <a:ext cx="6428232" cy="459994"/>
+          </a:xfrm>
+          <a:prstGeom prst="rect">
+            <a:avLst/>
+          </a:prstGeom>
+          <a:noFill/>
+          <a:ln/>
+        </p:spPr>
+        <p:txBody>
+          <a:bodyPr wrap="square" lIns="0" tIns="0" rIns="0" bIns="0" rtlCol="0" anchor="t"/>
+          <a:lstStyle/>
+          <a:p>
+            <a:pPr indent="0" marL="0">
+              <a:lnSpc>
+                <a:spcPct val="125000"/>
+              </a:lnSpc>
+              <a:buNone/>
+            </a:pPr>
+            <a:r>
               <a:rPr lang="en-US" sz="1100" dirty="0">
                 <a:solidFill>
                   <a:srgbClr val="222222"/>
@@ -8101,7 +9739,7 @@
                 <a:ea typeface="Calibri" pitchFamily="34" charset="-122"/>
                 <a:cs typeface="Calibri" pitchFamily="34" charset="-120"/>
               </a:rPr>
-              <a:t>照会画面の下に、</a:t>
+              <a:t>次の方を対応するときは、</a:t>
             </a:r>
             <a:pPr indent="0" marL="0">
               <a:lnSpc>
@@ -8118,7 +9756,7 @@
                 <a:ea typeface="Calibri" pitchFamily="34" charset="-122"/>
                 <a:cs typeface="Calibri" pitchFamily="34" charset="-120"/>
               </a:rPr>
-              <a:t>景品の残数</a:t>
+              <a:t>「次の来場者を照会する」</a:t>
             </a:r>
             <a:pPr indent="0" marL="0">
               <a:lnSpc>
@@ -8135,363 +9773,15 @@
                 <a:ea typeface="Calibri" pitchFamily="34" charset="-122"/>
                 <a:cs typeface="Calibri" pitchFamily="34" charset="-120"/>
               </a:rPr>
-              <a:t>の表があります。</a:t>
+              <a:t>を押してから、またQRコードを読み取ってください。</a:t>
             </a:r>
             <a:endParaRPr lang="en-US" sz="1100" dirty="0"/>
-          </a:p>
-        </p:txBody>
-      </p:sp>
-      <p:sp>
-        <p:nvSpPr>
-          <p:cNvPr id="5" name="Text 3"/>
-          <p:cNvSpPr txBox="1"/>
-          <p:nvPr/>
-        </p:nvSpPr>
-        <p:spPr>
-          <a:xfrm>
-            <a:off x="713232" y="1775333"/>
-            <a:ext cx="6281928" cy="257429"/>
-          </a:xfrm>
-          <a:prstGeom prst="rect">
-            <a:avLst/>
-          </a:prstGeom>
-          <a:noFill/>
-          <a:ln/>
-        </p:spPr>
-        <p:txBody>
-          <a:bodyPr wrap="square" lIns="0" tIns="0" rIns="0" bIns="0" rtlCol="0" anchor="t"/>
-          <a:lstStyle/>
-          <a:p>
-            <a:pPr marL="342900" indent="-342900">
-              <a:lnSpc>
-                <a:spcPct val="125000"/>
-              </a:lnSpc>
-              <a:buSzPct val="100000"/>
-              <a:buChar char="●"/>
-            </a:pPr>
-            <a:r>
-              <a:rPr lang="en-US" sz="1100" b="1" dirty="0">
-                <a:solidFill>
-                  <a:srgbClr val="222222"/>
-                </a:solidFill>
-                <a:latin typeface="Calibri" pitchFamily="34" charset="0"/>
-                <a:ea typeface="Calibri" pitchFamily="34" charset="-122"/>
-                <a:cs typeface="Calibri" pitchFamily="34" charset="-120"/>
-              </a:rPr>
-              <a:t>用意</a:t>
-            </a:r>
-            <a:pPr indent="0" marL="0">
-              <a:lnSpc>
-                <a:spcPct val="125000"/>
-              </a:lnSpc>
-              <a:buNone/>
-            </a:pPr>
-            <a:r>
-              <a:rPr lang="en-US" sz="1100" dirty="0">
-                <a:solidFill>
-                  <a:srgbClr val="222222"/>
-                </a:solidFill>
-                <a:latin typeface="Calibri" pitchFamily="34" charset="0"/>
-                <a:ea typeface="Calibri" pitchFamily="34" charset="-122"/>
-                <a:cs typeface="Calibri" pitchFamily="34" charset="-120"/>
-              </a:rPr>
-              <a:t>：事務局が登録した数量</a:t>
-            </a:r>
-            <a:endParaRPr lang="en-US" sz="1100" dirty="0"/>
-          </a:p>
-        </p:txBody>
-      </p:sp>
-      <p:sp>
-        <p:nvSpPr>
-          <p:cNvPr id="6" name="Text 4"/>
-          <p:cNvSpPr txBox="1"/>
-          <p:nvPr/>
-        </p:nvSpPr>
-        <p:spPr>
-          <a:xfrm>
-            <a:off x="713232" y="2051050"/>
-            <a:ext cx="6281928" cy="257429"/>
-          </a:xfrm>
-          <a:prstGeom prst="rect">
-            <a:avLst/>
-          </a:prstGeom>
-          <a:noFill/>
-          <a:ln/>
-        </p:spPr>
-        <p:txBody>
-          <a:bodyPr wrap="square" lIns="0" tIns="0" rIns="0" bIns="0" rtlCol="0" anchor="t"/>
-          <a:lstStyle/>
-          <a:p>
-            <a:pPr marL="342900" indent="-342900">
-              <a:lnSpc>
-                <a:spcPct val="125000"/>
-              </a:lnSpc>
-              <a:buSzPct val="100000"/>
-              <a:buChar char="●"/>
-            </a:pPr>
-            <a:r>
-              <a:rPr lang="en-US" sz="1100" b="1" dirty="0">
-                <a:solidFill>
-                  <a:srgbClr val="222222"/>
-                </a:solidFill>
-                <a:latin typeface="Calibri" pitchFamily="34" charset="0"/>
-                <a:ea typeface="Calibri" pitchFamily="34" charset="-122"/>
-                <a:cs typeface="Calibri" pitchFamily="34" charset="-120"/>
-              </a:rPr>
-              <a:t>交換済み</a:t>
-            </a:r>
-            <a:pPr indent="0" marL="0">
-              <a:lnSpc>
-                <a:spcPct val="125000"/>
-              </a:lnSpc>
-              <a:buNone/>
-            </a:pPr>
-            <a:r>
-              <a:rPr lang="en-US" sz="1100" dirty="0">
-                <a:solidFill>
-                  <a:srgbClr val="222222"/>
-                </a:solidFill>
-                <a:latin typeface="Calibri" pitchFamily="34" charset="0"/>
-                <a:ea typeface="Calibri" pitchFamily="34" charset="-122"/>
-                <a:cs typeface="Calibri" pitchFamily="34" charset="-120"/>
-              </a:rPr>
-              <a:t>：これまでにお渡しした数</a:t>
-            </a:r>
-            <a:endParaRPr lang="en-US" sz="1100" dirty="0"/>
-          </a:p>
-        </p:txBody>
-      </p:sp>
-      <p:sp>
-        <p:nvSpPr>
-          <p:cNvPr id="7" name="Text 5"/>
-          <p:cNvSpPr txBox="1"/>
-          <p:nvPr/>
-        </p:nvSpPr>
-        <p:spPr>
-          <a:xfrm>
-            <a:off x="713232" y="2326767"/>
-            <a:ext cx="6281928" cy="257429"/>
-          </a:xfrm>
-          <a:prstGeom prst="rect">
-            <a:avLst/>
-          </a:prstGeom>
-          <a:noFill/>
-          <a:ln/>
-        </p:spPr>
-        <p:txBody>
-          <a:bodyPr wrap="square" lIns="0" tIns="0" rIns="0" bIns="0" rtlCol="0" anchor="t"/>
-          <a:lstStyle/>
-          <a:p>
-            <a:pPr marL="342900" indent="-342900">
-              <a:lnSpc>
-                <a:spcPct val="125000"/>
-              </a:lnSpc>
-              <a:buSzPct val="100000"/>
-              <a:buChar char="●"/>
-            </a:pPr>
-            <a:r>
-              <a:rPr lang="en-US" sz="1100" b="1" dirty="0">
-                <a:solidFill>
-                  <a:srgbClr val="222222"/>
-                </a:solidFill>
-                <a:latin typeface="Calibri" pitchFamily="34" charset="0"/>
-                <a:ea typeface="Calibri" pitchFamily="34" charset="-122"/>
-                <a:cs typeface="Calibri" pitchFamily="34" charset="-120"/>
-              </a:rPr>
-              <a:t>残り</a:t>
-            </a:r>
-            <a:pPr indent="0" marL="0">
-              <a:lnSpc>
-                <a:spcPct val="125000"/>
-              </a:lnSpc>
-              <a:buNone/>
-            </a:pPr>
-            <a:r>
-              <a:rPr lang="en-US" sz="1100" dirty="0">
-                <a:solidFill>
-                  <a:srgbClr val="222222"/>
-                </a:solidFill>
-                <a:latin typeface="Calibri" pitchFamily="34" charset="0"/>
-                <a:ea typeface="Calibri" pitchFamily="34" charset="-122"/>
-                <a:cs typeface="Calibri" pitchFamily="34" charset="-120"/>
-              </a:rPr>
-              <a:t>：残っている数（「—」は数量を管理していない景品）</a:t>
-            </a:r>
-            <a:endParaRPr lang="en-US" sz="1100" dirty="0"/>
-          </a:p>
-        </p:txBody>
-      </p:sp>
-      <p:sp>
-        <p:nvSpPr>
-          <p:cNvPr id="8" name="Text 6"/>
-          <p:cNvSpPr txBox="1"/>
-          <p:nvPr/>
-        </p:nvSpPr>
-        <p:spPr>
-          <a:xfrm>
-            <a:off x="713232" y="2602484"/>
-            <a:ext cx="6281928" cy="257429"/>
-          </a:xfrm>
-          <a:prstGeom prst="rect">
-            <a:avLst/>
-          </a:prstGeom>
-          <a:noFill/>
-          <a:ln/>
-        </p:spPr>
-        <p:txBody>
-          <a:bodyPr wrap="square" lIns="0" tIns="0" rIns="0" bIns="0" rtlCol="0" anchor="t"/>
-          <a:lstStyle/>
-          <a:p>
-            <a:pPr marL="342900" indent="-342900">
-              <a:lnSpc>
-                <a:spcPct val="125000"/>
-              </a:lnSpc>
-              <a:buSzPct val="100000"/>
-              <a:buChar char="●"/>
-            </a:pPr>
-            <a:r>
-              <a:rPr lang="en-US" sz="1100" b="1" dirty="0">
-                <a:solidFill>
-                  <a:srgbClr val="222222"/>
-                </a:solidFill>
-                <a:latin typeface="Calibri" pitchFamily="34" charset="0"/>
-                <a:ea typeface="Calibri" pitchFamily="34" charset="-122"/>
-                <a:cs typeface="Calibri" pitchFamily="34" charset="-120"/>
-              </a:rPr>
-              <a:t>超過</a:t>
-            </a:r>
-            <a:pPr indent="0" marL="0">
-              <a:lnSpc>
-                <a:spcPct val="125000"/>
-              </a:lnSpc>
-              <a:buNone/>
-            </a:pPr>
-            <a:r>
-              <a:rPr lang="en-US" sz="1100" dirty="0">
-                <a:solidFill>
-                  <a:srgbClr val="222222"/>
-                </a:solidFill>
-                <a:latin typeface="Calibri" pitchFamily="34" charset="0"/>
-                <a:ea typeface="Calibri" pitchFamily="34" charset="-122"/>
-                <a:cs typeface="Calibri" pitchFamily="34" charset="-120"/>
-              </a:rPr>
-              <a:t>：用意した数を超えてお渡しした数</a:t>
-            </a:r>
-            <a:endParaRPr lang="en-US" sz="1100" dirty="0"/>
-          </a:p>
-        </p:txBody>
-      </p:sp>
-      <p:sp>
-        <p:nvSpPr>
-          <p:cNvPr id="9" name="Shape 7"/>
-          <p:cNvSpPr/>
-          <p:nvPr/>
-        </p:nvSpPr>
-        <p:spPr>
-          <a:xfrm>
-            <a:off x="566928" y="2878201"/>
-            <a:ext cx="6428232" cy="431102"/>
-          </a:xfrm>
-          <a:prstGeom prst="roundRect">
-            <a:avLst>
-              <a:gd name="adj" fmla="val 12726"/>
-            </a:avLst>
-          </a:prstGeom>
-          <a:solidFill>
-            <a:srgbClr val="FAEAE7"/>
-          </a:solidFill>
-          <a:ln w="9525">
-            <a:solidFill>
-              <a:srgbClr val="B85042"/>
-            </a:solidFill>
-            <a:prstDash val="solid"/>
-          </a:ln>
-        </p:spPr>
-      </p:sp>
-      <p:sp>
-        <p:nvSpPr>
-          <p:cNvPr id="10" name="Text 8"/>
-          <p:cNvSpPr txBox="1"/>
-          <p:nvPr/>
-        </p:nvSpPr>
-        <p:spPr>
-          <a:xfrm>
-            <a:off x="658368" y="2969641"/>
-            <a:ext cx="237744" cy="237744"/>
-          </a:xfrm>
-          <a:prstGeom prst="rect">
-            <a:avLst/>
-          </a:prstGeom>
-          <a:noFill/>
-          <a:ln/>
-        </p:spPr>
-        <p:txBody>
-          <a:bodyPr wrap="square" lIns="0" tIns="0" rIns="0" bIns="0" rtlCol="0" anchor="ctr"/>
-          <a:lstStyle/>
-          <a:p>
-            <a:pPr algn="ctr" indent="0" marL="0">
-              <a:buNone/>
-            </a:pPr>
-            <a:r>
-              <a:rPr lang="en-US" sz="1200" b="1" dirty="0">
-                <a:solidFill>
-                  <a:srgbClr val="B85042"/>
-                </a:solidFill>
-                <a:latin typeface="Calibri" pitchFamily="34" charset="0"/>
-                <a:ea typeface="Calibri" pitchFamily="34" charset="-122"/>
-                <a:cs typeface="Calibri" pitchFamily="34" charset="-120"/>
-              </a:rPr>
-              <a:t>i</a:t>
-            </a:r>
-            <a:endParaRPr lang="en-US" sz="1200" dirty="0"/>
-          </a:p>
-        </p:txBody>
-      </p:sp>
-      <p:sp>
-        <p:nvSpPr>
-          <p:cNvPr id="11" name="Text 9"/>
-          <p:cNvSpPr txBox="1"/>
-          <p:nvPr/>
-        </p:nvSpPr>
-        <p:spPr>
-          <a:xfrm>
-            <a:off x="950976" y="2987929"/>
-            <a:ext cx="5925312" cy="248221"/>
-          </a:xfrm>
-          <a:prstGeom prst="rect">
-            <a:avLst/>
-          </a:prstGeom>
-          <a:noFill/>
-          <a:ln/>
-        </p:spPr>
-        <p:txBody>
-          <a:bodyPr wrap="square" lIns="0" tIns="0" rIns="0" bIns="0" rtlCol="0" anchor="t"/>
-          <a:lstStyle/>
-          <a:p>
-            <a:pPr indent="0" marL="0">
-              <a:lnSpc>
-                <a:spcPct val="120000"/>
-              </a:lnSpc>
-              <a:buNone/>
-            </a:pPr>
-            <a:r>
-              <a:rPr lang="en-US" sz="1050" dirty="0">
-                <a:solidFill>
-                  <a:srgbClr val="222222"/>
-                </a:solidFill>
-                <a:latin typeface="Calibri" pitchFamily="34" charset="0"/>
-                <a:ea typeface="Calibri" pitchFamily="34" charset="-122"/>
-                <a:cs typeface="Calibri" pitchFamily="34" charset="-120"/>
-              </a:rPr>
-              <a:t>残りが少なくなってきたら、早めに事務局へお知らせください。</a:t>
-            </a:r>
-            <a:endParaRPr lang="en-US" sz="1050" dirty="0"/>
           </a:p>
         </p:txBody>
       </p:sp>
       <p:pic>
         <p:nvPicPr>
-          <p:cNvPr id="12" name="Image 0" descr="C:\Users\sato\Desktop\enque\docs\images\p-stock.png">    </p:cNvPr>
+          <p:cNvPr id="20" name="Image 0" descr="C:\Users\sato\Desktop\enque\docs\images\p-claim-saved.png">    </p:cNvPr>
           <p:cNvPicPr>
             <a:picLocks noChangeAspect="1"/>
           </p:cNvPicPr>
@@ -8505,8 +9795,8 @@
         </p:blipFill>
         <p:spPr>
           <a:xfrm>
-            <a:off x="2018596" y="3382455"/>
-            <a:ext cx="3524896" cy="3474720"/>
+            <a:off x="566928" y="4263898"/>
+            <a:ext cx="6428232" cy="2870972"/>
           </a:xfrm>
           <a:prstGeom prst="rect">
             <a:avLst/>
@@ -8515,13 +9805,13 @@
       </p:pic>
       <p:sp>
         <p:nvSpPr>
-          <p:cNvPr id="13" name="Text 10"/>
-          <p:cNvSpPr txBox="1"/>
-          <p:nvPr/>
-        </p:nvSpPr>
-        <p:spPr>
-          <a:xfrm>
-            <a:off x="566928" y="6912039"/>
+          <p:cNvPr id="21" name="Text 18"/>
+          <p:cNvSpPr txBox="1"/>
+          <p:nvPr/>
+        </p:nvSpPr>
+        <p:spPr>
+          <a:xfrm>
+            <a:off x="566928" y="7189734"/>
             <a:ext cx="6428232" cy="274320"/>
           </a:xfrm>
           <a:prstGeom prst="rect">
@@ -8546,7 +9836,7 @@
                 <a:ea typeface="Calibri" pitchFamily="34" charset="-122"/>
                 <a:cs typeface="Calibri" pitchFamily="34" charset="-120"/>
               </a:rPr>
-              <a:t>照会画面の下部にある「景品の残数」の表。</a:t>
+              <a:t>「交換済みとして記録しました」のメッセージが出ている画面。</a:t>
             </a:r>
             <a:endParaRPr lang="en-US" sz="950" dirty="0"/>
           </a:p>
@@ -8554,7 +9844,7 @@
       </p:sp>
       <p:sp>
         <p:nvSpPr>
-          <p:cNvPr id="14" name="Text 11"/>
+          <p:cNvPr id="22" name="Text 19"/>
           <p:cNvSpPr txBox="1"/>
           <p:nvPr/>
         </p:nvSpPr>

--- a/docs/manual-reception.pptx
+++ b/docs/manual-reception.pptx
@@ -16,9 +16,10 @@
     <p:sldId id="264" r:id="rId10"/>
     <p:sldId id="265" r:id="rId11"/>
     <p:sldId id="266" r:id="rId12"/>
+    <p:sldId id="267" r:id="rId13"/>
   </p:sldIdLst>
   <p:notesMasterIdLst>
-    <p:notesMasterId r:id="rId13"/>
+    <p:notesMasterId r:id="rId14"/>
   </p:notesMasterIdLst>
   <p:sldSz cx="7562088" cy="10689336"/>
   <p:notesSz cx="10689336" cy="7562088"/>
@@ -712,6 +713,94 @@
             <a:fld id="{F7021451-1387-4CA6-816F-3879F97B5CBC}" type="slidenum">
               <a:rPr lang="en-US"/>
               <a:t>11</a:t>
+            </a:fld>
+            <a:endParaRPr lang="en-US"/>
+          </a:p>
+        </p:txBody>
+      </p:sp>
+    </p:spTree>
+    <p:extLst>
+      <p:ext uri="{BB962C8B-B14F-4D97-AF65-F5344CB8AC3E}">
+        <p14:creationId xmlns:p14="http://schemas.microsoft.com/office/powerpoint/2010/main" val="1024086991"/>
+      </p:ext>
+    </p:extLst>
+  </p:cSld>
+  <p:clrMapOvr>
+    <a:masterClrMapping/>
+  </p:clrMapOvr>
+</p:notes>
+</file>
+
+<file path=ppt/notesSlides/notesSlide12.xml><?xml version="1.0" encoding="utf-8"?>
+<p:notes xmlns:a="http://schemas.openxmlformats.org/drawingml/2006/main" xmlns:r="http://schemas.openxmlformats.org/officeDocument/2006/relationships" xmlns:p="http://schemas.openxmlformats.org/presentationml/2006/main">
+  <p:cSld>
+    <p:spTree>
+      <p:nvGrpSpPr>
+        <p:cNvPr id="1" name=""/>
+        <p:cNvGrpSpPr/>
+        <p:nvPr/>
+      </p:nvGrpSpPr>
+      <p:grpSpPr>
+        <a:xfrm>
+          <a:off x="0" y="0"/>
+          <a:ext cx="0" cy="0"/>
+          <a:chOff x="0" y="0"/>
+          <a:chExt cx="0" cy="0"/>
+        </a:xfrm>
+      </p:grpSpPr>
+      <p:sp>
+        <p:nvSpPr>
+          <p:cNvPr id="2" name="Slide Image Placeholder 1"/>
+          <p:cNvSpPr>
+            <a:spLocks noGrp="1" noRot="1" noChangeAspect="1"/>
+          </p:cNvSpPr>
+          <p:nvPr>
+            <p:ph type="sldImg"/>
+          </p:nvPr>
+        </p:nvSpPr>
+        <p:spPr/>
+      </p:sp>
+      <p:sp>
+        <p:nvSpPr>
+          <p:cNvPr id="3" name="Notes Placeholder 2"/>
+          <p:cNvSpPr>
+            <a:spLocks noGrp="1"/>
+          </p:cNvSpPr>
+          <p:nvPr>
+            <p:ph type="body" idx="1"/>
+          </p:nvPr>
+        </p:nvSpPr>
+        <p:spPr/>
+        <p:txBody>
+          <a:bodyPr/>
+          <a:lstStyle/>
+          <a:p>
+            <a:r>
+              <a:rPr lang="en-US" dirty="0"/>
+              <a:t/>
+            </a:r>
+            <a:endParaRPr lang="en-US" dirty="0"/>
+          </a:p>
+        </p:txBody>
+      </p:sp>
+      <p:sp>
+        <p:nvSpPr>
+          <p:cNvPr id="4" name="Slide Number Placeholder 3"/>
+          <p:cNvSpPr>
+            <a:spLocks noGrp="1"/>
+          </p:cNvSpPr>
+          <p:nvPr>
+            <p:ph type="sldNum" sz="quarter" idx="10"/>
+          </p:nvPr>
+        </p:nvSpPr>
+        <p:spPr/>
+        <p:txBody>
+          <a:bodyPr/>
+          <a:lstStyle/>
+          <a:p>
+            <a:fld id="{F7021451-1387-4CA6-816F-3879F97B5CBC}" type="slidenum">
+              <a:rPr lang="en-US"/>
+              <a:t>12</a:t>
             </a:fld>
             <a:endParaRPr lang="en-US"/>
           </a:p>
@@ -1879,7 +1968,7 @@
                 <a:ea typeface="Calibri" pitchFamily="34" charset="-122"/>
                 <a:cs typeface="Calibri" pitchFamily="34" charset="-120"/>
               </a:rPr>
-              <a:t>来場者が見せる交換コードを確認して、景品をお渡しするまでの手順です。スマートフォン1台で操作できます。当日はこの資料を受付卓に置いてお使いください。</a:t>
+              <a:t>来場者が見せる交換コードを確認して、景品をお渡しするまでの手順です。**パソコン＋バーコードリーダー**でも、**スマートフォン1台**でも対応できます。当日はこの資料を受付卓に置いてお使いください。</a:t>
             </a:r>
             <a:endParaRPr lang="en-US" sz="1200" dirty="0"/>
           </a:p>
@@ -2028,7 +2117,7 @@
                 <a:ea typeface="Calibri" pitchFamily="34" charset="-122"/>
                 <a:cs typeface="Calibri" pitchFamily="34" charset="-120"/>
               </a:rPr>
-              <a:t>残りの数を確認する</a:t>
+              <a:t>手順3：交換済みにする（スマートフォンの場合）</a:t>
             </a:r>
             <a:endParaRPr lang="en-US" sz="2200" dirty="0"/>
           </a:p>
@@ -2036,14 +2125,73 @@
       </p:sp>
       <p:sp>
         <p:nvSpPr>
-          <p:cNvPr id="4" name="Text 2"/>
-          <p:cNvSpPr txBox="1"/>
-          <p:nvPr/>
-        </p:nvSpPr>
-        <p:spPr>
-          <a:xfrm>
-            <a:off x="566928" y="1481328"/>
-            <a:ext cx="6428232" cy="257429"/>
+          <p:cNvPr id="4" name="Shape 2"/>
+          <p:cNvSpPr/>
+          <p:nvPr/>
+        </p:nvSpPr>
+        <p:spPr>
+          <a:xfrm>
+            <a:off x="566928" y="1499616"/>
+            <a:ext cx="274320" cy="274320"/>
+          </a:xfrm>
+          <a:prstGeom prst="ellipse">
+            <a:avLst/>
+          </a:prstGeom>
+          <a:solidFill>
+            <a:srgbClr val="B85042"/>
+          </a:solidFill>
+          <a:ln/>
+        </p:spPr>
+      </p:sp>
+      <p:sp>
+        <p:nvSpPr>
+          <p:cNvPr id="5" name="Text 3"/>
+          <p:cNvSpPr txBox="1"/>
+          <p:nvPr/>
+        </p:nvSpPr>
+        <p:spPr>
+          <a:xfrm>
+            <a:off x="566928" y="1499616"/>
+            <a:ext cx="274320" cy="274320"/>
+          </a:xfrm>
+          <a:prstGeom prst="rect">
+            <a:avLst/>
+          </a:prstGeom>
+          <a:noFill/>
+          <a:ln/>
+        </p:spPr>
+        <p:txBody>
+          <a:bodyPr wrap="square" lIns="0" tIns="0" rIns="0" bIns="0" rtlCol="0" anchor="ctr"/>
+          <a:lstStyle/>
+          <a:p>
+            <a:pPr algn="ctr" indent="0" marL="0">
+              <a:buNone/>
+            </a:pPr>
+            <a:r>
+              <a:rPr lang="en-US" sz="1100" b="1" dirty="0">
+                <a:solidFill>
+                  <a:srgbClr val="FFFFFF"/>
+                </a:solidFill>
+                <a:latin typeface="Calibri" pitchFamily="34" charset="0"/>
+                <a:ea typeface="Calibri" pitchFamily="34" charset="-122"/>
+                <a:cs typeface="Calibri" pitchFamily="34" charset="-120"/>
+              </a:rPr>
+              <a:t>1</a:t>
+            </a:r>
+            <a:endParaRPr lang="en-US" sz="1100" dirty="0"/>
+          </a:p>
+        </p:txBody>
+      </p:sp>
+      <p:sp>
+        <p:nvSpPr>
+          <p:cNvPr id="6" name="Text 4"/>
+          <p:cNvSpPr txBox="1"/>
+          <p:nvPr/>
+        </p:nvSpPr>
+        <p:spPr>
+          <a:xfrm>
+            <a:off x="969264" y="1481328"/>
+            <a:ext cx="6025896" cy="365760"/>
           </a:xfrm>
           <a:prstGeom prst="rect">
             <a:avLst/>
@@ -2062,6 +2210,486 @@
               <a:buNone/>
             </a:pPr>
             <a:r>
+              <a:rPr lang="en-US" sz="1150" b="1" dirty="0">
+                <a:solidFill>
+                  <a:srgbClr val="222222"/>
+                </a:solidFill>
+                <a:latin typeface="Calibri" pitchFamily="34" charset="0"/>
+                <a:ea typeface="Calibri" pitchFamily="34" charset="-122"/>
+                <a:cs typeface="Calibri" pitchFamily="34" charset="-120"/>
+              </a:rPr>
+              <a:t>渡す景品</a:t>
+            </a:r>
+            <a:pPr indent="0" marL="0">
+              <a:lnSpc>
+                <a:spcPct val="125000"/>
+              </a:lnSpc>
+              <a:buNone/>
+            </a:pPr>
+            <a:r>
+              <a:rPr lang="en-US" sz="1150" dirty="0">
+                <a:solidFill>
+                  <a:srgbClr val="222222"/>
+                </a:solidFill>
+                <a:latin typeface="Calibri" pitchFamily="34" charset="0"/>
+                <a:ea typeface="Calibri" pitchFamily="34" charset="-122"/>
+                <a:cs typeface="Calibri" pitchFamily="34" charset="-120"/>
+              </a:rPr>
+              <a:t>を選ぶ</a:t>
+            </a:r>
+            <a:endParaRPr lang="en-US" sz="1150" dirty="0"/>
+          </a:p>
+        </p:txBody>
+      </p:sp>
+      <p:sp>
+        <p:nvSpPr>
+          <p:cNvPr id="7" name="Shape 5"/>
+          <p:cNvSpPr/>
+          <p:nvPr/>
+        </p:nvSpPr>
+        <p:spPr>
+          <a:xfrm>
+            <a:off x="566928" y="1956816"/>
+            <a:ext cx="274320" cy="274320"/>
+          </a:xfrm>
+          <a:prstGeom prst="ellipse">
+            <a:avLst/>
+          </a:prstGeom>
+          <a:solidFill>
+            <a:srgbClr val="B85042"/>
+          </a:solidFill>
+          <a:ln/>
+        </p:spPr>
+      </p:sp>
+      <p:sp>
+        <p:nvSpPr>
+          <p:cNvPr id="8" name="Text 6"/>
+          <p:cNvSpPr txBox="1"/>
+          <p:nvPr/>
+        </p:nvSpPr>
+        <p:spPr>
+          <a:xfrm>
+            <a:off x="566928" y="1956816"/>
+            <a:ext cx="274320" cy="274320"/>
+          </a:xfrm>
+          <a:prstGeom prst="rect">
+            <a:avLst/>
+          </a:prstGeom>
+          <a:noFill/>
+          <a:ln/>
+        </p:spPr>
+        <p:txBody>
+          <a:bodyPr wrap="square" lIns="0" tIns="0" rIns="0" bIns="0" rtlCol="0" anchor="ctr"/>
+          <a:lstStyle/>
+          <a:p>
+            <a:pPr algn="ctr" indent="0" marL="0">
+              <a:buNone/>
+            </a:pPr>
+            <a:r>
+              <a:rPr lang="en-US" sz="1100" b="1" dirty="0">
+                <a:solidFill>
+                  <a:srgbClr val="FFFFFF"/>
+                </a:solidFill>
+                <a:latin typeface="Calibri" pitchFamily="34" charset="0"/>
+                <a:ea typeface="Calibri" pitchFamily="34" charset="-122"/>
+                <a:cs typeface="Calibri" pitchFamily="34" charset="-120"/>
+              </a:rPr>
+              <a:t>2</a:t>
+            </a:r>
+            <a:endParaRPr lang="en-US" sz="1100" dirty="0"/>
+          </a:p>
+        </p:txBody>
+      </p:sp>
+      <p:sp>
+        <p:nvSpPr>
+          <p:cNvPr id="9" name="Text 7"/>
+          <p:cNvSpPr txBox="1"/>
+          <p:nvPr/>
+        </p:nvSpPr>
+        <p:spPr>
+          <a:xfrm>
+            <a:off x="969264" y="1938528"/>
+            <a:ext cx="6025896" cy="365760"/>
+          </a:xfrm>
+          <a:prstGeom prst="rect">
+            <a:avLst/>
+          </a:prstGeom>
+          <a:noFill/>
+          <a:ln/>
+        </p:spPr>
+        <p:txBody>
+          <a:bodyPr wrap="square" lIns="0" tIns="0" rIns="0" bIns="0" rtlCol="0" anchor="t"/>
+          <a:lstStyle/>
+          <a:p>
+            <a:pPr indent="0" marL="0">
+              <a:lnSpc>
+                <a:spcPct val="125000"/>
+              </a:lnSpc>
+              <a:buNone/>
+            </a:pPr>
+            <a:r>
+              <a:rPr lang="en-US" sz="1150" dirty="0">
+                <a:solidFill>
+                  <a:srgbClr val="222222"/>
+                </a:solidFill>
+                <a:latin typeface="Calibri" pitchFamily="34" charset="0"/>
+                <a:ea typeface="Calibri" pitchFamily="34" charset="-122"/>
+                <a:cs typeface="Calibri" pitchFamily="34" charset="-120"/>
+              </a:rPr>
+              <a:t>必要ならメモ欄に記入する（例：在庫切れのため別の景品に変更）</a:t>
+            </a:r>
+            <a:endParaRPr lang="en-US" sz="1150" dirty="0"/>
+          </a:p>
+        </p:txBody>
+      </p:sp>
+      <p:sp>
+        <p:nvSpPr>
+          <p:cNvPr id="10" name="Shape 8"/>
+          <p:cNvSpPr/>
+          <p:nvPr/>
+        </p:nvSpPr>
+        <p:spPr>
+          <a:xfrm>
+            <a:off x="566928" y="2414016"/>
+            <a:ext cx="274320" cy="274320"/>
+          </a:xfrm>
+          <a:prstGeom prst="ellipse">
+            <a:avLst/>
+          </a:prstGeom>
+          <a:solidFill>
+            <a:srgbClr val="B85042"/>
+          </a:solidFill>
+          <a:ln/>
+        </p:spPr>
+      </p:sp>
+      <p:sp>
+        <p:nvSpPr>
+          <p:cNvPr id="11" name="Text 9"/>
+          <p:cNvSpPr txBox="1"/>
+          <p:nvPr/>
+        </p:nvSpPr>
+        <p:spPr>
+          <a:xfrm>
+            <a:off x="566928" y="2414016"/>
+            <a:ext cx="274320" cy="274320"/>
+          </a:xfrm>
+          <a:prstGeom prst="rect">
+            <a:avLst/>
+          </a:prstGeom>
+          <a:noFill/>
+          <a:ln/>
+        </p:spPr>
+        <p:txBody>
+          <a:bodyPr wrap="square" lIns="0" tIns="0" rIns="0" bIns="0" rtlCol="0" anchor="ctr"/>
+          <a:lstStyle/>
+          <a:p>
+            <a:pPr algn="ctr" indent="0" marL="0">
+              <a:buNone/>
+            </a:pPr>
+            <a:r>
+              <a:rPr lang="en-US" sz="1100" b="1" dirty="0">
+                <a:solidFill>
+                  <a:srgbClr val="FFFFFF"/>
+                </a:solidFill>
+                <a:latin typeface="Calibri" pitchFamily="34" charset="0"/>
+                <a:ea typeface="Calibri" pitchFamily="34" charset="-122"/>
+                <a:cs typeface="Calibri" pitchFamily="34" charset="-120"/>
+              </a:rPr>
+              <a:t>3</a:t>
+            </a:r>
+            <a:endParaRPr lang="en-US" sz="1100" dirty="0"/>
+          </a:p>
+        </p:txBody>
+      </p:sp>
+      <p:sp>
+        <p:nvSpPr>
+          <p:cNvPr id="12" name="Text 10"/>
+          <p:cNvSpPr txBox="1"/>
+          <p:nvPr/>
+        </p:nvSpPr>
+        <p:spPr>
+          <a:xfrm>
+            <a:off x="969264" y="2395728"/>
+            <a:ext cx="6025896" cy="365760"/>
+          </a:xfrm>
+          <a:prstGeom prst="rect">
+            <a:avLst/>
+          </a:prstGeom>
+          <a:noFill/>
+          <a:ln/>
+        </p:spPr>
+        <p:txBody>
+          <a:bodyPr wrap="square" lIns="0" tIns="0" rIns="0" bIns="0" rtlCol="0" anchor="t"/>
+          <a:lstStyle/>
+          <a:p>
+            <a:pPr indent="0" marL="0">
+              <a:lnSpc>
+                <a:spcPct val="125000"/>
+              </a:lnSpc>
+              <a:buNone/>
+            </a:pPr>
+            <a:r>
+              <a:rPr lang="en-US" sz="1150" b="1" dirty="0">
+                <a:solidFill>
+                  <a:srgbClr val="222222"/>
+                </a:solidFill>
+                <a:latin typeface="Calibri" pitchFamily="34" charset="0"/>
+                <a:ea typeface="Calibri" pitchFamily="34" charset="-122"/>
+                <a:cs typeface="Calibri" pitchFamily="34" charset="-120"/>
+              </a:rPr>
+              <a:t>「交換済みにする」</a:t>
+            </a:r>
+            <a:pPr indent="0" marL="0">
+              <a:lnSpc>
+                <a:spcPct val="125000"/>
+              </a:lnSpc>
+              <a:buNone/>
+            </a:pPr>
+            <a:r>
+              <a:rPr lang="en-US" sz="1150" dirty="0">
+                <a:solidFill>
+                  <a:srgbClr val="222222"/>
+                </a:solidFill>
+                <a:latin typeface="Calibri" pitchFamily="34" charset="0"/>
+                <a:ea typeface="Calibri" pitchFamily="34" charset="-122"/>
+                <a:cs typeface="Calibri" pitchFamily="34" charset="-120"/>
+              </a:rPr>
+              <a:t>を押す</a:t>
+            </a:r>
+            <a:endParaRPr lang="en-US" sz="1150" dirty="0"/>
+          </a:p>
+        </p:txBody>
+      </p:sp>
+      <p:sp>
+        <p:nvSpPr>
+          <p:cNvPr id="13" name="Shape 11"/>
+          <p:cNvSpPr/>
+          <p:nvPr/>
+        </p:nvSpPr>
+        <p:spPr>
+          <a:xfrm>
+            <a:off x="566928" y="2871216"/>
+            <a:ext cx="274320" cy="274320"/>
+          </a:xfrm>
+          <a:prstGeom prst="ellipse">
+            <a:avLst/>
+          </a:prstGeom>
+          <a:solidFill>
+            <a:srgbClr val="B85042"/>
+          </a:solidFill>
+          <a:ln/>
+        </p:spPr>
+      </p:sp>
+      <p:sp>
+        <p:nvSpPr>
+          <p:cNvPr id="14" name="Text 12"/>
+          <p:cNvSpPr txBox="1"/>
+          <p:nvPr/>
+        </p:nvSpPr>
+        <p:spPr>
+          <a:xfrm>
+            <a:off x="566928" y="2871216"/>
+            <a:ext cx="274320" cy="274320"/>
+          </a:xfrm>
+          <a:prstGeom prst="rect">
+            <a:avLst/>
+          </a:prstGeom>
+          <a:noFill/>
+          <a:ln/>
+        </p:spPr>
+        <p:txBody>
+          <a:bodyPr wrap="square" lIns="0" tIns="0" rIns="0" bIns="0" rtlCol="0" anchor="ctr"/>
+          <a:lstStyle/>
+          <a:p>
+            <a:pPr algn="ctr" indent="0" marL="0">
+              <a:buNone/>
+            </a:pPr>
+            <a:r>
+              <a:rPr lang="en-US" sz="1100" b="1" dirty="0">
+                <a:solidFill>
+                  <a:srgbClr val="FFFFFF"/>
+                </a:solidFill>
+                <a:latin typeface="Calibri" pitchFamily="34" charset="0"/>
+                <a:ea typeface="Calibri" pitchFamily="34" charset="-122"/>
+                <a:cs typeface="Calibri" pitchFamily="34" charset="-120"/>
+              </a:rPr>
+              <a:t>4</a:t>
+            </a:r>
+            <a:endParaRPr lang="en-US" sz="1100" dirty="0"/>
+          </a:p>
+        </p:txBody>
+      </p:sp>
+      <p:sp>
+        <p:nvSpPr>
+          <p:cNvPr id="15" name="Text 13"/>
+          <p:cNvSpPr txBox="1"/>
+          <p:nvPr/>
+        </p:nvSpPr>
+        <p:spPr>
+          <a:xfrm>
+            <a:off x="969264" y="2852928"/>
+            <a:ext cx="6025896" cy="365760"/>
+          </a:xfrm>
+          <a:prstGeom prst="rect">
+            <a:avLst/>
+          </a:prstGeom>
+          <a:noFill/>
+          <a:ln/>
+        </p:spPr>
+        <p:txBody>
+          <a:bodyPr wrap="square" lIns="0" tIns="0" rIns="0" bIns="0" rtlCol="0" anchor="t"/>
+          <a:lstStyle/>
+          <a:p>
+            <a:pPr indent="0" marL="0">
+              <a:lnSpc>
+                <a:spcPct val="125000"/>
+              </a:lnSpc>
+              <a:buNone/>
+            </a:pPr>
+            <a:r>
+              <a:rPr lang="en-US" sz="1150" dirty="0">
+                <a:solidFill>
+                  <a:srgbClr val="222222"/>
+                </a:solidFill>
+                <a:latin typeface="Calibri" pitchFamily="34" charset="0"/>
+                <a:ea typeface="Calibri" pitchFamily="34" charset="-122"/>
+                <a:cs typeface="Calibri" pitchFamily="34" charset="-120"/>
+              </a:rPr>
+              <a:t>確認のメッセージが出たら「OK」を押す</a:t>
+            </a:r>
+            <a:endParaRPr lang="en-US" sz="1150" dirty="0"/>
+          </a:p>
+        </p:txBody>
+      </p:sp>
+      <p:sp>
+        <p:nvSpPr>
+          <p:cNvPr id="16" name="Shape 14"/>
+          <p:cNvSpPr/>
+          <p:nvPr/>
+        </p:nvSpPr>
+        <p:spPr>
+          <a:xfrm>
+            <a:off x="566928" y="3328416"/>
+            <a:ext cx="274320" cy="274320"/>
+          </a:xfrm>
+          <a:prstGeom prst="ellipse">
+            <a:avLst/>
+          </a:prstGeom>
+          <a:solidFill>
+            <a:srgbClr val="B85042"/>
+          </a:solidFill>
+          <a:ln/>
+        </p:spPr>
+      </p:sp>
+      <p:sp>
+        <p:nvSpPr>
+          <p:cNvPr id="17" name="Text 15"/>
+          <p:cNvSpPr txBox="1"/>
+          <p:nvPr/>
+        </p:nvSpPr>
+        <p:spPr>
+          <a:xfrm>
+            <a:off x="566928" y="3328416"/>
+            <a:ext cx="274320" cy="274320"/>
+          </a:xfrm>
+          <a:prstGeom prst="rect">
+            <a:avLst/>
+          </a:prstGeom>
+          <a:noFill/>
+          <a:ln/>
+        </p:spPr>
+        <p:txBody>
+          <a:bodyPr wrap="square" lIns="0" tIns="0" rIns="0" bIns="0" rtlCol="0" anchor="ctr"/>
+          <a:lstStyle/>
+          <a:p>
+            <a:pPr algn="ctr" indent="0" marL="0">
+              <a:buNone/>
+            </a:pPr>
+            <a:r>
+              <a:rPr lang="en-US" sz="1100" b="1" dirty="0">
+                <a:solidFill>
+                  <a:srgbClr val="FFFFFF"/>
+                </a:solidFill>
+                <a:latin typeface="Calibri" pitchFamily="34" charset="0"/>
+                <a:ea typeface="Calibri" pitchFamily="34" charset="-122"/>
+                <a:cs typeface="Calibri" pitchFamily="34" charset="-120"/>
+              </a:rPr>
+              <a:t>5</a:t>
+            </a:r>
+            <a:endParaRPr lang="en-US" sz="1100" dirty="0"/>
+          </a:p>
+        </p:txBody>
+      </p:sp>
+      <p:sp>
+        <p:nvSpPr>
+          <p:cNvPr id="18" name="Text 16"/>
+          <p:cNvSpPr txBox="1"/>
+          <p:nvPr/>
+        </p:nvSpPr>
+        <p:spPr>
+          <a:xfrm>
+            <a:off x="969264" y="3310128"/>
+            <a:ext cx="6025896" cy="365760"/>
+          </a:xfrm>
+          <a:prstGeom prst="rect">
+            <a:avLst/>
+          </a:prstGeom>
+          <a:noFill/>
+          <a:ln/>
+        </p:spPr>
+        <p:txBody>
+          <a:bodyPr wrap="square" lIns="0" tIns="0" rIns="0" bIns="0" rtlCol="0" anchor="t"/>
+          <a:lstStyle/>
+          <a:p>
+            <a:pPr indent="0" marL="0">
+              <a:lnSpc>
+                <a:spcPct val="125000"/>
+              </a:lnSpc>
+              <a:buNone/>
+            </a:pPr>
+            <a:r>
+              <a:rPr lang="en-US" sz="1150" dirty="0">
+                <a:solidFill>
+                  <a:srgbClr val="222222"/>
+                </a:solidFill>
+                <a:latin typeface="Calibri" pitchFamily="34" charset="0"/>
+                <a:ea typeface="Calibri" pitchFamily="34" charset="-122"/>
+                <a:cs typeface="Calibri" pitchFamily="34" charset="-120"/>
+              </a:rPr>
+              <a:t>「交換済みとして記録しました（景品名） 残数 ◯個」と出れば完了</a:t>
+            </a:r>
+            <a:endParaRPr lang="en-US" sz="1150" dirty="0"/>
+          </a:p>
+        </p:txBody>
+      </p:sp>
+      <p:sp>
+        <p:nvSpPr>
+          <p:cNvPr id="19" name="Text 17"/>
+          <p:cNvSpPr txBox="1"/>
+          <p:nvPr/>
+        </p:nvSpPr>
+        <p:spPr>
+          <a:xfrm>
+            <a:off x="566928" y="3767328"/>
+            <a:ext cx="6428232" cy="459994"/>
+          </a:xfrm>
+          <a:prstGeom prst="rect">
+            <a:avLst/>
+          </a:prstGeom>
+          <a:noFill/>
+          <a:ln/>
+        </p:spPr>
+        <p:txBody>
+          <a:bodyPr wrap="square" lIns="0" tIns="0" rIns="0" bIns="0" rtlCol="0" anchor="t"/>
+          <a:lstStyle/>
+          <a:p>
+            <a:pPr indent="0" marL="0">
+              <a:lnSpc>
+                <a:spcPct val="125000"/>
+              </a:lnSpc>
+              <a:buNone/>
+            </a:pPr>
+            <a:r>
               <a:rPr lang="en-US" sz="1100" dirty="0">
                 <a:solidFill>
                   <a:srgbClr val="222222"/>
@@ -2070,7 +2698,7 @@
                 <a:ea typeface="Calibri" pitchFamily="34" charset="-122"/>
                 <a:cs typeface="Calibri" pitchFamily="34" charset="-120"/>
               </a:rPr>
-              <a:t>照会画面の下に、</a:t>
+              <a:t>次の方を対応するときは、</a:t>
             </a:r>
             <a:pPr indent="0" marL="0">
               <a:lnSpc>
@@ -2087,7 +2715,7 @@
                 <a:ea typeface="Calibri" pitchFamily="34" charset="-122"/>
                 <a:cs typeface="Calibri" pitchFamily="34" charset="-120"/>
               </a:rPr>
-              <a:t>景品の残数</a:t>
+              <a:t>「次の来場者を照会する」</a:t>
             </a:r>
             <a:pPr indent="0" marL="0">
               <a:lnSpc>
@@ -2104,7 +2732,7 @@
                 <a:ea typeface="Calibri" pitchFamily="34" charset="-122"/>
                 <a:cs typeface="Calibri" pitchFamily="34" charset="-120"/>
               </a:rPr>
-              <a:t>の表があります。</a:t>
+              <a:t>を押してから、またQRコードを読み取ってください。</a:t>
             </a:r>
             <a:endParaRPr lang="en-US" sz="1100" dirty="0"/>
           </a:p>
@@ -2112,418 +2740,7 @@
       </p:sp>
       <p:sp>
         <p:nvSpPr>
-          <p:cNvPr id="5" name="Text 3"/>
-          <p:cNvSpPr txBox="1"/>
-          <p:nvPr/>
-        </p:nvSpPr>
-        <p:spPr>
-          <a:xfrm>
-            <a:off x="713232" y="1775333"/>
-            <a:ext cx="6281928" cy="257429"/>
-          </a:xfrm>
-          <a:prstGeom prst="rect">
-            <a:avLst/>
-          </a:prstGeom>
-          <a:noFill/>
-          <a:ln/>
-        </p:spPr>
-        <p:txBody>
-          <a:bodyPr wrap="square" lIns="0" tIns="0" rIns="0" bIns="0" rtlCol="0" anchor="t"/>
-          <a:lstStyle/>
-          <a:p>
-            <a:pPr marL="342900" indent="-342900">
-              <a:lnSpc>
-                <a:spcPct val="125000"/>
-              </a:lnSpc>
-              <a:buSzPct val="100000"/>
-              <a:buChar char="●"/>
-            </a:pPr>
-            <a:r>
-              <a:rPr lang="en-US" sz="1100" b="1" dirty="0">
-                <a:solidFill>
-                  <a:srgbClr val="222222"/>
-                </a:solidFill>
-                <a:latin typeface="Calibri" pitchFamily="34" charset="0"/>
-                <a:ea typeface="Calibri" pitchFamily="34" charset="-122"/>
-                <a:cs typeface="Calibri" pitchFamily="34" charset="-120"/>
-              </a:rPr>
-              <a:t>用意</a:t>
-            </a:r>
-            <a:pPr indent="0" marL="0">
-              <a:lnSpc>
-                <a:spcPct val="125000"/>
-              </a:lnSpc>
-              <a:buNone/>
-            </a:pPr>
-            <a:r>
-              <a:rPr lang="en-US" sz="1100" dirty="0">
-                <a:solidFill>
-                  <a:srgbClr val="222222"/>
-                </a:solidFill>
-                <a:latin typeface="Calibri" pitchFamily="34" charset="0"/>
-                <a:ea typeface="Calibri" pitchFamily="34" charset="-122"/>
-                <a:cs typeface="Calibri" pitchFamily="34" charset="-120"/>
-              </a:rPr>
-              <a:t>：事務局が登録した数量</a:t>
-            </a:r>
-            <a:endParaRPr lang="en-US" sz="1100" dirty="0"/>
-          </a:p>
-        </p:txBody>
-      </p:sp>
-      <p:sp>
-        <p:nvSpPr>
-          <p:cNvPr id="6" name="Text 4"/>
-          <p:cNvSpPr txBox="1"/>
-          <p:nvPr/>
-        </p:nvSpPr>
-        <p:spPr>
-          <a:xfrm>
-            <a:off x="713232" y="2051050"/>
-            <a:ext cx="6281928" cy="257429"/>
-          </a:xfrm>
-          <a:prstGeom prst="rect">
-            <a:avLst/>
-          </a:prstGeom>
-          <a:noFill/>
-          <a:ln/>
-        </p:spPr>
-        <p:txBody>
-          <a:bodyPr wrap="square" lIns="0" tIns="0" rIns="0" bIns="0" rtlCol="0" anchor="t"/>
-          <a:lstStyle/>
-          <a:p>
-            <a:pPr marL="342900" indent="-342900">
-              <a:lnSpc>
-                <a:spcPct val="125000"/>
-              </a:lnSpc>
-              <a:buSzPct val="100000"/>
-              <a:buChar char="●"/>
-            </a:pPr>
-            <a:r>
-              <a:rPr lang="en-US" sz="1100" b="1" dirty="0">
-                <a:solidFill>
-                  <a:srgbClr val="222222"/>
-                </a:solidFill>
-                <a:latin typeface="Calibri" pitchFamily="34" charset="0"/>
-                <a:ea typeface="Calibri" pitchFamily="34" charset="-122"/>
-                <a:cs typeface="Calibri" pitchFamily="34" charset="-120"/>
-              </a:rPr>
-              <a:t>交換済み</a:t>
-            </a:r>
-            <a:pPr indent="0" marL="0">
-              <a:lnSpc>
-                <a:spcPct val="125000"/>
-              </a:lnSpc>
-              <a:buNone/>
-            </a:pPr>
-            <a:r>
-              <a:rPr lang="en-US" sz="1100" dirty="0">
-                <a:solidFill>
-                  <a:srgbClr val="222222"/>
-                </a:solidFill>
-                <a:latin typeface="Calibri" pitchFamily="34" charset="0"/>
-                <a:ea typeface="Calibri" pitchFamily="34" charset="-122"/>
-                <a:cs typeface="Calibri" pitchFamily="34" charset="-120"/>
-              </a:rPr>
-              <a:t>：これまでにお渡しした数</a:t>
-            </a:r>
-            <a:endParaRPr lang="en-US" sz="1100" dirty="0"/>
-          </a:p>
-        </p:txBody>
-      </p:sp>
-      <p:sp>
-        <p:nvSpPr>
-          <p:cNvPr id="7" name="Text 5"/>
-          <p:cNvSpPr txBox="1"/>
-          <p:nvPr/>
-        </p:nvSpPr>
-        <p:spPr>
-          <a:xfrm>
-            <a:off x="713232" y="2326767"/>
-            <a:ext cx="6281928" cy="257429"/>
-          </a:xfrm>
-          <a:prstGeom prst="rect">
-            <a:avLst/>
-          </a:prstGeom>
-          <a:noFill/>
-          <a:ln/>
-        </p:spPr>
-        <p:txBody>
-          <a:bodyPr wrap="square" lIns="0" tIns="0" rIns="0" bIns="0" rtlCol="0" anchor="t"/>
-          <a:lstStyle/>
-          <a:p>
-            <a:pPr marL="342900" indent="-342900">
-              <a:lnSpc>
-                <a:spcPct val="125000"/>
-              </a:lnSpc>
-              <a:buSzPct val="100000"/>
-              <a:buChar char="●"/>
-            </a:pPr>
-            <a:r>
-              <a:rPr lang="en-US" sz="1100" b="1" dirty="0">
-                <a:solidFill>
-                  <a:srgbClr val="222222"/>
-                </a:solidFill>
-                <a:latin typeface="Calibri" pitchFamily="34" charset="0"/>
-                <a:ea typeface="Calibri" pitchFamily="34" charset="-122"/>
-                <a:cs typeface="Calibri" pitchFamily="34" charset="-120"/>
-              </a:rPr>
-              <a:t>残り</a:t>
-            </a:r>
-            <a:pPr indent="0" marL="0">
-              <a:lnSpc>
-                <a:spcPct val="125000"/>
-              </a:lnSpc>
-              <a:buNone/>
-            </a:pPr>
-            <a:r>
-              <a:rPr lang="en-US" sz="1100" dirty="0">
-                <a:solidFill>
-                  <a:srgbClr val="222222"/>
-                </a:solidFill>
-                <a:latin typeface="Calibri" pitchFamily="34" charset="0"/>
-                <a:ea typeface="Calibri" pitchFamily="34" charset="-122"/>
-                <a:cs typeface="Calibri" pitchFamily="34" charset="-120"/>
-              </a:rPr>
-              <a:t>：残っている数（「—」は数量を管理していない景品）</a:t>
-            </a:r>
-            <a:endParaRPr lang="en-US" sz="1100" dirty="0"/>
-          </a:p>
-        </p:txBody>
-      </p:sp>
-      <p:sp>
-        <p:nvSpPr>
-          <p:cNvPr id="8" name="Text 6"/>
-          <p:cNvSpPr txBox="1"/>
-          <p:nvPr/>
-        </p:nvSpPr>
-        <p:spPr>
-          <a:xfrm>
-            <a:off x="713232" y="2602484"/>
-            <a:ext cx="6281928" cy="257429"/>
-          </a:xfrm>
-          <a:prstGeom prst="rect">
-            <a:avLst/>
-          </a:prstGeom>
-          <a:noFill/>
-          <a:ln/>
-        </p:spPr>
-        <p:txBody>
-          <a:bodyPr wrap="square" lIns="0" tIns="0" rIns="0" bIns="0" rtlCol="0" anchor="t"/>
-          <a:lstStyle/>
-          <a:p>
-            <a:pPr marL="342900" indent="-342900">
-              <a:lnSpc>
-                <a:spcPct val="125000"/>
-              </a:lnSpc>
-              <a:buSzPct val="100000"/>
-              <a:buChar char="●"/>
-            </a:pPr>
-            <a:r>
-              <a:rPr lang="en-US" sz="1100" b="1" dirty="0">
-                <a:solidFill>
-                  <a:srgbClr val="222222"/>
-                </a:solidFill>
-                <a:latin typeface="Calibri" pitchFamily="34" charset="0"/>
-                <a:ea typeface="Calibri" pitchFamily="34" charset="-122"/>
-                <a:cs typeface="Calibri" pitchFamily="34" charset="-120"/>
-              </a:rPr>
-              <a:t>超過</a:t>
-            </a:r>
-            <a:pPr indent="0" marL="0">
-              <a:lnSpc>
-                <a:spcPct val="125000"/>
-              </a:lnSpc>
-              <a:buNone/>
-            </a:pPr>
-            <a:r>
-              <a:rPr lang="en-US" sz="1100" dirty="0">
-                <a:solidFill>
-                  <a:srgbClr val="222222"/>
-                </a:solidFill>
-                <a:latin typeface="Calibri" pitchFamily="34" charset="0"/>
-                <a:ea typeface="Calibri" pitchFamily="34" charset="-122"/>
-                <a:cs typeface="Calibri" pitchFamily="34" charset="-120"/>
-              </a:rPr>
-              <a:t>：用意した数を超えてお渡しした数</a:t>
-            </a:r>
-            <a:endParaRPr lang="en-US" sz="1100" dirty="0"/>
-          </a:p>
-        </p:txBody>
-      </p:sp>
-      <p:sp>
-        <p:nvSpPr>
-          <p:cNvPr id="9" name="Shape 7"/>
-          <p:cNvSpPr/>
-          <p:nvPr/>
-        </p:nvSpPr>
-        <p:spPr>
-          <a:xfrm>
-            <a:off x="566928" y="2878201"/>
-            <a:ext cx="6428232" cy="431102"/>
-          </a:xfrm>
-          <a:prstGeom prst="roundRect">
-            <a:avLst>
-              <a:gd name="adj" fmla="val 12726"/>
-            </a:avLst>
-          </a:prstGeom>
-          <a:solidFill>
-            <a:srgbClr val="FAEAE7"/>
-          </a:solidFill>
-          <a:ln w="9525">
-            <a:solidFill>
-              <a:srgbClr val="B85042"/>
-            </a:solidFill>
-            <a:prstDash val="solid"/>
-          </a:ln>
-        </p:spPr>
-      </p:sp>
-      <p:sp>
-        <p:nvSpPr>
-          <p:cNvPr id="10" name="Text 8"/>
-          <p:cNvSpPr txBox="1"/>
-          <p:nvPr/>
-        </p:nvSpPr>
-        <p:spPr>
-          <a:xfrm>
-            <a:off x="658368" y="2969641"/>
-            <a:ext cx="237744" cy="237744"/>
-          </a:xfrm>
-          <a:prstGeom prst="rect">
-            <a:avLst/>
-          </a:prstGeom>
-          <a:noFill/>
-          <a:ln/>
-        </p:spPr>
-        <p:txBody>
-          <a:bodyPr wrap="square" lIns="0" tIns="0" rIns="0" bIns="0" rtlCol="0" anchor="ctr"/>
-          <a:lstStyle/>
-          <a:p>
-            <a:pPr algn="ctr" indent="0" marL="0">
-              <a:buNone/>
-            </a:pPr>
-            <a:r>
-              <a:rPr lang="en-US" sz="1200" b="1" dirty="0">
-                <a:solidFill>
-                  <a:srgbClr val="B85042"/>
-                </a:solidFill>
-                <a:latin typeface="Calibri" pitchFamily="34" charset="0"/>
-                <a:ea typeface="Calibri" pitchFamily="34" charset="-122"/>
-                <a:cs typeface="Calibri" pitchFamily="34" charset="-120"/>
-              </a:rPr>
-              <a:t>i</a:t>
-            </a:r>
-            <a:endParaRPr lang="en-US" sz="1200" dirty="0"/>
-          </a:p>
-        </p:txBody>
-      </p:sp>
-      <p:sp>
-        <p:nvSpPr>
-          <p:cNvPr id="11" name="Text 9"/>
-          <p:cNvSpPr txBox="1"/>
-          <p:nvPr/>
-        </p:nvSpPr>
-        <p:spPr>
-          <a:xfrm>
-            <a:off x="950976" y="2987929"/>
-            <a:ext cx="5925312" cy="248221"/>
-          </a:xfrm>
-          <a:prstGeom prst="rect">
-            <a:avLst/>
-          </a:prstGeom>
-          <a:noFill/>
-          <a:ln/>
-        </p:spPr>
-        <p:txBody>
-          <a:bodyPr wrap="square" lIns="0" tIns="0" rIns="0" bIns="0" rtlCol="0" anchor="t"/>
-          <a:lstStyle/>
-          <a:p>
-            <a:pPr indent="0" marL="0">
-              <a:lnSpc>
-                <a:spcPct val="120000"/>
-              </a:lnSpc>
-              <a:buNone/>
-            </a:pPr>
-            <a:r>
-              <a:rPr lang="en-US" sz="1050" dirty="0">
-                <a:solidFill>
-                  <a:srgbClr val="222222"/>
-                </a:solidFill>
-                <a:latin typeface="Calibri" pitchFamily="34" charset="0"/>
-                <a:ea typeface="Calibri" pitchFamily="34" charset="-122"/>
-                <a:cs typeface="Calibri" pitchFamily="34" charset="-120"/>
-              </a:rPr>
-              <a:t>残りが少なくなってきたら、早めに事務局へお知らせください。</a:t>
-            </a:r>
-            <a:endParaRPr lang="en-US" sz="1050" dirty="0"/>
-          </a:p>
-        </p:txBody>
-      </p:sp>
-      <p:pic>
-        <p:nvPicPr>
-          <p:cNvPr id="12" name="Image 0" descr="C:\Users\sato\Desktop\enque\docs\images\p-stock.png">    </p:cNvPr>
-          <p:cNvPicPr>
-            <a:picLocks noChangeAspect="1"/>
-          </p:cNvPicPr>
-          <p:nvPr/>
-        </p:nvPicPr>
-        <p:blipFill>
-          <a:blip r:embed="rId1"/>
-          <a:stretch>
-            <a:fillRect/>
-          </a:stretch>
-        </p:blipFill>
-        <p:spPr>
-          <a:xfrm>
-            <a:off x="2018596" y="3382455"/>
-            <a:ext cx="3524896" cy="3474720"/>
-          </a:xfrm>
-          <a:prstGeom prst="rect">
-            <a:avLst/>
-          </a:prstGeom>
-        </p:spPr>
-      </p:pic>
-      <p:sp>
-        <p:nvSpPr>
-          <p:cNvPr id="13" name="Text 10"/>
-          <p:cNvSpPr txBox="1"/>
-          <p:nvPr/>
-        </p:nvSpPr>
-        <p:spPr>
-          <a:xfrm>
-            <a:off x="566928" y="6912039"/>
-            <a:ext cx="6428232" cy="274320"/>
-          </a:xfrm>
-          <a:prstGeom prst="rect">
-            <a:avLst/>
-          </a:prstGeom>
-          <a:noFill/>
-          <a:ln/>
-        </p:spPr>
-        <p:txBody>
-          <a:bodyPr wrap="square" lIns="0" tIns="0" rIns="0" bIns="0" rtlCol="0" anchor="ctr"/>
-          <a:lstStyle/>
-          <a:p>
-            <a:pPr algn="ctr" indent="0" marL="0">
-              <a:buNone/>
-            </a:pPr>
-            <a:r>
-              <a:rPr lang="en-US" sz="950" dirty="0">
-                <a:solidFill>
-                  <a:srgbClr val="6B6B6B"/>
-                </a:solidFill>
-                <a:latin typeface="Calibri" pitchFamily="34" charset="0"/>
-                <a:ea typeface="Calibri" pitchFamily="34" charset="-122"/>
-                <a:cs typeface="Calibri" pitchFamily="34" charset="-120"/>
-              </a:rPr>
-              <a:t>照会画面の下部にある「景品の残数」の表。</a:t>
-            </a:r>
-            <a:endParaRPr lang="en-US" sz="950" dirty="0"/>
-          </a:p>
-        </p:txBody>
-      </p:sp>
-      <p:sp>
-        <p:nvSpPr>
-          <p:cNvPr id="14" name="Text 11"/>
+          <p:cNvPr id="20" name="Text 18"/>
           <p:cNvSpPr txBox="1"/>
           <p:nvPr/>
         </p:nvSpPr>
@@ -2664,6 +2881,642 @@
                 <a:ea typeface="Calibri" pitchFamily="34" charset="-122"/>
                 <a:cs typeface="Calibri" pitchFamily="34" charset="-120"/>
               </a:rPr>
+              <a:t>残りの数を確認する</a:t>
+            </a:r>
+            <a:endParaRPr lang="en-US" sz="2200" dirty="0"/>
+          </a:p>
+        </p:txBody>
+      </p:sp>
+      <p:sp>
+        <p:nvSpPr>
+          <p:cNvPr id="4" name="Text 2"/>
+          <p:cNvSpPr txBox="1"/>
+          <p:nvPr/>
+        </p:nvSpPr>
+        <p:spPr>
+          <a:xfrm>
+            <a:off x="566928" y="1481328"/>
+            <a:ext cx="6428232" cy="257429"/>
+          </a:xfrm>
+          <a:prstGeom prst="rect">
+            <a:avLst/>
+          </a:prstGeom>
+          <a:noFill/>
+          <a:ln/>
+        </p:spPr>
+        <p:txBody>
+          <a:bodyPr wrap="square" lIns="0" tIns="0" rIns="0" bIns="0" rtlCol="0" anchor="t"/>
+          <a:lstStyle/>
+          <a:p>
+            <a:pPr indent="0" marL="0">
+              <a:lnSpc>
+                <a:spcPct val="125000"/>
+              </a:lnSpc>
+              <a:buNone/>
+            </a:pPr>
+            <a:r>
+              <a:rPr lang="en-US" sz="1100" dirty="0">
+                <a:solidFill>
+                  <a:srgbClr val="222222"/>
+                </a:solidFill>
+                <a:latin typeface="Calibri" pitchFamily="34" charset="0"/>
+                <a:ea typeface="Calibri" pitchFamily="34" charset="-122"/>
+                <a:cs typeface="Calibri" pitchFamily="34" charset="-120"/>
+              </a:rPr>
+              <a:t>照会画面の下に、</a:t>
+            </a:r>
+            <a:pPr indent="0" marL="0">
+              <a:lnSpc>
+                <a:spcPct val="125000"/>
+              </a:lnSpc>
+              <a:buNone/>
+            </a:pPr>
+            <a:r>
+              <a:rPr lang="en-US" sz="1100" b="1" dirty="0">
+                <a:solidFill>
+                  <a:srgbClr val="222222"/>
+                </a:solidFill>
+                <a:latin typeface="Calibri" pitchFamily="34" charset="0"/>
+                <a:ea typeface="Calibri" pitchFamily="34" charset="-122"/>
+                <a:cs typeface="Calibri" pitchFamily="34" charset="-120"/>
+              </a:rPr>
+              <a:t>景品の残数</a:t>
+            </a:r>
+            <a:pPr indent="0" marL="0">
+              <a:lnSpc>
+                <a:spcPct val="125000"/>
+              </a:lnSpc>
+              <a:buNone/>
+            </a:pPr>
+            <a:r>
+              <a:rPr lang="en-US" sz="1100" dirty="0">
+                <a:solidFill>
+                  <a:srgbClr val="222222"/>
+                </a:solidFill>
+                <a:latin typeface="Calibri" pitchFamily="34" charset="0"/>
+                <a:ea typeface="Calibri" pitchFamily="34" charset="-122"/>
+                <a:cs typeface="Calibri" pitchFamily="34" charset="-120"/>
+              </a:rPr>
+              <a:t>の表があります。</a:t>
+            </a:r>
+            <a:endParaRPr lang="en-US" sz="1100" dirty="0"/>
+          </a:p>
+        </p:txBody>
+      </p:sp>
+      <p:sp>
+        <p:nvSpPr>
+          <p:cNvPr id="5" name="Text 3"/>
+          <p:cNvSpPr txBox="1"/>
+          <p:nvPr/>
+        </p:nvSpPr>
+        <p:spPr>
+          <a:xfrm>
+            <a:off x="713232" y="1775333"/>
+            <a:ext cx="6281928" cy="257429"/>
+          </a:xfrm>
+          <a:prstGeom prst="rect">
+            <a:avLst/>
+          </a:prstGeom>
+          <a:noFill/>
+          <a:ln/>
+        </p:spPr>
+        <p:txBody>
+          <a:bodyPr wrap="square" lIns="0" tIns="0" rIns="0" bIns="0" rtlCol="0" anchor="t"/>
+          <a:lstStyle/>
+          <a:p>
+            <a:pPr marL="342900" indent="-342900">
+              <a:lnSpc>
+                <a:spcPct val="125000"/>
+              </a:lnSpc>
+              <a:buSzPct val="100000"/>
+              <a:buChar char="●"/>
+            </a:pPr>
+            <a:r>
+              <a:rPr lang="en-US" sz="1100" b="1" dirty="0">
+                <a:solidFill>
+                  <a:srgbClr val="222222"/>
+                </a:solidFill>
+                <a:latin typeface="Calibri" pitchFamily="34" charset="0"/>
+                <a:ea typeface="Calibri" pitchFamily="34" charset="-122"/>
+                <a:cs typeface="Calibri" pitchFamily="34" charset="-120"/>
+              </a:rPr>
+              <a:t>用意</a:t>
+            </a:r>
+            <a:pPr indent="0" marL="0">
+              <a:lnSpc>
+                <a:spcPct val="125000"/>
+              </a:lnSpc>
+              <a:buNone/>
+            </a:pPr>
+            <a:r>
+              <a:rPr lang="en-US" sz="1100" dirty="0">
+                <a:solidFill>
+                  <a:srgbClr val="222222"/>
+                </a:solidFill>
+                <a:latin typeface="Calibri" pitchFamily="34" charset="0"/>
+                <a:ea typeface="Calibri" pitchFamily="34" charset="-122"/>
+                <a:cs typeface="Calibri" pitchFamily="34" charset="-120"/>
+              </a:rPr>
+              <a:t>：事務局が登録した数量</a:t>
+            </a:r>
+            <a:endParaRPr lang="en-US" sz="1100" dirty="0"/>
+          </a:p>
+        </p:txBody>
+      </p:sp>
+      <p:sp>
+        <p:nvSpPr>
+          <p:cNvPr id="6" name="Text 4"/>
+          <p:cNvSpPr txBox="1"/>
+          <p:nvPr/>
+        </p:nvSpPr>
+        <p:spPr>
+          <a:xfrm>
+            <a:off x="713232" y="2051050"/>
+            <a:ext cx="6281928" cy="257429"/>
+          </a:xfrm>
+          <a:prstGeom prst="rect">
+            <a:avLst/>
+          </a:prstGeom>
+          <a:noFill/>
+          <a:ln/>
+        </p:spPr>
+        <p:txBody>
+          <a:bodyPr wrap="square" lIns="0" tIns="0" rIns="0" bIns="0" rtlCol="0" anchor="t"/>
+          <a:lstStyle/>
+          <a:p>
+            <a:pPr marL="342900" indent="-342900">
+              <a:lnSpc>
+                <a:spcPct val="125000"/>
+              </a:lnSpc>
+              <a:buSzPct val="100000"/>
+              <a:buChar char="●"/>
+            </a:pPr>
+            <a:r>
+              <a:rPr lang="en-US" sz="1100" b="1" dirty="0">
+                <a:solidFill>
+                  <a:srgbClr val="222222"/>
+                </a:solidFill>
+                <a:latin typeface="Calibri" pitchFamily="34" charset="0"/>
+                <a:ea typeface="Calibri" pitchFamily="34" charset="-122"/>
+                <a:cs typeface="Calibri" pitchFamily="34" charset="-120"/>
+              </a:rPr>
+              <a:t>交換済み</a:t>
+            </a:r>
+            <a:pPr indent="0" marL="0">
+              <a:lnSpc>
+                <a:spcPct val="125000"/>
+              </a:lnSpc>
+              <a:buNone/>
+            </a:pPr>
+            <a:r>
+              <a:rPr lang="en-US" sz="1100" dirty="0">
+                <a:solidFill>
+                  <a:srgbClr val="222222"/>
+                </a:solidFill>
+                <a:latin typeface="Calibri" pitchFamily="34" charset="0"/>
+                <a:ea typeface="Calibri" pitchFamily="34" charset="-122"/>
+                <a:cs typeface="Calibri" pitchFamily="34" charset="-120"/>
+              </a:rPr>
+              <a:t>：これまでにお渡しした数</a:t>
+            </a:r>
+            <a:endParaRPr lang="en-US" sz="1100" dirty="0"/>
+          </a:p>
+        </p:txBody>
+      </p:sp>
+      <p:sp>
+        <p:nvSpPr>
+          <p:cNvPr id="7" name="Text 5"/>
+          <p:cNvSpPr txBox="1"/>
+          <p:nvPr/>
+        </p:nvSpPr>
+        <p:spPr>
+          <a:xfrm>
+            <a:off x="713232" y="2326767"/>
+            <a:ext cx="6281928" cy="257429"/>
+          </a:xfrm>
+          <a:prstGeom prst="rect">
+            <a:avLst/>
+          </a:prstGeom>
+          <a:noFill/>
+          <a:ln/>
+        </p:spPr>
+        <p:txBody>
+          <a:bodyPr wrap="square" lIns="0" tIns="0" rIns="0" bIns="0" rtlCol="0" anchor="t"/>
+          <a:lstStyle/>
+          <a:p>
+            <a:pPr marL="342900" indent="-342900">
+              <a:lnSpc>
+                <a:spcPct val="125000"/>
+              </a:lnSpc>
+              <a:buSzPct val="100000"/>
+              <a:buChar char="●"/>
+            </a:pPr>
+            <a:r>
+              <a:rPr lang="en-US" sz="1100" b="1" dirty="0">
+                <a:solidFill>
+                  <a:srgbClr val="222222"/>
+                </a:solidFill>
+                <a:latin typeface="Calibri" pitchFamily="34" charset="0"/>
+                <a:ea typeface="Calibri" pitchFamily="34" charset="-122"/>
+                <a:cs typeface="Calibri" pitchFamily="34" charset="-120"/>
+              </a:rPr>
+              <a:t>残り</a:t>
+            </a:r>
+            <a:pPr indent="0" marL="0">
+              <a:lnSpc>
+                <a:spcPct val="125000"/>
+              </a:lnSpc>
+              <a:buNone/>
+            </a:pPr>
+            <a:r>
+              <a:rPr lang="en-US" sz="1100" dirty="0">
+                <a:solidFill>
+                  <a:srgbClr val="222222"/>
+                </a:solidFill>
+                <a:latin typeface="Calibri" pitchFamily="34" charset="0"/>
+                <a:ea typeface="Calibri" pitchFamily="34" charset="-122"/>
+                <a:cs typeface="Calibri" pitchFamily="34" charset="-120"/>
+              </a:rPr>
+              <a:t>：残っている数（「—」は数量を管理していない景品）</a:t>
+            </a:r>
+            <a:endParaRPr lang="en-US" sz="1100" dirty="0"/>
+          </a:p>
+        </p:txBody>
+      </p:sp>
+      <p:sp>
+        <p:nvSpPr>
+          <p:cNvPr id="8" name="Text 6"/>
+          <p:cNvSpPr txBox="1"/>
+          <p:nvPr/>
+        </p:nvSpPr>
+        <p:spPr>
+          <a:xfrm>
+            <a:off x="713232" y="2602484"/>
+            <a:ext cx="6281928" cy="257429"/>
+          </a:xfrm>
+          <a:prstGeom prst="rect">
+            <a:avLst/>
+          </a:prstGeom>
+          <a:noFill/>
+          <a:ln/>
+        </p:spPr>
+        <p:txBody>
+          <a:bodyPr wrap="square" lIns="0" tIns="0" rIns="0" bIns="0" rtlCol="0" anchor="t"/>
+          <a:lstStyle/>
+          <a:p>
+            <a:pPr marL="342900" indent="-342900">
+              <a:lnSpc>
+                <a:spcPct val="125000"/>
+              </a:lnSpc>
+              <a:buSzPct val="100000"/>
+              <a:buChar char="●"/>
+            </a:pPr>
+            <a:r>
+              <a:rPr lang="en-US" sz="1100" b="1" dirty="0">
+                <a:solidFill>
+                  <a:srgbClr val="222222"/>
+                </a:solidFill>
+                <a:latin typeface="Calibri" pitchFamily="34" charset="0"/>
+                <a:ea typeface="Calibri" pitchFamily="34" charset="-122"/>
+                <a:cs typeface="Calibri" pitchFamily="34" charset="-120"/>
+              </a:rPr>
+              <a:t>超過</a:t>
+            </a:r>
+            <a:pPr indent="0" marL="0">
+              <a:lnSpc>
+                <a:spcPct val="125000"/>
+              </a:lnSpc>
+              <a:buNone/>
+            </a:pPr>
+            <a:r>
+              <a:rPr lang="en-US" sz="1100" dirty="0">
+                <a:solidFill>
+                  <a:srgbClr val="222222"/>
+                </a:solidFill>
+                <a:latin typeface="Calibri" pitchFamily="34" charset="0"/>
+                <a:ea typeface="Calibri" pitchFamily="34" charset="-122"/>
+                <a:cs typeface="Calibri" pitchFamily="34" charset="-120"/>
+              </a:rPr>
+              <a:t>：用意した数を超えてお渡しした数</a:t>
+            </a:r>
+            <a:endParaRPr lang="en-US" sz="1100" dirty="0"/>
+          </a:p>
+        </p:txBody>
+      </p:sp>
+      <p:sp>
+        <p:nvSpPr>
+          <p:cNvPr id="9" name="Shape 7"/>
+          <p:cNvSpPr/>
+          <p:nvPr/>
+        </p:nvSpPr>
+        <p:spPr>
+          <a:xfrm>
+            <a:off x="566928" y="2878201"/>
+            <a:ext cx="6428232" cy="431102"/>
+          </a:xfrm>
+          <a:prstGeom prst="roundRect">
+            <a:avLst>
+              <a:gd name="adj" fmla="val 12726"/>
+            </a:avLst>
+          </a:prstGeom>
+          <a:solidFill>
+            <a:srgbClr val="FAEAE7"/>
+          </a:solidFill>
+          <a:ln w="9525">
+            <a:solidFill>
+              <a:srgbClr val="B85042"/>
+            </a:solidFill>
+            <a:prstDash val="solid"/>
+          </a:ln>
+        </p:spPr>
+      </p:sp>
+      <p:sp>
+        <p:nvSpPr>
+          <p:cNvPr id="10" name="Text 8"/>
+          <p:cNvSpPr txBox="1"/>
+          <p:nvPr/>
+        </p:nvSpPr>
+        <p:spPr>
+          <a:xfrm>
+            <a:off x="658368" y="2969641"/>
+            <a:ext cx="237744" cy="237744"/>
+          </a:xfrm>
+          <a:prstGeom prst="rect">
+            <a:avLst/>
+          </a:prstGeom>
+          <a:noFill/>
+          <a:ln/>
+        </p:spPr>
+        <p:txBody>
+          <a:bodyPr wrap="square" lIns="0" tIns="0" rIns="0" bIns="0" rtlCol="0" anchor="ctr"/>
+          <a:lstStyle/>
+          <a:p>
+            <a:pPr algn="ctr" indent="0" marL="0">
+              <a:buNone/>
+            </a:pPr>
+            <a:r>
+              <a:rPr lang="en-US" sz="1200" b="1" dirty="0">
+                <a:solidFill>
+                  <a:srgbClr val="B85042"/>
+                </a:solidFill>
+                <a:latin typeface="Calibri" pitchFamily="34" charset="0"/>
+                <a:ea typeface="Calibri" pitchFamily="34" charset="-122"/>
+                <a:cs typeface="Calibri" pitchFamily="34" charset="-120"/>
+              </a:rPr>
+              <a:t>i</a:t>
+            </a:r>
+            <a:endParaRPr lang="en-US" sz="1200" dirty="0"/>
+          </a:p>
+        </p:txBody>
+      </p:sp>
+      <p:sp>
+        <p:nvSpPr>
+          <p:cNvPr id="11" name="Text 9"/>
+          <p:cNvSpPr txBox="1"/>
+          <p:nvPr/>
+        </p:nvSpPr>
+        <p:spPr>
+          <a:xfrm>
+            <a:off x="950976" y="2987929"/>
+            <a:ext cx="5925312" cy="248221"/>
+          </a:xfrm>
+          <a:prstGeom prst="rect">
+            <a:avLst/>
+          </a:prstGeom>
+          <a:noFill/>
+          <a:ln/>
+        </p:spPr>
+        <p:txBody>
+          <a:bodyPr wrap="square" lIns="0" tIns="0" rIns="0" bIns="0" rtlCol="0" anchor="t"/>
+          <a:lstStyle/>
+          <a:p>
+            <a:pPr indent="0" marL="0">
+              <a:lnSpc>
+                <a:spcPct val="120000"/>
+              </a:lnSpc>
+              <a:buNone/>
+            </a:pPr>
+            <a:r>
+              <a:rPr lang="en-US" sz="1050" dirty="0">
+                <a:solidFill>
+                  <a:srgbClr val="222222"/>
+                </a:solidFill>
+                <a:latin typeface="Calibri" pitchFamily="34" charset="0"/>
+                <a:ea typeface="Calibri" pitchFamily="34" charset="-122"/>
+                <a:cs typeface="Calibri" pitchFamily="34" charset="-120"/>
+              </a:rPr>
+              <a:t>残りが少なくなってきたら、早めに事務局へお知らせください。</a:t>
+            </a:r>
+            <a:endParaRPr lang="en-US" sz="1050" dirty="0"/>
+          </a:p>
+        </p:txBody>
+      </p:sp>
+      <p:pic>
+        <p:nvPicPr>
+          <p:cNvPr id="12" name="Image 0" descr="C:\Users\sato\Desktop\enque\docs\images\p-stock.png">    </p:cNvPr>
+          <p:cNvPicPr>
+            <a:picLocks noChangeAspect="1"/>
+          </p:cNvPicPr>
+          <p:nvPr/>
+        </p:nvPicPr>
+        <p:blipFill>
+          <a:blip r:embed="rId1"/>
+          <a:stretch>
+            <a:fillRect/>
+          </a:stretch>
+        </p:blipFill>
+        <p:spPr>
+          <a:xfrm>
+            <a:off x="2018596" y="3382455"/>
+            <a:ext cx="3524896" cy="3474720"/>
+          </a:xfrm>
+          <a:prstGeom prst="rect">
+            <a:avLst/>
+          </a:prstGeom>
+        </p:spPr>
+      </p:pic>
+      <p:sp>
+        <p:nvSpPr>
+          <p:cNvPr id="13" name="Text 10"/>
+          <p:cNvSpPr txBox="1"/>
+          <p:nvPr/>
+        </p:nvSpPr>
+        <p:spPr>
+          <a:xfrm>
+            <a:off x="566928" y="6912039"/>
+            <a:ext cx="6428232" cy="274320"/>
+          </a:xfrm>
+          <a:prstGeom prst="rect">
+            <a:avLst/>
+          </a:prstGeom>
+          <a:noFill/>
+          <a:ln/>
+        </p:spPr>
+        <p:txBody>
+          <a:bodyPr wrap="square" lIns="0" tIns="0" rIns="0" bIns="0" rtlCol="0" anchor="ctr"/>
+          <a:lstStyle/>
+          <a:p>
+            <a:pPr algn="ctr" indent="0" marL="0">
+              <a:buNone/>
+            </a:pPr>
+            <a:r>
+              <a:rPr lang="en-US" sz="950" dirty="0">
+                <a:solidFill>
+                  <a:srgbClr val="6B6B6B"/>
+                </a:solidFill>
+                <a:latin typeface="Calibri" pitchFamily="34" charset="0"/>
+                <a:ea typeface="Calibri" pitchFamily="34" charset="-122"/>
+                <a:cs typeface="Calibri" pitchFamily="34" charset="-120"/>
+              </a:rPr>
+              <a:t>照会画面の下部にある「景品の残数」の表。</a:t>
+            </a:r>
+            <a:endParaRPr lang="en-US" sz="950" dirty="0"/>
+          </a:p>
+        </p:txBody>
+      </p:sp>
+      <p:sp>
+        <p:nvSpPr>
+          <p:cNvPr id="14" name="Text 11"/>
+          <p:cNvSpPr txBox="1"/>
+          <p:nvPr/>
+        </p:nvSpPr>
+        <p:spPr>
+          <a:xfrm>
+            <a:off x="566928" y="10186416"/>
+            <a:ext cx="6428232" cy="228600"/>
+          </a:xfrm>
+          <a:prstGeom prst="rect">
+            <a:avLst/>
+          </a:prstGeom>
+          <a:noFill/>
+          <a:ln/>
+        </p:spPr>
+        <p:txBody>
+          <a:bodyPr wrap="square" lIns="0" tIns="0" rIns="0" bIns="0" rtlCol="0" anchor="ctr"/>
+          <a:lstStyle/>
+          <a:p>
+            <a:pPr algn="r" indent="0" marL="0">
+              <a:buNone/>
+            </a:pPr>
+            <a:r>
+              <a:rPr lang="en-US" sz="900" dirty="0">
+                <a:solidFill>
+                  <a:srgbClr val="6B6B6B"/>
+                </a:solidFill>
+                <a:latin typeface="Calibri" pitchFamily="34" charset="0"/>
+                <a:ea typeface="Calibri" pitchFamily="34" charset="-122"/>
+                <a:cs typeface="Calibri" pitchFamily="34" charset="-120"/>
+              </a:rPr>
+              <a:t>総合受付向け　11</a:t>
+            </a:r>
+            <a:endParaRPr lang="en-US" sz="900" dirty="0"/>
+          </a:p>
+        </p:txBody>
+      </p:sp>
+    </p:spTree>
+  </p:cSld>
+  <p:clrMapOvr>
+    <a:masterClrMapping/>
+  </p:clrMapOvr>
+</p:sld>
+</file>
+
+<file path=ppt/slides/slide12.xml><?xml version="1.0" encoding="utf-8"?>
+<p:sld xmlns:a="http://schemas.openxmlformats.org/drawingml/2006/main" xmlns:r="http://schemas.openxmlformats.org/officeDocument/2006/relationships" xmlns:p="http://schemas.openxmlformats.org/presentationml/2006/main">
+  <p:cSld name="Slide 12">
+    <p:bg>
+      <p:bgPr>
+        <a:solidFill>
+          <a:srgbClr val="FFFFFF"/>
+        </a:solidFill>
+      </p:bgPr>
+    </p:bg>
+    <p:spTree>
+      <p:nvGrpSpPr>
+        <p:cNvPr id="1" name=""/>
+        <p:cNvGrpSpPr/>
+        <p:nvPr/>
+      </p:nvGrpSpPr>
+      <p:grpSpPr>
+        <a:xfrm>
+          <a:off x="0" y="0"/>
+          <a:ext cx="0" cy="0"/>
+          <a:chOff x="0" y="0"/>
+          <a:chExt cx="0" cy="0"/>
+        </a:xfrm>
+      </p:grpSpPr>
+      <p:sp>
+        <p:nvSpPr>
+          <p:cNvPr id="2" name="Text 0"/>
+          <p:cNvSpPr txBox="1"/>
+          <p:nvPr/>
+        </p:nvSpPr>
+        <p:spPr>
+          <a:xfrm>
+            <a:off x="566928" y="457200"/>
+            <a:ext cx="6428232" cy="237744"/>
+          </a:xfrm>
+          <a:prstGeom prst="rect">
+            <a:avLst/>
+          </a:prstGeom>
+          <a:noFill/>
+          <a:ln/>
+        </p:spPr>
+        <p:txBody>
+          <a:bodyPr wrap="square" lIns="0" tIns="0" rIns="0" bIns="0" rtlCol="0" anchor="ctr"/>
+          <a:lstStyle/>
+          <a:p>
+            <a:pPr indent="0" marL="0">
+              <a:buNone/>
+            </a:pPr>
+            <a:r>
+              <a:rPr lang="en-US" sz="1000" b="1" dirty="0">
+                <a:solidFill>
+                  <a:srgbClr val="B85042"/>
+                </a:solidFill>
+                <a:latin typeface="Calibri" pitchFamily="34" charset="0"/>
+                <a:ea typeface="Calibri" pitchFamily="34" charset="-122"/>
+                <a:cs typeface="Calibri" pitchFamily="34" charset="-120"/>
+              </a:rPr>
+              <a:t>総合受付マニュアル</a:t>
+            </a:r>
+            <a:endParaRPr lang="en-US" sz="1000" dirty="0"/>
+          </a:p>
+        </p:txBody>
+      </p:sp>
+      <p:sp>
+        <p:nvSpPr>
+          <p:cNvPr id="3" name="Text 1"/>
+          <p:cNvSpPr txBox="1"/>
+          <p:nvPr/>
+        </p:nvSpPr>
+        <p:spPr>
+          <a:xfrm>
+            <a:off x="566928" y="713232"/>
+            <a:ext cx="6428232" cy="640080"/>
+          </a:xfrm>
+          <a:prstGeom prst="rect">
+            <a:avLst/>
+          </a:prstGeom>
+          <a:noFill/>
+          <a:ln/>
+        </p:spPr>
+        <p:txBody>
+          <a:bodyPr wrap="square" lIns="0" tIns="0" rIns="0" bIns="0" rtlCol="0" anchor="t"/>
+          <a:lstStyle/>
+          <a:p>
+            <a:pPr indent="0" marL="0">
+              <a:buNone/>
+            </a:pPr>
+            <a:r>
+              <a:rPr lang="en-US" sz="2200" b="1" dirty="0">
+                <a:solidFill>
+                  <a:srgbClr val="222222"/>
+                </a:solidFill>
+                <a:latin typeface="Calibri" pitchFamily="34" charset="0"/>
+                <a:ea typeface="Calibri" pitchFamily="34" charset="-122"/>
+                <a:cs typeface="Calibri" pitchFamily="34" charset="-120"/>
+              </a:rPr>
               <a:t>困ったときは</a:t>
             </a:r>
             <a:endParaRPr lang="en-US" sz="2200" dirty="0"/>
@@ -2779,7 +3632,7 @@
                 <a:ea typeface="Calibri" pitchFamily="34" charset="-122"/>
                 <a:cs typeface="Calibri" pitchFamily="34" charset="-120"/>
               </a:rPr>
-              <a:t>（例：ABCD-2345）を、照会画面の入力欄に手で入力して「照会する」を押してください。小文字やハイフンなしで入力しても大丈夫です。</a:t>
+              <a:t>（例：ABCD-2345）を、読み取り欄に手で入力して「照会する」を押してください。小文字やハイフンなしで入力しても大丈夫です。</a:t>
             </a:r>
             <a:endParaRPr lang="en-US" sz="1100" dirty="0"/>
           </a:p>
@@ -2787,13 +3640,155 @@
       </p:sp>
       <p:sp>
         <p:nvSpPr>
-          <p:cNvPr id="6" name="Text 4"/>
-          <p:cNvSpPr txBox="1"/>
-          <p:nvPr/>
-        </p:nvSpPr>
-        <p:spPr>
-          <a:xfrm>
-            <a:off x="566928" y="2528316"/>
+          <p:cNvPr id="6" name="Shape 4"/>
+          <p:cNvSpPr/>
+          <p:nvPr/>
+        </p:nvSpPr>
+        <p:spPr>
+          <a:xfrm>
+            <a:off x="566928" y="2418588"/>
+            <a:ext cx="6428232" cy="624459"/>
+          </a:xfrm>
+          <a:prstGeom prst="roundRect">
+            <a:avLst>
+              <a:gd name="adj" fmla="val 8786"/>
+            </a:avLst>
+          </a:prstGeom>
+          <a:solidFill>
+            <a:srgbClr val="FAEAE7"/>
+          </a:solidFill>
+          <a:ln w="9525">
+            <a:solidFill>
+              <a:srgbClr val="B85042"/>
+            </a:solidFill>
+            <a:prstDash val="solid"/>
+          </a:ln>
+        </p:spPr>
+      </p:sp>
+      <p:sp>
+        <p:nvSpPr>
+          <p:cNvPr id="7" name="Text 5"/>
+          <p:cNvSpPr txBox="1"/>
+          <p:nvPr/>
+        </p:nvSpPr>
+        <p:spPr>
+          <a:xfrm>
+            <a:off x="658368" y="2510028"/>
+            <a:ext cx="237744" cy="237744"/>
+          </a:xfrm>
+          <a:prstGeom prst="rect">
+            <a:avLst/>
+          </a:prstGeom>
+          <a:noFill/>
+          <a:ln/>
+        </p:spPr>
+        <p:txBody>
+          <a:bodyPr wrap="square" lIns="0" tIns="0" rIns="0" bIns="0" rtlCol="0" anchor="ctr"/>
+          <a:lstStyle/>
+          <a:p>
+            <a:pPr algn="ctr" indent="0" marL="0">
+              <a:buNone/>
+            </a:pPr>
+            <a:r>
+              <a:rPr lang="en-US" sz="1200" b="1" dirty="0">
+                <a:solidFill>
+                  <a:srgbClr val="B85042"/>
+                </a:solidFill>
+                <a:latin typeface="Calibri" pitchFamily="34" charset="0"/>
+                <a:ea typeface="Calibri" pitchFamily="34" charset="-122"/>
+                <a:cs typeface="Calibri" pitchFamily="34" charset="-120"/>
+              </a:rPr>
+              <a:t>i</a:t>
+            </a:r>
+            <a:endParaRPr lang="en-US" sz="1200" dirty="0"/>
+          </a:p>
+        </p:txBody>
+      </p:sp>
+      <p:sp>
+        <p:nvSpPr>
+          <p:cNvPr id="8" name="Text 6"/>
+          <p:cNvSpPr txBox="1"/>
+          <p:nvPr/>
+        </p:nvSpPr>
+        <p:spPr>
+          <a:xfrm>
+            <a:off x="950976" y="2528316"/>
+            <a:ext cx="5925312" cy="441579"/>
+          </a:xfrm>
+          <a:prstGeom prst="rect">
+            <a:avLst/>
+          </a:prstGeom>
+          <a:noFill/>
+          <a:ln/>
+        </p:spPr>
+        <p:txBody>
+          <a:bodyPr wrap="square" lIns="0" tIns="0" rIns="0" bIns="0" rtlCol="0" anchor="t"/>
+          <a:lstStyle/>
+          <a:p>
+            <a:pPr indent="0" marL="0">
+              <a:lnSpc>
+                <a:spcPct val="120000"/>
+              </a:lnSpc>
+              <a:buNone/>
+            </a:pPr>
+            <a:r>
+              <a:rPr lang="en-US" sz="1050" dirty="0">
+                <a:solidFill>
+                  <a:srgbClr val="222222"/>
+                </a:solidFill>
+                <a:latin typeface="Calibri" pitchFamily="34" charset="0"/>
+                <a:ea typeface="Calibri" pitchFamily="34" charset="-122"/>
+                <a:cs typeface="Calibri" pitchFamily="34" charset="-120"/>
+              </a:rPr>
+              <a:t>リーダーが読み取った文字（</a:t>
+            </a:r>
+            <a:pPr indent="0" marL="0">
+              <a:lnSpc>
+                <a:spcPct val="120000"/>
+              </a:lnSpc>
+              <a:buNone/>
+            </a:pPr>
+            <a:r>
+              <a:rPr lang="en-US" sz="998" dirty="0">
+                <a:solidFill>
+                  <a:srgbClr val="222222"/>
+                </a:solidFill>
+                <a:latin typeface="Courier New" pitchFamily="34" charset="0"/>
+                <a:ea typeface="Courier New" pitchFamily="34" charset="-122"/>
+                <a:cs typeface="Courier New" pitchFamily="34" charset="-120"/>
+              </a:rPr>
+              <a:t>https://…/c/ABCD-2345</a:t>
+            </a:r>
+            <a:pPr indent="0" marL="0">
+              <a:lnSpc>
+                <a:spcPct val="120000"/>
+              </a:lnSpc>
+              <a:buNone/>
+            </a:pPr>
+            <a:r>
+              <a:rPr lang="en-US" sz="1050" dirty="0">
+                <a:solidFill>
+                  <a:srgbClr val="222222"/>
+                </a:solidFill>
+                <a:latin typeface="Calibri" pitchFamily="34" charset="0"/>
+                <a:ea typeface="Calibri" pitchFamily="34" charset="-122"/>
+                <a:cs typeface="Calibri" pitchFamily="34" charset="-120"/>
+              </a:rPr>
+              <a:t> のようなURL）がそのまま入っても照会できます。貼り付けでも構いません。</a:t>
+            </a:r>
+            <a:endParaRPr lang="en-US" sz="1050" dirty="0"/>
+          </a:p>
+        </p:txBody>
+      </p:sp>
+      <p:sp>
+        <p:nvSpPr>
+          <p:cNvPr id="9" name="Text 7"/>
+          <p:cNvSpPr txBox="1"/>
+          <p:nvPr/>
+        </p:nvSpPr>
+        <p:spPr>
+          <a:xfrm>
+            <a:off x="566928" y="3225927"/>
             <a:ext cx="6428232" cy="257810"/>
           </a:xfrm>
           <a:prstGeom prst="rect">
@@ -2826,13 +3821,13 @@
       </p:sp>
       <p:sp>
         <p:nvSpPr>
-          <p:cNvPr id="7" name="Text 5"/>
-          <p:cNvSpPr txBox="1"/>
-          <p:nvPr/>
-        </p:nvSpPr>
-        <p:spPr>
-          <a:xfrm>
-            <a:off x="566928" y="2859278"/>
+          <p:cNvPr id="10" name="Text 8"/>
+          <p:cNvSpPr txBox="1"/>
+          <p:nvPr/>
+        </p:nvSpPr>
+        <p:spPr>
+          <a:xfrm>
+            <a:off x="566928" y="3556889"/>
             <a:ext cx="6428232" cy="459994"/>
           </a:xfrm>
           <a:prstGeom prst="rect">
@@ -2902,13 +3897,13 @@
       </p:sp>
       <p:sp>
         <p:nvSpPr>
-          <p:cNvPr id="8" name="Text 6"/>
-          <p:cNvSpPr txBox="1"/>
-          <p:nvPr/>
-        </p:nvSpPr>
-        <p:spPr>
-          <a:xfrm>
-            <a:off x="566928" y="3465576"/>
+          <p:cNvPr id="11" name="Text 9"/>
+          <p:cNvSpPr txBox="1"/>
+          <p:nvPr/>
+        </p:nvSpPr>
+        <p:spPr>
+          <a:xfrm>
+            <a:off x="566928" y="4163187"/>
             <a:ext cx="6428232" cy="257810"/>
           </a:xfrm>
           <a:prstGeom prst="rect">
@@ -2941,13 +3936,13 @@
       </p:sp>
       <p:sp>
         <p:nvSpPr>
-          <p:cNvPr id="9" name="Text 7"/>
-          <p:cNvSpPr txBox="1"/>
-          <p:nvPr/>
-        </p:nvSpPr>
-        <p:spPr>
-          <a:xfrm>
-            <a:off x="566928" y="3796538"/>
+          <p:cNvPr id="12" name="Text 10"/>
+          <p:cNvSpPr txBox="1"/>
+          <p:nvPr/>
+        </p:nvSpPr>
+        <p:spPr>
+          <a:xfrm>
+            <a:off x="566928" y="4494149"/>
             <a:ext cx="6428232" cy="459994"/>
           </a:xfrm>
           <a:prstGeom prst="rect">
@@ -3017,13 +4012,13 @@
       </p:sp>
       <p:sp>
         <p:nvSpPr>
-          <p:cNvPr id="10" name="Text 8"/>
-          <p:cNvSpPr txBox="1"/>
-          <p:nvPr/>
-        </p:nvSpPr>
-        <p:spPr>
-          <a:xfrm>
-            <a:off x="566928" y="4293108"/>
+          <p:cNvPr id="13" name="Text 11"/>
+          <p:cNvSpPr txBox="1"/>
+          <p:nvPr/>
+        </p:nvSpPr>
+        <p:spPr>
+          <a:xfrm>
+            <a:off x="566928" y="4990719"/>
             <a:ext cx="6428232" cy="257429"/>
           </a:xfrm>
           <a:prstGeom prst="rect">
@@ -3059,13 +4054,13 @@
       </p:sp>
       <p:sp>
         <p:nvSpPr>
-          <p:cNvPr id="11" name="Text 9"/>
-          <p:cNvSpPr txBox="1"/>
-          <p:nvPr/>
-        </p:nvSpPr>
-        <p:spPr>
-          <a:xfrm>
-            <a:off x="713232" y="4587113"/>
+          <p:cNvPr id="14" name="Text 12"/>
+          <p:cNvSpPr txBox="1"/>
+          <p:nvPr/>
+        </p:nvSpPr>
+        <p:spPr>
+          <a:xfrm>
+            <a:off x="713232" y="5284724"/>
             <a:ext cx="6281928" cy="459994"/>
           </a:xfrm>
           <a:prstGeom prst="rect">
@@ -3102,13 +4097,13 @@
       </p:sp>
       <p:sp>
         <p:nvSpPr>
-          <p:cNvPr id="12" name="Text 10"/>
-          <p:cNvSpPr txBox="1"/>
-          <p:nvPr/>
-        </p:nvSpPr>
-        <p:spPr>
-          <a:xfrm>
-            <a:off x="713232" y="5065395"/>
+          <p:cNvPr id="15" name="Text 13"/>
+          <p:cNvSpPr txBox="1"/>
+          <p:nvPr/>
+        </p:nvSpPr>
+        <p:spPr>
+          <a:xfrm>
+            <a:off x="713232" y="5763006"/>
             <a:ext cx="6281928" cy="459994"/>
           </a:xfrm>
           <a:prstGeom prst="rect">
@@ -3162,13 +4157,13 @@
       </p:sp>
       <p:sp>
         <p:nvSpPr>
-          <p:cNvPr id="13" name="Text 11"/>
-          <p:cNvSpPr txBox="1"/>
-          <p:nvPr/>
-        </p:nvSpPr>
-        <p:spPr>
-          <a:xfrm>
-            <a:off x="566928" y="5653405"/>
+          <p:cNvPr id="16" name="Text 14"/>
+          <p:cNvSpPr txBox="1"/>
+          <p:nvPr/>
+        </p:nvSpPr>
+        <p:spPr>
+          <a:xfrm>
+            <a:off x="566928" y="6351016"/>
             <a:ext cx="6428232" cy="257810"/>
           </a:xfrm>
           <a:prstGeom prst="rect">
@@ -3201,13 +4196,13 @@
       </p:sp>
       <p:sp>
         <p:nvSpPr>
-          <p:cNvPr id="14" name="Text 12"/>
-          <p:cNvSpPr txBox="1"/>
-          <p:nvPr/>
-        </p:nvSpPr>
-        <p:spPr>
-          <a:xfrm>
-            <a:off x="566928" y="5984367"/>
+          <p:cNvPr id="17" name="Text 15"/>
+          <p:cNvSpPr txBox="1"/>
+          <p:nvPr/>
+        </p:nvSpPr>
+        <p:spPr>
+          <a:xfrm>
+            <a:off x="566928" y="6681978"/>
             <a:ext cx="6428232" cy="257429"/>
           </a:xfrm>
           <a:prstGeom prst="rect">
@@ -3277,13 +4272,13 @@
       </p:sp>
       <p:sp>
         <p:nvSpPr>
-          <p:cNvPr id="15" name="Text 13"/>
-          <p:cNvSpPr txBox="1"/>
-          <p:nvPr/>
-        </p:nvSpPr>
-        <p:spPr>
-          <a:xfrm>
-            <a:off x="566928" y="6278372"/>
+          <p:cNvPr id="18" name="Text 16"/>
+          <p:cNvSpPr txBox="1"/>
+          <p:nvPr/>
+        </p:nvSpPr>
+        <p:spPr>
+          <a:xfrm>
+            <a:off x="566928" y="6975983"/>
             <a:ext cx="6428232" cy="257429"/>
           </a:xfrm>
           <a:prstGeom prst="rect">
@@ -3336,13 +4331,13 @@
       </p:sp>
       <p:sp>
         <p:nvSpPr>
-          <p:cNvPr id="16" name="Text 14"/>
-          <p:cNvSpPr txBox="1"/>
-          <p:nvPr/>
-        </p:nvSpPr>
-        <p:spPr>
-          <a:xfrm>
-            <a:off x="566928" y="6572377"/>
+          <p:cNvPr id="19" name="Text 17"/>
+          <p:cNvSpPr txBox="1"/>
+          <p:nvPr/>
+        </p:nvSpPr>
+        <p:spPr>
+          <a:xfrm>
+            <a:off x="566928" y="7269988"/>
             <a:ext cx="6428232" cy="257429"/>
           </a:xfrm>
           <a:prstGeom prst="rect">
@@ -3378,13 +4373,13 @@
       </p:sp>
       <p:sp>
         <p:nvSpPr>
-          <p:cNvPr id="17" name="Text 15"/>
-          <p:cNvSpPr txBox="1"/>
-          <p:nvPr/>
-        </p:nvSpPr>
-        <p:spPr>
-          <a:xfrm>
-            <a:off x="566928" y="6976110"/>
+          <p:cNvPr id="20" name="Text 18"/>
+          <p:cNvSpPr txBox="1"/>
+          <p:nvPr/>
+        </p:nvSpPr>
+        <p:spPr>
+          <a:xfrm>
+            <a:off x="566928" y="7673721"/>
             <a:ext cx="6428232" cy="257810"/>
           </a:xfrm>
           <a:prstGeom prst="rect">
@@ -3417,13 +4412,13 @@
       </p:sp>
       <p:sp>
         <p:nvSpPr>
-          <p:cNvPr id="18" name="Text 16"/>
-          <p:cNvSpPr txBox="1"/>
-          <p:nvPr/>
-        </p:nvSpPr>
-        <p:spPr>
-          <a:xfrm>
-            <a:off x="713232" y="7307072"/>
+          <p:cNvPr id="21" name="Text 19"/>
+          <p:cNvSpPr txBox="1"/>
+          <p:nvPr/>
+        </p:nvSpPr>
+        <p:spPr>
+          <a:xfrm>
+            <a:off x="713232" y="8004683"/>
             <a:ext cx="6281928" cy="459994"/>
           </a:xfrm>
           <a:prstGeom prst="rect">
@@ -3460,13 +4455,13 @@
       </p:sp>
       <p:sp>
         <p:nvSpPr>
-          <p:cNvPr id="19" name="Text 17"/>
-          <p:cNvSpPr txBox="1"/>
-          <p:nvPr/>
-        </p:nvSpPr>
-        <p:spPr>
-          <a:xfrm>
-            <a:off x="713232" y="7785354"/>
+          <p:cNvPr id="22" name="Text 20"/>
+          <p:cNvSpPr txBox="1"/>
+          <p:nvPr/>
+        </p:nvSpPr>
+        <p:spPr>
+          <a:xfrm>
+            <a:off x="713232" y="8482965"/>
             <a:ext cx="6281928" cy="459994"/>
           </a:xfrm>
           <a:prstGeom prst="rect">
@@ -3503,13 +4498,13 @@
       </p:sp>
       <p:sp>
         <p:nvSpPr>
-          <p:cNvPr id="20" name="Shape 18"/>
+          <p:cNvPr id="23" name="Shape 21"/>
           <p:cNvSpPr/>
           <p:nvPr/>
         </p:nvSpPr>
         <p:spPr>
           <a:xfrm>
-            <a:off x="566928" y="8263636"/>
+            <a:off x="566928" y="8961247"/>
             <a:ext cx="6428232" cy="624459"/>
           </a:xfrm>
           <a:prstGeom prst="roundRect">
@@ -3530,13 +4525,13 @@
       </p:sp>
       <p:sp>
         <p:nvSpPr>
-          <p:cNvPr id="21" name="Text 19"/>
-          <p:cNvSpPr txBox="1"/>
-          <p:nvPr/>
-        </p:nvSpPr>
-        <p:spPr>
-          <a:xfrm>
-            <a:off x="658368" y="8355076"/>
+          <p:cNvPr id="24" name="Text 22"/>
+          <p:cNvSpPr txBox="1"/>
+          <p:nvPr/>
+        </p:nvSpPr>
+        <p:spPr>
+          <a:xfrm>
+            <a:off x="658368" y="9052687"/>
             <a:ext cx="237744" cy="237744"/>
           </a:xfrm>
           <a:prstGeom prst="rect">
@@ -3569,13 +4564,13 @@
       </p:sp>
       <p:sp>
         <p:nvSpPr>
-          <p:cNvPr id="22" name="Text 20"/>
-          <p:cNvSpPr txBox="1"/>
-          <p:nvPr/>
-        </p:nvSpPr>
-        <p:spPr>
-          <a:xfrm>
-            <a:off x="950976" y="8373364"/>
+          <p:cNvPr id="25" name="Text 23"/>
+          <p:cNvSpPr txBox="1"/>
+          <p:nvPr/>
+        </p:nvSpPr>
+        <p:spPr>
+          <a:xfrm>
+            <a:off x="950976" y="9070975"/>
             <a:ext cx="5925312" cy="441579"/>
           </a:xfrm>
           <a:prstGeom prst="rect">
@@ -3611,7 +4606,7 @@
       </p:sp>
       <p:sp>
         <p:nvSpPr>
-          <p:cNvPr id="23" name="Text 21"/>
+          <p:cNvPr id="26" name="Text 24"/>
           <p:cNvSpPr txBox="1"/>
           <p:nvPr/>
         </p:nvSpPr>
@@ -3642,7 +4637,7 @@
                 <a:ea typeface="Calibri" pitchFamily="34" charset="-122"/>
                 <a:cs typeface="Calibri" pitchFamily="34" charset="-120"/>
               </a:rPr>
-              <a:t>総合受付向け　11</a:t>
+              <a:t>総合受付向け　12</a:t>
             </a:r>
             <a:endParaRPr lang="en-US" sz="900" dirty="0"/>
           </a:p>
@@ -3794,7 +4789,7 @@
                 <a:ea typeface="Calibri" pitchFamily="34" charset="-122"/>
                 <a:cs typeface="Calibri" pitchFamily="34" charset="-120"/>
               </a:rPr>
-              <a:t>受付で使うスマートフォンごとに、</a:t>
+              <a:t>受付で使う端末ごとに、</a:t>
             </a:r>
             <a:pPr indent="0" marL="0">
               <a:lnSpc>
@@ -3929,7 +4924,7 @@
                 <a:ea typeface="Calibri" pitchFamily="34" charset="-122"/>
                 <a:cs typeface="Calibri" pitchFamily="34" charset="-120"/>
               </a:rPr>
-              <a:t>スマートフォンのブラウザで、事務局から案内された</a:t>
+              <a:t>ブラウザで、事務局から案内された</a:t>
             </a:r>
             <a:pPr indent="0" marL="0">
               <a:lnSpc>
@@ -4449,46 +5444,81 @@
                 <a:ea typeface="Calibri" pitchFamily="34" charset="-122"/>
                 <a:cs typeface="Calibri" pitchFamily="34" charset="-120"/>
               </a:rPr>
-              <a:t>パスワードは受付スタッフ以外に教えないでください。スマートフォンを共用する場合は、画面ロックをかけておいてください。</a:t>
+              <a:t>パスワードは受付スタッフ以外に教えないでください。端末を共用する場合は、画面ロックをかけておいてください。</a:t>
             </a:r>
             <a:endParaRPr lang="en-US" sz="1050" dirty="0"/>
           </a:p>
         </p:txBody>
       </p:sp>
-      <p:pic>
-        <p:nvPicPr>
-          <p:cNvPr id="20" name="Image 0" descr="C:\Users\sato\Desktop\enque\docs\images\p-login.png">    </p:cNvPr>
-          <p:cNvPicPr>
-            <a:picLocks noChangeAspect="1"/>
-          </p:cNvPicPr>
-          <p:nvPr/>
-        </p:nvPicPr>
-        <p:blipFill>
-          <a:blip r:embed="rId1"/>
-          <a:stretch>
-            <a:fillRect/>
-          </a:stretch>
-        </p:blipFill>
-        <p:spPr>
-          <a:xfrm>
-            <a:off x="1546727" y="4744720"/>
-            <a:ext cx="4468633" cy="3474720"/>
-          </a:xfrm>
-          <a:prstGeom prst="rect">
-            <a:avLst/>
-          </a:prstGeom>
-        </p:spPr>
-      </p:pic>
-      <p:sp>
-        <p:nvSpPr>
-          <p:cNvPr id="21" name="Text 18"/>
-          <p:cNvSpPr txBox="1"/>
-          <p:nvPr/>
-        </p:nvSpPr>
-        <p:spPr>
-          <a:xfrm>
-            <a:off x="566928" y="8274304"/>
-            <a:ext cx="6428232" cy="274320"/>
+      <p:sp>
+        <p:nvSpPr>
+          <p:cNvPr id="20" name="Text 18"/>
+          <p:cNvSpPr txBox="1"/>
+          <p:nvPr/>
+        </p:nvSpPr>
+        <p:spPr>
+          <a:xfrm>
+            <a:off x="566928" y="4854448"/>
+            <a:ext cx="6428232" cy="257810"/>
+          </a:xfrm>
+          <a:prstGeom prst="rect">
+            <a:avLst/>
+          </a:prstGeom>
+          <a:noFill/>
+          <a:ln/>
+        </p:spPr>
+        <p:txBody>
+          <a:bodyPr wrap="square" lIns="0" tIns="0" rIns="0" bIns="0" rtlCol="0" anchor="t"/>
+          <a:lstStyle/>
+          <a:p>
+            <a:pPr indent="0" marL="0">
+              <a:buNone/>
+            </a:pPr>
+            <a:r>
+              <a:rPr lang="en-US" sz="1400" b="1" dirty="0">
+                <a:solidFill>
+                  <a:srgbClr val="B85042"/>
+                </a:solidFill>
+                <a:latin typeface="Calibri" pitchFamily="34" charset="0"/>
+                <a:ea typeface="Calibri" pitchFamily="34" charset="-122"/>
+                <a:cs typeface="Calibri" pitchFamily="34" charset="-120"/>
+              </a:rPr>
+              <a:t>パソコン＋バーコードリーダーを使う場合</a:t>
+            </a:r>
+            <a:endParaRPr lang="en-US" sz="1400" dirty="0"/>
+          </a:p>
+        </p:txBody>
+      </p:sp>
+      <p:sp>
+        <p:nvSpPr>
+          <p:cNvPr id="21" name="Shape 19"/>
+          <p:cNvSpPr/>
+          <p:nvPr/>
+        </p:nvSpPr>
+        <p:spPr>
+          <a:xfrm>
+            <a:off x="566928" y="5203698"/>
+            <a:ext cx="274320" cy="274320"/>
+          </a:xfrm>
+          <a:prstGeom prst="ellipse">
+            <a:avLst/>
+          </a:prstGeom>
+          <a:solidFill>
+            <a:srgbClr val="B85042"/>
+          </a:solidFill>
+          <a:ln/>
+        </p:spPr>
+      </p:sp>
+      <p:sp>
+        <p:nvSpPr>
+          <p:cNvPr id="22" name="Text 20"/>
+          <p:cNvSpPr txBox="1"/>
+          <p:nvPr/>
+        </p:nvSpPr>
+        <p:spPr>
+          <a:xfrm>
+            <a:off x="566928" y="5203698"/>
+            <a:ext cx="274320" cy="274320"/>
           </a:xfrm>
           <a:prstGeom prst="rect">
             <a:avLst/>
@@ -4504,30 +5534,30 @@
               <a:buNone/>
             </a:pPr>
             <a:r>
-              <a:rPr lang="en-US" sz="950" dirty="0">
-                <a:solidFill>
-                  <a:srgbClr val="6B6B6B"/>
-                </a:solidFill>
-                <a:latin typeface="Calibri" pitchFamily="34" charset="0"/>
-                <a:ea typeface="Calibri" pitchFamily="34" charset="-122"/>
-                <a:cs typeface="Calibri" pitchFamily="34" charset="-120"/>
-              </a:rPr>
-              <a:t>管理画面のログイン画面（スマートフォンの画面）。ユーザー名・パスワードの入力欄が見えるもの。</a:t>
-            </a:r>
-            <a:endParaRPr lang="en-US" sz="950" dirty="0"/>
-          </a:p>
-        </p:txBody>
-      </p:sp>
-      <p:sp>
-        <p:nvSpPr>
-          <p:cNvPr id="22" name="Text 19"/>
-          <p:cNvSpPr txBox="1"/>
-          <p:nvPr/>
-        </p:nvSpPr>
-        <p:spPr>
-          <a:xfrm>
-            <a:off x="566928" y="8713216"/>
-            <a:ext cx="6428232" cy="257810"/>
+              <a:rPr lang="en-US" sz="1100" b="1" dirty="0">
+                <a:solidFill>
+                  <a:srgbClr val="FFFFFF"/>
+                </a:solidFill>
+                <a:latin typeface="Calibri" pitchFamily="34" charset="0"/>
+                <a:ea typeface="Calibri" pitchFamily="34" charset="-122"/>
+                <a:cs typeface="Calibri" pitchFamily="34" charset="-120"/>
+              </a:rPr>
+              <a:t>1</a:t>
+            </a:r>
+            <a:endParaRPr lang="en-US" sz="1100" dirty="0"/>
+          </a:p>
+        </p:txBody>
+      </p:sp>
+      <p:sp>
+        <p:nvSpPr>
+          <p:cNvPr id="23" name="Text 21"/>
+          <p:cNvSpPr txBox="1"/>
+          <p:nvPr/>
+        </p:nvSpPr>
+        <p:spPr>
+          <a:xfrm>
+            <a:off x="969264" y="5185410"/>
+            <a:ext cx="6025896" cy="365760"/>
           </a:xfrm>
           <a:prstGeom prst="rect">
             <a:avLst/>
@@ -4540,10 +5570,383 @@
           <a:lstStyle/>
           <a:p>
             <a:pPr indent="0" marL="0">
-              <a:buNone/>
-            </a:pPr>
-            <a:r>
-              <a:rPr lang="en-US" sz="1400" b="1" dirty="0">
+              <a:lnSpc>
+                <a:spcPct val="125000"/>
+              </a:lnSpc>
+              <a:buNone/>
+            </a:pPr>
+            <a:r>
+              <a:rPr lang="en-US" sz="1150" dirty="0">
+                <a:solidFill>
+                  <a:srgbClr val="222222"/>
+                </a:solidFill>
+                <a:latin typeface="Calibri" pitchFamily="34" charset="0"/>
+                <a:ea typeface="Calibri" pitchFamily="34" charset="-122"/>
+                <a:cs typeface="Calibri" pitchFamily="34" charset="-120"/>
+              </a:rPr>
+              <a:t>ログインしたら</a:t>
+            </a:r>
+            <a:pPr indent="0" marL="0">
+              <a:lnSpc>
+                <a:spcPct val="125000"/>
+              </a:lnSpc>
+              <a:buNone/>
+            </a:pPr>
+            <a:r>
+              <a:rPr lang="en-US" sz="1150" b="1" dirty="0">
+                <a:solidFill>
+                  <a:srgbClr val="222222"/>
+                </a:solidFill>
+                <a:latin typeface="Calibri" pitchFamily="34" charset="0"/>
+                <a:ea typeface="Calibri" pitchFamily="34" charset="-122"/>
+                <a:cs typeface="Calibri" pitchFamily="34" charset="-120"/>
+              </a:rPr>
+              <a:t>「景品交換の照会」の画面を開いたまま</a:t>
+            </a:r>
+            <a:pPr indent="0" marL="0">
+              <a:lnSpc>
+                <a:spcPct val="125000"/>
+              </a:lnSpc>
+              <a:buNone/>
+            </a:pPr>
+            <a:r>
+              <a:rPr lang="en-US" sz="1150" dirty="0">
+                <a:solidFill>
+                  <a:srgbClr val="222222"/>
+                </a:solidFill>
+                <a:latin typeface="Calibri" pitchFamily="34" charset="0"/>
+                <a:ea typeface="Calibri" pitchFamily="34" charset="-122"/>
+                <a:cs typeface="Calibri" pitchFamily="34" charset="-120"/>
+              </a:rPr>
+              <a:t>にする</a:t>
+            </a:r>
+            <a:endParaRPr lang="en-US" sz="1150" dirty="0"/>
+          </a:p>
+        </p:txBody>
+      </p:sp>
+      <p:sp>
+        <p:nvSpPr>
+          <p:cNvPr id="24" name="Shape 22"/>
+          <p:cNvSpPr/>
+          <p:nvPr/>
+        </p:nvSpPr>
+        <p:spPr>
+          <a:xfrm>
+            <a:off x="566928" y="5660898"/>
+            <a:ext cx="274320" cy="274320"/>
+          </a:xfrm>
+          <a:prstGeom prst="ellipse">
+            <a:avLst/>
+          </a:prstGeom>
+          <a:solidFill>
+            <a:srgbClr val="B85042"/>
+          </a:solidFill>
+          <a:ln/>
+        </p:spPr>
+      </p:sp>
+      <p:sp>
+        <p:nvSpPr>
+          <p:cNvPr id="25" name="Text 23"/>
+          <p:cNvSpPr txBox="1"/>
+          <p:nvPr/>
+        </p:nvSpPr>
+        <p:spPr>
+          <a:xfrm>
+            <a:off x="566928" y="5660898"/>
+            <a:ext cx="274320" cy="274320"/>
+          </a:xfrm>
+          <a:prstGeom prst="rect">
+            <a:avLst/>
+          </a:prstGeom>
+          <a:noFill/>
+          <a:ln/>
+        </p:spPr>
+        <p:txBody>
+          <a:bodyPr wrap="square" lIns="0" tIns="0" rIns="0" bIns="0" rtlCol="0" anchor="ctr"/>
+          <a:lstStyle/>
+          <a:p>
+            <a:pPr algn="ctr" indent="0" marL="0">
+              <a:buNone/>
+            </a:pPr>
+            <a:r>
+              <a:rPr lang="en-US" sz="1100" b="1" dirty="0">
+                <a:solidFill>
+                  <a:srgbClr val="FFFFFF"/>
+                </a:solidFill>
+                <a:latin typeface="Calibri" pitchFamily="34" charset="0"/>
+                <a:ea typeface="Calibri" pitchFamily="34" charset="-122"/>
+                <a:cs typeface="Calibri" pitchFamily="34" charset="-120"/>
+              </a:rPr>
+              <a:t>2</a:t>
+            </a:r>
+            <a:endParaRPr lang="en-US" sz="1100" dirty="0"/>
+          </a:p>
+        </p:txBody>
+      </p:sp>
+      <p:sp>
+        <p:nvSpPr>
+          <p:cNvPr id="26" name="Text 24"/>
+          <p:cNvSpPr txBox="1"/>
+          <p:nvPr/>
+        </p:nvSpPr>
+        <p:spPr>
+          <a:xfrm>
+            <a:off x="969264" y="5642610"/>
+            <a:ext cx="6025896" cy="365760"/>
+          </a:xfrm>
+          <a:prstGeom prst="rect">
+            <a:avLst/>
+          </a:prstGeom>
+          <a:noFill/>
+          <a:ln/>
+        </p:spPr>
+        <p:txBody>
+          <a:bodyPr wrap="square" lIns="0" tIns="0" rIns="0" bIns="0" rtlCol="0" anchor="t"/>
+          <a:lstStyle/>
+          <a:p>
+            <a:pPr indent="0" marL="0">
+              <a:lnSpc>
+                <a:spcPct val="125000"/>
+              </a:lnSpc>
+              <a:buNone/>
+            </a:pPr>
+            <a:r>
+              <a:rPr lang="en-US" sz="1150" dirty="0">
+                <a:solidFill>
+                  <a:srgbClr val="222222"/>
+                </a:solidFill>
+                <a:latin typeface="Calibri" pitchFamily="34" charset="0"/>
+                <a:ea typeface="Calibri" pitchFamily="34" charset="-122"/>
+                <a:cs typeface="Calibri" pitchFamily="34" charset="-120"/>
+              </a:rPr>
+              <a:t>読み取り欄（大きな入力欄）に</a:t>
+            </a:r>
+            <a:pPr indent="0" marL="0">
+              <a:lnSpc>
+                <a:spcPct val="125000"/>
+              </a:lnSpc>
+              <a:buNone/>
+            </a:pPr>
+            <a:r>
+              <a:rPr lang="en-US" sz="1150" b="1" dirty="0">
+                <a:solidFill>
+                  <a:srgbClr val="222222"/>
+                </a:solidFill>
+                <a:latin typeface="Calibri" pitchFamily="34" charset="0"/>
+                <a:ea typeface="Calibri" pitchFamily="34" charset="-122"/>
+                <a:cs typeface="Calibri" pitchFamily="34" charset="-120"/>
+              </a:rPr>
+              <a:t>カーソルが入っていること</a:t>
+            </a:r>
+            <a:pPr indent="0" marL="0">
+              <a:lnSpc>
+                <a:spcPct val="125000"/>
+              </a:lnSpc>
+              <a:buNone/>
+            </a:pPr>
+            <a:r>
+              <a:rPr lang="en-US" sz="1150" dirty="0">
+                <a:solidFill>
+                  <a:srgbClr val="222222"/>
+                </a:solidFill>
+                <a:latin typeface="Calibri" pitchFamily="34" charset="0"/>
+                <a:ea typeface="Calibri" pitchFamily="34" charset="-122"/>
+                <a:cs typeface="Calibri" pitchFamily="34" charset="-120"/>
+              </a:rPr>
+              <a:t>を確かめる</a:t>
+            </a:r>
+            <a:endParaRPr lang="en-US" sz="1150" dirty="0"/>
+          </a:p>
+        </p:txBody>
+      </p:sp>
+      <p:sp>
+        <p:nvSpPr>
+          <p:cNvPr id="27" name="Shape 25"/>
+          <p:cNvSpPr/>
+          <p:nvPr/>
+        </p:nvSpPr>
+        <p:spPr>
+          <a:xfrm>
+            <a:off x="566928" y="6118098"/>
+            <a:ext cx="274320" cy="274320"/>
+          </a:xfrm>
+          <a:prstGeom prst="ellipse">
+            <a:avLst/>
+          </a:prstGeom>
+          <a:solidFill>
+            <a:srgbClr val="B85042"/>
+          </a:solidFill>
+          <a:ln/>
+        </p:spPr>
+      </p:sp>
+      <p:sp>
+        <p:nvSpPr>
+          <p:cNvPr id="28" name="Text 26"/>
+          <p:cNvSpPr txBox="1"/>
+          <p:nvPr/>
+        </p:nvSpPr>
+        <p:spPr>
+          <a:xfrm>
+            <a:off x="566928" y="6118098"/>
+            <a:ext cx="274320" cy="274320"/>
+          </a:xfrm>
+          <a:prstGeom prst="rect">
+            <a:avLst/>
+          </a:prstGeom>
+          <a:noFill/>
+          <a:ln/>
+        </p:spPr>
+        <p:txBody>
+          <a:bodyPr wrap="square" lIns="0" tIns="0" rIns="0" bIns="0" rtlCol="0" anchor="ctr"/>
+          <a:lstStyle/>
+          <a:p>
+            <a:pPr algn="ctr" indent="0" marL="0">
+              <a:buNone/>
+            </a:pPr>
+            <a:r>
+              <a:rPr lang="en-US" sz="1100" b="1" dirty="0">
+                <a:solidFill>
+                  <a:srgbClr val="FFFFFF"/>
+                </a:solidFill>
+                <a:latin typeface="Calibri" pitchFamily="34" charset="0"/>
+                <a:ea typeface="Calibri" pitchFamily="34" charset="-122"/>
+                <a:cs typeface="Calibri" pitchFamily="34" charset="-120"/>
+              </a:rPr>
+              <a:t>3</a:t>
+            </a:r>
+            <a:endParaRPr lang="en-US" sz="1100" dirty="0"/>
+          </a:p>
+        </p:txBody>
+      </p:sp>
+      <p:sp>
+        <p:nvSpPr>
+          <p:cNvPr id="29" name="Text 27"/>
+          <p:cNvSpPr txBox="1"/>
+          <p:nvPr/>
+        </p:nvSpPr>
+        <p:spPr>
+          <a:xfrm>
+            <a:off x="969264" y="6099810"/>
+            <a:ext cx="6025896" cy="365760"/>
+          </a:xfrm>
+          <a:prstGeom prst="rect">
+            <a:avLst/>
+          </a:prstGeom>
+          <a:noFill/>
+          <a:ln/>
+        </p:spPr>
+        <p:txBody>
+          <a:bodyPr wrap="square" lIns="0" tIns="0" rIns="0" bIns="0" rtlCol="0" anchor="t"/>
+          <a:lstStyle/>
+          <a:p>
+            <a:pPr indent="0" marL="0">
+              <a:lnSpc>
+                <a:spcPct val="125000"/>
+              </a:lnSpc>
+              <a:buNone/>
+            </a:pPr>
+            <a:r>
+              <a:rPr lang="en-US" sz="1150" dirty="0">
+                <a:solidFill>
+                  <a:srgbClr val="222222"/>
+                </a:solidFill>
+                <a:latin typeface="Calibri" pitchFamily="34" charset="0"/>
+                <a:ea typeface="Calibri" pitchFamily="34" charset="-122"/>
+                <a:cs typeface="Calibri" pitchFamily="34" charset="-120"/>
+              </a:rPr>
+              <a:t>リーダーで</a:t>
+            </a:r>
+            <a:pPr indent="0" marL="0">
+              <a:lnSpc>
+                <a:spcPct val="125000"/>
+              </a:lnSpc>
+              <a:buNone/>
+            </a:pPr>
+            <a:r>
+              <a:rPr lang="en-US" sz="1150" b="1" dirty="0">
+                <a:solidFill>
+                  <a:srgbClr val="222222"/>
+                </a:solidFill>
+                <a:latin typeface="Calibri" pitchFamily="34" charset="0"/>
+                <a:ea typeface="Calibri" pitchFamily="34" charset="-122"/>
+                <a:cs typeface="Calibri" pitchFamily="34" charset="-120"/>
+              </a:rPr>
+              <a:t>ためしに1回読み取って</a:t>
+            </a:r>
+            <a:pPr indent="0" marL="0">
+              <a:lnSpc>
+                <a:spcPct val="125000"/>
+              </a:lnSpc>
+              <a:buNone/>
+            </a:pPr>
+            <a:r>
+              <a:rPr lang="en-US" sz="1150" dirty="0">
+                <a:solidFill>
+                  <a:srgbClr val="222222"/>
+                </a:solidFill>
+                <a:latin typeface="Calibri" pitchFamily="34" charset="0"/>
+                <a:ea typeface="Calibri" pitchFamily="34" charset="-122"/>
+                <a:cs typeface="Calibri" pitchFamily="34" charset="-120"/>
+              </a:rPr>
+              <a:t>みる（手元の紙のQRでも、画面のQRでも構いません）</a:t>
+            </a:r>
+            <a:endParaRPr lang="en-US" sz="1150" dirty="0"/>
+          </a:p>
+        </p:txBody>
+      </p:sp>
+      <p:sp>
+        <p:nvSpPr>
+          <p:cNvPr id="30" name="Shape 28"/>
+          <p:cNvSpPr/>
+          <p:nvPr/>
+        </p:nvSpPr>
+        <p:spPr>
+          <a:xfrm>
+            <a:off x="566928" y="6557010"/>
+            <a:ext cx="6428232" cy="624459"/>
+          </a:xfrm>
+          <a:prstGeom prst="roundRect">
+            <a:avLst>
+              <a:gd name="adj" fmla="val 8786"/>
+            </a:avLst>
+          </a:prstGeom>
+          <a:solidFill>
+            <a:srgbClr val="FAEAE7"/>
+          </a:solidFill>
+          <a:ln w="9525">
+            <a:solidFill>
+              <a:srgbClr val="B85042"/>
+            </a:solidFill>
+            <a:prstDash val="solid"/>
+          </a:ln>
+        </p:spPr>
+      </p:sp>
+      <p:sp>
+        <p:nvSpPr>
+          <p:cNvPr id="31" name="Text 29"/>
+          <p:cNvSpPr txBox="1"/>
+          <p:nvPr/>
+        </p:nvSpPr>
+        <p:spPr>
+          <a:xfrm>
+            <a:off x="658368" y="6648450"/>
+            <a:ext cx="237744" cy="237744"/>
+          </a:xfrm>
+          <a:prstGeom prst="rect">
+            <a:avLst/>
+          </a:prstGeom>
+          <a:noFill/>
+          <a:ln/>
+        </p:spPr>
+        <p:txBody>
+          <a:bodyPr wrap="square" lIns="0" tIns="0" rIns="0" bIns="0" rtlCol="0" anchor="ctr"/>
+          <a:lstStyle/>
+          <a:p>
+            <a:pPr algn="ctr" indent="0" marL="0">
+              <a:buNone/>
+            </a:pPr>
+            <a:r>
+              <a:rPr lang="en-US" sz="1200" b="1" dirty="0">
                 <a:solidFill>
                   <a:srgbClr val="B85042"/>
                 </a:solidFill>
@@ -4551,22 +5954,22 @@
                 <a:ea typeface="Calibri" pitchFamily="34" charset="-122"/>
                 <a:cs typeface="Calibri" pitchFamily="34" charset="-120"/>
               </a:rPr>
-              <a:t>「交換コードを表示する」の掲示</a:t>
-            </a:r>
-            <a:endParaRPr lang="en-US" sz="1400" dirty="0"/>
-          </a:p>
-        </p:txBody>
-      </p:sp>
-      <p:sp>
-        <p:nvSpPr>
-          <p:cNvPr id="23" name="Text 20"/>
-          <p:cNvSpPr txBox="1"/>
-          <p:nvPr/>
-        </p:nvSpPr>
-        <p:spPr>
-          <a:xfrm>
-            <a:off x="566928" y="9044178"/>
-            <a:ext cx="6428232" cy="459994"/>
+              <a:t>i</a:t>
+            </a:r>
+            <a:endParaRPr lang="en-US" sz="1200" dirty="0"/>
+          </a:p>
+        </p:txBody>
+      </p:sp>
+      <p:sp>
+        <p:nvSpPr>
+          <p:cNvPr id="32" name="Text 30"/>
+          <p:cNvSpPr txBox="1"/>
+          <p:nvPr/>
+        </p:nvSpPr>
+        <p:spPr>
+          <a:xfrm>
+            <a:off x="950976" y="6666738"/>
+            <a:ext cx="5925312" cy="441579"/>
           </a:xfrm>
           <a:prstGeom prst="rect">
             <a:avLst/>
@@ -4580,62 +5983,28 @@
           <a:p>
             <a:pPr indent="0" marL="0">
               <a:lnSpc>
-                <a:spcPct val="125000"/>
-              </a:lnSpc>
-              <a:buNone/>
-            </a:pPr>
-            <a:r>
-              <a:rPr lang="en-US" sz="1100" dirty="0">
-                <a:solidFill>
-                  <a:srgbClr val="222222"/>
-                </a:solidFill>
-                <a:latin typeface="Calibri" pitchFamily="34" charset="0"/>
-                <a:ea typeface="Calibri" pitchFamily="34" charset="-122"/>
-                <a:cs typeface="Calibri" pitchFamily="34" charset="-120"/>
-              </a:rPr>
-              <a:t>事務局から</a:t>
-            </a:r>
-            <a:pPr indent="0" marL="0">
-              <a:lnSpc>
-                <a:spcPct val="125000"/>
-              </a:lnSpc>
-              <a:buNone/>
-            </a:pPr>
-            <a:r>
-              <a:rPr lang="en-US" sz="1100" b="1" dirty="0">
-                <a:solidFill>
-                  <a:srgbClr val="222222"/>
-                </a:solidFill>
-                <a:latin typeface="Calibri" pitchFamily="34" charset="0"/>
-                <a:ea typeface="Calibri" pitchFamily="34" charset="-122"/>
-                <a:cs typeface="Calibri" pitchFamily="34" charset="-120"/>
-              </a:rPr>
-              <a:t>交換コードの呼び出し用のQRコード</a:t>
-            </a:r>
-            <a:pPr indent="0" marL="0">
-              <a:lnSpc>
-                <a:spcPct val="125000"/>
-              </a:lnSpc>
-              <a:buNone/>
-            </a:pPr>
-            <a:r>
-              <a:rPr lang="en-US" sz="1100" dirty="0">
-                <a:solidFill>
-                  <a:srgbClr val="222222"/>
-                </a:solidFill>
-                <a:latin typeface="Calibri" pitchFamily="34" charset="0"/>
-                <a:ea typeface="Calibri" pitchFamily="34" charset="-122"/>
-                <a:cs typeface="Calibri" pitchFamily="34" charset="-120"/>
-              </a:rPr>
-              <a:t>（A4の紙）が届きます。受付の見やすい場所に貼ってください。</a:t>
-            </a:r>
-            <a:endParaRPr lang="en-US" sz="1100" dirty="0"/>
-          </a:p>
-        </p:txBody>
-      </p:sp>
-      <p:sp>
-        <p:nvSpPr>
-          <p:cNvPr id="24" name="Text 21"/>
+                <a:spcPct val="120000"/>
+              </a:lnSpc>
+              <a:buNone/>
+            </a:pPr>
+            <a:r>
+              <a:rPr lang="en-US" sz="1050" dirty="0">
+                <a:solidFill>
+                  <a:srgbClr val="222222"/>
+                </a:solidFill>
+                <a:latin typeface="Calibri" pitchFamily="34" charset="0"/>
+                <a:ea typeface="Calibri" pitchFamily="34" charset="-122"/>
+                <a:cs typeface="Calibri" pitchFamily="34" charset="-120"/>
+              </a:rPr>
+              <a:t>リーダーは「読み取った文字＋Enter」をキーボードのように打ち込む設定にしてください（多くの製品は初期設定のままで大丈夫です）。</a:t>
+            </a:r>
+            <a:endParaRPr lang="en-US" sz="1050" dirty="0"/>
+          </a:p>
+        </p:txBody>
+      </p:sp>
+      <p:sp>
+        <p:nvSpPr>
+          <p:cNvPr id="33" name="Text 31"/>
           <p:cNvSpPr txBox="1"/>
           <p:nvPr/>
         </p:nvSpPr>
@@ -4782,15 +6151,117 @@
           </a:p>
         </p:txBody>
       </p:sp>
-      <p:sp>
-        <p:nvSpPr>
-          <p:cNvPr id="4" name="Text 2"/>
-          <p:cNvSpPr txBox="1"/>
-          <p:nvPr/>
-        </p:nvSpPr>
-        <p:spPr>
-          <a:xfrm>
-            <a:off x="566928" y="1481328"/>
+      <p:pic>
+        <p:nvPicPr>
+          <p:cNvPr id="4" name="Image 0" descr="C:\Users\sato\Desktop\enque\docs\images\p-login.png">    </p:cNvPr>
+          <p:cNvPicPr>
+            <a:picLocks noChangeAspect="1"/>
+          </p:cNvPicPr>
+          <p:nvPr/>
+        </p:nvPicPr>
+        <p:blipFill>
+          <a:blip r:embed="rId1"/>
+          <a:stretch>
+            <a:fillRect/>
+          </a:stretch>
+        </p:blipFill>
+        <p:spPr>
+          <a:xfrm>
+            <a:off x="1546727" y="1481328"/>
+            <a:ext cx="4468633" cy="3474720"/>
+          </a:xfrm>
+          <a:prstGeom prst="rect">
+            <a:avLst/>
+          </a:prstGeom>
+        </p:spPr>
+      </p:pic>
+      <p:sp>
+        <p:nvSpPr>
+          <p:cNvPr id="5" name="Text 2"/>
+          <p:cNvSpPr txBox="1"/>
+          <p:nvPr/>
+        </p:nvSpPr>
+        <p:spPr>
+          <a:xfrm>
+            <a:off x="566928" y="5010912"/>
+            <a:ext cx="6428232" cy="274320"/>
+          </a:xfrm>
+          <a:prstGeom prst="rect">
+            <a:avLst/>
+          </a:prstGeom>
+          <a:noFill/>
+          <a:ln/>
+        </p:spPr>
+        <p:txBody>
+          <a:bodyPr wrap="square" lIns="0" tIns="0" rIns="0" bIns="0" rtlCol="0" anchor="ctr"/>
+          <a:lstStyle/>
+          <a:p>
+            <a:pPr algn="ctr" indent="0" marL="0">
+              <a:buNone/>
+            </a:pPr>
+            <a:r>
+              <a:rPr lang="en-US" sz="950" dirty="0">
+                <a:solidFill>
+                  <a:srgbClr val="6B6B6B"/>
+                </a:solidFill>
+                <a:latin typeface="Calibri" pitchFamily="34" charset="0"/>
+                <a:ea typeface="Calibri" pitchFamily="34" charset="-122"/>
+                <a:cs typeface="Calibri" pitchFamily="34" charset="-120"/>
+              </a:rPr>
+              <a:t>管理画面のログイン画面（スマートフォンの画面）。ユーザー名・パスワードの入力欄が見えるもの。</a:t>
+            </a:r>
+            <a:endParaRPr lang="en-US" sz="950" dirty="0"/>
+          </a:p>
+        </p:txBody>
+      </p:sp>
+      <p:sp>
+        <p:nvSpPr>
+          <p:cNvPr id="6" name="Text 3"/>
+          <p:cNvSpPr txBox="1"/>
+          <p:nvPr/>
+        </p:nvSpPr>
+        <p:spPr>
+          <a:xfrm>
+            <a:off x="566928" y="5449824"/>
+            <a:ext cx="6428232" cy="257810"/>
+          </a:xfrm>
+          <a:prstGeom prst="rect">
+            <a:avLst/>
+          </a:prstGeom>
+          <a:noFill/>
+          <a:ln/>
+        </p:spPr>
+        <p:txBody>
+          <a:bodyPr wrap="square" lIns="0" tIns="0" rIns="0" bIns="0" rtlCol="0" anchor="t"/>
+          <a:lstStyle/>
+          <a:p>
+            <a:pPr indent="0" marL="0">
+              <a:buNone/>
+            </a:pPr>
+            <a:r>
+              <a:rPr lang="en-US" sz="1400" b="1" dirty="0">
+                <a:solidFill>
+                  <a:srgbClr val="B85042"/>
+                </a:solidFill>
+                <a:latin typeface="Calibri" pitchFamily="34" charset="0"/>
+                <a:ea typeface="Calibri" pitchFamily="34" charset="-122"/>
+                <a:cs typeface="Calibri" pitchFamily="34" charset="-120"/>
+              </a:rPr>
+              <a:t>「交換コードを表示する」の掲示</a:t>
+            </a:r>
+            <a:endParaRPr lang="en-US" sz="1400" dirty="0"/>
+          </a:p>
+        </p:txBody>
+      </p:sp>
+      <p:sp>
+        <p:nvSpPr>
+          <p:cNvPr id="7" name="Text 4"/>
+          <p:cNvSpPr txBox="1"/>
+          <p:nvPr/>
+        </p:nvSpPr>
+        <p:spPr>
+          <a:xfrm>
+            <a:off x="566928" y="5780786"/>
             <a:ext cx="6428232" cy="459994"/>
           </a:xfrm>
           <a:prstGeom prst="rect">
@@ -4818,6 +6289,82 @@
                 <a:ea typeface="Calibri" pitchFamily="34" charset="-122"/>
                 <a:cs typeface="Calibri" pitchFamily="34" charset="-120"/>
               </a:rPr>
+              <a:t>事務局から</a:t>
+            </a:r>
+            <a:pPr indent="0" marL="0">
+              <a:lnSpc>
+                <a:spcPct val="125000"/>
+              </a:lnSpc>
+              <a:buNone/>
+            </a:pPr>
+            <a:r>
+              <a:rPr lang="en-US" sz="1100" b="1" dirty="0">
+                <a:solidFill>
+                  <a:srgbClr val="222222"/>
+                </a:solidFill>
+                <a:latin typeface="Calibri" pitchFamily="34" charset="0"/>
+                <a:ea typeface="Calibri" pitchFamily="34" charset="-122"/>
+                <a:cs typeface="Calibri" pitchFamily="34" charset="-120"/>
+              </a:rPr>
+              <a:t>交換コードの呼び出し用のQRコード</a:t>
+            </a:r>
+            <a:pPr indent="0" marL="0">
+              <a:lnSpc>
+                <a:spcPct val="125000"/>
+              </a:lnSpc>
+              <a:buNone/>
+            </a:pPr>
+            <a:r>
+              <a:rPr lang="en-US" sz="1100" dirty="0">
+                <a:solidFill>
+                  <a:srgbClr val="222222"/>
+                </a:solidFill>
+                <a:latin typeface="Calibri" pitchFamily="34" charset="0"/>
+                <a:ea typeface="Calibri" pitchFamily="34" charset="-122"/>
+                <a:cs typeface="Calibri" pitchFamily="34" charset="-120"/>
+              </a:rPr>
+              <a:t>（A4の紙）が届きます。受付の見やすい場所に貼ってください。</a:t>
+            </a:r>
+            <a:endParaRPr lang="en-US" sz="1100" dirty="0"/>
+          </a:p>
+        </p:txBody>
+      </p:sp>
+      <p:sp>
+        <p:nvSpPr>
+          <p:cNvPr id="8" name="Text 5"/>
+          <p:cNvSpPr txBox="1"/>
+          <p:nvPr/>
+        </p:nvSpPr>
+        <p:spPr>
+          <a:xfrm>
+            <a:off x="566928" y="6277356"/>
+            <a:ext cx="6428232" cy="459994"/>
+          </a:xfrm>
+          <a:prstGeom prst="rect">
+            <a:avLst/>
+          </a:prstGeom>
+          <a:noFill/>
+          <a:ln/>
+        </p:spPr>
+        <p:txBody>
+          <a:bodyPr wrap="square" lIns="0" tIns="0" rIns="0" bIns="0" rtlCol="0" anchor="t"/>
+          <a:lstStyle/>
+          <a:p>
+            <a:pPr indent="0" marL="0">
+              <a:lnSpc>
+                <a:spcPct val="125000"/>
+              </a:lnSpc>
+              <a:buNone/>
+            </a:pPr>
+            <a:r>
+              <a:rPr lang="en-US" sz="1100" dirty="0">
+                <a:solidFill>
+                  <a:srgbClr val="222222"/>
+                </a:solidFill>
+                <a:latin typeface="Calibri" pitchFamily="34" charset="0"/>
+                <a:ea typeface="Calibri" pitchFamily="34" charset="-122"/>
+                <a:cs typeface="Calibri" pitchFamily="34" charset="-120"/>
+              </a:rPr>
               <a:t>来場者が</a:t>
             </a:r>
             <a:pPr indent="0" marL="0">
@@ -4860,13 +6407,13 @@
       </p:sp>
       <p:sp>
         <p:nvSpPr>
-          <p:cNvPr id="5" name="Text 3"/>
-          <p:cNvSpPr txBox="1"/>
-          <p:nvPr/>
-        </p:nvSpPr>
-        <p:spPr>
-          <a:xfrm>
-            <a:off x="566928" y="1977898"/>
+          <p:cNvPr id="9" name="Text 6"/>
+          <p:cNvSpPr txBox="1"/>
+          <p:nvPr/>
+        </p:nvSpPr>
+        <p:spPr>
+          <a:xfrm>
+            <a:off x="566928" y="6773926"/>
             <a:ext cx="6428232" cy="257429"/>
           </a:xfrm>
           <a:prstGeom prst="rect">
@@ -4902,7 +6449,7 @@
       </p:sp>
       <p:sp>
         <p:nvSpPr>
-          <p:cNvPr id="6" name="Text 4"/>
+          <p:cNvPr id="10" name="Text 7"/>
           <p:cNvSpPr txBox="1"/>
           <p:nvPr/>
         </p:nvSpPr>
@@ -5857,15 +7404,78 @@
           </a:p>
         </p:txBody>
       </p:sp>
-      <p:sp>
-        <p:nvSpPr>
-          <p:cNvPr id="21" name="Shape 19"/>
+      <p:pic>
+        <p:nvPicPr>
+          <p:cNvPr id="21" name="Image 0" descr="C:\Users\sato\Desktop\enque\docs\images\p-claim-saved.png">    </p:cNvPr>
+          <p:cNvPicPr>
+            <a:picLocks noChangeAspect="1"/>
+          </p:cNvPicPr>
+          <p:nvPr/>
+        </p:nvPicPr>
+        <p:blipFill>
+          <a:blip r:embed="rId1"/>
+          <a:stretch>
+            <a:fillRect/>
+          </a:stretch>
+        </p:blipFill>
+        <p:spPr>
+          <a:xfrm>
+            <a:off x="1510355" y="5340604"/>
+            <a:ext cx="4541378" cy="3474720"/>
+          </a:xfrm>
+          <a:prstGeom prst="rect">
+            <a:avLst/>
+          </a:prstGeom>
+        </p:spPr>
+      </p:pic>
+      <p:sp>
+        <p:nvSpPr>
+          <p:cNvPr id="22" name="Text 19"/>
+          <p:cNvSpPr txBox="1"/>
+          <p:nvPr/>
+        </p:nvSpPr>
+        <p:spPr>
+          <a:xfrm>
+            <a:off x="566928" y="8870188"/>
+            <a:ext cx="6428232" cy="274320"/>
+          </a:xfrm>
+          <a:prstGeom prst="rect">
+            <a:avLst/>
+          </a:prstGeom>
+          <a:noFill/>
+          <a:ln/>
+        </p:spPr>
+        <p:txBody>
+          <a:bodyPr wrap="square" lIns="0" tIns="0" rIns="0" bIns="0" rtlCol="0" anchor="ctr"/>
+          <a:lstStyle/>
+          <a:p>
+            <a:pPr algn="ctr" indent="0" marL="0">
+              <a:buNone/>
+            </a:pPr>
+            <a:r>
+              <a:rPr lang="en-US" sz="950" dirty="0">
+                <a:solidFill>
+                  <a:srgbClr val="6B6B6B"/>
+                </a:solidFill>
+                <a:latin typeface="Calibri" pitchFamily="34" charset="0"/>
+                <a:ea typeface="Calibri" pitchFamily="34" charset="-122"/>
+                <a:cs typeface="Calibri" pitchFamily="34" charset="-120"/>
+              </a:rPr>
+              <a:t>読み取った直後の画面（「交換済みにしました」と「直前の記録を取り消す」が見えるもの）。</a:t>
+            </a:r>
+            <a:endParaRPr lang="en-US" sz="950" dirty="0"/>
+          </a:p>
+        </p:txBody>
+      </p:sp>
+      <p:sp>
+        <p:nvSpPr>
+          <p:cNvPr id="23" name="Shape 20"/>
           <p:cNvSpPr/>
           <p:nvPr/>
         </p:nvSpPr>
         <p:spPr>
           <a:xfrm>
-            <a:off x="566928" y="5340604"/>
+            <a:off x="566928" y="9199372"/>
             <a:ext cx="6428232" cy="624459"/>
           </a:xfrm>
           <a:prstGeom prst="roundRect">
@@ -5886,13 +7496,13 @@
       </p:sp>
       <p:sp>
         <p:nvSpPr>
-          <p:cNvPr id="22" name="Text 20"/>
-          <p:cNvSpPr txBox="1"/>
-          <p:nvPr/>
-        </p:nvSpPr>
-        <p:spPr>
-          <a:xfrm>
-            <a:off x="658368" y="5432044"/>
+          <p:cNvPr id="24" name="Text 21"/>
+          <p:cNvSpPr txBox="1"/>
+          <p:nvPr/>
+        </p:nvSpPr>
+        <p:spPr>
+          <a:xfrm>
+            <a:off x="658368" y="9290812"/>
             <a:ext cx="237744" cy="237744"/>
           </a:xfrm>
           <a:prstGeom prst="rect">
@@ -5925,13 +7535,13 @@
       </p:sp>
       <p:sp>
         <p:nvSpPr>
-          <p:cNvPr id="23" name="Text 21"/>
-          <p:cNvSpPr txBox="1"/>
-          <p:nvPr/>
-        </p:nvSpPr>
-        <p:spPr>
-          <a:xfrm>
-            <a:off x="950976" y="5450332"/>
+          <p:cNvPr id="25" name="Text 22"/>
+          <p:cNvSpPr txBox="1"/>
+          <p:nvPr/>
+        </p:nvSpPr>
+        <p:spPr>
+          <a:xfrm>
+            <a:off x="950976" y="9309100"/>
             <a:ext cx="5925312" cy="441579"/>
           </a:xfrm>
           <a:prstGeom prst="rect">
@@ -6001,542 +7611,7 @@
       </p:sp>
       <p:sp>
         <p:nvSpPr>
-          <p:cNvPr id="24" name="Text 22"/>
-          <p:cNvSpPr txBox="1"/>
-          <p:nvPr/>
-        </p:nvSpPr>
-        <p:spPr>
-          <a:xfrm>
-            <a:off x="566928" y="6147943"/>
-            <a:ext cx="6428232" cy="257810"/>
-          </a:xfrm>
-          <a:prstGeom prst="rect">
-            <a:avLst/>
-          </a:prstGeom>
-          <a:noFill/>
-          <a:ln/>
-        </p:spPr>
-        <p:txBody>
-          <a:bodyPr wrap="square" lIns="0" tIns="0" rIns="0" bIns="0" rtlCol="0" anchor="t"/>
-          <a:lstStyle/>
-          <a:p>
-            <a:pPr indent="0" marL="0">
-              <a:buNone/>
-            </a:pPr>
-            <a:r>
-              <a:rPr lang="en-US" sz="1400" b="1" dirty="0">
-                <a:solidFill>
-                  <a:srgbClr val="B85042"/>
-                </a:solidFill>
-                <a:latin typeface="Calibri" pitchFamily="34" charset="0"/>
-                <a:ea typeface="Calibri" pitchFamily="34" charset="-122"/>
-                <a:cs typeface="Calibri" pitchFamily="34" charset="-120"/>
-              </a:rPr>
-              <a:t>スマートフォンの場合（3ステップ）</a:t>
-            </a:r>
-            <a:endParaRPr lang="en-US" sz="1400" dirty="0"/>
-          </a:p>
-        </p:txBody>
-      </p:sp>
-      <p:sp>
-        <p:nvSpPr>
-          <p:cNvPr id="25" name="Shape 23"/>
-          <p:cNvSpPr/>
-          <p:nvPr/>
-        </p:nvSpPr>
-        <p:spPr>
-          <a:xfrm>
-            <a:off x="566928" y="6497193"/>
-            <a:ext cx="274320" cy="274320"/>
-          </a:xfrm>
-          <a:prstGeom prst="ellipse">
-            <a:avLst/>
-          </a:prstGeom>
-          <a:solidFill>
-            <a:srgbClr val="B85042"/>
-          </a:solidFill>
-          <a:ln/>
-        </p:spPr>
-      </p:sp>
-      <p:sp>
-        <p:nvSpPr>
-          <p:cNvPr id="26" name="Text 24"/>
-          <p:cNvSpPr txBox="1"/>
-          <p:nvPr/>
-        </p:nvSpPr>
-        <p:spPr>
-          <a:xfrm>
-            <a:off x="566928" y="6497193"/>
-            <a:ext cx="274320" cy="274320"/>
-          </a:xfrm>
-          <a:prstGeom prst="rect">
-            <a:avLst/>
-          </a:prstGeom>
-          <a:noFill/>
-          <a:ln/>
-        </p:spPr>
-        <p:txBody>
-          <a:bodyPr wrap="square" lIns="0" tIns="0" rIns="0" bIns="0" rtlCol="0" anchor="ctr"/>
-          <a:lstStyle/>
-          <a:p>
-            <a:pPr algn="ctr" indent="0" marL="0">
-              <a:buNone/>
-            </a:pPr>
-            <a:r>
-              <a:rPr lang="en-US" sz="1100" b="1" dirty="0">
-                <a:solidFill>
-                  <a:srgbClr val="FFFFFF"/>
-                </a:solidFill>
-                <a:latin typeface="Calibri" pitchFamily="34" charset="0"/>
-                <a:ea typeface="Calibri" pitchFamily="34" charset="-122"/>
-                <a:cs typeface="Calibri" pitchFamily="34" charset="-120"/>
-              </a:rPr>
-              <a:t>1</a:t>
-            </a:r>
-            <a:endParaRPr lang="en-US" sz="1100" dirty="0"/>
-          </a:p>
-        </p:txBody>
-      </p:sp>
-      <p:sp>
-        <p:nvSpPr>
-          <p:cNvPr id="27" name="Text 25"/>
-          <p:cNvSpPr txBox="1"/>
-          <p:nvPr/>
-        </p:nvSpPr>
-        <p:spPr>
-          <a:xfrm>
-            <a:off x="969264" y="6478905"/>
-            <a:ext cx="6025896" cy="365760"/>
-          </a:xfrm>
-          <a:prstGeom prst="rect">
-            <a:avLst/>
-          </a:prstGeom>
-          <a:noFill/>
-          <a:ln/>
-        </p:spPr>
-        <p:txBody>
-          <a:bodyPr wrap="square" lIns="0" tIns="0" rIns="0" bIns="0" rtlCol="0" anchor="t"/>
-          <a:lstStyle/>
-          <a:p>
-            <a:pPr indent="0" marL="0">
-              <a:lnSpc>
-                <a:spcPct val="125000"/>
-              </a:lnSpc>
-              <a:buNone/>
-            </a:pPr>
-            <a:r>
-              <a:rPr lang="en-US" sz="1150" dirty="0">
-                <a:solidFill>
-                  <a:srgbClr val="222222"/>
-                </a:solidFill>
-                <a:latin typeface="Calibri" pitchFamily="34" charset="0"/>
-                <a:ea typeface="Calibri" pitchFamily="34" charset="-122"/>
-                <a:cs typeface="Calibri" pitchFamily="34" charset="-120"/>
-              </a:rPr>
-              <a:t>来場者のスマートフォンに表示された</a:t>
-            </a:r>
-            <a:pPr indent="0" marL="0">
-              <a:lnSpc>
-                <a:spcPct val="125000"/>
-              </a:lnSpc>
-              <a:buNone/>
-            </a:pPr>
-            <a:r>
-              <a:rPr lang="en-US" sz="1150" b="1" dirty="0">
-                <a:solidFill>
-                  <a:srgbClr val="222222"/>
-                </a:solidFill>
-                <a:latin typeface="Calibri" pitchFamily="34" charset="0"/>
-                <a:ea typeface="Calibri" pitchFamily="34" charset="-122"/>
-                <a:cs typeface="Calibri" pitchFamily="34" charset="-120"/>
-              </a:rPr>
-              <a:t>QRコード</a:t>
-            </a:r>
-            <a:pPr indent="0" marL="0">
-              <a:lnSpc>
-                <a:spcPct val="125000"/>
-              </a:lnSpc>
-              <a:buNone/>
-            </a:pPr>
-            <a:r>
-              <a:rPr lang="en-US" sz="1150" dirty="0">
-                <a:solidFill>
-                  <a:srgbClr val="222222"/>
-                </a:solidFill>
-                <a:latin typeface="Calibri" pitchFamily="34" charset="0"/>
-                <a:ea typeface="Calibri" pitchFamily="34" charset="-122"/>
-                <a:cs typeface="Calibri" pitchFamily="34" charset="-120"/>
-              </a:rPr>
-              <a:t>を読み取る</a:t>
-            </a:r>
-            <a:endParaRPr lang="en-US" sz="1150" dirty="0"/>
-          </a:p>
-        </p:txBody>
-      </p:sp>
-      <p:sp>
-        <p:nvSpPr>
-          <p:cNvPr id="28" name="Shape 26"/>
-          <p:cNvSpPr/>
-          <p:nvPr/>
-        </p:nvSpPr>
-        <p:spPr>
-          <a:xfrm>
-            <a:off x="566928" y="6954393"/>
-            <a:ext cx="274320" cy="274320"/>
-          </a:xfrm>
-          <a:prstGeom prst="ellipse">
-            <a:avLst/>
-          </a:prstGeom>
-          <a:solidFill>
-            <a:srgbClr val="B85042"/>
-          </a:solidFill>
-          <a:ln/>
-        </p:spPr>
-      </p:sp>
-      <p:sp>
-        <p:nvSpPr>
-          <p:cNvPr id="29" name="Text 27"/>
-          <p:cNvSpPr txBox="1"/>
-          <p:nvPr/>
-        </p:nvSpPr>
-        <p:spPr>
-          <a:xfrm>
-            <a:off x="566928" y="6954393"/>
-            <a:ext cx="274320" cy="274320"/>
-          </a:xfrm>
-          <a:prstGeom prst="rect">
-            <a:avLst/>
-          </a:prstGeom>
-          <a:noFill/>
-          <a:ln/>
-        </p:spPr>
-        <p:txBody>
-          <a:bodyPr wrap="square" lIns="0" tIns="0" rIns="0" bIns="0" rtlCol="0" anchor="ctr"/>
-          <a:lstStyle/>
-          <a:p>
-            <a:pPr algn="ctr" indent="0" marL="0">
-              <a:buNone/>
-            </a:pPr>
-            <a:r>
-              <a:rPr lang="en-US" sz="1100" b="1" dirty="0">
-                <a:solidFill>
-                  <a:srgbClr val="FFFFFF"/>
-                </a:solidFill>
-                <a:latin typeface="Calibri" pitchFamily="34" charset="0"/>
-                <a:ea typeface="Calibri" pitchFamily="34" charset="-122"/>
-                <a:cs typeface="Calibri" pitchFamily="34" charset="-120"/>
-              </a:rPr>
-              <a:t>2</a:t>
-            </a:r>
-            <a:endParaRPr lang="en-US" sz="1100" dirty="0"/>
-          </a:p>
-        </p:txBody>
-      </p:sp>
-      <p:sp>
-        <p:nvSpPr>
-          <p:cNvPr id="30" name="Text 28"/>
-          <p:cNvSpPr txBox="1"/>
-          <p:nvPr/>
-        </p:nvSpPr>
-        <p:spPr>
-          <a:xfrm>
-            <a:off x="969264" y="6936105"/>
-            <a:ext cx="6025896" cy="365760"/>
-          </a:xfrm>
-          <a:prstGeom prst="rect">
-            <a:avLst/>
-          </a:prstGeom>
-          <a:noFill/>
-          <a:ln/>
-        </p:spPr>
-        <p:txBody>
-          <a:bodyPr wrap="square" lIns="0" tIns="0" rIns="0" bIns="0" rtlCol="0" anchor="t"/>
-          <a:lstStyle/>
-          <a:p>
-            <a:pPr indent="0" marL="0">
-              <a:lnSpc>
-                <a:spcPct val="125000"/>
-              </a:lnSpc>
-              <a:buNone/>
-            </a:pPr>
-            <a:r>
-              <a:rPr lang="en-US" sz="1150" dirty="0">
-                <a:solidFill>
-                  <a:srgbClr val="222222"/>
-                </a:solidFill>
-                <a:latin typeface="Calibri" pitchFamily="34" charset="0"/>
-                <a:ea typeface="Calibri" pitchFamily="34" charset="-122"/>
-                <a:cs typeface="Calibri" pitchFamily="34" charset="-120"/>
-              </a:rPr>
-              <a:t>画面で</a:t>
-            </a:r>
-            <a:pPr indent="0" marL="0">
-              <a:lnSpc>
-                <a:spcPct val="125000"/>
-              </a:lnSpc>
-              <a:buNone/>
-            </a:pPr>
-            <a:r>
-              <a:rPr lang="en-US" sz="1150" b="1" dirty="0">
-                <a:solidFill>
-                  <a:srgbClr val="222222"/>
-                </a:solidFill>
-                <a:latin typeface="Calibri" pitchFamily="34" charset="0"/>
-                <a:ea typeface="Calibri" pitchFamily="34" charset="-122"/>
-                <a:cs typeface="Calibri" pitchFamily="34" charset="-120"/>
-              </a:rPr>
-              <a:t>未交換か交換済みか</a:t>
-            </a:r>
-            <a:pPr indent="0" marL="0">
-              <a:lnSpc>
-                <a:spcPct val="125000"/>
-              </a:lnSpc>
-              <a:buNone/>
-            </a:pPr>
-            <a:r>
-              <a:rPr lang="en-US" sz="1150" dirty="0">
-                <a:solidFill>
-                  <a:srgbClr val="222222"/>
-                </a:solidFill>
-                <a:latin typeface="Calibri" pitchFamily="34" charset="0"/>
-                <a:ea typeface="Calibri" pitchFamily="34" charset="-122"/>
-                <a:cs typeface="Calibri" pitchFamily="34" charset="-120"/>
-              </a:rPr>
-              <a:t>を確かめ、</a:t>
-            </a:r>
-            <a:pPr indent="0" marL="0">
-              <a:lnSpc>
-                <a:spcPct val="125000"/>
-              </a:lnSpc>
-              <a:buNone/>
-            </a:pPr>
-            <a:r>
-              <a:rPr lang="en-US" sz="1150" b="1" dirty="0">
-                <a:solidFill>
-                  <a:srgbClr val="222222"/>
-                </a:solidFill>
-                <a:latin typeface="Calibri" pitchFamily="34" charset="0"/>
-                <a:ea typeface="Calibri" pitchFamily="34" charset="-122"/>
-                <a:cs typeface="Calibri" pitchFamily="34" charset="-120"/>
-              </a:rPr>
-              <a:t>渡す景品を選ぶ</a:t>
-            </a:r>
-            <a:endParaRPr lang="en-US" sz="1150" dirty="0"/>
-          </a:p>
-        </p:txBody>
-      </p:sp>
-      <p:sp>
-        <p:nvSpPr>
-          <p:cNvPr id="31" name="Shape 29"/>
-          <p:cNvSpPr/>
-          <p:nvPr/>
-        </p:nvSpPr>
-        <p:spPr>
-          <a:xfrm>
-            <a:off x="566928" y="7411593"/>
-            <a:ext cx="274320" cy="274320"/>
-          </a:xfrm>
-          <a:prstGeom prst="ellipse">
-            <a:avLst/>
-          </a:prstGeom>
-          <a:solidFill>
-            <a:srgbClr val="B85042"/>
-          </a:solidFill>
-          <a:ln/>
-        </p:spPr>
-      </p:sp>
-      <p:sp>
-        <p:nvSpPr>
-          <p:cNvPr id="32" name="Text 30"/>
-          <p:cNvSpPr txBox="1"/>
-          <p:nvPr/>
-        </p:nvSpPr>
-        <p:spPr>
-          <a:xfrm>
-            <a:off x="566928" y="7411593"/>
-            <a:ext cx="274320" cy="274320"/>
-          </a:xfrm>
-          <a:prstGeom prst="rect">
-            <a:avLst/>
-          </a:prstGeom>
-          <a:noFill/>
-          <a:ln/>
-        </p:spPr>
-        <p:txBody>
-          <a:bodyPr wrap="square" lIns="0" tIns="0" rIns="0" bIns="0" rtlCol="0" anchor="ctr"/>
-          <a:lstStyle/>
-          <a:p>
-            <a:pPr algn="ctr" indent="0" marL="0">
-              <a:buNone/>
-            </a:pPr>
-            <a:r>
-              <a:rPr lang="en-US" sz="1100" b="1" dirty="0">
-                <a:solidFill>
-                  <a:srgbClr val="FFFFFF"/>
-                </a:solidFill>
-                <a:latin typeface="Calibri" pitchFamily="34" charset="0"/>
-                <a:ea typeface="Calibri" pitchFamily="34" charset="-122"/>
-                <a:cs typeface="Calibri" pitchFamily="34" charset="-120"/>
-              </a:rPr>
-              <a:t>3</a:t>
-            </a:r>
-            <a:endParaRPr lang="en-US" sz="1100" dirty="0"/>
-          </a:p>
-        </p:txBody>
-      </p:sp>
-      <p:sp>
-        <p:nvSpPr>
-          <p:cNvPr id="33" name="Text 31"/>
-          <p:cNvSpPr txBox="1"/>
-          <p:nvPr/>
-        </p:nvSpPr>
-        <p:spPr>
-          <a:xfrm>
-            <a:off x="969264" y="7393305"/>
-            <a:ext cx="6025896" cy="365760"/>
-          </a:xfrm>
-          <a:prstGeom prst="rect">
-            <a:avLst/>
-          </a:prstGeom>
-          <a:noFill/>
-          <a:ln/>
-        </p:spPr>
-        <p:txBody>
-          <a:bodyPr wrap="square" lIns="0" tIns="0" rIns="0" bIns="0" rtlCol="0" anchor="t"/>
-          <a:lstStyle/>
-          <a:p>
-            <a:pPr indent="0" marL="0">
-              <a:lnSpc>
-                <a:spcPct val="125000"/>
-              </a:lnSpc>
-              <a:buNone/>
-            </a:pPr>
-            <a:r>
-              <a:rPr lang="en-US" sz="1150" dirty="0">
-                <a:solidFill>
-                  <a:srgbClr val="222222"/>
-                </a:solidFill>
-                <a:latin typeface="Calibri" pitchFamily="34" charset="0"/>
-                <a:ea typeface="Calibri" pitchFamily="34" charset="-122"/>
-                <a:cs typeface="Calibri" pitchFamily="34" charset="-120"/>
-              </a:rPr>
-              <a:t>「交換済みにする」を押して記録する</a:t>
-            </a:r>
-            <a:endParaRPr lang="en-US" sz="1150" dirty="0"/>
-          </a:p>
-        </p:txBody>
-      </p:sp>
-      <p:sp>
-        <p:nvSpPr>
-          <p:cNvPr id="34" name="Shape 32"/>
-          <p:cNvSpPr/>
-          <p:nvPr/>
-        </p:nvSpPr>
-        <p:spPr>
-          <a:xfrm>
-            <a:off x="566928" y="7850505"/>
-            <a:ext cx="6428232" cy="624459"/>
-          </a:xfrm>
-          <a:prstGeom prst="roundRect">
-            <a:avLst>
-              <a:gd name="adj" fmla="val 8786"/>
-            </a:avLst>
-          </a:prstGeom>
-          <a:solidFill>
-            <a:srgbClr val="FAEAE7"/>
-          </a:solidFill>
-          <a:ln w="9525">
-            <a:solidFill>
-              <a:srgbClr val="B85042"/>
-            </a:solidFill>
-            <a:prstDash val="solid"/>
-          </a:ln>
-        </p:spPr>
-      </p:sp>
-      <p:sp>
-        <p:nvSpPr>
-          <p:cNvPr id="35" name="Text 33"/>
-          <p:cNvSpPr txBox="1"/>
-          <p:nvPr/>
-        </p:nvSpPr>
-        <p:spPr>
-          <a:xfrm>
-            <a:off x="658368" y="7941945"/>
-            <a:ext cx="237744" cy="237744"/>
-          </a:xfrm>
-          <a:prstGeom prst="rect">
-            <a:avLst/>
-          </a:prstGeom>
-          <a:noFill/>
-          <a:ln/>
-        </p:spPr>
-        <p:txBody>
-          <a:bodyPr wrap="square" lIns="0" tIns="0" rIns="0" bIns="0" rtlCol="0" anchor="ctr"/>
-          <a:lstStyle/>
-          <a:p>
-            <a:pPr algn="ctr" indent="0" marL="0">
-              <a:buNone/>
-            </a:pPr>
-            <a:r>
-              <a:rPr lang="en-US" sz="1200" b="1" dirty="0">
-                <a:solidFill>
-                  <a:srgbClr val="B85042"/>
-                </a:solidFill>
-                <a:latin typeface="Calibri" pitchFamily="34" charset="0"/>
-                <a:ea typeface="Calibri" pitchFamily="34" charset="-122"/>
-                <a:cs typeface="Calibri" pitchFamily="34" charset="-120"/>
-              </a:rPr>
-              <a:t>i</a:t>
-            </a:r>
-            <a:endParaRPr lang="en-US" sz="1200" dirty="0"/>
-          </a:p>
-        </p:txBody>
-      </p:sp>
-      <p:sp>
-        <p:nvSpPr>
-          <p:cNvPr id="36" name="Text 34"/>
-          <p:cNvSpPr txBox="1"/>
-          <p:nvPr/>
-        </p:nvSpPr>
-        <p:spPr>
-          <a:xfrm>
-            <a:off x="950976" y="7960233"/>
-            <a:ext cx="5925312" cy="441579"/>
-          </a:xfrm>
-          <a:prstGeom prst="rect">
-            <a:avLst/>
-          </a:prstGeom>
-          <a:noFill/>
-          <a:ln/>
-        </p:spPr>
-        <p:txBody>
-          <a:bodyPr wrap="square" lIns="0" tIns="0" rIns="0" bIns="0" rtlCol="0" anchor="t"/>
-          <a:lstStyle/>
-          <a:p>
-            <a:pPr indent="0" marL="0">
-              <a:lnSpc>
-                <a:spcPct val="120000"/>
-              </a:lnSpc>
-              <a:buNone/>
-            </a:pPr>
-            <a:r>
-              <a:rPr lang="en-US" sz="1050" dirty="0">
-                <a:solidFill>
-                  <a:srgbClr val="222222"/>
-                </a:solidFill>
-                <a:latin typeface="Calibri" pitchFamily="34" charset="0"/>
-                <a:ea typeface="Calibri" pitchFamily="34" charset="-122"/>
-                <a:cs typeface="Calibri" pitchFamily="34" charset="-120"/>
-              </a:rPr>
-              <a:t>来場者の画面には「交換コード」（例：ABCD-2345）とQRコードが表示されています。スクリーンショットを見せられた場合も同じように読み取れます。</a:t>
-            </a:r>
-            <a:endParaRPr lang="en-US" sz="1050" dirty="0"/>
-          </a:p>
-        </p:txBody>
-      </p:sp>
-      <p:sp>
-        <p:nvSpPr>
-          <p:cNvPr id="37" name="Text 35"/>
+          <p:cNvPr id="26" name="Text 23"/>
           <p:cNvSpPr txBox="1"/>
           <p:nvPr/>
         </p:nvSpPr>
@@ -6683,9 +7758,586 @@
           </a:p>
         </p:txBody>
       </p:sp>
+      <p:sp>
+        <p:nvSpPr>
+          <p:cNvPr id="4" name="Text 2"/>
+          <p:cNvSpPr txBox="1"/>
+          <p:nvPr/>
+        </p:nvSpPr>
+        <p:spPr>
+          <a:xfrm>
+            <a:off x="566928" y="1591056"/>
+            <a:ext cx="6428232" cy="257810"/>
+          </a:xfrm>
+          <a:prstGeom prst="rect">
+            <a:avLst/>
+          </a:prstGeom>
+          <a:noFill/>
+          <a:ln/>
+        </p:spPr>
+        <p:txBody>
+          <a:bodyPr wrap="square" lIns="0" tIns="0" rIns="0" bIns="0" rtlCol="0" anchor="t"/>
+          <a:lstStyle/>
+          <a:p>
+            <a:pPr indent="0" marL="0">
+              <a:buNone/>
+            </a:pPr>
+            <a:r>
+              <a:rPr lang="en-US" sz="1400" b="1" dirty="0">
+                <a:solidFill>
+                  <a:srgbClr val="B85042"/>
+                </a:solidFill>
+                <a:latin typeface="Calibri" pitchFamily="34" charset="0"/>
+                <a:ea typeface="Calibri" pitchFamily="34" charset="-122"/>
+                <a:cs typeface="Calibri" pitchFamily="34" charset="-120"/>
+              </a:rPr>
+              <a:t>スマートフォンの場合（3ステップ）</a:t>
+            </a:r>
+            <a:endParaRPr lang="en-US" sz="1400" dirty="0"/>
+          </a:p>
+        </p:txBody>
+      </p:sp>
+      <p:sp>
+        <p:nvSpPr>
+          <p:cNvPr id="5" name="Shape 3"/>
+          <p:cNvSpPr/>
+          <p:nvPr/>
+        </p:nvSpPr>
+        <p:spPr>
+          <a:xfrm>
+            <a:off x="566928" y="1940306"/>
+            <a:ext cx="274320" cy="274320"/>
+          </a:xfrm>
+          <a:prstGeom prst="ellipse">
+            <a:avLst/>
+          </a:prstGeom>
+          <a:solidFill>
+            <a:srgbClr val="B85042"/>
+          </a:solidFill>
+          <a:ln/>
+        </p:spPr>
+      </p:sp>
+      <p:sp>
+        <p:nvSpPr>
+          <p:cNvPr id="6" name="Text 4"/>
+          <p:cNvSpPr txBox="1"/>
+          <p:nvPr/>
+        </p:nvSpPr>
+        <p:spPr>
+          <a:xfrm>
+            <a:off x="566928" y="1940306"/>
+            <a:ext cx="274320" cy="274320"/>
+          </a:xfrm>
+          <a:prstGeom prst="rect">
+            <a:avLst/>
+          </a:prstGeom>
+          <a:noFill/>
+          <a:ln/>
+        </p:spPr>
+        <p:txBody>
+          <a:bodyPr wrap="square" lIns="0" tIns="0" rIns="0" bIns="0" rtlCol="0" anchor="ctr"/>
+          <a:lstStyle/>
+          <a:p>
+            <a:pPr algn="ctr" indent="0" marL="0">
+              <a:buNone/>
+            </a:pPr>
+            <a:r>
+              <a:rPr lang="en-US" sz="1100" b="1" dirty="0">
+                <a:solidFill>
+                  <a:srgbClr val="FFFFFF"/>
+                </a:solidFill>
+                <a:latin typeface="Calibri" pitchFamily="34" charset="0"/>
+                <a:ea typeface="Calibri" pitchFamily="34" charset="-122"/>
+                <a:cs typeface="Calibri" pitchFamily="34" charset="-120"/>
+              </a:rPr>
+              <a:t>1</a:t>
+            </a:r>
+            <a:endParaRPr lang="en-US" sz="1100" dirty="0"/>
+          </a:p>
+        </p:txBody>
+      </p:sp>
+      <p:sp>
+        <p:nvSpPr>
+          <p:cNvPr id="7" name="Text 5"/>
+          <p:cNvSpPr txBox="1"/>
+          <p:nvPr/>
+        </p:nvSpPr>
+        <p:spPr>
+          <a:xfrm>
+            <a:off x="969264" y="1922018"/>
+            <a:ext cx="6025896" cy="365760"/>
+          </a:xfrm>
+          <a:prstGeom prst="rect">
+            <a:avLst/>
+          </a:prstGeom>
+          <a:noFill/>
+          <a:ln/>
+        </p:spPr>
+        <p:txBody>
+          <a:bodyPr wrap="square" lIns="0" tIns="0" rIns="0" bIns="0" rtlCol="0" anchor="t"/>
+          <a:lstStyle/>
+          <a:p>
+            <a:pPr indent="0" marL="0">
+              <a:lnSpc>
+                <a:spcPct val="125000"/>
+              </a:lnSpc>
+              <a:buNone/>
+            </a:pPr>
+            <a:r>
+              <a:rPr lang="en-US" sz="1150" dirty="0">
+                <a:solidFill>
+                  <a:srgbClr val="222222"/>
+                </a:solidFill>
+                <a:latin typeface="Calibri" pitchFamily="34" charset="0"/>
+                <a:ea typeface="Calibri" pitchFamily="34" charset="-122"/>
+                <a:cs typeface="Calibri" pitchFamily="34" charset="-120"/>
+              </a:rPr>
+              <a:t>来場者のスマートフォンに表示された</a:t>
+            </a:r>
+            <a:pPr indent="0" marL="0">
+              <a:lnSpc>
+                <a:spcPct val="125000"/>
+              </a:lnSpc>
+              <a:buNone/>
+            </a:pPr>
+            <a:r>
+              <a:rPr lang="en-US" sz="1150" b="1" dirty="0">
+                <a:solidFill>
+                  <a:srgbClr val="222222"/>
+                </a:solidFill>
+                <a:latin typeface="Calibri" pitchFamily="34" charset="0"/>
+                <a:ea typeface="Calibri" pitchFamily="34" charset="-122"/>
+                <a:cs typeface="Calibri" pitchFamily="34" charset="-120"/>
+              </a:rPr>
+              <a:t>QRコード</a:t>
+            </a:r>
+            <a:pPr indent="0" marL="0">
+              <a:lnSpc>
+                <a:spcPct val="125000"/>
+              </a:lnSpc>
+              <a:buNone/>
+            </a:pPr>
+            <a:r>
+              <a:rPr lang="en-US" sz="1150" dirty="0">
+                <a:solidFill>
+                  <a:srgbClr val="222222"/>
+                </a:solidFill>
+                <a:latin typeface="Calibri" pitchFamily="34" charset="0"/>
+                <a:ea typeface="Calibri" pitchFamily="34" charset="-122"/>
+                <a:cs typeface="Calibri" pitchFamily="34" charset="-120"/>
+              </a:rPr>
+              <a:t>を読み取る</a:t>
+            </a:r>
+            <a:endParaRPr lang="en-US" sz="1150" dirty="0"/>
+          </a:p>
+        </p:txBody>
+      </p:sp>
+      <p:sp>
+        <p:nvSpPr>
+          <p:cNvPr id="8" name="Shape 6"/>
+          <p:cNvSpPr/>
+          <p:nvPr/>
+        </p:nvSpPr>
+        <p:spPr>
+          <a:xfrm>
+            <a:off x="566928" y="2397506"/>
+            <a:ext cx="274320" cy="274320"/>
+          </a:xfrm>
+          <a:prstGeom prst="ellipse">
+            <a:avLst/>
+          </a:prstGeom>
+          <a:solidFill>
+            <a:srgbClr val="B85042"/>
+          </a:solidFill>
+          <a:ln/>
+        </p:spPr>
+      </p:sp>
+      <p:sp>
+        <p:nvSpPr>
+          <p:cNvPr id="9" name="Text 7"/>
+          <p:cNvSpPr txBox="1"/>
+          <p:nvPr/>
+        </p:nvSpPr>
+        <p:spPr>
+          <a:xfrm>
+            <a:off x="566928" y="2397506"/>
+            <a:ext cx="274320" cy="274320"/>
+          </a:xfrm>
+          <a:prstGeom prst="rect">
+            <a:avLst/>
+          </a:prstGeom>
+          <a:noFill/>
+          <a:ln/>
+        </p:spPr>
+        <p:txBody>
+          <a:bodyPr wrap="square" lIns="0" tIns="0" rIns="0" bIns="0" rtlCol="0" anchor="ctr"/>
+          <a:lstStyle/>
+          <a:p>
+            <a:pPr algn="ctr" indent="0" marL="0">
+              <a:buNone/>
+            </a:pPr>
+            <a:r>
+              <a:rPr lang="en-US" sz="1100" b="1" dirty="0">
+                <a:solidFill>
+                  <a:srgbClr val="FFFFFF"/>
+                </a:solidFill>
+                <a:latin typeface="Calibri" pitchFamily="34" charset="0"/>
+                <a:ea typeface="Calibri" pitchFamily="34" charset="-122"/>
+                <a:cs typeface="Calibri" pitchFamily="34" charset="-120"/>
+              </a:rPr>
+              <a:t>2</a:t>
+            </a:r>
+            <a:endParaRPr lang="en-US" sz="1100" dirty="0"/>
+          </a:p>
+        </p:txBody>
+      </p:sp>
+      <p:sp>
+        <p:nvSpPr>
+          <p:cNvPr id="10" name="Text 8"/>
+          <p:cNvSpPr txBox="1"/>
+          <p:nvPr/>
+        </p:nvSpPr>
+        <p:spPr>
+          <a:xfrm>
+            <a:off x="969264" y="2379218"/>
+            <a:ext cx="6025896" cy="365760"/>
+          </a:xfrm>
+          <a:prstGeom prst="rect">
+            <a:avLst/>
+          </a:prstGeom>
+          <a:noFill/>
+          <a:ln/>
+        </p:spPr>
+        <p:txBody>
+          <a:bodyPr wrap="square" lIns="0" tIns="0" rIns="0" bIns="0" rtlCol="0" anchor="t"/>
+          <a:lstStyle/>
+          <a:p>
+            <a:pPr indent="0" marL="0">
+              <a:lnSpc>
+                <a:spcPct val="125000"/>
+              </a:lnSpc>
+              <a:buNone/>
+            </a:pPr>
+            <a:r>
+              <a:rPr lang="en-US" sz="1150" dirty="0">
+                <a:solidFill>
+                  <a:srgbClr val="222222"/>
+                </a:solidFill>
+                <a:latin typeface="Calibri" pitchFamily="34" charset="0"/>
+                <a:ea typeface="Calibri" pitchFamily="34" charset="-122"/>
+                <a:cs typeface="Calibri" pitchFamily="34" charset="-120"/>
+              </a:rPr>
+              <a:t>画面で</a:t>
+            </a:r>
+            <a:pPr indent="0" marL="0">
+              <a:lnSpc>
+                <a:spcPct val="125000"/>
+              </a:lnSpc>
+              <a:buNone/>
+            </a:pPr>
+            <a:r>
+              <a:rPr lang="en-US" sz="1150" b="1" dirty="0">
+                <a:solidFill>
+                  <a:srgbClr val="222222"/>
+                </a:solidFill>
+                <a:latin typeface="Calibri" pitchFamily="34" charset="0"/>
+                <a:ea typeface="Calibri" pitchFamily="34" charset="-122"/>
+                <a:cs typeface="Calibri" pitchFamily="34" charset="-120"/>
+              </a:rPr>
+              <a:t>未交換か交換済みか</a:t>
+            </a:r>
+            <a:pPr indent="0" marL="0">
+              <a:lnSpc>
+                <a:spcPct val="125000"/>
+              </a:lnSpc>
+              <a:buNone/>
+            </a:pPr>
+            <a:r>
+              <a:rPr lang="en-US" sz="1150" dirty="0">
+                <a:solidFill>
+                  <a:srgbClr val="222222"/>
+                </a:solidFill>
+                <a:latin typeface="Calibri" pitchFamily="34" charset="0"/>
+                <a:ea typeface="Calibri" pitchFamily="34" charset="-122"/>
+                <a:cs typeface="Calibri" pitchFamily="34" charset="-120"/>
+              </a:rPr>
+              <a:t>を確かめ、</a:t>
+            </a:r>
+            <a:pPr indent="0" marL="0">
+              <a:lnSpc>
+                <a:spcPct val="125000"/>
+              </a:lnSpc>
+              <a:buNone/>
+            </a:pPr>
+            <a:r>
+              <a:rPr lang="en-US" sz="1150" b="1" dirty="0">
+                <a:solidFill>
+                  <a:srgbClr val="222222"/>
+                </a:solidFill>
+                <a:latin typeface="Calibri" pitchFamily="34" charset="0"/>
+                <a:ea typeface="Calibri" pitchFamily="34" charset="-122"/>
+                <a:cs typeface="Calibri" pitchFamily="34" charset="-120"/>
+              </a:rPr>
+              <a:t>渡す景品を選ぶ</a:t>
+            </a:r>
+            <a:endParaRPr lang="en-US" sz="1150" dirty="0"/>
+          </a:p>
+        </p:txBody>
+      </p:sp>
+      <p:sp>
+        <p:nvSpPr>
+          <p:cNvPr id="11" name="Shape 9"/>
+          <p:cNvSpPr/>
+          <p:nvPr/>
+        </p:nvSpPr>
+        <p:spPr>
+          <a:xfrm>
+            <a:off x="566928" y="2854706"/>
+            <a:ext cx="274320" cy="274320"/>
+          </a:xfrm>
+          <a:prstGeom prst="ellipse">
+            <a:avLst/>
+          </a:prstGeom>
+          <a:solidFill>
+            <a:srgbClr val="B85042"/>
+          </a:solidFill>
+          <a:ln/>
+        </p:spPr>
+      </p:sp>
+      <p:sp>
+        <p:nvSpPr>
+          <p:cNvPr id="12" name="Text 10"/>
+          <p:cNvSpPr txBox="1"/>
+          <p:nvPr/>
+        </p:nvSpPr>
+        <p:spPr>
+          <a:xfrm>
+            <a:off x="566928" y="2854706"/>
+            <a:ext cx="274320" cy="274320"/>
+          </a:xfrm>
+          <a:prstGeom prst="rect">
+            <a:avLst/>
+          </a:prstGeom>
+          <a:noFill/>
+          <a:ln/>
+        </p:spPr>
+        <p:txBody>
+          <a:bodyPr wrap="square" lIns="0" tIns="0" rIns="0" bIns="0" rtlCol="0" anchor="ctr"/>
+          <a:lstStyle/>
+          <a:p>
+            <a:pPr algn="ctr" indent="0" marL="0">
+              <a:buNone/>
+            </a:pPr>
+            <a:r>
+              <a:rPr lang="en-US" sz="1100" b="1" dirty="0">
+                <a:solidFill>
+                  <a:srgbClr val="FFFFFF"/>
+                </a:solidFill>
+                <a:latin typeface="Calibri" pitchFamily="34" charset="0"/>
+                <a:ea typeface="Calibri" pitchFamily="34" charset="-122"/>
+                <a:cs typeface="Calibri" pitchFamily="34" charset="-120"/>
+              </a:rPr>
+              <a:t>3</a:t>
+            </a:r>
+            <a:endParaRPr lang="en-US" sz="1100" dirty="0"/>
+          </a:p>
+        </p:txBody>
+      </p:sp>
+      <p:sp>
+        <p:nvSpPr>
+          <p:cNvPr id="13" name="Text 11"/>
+          <p:cNvSpPr txBox="1"/>
+          <p:nvPr/>
+        </p:nvSpPr>
+        <p:spPr>
+          <a:xfrm>
+            <a:off x="969264" y="2836418"/>
+            <a:ext cx="6025896" cy="365760"/>
+          </a:xfrm>
+          <a:prstGeom prst="rect">
+            <a:avLst/>
+          </a:prstGeom>
+          <a:noFill/>
+          <a:ln/>
+        </p:spPr>
+        <p:txBody>
+          <a:bodyPr wrap="square" lIns="0" tIns="0" rIns="0" bIns="0" rtlCol="0" anchor="t"/>
+          <a:lstStyle/>
+          <a:p>
+            <a:pPr indent="0" marL="0">
+              <a:lnSpc>
+                <a:spcPct val="125000"/>
+              </a:lnSpc>
+              <a:buNone/>
+            </a:pPr>
+            <a:r>
+              <a:rPr lang="en-US" sz="1150" dirty="0">
+                <a:solidFill>
+                  <a:srgbClr val="222222"/>
+                </a:solidFill>
+                <a:latin typeface="Calibri" pitchFamily="34" charset="0"/>
+                <a:ea typeface="Calibri" pitchFamily="34" charset="-122"/>
+                <a:cs typeface="Calibri" pitchFamily="34" charset="-120"/>
+              </a:rPr>
+              <a:t>「交換済みにする」を押して記録する</a:t>
+            </a:r>
+            <a:endParaRPr lang="en-US" sz="1150" dirty="0"/>
+          </a:p>
+        </p:txBody>
+      </p:sp>
+      <p:sp>
+        <p:nvSpPr>
+          <p:cNvPr id="14" name="Text 12"/>
+          <p:cNvSpPr txBox="1"/>
+          <p:nvPr/>
+        </p:nvSpPr>
+        <p:spPr>
+          <a:xfrm>
+            <a:off x="566928" y="3293618"/>
+            <a:ext cx="6428232" cy="257429"/>
+          </a:xfrm>
+          <a:prstGeom prst="rect">
+            <a:avLst/>
+          </a:prstGeom>
+          <a:noFill/>
+          <a:ln/>
+        </p:spPr>
+        <p:txBody>
+          <a:bodyPr wrap="square" lIns="0" tIns="0" rIns="0" bIns="0" rtlCol="0" anchor="t"/>
+          <a:lstStyle/>
+          <a:p>
+            <a:pPr indent="0" marL="0">
+              <a:lnSpc>
+                <a:spcPct val="125000"/>
+              </a:lnSpc>
+              <a:buNone/>
+            </a:pPr>
+            <a:r>
+              <a:rPr lang="en-US" sz="1100" dirty="0">
+                <a:solidFill>
+                  <a:srgbClr val="222222"/>
+                </a:solidFill>
+                <a:latin typeface="Calibri" pitchFamily="34" charset="0"/>
+                <a:ea typeface="Calibri" pitchFamily="34" charset="-122"/>
+                <a:cs typeface="Calibri" pitchFamily="34" charset="-120"/>
+              </a:rPr>
+              <a:t>くわしい手順は、次の「手順1〜3」をご覧ください。</a:t>
+            </a:r>
+            <a:endParaRPr lang="en-US" sz="1100" dirty="0"/>
+          </a:p>
+        </p:txBody>
+      </p:sp>
+      <p:sp>
+        <p:nvSpPr>
+          <p:cNvPr id="15" name="Shape 13"/>
+          <p:cNvSpPr/>
+          <p:nvPr/>
+        </p:nvSpPr>
+        <p:spPr>
+          <a:xfrm>
+            <a:off x="566928" y="3587623"/>
+            <a:ext cx="6428232" cy="624459"/>
+          </a:xfrm>
+          <a:prstGeom prst="roundRect">
+            <a:avLst>
+              <a:gd name="adj" fmla="val 8786"/>
+            </a:avLst>
+          </a:prstGeom>
+          <a:solidFill>
+            <a:srgbClr val="FAEAE7"/>
+          </a:solidFill>
+          <a:ln w="9525">
+            <a:solidFill>
+              <a:srgbClr val="B85042"/>
+            </a:solidFill>
+            <a:prstDash val="solid"/>
+          </a:ln>
+        </p:spPr>
+      </p:sp>
+      <p:sp>
+        <p:nvSpPr>
+          <p:cNvPr id="16" name="Text 14"/>
+          <p:cNvSpPr txBox="1"/>
+          <p:nvPr/>
+        </p:nvSpPr>
+        <p:spPr>
+          <a:xfrm>
+            <a:off x="658368" y="3679063"/>
+            <a:ext cx="237744" cy="237744"/>
+          </a:xfrm>
+          <a:prstGeom prst="rect">
+            <a:avLst/>
+          </a:prstGeom>
+          <a:noFill/>
+          <a:ln/>
+        </p:spPr>
+        <p:txBody>
+          <a:bodyPr wrap="square" lIns="0" tIns="0" rIns="0" bIns="0" rtlCol="0" anchor="ctr"/>
+          <a:lstStyle/>
+          <a:p>
+            <a:pPr algn="ctr" indent="0" marL="0">
+              <a:buNone/>
+            </a:pPr>
+            <a:r>
+              <a:rPr lang="en-US" sz="1200" b="1" dirty="0">
+                <a:solidFill>
+                  <a:srgbClr val="B85042"/>
+                </a:solidFill>
+                <a:latin typeface="Calibri" pitchFamily="34" charset="0"/>
+                <a:ea typeface="Calibri" pitchFamily="34" charset="-122"/>
+                <a:cs typeface="Calibri" pitchFamily="34" charset="-120"/>
+              </a:rPr>
+              <a:t>i</a:t>
+            </a:r>
+            <a:endParaRPr lang="en-US" sz="1200" dirty="0"/>
+          </a:p>
+        </p:txBody>
+      </p:sp>
+      <p:sp>
+        <p:nvSpPr>
+          <p:cNvPr id="17" name="Text 15"/>
+          <p:cNvSpPr txBox="1"/>
+          <p:nvPr/>
+        </p:nvSpPr>
+        <p:spPr>
+          <a:xfrm>
+            <a:off x="950976" y="3697351"/>
+            <a:ext cx="5925312" cy="441579"/>
+          </a:xfrm>
+          <a:prstGeom prst="rect">
+            <a:avLst/>
+          </a:prstGeom>
+          <a:noFill/>
+          <a:ln/>
+        </p:spPr>
+        <p:txBody>
+          <a:bodyPr wrap="square" lIns="0" tIns="0" rIns="0" bIns="0" rtlCol="0" anchor="t"/>
+          <a:lstStyle/>
+          <a:p>
+            <a:pPr indent="0" marL="0">
+              <a:lnSpc>
+                <a:spcPct val="120000"/>
+              </a:lnSpc>
+              <a:buNone/>
+            </a:pPr>
+            <a:r>
+              <a:rPr lang="en-US" sz="1050" dirty="0">
+                <a:solidFill>
+                  <a:srgbClr val="222222"/>
+                </a:solidFill>
+                <a:latin typeface="Calibri" pitchFamily="34" charset="0"/>
+                <a:ea typeface="Calibri" pitchFamily="34" charset="-122"/>
+                <a:cs typeface="Calibri" pitchFamily="34" charset="-120"/>
+              </a:rPr>
+              <a:t>来場者の画面には「交換コード」（例：ABCD-2345）とQRコードが表示されています。スクリーンショットを見せられた場合も同じように読み取れます。</a:t>
+            </a:r>
+            <a:endParaRPr lang="en-US" sz="1050" dirty="0"/>
+          </a:p>
+        </p:txBody>
+      </p:sp>
       <p:pic>
         <p:nvPicPr>
-          <p:cNvPr id="4" name="Image 0" descr="C:\Users\sato\Desktop\enque\docs\images\p-scan-desk.png">    </p:cNvPr>
+          <p:cNvPr id="18" name="Image 0" descr="C:\Users\sato\Desktop\enque\docs\images\p-scan-desk.png">    </p:cNvPr>
           <p:cNvPicPr>
             <a:picLocks noChangeAspect="1"/>
           </p:cNvPicPr>
@@ -6699,7 +8351,7 @@
         </p:blipFill>
         <p:spPr>
           <a:xfrm>
-            <a:off x="1545525" y="1481328"/>
+            <a:off x="1545525" y="4285234"/>
             <a:ext cx="4471038" cy="3474720"/>
           </a:xfrm>
           <a:prstGeom prst="rect">
@@ -6709,13 +8361,13 @@
       </p:pic>
       <p:sp>
         <p:nvSpPr>
-          <p:cNvPr id="5" name="Text 2"/>
-          <p:cNvSpPr txBox="1"/>
-          <p:nvPr/>
-        </p:nvSpPr>
-        <p:spPr>
-          <a:xfrm>
-            <a:off x="566928" y="5010912"/>
+          <p:cNvPr id="19" name="Text 16"/>
+          <p:cNvSpPr txBox="1"/>
+          <p:nvPr/>
+        </p:nvSpPr>
+        <p:spPr>
+          <a:xfrm>
+            <a:off x="566928" y="7814818"/>
             <a:ext cx="6428232" cy="274320"/>
           </a:xfrm>
           <a:prstGeom prst="rect">
@@ -6746,72 +8398,9 @@
           </a:p>
         </p:txBody>
       </p:sp>
-      <p:pic>
-        <p:nvPicPr>
-          <p:cNvPr id="6" name="Image 1" descr="C:\Users\sato\Desktop\enque\docs\images\p-visitor-done.png">    </p:cNvPr>
-          <p:cNvPicPr>
-            <a:picLocks noChangeAspect="1"/>
-          </p:cNvPicPr>
-          <p:nvPr/>
-        </p:nvPicPr>
-        <p:blipFill>
-          <a:blip r:embed="rId2"/>
-          <a:stretch>
-            <a:fillRect/>
-          </a:stretch>
-        </p:blipFill>
-        <p:spPr>
-          <a:xfrm>
-            <a:off x="3266610" y="5340096"/>
-            <a:ext cx="1028869" cy="3474720"/>
-          </a:xfrm>
-          <a:prstGeom prst="rect">
-            <a:avLst/>
-          </a:prstGeom>
-        </p:spPr>
-      </p:pic>
-      <p:sp>
-        <p:nvSpPr>
-          <p:cNvPr id="7" name="Text 3"/>
-          <p:cNvSpPr txBox="1"/>
-          <p:nvPr/>
-        </p:nvSpPr>
-        <p:spPr>
-          <a:xfrm>
-            <a:off x="566928" y="8869680"/>
-            <a:ext cx="6428232" cy="274320"/>
-          </a:xfrm>
-          <a:prstGeom prst="rect">
-            <a:avLst/>
-          </a:prstGeom>
-          <a:noFill/>
-          <a:ln/>
-        </p:spPr>
-        <p:txBody>
-          <a:bodyPr wrap="square" lIns="0" tIns="0" rIns="0" bIns="0" rtlCol="0" anchor="ctr"/>
-          <a:lstStyle/>
-          <a:p>
-            <a:pPr algn="ctr" indent="0" marL="0">
-              <a:buNone/>
-            </a:pPr>
-            <a:r>
-              <a:rPr lang="en-US" sz="950" dirty="0">
-                <a:solidFill>
-                  <a:srgbClr val="6B6B6B"/>
-                </a:solidFill>
-                <a:latin typeface="Calibri" pitchFamily="34" charset="0"/>
-                <a:ea typeface="Calibri" pitchFamily="34" charset="-122"/>
-                <a:cs typeface="Calibri" pitchFamily="34" charset="-120"/>
-              </a:rPr>
-              <a:t>来場者の「回答済み画面」。大きな交換コードとQRコードが写っているもの。</a:t>
-            </a:r>
-            <a:endParaRPr lang="en-US" sz="950" dirty="0"/>
-          </a:p>
-        </p:txBody>
-      </p:sp>
-      <p:sp>
-        <p:nvSpPr>
-          <p:cNvPr id="8" name="Text 4"/>
+      <p:sp>
+        <p:nvSpPr>
+          <p:cNvPr id="20" name="Text 17"/>
           <p:cNvSpPr txBox="1"/>
           <p:nvPr/>
         </p:nvSpPr>
@@ -6952,123 +8541,46 @@
                 <a:ea typeface="Calibri" pitchFamily="34" charset="-122"/>
                 <a:cs typeface="Calibri" pitchFamily="34" charset="-120"/>
               </a:rPr>
-              <a:t>手順1：QRコードを読み取る</a:t>
+              <a:t>交換の流れ（つづき）</a:t>
             </a:r>
             <a:endParaRPr lang="en-US" sz="2200" dirty="0"/>
           </a:p>
         </p:txBody>
       </p:sp>
-      <p:sp>
-        <p:nvSpPr>
-          <p:cNvPr id="4" name="Text 2"/>
-          <p:cNvSpPr txBox="1"/>
-          <p:nvPr/>
-        </p:nvSpPr>
-        <p:spPr>
-          <a:xfrm>
-            <a:off x="566928" y="1481328"/>
-            <a:ext cx="6428232" cy="257429"/>
-          </a:xfrm>
-          <a:prstGeom prst="rect">
-            <a:avLst/>
-          </a:prstGeom>
-          <a:noFill/>
-          <a:ln/>
-        </p:spPr>
-        <p:txBody>
-          <a:bodyPr wrap="square" lIns="0" tIns="0" rIns="0" bIns="0" rtlCol="0" anchor="t"/>
-          <a:lstStyle/>
-          <a:p>
-            <a:pPr indent="0" marL="0">
-              <a:lnSpc>
-                <a:spcPct val="125000"/>
-              </a:lnSpc>
-              <a:buNone/>
-            </a:pPr>
-            <a:r>
-              <a:rPr lang="en-US" sz="1100" dirty="0">
-                <a:solidFill>
-                  <a:srgbClr val="222222"/>
-                </a:solidFill>
-                <a:latin typeface="Calibri" pitchFamily="34" charset="0"/>
-                <a:ea typeface="Calibri" pitchFamily="34" charset="-122"/>
-                <a:cs typeface="Calibri" pitchFamily="34" charset="-120"/>
-              </a:rPr>
-              <a:t>読み取り方は2通りあります。どちらでも同じ画面が開きます。</a:t>
-            </a:r>
-            <a:endParaRPr lang="en-US" sz="1100" dirty="0"/>
-          </a:p>
-        </p:txBody>
-      </p:sp>
-      <p:sp>
-        <p:nvSpPr>
-          <p:cNvPr id="5" name="Text 3"/>
-          <p:cNvSpPr txBox="1"/>
-          <p:nvPr/>
-        </p:nvSpPr>
-        <p:spPr>
-          <a:xfrm>
-            <a:off x="566928" y="1885061"/>
-            <a:ext cx="6428232" cy="257810"/>
-          </a:xfrm>
-          <a:prstGeom prst="rect">
-            <a:avLst/>
-          </a:prstGeom>
-          <a:noFill/>
-          <a:ln/>
-        </p:spPr>
-        <p:txBody>
-          <a:bodyPr wrap="square" lIns="0" tIns="0" rIns="0" bIns="0" rtlCol="0" anchor="t"/>
-          <a:lstStyle/>
-          <a:p>
-            <a:pPr indent="0" marL="0">
-              <a:buNone/>
-            </a:pPr>
-            <a:r>
-              <a:rPr lang="en-US" sz="1400" b="1" dirty="0">
-                <a:solidFill>
-                  <a:srgbClr val="B85042"/>
-                </a:solidFill>
-                <a:latin typeface="Calibri" pitchFamily="34" charset="0"/>
-                <a:ea typeface="Calibri" pitchFamily="34" charset="-122"/>
-                <a:cs typeface="Calibri" pitchFamily="34" charset="-120"/>
-              </a:rPr>
-              <a:t>方法A：照会画面のボタンから読み取る（おすすめ）</a:t>
-            </a:r>
-            <a:endParaRPr lang="en-US" sz="1400" dirty="0"/>
-          </a:p>
-        </p:txBody>
-      </p:sp>
-      <p:sp>
-        <p:nvSpPr>
-          <p:cNvPr id="6" name="Shape 4"/>
-          <p:cNvSpPr/>
-          <p:nvPr/>
-        </p:nvSpPr>
-        <p:spPr>
-          <a:xfrm>
-            <a:off x="566928" y="2234311"/>
-            <a:ext cx="274320" cy="274320"/>
-          </a:xfrm>
-          <a:prstGeom prst="ellipse">
-            <a:avLst/>
-          </a:prstGeom>
-          <a:solidFill>
-            <a:srgbClr val="B85042"/>
-          </a:solidFill>
-          <a:ln/>
-        </p:spPr>
-      </p:sp>
-      <p:sp>
-        <p:nvSpPr>
-          <p:cNvPr id="7" name="Text 5"/>
-          <p:cNvSpPr txBox="1"/>
-          <p:nvPr/>
-        </p:nvSpPr>
-        <p:spPr>
-          <a:xfrm>
-            <a:off x="566928" y="2234311"/>
-            <a:ext cx="274320" cy="274320"/>
+      <p:pic>
+        <p:nvPicPr>
+          <p:cNvPr id="4" name="Image 0" descr="C:\Users\sato\Desktop\enque\docs\images\p-visitor-done.png">    </p:cNvPr>
+          <p:cNvPicPr>
+            <a:picLocks noChangeAspect="1"/>
+          </p:cNvPicPr>
+          <p:nvPr/>
+        </p:nvPicPr>
+        <p:blipFill>
+          <a:blip r:embed="rId1"/>
+          <a:stretch>
+            <a:fillRect/>
+          </a:stretch>
+        </p:blipFill>
+        <p:spPr>
+          <a:xfrm>
+            <a:off x="3266610" y="1481328"/>
+            <a:ext cx="1028869" cy="3474720"/>
+          </a:xfrm>
+          <a:prstGeom prst="rect">
+            <a:avLst/>
+          </a:prstGeom>
+        </p:spPr>
+      </p:pic>
+      <p:sp>
+        <p:nvSpPr>
+          <p:cNvPr id="5" name="Text 2"/>
+          <p:cNvSpPr txBox="1"/>
+          <p:nvPr/>
+        </p:nvSpPr>
+        <p:spPr>
+          <a:xfrm>
+            <a:off x="566928" y="5010912"/>
+            <a:ext cx="6428232" cy="274320"/>
           </a:xfrm>
           <a:prstGeom prst="rect">
             <a:avLst/>
@@ -7084,994 +8596,23 @@
               <a:buNone/>
             </a:pPr>
             <a:r>
-              <a:rPr lang="en-US" sz="1100" b="1" dirty="0">
-                <a:solidFill>
-                  <a:srgbClr val="FFFFFF"/>
-                </a:solidFill>
-                <a:latin typeface="Calibri" pitchFamily="34" charset="0"/>
-                <a:ea typeface="Calibri" pitchFamily="34" charset="-122"/>
-                <a:cs typeface="Calibri" pitchFamily="34" charset="-120"/>
-              </a:rPr>
-              <a:t>1</a:t>
-            </a:r>
-            <a:endParaRPr lang="en-US" sz="1100" dirty="0"/>
-          </a:p>
-        </p:txBody>
-      </p:sp>
-      <p:sp>
-        <p:nvSpPr>
-          <p:cNvPr id="8" name="Text 6"/>
-          <p:cNvSpPr txBox="1"/>
-          <p:nvPr/>
-        </p:nvSpPr>
-        <p:spPr>
-          <a:xfrm>
-            <a:off x="969264" y="2216023"/>
-            <a:ext cx="6025896" cy="365760"/>
-          </a:xfrm>
-          <a:prstGeom prst="rect">
-            <a:avLst/>
-          </a:prstGeom>
-          <a:noFill/>
-          <a:ln/>
-        </p:spPr>
-        <p:txBody>
-          <a:bodyPr wrap="square" lIns="0" tIns="0" rIns="0" bIns="0" rtlCol="0" anchor="t"/>
-          <a:lstStyle/>
-          <a:p>
-            <a:pPr indent="0" marL="0">
-              <a:lnSpc>
-                <a:spcPct val="125000"/>
-              </a:lnSpc>
-              <a:buNone/>
-            </a:pPr>
-            <a:r>
-              <a:rPr lang="en-US" sz="1150" dirty="0">
-                <a:solidFill>
-                  <a:srgbClr val="222222"/>
-                </a:solidFill>
-                <a:latin typeface="Calibri" pitchFamily="34" charset="0"/>
-                <a:ea typeface="Calibri" pitchFamily="34" charset="-122"/>
-                <a:cs typeface="Calibri" pitchFamily="34" charset="-120"/>
-              </a:rPr>
-              <a:t>「景品交換の照会」の画面で、</a:t>
-            </a:r>
-            <a:pPr indent="0" marL="0">
-              <a:lnSpc>
-                <a:spcPct val="125000"/>
-              </a:lnSpc>
-              <a:buNone/>
-            </a:pPr>
-            <a:r>
-              <a:rPr lang="en-US" sz="1150" b="1" dirty="0">
-                <a:solidFill>
-                  <a:srgbClr val="222222"/>
-                </a:solidFill>
-                <a:latin typeface="Calibri" pitchFamily="34" charset="0"/>
-                <a:ea typeface="Calibri" pitchFamily="34" charset="-122"/>
-                <a:cs typeface="Calibri" pitchFamily="34" charset="-120"/>
-              </a:rPr>
-              <a:t>「QRコードを読み取る」</a:t>
-            </a:r>
-            <a:pPr indent="0" marL="0">
-              <a:lnSpc>
-                <a:spcPct val="125000"/>
-              </a:lnSpc>
-              <a:buNone/>
-            </a:pPr>
-            <a:r>
-              <a:rPr lang="en-US" sz="1150" dirty="0">
-                <a:solidFill>
-                  <a:srgbClr val="222222"/>
-                </a:solidFill>
-                <a:latin typeface="Calibri" pitchFamily="34" charset="0"/>
-                <a:ea typeface="Calibri" pitchFamily="34" charset="-122"/>
-                <a:cs typeface="Calibri" pitchFamily="34" charset="-120"/>
-              </a:rPr>
-              <a:t>を押す</a:t>
-            </a:r>
-            <a:endParaRPr lang="en-US" sz="1150" dirty="0"/>
-          </a:p>
-        </p:txBody>
-      </p:sp>
-      <p:sp>
-        <p:nvSpPr>
-          <p:cNvPr id="9" name="Shape 7"/>
-          <p:cNvSpPr/>
-          <p:nvPr/>
-        </p:nvSpPr>
-        <p:spPr>
-          <a:xfrm>
-            <a:off x="566928" y="2691511"/>
-            <a:ext cx="274320" cy="274320"/>
-          </a:xfrm>
-          <a:prstGeom prst="ellipse">
-            <a:avLst/>
-          </a:prstGeom>
-          <a:solidFill>
-            <a:srgbClr val="B85042"/>
-          </a:solidFill>
-          <a:ln/>
-        </p:spPr>
-      </p:sp>
-      <p:sp>
-        <p:nvSpPr>
-          <p:cNvPr id="10" name="Text 8"/>
-          <p:cNvSpPr txBox="1"/>
-          <p:nvPr/>
-        </p:nvSpPr>
-        <p:spPr>
-          <a:xfrm>
-            <a:off x="566928" y="2691511"/>
-            <a:ext cx="274320" cy="274320"/>
-          </a:xfrm>
-          <a:prstGeom prst="rect">
-            <a:avLst/>
-          </a:prstGeom>
-          <a:noFill/>
-          <a:ln/>
-        </p:spPr>
-        <p:txBody>
-          <a:bodyPr wrap="square" lIns="0" tIns="0" rIns="0" bIns="0" rtlCol="0" anchor="ctr"/>
-          <a:lstStyle/>
-          <a:p>
-            <a:pPr algn="ctr" indent="0" marL="0">
-              <a:buNone/>
-            </a:pPr>
-            <a:r>
-              <a:rPr lang="en-US" sz="1100" b="1" dirty="0">
-                <a:solidFill>
-                  <a:srgbClr val="FFFFFF"/>
-                </a:solidFill>
-                <a:latin typeface="Calibri" pitchFamily="34" charset="0"/>
-                <a:ea typeface="Calibri" pitchFamily="34" charset="-122"/>
-                <a:cs typeface="Calibri" pitchFamily="34" charset="-120"/>
-              </a:rPr>
-              <a:t>2</a:t>
-            </a:r>
-            <a:endParaRPr lang="en-US" sz="1100" dirty="0"/>
-          </a:p>
-        </p:txBody>
-      </p:sp>
-      <p:sp>
-        <p:nvSpPr>
-          <p:cNvPr id="11" name="Text 9"/>
-          <p:cNvSpPr txBox="1"/>
-          <p:nvPr/>
-        </p:nvSpPr>
-        <p:spPr>
-          <a:xfrm>
-            <a:off x="969264" y="2673223"/>
-            <a:ext cx="6025896" cy="365760"/>
-          </a:xfrm>
-          <a:prstGeom prst="rect">
-            <a:avLst/>
-          </a:prstGeom>
-          <a:noFill/>
-          <a:ln/>
-        </p:spPr>
-        <p:txBody>
-          <a:bodyPr wrap="square" lIns="0" tIns="0" rIns="0" bIns="0" rtlCol="0" anchor="t"/>
-          <a:lstStyle/>
-          <a:p>
-            <a:pPr indent="0" marL="0">
-              <a:lnSpc>
-                <a:spcPct val="125000"/>
-              </a:lnSpc>
-              <a:buNone/>
-            </a:pPr>
-            <a:r>
-              <a:rPr lang="en-US" sz="1150" dirty="0">
-                <a:solidFill>
-                  <a:srgbClr val="222222"/>
-                </a:solidFill>
-                <a:latin typeface="Calibri" pitchFamily="34" charset="0"/>
-                <a:ea typeface="Calibri" pitchFamily="34" charset="-122"/>
-                <a:cs typeface="Calibri" pitchFamily="34" charset="-120"/>
-              </a:rPr>
-              <a:t>カメラの使用を聞かれたら</a:t>
-            </a:r>
-            <a:pPr indent="0" marL="0">
-              <a:lnSpc>
-                <a:spcPct val="125000"/>
-              </a:lnSpc>
-              <a:buNone/>
-            </a:pPr>
-            <a:r>
-              <a:rPr lang="en-US" sz="1150" b="1" dirty="0">
-                <a:solidFill>
-                  <a:srgbClr val="222222"/>
-                </a:solidFill>
-                <a:latin typeface="Calibri" pitchFamily="34" charset="0"/>
-                <a:ea typeface="Calibri" pitchFamily="34" charset="-122"/>
-                <a:cs typeface="Calibri" pitchFamily="34" charset="-120"/>
-              </a:rPr>
-              <a:t>「許可」</a:t>
-            </a:r>
-            <a:pPr indent="0" marL="0">
-              <a:lnSpc>
-                <a:spcPct val="125000"/>
-              </a:lnSpc>
-              <a:buNone/>
-            </a:pPr>
-            <a:r>
-              <a:rPr lang="en-US" sz="1150" dirty="0">
-                <a:solidFill>
-                  <a:srgbClr val="222222"/>
-                </a:solidFill>
-                <a:latin typeface="Calibri" pitchFamily="34" charset="0"/>
-                <a:ea typeface="Calibri" pitchFamily="34" charset="-122"/>
-                <a:cs typeface="Calibri" pitchFamily="34" charset="-120"/>
-              </a:rPr>
-              <a:t>を選ぶ（最初の1回だけ）</a:t>
-            </a:r>
-            <a:endParaRPr lang="en-US" sz="1150" dirty="0"/>
-          </a:p>
-        </p:txBody>
-      </p:sp>
-      <p:sp>
-        <p:nvSpPr>
-          <p:cNvPr id="12" name="Shape 10"/>
-          <p:cNvSpPr/>
-          <p:nvPr/>
-        </p:nvSpPr>
-        <p:spPr>
-          <a:xfrm>
-            <a:off x="566928" y="3148711"/>
-            <a:ext cx="274320" cy="274320"/>
-          </a:xfrm>
-          <a:prstGeom prst="ellipse">
-            <a:avLst/>
-          </a:prstGeom>
-          <a:solidFill>
-            <a:srgbClr val="B85042"/>
-          </a:solidFill>
-          <a:ln/>
-        </p:spPr>
-      </p:sp>
-      <p:sp>
-        <p:nvSpPr>
-          <p:cNvPr id="13" name="Text 11"/>
-          <p:cNvSpPr txBox="1"/>
-          <p:nvPr/>
-        </p:nvSpPr>
-        <p:spPr>
-          <a:xfrm>
-            <a:off x="566928" y="3148711"/>
-            <a:ext cx="274320" cy="274320"/>
-          </a:xfrm>
-          <a:prstGeom prst="rect">
-            <a:avLst/>
-          </a:prstGeom>
-          <a:noFill/>
-          <a:ln/>
-        </p:spPr>
-        <p:txBody>
-          <a:bodyPr wrap="square" lIns="0" tIns="0" rIns="0" bIns="0" rtlCol="0" anchor="ctr"/>
-          <a:lstStyle/>
-          <a:p>
-            <a:pPr algn="ctr" indent="0" marL="0">
-              <a:buNone/>
-            </a:pPr>
-            <a:r>
-              <a:rPr lang="en-US" sz="1100" b="1" dirty="0">
-                <a:solidFill>
-                  <a:srgbClr val="FFFFFF"/>
-                </a:solidFill>
-                <a:latin typeface="Calibri" pitchFamily="34" charset="0"/>
-                <a:ea typeface="Calibri" pitchFamily="34" charset="-122"/>
-                <a:cs typeface="Calibri" pitchFamily="34" charset="-120"/>
-              </a:rPr>
-              <a:t>3</a:t>
-            </a:r>
-            <a:endParaRPr lang="en-US" sz="1100" dirty="0"/>
-          </a:p>
-        </p:txBody>
-      </p:sp>
-      <p:sp>
-        <p:nvSpPr>
-          <p:cNvPr id="14" name="Text 12"/>
-          <p:cNvSpPr txBox="1"/>
-          <p:nvPr/>
-        </p:nvSpPr>
-        <p:spPr>
-          <a:xfrm>
-            <a:off x="969264" y="3130423"/>
-            <a:ext cx="6025896" cy="365760"/>
-          </a:xfrm>
-          <a:prstGeom prst="rect">
-            <a:avLst/>
-          </a:prstGeom>
-          <a:noFill/>
-          <a:ln/>
-        </p:spPr>
-        <p:txBody>
-          <a:bodyPr wrap="square" lIns="0" tIns="0" rIns="0" bIns="0" rtlCol="0" anchor="t"/>
-          <a:lstStyle/>
-          <a:p>
-            <a:pPr indent="0" marL="0">
-              <a:lnSpc>
-                <a:spcPct val="125000"/>
-              </a:lnSpc>
-              <a:buNone/>
-            </a:pPr>
-            <a:r>
-              <a:rPr lang="en-US" sz="1150" dirty="0">
-                <a:solidFill>
-                  <a:srgbClr val="222222"/>
-                </a:solidFill>
-                <a:latin typeface="Calibri" pitchFamily="34" charset="0"/>
-                <a:ea typeface="Calibri" pitchFamily="34" charset="-122"/>
-                <a:cs typeface="Calibri" pitchFamily="34" charset="-120"/>
-              </a:rPr>
-              <a:t>画面の枠に、来場者のQRコードを入れる</a:t>
-            </a:r>
-            <a:endParaRPr lang="en-US" sz="1150" dirty="0"/>
-          </a:p>
-        </p:txBody>
-      </p:sp>
-      <p:sp>
-        <p:nvSpPr>
-          <p:cNvPr id="15" name="Shape 13"/>
-          <p:cNvSpPr/>
-          <p:nvPr/>
-        </p:nvSpPr>
-        <p:spPr>
-          <a:xfrm>
-            <a:off x="566928" y="3605911"/>
-            <a:ext cx="274320" cy="274320"/>
-          </a:xfrm>
-          <a:prstGeom prst="ellipse">
-            <a:avLst/>
-          </a:prstGeom>
-          <a:solidFill>
-            <a:srgbClr val="B85042"/>
-          </a:solidFill>
-          <a:ln/>
-        </p:spPr>
-      </p:sp>
-      <p:sp>
-        <p:nvSpPr>
-          <p:cNvPr id="16" name="Text 14"/>
-          <p:cNvSpPr txBox="1"/>
-          <p:nvPr/>
-        </p:nvSpPr>
-        <p:spPr>
-          <a:xfrm>
-            <a:off x="566928" y="3605911"/>
-            <a:ext cx="274320" cy="274320"/>
-          </a:xfrm>
-          <a:prstGeom prst="rect">
-            <a:avLst/>
-          </a:prstGeom>
-          <a:noFill/>
-          <a:ln/>
-        </p:spPr>
-        <p:txBody>
-          <a:bodyPr wrap="square" lIns="0" tIns="0" rIns="0" bIns="0" rtlCol="0" anchor="ctr"/>
-          <a:lstStyle/>
-          <a:p>
-            <a:pPr algn="ctr" indent="0" marL="0">
-              <a:buNone/>
-            </a:pPr>
-            <a:r>
-              <a:rPr lang="en-US" sz="1100" b="1" dirty="0">
-                <a:solidFill>
-                  <a:srgbClr val="FFFFFF"/>
-                </a:solidFill>
-                <a:latin typeface="Calibri" pitchFamily="34" charset="0"/>
-                <a:ea typeface="Calibri" pitchFamily="34" charset="-122"/>
-                <a:cs typeface="Calibri" pitchFamily="34" charset="-120"/>
-              </a:rPr>
-              <a:t>4</a:t>
-            </a:r>
-            <a:endParaRPr lang="en-US" sz="1100" dirty="0"/>
-          </a:p>
-        </p:txBody>
-      </p:sp>
-      <p:sp>
-        <p:nvSpPr>
-          <p:cNvPr id="17" name="Text 15"/>
-          <p:cNvSpPr txBox="1"/>
-          <p:nvPr/>
-        </p:nvSpPr>
-        <p:spPr>
-          <a:xfrm>
-            <a:off x="969264" y="3587623"/>
-            <a:ext cx="6025896" cy="365760"/>
-          </a:xfrm>
-          <a:prstGeom prst="rect">
-            <a:avLst/>
-          </a:prstGeom>
-          <a:noFill/>
-          <a:ln/>
-        </p:spPr>
-        <p:txBody>
-          <a:bodyPr wrap="square" lIns="0" tIns="0" rIns="0" bIns="0" rtlCol="0" anchor="t"/>
-          <a:lstStyle/>
-          <a:p>
-            <a:pPr indent="0" marL="0">
-              <a:lnSpc>
-                <a:spcPct val="125000"/>
-              </a:lnSpc>
-              <a:buNone/>
-            </a:pPr>
-            <a:r>
-              <a:rPr lang="en-US" sz="1150" dirty="0">
-                <a:solidFill>
-                  <a:srgbClr val="222222"/>
-                </a:solidFill>
-                <a:latin typeface="Calibri" pitchFamily="34" charset="0"/>
-                <a:ea typeface="Calibri" pitchFamily="34" charset="-122"/>
-                <a:cs typeface="Calibri" pitchFamily="34" charset="-120"/>
-              </a:rPr>
-              <a:t>読み取れると、自動で照会結果に切り替わる</a:t>
-            </a:r>
-            <a:endParaRPr lang="en-US" sz="1150" dirty="0"/>
-          </a:p>
-        </p:txBody>
-      </p:sp>
-      <p:sp>
-        <p:nvSpPr>
-          <p:cNvPr id="18" name="Shape 16"/>
-          <p:cNvSpPr/>
-          <p:nvPr/>
-        </p:nvSpPr>
-        <p:spPr>
-          <a:xfrm>
-            <a:off x="566928" y="4044823"/>
-            <a:ext cx="6428232" cy="431102"/>
-          </a:xfrm>
-          <a:prstGeom prst="roundRect">
-            <a:avLst>
-              <a:gd name="adj" fmla="val 12726"/>
-            </a:avLst>
-          </a:prstGeom>
-          <a:solidFill>
-            <a:srgbClr val="FAEAE7"/>
-          </a:solidFill>
-          <a:ln w="9525">
-            <a:solidFill>
-              <a:srgbClr val="B85042"/>
-            </a:solidFill>
-            <a:prstDash val="solid"/>
-          </a:ln>
-        </p:spPr>
-      </p:sp>
-      <p:sp>
-        <p:nvSpPr>
-          <p:cNvPr id="19" name="Text 17"/>
-          <p:cNvSpPr txBox="1"/>
-          <p:nvPr/>
-        </p:nvSpPr>
-        <p:spPr>
-          <a:xfrm>
-            <a:off x="658368" y="4136263"/>
-            <a:ext cx="237744" cy="237744"/>
-          </a:xfrm>
-          <a:prstGeom prst="rect">
-            <a:avLst/>
-          </a:prstGeom>
-          <a:noFill/>
-          <a:ln/>
-        </p:spPr>
-        <p:txBody>
-          <a:bodyPr wrap="square" lIns="0" tIns="0" rIns="0" bIns="0" rtlCol="0" anchor="ctr"/>
-          <a:lstStyle/>
-          <a:p>
-            <a:pPr algn="ctr" indent="0" marL="0">
-              <a:buNone/>
-            </a:pPr>
-            <a:r>
-              <a:rPr lang="en-US" sz="1200" b="1" dirty="0">
-                <a:solidFill>
-                  <a:srgbClr val="B85042"/>
-                </a:solidFill>
-                <a:latin typeface="Calibri" pitchFamily="34" charset="0"/>
-                <a:ea typeface="Calibri" pitchFamily="34" charset="-122"/>
-                <a:cs typeface="Calibri" pitchFamily="34" charset="-120"/>
-              </a:rPr>
-              <a:t>i</a:t>
-            </a:r>
-            <a:endParaRPr lang="en-US" sz="1200" dirty="0"/>
-          </a:p>
-        </p:txBody>
-      </p:sp>
-      <p:sp>
-        <p:nvSpPr>
-          <p:cNvPr id="20" name="Text 18"/>
-          <p:cNvSpPr txBox="1"/>
-          <p:nvPr/>
-        </p:nvSpPr>
-        <p:spPr>
-          <a:xfrm>
-            <a:off x="950976" y="4154551"/>
-            <a:ext cx="5925312" cy="248221"/>
-          </a:xfrm>
-          <a:prstGeom prst="rect">
-            <a:avLst/>
-          </a:prstGeom>
-          <a:noFill/>
-          <a:ln/>
-        </p:spPr>
-        <p:txBody>
-          <a:bodyPr wrap="square" lIns="0" tIns="0" rIns="0" bIns="0" rtlCol="0" anchor="t"/>
-          <a:lstStyle/>
-          <a:p>
-            <a:pPr indent="0" marL="0">
-              <a:lnSpc>
-                <a:spcPct val="120000"/>
-              </a:lnSpc>
-              <a:buNone/>
-            </a:pPr>
-            <a:r>
-              <a:rPr lang="en-US" sz="1050" dirty="0">
-                <a:solidFill>
-                  <a:srgbClr val="222222"/>
-                </a:solidFill>
-                <a:latin typeface="Calibri" pitchFamily="34" charset="0"/>
-                <a:ea typeface="Calibri" pitchFamily="34" charset="-122"/>
-                <a:cs typeface="Calibri" pitchFamily="34" charset="-120"/>
-              </a:rPr>
-              <a:t>続けて何人も対応するときは、この方法が速いです。アプリを切り替える必要がありません。</a:t>
-            </a:r>
-            <a:endParaRPr lang="en-US" sz="1050" dirty="0"/>
-          </a:p>
-        </p:txBody>
-      </p:sp>
-      <p:sp>
-        <p:nvSpPr>
-          <p:cNvPr id="21" name="Text 19"/>
-          <p:cNvSpPr txBox="1"/>
-          <p:nvPr/>
-        </p:nvSpPr>
-        <p:spPr>
-          <a:xfrm>
-            <a:off x="566928" y="4658805"/>
-            <a:ext cx="6428232" cy="257810"/>
-          </a:xfrm>
-          <a:prstGeom prst="rect">
-            <a:avLst/>
-          </a:prstGeom>
-          <a:noFill/>
-          <a:ln/>
-        </p:spPr>
-        <p:txBody>
-          <a:bodyPr wrap="square" lIns="0" tIns="0" rIns="0" bIns="0" rtlCol="0" anchor="t"/>
-          <a:lstStyle/>
-          <a:p>
-            <a:pPr indent="0" marL="0">
-              <a:buNone/>
-            </a:pPr>
-            <a:r>
-              <a:rPr lang="en-US" sz="1400" b="1" dirty="0">
-                <a:solidFill>
-                  <a:srgbClr val="B85042"/>
-                </a:solidFill>
-                <a:latin typeface="Calibri" pitchFamily="34" charset="0"/>
-                <a:ea typeface="Calibri" pitchFamily="34" charset="-122"/>
-                <a:cs typeface="Calibri" pitchFamily="34" charset="-120"/>
-              </a:rPr>
-              <a:t>方法B：スマートフォンの標準カメラで読み取る</a:t>
-            </a:r>
-            <a:endParaRPr lang="en-US" sz="1400" dirty="0"/>
-          </a:p>
-        </p:txBody>
-      </p:sp>
-      <p:sp>
-        <p:nvSpPr>
-          <p:cNvPr id="22" name="Shape 20"/>
-          <p:cNvSpPr/>
-          <p:nvPr/>
-        </p:nvSpPr>
-        <p:spPr>
-          <a:xfrm>
-            <a:off x="566928" y="5008055"/>
-            <a:ext cx="274320" cy="274320"/>
-          </a:xfrm>
-          <a:prstGeom prst="ellipse">
-            <a:avLst/>
-          </a:prstGeom>
-          <a:solidFill>
-            <a:srgbClr val="B85042"/>
-          </a:solidFill>
-          <a:ln/>
-        </p:spPr>
-      </p:sp>
-      <p:sp>
-        <p:nvSpPr>
-          <p:cNvPr id="23" name="Text 21"/>
-          <p:cNvSpPr txBox="1"/>
-          <p:nvPr/>
-        </p:nvSpPr>
-        <p:spPr>
-          <a:xfrm>
-            <a:off x="566928" y="5008055"/>
-            <a:ext cx="274320" cy="274320"/>
-          </a:xfrm>
-          <a:prstGeom prst="rect">
-            <a:avLst/>
-          </a:prstGeom>
-          <a:noFill/>
-          <a:ln/>
-        </p:spPr>
-        <p:txBody>
-          <a:bodyPr wrap="square" lIns="0" tIns="0" rIns="0" bIns="0" rtlCol="0" anchor="ctr"/>
-          <a:lstStyle/>
-          <a:p>
-            <a:pPr algn="ctr" indent="0" marL="0">
-              <a:buNone/>
-            </a:pPr>
-            <a:r>
-              <a:rPr lang="en-US" sz="1100" b="1" dirty="0">
-                <a:solidFill>
-                  <a:srgbClr val="FFFFFF"/>
-                </a:solidFill>
-                <a:latin typeface="Calibri" pitchFamily="34" charset="0"/>
-                <a:ea typeface="Calibri" pitchFamily="34" charset="-122"/>
-                <a:cs typeface="Calibri" pitchFamily="34" charset="-120"/>
-              </a:rPr>
-              <a:t>1</a:t>
-            </a:r>
-            <a:endParaRPr lang="en-US" sz="1100" dirty="0"/>
-          </a:p>
-        </p:txBody>
-      </p:sp>
-      <p:sp>
-        <p:nvSpPr>
-          <p:cNvPr id="24" name="Text 22"/>
-          <p:cNvSpPr txBox="1"/>
-          <p:nvPr/>
-        </p:nvSpPr>
-        <p:spPr>
-          <a:xfrm>
-            <a:off x="969264" y="4989767"/>
-            <a:ext cx="6025896" cy="365760"/>
-          </a:xfrm>
-          <a:prstGeom prst="rect">
-            <a:avLst/>
-          </a:prstGeom>
-          <a:noFill/>
-          <a:ln/>
-        </p:spPr>
-        <p:txBody>
-          <a:bodyPr wrap="square" lIns="0" tIns="0" rIns="0" bIns="0" rtlCol="0" anchor="t"/>
-          <a:lstStyle/>
-          <a:p>
-            <a:pPr indent="0" marL="0">
-              <a:lnSpc>
-                <a:spcPct val="125000"/>
-              </a:lnSpc>
-              <a:buNone/>
-            </a:pPr>
-            <a:r>
-              <a:rPr lang="en-US" sz="1150" dirty="0">
-                <a:solidFill>
-                  <a:srgbClr val="222222"/>
-                </a:solidFill>
-                <a:latin typeface="Calibri" pitchFamily="34" charset="0"/>
-                <a:ea typeface="Calibri" pitchFamily="34" charset="-122"/>
-                <a:cs typeface="Calibri" pitchFamily="34" charset="-120"/>
-              </a:rPr>
-              <a:t>カメラアプリを開いて、来場者のQRコードに向ける</a:t>
-            </a:r>
-            <a:endParaRPr lang="en-US" sz="1150" dirty="0"/>
-          </a:p>
-        </p:txBody>
-      </p:sp>
-      <p:sp>
-        <p:nvSpPr>
-          <p:cNvPr id="25" name="Shape 23"/>
-          <p:cNvSpPr/>
-          <p:nvPr/>
-        </p:nvSpPr>
-        <p:spPr>
-          <a:xfrm>
-            <a:off x="566928" y="5465255"/>
-            <a:ext cx="274320" cy="274320"/>
-          </a:xfrm>
-          <a:prstGeom prst="ellipse">
-            <a:avLst/>
-          </a:prstGeom>
-          <a:solidFill>
-            <a:srgbClr val="B85042"/>
-          </a:solidFill>
-          <a:ln/>
-        </p:spPr>
-      </p:sp>
-      <p:sp>
-        <p:nvSpPr>
-          <p:cNvPr id="26" name="Text 24"/>
-          <p:cNvSpPr txBox="1"/>
-          <p:nvPr/>
-        </p:nvSpPr>
-        <p:spPr>
-          <a:xfrm>
-            <a:off x="566928" y="5465255"/>
-            <a:ext cx="274320" cy="274320"/>
-          </a:xfrm>
-          <a:prstGeom prst="rect">
-            <a:avLst/>
-          </a:prstGeom>
-          <a:noFill/>
-          <a:ln/>
-        </p:spPr>
-        <p:txBody>
-          <a:bodyPr wrap="square" lIns="0" tIns="0" rIns="0" bIns="0" rtlCol="0" anchor="ctr"/>
-          <a:lstStyle/>
-          <a:p>
-            <a:pPr algn="ctr" indent="0" marL="0">
-              <a:buNone/>
-            </a:pPr>
-            <a:r>
-              <a:rPr lang="en-US" sz="1100" b="1" dirty="0">
-                <a:solidFill>
-                  <a:srgbClr val="FFFFFF"/>
-                </a:solidFill>
-                <a:latin typeface="Calibri" pitchFamily="34" charset="0"/>
-                <a:ea typeface="Calibri" pitchFamily="34" charset="-122"/>
-                <a:cs typeface="Calibri" pitchFamily="34" charset="-120"/>
-              </a:rPr>
-              <a:t>2</a:t>
-            </a:r>
-            <a:endParaRPr lang="en-US" sz="1100" dirty="0"/>
-          </a:p>
-        </p:txBody>
-      </p:sp>
-      <p:sp>
-        <p:nvSpPr>
-          <p:cNvPr id="27" name="Text 25"/>
-          <p:cNvSpPr txBox="1"/>
-          <p:nvPr/>
-        </p:nvSpPr>
-        <p:spPr>
-          <a:xfrm>
-            <a:off x="969264" y="5446967"/>
-            <a:ext cx="6025896" cy="365760"/>
-          </a:xfrm>
-          <a:prstGeom prst="rect">
-            <a:avLst/>
-          </a:prstGeom>
-          <a:noFill/>
-          <a:ln/>
-        </p:spPr>
-        <p:txBody>
-          <a:bodyPr wrap="square" lIns="0" tIns="0" rIns="0" bIns="0" rtlCol="0" anchor="t"/>
-          <a:lstStyle/>
-          <a:p>
-            <a:pPr indent="0" marL="0">
-              <a:lnSpc>
-                <a:spcPct val="125000"/>
-              </a:lnSpc>
-              <a:buNone/>
-            </a:pPr>
-            <a:r>
-              <a:rPr lang="en-US" sz="1150" dirty="0">
-                <a:solidFill>
-                  <a:srgbClr val="222222"/>
-                </a:solidFill>
-                <a:latin typeface="Calibri" pitchFamily="34" charset="0"/>
-                <a:ea typeface="Calibri" pitchFamily="34" charset="-122"/>
-                <a:cs typeface="Calibri" pitchFamily="34" charset="-120"/>
-              </a:rPr>
-              <a:t>画面に出たリンクを押す</a:t>
-            </a:r>
-            <a:endParaRPr lang="en-US" sz="1150" dirty="0"/>
-          </a:p>
-        </p:txBody>
-      </p:sp>
-      <p:sp>
-        <p:nvSpPr>
-          <p:cNvPr id="28" name="Shape 26"/>
-          <p:cNvSpPr/>
-          <p:nvPr/>
-        </p:nvSpPr>
-        <p:spPr>
-          <a:xfrm>
-            <a:off x="566928" y="5922455"/>
-            <a:ext cx="274320" cy="274320"/>
-          </a:xfrm>
-          <a:prstGeom prst="ellipse">
-            <a:avLst/>
-          </a:prstGeom>
-          <a:solidFill>
-            <a:srgbClr val="B85042"/>
-          </a:solidFill>
-          <a:ln/>
-        </p:spPr>
-      </p:sp>
-      <p:sp>
-        <p:nvSpPr>
-          <p:cNvPr id="29" name="Text 27"/>
-          <p:cNvSpPr txBox="1"/>
-          <p:nvPr/>
-        </p:nvSpPr>
-        <p:spPr>
-          <a:xfrm>
-            <a:off x="566928" y="5922455"/>
-            <a:ext cx="274320" cy="274320"/>
-          </a:xfrm>
-          <a:prstGeom prst="rect">
-            <a:avLst/>
-          </a:prstGeom>
-          <a:noFill/>
-          <a:ln/>
-        </p:spPr>
-        <p:txBody>
-          <a:bodyPr wrap="square" lIns="0" tIns="0" rIns="0" bIns="0" rtlCol="0" anchor="ctr"/>
-          <a:lstStyle/>
-          <a:p>
-            <a:pPr algn="ctr" indent="0" marL="0">
-              <a:buNone/>
-            </a:pPr>
-            <a:r>
-              <a:rPr lang="en-US" sz="1100" b="1" dirty="0">
-                <a:solidFill>
-                  <a:srgbClr val="FFFFFF"/>
-                </a:solidFill>
-                <a:latin typeface="Calibri" pitchFamily="34" charset="0"/>
-                <a:ea typeface="Calibri" pitchFamily="34" charset="-122"/>
-                <a:cs typeface="Calibri" pitchFamily="34" charset="-120"/>
-              </a:rPr>
-              <a:t>3</a:t>
-            </a:r>
-            <a:endParaRPr lang="en-US" sz="1100" dirty="0"/>
-          </a:p>
-        </p:txBody>
-      </p:sp>
-      <p:sp>
-        <p:nvSpPr>
-          <p:cNvPr id="30" name="Text 28"/>
-          <p:cNvSpPr txBox="1"/>
-          <p:nvPr/>
-        </p:nvSpPr>
-        <p:spPr>
-          <a:xfrm>
-            <a:off x="969264" y="5904167"/>
-            <a:ext cx="6025896" cy="365760"/>
-          </a:xfrm>
-          <a:prstGeom prst="rect">
-            <a:avLst/>
-          </a:prstGeom>
-          <a:noFill/>
-          <a:ln/>
-        </p:spPr>
-        <p:txBody>
-          <a:bodyPr wrap="square" lIns="0" tIns="0" rIns="0" bIns="0" rtlCol="0" anchor="t"/>
-          <a:lstStyle/>
-          <a:p>
-            <a:pPr indent="0" marL="0">
-              <a:lnSpc>
-                <a:spcPct val="125000"/>
-              </a:lnSpc>
-              <a:buNone/>
-            </a:pPr>
-            <a:r>
-              <a:rPr lang="en-US" sz="1150" dirty="0">
-                <a:solidFill>
-                  <a:srgbClr val="222222"/>
-                </a:solidFill>
-                <a:latin typeface="Calibri" pitchFamily="34" charset="0"/>
-                <a:ea typeface="Calibri" pitchFamily="34" charset="-122"/>
-                <a:cs typeface="Calibri" pitchFamily="34" charset="-120"/>
-              </a:rPr>
-              <a:t>照会結果の画面が開く</a:t>
-            </a:r>
-            <a:endParaRPr lang="en-US" sz="1150" dirty="0"/>
-          </a:p>
-        </p:txBody>
-      </p:sp>
-      <p:sp>
-        <p:nvSpPr>
-          <p:cNvPr id="31" name="Shape 29"/>
-          <p:cNvSpPr/>
-          <p:nvPr/>
-        </p:nvSpPr>
-        <p:spPr>
-          <a:xfrm>
-            <a:off x="566928" y="6361367"/>
-            <a:ext cx="6428232" cy="624459"/>
-          </a:xfrm>
-          <a:prstGeom prst="roundRect">
-            <a:avLst>
-              <a:gd name="adj" fmla="val 8786"/>
-            </a:avLst>
-          </a:prstGeom>
-          <a:solidFill>
-            <a:srgbClr val="FDF0E6"/>
-          </a:solidFill>
-          <a:ln w="9525">
-            <a:solidFill>
-              <a:srgbClr val="E08A3C"/>
-            </a:solidFill>
-            <a:prstDash val="solid"/>
-          </a:ln>
-        </p:spPr>
-      </p:sp>
-      <p:sp>
-        <p:nvSpPr>
-          <p:cNvPr id="32" name="Text 30"/>
-          <p:cNvSpPr txBox="1"/>
-          <p:nvPr/>
-        </p:nvSpPr>
-        <p:spPr>
-          <a:xfrm>
-            <a:off x="658368" y="6452807"/>
-            <a:ext cx="237744" cy="237744"/>
-          </a:xfrm>
-          <a:prstGeom prst="rect">
-            <a:avLst/>
-          </a:prstGeom>
-          <a:noFill/>
-          <a:ln/>
-        </p:spPr>
-        <p:txBody>
-          <a:bodyPr wrap="square" lIns="0" tIns="0" rIns="0" bIns="0" rtlCol="0" anchor="ctr"/>
-          <a:lstStyle/>
-          <a:p>
-            <a:pPr algn="ctr" indent="0" marL="0">
-              <a:buNone/>
-            </a:pPr>
-            <a:r>
-              <a:rPr lang="en-US" sz="1200" b="1" dirty="0">
-                <a:solidFill>
-                  <a:srgbClr val="C25A17"/>
-                </a:solidFill>
-                <a:latin typeface="Calibri" pitchFamily="34" charset="0"/>
-                <a:ea typeface="Calibri" pitchFamily="34" charset="-122"/>
-                <a:cs typeface="Calibri" pitchFamily="34" charset="-120"/>
-              </a:rPr>
-              <a:t>！</a:t>
-            </a:r>
-            <a:endParaRPr lang="en-US" sz="1200" dirty="0"/>
-          </a:p>
-        </p:txBody>
-      </p:sp>
-      <p:sp>
-        <p:nvSpPr>
-          <p:cNvPr id="33" name="Text 31"/>
-          <p:cNvSpPr txBox="1"/>
-          <p:nvPr/>
-        </p:nvSpPr>
-        <p:spPr>
-          <a:xfrm>
-            <a:off x="950976" y="6471095"/>
-            <a:ext cx="5925312" cy="441579"/>
-          </a:xfrm>
-          <a:prstGeom prst="rect">
-            <a:avLst/>
-          </a:prstGeom>
-          <a:noFill/>
-          <a:ln/>
-        </p:spPr>
-        <p:txBody>
-          <a:bodyPr wrap="square" lIns="0" tIns="0" rIns="0" bIns="0" rtlCol="0" anchor="t"/>
-          <a:lstStyle/>
-          <a:p>
-            <a:pPr indent="0" marL="0">
-              <a:lnSpc>
-                <a:spcPct val="120000"/>
-              </a:lnSpc>
-              <a:buNone/>
-            </a:pPr>
-            <a:r>
-              <a:rPr lang="en-US" sz="1050" dirty="0">
-                <a:solidFill>
-                  <a:srgbClr val="222222"/>
-                </a:solidFill>
-                <a:latin typeface="Calibri" pitchFamily="34" charset="0"/>
-                <a:ea typeface="Calibri" pitchFamily="34" charset="-122"/>
-                <a:cs typeface="Calibri" pitchFamily="34" charset="-120"/>
-              </a:rPr>
-              <a:t>「ログインが必要です」と表示されたときは、そのスマートフォンがログアウトしています。画面のリンクからログインし直してください。</a:t>
-            </a:r>
-            <a:endParaRPr lang="en-US" sz="1050" dirty="0"/>
-          </a:p>
-        </p:txBody>
-      </p:sp>
-      <p:sp>
-        <p:nvSpPr>
-          <p:cNvPr id="34" name="Text 32"/>
+              <a:rPr lang="en-US" sz="950" dirty="0">
+                <a:solidFill>
+                  <a:srgbClr val="6B6B6B"/>
+                </a:solidFill>
+                <a:latin typeface="Calibri" pitchFamily="34" charset="0"/>
+                <a:ea typeface="Calibri" pitchFamily="34" charset="-122"/>
+                <a:cs typeface="Calibri" pitchFamily="34" charset="-120"/>
+              </a:rPr>
+              <a:t>来場者の「回答済み画面」。大きな交換コードとQRコードが写っているもの。</a:t>
+            </a:r>
+            <a:endParaRPr lang="en-US" sz="950" dirty="0"/>
+          </a:p>
+        </p:txBody>
+      </p:sp>
+      <p:sp>
+        <p:nvSpPr>
+          <p:cNvPr id="6" name="Text 3"/>
           <p:cNvSpPr txBox="1"/>
           <p:nvPr/>
         </p:nvSpPr>
@@ -8212,46 +8753,123 @@
                 <a:ea typeface="Calibri" pitchFamily="34" charset="-122"/>
                 <a:cs typeface="Calibri" pitchFamily="34" charset="-120"/>
               </a:rPr>
-              <a:t>手順1：QRコードを読み取る（つづき）</a:t>
+              <a:t>手順1：QRコードを読み取る（スマートフォンの場合）</a:t>
             </a:r>
             <a:endParaRPr lang="en-US" sz="2200" dirty="0"/>
           </a:p>
         </p:txBody>
       </p:sp>
-      <p:pic>
-        <p:nvPicPr>
-          <p:cNvPr id="4" name="Image 0" descr="C:\Users\sato\Desktop\enque\docs\images\p-scan-button.png">    </p:cNvPr>
-          <p:cNvPicPr>
-            <a:picLocks noChangeAspect="1"/>
-          </p:cNvPicPr>
-          <p:nvPr/>
-        </p:nvPicPr>
-        <p:blipFill>
-          <a:blip r:embed="rId1"/>
-          <a:stretch>
-            <a:fillRect/>
-          </a:stretch>
-        </p:blipFill>
+      <p:sp>
+        <p:nvSpPr>
+          <p:cNvPr id="4" name="Text 2"/>
+          <p:cNvSpPr txBox="1"/>
+          <p:nvPr/>
+        </p:nvSpPr>
         <p:spPr>
           <a:xfrm>
             <a:off x="566928" y="1481328"/>
-            <a:ext cx="6428232" cy="3465755"/>
-          </a:xfrm>
-          <a:prstGeom prst="rect">
-            <a:avLst/>
-          </a:prstGeom>
-        </p:spPr>
-      </p:pic>
-      <p:sp>
-        <p:nvSpPr>
-          <p:cNvPr id="5" name="Text 2"/>
-          <p:cNvSpPr txBox="1"/>
-          <p:nvPr/>
-        </p:nvSpPr>
-        <p:spPr>
-          <a:xfrm>
-            <a:off x="566928" y="5001947"/>
-            <a:ext cx="6428232" cy="274320"/>
+            <a:ext cx="6428232" cy="257429"/>
+          </a:xfrm>
+          <a:prstGeom prst="rect">
+            <a:avLst/>
+          </a:prstGeom>
+          <a:noFill/>
+          <a:ln/>
+        </p:spPr>
+        <p:txBody>
+          <a:bodyPr wrap="square" lIns="0" tIns="0" rIns="0" bIns="0" rtlCol="0" anchor="t"/>
+          <a:lstStyle/>
+          <a:p>
+            <a:pPr indent="0" marL="0">
+              <a:lnSpc>
+                <a:spcPct val="125000"/>
+              </a:lnSpc>
+              <a:buNone/>
+            </a:pPr>
+            <a:r>
+              <a:rPr lang="en-US" sz="1100" dirty="0">
+                <a:solidFill>
+                  <a:srgbClr val="222222"/>
+                </a:solidFill>
+                <a:latin typeface="Calibri" pitchFamily="34" charset="0"/>
+                <a:ea typeface="Calibri" pitchFamily="34" charset="-122"/>
+                <a:cs typeface="Calibri" pitchFamily="34" charset="-120"/>
+              </a:rPr>
+              <a:t>読み取り方は2通りあります。どちらでも同じ画面が開きます。</a:t>
+            </a:r>
+            <a:endParaRPr lang="en-US" sz="1100" dirty="0"/>
+          </a:p>
+        </p:txBody>
+      </p:sp>
+      <p:sp>
+        <p:nvSpPr>
+          <p:cNvPr id="5" name="Text 3"/>
+          <p:cNvSpPr txBox="1"/>
+          <p:nvPr/>
+        </p:nvSpPr>
+        <p:spPr>
+          <a:xfrm>
+            <a:off x="566928" y="1885061"/>
+            <a:ext cx="6428232" cy="257810"/>
+          </a:xfrm>
+          <a:prstGeom prst="rect">
+            <a:avLst/>
+          </a:prstGeom>
+          <a:noFill/>
+          <a:ln/>
+        </p:spPr>
+        <p:txBody>
+          <a:bodyPr wrap="square" lIns="0" tIns="0" rIns="0" bIns="0" rtlCol="0" anchor="t"/>
+          <a:lstStyle/>
+          <a:p>
+            <a:pPr indent="0" marL="0">
+              <a:buNone/>
+            </a:pPr>
+            <a:r>
+              <a:rPr lang="en-US" sz="1400" b="1" dirty="0">
+                <a:solidFill>
+                  <a:srgbClr val="B85042"/>
+                </a:solidFill>
+                <a:latin typeface="Calibri" pitchFamily="34" charset="0"/>
+                <a:ea typeface="Calibri" pitchFamily="34" charset="-122"/>
+                <a:cs typeface="Calibri" pitchFamily="34" charset="-120"/>
+              </a:rPr>
+              <a:t>方法A：照会画面のボタンから読み取る（おすすめ）</a:t>
+            </a:r>
+            <a:endParaRPr lang="en-US" sz="1400" dirty="0"/>
+          </a:p>
+        </p:txBody>
+      </p:sp>
+      <p:sp>
+        <p:nvSpPr>
+          <p:cNvPr id="6" name="Shape 4"/>
+          <p:cNvSpPr/>
+          <p:nvPr/>
+        </p:nvSpPr>
+        <p:spPr>
+          <a:xfrm>
+            <a:off x="566928" y="2234311"/>
+            <a:ext cx="274320" cy="274320"/>
+          </a:xfrm>
+          <a:prstGeom prst="ellipse">
+            <a:avLst/>
+          </a:prstGeom>
+          <a:solidFill>
+            <a:srgbClr val="B85042"/>
+          </a:solidFill>
+          <a:ln/>
+        </p:spPr>
+      </p:sp>
+      <p:sp>
+        <p:nvSpPr>
+          <p:cNvPr id="7" name="Text 5"/>
+          <p:cNvSpPr txBox="1"/>
+          <p:nvPr/>
+        </p:nvSpPr>
+        <p:spPr>
+          <a:xfrm>
+            <a:off x="566928" y="2234311"/>
+            <a:ext cx="274320" cy="274320"/>
           </a:xfrm>
           <a:prstGeom prst="rect">
             <a:avLst/>
@@ -8267,23 +8885,994 @@
               <a:buNone/>
             </a:pPr>
             <a:r>
-              <a:rPr lang="en-US" sz="950" dirty="0">
-                <a:solidFill>
-                  <a:srgbClr val="6B6B6B"/>
-                </a:solidFill>
-                <a:latin typeface="Calibri" pitchFamily="34" charset="0"/>
-                <a:ea typeface="Calibri" pitchFamily="34" charset="-122"/>
-                <a:cs typeface="Calibri" pitchFamily="34" charset="-120"/>
-              </a:rPr>
-              <a:t>照会画面の上部。「QRコードを読み取る」ボタンが見えるもの。</a:t>
-            </a:r>
-            <a:endParaRPr lang="en-US" sz="950" dirty="0"/>
-          </a:p>
-        </p:txBody>
-      </p:sp>
-      <p:sp>
-        <p:nvSpPr>
-          <p:cNvPr id="6" name="Text 3"/>
+              <a:rPr lang="en-US" sz="1100" b="1" dirty="0">
+                <a:solidFill>
+                  <a:srgbClr val="FFFFFF"/>
+                </a:solidFill>
+                <a:latin typeface="Calibri" pitchFamily="34" charset="0"/>
+                <a:ea typeface="Calibri" pitchFamily="34" charset="-122"/>
+                <a:cs typeface="Calibri" pitchFamily="34" charset="-120"/>
+              </a:rPr>
+              <a:t>1</a:t>
+            </a:r>
+            <a:endParaRPr lang="en-US" sz="1100" dirty="0"/>
+          </a:p>
+        </p:txBody>
+      </p:sp>
+      <p:sp>
+        <p:nvSpPr>
+          <p:cNvPr id="8" name="Text 6"/>
+          <p:cNvSpPr txBox="1"/>
+          <p:nvPr/>
+        </p:nvSpPr>
+        <p:spPr>
+          <a:xfrm>
+            <a:off x="969264" y="2216023"/>
+            <a:ext cx="6025896" cy="365760"/>
+          </a:xfrm>
+          <a:prstGeom prst="rect">
+            <a:avLst/>
+          </a:prstGeom>
+          <a:noFill/>
+          <a:ln/>
+        </p:spPr>
+        <p:txBody>
+          <a:bodyPr wrap="square" lIns="0" tIns="0" rIns="0" bIns="0" rtlCol="0" anchor="t"/>
+          <a:lstStyle/>
+          <a:p>
+            <a:pPr indent="0" marL="0">
+              <a:lnSpc>
+                <a:spcPct val="125000"/>
+              </a:lnSpc>
+              <a:buNone/>
+            </a:pPr>
+            <a:r>
+              <a:rPr lang="en-US" sz="1150" dirty="0">
+                <a:solidFill>
+                  <a:srgbClr val="222222"/>
+                </a:solidFill>
+                <a:latin typeface="Calibri" pitchFamily="34" charset="0"/>
+                <a:ea typeface="Calibri" pitchFamily="34" charset="-122"/>
+                <a:cs typeface="Calibri" pitchFamily="34" charset="-120"/>
+              </a:rPr>
+              <a:t>「景品交換の照会」の画面で、</a:t>
+            </a:r>
+            <a:pPr indent="0" marL="0">
+              <a:lnSpc>
+                <a:spcPct val="125000"/>
+              </a:lnSpc>
+              <a:buNone/>
+            </a:pPr>
+            <a:r>
+              <a:rPr lang="en-US" sz="1150" b="1" dirty="0">
+                <a:solidFill>
+                  <a:srgbClr val="222222"/>
+                </a:solidFill>
+                <a:latin typeface="Calibri" pitchFamily="34" charset="0"/>
+                <a:ea typeface="Calibri" pitchFamily="34" charset="-122"/>
+                <a:cs typeface="Calibri" pitchFamily="34" charset="-120"/>
+              </a:rPr>
+              <a:t>「カメラでQRコードを読み取る」</a:t>
+            </a:r>
+            <a:pPr indent="0" marL="0">
+              <a:lnSpc>
+                <a:spcPct val="125000"/>
+              </a:lnSpc>
+              <a:buNone/>
+            </a:pPr>
+            <a:r>
+              <a:rPr lang="en-US" sz="1150" dirty="0">
+                <a:solidFill>
+                  <a:srgbClr val="222222"/>
+                </a:solidFill>
+                <a:latin typeface="Calibri" pitchFamily="34" charset="0"/>
+                <a:ea typeface="Calibri" pitchFamily="34" charset="-122"/>
+                <a:cs typeface="Calibri" pitchFamily="34" charset="-120"/>
+              </a:rPr>
+              <a:t>を押す</a:t>
+            </a:r>
+            <a:endParaRPr lang="en-US" sz="1150" dirty="0"/>
+          </a:p>
+        </p:txBody>
+      </p:sp>
+      <p:sp>
+        <p:nvSpPr>
+          <p:cNvPr id="9" name="Shape 7"/>
+          <p:cNvSpPr/>
+          <p:nvPr/>
+        </p:nvSpPr>
+        <p:spPr>
+          <a:xfrm>
+            <a:off x="566928" y="2691511"/>
+            <a:ext cx="274320" cy="274320"/>
+          </a:xfrm>
+          <a:prstGeom prst="ellipse">
+            <a:avLst/>
+          </a:prstGeom>
+          <a:solidFill>
+            <a:srgbClr val="B85042"/>
+          </a:solidFill>
+          <a:ln/>
+        </p:spPr>
+      </p:sp>
+      <p:sp>
+        <p:nvSpPr>
+          <p:cNvPr id="10" name="Text 8"/>
+          <p:cNvSpPr txBox="1"/>
+          <p:nvPr/>
+        </p:nvSpPr>
+        <p:spPr>
+          <a:xfrm>
+            <a:off x="566928" y="2691511"/>
+            <a:ext cx="274320" cy="274320"/>
+          </a:xfrm>
+          <a:prstGeom prst="rect">
+            <a:avLst/>
+          </a:prstGeom>
+          <a:noFill/>
+          <a:ln/>
+        </p:spPr>
+        <p:txBody>
+          <a:bodyPr wrap="square" lIns="0" tIns="0" rIns="0" bIns="0" rtlCol="0" anchor="ctr"/>
+          <a:lstStyle/>
+          <a:p>
+            <a:pPr algn="ctr" indent="0" marL="0">
+              <a:buNone/>
+            </a:pPr>
+            <a:r>
+              <a:rPr lang="en-US" sz="1100" b="1" dirty="0">
+                <a:solidFill>
+                  <a:srgbClr val="FFFFFF"/>
+                </a:solidFill>
+                <a:latin typeface="Calibri" pitchFamily="34" charset="0"/>
+                <a:ea typeface="Calibri" pitchFamily="34" charset="-122"/>
+                <a:cs typeface="Calibri" pitchFamily="34" charset="-120"/>
+              </a:rPr>
+              <a:t>2</a:t>
+            </a:r>
+            <a:endParaRPr lang="en-US" sz="1100" dirty="0"/>
+          </a:p>
+        </p:txBody>
+      </p:sp>
+      <p:sp>
+        <p:nvSpPr>
+          <p:cNvPr id="11" name="Text 9"/>
+          <p:cNvSpPr txBox="1"/>
+          <p:nvPr/>
+        </p:nvSpPr>
+        <p:spPr>
+          <a:xfrm>
+            <a:off x="969264" y="2673223"/>
+            <a:ext cx="6025896" cy="365760"/>
+          </a:xfrm>
+          <a:prstGeom prst="rect">
+            <a:avLst/>
+          </a:prstGeom>
+          <a:noFill/>
+          <a:ln/>
+        </p:spPr>
+        <p:txBody>
+          <a:bodyPr wrap="square" lIns="0" tIns="0" rIns="0" bIns="0" rtlCol="0" anchor="t"/>
+          <a:lstStyle/>
+          <a:p>
+            <a:pPr indent="0" marL="0">
+              <a:lnSpc>
+                <a:spcPct val="125000"/>
+              </a:lnSpc>
+              <a:buNone/>
+            </a:pPr>
+            <a:r>
+              <a:rPr lang="en-US" sz="1150" dirty="0">
+                <a:solidFill>
+                  <a:srgbClr val="222222"/>
+                </a:solidFill>
+                <a:latin typeface="Calibri" pitchFamily="34" charset="0"/>
+                <a:ea typeface="Calibri" pitchFamily="34" charset="-122"/>
+                <a:cs typeface="Calibri" pitchFamily="34" charset="-120"/>
+              </a:rPr>
+              <a:t>カメラの使用を聞かれたら</a:t>
+            </a:r>
+            <a:pPr indent="0" marL="0">
+              <a:lnSpc>
+                <a:spcPct val="125000"/>
+              </a:lnSpc>
+              <a:buNone/>
+            </a:pPr>
+            <a:r>
+              <a:rPr lang="en-US" sz="1150" b="1" dirty="0">
+                <a:solidFill>
+                  <a:srgbClr val="222222"/>
+                </a:solidFill>
+                <a:latin typeface="Calibri" pitchFamily="34" charset="0"/>
+                <a:ea typeface="Calibri" pitchFamily="34" charset="-122"/>
+                <a:cs typeface="Calibri" pitchFamily="34" charset="-120"/>
+              </a:rPr>
+              <a:t>「許可」</a:t>
+            </a:r>
+            <a:pPr indent="0" marL="0">
+              <a:lnSpc>
+                <a:spcPct val="125000"/>
+              </a:lnSpc>
+              <a:buNone/>
+            </a:pPr>
+            <a:r>
+              <a:rPr lang="en-US" sz="1150" dirty="0">
+                <a:solidFill>
+                  <a:srgbClr val="222222"/>
+                </a:solidFill>
+                <a:latin typeface="Calibri" pitchFamily="34" charset="0"/>
+                <a:ea typeface="Calibri" pitchFamily="34" charset="-122"/>
+                <a:cs typeface="Calibri" pitchFamily="34" charset="-120"/>
+              </a:rPr>
+              <a:t>を選ぶ（最初の1回だけ）</a:t>
+            </a:r>
+            <a:endParaRPr lang="en-US" sz="1150" dirty="0"/>
+          </a:p>
+        </p:txBody>
+      </p:sp>
+      <p:sp>
+        <p:nvSpPr>
+          <p:cNvPr id="12" name="Shape 10"/>
+          <p:cNvSpPr/>
+          <p:nvPr/>
+        </p:nvSpPr>
+        <p:spPr>
+          <a:xfrm>
+            <a:off x="566928" y="3148711"/>
+            <a:ext cx="274320" cy="274320"/>
+          </a:xfrm>
+          <a:prstGeom prst="ellipse">
+            <a:avLst/>
+          </a:prstGeom>
+          <a:solidFill>
+            <a:srgbClr val="B85042"/>
+          </a:solidFill>
+          <a:ln/>
+        </p:spPr>
+      </p:sp>
+      <p:sp>
+        <p:nvSpPr>
+          <p:cNvPr id="13" name="Text 11"/>
+          <p:cNvSpPr txBox="1"/>
+          <p:nvPr/>
+        </p:nvSpPr>
+        <p:spPr>
+          <a:xfrm>
+            <a:off x="566928" y="3148711"/>
+            <a:ext cx="274320" cy="274320"/>
+          </a:xfrm>
+          <a:prstGeom prst="rect">
+            <a:avLst/>
+          </a:prstGeom>
+          <a:noFill/>
+          <a:ln/>
+        </p:spPr>
+        <p:txBody>
+          <a:bodyPr wrap="square" lIns="0" tIns="0" rIns="0" bIns="0" rtlCol="0" anchor="ctr"/>
+          <a:lstStyle/>
+          <a:p>
+            <a:pPr algn="ctr" indent="0" marL="0">
+              <a:buNone/>
+            </a:pPr>
+            <a:r>
+              <a:rPr lang="en-US" sz="1100" b="1" dirty="0">
+                <a:solidFill>
+                  <a:srgbClr val="FFFFFF"/>
+                </a:solidFill>
+                <a:latin typeface="Calibri" pitchFamily="34" charset="0"/>
+                <a:ea typeface="Calibri" pitchFamily="34" charset="-122"/>
+                <a:cs typeface="Calibri" pitchFamily="34" charset="-120"/>
+              </a:rPr>
+              <a:t>3</a:t>
+            </a:r>
+            <a:endParaRPr lang="en-US" sz="1100" dirty="0"/>
+          </a:p>
+        </p:txBody>
+      </p:sp>
+      <p:sp>
+        <p:nvSpPr>
+          <p:cNvPr id="14" name="Text 12"/>
+          <p:cNvSpPr txBox="1"/>
+          <p:nvPr/>
+        </p:nvSpPr>
+        <p:spPr>
+          <a:xfrm>
+            <a:off x="969264" y="3130423"/>
+            <a:ext cx="6025896" cy="365760"/>
+          </a:xfrm>
+          <a:prstGeom prst="rect">
+            <a:avLst/>
+          </a:prstGeom>
+          <a:noFill/>
+          <a:ln/>
+        </p:spPr>
+        <p:txBody>
+          <a:bodyPr wrap="square" lIns="0" tIns="0" rIns="0" bIns="0" rtlCol="0" anchor="t"/>
+          <a:lstStyle/>
+          <a:p>
+            <a:pPr indent="0" marL="0">
+              <a:lnSpc>
+                <a:spcPct val="125000"/>
+              </a:lnSpc>
+              <a:buNone/>
+            </a:pPr>
+            <a:r>
+              <a:rPr lang="en-US" sz="1150" dirty="0">
+                <a:solidFill>
+                  <a:srgbClr val="222222"/>
+                </a:solidFill>
+                <a:latin typeface="Calibri" pitchFamily="34" charset="0"/>
+                <a:ea typeface="Calibri" pitchFamily="34" charset="-122"/>
+                <a:cs typeface="Calibri" pitchFamily="34" charset="-120"/>
+              </a:rPr>
+              <a:t>画面の枠に、来場者のQRコードを入れる</a:t>
+            </a:r>
+            <a:endParaRPr lang="en-US" sz="1150" dirty="0"/>
+          </a:p>
+        </p:txBody>
+      </p:sp>
+      <p:sp>
+        <p:nvSpPr>
+          <p:cNvPr id="15" name="Shape 13"/>
+          <p:cNvSpPr/>
+          <p:nvPr/>
+        </p:nvSpPr>
+        <p:spPr>
+          <a:xfrm>
+            <a:off x="566928" y="3605911"/>
+            <a:ext cx="274320" cy="274320"/>
+          </a:xfrm>
+          <a:prstGeom prst="ellipse">
+            <a:avLst/>
+          </a:prstGeom>
+          <a:solidFill>
+            <a:srgbClr val="B85042"/>
+          </a:solidFill>
+          <a:ln/>
+        </p:spPr>
+      </p:sp>
+      <p:sp>
+        <p:nvSpPr>
+          <p:cNvPr id="16" name="Text 14"/>
+          <p:cNvSpPr txBox="1"/>
+          <p:nvPr/>
+        </p:nvSpPr>
+        <p:spPr>
+          <a:xfrm>
+            <a:off x="566928" y="3605911"/>
+            <a:ext cx="274320" cy="274320"/>
+          </a:xfrm>
+          <a:prstGeom prst="rect">
+            <a:avLst/>
+          </a:prstGeom>
+          <a:noFill/>
+          <a:ln/>
+        </p:spPr>
+        <p:txBody>
+          <a:bodyPr wrap="square" lIns="0" tIns="0" rIns="0" bIns="0" rtlCol="0" anchor="ctr"/>
+          <a:lstStyle/>
+          <a:p>
+            <a:pPr algn="ctr" indent="0" marL="0">
+              <a:buNone/>
+            </a:pPr>
+            <a:r>
+              <a:rPr lang="en-US" sz="1100" b="1" dirty="0">
+                <a:solidFill>
+                  <a:srgbClr val="FFFFFF"/>
+                </a:solidFill>
+                <a:latin typeface="Calibri" pitchFamily="34" charset="0"/>
+                <a:ea typeface="Calibri" pitchFamily="34" charset="-122"/>
+                <a:cs typeface="Calibri" pitchFamily="34" charset="-120"/>
+              </a:rPr>
+              <a:t>4</a:t>
+            </a:r>
+            <a:endParaRPr lang="en-US" sz="1100" dirty="0"/>
+          </a:p>
+        </p:txBody>
+      </p:sp>
+      <p:sp>
+        <p:nvSpPr>
+          <p:cNvPr id="17" name="Text 15"/>
+          <p:cNvSpPr txBox="1"/>
+          <p:nvPr/>
+        </p:nvSpPr>
+        <p:spPr>
+          <a:xfrm>
+            <a:off x="969264" y="3587623"/>
+            <a:ext cx="6025896" cy="365760"/>
+          </a:xfrm>
+          <a:prstGeom prst="rect">
+            <a:avLst/>
+          </a:prstGeom>
+          <a:noFill/>
+          <a:ln/>
+        </p:spPr>
+        <p:txBody>
+          <a:bodyPr wrap="square" lIns="0" tIns="0" rIns="0" bIns="0" rtlCol="0" anchor="t"/>
+          <a:lstStyle/>
+          <a:p>
+            <a:pPr indent="0" marL="0">
+              <a:lnSpc>
+                <a:spcPct val="125000"/>
+              </a:lnSpc>
+              <a:buNone/>
+            </a:pPr>
+            <a:r>
+              <a:rPr lang="en-US" sz="1150" dirty="0">
+                <a:solidFill>
+                  <a:srgbClr val="222222"/>
+                </a:solidFill>
+                <a:latin typeface="Calibri" pitchFamily="34" charset="0"/>
+                <a:ea typeface="Calibri" pitchFamily="34" charset="-122"/>
+                <a:cs typeface="Calibri" pitchFamily="34" charset="-120"/>
+              </a:rPr>
+              <a:t>読み取れると、自動で照会結果に切り替わる</a:t>
+            </a:r>
+            <a:endParaRPr lang="en-US" sz="1150" dirty="0"/>
+          </a:p>
+        </p:txBody>
+      </p:sp>
+      <p:sp>
+        <p:nvSpPr>
+          <p:cNvPr id="18" name="Shape 16"/>
+          <p:cNvSpPr/>
+          <p:nvPr/>
+        </p:nvSpPr>
+        <p:spPr>
+          <a:xfrm>
+            <a:off x="566928" y="4044823"/>
+            <a:ext cx="6428232" cy="431102"/>
+          </a:xfrm>
+          <a:prstGeom prst="roundRect">
+            <a:avLst>
+              <a:gd name="adj" fmla="val 12726"/>
+            </a:avLst>
+          </a:prstGeom>
+          <a:solidFill>
+            <a:srgbClr val="FAEAE7"/>
+          </a:solidFill>
+          <a:ln w="9525">
+            <a:solidFill>
+              <a:srgbClr val="B85042"/>
+            </a:solidFill>
+            <a:prstDash val="solid"/>
+          </a:ln>
+        </p:spPr>
+      </p:sp>
+      <p:sp>
+        <p:nvSpPr>
+          <p:cNvPr id="19" name="Text 17"/>
+          <p:cNvSpPr txBox="1"/>
+          <p:nvPr/>
+        </p:nvSpPr>
+        <p:spPr>
+          <a:xfrm>
+            <a:off x="658368" y="4136263"/>
+            <a:ext cx="237744" cy="237744"/>
+          </a:xfrm>
+          <a:prstGeom prst="rect">
+            <a:avLst/>
+          </a:prstGeom>
+          <a:noFill/>
+          <a:ln/>
+        </p:spPr>
+        <p:txBody>
+          <a:bodyPr wrap="square" lIns="0" tIns="0" rIns="0" bIns="0" rtlCol="0" anchor="ctr"/>
+          <a:lstStyle/>
+          <a:p>
+            <a:pPr algn="ctr" indent="0" marL="0">
+              <a:buNone/>
+            </a:pPr>
+            <a:r>
+              <a:rPr lang="en-US" sz="1200" b="1" dirty="0">
+                <a:solidFill>
+                  <a:srgbClr val="B85042"/>
+                </a:solidFill>
+                <a:latin typeface="Calibri" pitchFamily="34" charset="0"/>
+                <a:ea typeface="Calibri" pitchFamily="34" charset="-122"/>
+                <a:cs typeface="Calibri" pitchFamily="34" charset="-120"/>
+              </a:rPr>
+              <a:t>i</a:t>
+            </a:r>
+            <a:endParaRPr lang="en-US" sz="1200" dirty="0"/>
+          </a:p>
+        </p:txBody>
+      </p:sp>
+      <p:sp>
+        <p:nvSpPr>
+          <p:cNvPr id="20" name="Text 18"/>
+          <p:cNvSpPr txBox="1"/>
+          <p:nvPr/>
+        </p:nvSpPr>
+        <p:spPr>
+          <a:xfrm>
+            <a:off x="950976" y="4154551"/>
+            <a:ext cx="5925312" cy="248221"/>
+          </a:xfrm>
+          <a:prstGeom prst="rect">
+            <a:avLst/>
+          </a:prstGeom>
+          <a:noFill/>
+          <a:ln/>
+        </p:spPr>
+        <p:txBody>
+          <a:bodyPr wrap="square" lIns="0" tIns="0" rIns="0" bIns="0" rtlCol="0" anchor="t"/>
+          <a:lstStyle/>
+          <a:p>
+            <a:pPr indent="0" marL="0">
+              <a:lnSpc>
+                <a:spcPct val="120000"/>
+              </a:lnSpc>
+              <a:buNone/>
+            </a:pPr>
+            <a:r>
+              <a:rPr lang="en-US" sz="1050" dirty="0">
+                <a:solidFill>
+                  <a:srgbClr val="222222"/>
+                </a:solidFill>
+                <a:latin typeface="Calibri" pitchFamily="34" charset="0"/>
+                <a:ea typeface="Calibri" pitchFamily="34" charset="-122"/>
+                <a:cs typeface="Calibri" pitchFamily="34" charset="-120"/>
+              </a:rPr>
+              <a:t>続けて何人も対応するときは、この方法が速いです。アプリを切り替える必要がありません。</a:t>
+            </a:r>
+            <a:endParaRPr lang="en-US" sz="1050" dirty="0"/>
+          </a:p>
+        </p:txBody>
+      </p:sp>
+      <p:sp>
+        <p:nvSpPr>
+          <p:cNvPr id="21" name="Text 19"/>
+          <p:cNvSpPr txBox="1"/>
+          <p:nvPr/>
+        </p:nvSpPr>
+        <p:spPr>
+          <a:xfrm>
+            <a:off x="566928" y="4658805"/>
+            <a:ext cx="6428232" cy="257810"/>
+          </a:xfrm>
+          <a:prstGeom prst="rect">
+            <a:avLst/>
+          </a:prstGeom>
+          <a:noFill/>
+          <a:ln/>
+        </p:spPr>
+        <p:txBody>
+          <a:bodyPr wrap="square" lIns="0" tIns="0" rIns="0" bIns="0" rtlCol="0" anchor="t"/>
+          <a:lstStyle/>
+          <a:p>
+            <a:pPr indent="0" marL="0">
+              <a:buNone/>
+            </a:pPr>
+            <a:r>
+              <a:rPr lang="en-US" sz="1400" b="1" dirty="0">
+                <a:solidFill>
+                  <a:srgbClr val="B85042"/>
+                </a:solidFill>
+                <a:latin typeface="Calibri" pitchFamily="34" charset="0"/>
+                <a:ea typeface="Calibri" pitchFamily="34" charset="-122"/>
+                <a:cs typeface="Calibri" pitchFamily="34" charset="-120"/>
+              </a:rPr>
+              <a:t>方法B：スマートフォンの標準カメラで読み取る</a:t>
+            </a:r>
+            <a:endParaRPr lang="en-US" sz="1400" dirty="0"/>
+          </a:p>
+        </p:txBody>
+      </p:sp>
+      <p:sp>
+        <p:nvSpPr>
+          <p:cNvPr id="22" name="Shape 20"/>
+          <p:cNvSpPr/>
+          <p:nvPr/>
+        </p:nvSpPr>
+        <p:spPr>
+          <a:xfrm>
+            <a:off x="566928" y="5008055"/>
+            <a:ext cx="274320" cy="274320"/>
+          </a:xfrm>
+          <a:prstGeom prst="ellipse">
+            <a:avLst/>
+          </a:prstGeom>
+          <a:solidFill>
+            <a:srgbClr val="B85042"/>
+          </a:solidFill>
+          <a:ln/>
+        </p:spPr>
+      </p:sp>
+      <p:sp>
+        <p:nvSpPr>
+          <p:cNvPr id="23" name="Text 21"/>
+          <p:cNvSpPr txBox="1"/>
+          <p:nvPr/>
+        </p:nvSpPr>
+        <p:spPr>
+          <a:xfrm>
+            <a:off x="566928" y="5008055"/>
+            <a:ext cx="274320" cy="274320"/>
+          </a:xfrm>
+          <a:prstGeom prst="rect">
+            <a:avLst/>
+          </a:prstGeom>
+          <a:noFill/>
+          <a:ln/>
+        </p:spPr>
+        <p:txBody>
+          <a:bodyPr wrap="square" lIns="0" tIns="0" rIns="0" bIns="0" rtlCol="0" anchor="ctr"/>
+          <a:lstStyle/>
+          <a:p>
+            <a:pPr algn="ctr" indent="0" marL="0">
+              <a:buNone/>
+            </a:pPr>
+            <a:r>
+              <a:rPr lang="en-US" sz="1100" b="1" dirty="0">
+                <a:solidFill>
+                  <a:srgbClr val="FFFFFF"/>
+                </a:solidFill>
+                <a:latin typeface="Calibri" pitchFamily="34" charset="0"/>
+                <a:ea typeface="Calibri" pitchFamily="34" charset="-122"/>
+                <a:cs typeface="Calibri" pitchFamily="34" charset="-120"/>
+              </a:rPr>
+              <a:t>1</a:t>
+            </a:r>
+            <a:endParaRPr lang="en-US" sz="1100" dirty="0"/>
+          </a:p>
+        </p:txBody>
+      </p:sp>
+      <p:sp>
+        <p:nvSpPr>
+          <p:cNvPr id="24" name="Text 22"/>
+          <p:cNvSpPr txBox="1"/>
+          <p:nvPr/>
+        </p:nvSpPr>
+        <p:spPr>
+          <a:xfrm>
+            <a:off x="969264" y="4989767"/>
+            <a:ext cx="6025896" cy="365760"/>
+          </a:xfrm>
+          <a:prstGeom prst="rect">
+            <a:avLst/>
+          </a:prstGeom>
+          <a:noFill/>
+          <a:ln/>
+        </p:spPr>
+        <p:txBody>
+          <a:bodyPr wrap="square" lIns="0" tIns="0" rIns="0" bIns="0" rtlCol="0" anchor="t"/>
+          <a:lstStyle/>
+          <a:p>
+            <a:pPr indent="0" marL="0">
+              <a:lnSpc>
+                <a:spcPct val="125000"/>
+              </a:lnSpc>
+              <a:buNone/>
+            </a:pPr>
+            <a:r>
+              <a:rPr lang="en-US" sz="1150" dirty="0">
+                <a:solidFill>
+                  <a:srgbClr val="222222"/>
+                </a:solidFill>
+                <a:latin typeface="Calibri" pitchFamily="34" charset="0"/>
+                <a:ea typeface="Calibri" pitchFamily="34" charset="-122"/>
+                <a:cs typeface="Calibri" pitchFamily="34" charset="-120"/>
+              </a:rPr>
+              <a:t>カメラアプリを開いて、来場者のQRコードに向ける</a:t>
+            </a:r>
+            <a:endParaRPr lang="en-US" sz="1150" dirty="0"/>
+          </a:p>
+        </p:txBody>
+      </p:sp>
+      <p:sp>
+        <p:nvSpPr>
+          <p:cNvPr id="25" name="Shape 23"/>
+          <p:cNvSpPr/>
+          <p:nvPr/>
+        </p:nvSpPr>
+        <p:spPr>
+          <a:xfrm>
+            <a:off x="566928" y="5465255"/>
+            <a:ext cx="274320" cy="274320"/>
+          </a:xfrm>
+          <a:prstGeom prst="ellipse">
+            <a:avLst/>
+          </a:prstGeom>
+          <a:solidFill>
+            <a:srgbClr val="B85042"/>
+          </a:solidFill>
+          <a:ln/>
+        </p:spPr>
+      </p:sp>
+      <p:sp>
+        <p:nvSpPr>
+          <p:cNvPr id="26" name="Text 24"/>
+          <p:cNvSpPr txBox="1"/>
+          <p:nvPr/>
+        </p:nvSpPr>
+        <p:spPr>
+          <a:xfrm>
+            <a:off x="566928" y="5465255"/>
+            <a:ext cx="274320" cy="274320"/>
+          </a:xfrm>
+          <a:prstGeom prst="rect">
+            <a:avLst/>
+          </a:prstGeom>
+          <a:noFill/>
+          <a:ln/>
+        </p:spPr>
+        <p:txBody>
+          <a:bodyPr wrap="square" lIns="0" tIns="0" rIns="0" bIns="0" rtlCol="0" anchor="ctr"/>
+          <a:lstStyle/>
+          <a:p>
+            <a:pPr algn="ctr" indent="0" marL="0">
+              <a:buNone/>
+            </a:pPr>
+            <a:r>
+              <a:rPr lang="en-US" sz="1100" b="1" dirty="0">
+                <a:solidFill>
+                  <a:srgbClr val="FFFFFF"/>
+                </a:solidFill>
+                <a:latin typeface="Calibri" pitchFamily="34" charset="0"/>
+                <a:ea typeface="Calibri" pitchFamily="34" charset="-122"/>
+                <a:cs typeface="Calibri" pitchFamily="34" charset="-120"/>
+              </a:rPr>
+              <a:t>2</a:t>
+            </a:r>
+            <a:endParaRPr lang="en-US" sz="1100" dirty="0"/>
+          </a:p>
+        </p:txBody>
+      </p:sp>
+      <p:sp>
+        <p:nvSpPr>
+          <p:cNvPr id="27" name="Text 25"/>
+          <p:cNvSpPr txBox="1"/>
+          <p:nvPr/>
+        </p:nvSpPr>
+        <p:spPr>
+          <a:xfrm>
+            <a:off x="969264" y="5446967"/>
+            <a:ext cx="6025896" cy="365760"/>
+          </a:xfrm>
+          <a:prstGeom prst="rect">
+            <a:avLst/>
+          </a:prstGeom>
+          <a:noFill/>
+          <a:ln/>
+        </p:spPr>
+        <p:txBody>
+          <a:bodyPr wrap="square" lIns="0" tIns="0" rIns="0" bIns="0" rtlCol="0" anchor="t"/>
+          <a:lstStyle/>
+          <a:p>
+            <a:pPr indent="0" marL="0">
+              <a:lnSpc>
+                <a:spcPct val="125000"/>
+              </a:lnSpc>
+              <a:buNone/>
+            </a:pPr>
+            <a:r>
+              <a:rPr lang="en-US" sz="1150" dirty="0">
+                <a:solidFill>
+                  <a:srgbClr val="222222"/>
+                </a:solidFill>
+                <a:latin typeface="Calibri" pitchFamily="34" charset="0"/>
+                <a:ea typeface="Calibri" pitchFamily="34" charset="-122"/>
+                <a:cs typeface="Calibri" pitchFamily="34" charset="-120"/>
+              </a:rPr>
+              <a:t>画面に出たリンクを押す</a:t>
+            </a:r>
+            <a:endParaRPr lang="en-US" sz="1150" dirty="0"/>
+          </a:p>
+        </p:txBody>
+      </p:sp>
+      <p:sp>
+        <p:nvSpPr>
+          <p:cNvPr id="28" name="Shape 26"/>
+          <p:cNvSpPr/>
+          <p:nvPr/>
+        </p:nvSpPr>
+        <p:spPr>
+          <a:xfrm>
+            <a:off x="566928" y="5922455"/>
+            <a:ext cx="274320" cy="274320"/>
+          </a:xfrm>
+          <a:prstGeom prst="ellipse">
+            <a:avLst/>
+          </a:prstGeom>
+          <a:solidFill>
+            <a:srgbClr val="B85042"/>
+          </a:solidFill>
+          <a:ln/>
+        </p:spPr>
+      </p:sp>
+      <p:sp>
+        <p:nvSpPr>
+          <p:cNvPr id="29" name="Text 27"/>
+          <p:cNvSpPr txBox="1"/>
+          <p:nvPr/>
+        </p:nvSpPr>
+        <p:spPr>
+          <a:xfrm>
+            <a:off x="566928" y="5922455"/>
+            <a:ext cx="274320" cy="274320"/>
+          </a:xfrm>
+          <a:prstGeom prst="rect">
+            <a:avLst/>
+          </a:prstGeom>
+          <a:noFill/>
+          <a:ln/>
+        </p:spPr>
+        <p:txBody>
+          <a:bodyPr wrap="square" lIns="0" tIns="0" rIns="0" bIns="0" rtlCol="0" anchor="ctr"/>
+          <a:lstStyle/>
+          <a:p>
+            <a:pPr algn="ctr" indent="0" marL="0">
+              <a:buNone/>
+            </a:pPr>
+            <a:r>
+              <a:rPr lang="en-US" sz="1100" b="1" dirty="0">
+                <a:solidFill>
+                  <a:srgbClr val="FFFFFF"/>
+                </a:solidFill>
+                <a:latin typeface="Calibri" pitchFamily="34" charset="0"/>
+                <a:ea typeface="Calibri" pitchFamily="34" charset="-122"/>
+                <a:cs typeface="Calibri" pitchFamily="34" charset="-120"/>
+              </a:rPr>
+              <a:t>3</a:t>
+            </a:r>
+            <a:endParaRPr lang="en-US" sz="1100" dirty="0"/>
+          </a:p>
+        </p:txBody>
+      </p:sp>
+      <p:sp>
+        <p:nvSpPr>
+          <p:cNvPr id="30" name="Text 28"/>
+          <p:cNvSpPr txBox="1"/>
+          <p:nvPr/>
+        </p:nvSpPr>
+        <p:spPr>
+          <a:xfrm>
+            <a:off x="969264" y="5904167"/>
+            <a:ext cx="6025896" cy="365760"/>
+          </a:xfrm>
+          <a:prstGeom prst="rect">
+            <a:avLst/>
+          </a:prstGeom>
+          <a:noFill/>
+          <a:ln/>
+        </p:spPr>
+        <p:txBody>
+          <a:bodyPr wrap="square" lIns="0" tIns="0" rIns="0" bIns="0" rtlCol="0" anchor="t"/>
+          <a:lstStyle/>
+          <a:p>
+            <a:pPr indent="0" marL="0">
+              <a:lnSpc>
+                <a:spcPct val="125000"/>
+              </a:lnSpc>
+              <a:buNone/>
+            </a:pPr>
+            <a:r>
+              <a:rPr lang="en-US" sz="1150" dirty="0">
+                <a:solidFill>
+                  <a:srgbClr val="222222"/>
+                </a:solidFill>
+                <a:latin typeface="Calibri" pitchFamily="34" charset="0"/>
+                <a:ea typeface="Calibri" pitchFamily="34" charset="-122"/>
+                <a:cs typeface="Calibri" pitchFamily="34" charset="-120"/>
+              </a:rPr>
+              <a:t>照会結果の画面が開く</a:t>
+            </a:r>
+            <a:endParaRPr lang="en-US" sz="1150" dirty="0"/>
+          </a:p>
+        </p:txBody>
+      </p:sp>
+      <p:sp>
+        <p:nvSpPr>
+          <p:cNvPr id="31" name="Shape 29"/>
+          <p:cNvSpPr/>
+          <p:nvPr/>
+        </p:nvSpPr>
+        <p:spPr>
+          <a:xfrm>
+            <a:off x="566928" y="6361367"/>
+            <a:ext cx="6428232" cy="624459"/>
+          </a:xfrm>
+          <a:prstGeom prst="roundRect">
+            <a:avLst>
+              <a:gd name="adj" fmla="val 8786"/>
+            </a:avLst>
+          </a:prstGeom>
+          <a:solidFill>
+            <a:srgbClr val="FDF0E6"/>
+          </a:solidFill>
+          <a:ln w="9525">
+            <a:solidFill>
+              <a:srgbClr val="E08A3C"/>
+            </a:solidFill>
+            <a:prstDash val="solid"/>
+          </a:ln>
+        </p:spPr>
+      </p:sp>
+      <p:sp>
+        <p:nvSpPr>
+          <p:cNvPr id="32" name="Text 30"/>
+          <p:cNvSpPr txBox="1"/>
+          <p:nvPr/>
+        </p:nvSpPr>
+        <p:spPr>
+          <a:xfrm>
+            <a:off x="658368" y="6452807"/>
+            <a:ext cx="237744" cy="237744"/>
+          </a:xfrm>
+          <a:prstGeom prst="rect">
+            <a:avLst/>
+          </a:prstGeom>
+          <a:noFill/>
+          <a:ln/>
+        </p:spPr>
+        <p:txBody>
+          <a:bodyPr wrap="square" lIns="0" tIns="0" rIns="0" bIns="0" rtlCol="0" anchor="ctr"/>
+          <a:lstStyle/>
+          <a:p>
+            <a:pPr algn="ctr" indent="0" marL="0">
+              <a:buNone/>
+            </a:pPr>
+            <a:r>
+              <a:rPr lang="en-US" sz="1200" b="1" dirty="0">
+                <a:solidFill>
+                  <a:srgbClr val="C25A17"/>
+                </a:solidFill>
+                <a:latin typeface="Calibri" pitchFamily="34" charset="0"/>
+                <a:ea typeface="Calibri" pitchFamily="34" charset="-122"/>
+                <a:cs typeface="Calibri" pitchFamily="34" charset="-120"/>
+              </a:rPr>
+              <a:t>！</a:t>
+            </a:r>
+            <a:endParaRPr lang="en-US" sz="1200" dirty="0"/>
+          </a:p>
+        </p:txBody>
+      </p:sp>
+      <p:sp>
+        <p:nvSpPr>
+          <p:cNvPr id="33" name="Text 31"/>
+          <p:cNvSpPr txBox="1"/>
+          <p:nvPr/>
+        </p:nvSpPr>
+        <p:spPr>
+          <a:xfrm>
+            <a:off x="950976" y="6471095"/>
+            <a:ext cx="5925312" cy="441579"/>
+          </a:xfrm>
+          <a:prstGeom prst="rect">
+            <a:avLst/>
+          </a:prstGeom>
+          <a:noFill/>
+          <a:ln/>
+        </p:spPr>
+        <p:txBody>
+          <a:bodyPr wrap="square" lIns="0" tIns="0" rIns="0" bIns="0" rtlCol="0" anchor="t"/>
+          <a:lstStyle/>
+          <a:p>
+            <a:pPr indent="0" marL="0">
+              <a:lnSpc>
+                <a:spcPct val="120000"/>
+              </a:lnSpc>
+              <a:buNone/>
+            </a:pPr>
+            <a:r>
+              <a:rPr lang="en-US" sz="1050" dirty="0">
+                <a:solidFill>
+                  <a:srgbClr val="222222"/>
+                </a:solidFill>
+                <a:latin typeface="Calibri" pitchFamily="34" charset="0"/>
+                <a:ea typeface="Calibri" pitchFamily="34" charset="-122"/>
+                <a:cs typeface="Calibri" pitchFamily="34" charset="-120"/>
+              </a:rPr>
+              <a:t>「ログインが必要です」と表示されたときは、そのスマートフォンがログアウトしています。画面のリンクからログインし直してください。</a:t>
+            </a:r>
+            <a:endParaRPr lang="en-US" sz="1050" dirty="0"/>
+          </a:p>
+        </p:txBody>
+      </p:sp>
+      <p:sp>
+        <p:nvSpPr>
+          <p:cNvPr id="34" name="Text 32"/>
           <p:cNvSpPr txBox="1"/>
           <p:nvPr/>
         </p:nvSpPr>
@@ -8424,537 +10013,15 @@
                 <a:ea typeface="Calibri" pitchFamily="34" charset="-122"/>
                 <a:cs typeface="Calibri" pitchFamily="34" charset="-120"/>
               </a:rPr>
-              <a:t>手順2：画面を確認して景品を選ぶ</a:t>
+              <a:t>手順1：QRコードを読み取る（スマートフォンの場合）（つづき）</a:t>
             </a:r>
             <a:endParaRPr lang="en-US" sz="2200" dirty="0"/>
-          </a:p>
-        </p:txBody>
-      </p:sp>
-      <p:sp>
-        <p:nvSpPr>
-          <p:cNvPr id="4" name="Text 2"/>
-          <p:cNvSpPr txBox="1"/>
-          <p:nvPr/>
-        </p:nvSpPr>
-        <p:spPr>
-          <a:xfrm>
-            <a:off x="566928" y="1481328"/>
-            <a:ext cx="6428232" cy="257429"/>
-          </a:xfrm>
-          <a:prstGeom prst="rect">
-            <a:avLst/>
-          </a:prstGeom>
-          <a:noFill/>
-          <a:ln/>
-        </p:spPr>
-        <p:txBody>
-          <a:bodyPr wrap="square" lIns="0" tIns="0" rIns="0" bIns="0" rtlCol="0" anchor="t"/>
-          <a:lstStyle/>
-          <a:p>
-            <a:pPr indent="0" marL="0">
-              <a:lnSpc>
-                <a:spcPct val="125000"/>
-              </a:lnSpc>
-              <a:buNone/>
-            </a:pPr>
-            <a:r>
-              <a:rPr lang="en-US" sz="1100" dirty="0">
-                <a:solidFill>
-                  <a:srgbClr val="222222"/>
-                </a:solidFill>
-                <a:latin typeface="Calibri" pitchFamily="34" charset="0"/>
-                <a:ea typeface="Calibri" pitchFamily="34" charset="-122"/>
-                <a:cs typeface="Calibri" pitchFamily="34" charset="-120"/>
-              </a:rPr>
-              <a:t>読み取ると、交換コードと状態が表示されます。</a:t>
-            </a:r>
-            <a:endParaRPr lang="en-US" sz="1100" dirty="0"/>
-          </a:p>
-        </p:txBody>
-      </p:sp>
-      <p:sp>
-        <p:nvSpPr>
-          <p:cNvPr id="5" name="Text 3"/>
-          <p:cNvSpPr txBox="1"/>
-          <p:nvPr/>
-        </p:nvSpPr>
-        <p:spPr>
-          <a:xfrm>
-            <a:off x="566928" y="1885061"/>
-            <a:ext cx="6428232" cy="257810"/>
-          </a:xfrm>
-          <a:prstGeom prst="rect">
-            <a:avLst/>
-          </a:prstGeom>
-          <a:noFill/>
-          <a:ln/>
-        </p:spPr>
-        <p:txBody>
-          <a:bodyPr wrap="square" lIns="0" tIns="0" rIns="0" bIns="0" rtlCol="0" anchor="t"/>
-          <a:lstStyle/>
-          <a:p>
-            <a:pPr indent="0" marL="0">
-              <a:buNone/>
-            </a:pPr>
-            <a:r>
-              <a:rPr lang="en-US" sz="1400" b="1" dirty="0">
-                <a:solidFill>
-                  <a:srgbClr val="B85042"/>
-                </a:solidFill>
-                <a:latin typeface="Calibri" pitchFamily="34" charset="0"/>
-                <a:ea typeface="Calibri" pitchFamily="34" charset="-122"/>
-                <a:cs typeface="Calibri" pitchFamily="34" charset="-120"/>
-              </a:rPr>
-              <a:t>「未交換です」と出た場合</a:t>
-            </a:r>
-            <a:endParaRPr lang="en-US" sz="1400" dirty="0"/>
-          </a:p>
-        </p:txBody>
-      </p:sp>
-      <p:sp>
-        <p:nvSpPr>
-          <p:cNvPr id="6" name="Text 4"/>
-          <p:cNvSpPr txBox="1"/>
-          <p:nvPr/>
-        </p:nvSpPr>
-        <p:spPr>
-          <a:xfrm>
-            <a:off x="566928" y="2216023"/>
-            <a:ext cx="6428232" cy="257429"/>
-          </a:xfrm>
-          <a:prstGeom prst="rect">
-            <a:avLst/>
-          </a:prstGeom>
-          <a:noFill/>
-          <a:ln/>
-        </p:spPr>
-        <p:txBody>
-          <a:bodyPr wrap="square" lIns="0" tIns="0" rIns="0" bIns="0" rtlCol="0" anchor="t"/>
-          <a:lstStyle/>
-          <a:p>
-            <a:pPr indent="0" marL="0">
-              <a:lnSpc>
-                <a:spcPct val="125000"/>
-              </a:lnSpc>
-              <a:buNone/>
-            </a:pPr>
-            <a:r>
-              <a:rPr lang="en-US" sz="1100" dirty="0">
-                <a:solidFill>
-                  <a:srgbClr val="222222"/>
-                </a:solidFill>
-                <a:latin typeface="Calibri" pitchFamily="34" charset="0"/>
-                <a:ea typeface="Calibri" pitchFamily="34" charset="-122"/>
-                <a:cs typeface="Calibri" pitchFamily="34" charset="-120"/>
-              </a:rPr>
-              <a:t>そのままお渡しできます。</a:t>
-            </a:r>
-            <a:pPr indent="0" marL="0">
-              <a:lnSpc>
-                <a:spcPct val="125000"/>
-              </a:lnSpc>
-              <a:buNone/>
-            </a:pPr>
-            <a:r>
-              <a:rPr lang="en-US" sz="1100" b="1" dirty="0">
-                <a:solidFill>
-                  <a:srgbClr val="222222"/>
-                </a:solidFill>
-                <a:latin typeface="Calibri" pitchFamily="34" charset="0"/>
-                <a:ea typeface="Calibri" pitchFamily="34" charset="-122"/>
-                <a:cs typeface="Calibri" pitchFamily="34" charset="-120"/>
-              </a:rPr>
-              <a:t>渡す景品を選んで</a:t>
-            </a:r>
-            <a:pPr indent="0" marL="0">
-              <a:lnSpc>
-                <a:spcPct val="125000"/>
-              </a:lnSpc>
-              <a:buNone/>
-            </a:pPr>
-            <a:r>
-              <a:rPr lang="en-US" sz="1100" dirty="0">
-                <a:solidFill>
-                  <a:srgbClr val="222222"/>
-                </a:solidFill>
-                <a:latin typeface="Calibri" pitchFamily="34" charset="0"/>
-                <a:ea typeface="Calibri" pitchFamily="34" charset="-122"/>
-                <a:cs typeface="Calibri" pitchFamily="34" charset="-120"/>
-              </a:rPr>
-              <a:t>ください。選択肢には残りの数が出ています。</a:t>
-            </a:r>
-            <a:endParaRPr lang="en-US" sz="1100" dirty="0"/>
-          </a:p>
-        </p:txBody>
-      </p:sp>
-      <p:sp>
-        <p:nvSpPr>
-          <p:cNvPr id="7" name="Text 5"/>
-          <p:cNvSpPr txBox="1"/>
-          <p:nvPr/>
-        </p:nvSpPr>
-        <p:spPr>
-          <a:xfrm>
-            <a:off x="566928" y="2619756"/>
-            <a:ext cx="6428232" cy="257810"/>
-          </a:xfrm>
-          <a:prstGeom prst="rect">
-            <a:avLst/>
-          </a:prstGeom>
-          <a:noFill/>
-          <a:ln/>
-        </p:spPr>
-        <p:txBody>
-          <a:bodyPr wrap="square" lIns="0" tIns="0" rIns="0" bIns="0" rtlCol="0" anchor="t"/>
-          <a:lstStyle/>
-          <a:p>
-            <a:pPr indent="0" marL="0">
-              <a:buNone/>
-            </a:pPr>
-            <a:r>
-              <a:rPr lang="en-US" sz="1400" b="1" dirty="0">
-                <a:solidFill>
-                  <a:srgbClr val="B85042"/>
-                </a:solidFill>
-                <a:latin typeface="Calibri" pitchFamily="34" charset="0"/>
-                <a:ea typeface="Calibri" pitchFamily="34" charset="-122"/>
-                <a:cs typeface="Calibri" pitchFamily="34" charset="-120"/>
-              </a:rPr>
-              <a:t>「交換済み（日時）」と出た場合</a:t>
-            </a:r>
-            <a:endParaRPr lang="en-US" sz="1400" dirty="0"/>
-          </a:p>
-        </p:txBody>
-      </p:sp>
-      <p:sp>
-        <p:nvSpPr>
-          <p:cNvPr id="8" name="Text 6"/>
-          <p:cNvSpPr txBox="1"/>
-          <p:nvPr/>
-        </p:nvSpPr>
-        <p:spPr>
-          <a:xfrm>
-            <a:off x="566928" y="2950718"/>
-            <a:ext cx="6428232" cy="662559"/>
-          </a:xfrm>
-          <a:prstGeom prst="rect">
-            <a:avLst/>
-          </a:prstGeom>
-          <a:noFill/>
-          <a:ln/>
-        </p:spPr>
-        <p:txBody>
-          <a:bodyPr wrap="square" lIns="0" tIns="0" rIns="0" bIns="0" rtlCol="0" anchor="t"/>
-          <a:lstStyle/>
-          <a:p>
-            <a:pPr indent="0" marL="0">
-              <a:lnSpc>
-                <a:spcPct val="125000"/>
-              </a:lnSpc>
-              <a:buNone/>
-            </a:pPr>
-            <a:r>
-              <a:rPr lang="en-US" sz="1100" dirty="0">
-                <a:solidFill>
-                  <a:srgbClr val="222222"/>
-                </a:solidFill>
-                <a:latin typeface="Calibri" pitchFamily="34" charset="0"/>
-                <a:ea typeface="Calibri" pitchFamily="34" charset="-122"/>
-                <a:cs typeface="Calibri" pitchFamily="34" charset="-120"/>
-              </a:rPr>
-              <a:t>すでにお渡しした記録があります。</a:t>
-            </a:r>
-            <a:pPr indent="0" marL="0">
-              <a:lnSpc>
-                <a:spcPct val="125000"/>
-              </a:lnSpc>
-              <a:buNone/>
-            </a:pPr>
-            <a:r>
-              <a:rPr lang="en-US" sz="1100" b="1" dirty="0">
-                <a:solidFill>
-                  <a:srgbClr val="222222"/>
-                </a:solidFill>
-                <a:latin typeface="Calibri" pitchFamily="34" charset="0"/>
-                <a:ea typeface="Calibri" pitchFamily="34" charset="-122"/>
-                <a:cs typeface="Calibri" pitchFamily="34" charset="-120"/>
-              </a:rPr>
-              <a:t>来場者にはその旨を表示していません。</a:t>
-            </a:r>
-            <a:pPr indent="0" marL="0">
-              <a:lnSpc>
-                <a:spcPct val="125000"/>
-              </a:lnSpc>
-              <a:buNone/>
-            </a:pPr>
-            <a:r>
-              <a:rPr lang="en-US" sz="1100" dirty="0">
-                <a:solidFill>
-                  <a:srgbClr val="222222"/>
-                </a:solidFill>
-                <a:latin typeface="Calibri" pitchFamily="34" charset="0"/>
-                <a:ea typeface="Calibri" pitchFamily="34" charset="-122"/>
-                <a:cs typeface="Calibri" pitchFamily="34" charset="-120"/>
-              </a:rPr>
-              <a:t>「もう1回まわった」「まだもらっていない」などお申し出があれば、</a:t>
-            </a:r>
-            <a:pPr indent="0" marL="0">
-              <a:lnSpc>
-                <a:spcPct val="125000"/>
-              </a:lnSpc>
-              <a:buNone/>
-            </a:pPr>
-            <a:r>
-              <a:rPr lang="en-US" sz="1100" b="1" dirty="0">
-                <a:solidFill>
-                  <a:srgbClr val="222222"/>
-                </a:solidFill>
-                <a:latin typeface="Calibri" pitchFamily="34" charset="0"/>
-                <a:ea typeface="Calibri" pitchFamily="34" charset="-122"/>
-                <a:cs typeface="Calibri" pitchFamily="34" charset="-120"/>
-              </a:rPr>
-              <a:t>お渡しして構いません</a:t>
-            </a:r>
-            <a:pPr indent="0" marL="0">
-              <a:lnSpc>
-                <a:spcPct val="125000"/>
-              </a:lnSpc>
-              <a:buNone/>
-            </a:pPr>
-            <a:r>
-              <a:rPr lang="en-US" sz="1100" dirty="0">
-                <a:solidFill>
-                  <a:srgbClr val="222222"/>
-                </a:solidFill>
-                <a:latin typeface="Calibri" pitchFamily="34" charset="0"/>
-                <a:ea typeface="Calibri" pitchFamily="34" charset="-122"/>
-                <a:cs typeface="Calibri" pitchFamily="34" charset="-120"/>
-              </a:rPr>
-              <a:t>。判断に迷う場合は事務局にご確認ください。</a:t>
-            </a:r>
-            <a:endParaRPr lang="en-US" sz="1100" dirty="0"/>
-          </a:p>
-        </p:txBody>
-      </p:sp>
-      <p:sp>
-        <p:nvSpPr>
-          <p:cNvPr id="9" name="Shape 7"/>
-          <p:cNvSpPr/>
-          <p:nvPr/>
-        </p:nvSpPr>
-        <p:spPr>
-          <a:xfrm>
-            <a:off x="566928" y="3649853"/>
-            <a:ext cx="6428232" cy="431102"/>
-          </a:xfrm>
-          <a:prstGeom prst="roundRect">
-            <a:avLst>
-              <a:gd name="adj" fmla="val 12726"/>
-            </a:avLst>
-          </a:prstGeom>
-          <a:solidFill>
-            <a:srgbClr val="FAEAE7"/>
-          </a:solidFill>
-          <a:ln w="9525">
-            <a:solidFill>
-              <a:srgbClr val="B85042"/>
-            </a:solidFill>
-            <a:prstDash val="solid"/>
-          </a:ln>
-        </p:spPr>
-      </p:sp>
-      <p:sp>
-        <p:nvSpPr>
-          <p:cNvPr id="10" name="Text 8"/>
-          <p:cNvSpPr txBox="1"/>
-          <p:nvPr/>
-        </p:nvSpPr>
-        <p:spPr>
-          <a:xfrm>
-            <a:off x="658368" y="3741293"/>
-            <a:ext cx="237744" cy="237744"/>
-          </a:xfrm>
-          <a:prstGeom prst="rect">
-            <a:avLst/>
-          </a:prstGeom>
-          <a:noFill/>
-          <a:ln/>
-        </p:spPr>
-        <p:txBody>
-          <a:bodyPr wrap="square" lIns="0" tIns="0" rIns="0" bIns="0" rtlCol="0" anchor="ctr"/>
-          <a:lstStyle/>
-          <a:p>
-            <a:pPr algn="ctr" indent="0" marL="0">
-              <a:buNone/>
-            </a:pPr>
-            <a:r>
-              <a:rPr lang="en-US" sz="1200" b="1" dirty="0">
-                <a:solidFill>
-                  <a:srgbClr val="B85042"/>
-                </a:solidFill>
-                <a:latin typeface="Calibri" pitchFamily="34" charset="0"/>
-                <a:ea typeface="Calibri" pitchFamily="34" charset="-122"/>
-                <a:cs typeface="Calibri" pitchFamily="34" charset="-120"/>
-              </a:rPr>
-              <a:t>i</a:t>
-            </a:r>
-            <a:endParaRPr lang="en-US" sz="1200" dirty="0"/>
-          </a:p>
-        </p:txBody>
-      </p:sp>
-      <p:sp>
-        <p:nvSpPr>
-          <p:cNvPr id="11" name="Text 9"/>
-          <p:cNvSpPr txBox="1"/>
-          <p:nvPr/>
-        </p:nvSpPr>
-        <p:spPr>
-          <a:xfrm>
-            <a:off x="950976" y="3759581"/>
-            <a:ext cx="5925312" cy="248221"/>
-          </a:xfrm>
-          <a:prstGeom prst="rect">
-            <a:avLst/>
-          </a:prstGeom>
-          <a:noFill/>
-          <a:ln/>
-        </p:spPr>
-        <p:txBody>
-          <a:bodyPr wrap="square" lIns="0" tIns="0" rIns="0" bIns="0" rtlCol="0" anchor="t"/>
-          <a:lstStyle/>
-          <a:p>
-            <a:pPr indent="0" marL="0">
-              <a:lnSpc>
-                <a:spcPct val="120000"/>
-              </a:lnSpc>
-              <a:buNone/>
-            </a:pPr>
-            <a:r>
-              <a:rPr lang="en-US" sz="1050" dirty="0">
-                <a:solidFill>
-                  <a:srgbClr val="222222"/>
-                </a:solidFill>
-                <a:latin typeface="Calibri" pitchFamily="34" charset="0"/>
-                <a:ea typeface="Calibri" pitchFamily="34" charset="-122"/>
-                <a:cs typeface="Calibri" pitchFamily="34" charset="-120"/>
-              </a:rPr>
-              <a:t>画面には、その方が回答したブースの数も出ます。目安としてご覧ください。</a:t>
-            </a:r>
-            <a:endParaRPr lang="en-US" sz="1050" dirty="0"/>
-          </a:p>
-        </p:txBody>
-      </p:sp>
-      <p:sp>
-        <p:nvSpPr>
-          <p:cNvPr id="12" name="Shape 10"/>
-          <p:cNvSpPr/>
-          <p:nvPr/>
-        </p:nvSpPr>
-        <p:spPr>
-          <a:xfrm>
-            <a:off x="566928" y="4154107"/>
-            <a:ext cx="6428232" cy="624459"/>
-          </a:xfrm>
-          <a:prstGeom prst="roundRect">
-            <a:avLst>
-              <a:gd name="adj" fmla="val 8786"/>
-            </a:avLst>
-          </a:prstGeom>
-          <a:solidFill>
-            <a:srgbClr val="FDF0E6"/>
-          </a:solidFill>
-          <a:ln w="9525">
-            <a:solidFill>
-              <a:srgbClr val="E08A3C"/>
-            </a:solidFill>
-            <a:prstDash val="solid"/>
-          </a:ln>
-        </p:spPr>
-      </p:sp>
-      <p:sp>
-        <p:nvSpPr>
-          <p:cNvPr id="13" name="Text 11"/>
-          <p:cNvSpPr txBox="1"/>
-          <p:nvPr/>
-        </p:nvSpPr>
-        <p:spPr>
-          <a:xfrm>
-            <a:off x="658368" y="4245547"/>
-            <a:ext cx="237744" cy="237744"/>
-          </a:xfrm>
-          <a:prstGeom prst="rect">
-            <a:avLst/>
-          </a:prstGeom>
-          <a:noFill/>
-          <a:ln/>
-        </p:spPr>
-        <p:txBody>
-          <a:bodyPr wrap="square" lIns="0" tIns="0" rIns="0" bIns="0" rtlCol="0" anchor="ctr"/>
-          <a:lstStyle/>
-          <a:p>
-            <a:pPr algn="ctr" indent="0" marL="0">
-              <a:buNone/>
-            </a:pPr>
-            <a:r>
-              <a:rPr lang="en-US" sz="1200" b="1" dirty="0">
-                <a:solidFill>
-                  <a:srgbClr val="C25A17"/>
-                </a:solidFill>
-                <a:latin typeface="Calibri" pitchFamily="34" charset="0"/>
-                <a:ea typeface="Calibri" pitchFamily="34" charset="-122"/>
-                <a:cs typeface="Calibri" pitchFamily="34" charset="-120"/>
-              </a:rPr>
-              <a:t>！</a:t>
-            </a:r>
-            <a:endParaRPr lang="en-US" sz="1200" dirty="0"/>
-          </a:p>
-        </p:txBody>
-      </p:sp>
-      <p:sp>
-        <p:nvSpPr>
-          <p:cNvPr id="14" name="Text 12"/>
-          <p:cNvSpPr txBox="1"/>
-          <p:nvPr/>
-        </p:nvSpPr>
-        <p:spPr>
-          <a:xfrm>
-            <a:off x="950976" y="4263835"/>
-            <a:ext cx="5925312" cy="441579"/>
-          </a:xfrm>
-          <a:prstGeom prst="rect">
-            <a:avLst/>
-          </a:prstGeom>
-          <a:noFill/>
-          <a:ln/>
-        </p:spPr>
-        <p:txBody>
-          <a:bodyPr wrap="square" lIns="0" tIns="0" rIns="0" bIns="0" rtlCol="0" anchor="t"/>
-          <a:lstStyle/>
-          <a:p>
-            <a:pPr indent="0" marL="0">
-              <a:lnSpc>
-                <a:spcPct val="120000"/>
-              </a:lnSpc>
-              <a:buNone/>
-            </a:pPr>
-            <a:r>
-              <a:rPr lang="en-US" sz="1050" dirty="0">
-                <a:solidFill>
-                  <a:srgbClr val="222222"/>
-                </a:solidFill>
-                <a:latin typeface="Calibri" pitchFamily="34" charset="0"/>
-                <a:ea typeface="Calibri" pitchFamily="34" charset="-122"/>
-                <a:cs typeface="Calibri" pitchFamily="34" charset="-120"/>
-              </a:rPr>
-              <a:t>在庫がなくなった景品も選べます。実際にお渡ししたものを記録することを優先してください（あとで用意した数を超えた分が分かるようになっています）。</a:t>
-            </a:r>
-            <a:endParaRPr lang="en-US" sz="1050" dirty="0"/>
           </a:p>
         </p:txBody>
       </p:sp>
       <p:pic>
         <p:nvPicPr>
-          <p:cNvPr id="15" name="Image 0" descr="C:\Users\sato\Desktop\enque\docs\images\p-claim-open.png">    </p:cNvPr>
+          <p:cNvPr id="4" name="Image 0" descr="C:\Users\sato\Desktop\enque\docs\images\p-scan-button.png">    </p:cNvPr>
           <p:cNvPicPr>
             <a:picLocks noChangeAspect="1"/>
           </p:cNvPicPr>
@@ -8968,8 +10035,8 @@
         </p:blipFill>
         <p:spPr>
           <a:xfrm>
-            <a:off x="2632342" y="4851718"/>
-            <a:ext cx="2297403" cy="3474720"/>
+            <a:off x="566928" y="1481328"/>
+            <a:ext cx="6428232" cy="3088297"/>
           </a:xfrm>
           <a:prstGeom prst="rect">
             <a:avLst/>
@@ -8978,13 +10045,13 @@
       </p:pic>
       <p:sp>
         <p:nvSpPr>
-          <p:cNvPr id="16" name="Text 13"/>
-          <p:cNvSpPr txBox="1"/>
-          <p:nvPr/>
-        </p:nvSpPr>
-        <p:spPr>
-          <a:xfrm>
-            <a:off x="566928" y="8381302"/>
+          <p:cNvPr id="5" name="Text 2"/>
+          <p:cNvSpPr txBox="1"/>
+          <p:nvPr/>
+        </p:nvSpPr>
+        <p:spPr>
+          <a:xfrm>
+            <a:off x="566928" y="4624489"/>
             <a:ext cx="6428232" cy="274320"/>
           </a:xfrm>
           <a:prstGeom prst="rect">
@@ -9009,7 +10076,7 @@
                 <a:ea typeface="Calibri" pitchFamily="34" charset="-122"/>
                 <a:cs typeface="Calibri" pitchFamily="34" charset="-120"/>
               </a:rPr>
-              <a:t>照会結果の画面。「未交換です」の表示と、景品を選ぶプルダウン（残りの数が見えるもの）。</a:t>
+              <a:t>照会画面の「カメラでQRコードを読み取る」ボタンの周辺。</a:t>
             </a:r>
             <a:endParaRPr lang="en-US" sz="950" dirty="0"/>
           </a:p>
@@ -9017,7 +10084,7 @@
       </p:sp>
       <p:sp>
         <p:nvSpPr>
-          <p:cNvPr id="17" name="Text 14"/>
+          <p:cNvPr id="6" name="Text 3"/>
           <p:cNvSpPr txBox="1"/>
           <p:nvPr/>
         </p:nvSpPr>
@@ -9158,7 +10225,7 @@
                 <a:ea typeface="Calibri" pitchFamily="34" charset="-122"/>
                 <a:cs typeface="Calibri" pitchFamily="34" charset="-120"/>
               </a:rPr>
-              <a:t>手順3：交換済みにする</a:t>
+              <a:t>手順2：画面を確認して景品を選ぶ（スマートフォンの場合）</a:t>
             </a:r>
             <a:endParaRPr lang="en-US" sz="2200" dirty="0"/>
           </a:p>
@@ -9166,34 +10233,347 @@
       </p:sp>
       <p:sp>
         <p:nvSpPr>
-          <p:cNvPr id="4" name="Shape 2"/>
+          <p:cNvPr id="4" name="Text 2"/>
+          <p:cNvSpPr txBox="1"/>
+          <p:nvPr/>
+        </p:nvSpPr>
+        <p:spPr>
+          <a:xfrm>
+            <a:off x="566928" y="1481328"/>
+            <a:ext cx="6428232" cy="257429"/>
+          </a:xfrm>
+          <a:prstGeom prst="rect">
+            <a:avLst/>
+          </a:prstGeom>
+          <a:noFill/>
+          <a:ln/>
+        </p:spPr>
+        <p:txBody>
+          <a:bodyPr wrap="square" lIns="0" tIns="0" rIns="0" bIns="0" rtlCol="0" anchor="t"/>
+          <a:lstStyle/>
+          <a:p>
+            <a:pPr indent="0" marL="0">
+              <a:lnSpc>
+                <a:spcPct val="125000"/>
+              </a:lnSpc>
+              <a:buNone/>
+            </a:pPr>
+            <a:r>
+              <a:rPr lang="en-US" sz="1100" dirty="0">
+                <a:solidFill>
+                  <a:srgbClr val="222222"/>
+                </a:solidFill>
+                <a:latin typeface="Calibri" pitchFamily="34" charset="0"/>
+                <a:ea typeface="Calibri" pitchFamily="34" charset="-122"/>
+                <a:cs typeface="Calibri" pitchFamily="34" charset="-120"/>
+              </a:rPr>
+              <a:t>読み取ると、交換コードと状態が表示されます。</a:t>
+            </a:r>
+            <a:endParaRPr lang="en-US" sz="1100" dirty="0"/>
+          </a:p>
+        </p:txBody>
+      </p:sp>
+      <p:sp>
+        <p:nvSpPr>
+          <p:cNvPr id="5" name="Text 3"/>
+          <p:cNvSpPr txBox="1"/>
+          <p:nvPr/>
+        </p:nvSpPr>
+        <p:spPr>
+          <a:xfrm>
+            <a:off x="566928" y="1885061"/>
+            <a:ext cx="6428232" cy="257810"/>
+          </a:xfrm>
+          <a:prstGeom prst="rect">
+            <a:avLst/>
+          </a:prstGeom>
+          <a:noFill/>
+          <a:ln/>
+        </p:spPr>
+        <p:txBody>
+          <a:bodyPr wrap="square" lIns="0" tIns="0" rIns="0" bIns="0" rtlCol="0" anchor="t"/>
+          <a:lstStyle/>
+          <a:p>
+            <a:pPr indent="0" marL="0">
+              <a:buNone/>
+            </a:pPr>
+            <a:r>
+              <a:rPr lang="en-US" sz="1400" b="1" dirty="0">
+                <a:solidFill>
+                  <a:srgbClr val="B85042"/>
+                </a:solidFill>
+                <a:latin typeface="Calibri" pitchFamily="34" charset="0"/>
+                <a:ea typeface="Calibri" pitchFamily="34" charset="-122"/>
+                <a:cs typeface="Calibri" pitchFamily="34" charset="-120"/>
+              </a:rPr>
+              <a:t>「未交換です」と出た場合</a:t>
+            </a:r>
+            <a:endParaRPr lang="en-US" sz="1400" dirty="0"/>
+          </a:p>
+        </p:txBody>
+      </p:sp>
+      <p:sp>
+        <p:nvSpPr>
+          <p:cNvPr id="6" name="Text 4"/>
+          <p:cNvSpPr txBox="1"/>
+          <p:nvPr/>
+        </p:nvSpPr>
+        <p:spPr>
+          <a:xfrm>
+            <a:off x="566928" y="2216023"/>
+            <a:ext cx="6428232" cy="257429"/>
+          </a:xfrm>
+          <a:prstGeom prst="rect">
+            <a:avLst/>
+          </a:prstGeom>
+          <a:noFill/>
+          <a:ln/>
+        </p:spPr>
+        <p:txBody>
+          <a:bodyPr wrap="square" lIns="0" tIns="0" rIns="0" bIns="0" rtlCol="0" anchor="t"/>
+          <a:lstStyle/>
+          <a:p>
+            <a:pPr indent="0" marL="0">
+              <a:lnSpc>
+                <a:spcPct val="125000"/>
+              </a:lnSpc>
+              <a:buNone/>
+            </a:pPr>
+            <a:r>
+              <a:rPr lang="en-US" sz="1100" dirty="0">
+                <a:solidFill>
+                  <a:srgbClr val="222222"/>
+                </a:solidFill>
+                <a:latin typeface="Calibri" pitchFamily="34" charset="0"/>
+                <a:ea typeface="Calibri" pitchFamily="34" charset="-122"/>
+                <a:cs typeface="Calibri" pitchFamily="34" charset="-120"/>
+              </a:rPr>
+              <a:t>そのままお渡しできます。</a:t>
+            </a:r>
+            <a:pPr indent="0" marL="0">
+              <a:lnSpc>
+                <a:spcPct val="125000"/>
+              </a:lnSpc>
+              <a:buNone/>
+            </a:pPr>
+            <a:r>
+              <a:rPr lang="en-US" sz="1100" b="1" dirty="0">
+                <a:solidFill>
+                  <a:srgbClr val="222222"/>
+                </a:solidFill>
+                <a:latin typeface="Calibri" pitchFamily="34" charset="0"/>
+                <a:ea typeface="Calibri" pitchFamily="34" charset="-122"/>
+                <a:cs typeface="Calibri" pitchFamily="34" charset="-120"/>
+              </a:rPr>
+              <a:t>渡す景品を選んで</a:t>
+            </a:r>
+            <a:pPr indent="0" marL="0">
+              <a:lnSpc>
+                <a:spcPct val="125000"/>
+              </a:lnSpc>
+              <a:buNone/>
+            </a:pPr>
+            <a:r>
+              <a:rPr lang="en-US" sz="1100" dirty="0">
+                <a:solidFill>
+                  <a:srgbClr val="222222"/>
+                </a:solidFill>
+                <a:latin typeface="Calibri" pitchFamily="34" charset="0"/>
+                <a:ea typeface="Calibri" pitchFamily="34" charset="-122"/>
+                <a:cs typeface="Calibri" pitchFamily="34" charset="-120"/>
+              </a:rPr>
+              <a:t>ください。選択肢には残りの数が出ています。</a:t>
+            </a:r>
+            <a:endParaRPr lang="en-US" sz="1100" dirty="0"/>
+          </a:p>
+        </p:txBody>
+      </p:sp>
+      <p:sp>
+        <p:nvSpPr>
+          <p:cNvPr id="7" name="Text 5"/>
+          <p:cNvSpPr txBox="1"/>
+          <p:nvPr/>
+        </p:nvSpPr>
+        <p:spPr>
+          <a:xfrm>
+            <a:off x="566928" y="2619756"/>
+            <a:ext cx="6428232" cy="257810"/>
+          </a:xfrm>
+          <a:prstGeom prst="rect">
+            <a:avLst/>
+          </a:prstGeom>
+          <a:noFill/>
+          <a:ln/>
+        </p:spPr>
+        <p:txBody>
+          <a:bodyPr wrap="square" lIns="0" tIns="0" rIns="0" bIns="0" rtlCol="0" anchor="t"/>
+          <a:lstStyle/>
+          <a:p>
+            <a:pPr indent="0" marL="0">
+              <a:buNone/>
+            </a:pPr>
+            <a:r>
+              <a:rPr lang="en-US" sz="1400" b="1" dirty="0">
+                <a:solidFill>
+                  <a:srgbClr val="B85042"/>
+                </a:solidFill>
+                <a:latin typeface="Calibri" pitchFamily="34" charset="0"/>
+                <a:ea typeface="Calibri" pitchFamily="34" charset="-122"/>
+                <a:cs typeface="Calibri" pitchFamily="34" charset="-120"/>
+              </a:rPr>
+              <a:t>「交換済み（日時）」と出た場合</a:t>
+            </a:r>
+            <a:endParaRPr lang="en-US" sz="1400" dirty="0"/>
+          </a:p>
+        </p:txBody>
+      </p:sp>
+      <p:sp>
+        <p:nvSpPr>
+          <p:cNvPr id="8" name="Text 6"/>
+          <p:cNvSpPr txBox="1"/>
+          <p:nvPr/>
+        </p:nvSpPr>
+        <p:spPr>
+          <a:xfrm>
+            <a:off x="566928" y="2950718"/>
+            <a:ext cx="6428232" cy="662559"/>
+          </a:xfrm>
+          <a:prstGeom prst="rect">
+            <a:avLst/>
+          </a:prstGeom>
+          <a:noFill/>
+          <a:ln/>
+        </p:spPr>
+        <p:txBody>
+          <a:bodyPr wrap="square" lIns="0" tIns="0" rIns="0" bIns="0" rtlCol="0" anchor="t"/>
+          <a:lstStyle/>
+          <a:p>
+            <a:pPr indent="0" marL="0">
+              <a:lnSpc>
+                <a:spcPct val="125000"/>
+              </a:lnSpc>
+              <a:buNone/>
+            </a:pPr>
+            <a:r>
+              <a:rPr lang="en-US" sz="1100" dirty="0">
+                <a:solidFill>
+                  <a:srgbClr val="222222"/>
+                </a:solidFill>
+                <a:latin typeface="Calibri" pitchFamily="34" charset="0"/>
+                <a:ea typeface="Calibri" pitchFamily="34" charset="-122"/>
+                <a:cs typeface="Calibri" pitchFamily="34" charset="-120"/>
+              </a:rPr>
+              <a:t>すでにお渡しした記録があります。</a:t>
+            </a:r>
+            <a:pPr indent="0" marL="0">
+              <a:lnSpc>
+                <a:spcPct val="125000"/>
+              </a:lnSpc>
+              <a:buNone/>
+            </a:pPr>
+            <a:r>
+              <a:rPr lang="en-US" sz="1100" b="1" dirty="0">
+                <a:solidFill>
+                  <a:srgbClr val="222222"/>
+                </a:solidFill>
+                <a:latin typeface="Calibri" pitchFamily="34" charset="0"/>
+                <a:ea typeface="Calibri" pitchFamily="34" charset="-122"/>
+                <a:cs typeface="Calibri" pitchFamily="34" charset="-120"/>
+              </a:rPr>
+              <a:t>来場者にはその旨を表示していません。</a:t>
+            </a:r>
+            <a:pPr indent="0" marL="0">
+              <a:lnSpc>
+                <a:spcPct val="125000"/>
+              </a:lnSpc>
+              <a:buNone/>
+            </a:pPr>
+            <a:r>
+              <a:rPr lang="en-US" sz="1100" dirty="0">
+                <a:solidFill>
+                  <a:srgbClr val="222222"/>
+                </a:solidFill>
+                <a:latin typeface="Calibri" pitchFamily="34" charset="0"/>
+                <a:ea typeface="Calibri" pitchFamily="34" charset="-122"/>
+                <a:cs typeface="Calibri" pitchFamily="34" charset="-120"/>
+              </a:rPr>
+              <a:t>「もう1回まわった」「まだもらっていない」などお申し出があれば、</a:t>
+            </a:r>
+            <a:pPr indent="0" marL="0">
+              <a:lnSpc>
+                <a:spcPct val="125000"/>
+              </a:lnSpc>
+              <a:buNone/>
+            </a:pPr>
+            <a:r>
+              <a:rPr lang="en-US" sz="1100" b="1" dirty="0">
+                <a:solidFill>
+                  <a:srgbClr val="222222"/>
+                </a:solidFill>
+                <a:latin typeface="Calibri" pitchFamily="34" charset="0"/>
+                <a:ea typeface="Calibri" pitchFamily="34" charset="-122"/>
+                <a:cs typeface="Calibri" pitchFamily="34" charset="-120"/>
+              </a:rPr>
+              <a:t>お渡しして構いません</a:t>
+            </a:r>
+            <a:pPr indent="0" marL="0">
+              <a:lnSpc>
+                <a:spcPct val="125000"/>
+              </a:lnSpc>
+              <a:buNone/>
+            </a:pPr>
+            <a:r>
+              <a:rPr lang="en-US" sz="1100" dirty="0">
+                <a:solidFill>
+                  <a:srgbClr val="222222"/>
+                </a:solidFill>
+                <a:latin typeface="Calibri" pitchFamily="34" charset="0"/>
+                <a:ea typeface="Calibri" pitchFamily="34" charset="-122"/>
+                <a:cs typeface="Calibri" pitchFamily="34" charset="-120"/>
+              </a:rPr>
+              <a:t>。判断に迷う場合は事務局にご確認ください。</a:t>
+            </a:r>
+            <a:endParaRPr lang="en-US" sz="1100" dirty="0"/>
+          </a:p>
+        </p:txBody>
+      </p:sp>
+      <p:sp>
+        <p:nvSpPr>
+          <p:cNvPr id="9" name="Shape 7"/>
           <p:cNvSpPr/>
           <p:nvPr/>
         </p:nvSpPr>
         <p:spPr>
           <a:xfrm>
-            <a:off x="566928" y="1499616"/>
-            <a:ext cx="274320" cy="274320"/>
-          </a:xfrm>
-          <a:prstGeom prst="ellipse">
-            <a:avLst/>
+            <a:off x="566928" y="3649853"/>
+            <a:ext cx="6428232" cy="431102"/>
+          </a:xfrm>
+          <a:prstGeom prst="roundRect">
+            <a:avLst>
+              <a:gd name="adj" fmla="val 12726"/>
+            </a:avLst>
           </a:prstGeom>
           <a:solidFill>
-            <a:srgbClr val="B85042"/>
+            <a:srgbClr val="FAEAE7"/>
           </a:solidFill>
-          <a:ln/>
-        </p:spPr>
-      </p:sp>
-      <p:sp>
-        <p:nvSpPr>
-          <p:cNvPr id="5" name="Text 3"/>
-          <p:cNvSpPr txBox="1"/>
-          <p:nvPr/>
-        </p:nvSpPr>
-        <p:spPr>
-          <a:xfrm>
-            <a:off x="566928" y="1499616"/>
-            <a:ext cx="274320" cy="274320"/>
+          <a:ln w="9525">
+            <a:solidFill>
+              <a:srgbClr val="B85042"/>
+            </a:solidFill>
+            <a:prstDash val="solid"/>
+          </a:ln>
+        </p:spPr>
+      </p:sp>
+      <p:sp>
+        <p:nvSpPr>
+          <p:cNvPr id="10" name="Text 8"/>
+          <p:cNvSpPr txBox="1"/>
+          <p:nvPr/>
+        </p:nvSpPr>
+        <p:spPr>
+          <a:xfrm>
+            <a:off x="658368" y="3741293"/>
+            <a:ext cx="237744" cy="237744"/>
           </a:xfrm>
           <a:prstGeom prst="rect">
             <a:avLst/>
@@ -9209,30 +10589,30 @@
               <a:buNone/>
             </a:pPr>
             <a:r>
-              <a:rPr lang="en-US" sz="1100" b="1" dirty="0">
-                <a:solidFill>
-                  <a:srgbClr val="FFFFFF"/>
-                </a:solidFill>
-                <a:latin typeface="Calibri" pitchFamily="34" charset="0"/>
-                <a:ea typeface="Calibri" pitchFamily="34" charset="-122"/>
-                <a:cs typeface="Calibri" pitchFamily="34" charset="-120"/>
-              </a:rPr>
-              <a:t>1</a:t>
-            </a:r>
-            <a:endParaRPr lang="en-US" sz="1100" dirty="0"/>
-          </a:p>
-        </p:txBody>
-      </p:sp>
-      <p:sp>
-        <p:nvSpPr>
-          <p:cNvPr id="6" name="Text 4"/>
-          <p:cNvSpPr txBox="1"/>
-          <p:nvPr/>
-        </p:nvSpPr>
-        <p:spPr>
-          <a:xfrm>
-            <a:off x="969264" y="1481328"/>
-            <a:ext cx="6025896" cy="365760"/>
+              <a:rPr lang="en-US" sz="1200" b="1" dirty="0">
+                <a:solidFill>
+                  <a:srgbClr val="B85042"/>
+                </a:solidFill>
+                <a:latin typeface="Calibri" pitchFamily="34" charset="0"/>
+                <a:ea typeface="Calibri" pitchFamily="34" charset="-122"/>
+                <a:cs typeface="Calibri" pitchFamily="34" charset="-120"/>
+              </a:rPr>
+              <a:t>i</a:t>
+            </a:r>
+            <a:endParaRPr lang="en-US" sz="1200" dirty="0"/>
+          </a:p>
+        </p:txBody>
+      </p:sp>
+      <p:sp>
+        <p:nvSpPr>
+          <p:cNvPr id="11" name="Text 9"/>
+          <p:cNvSpPr txBox="1"/>
+          <p:nvPr/>
+        </p:nvSpPr>
+        <p:spPr>
+          <a:xfrm>
+            <a:off x="950976" y="3759581"/>
+            <a:ext cx="5925312" cy="248221"/>
           </a:xfrm>
           <a:prstGeom prst="rect">
             <a:avLst/>
@@ -9246,72 +10626,62 @@
           <a:p>
             <a:pPr indent="0" marL="0">
               <a:lnSpc>
-                <a:spcPct val="125000"/>
-              </a:lnSpc>
-              <a:buNone/>
-            </a:pPr>
-            <a:r>
-              <a:rPr lang="en-US" sz="1150" b="1" dirty="0">
-                <a:solidFill>
-                  <a:srgbClr val="222222"/>
-                </a:solidFill>
-                <a:latin typeface="Calibri" pitchFamily="34" charset="0"/>
-                <a:ea typeface="Calibri" pitchFamily="34" charset="-122"/>
-                <a:cs typeface="Calibri" pitchFamily="34" charset="-120"/>
-              </a:rPr>
-              <a:t>渡す景品</a:t>
-            </a:r>
-            <a:pPr indent="0" marL="0">
-              <a:lnSpc>
-                <a:spcPct val="125000"/>
-              </a:lnSpc>
-              <a:buNone/>
-            </a:pPr>
-            <a:r>
-              <a:rPr lang="en-US" sz="1150" dirty="0">
-                <a:solidFill>
-                  <a:srgbClr val="222222"/>
-                </a:solidFill>
-                <a:latin typeface="Calibri" pitchFamily="34" charset="0"/>
-                <a:ea typeface="Calibri" pitchFamily="34" charset="-122"/>
-                <a:cs typeface="Calibri" pitchFamily="34" charset="-120"/>
-              </a:rPr>
-              <a:t>を選ぶ</a:t>
-            </a:r>
-            <a:endParaRPr lang="en-US" sz="1150" dirty="0"/>
-          </a:p>
-        </p:txBody>
-      </p:sp>
-      <p:sp>
-        <p:nvSpPr>
-          <p:cNvPr id="7" name="Shape 5"/>
+                <a:spcPct val="120000"/>
+              </a:lnSpc>
+              <a:buNone/>
+            </a:pPr>
+            <a:r>
+              <a:rPr lang="en-US" sz="1050" dirty="0">
+                <a:solidFill>
+                  <a:srgbClr val="222222"/>
+                </a:solidFill>
+                <a:latin typeface="Calibri" pitchFamily="34" charset="0"/>
+                <a:ea typeface="Calibri" pitchFamily="34" charset="-122"/>
+                <a:cs typeface="Calibri" pitchFamily="34" charset="-120"/>
+              </a:rPr>
+              <a:t>画面には、その方が回答したブースの数も出ます。目安としてご覧ください。</a:t>
+            </a:r>
+            <a:endParaRPr lang="en-US" sz="1050" dirty="0"/>
+          </a:p>
+        </p:txBody>
+      </p:sp>
+      <p:sp>
+        <p:nvSpPr>
+          <p:cNvPr id="12" name="Shape 10"/>
           <p:cNvSpPr/>
           <p:nvPr/>
         </p:nvSpPr>
         <p:spPr>
           <a:xfrm>
-            <a:off x="566928" y="1956816"/>
-            <a:ext cx="274320" cy="274320"/>
-          </a:xfrm>
-          <a:prstGeom prst="ellipse">
-            <a:avLst/>
+            <a:off x="566928" y="4154107"/>
+            <a:ext cx="6428232" cy="624459"/>
+          </a:xfrm>
+          <a:prstGeom prst="roundRect">
+            <a:avLst>
+              <a:gd name="adj" fmla="val 8786"/>
+            </a:avLst>
           </a:prstGeom>
           <a:solidFill>
-            <a:srgbClr val="B85042"/>
+            <a:srgbClr val="FDF0E6"/>
           </a:solidFill>
-          <a:ln/>
-        </p:spPr>
-      </p:sp>
-      <p:sp>
-        <p:nvSpPr>
-          <p:cNvPr id="8" name="Text 6"/>
-          <p:cNvSpPr txBox="1"/>
-          <p:nvPr/>
-        </p:nvSpPr>
-        <p:spPr>
-          <a:xfrm>
-            <a:off x="566928" y="1956816"/>
-            <a:ext cx="274320" cy="274320"/>
+          <a:ln w="9525">
+            <a:solidFill>
+              <a:srgbClr val="E08A3C"/>
+            </a:solidFill>
+            <a:prstDash val="solid"/>
+          </a:ln>
+        </p:spPr>
+      </p:sp>
+      <p:sp>
+        <p:nvSpPr>
+          <p:cNvPr id="13" name="Text 11"/>
+          <p:cNvSpPr txBox="1"/>
+          <p:nvPr/>
+        </p:nvSpPr>
+        <p:spPr>
+          <a:xfrm>
+            <a:off x="658368" y="4245547"/>
+            <a:ext cx="237744" cy="237744"/>
           </a:xfrm>
           <a:prstGeom prst="rect">
             <a:avLst/>
@@ -9327,30 +10697,30 @@
               <a:buNone/>
             </a:pPr>
             <a:r>
-              <a:rPr lang="en-US" sz="1100" b="1" dirty="0">
-                <a:solidFill>
-                  <a:srgbClr val="FFFFFF"/>
-                </a:solidFill>
-                <a:latin typeface="Calibri" pitchFamily="34" charset="0"/>
-                <a:ea typeface="Calibri" pitchFamily="34" charset="-122"/>
-                <a:cs typeface="Calibri" pitchFamily="34" charset="-120"/>
-              </a:rPr>
-              <a:t>2</a:t>
-            </a:r>
-            <a:endParaRPr lang="en-US" sz="1100" dirty="0"/>
-          </a:p>
-        </p:txBody>
-      </p:sp>
-      <p:sp>
-        <p:nvSpPr>
-          <p:cNvPr id="9" name="Text 7"/>
-          <p:cNvSpPr txBox="1"/>
-          <p:nvPr/>
-        </p:nvSpPr>
-        <p:spPr>
-          <a:xfrm>
-            <a:off x="969264" y="1938528"/>
-            <a:ext cx="6025896" cy="365760"/>
+              <a:rPr lang="en-US" sz="1200" b="1" dirty="0">
+                <a:solidFill>
+                  <a:srgbClr val="C25A17"/>
+                </a:solidFill>
+                <a:latin typeface="Calibri" pitchFamily="34" charset="0"/>
+                <a:ea typeface="Calibri" pitchFamily="34" charset="-122"/>
+                <a:cs typeface="Calibri" pitchFamily="34" charset="-120"/>
+              </a:rPr>
+              <a:t>！</a:t>
+            </a:r>
+            <a:endParaRPr lang="en-US" sz="1200" dirty="0"/>
+          </a:p>
+        </p:txBody>
+      </p:sp>
+      <p:sp>
+        <p:nvSpPr>
+          <p:cNvPr id="14" name="Text 12"/>
+          <p:cNvSpPr txBox="1"/>
+          <p:nvPr/>
+        </p:nvSpPr>
+        <p:spPr>
+          <a:xfrm>
+            <a:off x="950976" y="4263835"/>
+            <a:ext cx="5925312" cy="441579"/>
           </a:xfrm>
           <a:prstGeom prst="rect">
             <a:avLst/>
@@ -9364,424 +10734,28 @@
           <a:p>
             <a:pPr indent="0" marL="0">
               <a:lnSpc>
-                <a:spcPct val="125000"/>
-              </a:lnSpc>
-              <a:buNone/>
-            </a:pPr>
-            <a:r>
-              <a:rPr lang="en-US" sz="1150" dirty="0">
-                <a:solidFill>
-                  <a:srgbClr val="222222"/>
-                </a:solidFill>
-                <a:latin typeface="Calibri" pitchFamily="34" charset="0"/>
-                <a:ea typeface="Calibri" pitchFamily="34" charset="-122"/>
-                <a:cs typeface="Calibri" pitchFamily="34" charset="-120"/>
-              </a:rPr>
-              <a:t>必要ならメモ欄に記入する（例：在庫切れのため別の景品に変更）</a:t>
-            </a:r>
-            <a:endParaRPr lang="en-US" sz="1150" dirty="0"/>
-          </a:p>
-        </p:txBody>
-      </p:sp>
-      <p:sp>
-        <p:nvSpPr>
-          <p:cNvPr id="10" name="Shape 8"/>
-          <p:cNvSpPr/>
-          <p:nvPr/>
-        </p:nvSpPr>
-        <p:spPr>
-          <a:xfrm>
-            <a:off x="566928" y="2414016"/>
-            <a:ext cx="274320" cy="274320"/>
-          </a:xfrm>
-          <a:prstGeom prst="ellipse">
-            <a:avLst/>
-          </a:prstGeom>
-          <a:solidFill>
-            <a:srgbClr val="B85042"/>
-          </a:solidFill>
-          <a:ln/>
-        </p:spPr>
-      </p:sp>
-      <p:sp>
-        <p:nvSpPr>
-          <p:cNvPr id="11" name="Text 9"/>
-          <p:cNvSpPr txBox="1"/>
-          <p:nvPr/>
-        </p:nvSpPr>
-        <p:spPr>
-          <a:xfrm>
-            <a:off x="566928" y="2414016"/>
-            <a:ext cx="274320" cy="274320"/>
-          </a:xfrm>
-          <a:prstGeom prst="rect">
-            <a:avLst/>
-          </a:prstGeom>
-          <a:noFill/>
-          <a:ln/>
-        </p:spPr>
-        <p:txBody>
-          <a:bodyPr wrap="square" lIns="0" tIns="0" rIns="0" bIns="0" rtlCol="0" anchor="ctr"/>
-          <a:lstStyle/>
-          <a:p>
-            <a:pPr algn="ctr" indent="0" marL="0">
-              <a:buNone/>
-            </a:pPr>
-            <a:r>
-              <a:rPr lang="en-US" sz="1100" b="1" dirty="0">
-                <a:solidFill>
-                  <a:srgbClr val="FFFFFF"/>
-                </a:solidFill>
-                <a:latin typeface="Calibri" pitchFamily="34" charset="0"/>
-                <a:ea typeface="Calibri" pitchFamily="34" charset="-122"/>
-                <a:cs typeface="Calibri" pitchFamily="34" charset="-120"/>
-              </a:rPr>
-              <a:t>3</a:t>
-            </a:r>
-            <a:endParaRPr lang="en-US" sz="1100" dirty="0"/>
-          </a:p>
-        </p:txBody>
-      </p:sp>
-      <p:sp>
-        <p:nvSpPr>
-          <p:cNvPr id="12" name="Text 10"/>
-          <p:cNvSpPr txBox="1"/>
-          <p:nvPr/>
-        </p:nvSpPr>
-        <p:spPr>
-          <a:xfrm>
-            <a:off x="969264" y="2395728"/>
-            <a:ext cx="6025896" cy="365760"/>
-          </a:xfrm>
-          <a:prstGeom prst="rect">
-            <a:avLst/>
-          </a:prstGeom>
-          <a:noFill/>
-          <a:ln/>
-        </p:spPr>
-        <p:txBody>
-          <a:bodyPr wrap="square" lIns="0" tIns="0" rIns="0" bIns="0" rtlCol="0" anchor="t"/>
-          <a:lstStyle/>
-          <a:p>
-            <a:pPr indent="0" marL="0">
-              <a:lnSpc>
-                <a:spcPct val="125000"/>
-              </a:lnSpc>
-              <a:buNone/>
-            </a:pPr>
-            <a:r>
-              <a:rPr lang="en-US" sz="1150" b="1" dirty="0">
-                <a:solidFill>
-                  <a:srgbClr val="222222"/>
-                </a:solidFill>
-                <a:latin typeface="Calibri" pitchFamily="34" charset="0"/>
-                <a:ea typeface="Calibri" pitchFamily="34" charset="-122"/>
-                <a:cs typeface="Calibri" pitchFamily="34" charset="-120"/>
-              </a:rPr>
-              <a:t>「交換済みにする」</a:t>
-            </a:r>
-            <a:pPr indent="0" marL="0">
-              <a:lnSpc>
-                <a:spcPct val="125000"/>
-              </a:lnSpc>
-              <a:buNone/>
-            </a:pPr>
-            <a:r>
-              <a:rPr lang="en-US" sz="1150" dirty="0">
-                <a:solidFill>
-                  <a:srgbClr val="222222"/>
-                </a:solidFill>
-                <a:latin typeface="Calibri" pitchFamily="34" charset="0"/>
-                <a:ea typeface="Calibri" pitchFamily="34" charset="-122"/>
-                <a:cs typeface="Calibri" pitchFamily="34" charset="-120"/>
-              </a:rPr>
-              <a:t>を押す</a:t>
-            </a:r>
-            <a:endParaRPr lang="en-US" sz="1150" dirty="0"/>
-          </a:p>
-        </p:txBody>
-      </p:sp>
-      <p:sp>
-        <p:nvSpPr>
-          <p:cNvPr id="13" name="Shape 11"/>
-          <p:cNvSpPr/>
-          <p:nvPr/>
-        </p:nvSpPr>
-        <p:spPr>
-          <a:xfrm>
-            <a:off x="566928" y="2871216"/>
-            <a:ext cx="274320" cy="274320"/>
-          </a:xfrm>
-          <a:prstGeom prst="ellipse">
-            <a:avLst/>
-          </a:prstGeom>
-          <a:solidFill>
-            <a:srgbClr val="B85042"/>
-          </a:solidFill>
-          <a:ln/>
-        </p:spPr>
-      </p:sp>
-      <p:sp>
-        <p:nvSpPr>
-          <p:cNvPr id="14" name="Text 12"/>
-          <p:cNvSpPr txBox="1"/>
-          <p:nvPr/>
-        </p:nvSpPr>
-        <p:spPr>
-          <a:xfrm>
-            <a:off x="566928" y="2871216"/>
-            <a:ext cx="274320" cy="274320"/>
-          </a:xfrm>
-          <a:prstGeom prst="rect">
-            <a:avLst/>
-          </a:prstGeom>
-          <a:noFill/>
-          <a:ln/>
-        </p:spPr>
-        <p:txBody>
-          <a:bodyPr wrap="square" lIns="0" tIns="0" rIns="0" bIns="0" rtlCol="0" anchor="ctr"/>
-          <a:lstStyle/>
-          <a:p>
-            <a:pPr algn="ctr" indent="0" marL="0">
-              <a:buNone/>
-            </a:pPr>
-            <a:r>
-              <a:rPr lang="en-US" sz="1100" b="1" dirty="0">
-                <a:solidFill>
-                  <a:srgbClr val="FFFFFF"/>
-                </a:solidFill>
-                <a:latin typeface="Calibri" pitchFamily="34" charset="0"/>
-                <a:ea typeface="Calibri" pitchFamily="34" charset="-122"/>
-                <a:cs typeface="Calibri" pitchFamily="34" charset="-120"/>
-              </a:rPr>
-              <a:t>4</a:t>
-            </a:r>
-            <a:endParaRPr lang="en-US" sz="1100" dirty="0"/>
-          </a:p>
-        </p:txBody>
-      </p:sp>
-      <p:sp>
-        <p:nvSpPr>
-          <p:cNvPr id="15" name="Text 13"/>
-          <p:cNvSpPr txBox="1"/>
-          <p:nvPr/>
-        </p:nvSpPr>
-        <p:spPr>
-          <a:xfrm>
-            <a:off x="969264" y="2852928"/>
-            <a:ext cx="6025896" cy="365760"/>
-          </a:xfrm>
-          <a:prstGeom prst="rect">
-            <a:avLst/>
-          </a:prstGeom>
-          <a:noFill/>
-          <a:ln/>
-        </p:spPr>
-        <p:txBody>
-          <a:bodyPr wrap="square" lIns="0" tIns="0" rIns="0" bIns="0" rtlCol="0" anchor="t"/>
-          <a:lstStyle/>
-          <a:p>
-            <a:pPr indent="0" marL="0">
-              <a:lnSpc>
-                <a:spcPct val="125000"/>
-              </a:lnSpc>
-              <a:buNone/>
-            </a:pPr>
-            <a:r>
-              <a:rPr lang="en-US" sz="1150" dirty="0">
-                <a:solidFill>
-                  <a:srgbClr val="222222"/>
-                </a:solidFill>
-                <a:latin typeface="Calibri" pitchFamily="34" charset="0"/>
-                <a:ea typeface="Calibri" pitchFamily="34" charset="-122"/>
-                <a:cs typeface="Calibri" pitchFamily="34" charset="-120"/>
-              </a:rPr>
-              <a:t>確認のメッセージが出たら「OK」を押す</a:t>
-            </a:r>
-            <a:endParaRPr lang="en-US" sz="1150" dirty="0"/>
-          </a:p>
-        </p:txBody>
-      </p:sp>
-      <p:sp>
-        <p:nvSpPr>
-          <p:cNvPr id="16" name="Shape 14"/>
-          <p:cNvSpPr/>
-          <p:nvPr/>
-        </p:nvSpPr>
-        <p:spPr>
-          <a:xfrm>
-            <a:off x="566928" y="3328416"/>
-            <a:ext cx="274320" cy="274320"/>
-          </a:xfrm>
-          <a:prstGeom prst="ellipse">
-            <a:avLst/>
-          </a:prstGeom>
-          <a:solidFill>
-            <a:srgbClr val="B85042"/>
-          </a:solidFill>
-          <a:ln/>
-        </p:spPr>
-      </p:sp>
-      <p:sp>
-        <p:nvSpPr>
-          <p:cNvPr id="17" name="Text 15"/>
-          <p:cNvSpPr txBox="1"/>
-          <p:nvPr/>
-        </p:nvSpPr>
-        <p:spPr>
-          <a:xfrm>
-            <a:off x="566928" y="3328416"/>
-            <a:ext cx="274320" cy="274320"/>
-          </a:xfrm>
-          <a:prstGeom prst="rect">
-            <a:avLst/>
-          </a:prstGeom>
-          <a:noFill/>
-          <a:ln/>
-        </p:spPr>
-        <p:txBody>
-          <a:bodyPr wrap="square" lIns="0" tIns="0" rIns="0" bIns="0" rtlCol="0" anchor="ctr"/>
-          <a:lstStyle/>
-          <a:p>
-            <a:pPr algn="ctr" indent="0" marL="0">
-              <a:buNone/>
-            </a:pPr>
-            <a:r>
-              <a:rPr lang="en-US" sz="1100" b="1" dirty="0">
-                <a:solidFill>
-                  <a:srgbClr val="FFFFFF"/>
-                </a:solidFill>
-                <a:latin typeface="Calibri" pitchFamily="34" charset="0"/>
-                <a:ea typeface="Calibri" pitchFamily="34" charset="-122"/>
-                <a:cs typeface="Calibri" pitchFamily="34" charset="-120"/>
-              </a:rPr>
-              <a:t>5</a:t>
-            </a:r>
-            <a:endParaRPr lang="en-US" sz="1100" dirty="0"/>
-          </a:p>
-        </p:txBody>
-      </p:sp>
-      <p:sp>
-        <p:nvSpPr>
-          <p:cNvPr id="18" name="Text 16"/>
-          <p:cNvSpPr txBox="1"/>
-          <p:nvPr/>
-        </p:nvSpPr>
-        <p:spPr>
-          <a:xfrm>
-            <a:off x="969264" y="3310128"/>
-            <a:ext cx="6025896" cy="365760"/>
-          </a:xfrm>
-          <a:prstGeom prst="rect">
-            <a:avLst/>
-          </a:prstGeom>
-          <a:noFill/>
-          <a:ln/>
-        </p:spPr>
-        <p:txBody>
-          <a:bodyPr wrap="square" lIns="0" tIns="0" rIns="0" bIns="0" rtlCol="0" anchor="t"/>
-          <a:lstStyle/>
-          <a:p>
-            <a:pPr indent="0" marL="0">
-              <a:lnSpc>
-                <a:spcPct val="125000"/>
-              </a:lnSpc>
-              <a:buNone/>
-            </a:pPr>
-            <a:r>
-              <a:rPr lang="en-US" sz="1150" dirty="0">
-                <a:solidFill>
-                  <a:srgbClr val="222222"/>
-                </a:solidFill>
-                <a:latin typeface="Calibri" pitchFamily="34" charset="0"/>
-                <a:ea typeface="Calibri" pitchFamily="34" charset="-122"/>
-                <a:cs typeface="Calibri" pitchFamily="34" charset="-120"/>
-              </a:rPr>
-              <a:t>「交換済みとして記録しました（景品名） 残数 ◯個」と出れば完了</a:t>
-            </a:r>
-            <a:endParaRPr lang="en-US" sz="1150" dirty="0"/>
-          </a:p>
-        </p:txBody>
-      </p:sp>
-      <p:sp>
-        <p:nvSpPr>
-          <p:cNvPr id="19" name="Text 17"/>
-          <p:cNvSpPr txBox="1"/>
-          <p:nvPr/>
-        </p:nvSpPr>
-        <p:spPr>
-          <a:xfrm>
-            <a:off x="566928" y="3767328"/>
-            <a:ext cx="6428232" cy="459994"/>
-          </a:xfrm>
-          <a:prstGeom prst="rect">
-            <a:avLst/>
-          </a:prstGeom>
-          <a:noFill/>
-          <a:ln/>
-        </p:spPr>
-        <p:txBody>
-          <a:bodyPr wrap="square" lIns="0" tIns="0" rIns="0" bIns="0" rtlCol="0" anchor="t"/>
-          <a:lstStyle/>
-          <a:p>
-            <a:pPr indent="0" marL="0">
-              <a:lnSpc>
-                <a:spcPct val="125000"/>
-              </a:lnSpc>
-              <a:buNone/>
-            </a:pPr>
-            <a:r>
-              <a:rPr lang="en-US" sz="1100" dirty="0">
-                <a:solidFill>
-                  <a:srgbClr val="222222"/>
-                </a:solidFill>
-                <a:latin typeface="Calibri" pitchFamily="34" charset="0"/>
-                <a:ea typeface="Calibri" pitchFamily="34" charset="-122"/>
-                <a:cs typeface="Calibri" pitchFamily="34" charset="-120"/>
-              </a:rPr>
-              <a:t>次の方を対応するときは、</a:t>
-            </a:r>
-            <a:pPr indent="0" marL="0">
-              <a:lnSpc>
-                <a:spcPct val="125000"/>
-              </a:lnSpc>
-              <a:buNone/>
-            </a:pPr>
-            <a:r>
-              <a:rPr lang="en-US" sz="1100" b="1" dirty="0">
-                <a:solidFill>
-                  <a:srgbClr val="222222"/>
-                </a:solidFill>
-                <a:latin typeface="Calibri" pitchFamily="34" charset="0"/>
-                <a:ea typeface="Calibri" pitchFamily="34" charset="-122"/>
-                <a:cs typeface="Calibri" pitchFamily="34" charset="-120"/>
-              </a:rPr>
-              <a:t>「次の来場者を照会する」</a:t>
-            </a:r>
-            <a:pPr indent="0" marL="0">
-              <a:lnSpc>
-                <a:spcPct val="125000"/>
-              </a:lnSpc>
-              <a:buNone/>
-            </a:pPr>
-            <a:r>
-              <a:rPr lang="en-US" sz="1100" dirty="0">
-                <a:solidFill>
-                  <a:srgbClr val="222222"/>
-                </a:solidFill>
-                <a:latin typeface="Calibri" pitchFamily="34" charset="0"/>
-                <a:ea typeface="Calibri" pitchFamily="34" charset="-122"/>
-                <a:cs typeface="Calibri" pitchFamily="34" charset="-120"/>
-              </a:rPr>
-              <a:t>を押してから、またQRコードを読み取ってください。</a:t>
-            </a:r>
-            <a:endParaRPr lang="en-US" sz="1100" dirty="0"/>
+                <a:spcPct val="120000"/>
+              </a:lnSpc>
+              <a:buNone/>
+            </a:pPr>
+            <a:r>
+              <a:rPr lang="en-US" sz="1050" dirty="0">
+                <a:solidFill>
+                  <a:srgbClr val="222222"/>
+                </a:solidFill>
+                <a:latin typeface="Calibri" pitchFamily="34" charset="0"/>
+                <a:ea typeface="Calibri" pitchFamily="34" charset="-122"/>
+                <a:cs typeface="Calibri" pitchFamily="34" charset="-120"/>
+              </a:rPr>
+              <a:t>在庫がなくなった景品も選べます。実際にお渡ししたものを記録することを優先してください（あとで用意した数を超えた分が分かるようになっています）。</a:t>
+            </a:r>
+            <a:endParaRPr lang="en-US" sz="1050" dirty="0"/>
           </a:p>
         </p:txBody>
       </p:sp>
       <p:pic>
         <p:nvPicPr>
-          <p:cNvPr id="20" name="Image 0" descr="C:\Users\sato\Desktop\enque\docs\images\p-claim-saved.png">    </p:cNvPr>
+          <p:cNvPr id="15" name="Image 0" descr="C:\Users\sato\Desktop\enque\docs\images\p-claim-open.png">    </p:cNvPr>
           <p:cNvPicPr>
             <a:picLocks noChangeAspect="1"/>
           </p:cNvPicPr>
@@ -9795,8 +10769,8 @@
         </p:blipFill>
         <p:spPr>
           <a:xfrm>
-            <a:off x="566928" y="4263898"/>
-            <a:ext cx="6428232" cy="2870972"/>
+            <a:off x="2632342" y="4851718"/>
+            <a:ext cx="2297403" cy="3474720"/>
           </a:xfrm>
           <a:prstGeom prst="rect">
             <a:avLst/>
@@ -9805,13 +10779,13 @@
       </p:pic>
       <p:sp>
         <p:nvSpPr>
-          <p:cNvPr id="21" name="Text 18"/>
-          <p:cNvSpPr txBox="1"/>
-          <p:nvPr/>
-        </p:nvSpPr>
-        <p:spPr>
-          <a:xfrm>
-            <a:off x="566928" y="7189734"/>
+          <p:cNvPr id="16" name="Text 13"/>
+          <p:cNvSpPr txBox="1"/>
+          <p:nvPr/>
+        </p:nvSpPr>
+        <p:spPr>
+          <a:xfrm>
+            <a:off x="566928" y="8381302"/>
             <a:ext cx="6428232" cy="274320"/>
           </a:xfrm>
           <a:prstGeom prst="rect">
@@ -9836,7 +10810,7 @@
                 <a:ea typeface="Calibri" pitchFamily="34" charset="-122"/>
                 <a:cs typeface="Calibri" pitchFamily="34" charset="-120"/>
               </a:rPr>
-              <a:t>「交換済みとして記録しました」のメッセージが出ている画面。</a:t>
+              <a:t>照会結果の画面。「未交換です」の表示と、景品を選ぶプルダウン（残りの数が見えるもの）。</a:t>
             </a:r>
             <a:endParaRPr lang="en-US" sz="950" dirty="0"/>
           </a:p>
@@ -9844,7 +10818,7 @@
       </p:sp>
       <p:sp>
         <p:nvSpPr>
-          <p:cNvPr id="22" name="Text 19"/>
+          <p:cNvPr id="17" name="Text 14"/>
           <p:cNvSpPr txBox="1"/>
           <p:nvPr/>
         </p:nvSpPr>
